--- a/blocks/E_autonomy_logic/M17_yolo_vision/M17_Camera_YOLO_Vision_Node.pptx
+++ b/blocks/E_autonomy_logic/M17_yolo_vision/M17_Camera_YOLO_Vision_Node.pptx
@@ -29,6 +29,7 @@
     <p:sldId id="277" r:id="rId29"/>
     <p:sldId id="278" r:id="rId30"/>
     <p:sldId id="279" r:id="rId31"/>
+    <p:sldId id="280" r:id="rId32"/>
   </p:sldIdLst>
   <p:sldSz cx="12191999" cy="6858000" type="screen4x3"/>
   <p:notesSz cx="6858000" cy="9144000"/>
@@ -795,7 +796,7 @@
           <a:lstStyle/>
           <a:p>
             <a:r>
-              <a:t>[설명] ~/agv_ws/src/agv_vision/agv_vision/yolo_node.py의 전체 파일을 1/4 구간으로 작성한다.</a:t>
+              <a:t>[설명] ~/agv_ws/src/agv_vision/agv_vision/yolo_node.py의 전체 파일을 1/5 구간으로 작성한다.</a:t>
             </a:r>
           </a:p>
           <a:p>
@@ -885,7 +886,7 @@
           <a:lstStyle/>
           <a:p>
             <a:r>
-              <a:t>[설명] ~/agv_ws/src/agv_vision/agv_vision/yolo_node.py의 전체 파일을 2/4 구간으로 작성한다.</a:t>
+              <a:t>[설명] ~/agv_ws/src/agv_vision/agv_vision/yolo_node.py의 전체 파일을 2/5 구간으로 작성한다.</a:t>
             </a:r>
           </a:p>
           <a:p>
@@ -975,7 +976,7 @@
           <a:lstStyle/>
           <a:p>
             <a:r>
-              <a:t>[설명] ~/agv_ws/src/agv_vision/agv_vision/yolo_node.py의 전체 파일을 3/4 구간으로 작성한다.</a:t>
+              <a:t>[설명] ~/agv_ws/src/agv_vision/agv_vision/yolo_node.py의 전체 파일을 3/5 구간으로 작성한다.</a:t>
             </a:r>
           </a:p>
           <a:p>
@@ -1065,7 +1066,7 @@
           <a:lstStyle/>
           <a:p>
             <a:r>
-              <a:t>[설명] ~/agv_ws/src/agv_vision/agv_vision/yolo_node.py의 전체 파일을 4/4 구간으로 작성한다.</a:t>
+              <a:t>[설명] ~/agv_ws/src/agv_vision/agv_vision/yolo_node.py의 전체 파일을 4/5 구간으로 작성한다.</a:t>
             </a:r>
           </a:p>
           <a:p>
@@ -1155,12 +1156,12 @@
           <a:lstStyle/>
           <a:p>
             <a:r>
-              <a:t>[설명] ~/agv_ws/src/agv_bringup/config/vision.yaml의 전체 파일을 1/1 구간으로 작성한다.</a:t>
-            </a:r>
-          </a:p>
-          <a:p>
-            <a:r>
-              <a:t>[실행] nano ~/agv_ws/src/agv_bringup/config/vision.yaml</a:t>
+              <a:t>[설명] ~/agv_ws/src/agv_vision/agv_vision/yolo_node.py의 전체 파일을 5/5 구간으로 작성한다.</a:t>
+            </a:r>
+          </a:p>
+          <a:p>
+            <a:r>
+              <a:t>[실행] nano ~/agv_ws/src/agv_vision/agv_vision/yolo_node.py</a:t>
             </a:r>
           </a:p>
           <a:p>
@@ -1245,12 +1246,12 @@
           <a:lstStyle/>
           <a:p>
             <a:r>
-              <a:t>[설명] ~/agv_ws/src/agv_vision/setup.py의 전체 파일을 1/1 구간으로 작성한다.</a:t>
-            </a:r>
-          </a:p>
-          <a:p>
-            <a:r>
-              <a:t>[실행] nano ~/agv_ws/src/agv_vision/setup.py</a:t>
+              <a:t>[설명] ~/agv_ws/src/agv_bringup/config/vision.yaml의 전체 파일을 1/1 구간으로 작성한다.</a:t>
+            </a:r>
+          </a:p>
+          <a:p>
+            <a:r>
+              <a:t>[실행] nano ~/agv_ws/src/agv_bringup/config/vision.yaml</a:t>
             </a:r>
           </a:p>
           <a:p>
@@ -1335,22 +1336,17 @@
           <a:lstStyle/>
           <a:p>
             <a:r>
-              <a:t>[설명] build/source/run을 생략 없이 실행한다.</a:t>
-            </a:r>
-          </a:p>
-          <a:p>
-            <a:r>
-              <a:t>[실행] source ~/agv_ws/install/setup.bash</a:t>
-            </a:r>
-          </a:p>
-          <a:p>
-            <a:r>
-              <a:t>ros2 run agv_vision yolo_node --ros-args -p enable_yolo:=false</a:t>
-            </a:r>
-          </a:p>
-          <a:p>
-            <a:r>
-              <a:t>[확인] /detections message 형식과 YOLO enable_yolo/model_path/threshold parameter를 확인한다.</a:t>
+              <a:t>[설명] ~/agv_ws/src/agv_vision/setup.py의 전체 파일을 1/1 구간으로 작성한다.</a:t>
+            </a:r>
+          </a:p>
+          <a:p>
+            <a:r>
+              <a:t>[실행] nano ~/agv_ws/src/agv_vision/setup.py</a:t>
+            </a:r>
+          </a:p>
+          <a:p>
+            <a:r>
+              <a:t>[확인] 코드를 저장하고 다음 코드 슬라이드 또는 build 단계로 이동한다.</a:t>
             </a:r>
           </a:p>
           <a:p>
@@ -1360,7 +1356,7 @@
           </a:p>
           <a:p>
             <a:r>
-              <a:t>[오류] 오류가 나면 현재 폴더, source, 파일 경로를 먼저 확인한다.</a:t>
+              <a:t>[오류] 들여쓰기·XML 태그·따옴표가 슬라이드와 정확히 같은지 확인한다.</a:t>
             </a:r>
           </a:p>
         </p:txBody>
@@ -1430,17 +1426,22 @@
           <a:lstStyle/>
           <a:p>
             <a:r>
-              <a:t>[설명] 실제 Ubuntu/ROS 2 환경에서 생성한 검증 화면이다.</a:t>
-            </a:r>
-          </a:p>
-          <a:p>
-            <a:r>
-              <a:t>[실행] 슬라이드의 명령 또는 파일 작성 단계를 진행한다.</a:t>
-            </a:r>
-          </a:p>
-          <a:p>
-            <a:r>
-              <a:t>[확인] 캡처의 명령과 다음 슬라이드의 검증 명령을 비교한다.</a:t>
+              <a:t>[설명] build/source/run을 생략 없이 실행한다.</a:t>
+            </a:r>
+          </a:p>
+          <a:p>
+            <a:r>
+              <a:t>[실행] source ~/agv_ws/install/setup.bash</a:t>
+            </a:r>
+          </a:p>
+          <a:p>
+            <a:r>
+              <a:t>ros2 run agv_vision yolo_node --ros-args -p enable_yolo:=false</a:t>
+            </a:r>
+          </a:p>
+          <a:p>
+            <a:r>
+              <a:t>[확인] /detections message 형식과 YOLO enable_yolo/model_path/threshold parameter를 확인한다.</a:t>
             </a:r>
           </a:p>
           <a:p>
@@ -1610,27 +1611,17 @@
           <a:lstStyle/>
           <a:p>
             <a:r>
-              <a:t>[설명] 검증 명령은 GUI 결과와 별도로 실행해 재현 가능한 완료 기준을 만든다.</a:t>
-            </a:r>
-          </a:p>
-          <a:p>
-            <a:r>
-              <a:t>[실행] ros2 interface show agv_interfaces/msg/Detection</a:t>
-            </a:r>
-          </a:p>
-          <a:p>
-            <a:r>
-              <a:t>ros2 topic info /detections</a:t>
-            </a:r>
-          </a:p>
-          <a:p>
-            <a:r>
-              <a:t>ros2 param get /yolo_node confidence_threshold</a:t>
-            </a:r>
-          </a:p>
-          <a:p>
-            <a:r>
-              <a:t>[확인] /detections message 형식과 YOLO enable_yolo/model_path/threshold parameter를 확인한다.</a:t>
+              <a:t>[설명] 실제 Ubuntu/ROS 2 환경에서 생성한 검증 화면이다.</a:t>
+            </a:r>
+          </a:p>
+          <a:p>
+            <a:r>
+              <a:t>[실행] 슬라이드의 명령 또는 파일 작성 단계를 진행한다.</a:t>
+            </a:r>
+          </a:p>
+          <a:p>
+            <a:r>
+              <a:t>[확인] 캡처의 명령과 다음 슬라이드의 검증 명령을 비교한다.</a:t>
             </a:r>
           </a:p>
           <a:p>
@@ -1710,17 +1701,27 @@
           <a:lstStyle/>
           <a:p>
             <a:r>
-              <a:t>[설명] 오류를 대신 해결하지 말고 증상부터 우선 확인 순서대로 교육생이 실행하게 한다.</a:t>
-            </a:r>
-          </a:p>
-          <a:p>
-            <a:r>
-              <a:t>[실행] 슬라이드의 명령 또는 파일 작성 단계를 진행한다.</a:t>
-            </a:r>
-          </a:p>
-          <a:p>
-            <a:r>
-              <a:t>[확인] 수정 뒤 첫 검증 명령을 다시 실행한다.</a:t>
+              <a:t>[설명] 검증 명령은 GUI 결과와 별도로 실행해 재현 가능한 완료 기준을 만든다.</a:t>
+            </a:r>
+          </a:p>
+          <a:p>
+            <a:r>
+              <a:t>[실행] ros2 interface show agv_interfaces/msg/Detection</a:t>
+            </a:r>
+          </a:p>
+          <a:p>
+            <a:r>
+              <a:t>ros2 topic info /detections</a:t>
+            </a:r>
+          </a:p>
+          <a:p>
+            <a:r>
+              <a:t>ros2 param get /yolo_node confidence_threshold</a:t>
+            </a:r>
+          </a:p>
+          <a:p>
+            <a:r>
+              <a:t>[확인] /detections message 형식과 YOLO enable_yolo/model_path/threshold parameter를 확인한다.</a:t>
             </a:r>
           </a:p>
           <a:p>
@@ -1730,7 +1731,7 @@
           </a:p>
           <a:p>
             <a:r>
-              <a:t>[오류] 슬라이드의 두 대표 오류를 먼저 사용한다.</a:t>
+              <a:t>[오류] 오류가 나면 현재 폴더, source, 파일 경로를 먼저 확인한다.</a:t>
             </a:r>
           </a:p>
         </p:txBody>
@@ -1800,7 +1801,7 @@
           <a:lstStyle/>
           <a:p>
             <a:r>
-              <a:t>[설명] 교육생이 직접 한 값만 바꿔 원인과 결과를 연결하게 한다.</a:t>
+              <a:t>[설명] 오류를 대신 해결하지 말고 증상부터 우선 확인 순서대로 교육생이 실행하게 한다.</a:t>
             </a:r>
           </a:p>
           <a:p>
@@ -1810,7 +1811,7 @@
           </a:p>
           <a:p>
             <a:r>
-              <a:t>[확인] 원래 값과 변경 값을 모두 기록한다.</a:t>
+              <a:t>[확인] 수정 뒤 첫 검증 명령을 다시 실행한다.</a:t>
             </a:r>
           </a:p>
           <a:p>
@@ -1820,7 +1821,7 @@
           </a:p>
           <a:p>
             <a:r>
-              <a:t>[오류] 오류가 나면 현재 폴더, source, 파일 경로를 먼저 확인한다.</a:t>
+              <a:t>[오류] 슬라이드의 두 대표 오류를 먼저 사용한다.</a:t>
             </a:r>
           </a:p>
         </p:txBody>
@@ -1890,7 +1891,7 @@
           <a:lstStyle/>
           <a:p>
             <a:r>
-              <a:t>[설명] 교육생이 Complete·캡처·로그를 저장했는지 확인하고 다음 모듈의 시작 상태를 읽는다.</a:t>
+              <a:t>[설명] 교육생이 직접 한 값만 바꿔 원인과 결과를 연결하게 한다.</a:t>
             </a:r>
           </a:p>
           <a:p>
@@ -1900,7 +1901,7 @@
           </a:p>
           <a:p>
             <a:r>
-              <a:t>[확인] M18 safety fusion 시작 조건을 말할 수 있다.</a:t>
+              <a:t>[확인] 원래 값과 변경 값을 모두 기록한다.</a:t>
             </a:r>
           </a:p>
           <a:p>
@@ -1936,6 +1937,96 @@
 </file>
 
 <file path=ppt/notesSlides/notesSlide24.xml><?xml version="1.0" encoding="utf-8"?>
+<p:notes xmlns:a="http://schemas.openxmlformats.org/drawingml/2006/main" xmlns:p="http://schemas.openxmlformats.org/presentationml/2006/main" xmlns:r="http://schemas.openxmlformats.org/officeDocument/2006/relationships">
+  <p:cSld>
+    <p:spTree>
+      <p:nvGrpSpPr>
+        <p:cNvPr id="1" name=""/>
+        <p:cNvGrpSpPr/>
+        <p:nvPr/>
+      </p:nvGrpSpPr>
+      <p:grpSpPr>
+        <a:xfrm>
+          <a:off x="0" y="0"/>
+          <a:ext cx="0" cy="0"/>
+          <a:chOff x="0" y="0"/>
+          <a:chExt cx="0" cy="0"/>
+        </a:xfrm>
+      </p:grpSpPr>
+      <p:sp>
+        <p:nvSpPr>
+          <p:cNvPr id="2" name="Slide Image Placeholder 1"/>
+          <p:cNvSpPr>
+            <a:spLocks noGrp="1"/>
+          </p:cNvSpPr>
+          <p:nvPr>
+            <p:ph type="sldImg" idx="2"/>
+          </p:nvPr>
+        </p:nvSpPr>
+        <p:spPr/>
+      </p:sp>
+      <p:sp>
+        <p:nvSpPr>
+          <p:cNvPr id="3" name="Notes Placeholder 2"/>
+          <p:cNvSpPr>
+            <a:spLocks noGrp="1"/>
+          </p:cNvSpPr>
+          <p:nvPr>
+            <p:ph type="body" idx="3" sz="quarter"/>
+          </p:nvPr>
+        </p:nvSpPr>
+        <p:spPr/>
+        <p:txBody>
+          <a:bodyPr/>
+          <a:lstStyle/>
+          <a:p>
+            <a:r>
+              <a:t>[설명] 교육생이 Complete·캡처·로그를 저장했는지 확인하고 다음 모듈의 시작 상태를 읽는다.</a:t>
+            </a:r>
+          </a:p>
+          <a:p>
+            <a:r>
+              <a:t>[실행] 슬라이드의 명령 또는 파일 작성 단계를 진행한다.</a:t>
+            </a:r>
+          </a:p>
+          <a:p>
+            <a:r>
+              <a:t>[확인] M18 safety fusion 시작 조건을 말할 수 있다.</a:t>
+            </a:r>
+          </a:p>
+          <a:p>
+            <a:r>
+              <a:t>[멈춤] 교육생이 현재 체크포인트를 통과할 때까지 기다린다.</a:t>
+            </a:r>
+          </a:p>
+          <a:p>
+            <a:r>
+              <a:t>[오류] 오류가 나면 현재 폴더, source, 파일 경로를 먼저 확인한다.</a:t>
+            </a:r>
+          </a:p>
+        </p:txBody>
+      </p:sp>
+      <p:sp>
+        <p:nvSpPr>
+          <p:cNvPr id="4" name="Slide Number Placeholder 3"/>
+          <p:cNvSpPr>
+            <a:spLocks noGrp="1"/>
+          </p:cNvSpPr>
+          <p:nvPr>
+            <p:ph type="sldNum" idx="5" sz="quarter"/>
+          </p:nvPr>
+        </p:nvSpPr>
+        <p:spPr/>
+      </p:sp>
+    </p:spTree>
+  </p:cSld>
+  <p:clrMapOvr>
+    <a:masterClrMapping/>
+  </p:clrMapOvr>
+</p:notes>
+</file>
+
+<file path=ppt/notesSlides/notesSlide25.xml><?xml version="1.0" encoding="utf-8"?>
 <p:notes xmlns:a="http://schemas.openxmlformats.org/drawingml/2006/main" xmlns:p="http://schemas.openxmlformats.org/presentationml/2006/main" xmlns:r="http://schemas.openxmlformats.org/officeDocument/2006/relationships">
   <p:cSld>
     <p:spTree>
@@ -6216,8 +6307,8 @@
         </p:nvSpPr>
         <p:spPr>
           <a:xfrm>
-            <a:off x="658368" y="1682496"/>
-            <a:ext cx="10972800" cy="347472"/>
+            <a:off x="658368" y="1627632"/>
+            <a:ext cx="10972800" cy="256032"/>
           </a:xfrm>
           <a:prstGeom prst="rect">
             <a:avLst/>
@@ -6234,7 +6325,7 @@
               <a:spcAft>
                 <a:spcPts val="0"/>
               </a:spcAft>
-              <a:defRPr sz="1700" b="1">
+              <a:defRPr sz="1500" b="1">
                 <a:solidFill>
                   <a:srgbClr val="122C4E"/>
                 </a:solidFill>
@@ -6255,8 +6346,8 @@
         </p:nvSpPr>
         <p:spPr>
           <a:xfrm>
-            <a:off x="658368" y="2103120"/>
-            <a:ext cx="10972800" cy="493776"/>
+            <a:off x="658368" y="1956816"/>
+            <a:ext cx="10972800" cy="603504"/>
           </a:xfrm>
           <a:prstGeom prst="rect">
             <a:avLst/>
@@ -6300,7 +6391,11 @@
               </a:defRPr>
             </a:pPr>
             <a:r>
-              <a:t>파일 생성/열기: mkdir -p ~/agv_ws/src/agv_interfaces/msg    &amp;&amp;    nano ~/agv_ws/src/agv_interfaces/msg/DetectionArray.msg</a:t>
+              <a:t>파일 생성: mkdir -p ~/agv_ws/src/agv_interfaces/msg</a:t>
+            </a:r>
+            <a:br/>
+            <a:r>
+              <a:t>파일 열기: nano ~/agv_ws/src/agv_interfaces/msg/DetectionArray.msg</a:t>
             </a:r>
           </a:p>
         </p:txBody>
@@ -6313,8 +6408,8 @@
         </p:nvSpPr>
         <p:spPr>
           <a:xfrm>
-            <a:off x="658368" y="2761488"/>
-            <a:ext cx="10972800" cy="3383280"/>
+            <a:off x="658368" y="2706624"/>
+            <a:ext cx="10972800" cy="3364992"/>
           </a:xfrm>
           <a:prstGeom prst="rect">
             <a:avLst/>
@@ -6375,7 +6470,7 @@
         </p:nvSpPr>
         <p:spPr>
           <a:xfrm>
-            <a:off x="749808" y="6199632"/>
+            <a:off x="749808" y="6181344"/>
             <a:ext cx="10789920" cy="201168"/>
           </a:xfrm>
           <a:prstGeom prst="rect">
@@ -6646,8 +6741,8 @@
         </p:nvSpPr>
         <p:spPr>
           <a:xfrm>
-            <a:off x="658368" y="1682496"/>
-            <a:ext cx="10972800" cy="347472"/>
+            <a:off x="658368" y="1627632"/>
+            <a:ext cx="10972800" cy="256032"/>
           </a:xfrm>
           <a:prstGeom prst="rect">
             <a:avLst/>
@@ -6664,7 +6759,7 @@
               <a:spcAft>
                 <a:spcPts val="0"/>
               </a:spcAft>
-              <a:defRPr sz="1700" b="1">
+              <a:defRPr sz="1500" b="1">
                 <a:solidFill>
                   <a:srgbClr val="122C4E"/>
                 </a:solidFill>
@@ -6685,8 +6780,8 @@
         </p:nvSpPr>
         <p:spPr>
           <a:xfrm>
-            <a:off x="658368" y="2103120"/>
-            <a:ext cx="10972800" cy="493776"/>
+            <a:off x="658368" y="1956816"/>
+            <a:ext cx="10972800" cy="603504"/>
           </a:xfrm>
           <a:prstGeom prst="rect">
             <a:avLst/>
@@ -6730,7 +6825,11 @@
               </a:defRPr>
             </a:pPr>
             <a:r>
-              <a:t>파일 생성/열기: mkdir -p ~/agv_ws/src/agv_interfaces    &amp;&amp;    nano ~/agv_ws/src/agv_interfaces/CMakeLists.txt</a:t>
+              <a:t>파일 생성: mkdir -p ~/agv_ws/src/agv_interfaces</a:t>
+            </a:r>
+            <a:br/>
+            <a:r>
+              <a:t>파일 열기: nano ~/agv_ws/src/agv_interfaces/CMakeLists.txt</a:t>
             </a:r>
           </a:p>
         </p:txBody>
@@ -6743,8 +6842,8 @@
         </p:nvSpPr>
         <p:spPr>
           <a:xfrm>
-            <a:off x="658368" y="2761488"/>
-            <a:ext cx="10972800" cy="3383280"/>
+            <a:off x="658368" y="2706624"/>
+            <a:ext cx="10972800" cy="3364992"/>
           </a:xfrm>
           <a:prstGeom prst="rect">
             <a:avLst/>
@@ -6829,7 +6928,7 @@
         </p:nvSpPr>
         <p:spPr>
           <a:xfrm>
-            <a:off x="749808" y="6199632"/>
+            <a:off x="749808" y="6181344"/>
             <a:ext cx="10789920" cy="201168"/>
           </a:xfrm>
           <a:prstGeom prst="rect">
@@ -6912,7 +7011,7 @@
               </a:defRPr>
             </a:pPr>
             <a:r>
-              <a:t>파일을 새로 만들고 저장한다 (1/4)</a:t>
+              <a:t>파일을 새로 만들고 저장한다 (1/5)</a:t>
             </a:r>
           </a:p>
         </p:txBody>
@@ -7087,7 +7186,7 @@
               </a:defRPr>
             </a:pPr>
             <a:r>
-              <a:t>현재 단계 6/10    |    현재 폴더 ~/agv_ws    |    현재 터미널</a:t>
+              <a:t>현재 단계 6/11    |    현재 폴더 ~/agv_ws    |    현재 터미널</a:t>
             </a:r>
           </a:p>
         </p:txBody>
@@ -7100,8 +7199,8 @@
         </p:nvSpPr>
         <p:spPr>
           <a:xfrm>
-            <a:off x="658368" y="1682496"/>
-            <a:ext cx="10972800" cy="347472"/>
+            <a:off x="658368" y="1627632"/>
+            <a:ext cx="10972800" cy="256032"/>
           </a:xfrm>
           <a:prstGeom prst="rect">
             <a:avLst/>
@@ -7118,7 +7217,7 @@
               <a:spcAft>
                 <a:spcPts val="0"/>
               </a:spcAft>
-              <a:defRPr sz="1700" b="1">
+              <a:defRPr sz="1500" b="1">
                 <a:solidFill>
                   <a:srgbClr val="122C4E"/>
                 </a:solidFill>
@@ -7139,8 +7238,8 @@
         </p:nvSpPr>
         <p:spPr>
           <a:xfrm>
-            <a:off x="658368" y="2103120"/>
-            <a:ext cx="10972800" cy="493776"/>
+            <a:off x="658368" y="1956816"/>
+            <a:ext cx="10972800" cy="603504"/>
           </a:xfrm>
           <a:prstGeom prst="rect">
             <a:avLst/>
@@ -7184,7 +7283,11 @@
               </a:defRPr>
             </a:pPr>
             <a:r>
-              <a:t>파일 생성/열기: mkdir -p ~/agv_ws/src/agv_vision/agv_vision    &amp;&amp;    nano ~/agv_ws/src/agv_vision/agv_vision/yolo_node.py</a:t>
+              <a:t>파일 생성: mkdir -p ~/agv_ws/src/agv_vision/agv_vision</a:t>
+            </a:r>
+            <a:br/>
+            <a:r>
+              <a:t>파일 열기: nano ~/agv_ws/src/agv_vision/agv_vision/yolo_node.py</a:t>
             </a:r>
           </a:p>
         </p:txBody>
@@ -7197,8 +7300,8 @@
         </p:nvSpPr>
         <p:spPr>
           <a:xfrm>
-            <a:off x="658368" y="2761488"/>
-            <a:ext cx="10972800" cy="3383280"/>
+            <a:off x="658368" y="2706624"/>
+            <a:ext cx="10972800" cy="3364992"/>
           </a:xfrm>
           <a:prstGeom prst="rect">
             <a:avLst/>
@@ -7282,14 +7385,6 @@
             <a:r>
               <a:t>        self.declare_parameter('model_path', 'yolo11n.pt')</a:t>
             </a:r>
-            <a:br/>
-            <a:r>
-              <a:t>        self.declare_parameter('confidence_threshold', 0.5)</a:t>
-            </a:r>
-            <a:br/>
-            <a:r>
-              <a:t>        self.declare_parameter('enable_yolo', False)</a:t>
-            </a:r>
           </a:p>
         </p:txBody>
       </p:sp>
@@ -7301,7 +7396,7 @@
         </p:nvSpPr>
         <p:spPr>
           <a:xfrm>
-            <a:off x="749808" y="6199632"/>
+            <a:off x="749808" y="6181344"/>
             <a:ext cx="10789920" cy="201168"/>
           </a:xfrm>
           <a:prstGeom prst="rect">
@@ -7327,7 +7422,7 @@
               </a:defRPr>
             </a:pPr>
             <a:r>
-              <a:t>파일 전체 1/4 · 이 슬라이드 다음에 같은 파일의 나머지 줄이 이어집니다.</a:t>
+              <a:t>파일 전체 1/5 · 이 슬라이드 다음에 같은 파일의 나머지 줄이 이어집니다.</a:t>
             </a:r>
           </a:p>
         </p:txBody>
@@ -7384,7 +7479,7 @@
               </a:defRPr>
             </a:pPr>
             <a:r>
-              <a:t>파일을 계속 작성하고 저장한다 (2/4)</a:t>
+              <a:t>파일을 계속 작성하고 저장한다 (2/5)</a:t>
             </a:r>
           </a:p>
         </p:txBody>
@@ -7559,7 +7654,7 @@
               </a:defRPr>
             </a:pPr>
             <a:r>
-              <a:t>현재 단계 7/10    |    현재 폴더 ~/agv_ws    |    현재 터미널</a:t>
+              <a:t>현재 단계 7/11    |    현재 폴더 ~/agv_ws    |    현재 터미널</a:t>
             </a:r>
           </a:p>
         </p:txBody>
@@ -7572,8 +7667,8 @@
         </p:nvSpPr>
         <p:spPr>
           <a:xfrm>
-            <a:off x="658368" y="1682496"/>
-            <a:ext cx="10972800" cy="347472"/>
+            <a:off x="658368" y="1627632"/>
+            <a:ext cx="10972800" cy="256032"/>
           </a:xfrm>
           <a:prstGeom prst="rect">
             <a:avLst/>
@@ -7590,7 +7685,7 @@
               <a:spcAft>
                 <a:spcPts val="0"/>
               </a:spcAft>
-              <a:defRPr sz="1700" b="1">
+              <a:defRPr sz="1500" b="1">
                 <a:solidFill>
                   <a:srgbClr val="122C4E"/>
                 </a:solidFill>
@@ -7611,8 +7706,8 @@
         </p:nvSpPr>
         <p:spPr>
           <a:xfrm>
-            <a:off x="658368" y="2103120"/>
-            <a:ext cx="10972800" cy="493776"/>
+            <a:off x="658368" y="1956816"/>
+            <a:ext cx="10972800" cy="603504"/>
           </a:xfrm>
           <a:prstGeom prst="rect">
             <a:avLst/>
@@ -7656,7 +7751,11 @@
               </a:defRPr>
             </a:pPr>
             <a:r>
-              <a:t>파일 생성/열기: mkdir -p ~/agv_ws/src/agv_vision/agv_vision    &amp;&amp;    nano ~/agv_ws/src/agv_vision/agv_vision/yolo_node.py</a:t>
+              <a:t>파일 생성: mkdir -p ~/agv_ws/src/agv_vision/agv_vision</a:t>
+            </a:r>
+            <a:br/>
+            <a:r>
+              <a:t>파일 열기: nano ~/agv_ws/src/agv_vision/agv_vision/yolo_node.py</a:t>
             </a:r>
           </a:p>
         </p:txBody>
@@ -7669,8 +7768,8 @@
         </p:nvSpPr>
         <p:spPr>
           <a:xfrm>
-            <a:off x="658368" y="2761488"/>
-            <a:ext cx="10972800" cy="3383280"/>
+            <a:off x="658368" y="2706624"/>
+            <a:ext cx="10972800" cy="3364992"/>
           </a:xfrm>
           <a:prstGeom prst="rect">
             <a:avLst/>
@@ -7714,6 +7813,14 @@
               </a:defRPr>
             </a:pPr>
             <a:r>
+              <a:t>        self.declare_parameter('confidence_threshold', 0.5)</a:t>
+            </a:r>
+            <a:br/>
+            <a:r>
+              <a:t>        self.declare_parameter('enable_yolo', False)</a:t>
+            </a:r>
+            <a:br/>
+            <a:r>
               <a:t>        self.bridge = CvBridge()</a:t>
             </a:r>
             <a:br/>
@@ -7751,19 +7858,6 @@
             <a:br/>
             <a:r>
               <a:t>                self.get_logger().info('YOLO model loaded')</a:t>
-            </a:r>
-            <a:br/>
-            <a:r>
-              <a:t>            except ImportError:</a:t>
-            </a:r>
-            <a:br/>
-            <a:r>
-              <a:t>                self.get_logger().error('ultralytics is not installed: follow M17 before enable_yolo:=true')</a:t>
-            </a:r>
-            <a:br/>
-            <a:br/>
-            <a:r>
-              <a:t>    def callback(self, image_message):</a:t>
             </a:r>
           </a:p>
         </p:txBody>
@@ -7776,7 +7870,7 @@
         </p:nvSpPr>
         <p:spPr>
           <a:xfrm>
-            <a:off x="749808" y="6199632"/>
+            <a:off x="749808" y="6181344"/>
             <a:ext cx="10789920" cy="201168"/>
           </a:xfrm>
           <a:prstGeom prst="rect">
@@ -7802,7 +7896,7 @@
               </a:defRPr>
             </a:pPr>
             <a:r>
-              <a:t>파일 전체 2/4 · 이 슬라이드 다음에 같은 파일의 나머지 줄이 이어집니다.</a:t>
+              <a:t>파일 전체 2/5 · 이 슬라이드 다음에 같은 파일의 나머지 줄이 이어집니다.</a:t>
             </a:r>
           </a:p>
         </p:txBody>
@@ -7859,7 +7953,7 @@
               </a:defRPr>
             </a:pPr>
             <a:r>
-              <a:t>파일을 계속 작성하고 저장한다 (3/4)</a:t>
+              <a:t>파일을 계속 작성하고 저장한다 (3/5)</a:t>
             </a:r>
           </a:p>
         </p:txBody>
@@ -8034,7 +8128,7 @@
               </a:defRPr>
             </a:pPr>
             <a:r>
-              <a:t>현재 단계 8/10    |    현재 폴더 ~/agv_ws    |    현재 터미널</a:t>
+              <a:t>현재 단계 8/11    |    현재 폴더 ~/agv_ws    |    현재 터미널</a:t>
             </a:r>
           </a:p>
         </p:txBody>
@@ -8047,8 +8141,8 @@
         </p:nvSpPr>
         <p:spPr>
           <a:xfrm>
-            <a:off x="658368" y="1682496"/>
-            <a:ext cx="10972800" cy="347472"/>
+            <a:off x="658368" y="1627632"/>
+            <a:ext cx="10972800" cy="256032"/>
           </a:xfrm>
           <a:prstGeom prst="rect">
             <a:avLst/>
@@ -8065,7 +8159,7 @@
               <a:spcAft>
                 <a:spcPts val="0"/>
               </a:spcAft>
-              <a:defRPr sz="1700" b="1">
+              <a:defRPr sz="1500" b="1">
                 <a:solidFill>
                   <a:srgbClr val="122C4E"/>
                 </a:solidFill>
@@ -8086,8 +8180,8 @@
         </p:nvSpPr>
         <p:spPr>
           <a:xfrm>
-            <a:off x="658368" y="2103120"/>
-            <a:ext cx="10972800" cy="493776"/>
+            <a:off x="658368" y="1956816"/>
+            <a:ext cx="10972800" cy="603504"/>
           </a:xfrm>
           <a:prstGeom prst="rect">
             <a:avLst/>
@@ -8131,7 +8225,11 @@
               </a:defRPr>
             </a:pPr>
             <a:r>
-              <a:t>파일 생성/열기: mkdir -p ~/agv_ws/src/agv_vision/agv_vision    &amp;&amp;    nano ~/agv_ws/src/agv_vision/agv_vision/yolo_node.py</a:t>
+              <a:t>파일 생성: mkdir -p ~/agv_ws/src/agv_vision/agv_vision</a:t>
+            </a:r>
+            <a:br/>
+            <a:r>
+              <a:t>파일 열기: nano ~/agv_ws/src/agv_vision/agv_vision/yolo_node.py</a:t>
             </a:r>
           </a:p>
         </p:txBody>
@@ -8144,8 +8242,8 @@
         </p:nvSpPr>
         <p:spPr>
           <a:xfrm>
-            <a:off x="658368" y="2761488"/>
-            <a:ext cx="10972800" cy="3383280"/>
+            <a:off x="658368" y="2706624"/>
+            <a:ext cx="10972800" cy="3364992"/>
           </a:xfrm>
           <a:prstGeom prst="rect">
             <a:avLst/>
@@ -8189,6 +8287,19 @@
               </a:defRPr>
             </a:pPr>
             <a:r>
+              <a:t>            except ImportError:</a:t>
+            </a:r>
+            <a:br/>
+            <a:r>
+              <a:t>                self.get_logger().error('ultralytics is not installed: follow M17 before enable_yolo:=true')</a:t>
+            </a:r>
+            <a:br/>
+            <a:br/>
+            <a:r>
+              <a:t>    def callback(self, image_message):</a:t>
+            </a:r>
+            <a:br/>
+            <a:r>
               <a:t>        output = DetectionArray(header=image_message.header)</a:t>
             </a:r>
             <a:br/>
@@ -8218,30 +8329,6 @@
             <a:br/>
             <a:r>
               <a:t>                if confidence &lt; threshold:</a:t>
-            </a:r>
-            <a:br/>
-            <a:r>
-              <a:t>                    continue</a:t>
-            </a:r>
-            <a:br/>
-            <a:r>
-              <a:t>                x1, y1, x2, y2 = [int(value) for value in box.xyxy[0].tolist()]</a:t>
-            </a:r>
-            <a:br/>
-            <a:r>
-              <a:t>                detection = Detection(header=image_message.header,</a:t>
-            </a:r>
-            <a:br/>
-            <a:r>
-              <a:t>                    class_name=result.names[int(box.cls[0])], confidence=confidence,</a:t>
-            </a:r>
-            <a:br/>
-            <a:r>
-              <a:t>                    center_x=(x1 + x2) // 2, center_y=(y1 + y2) // 2, width=x2 - x1,</a:t>
-            </a:r>
-            <a:br/>
-            <a:r>
-              <a:t>                    height=y2 - y1, estimated_distance=0.0)</a:t>
             </a:r>
           </a:p>
         </p:txBody>
@@ -8254,7 +8341,7 @@
         </p:nvSpPr>
         <p:spPr>
           <a:xfrm>
-            <a:off x="749808" y="6199632"/>
+            <a:off x="749808" y="6181344"/>
             <a:ext cx="10789920" cy="201168"/>
           </a:xfrm>
           <a:prstGeom prst="rect">
@@ -8280,7 +8367,7 @@
               </a:defRPr>
             </a:pPr>
             <a:r>
-              <a:t>파일 전체 3/4 · 이 슬라이드 다음에 같은 파일의 나머지 줄이 이어집니다.</a:t>
+              <a:t>파일 전체 3/5 · 이 슬라이드 다음에 같은 파일의 나머지 줄이 이어집니다.</a:t>
             </a:r>
           </a:p>
         </p:txBody>
@@ -8337,7 +8424,7 @@
               </a:defRPr>
             </a:pPr>
             <a:r>
-              <a:t>파일을 계속 작성하고 저장한다 (4/4)</a:t>
+              <a:t>파일을 계속 작성하고 저장한다 (4/5)</a:t>
             </a:r>
           </a:p>
         </p:txBody>
@@ -8512,7 +8599,7 @@
               </a:defRPr>
             </a:pPr>
             <a:r>
-              <a:t>현재 단계 9/10    |    현재 폴더 ~/agv_ws    |    현재 터미널</a:t>
+              <a:t>현재 단계 9/11    |    현재 폴더 ~/agv_ws    |    현재 터미널</a:t>
             </a:r>
           </a:p>
         </p:txBody>
@@ -8525,8 +8612,8 @@
         </p:nvSpPr>
         <p:spPr>
           <a:xfrm>
-            <a:off x="658368" y="1682496"/>
-            <a:ext cx="10972800" cy="347472"/>
+            <a:off x="658368" y="1627632"/>
+            <a:ext cx="10972800" cy="256032"/>
           </a:xfrm>
           <a:prstGeom prst="rect">
             <a:avLst/>
@@ -8543,7 +8630,7 @@
               <a:spcAft>
                 <a:spcPts val="0"/>
               </a:spcAft>
-              <a:defRPr sz="1700" b="1">
+              <a:defRPr sz="1500" b="1">
                 <a:solidFill>
                   <a:srgbClr val="122C4E"/>
                 </a:solidFill>
@@ -8564,8 +8651,8 @@
         </p:nvSpPr>
         <p:spPr>
           <a:xfrm>
-            <a:off x="658368" y="2103120"/>
-            <a:ext cx="10972800" cy="493776"/>
+            <a:off x="658368" y="1956816"/>
+            <a:ext cx="10972800" cy="603504"/>
           </a:xfrm>
           <a:prstGeom prst="rect">
             <a:avLst/>
@@ -8609,7 +8696,11 @@
               </a:defRPr>
             </a:pPr>
             <a:r>
-              <a:t>파일 생성/열기: mkdir -p ~/agv_ws/src/agv_vision/agv_vision    &amp;&amp;    nano ~/agv_ws/src/agv_vision/agv_vision/yolo_node.py</a:t>
+              <a:t>파일 생성: mkdir -p ~/agv_ws/src/agv_vision/agv_vision</a:t>
+            </a:r>
+            <a:br/>
+            <a:r>
+              <a:t>파일 열기: nano ~/agv_ws/src/agv_vision/agv_vision/yolo_node.py</a:t>
             </a:r>
           </a:p>
         </p:txBody>
@@ -8622,8 +8713,8 @@
         </p:nvSpPr>
         <p:spPr>
           <a:xfrm>
-            <a:off x="658368" y="2761488"/>
-            <a:ext cx="10972800" cy="3383280"/>
+            <a:off x="658368" y="2706624"/>
+            <a:ext cx="10972800" cy="3364992"/>
           </a:xfrm>
           <a:prstGeom prst="rect">
             <a:avLst/>
@@ -8667,6 +8758,30 @@
               </a:defRPr>
             </a:pPr>
             <a:r>
+              <a:t>                    continue</a:t>
+            </a:r>
+            <a:br/>
+            <a:r>
+              <a:t>                x1, y1, x2, y2 = [int(value) for value in box.xyxy[0].tolist()]</a:t>
+            </a:r>
+            <a:br/>
+            <a:r>
+              <a:t>                detection = Detection(header=image_message.header,</a:t>
+            </a:r>
+            <a:br/>
+            <a:r>
+              <a:t>                    class_name=result.names[int(box.cls[0])], confidence=confidence,</a:t>
+            </a:r>
+            <a:br/>
+            <a:r>
+              <a:t>                    center_x=(x1 + x2) // 2, center_y=(y1 + y2) // 2, width=x2 - x1,</a:t>
+            </a:r>
+            <a:br/>
+            <a:r>
+              <a:t>                    height=y2 - y1, estimated_distance=0.0)</a:t>
+            </a:r>
+            <a:br/>
+            <a:r>
               <a:t>                output.detections.append(detection)</a:t>
             </a:r>
             <a:br/>
@@ -8686,38 +8801,6 @@
             <a:r>
               <a:t>    node = YoloNode()</a:t>
             </a:r>
-            <a:br/>
-            <a:r>
-              <a:t>    try:</a:t>
-            </a:r>
-            <a:br/>
-            <a:r>
-              <a:t>        rclpy.spin(node)</a:t>
-            </a:r>
-            <a:br/>
-            <a:r>
-              <a:t>    except KeyboardInterrupt:</a:t>
-            </a:r>
-            <a:br/>
-            <a:r>
-              <a:t>        pass</a:t>
-            </a:r>
-            <a:br/>
-            <a:r>
-              <a:t>    finally:</a:t>
-            </a:r>
-            <a:br/>
-            <a:r>
-              <a:t>        node.destroy_node()</a:t>
-            </a:r>
-            <a:br/>
-            <a:r>
-              <a:t>        if rclpy.ok():</a:t>
-            </a:r>
-            <a:br/>
-            <a:r>
-              <a:t>            rclpy.shutdown()</a:t>
-            </a:r>
           </a:p>
         </p:txBody>
       </p:sp>
@@ -8729,7 +8812,7 @@
         </p:nvSpPr>
         <p:spPr>
           <a:xfrm>
-            <a:off x="749808" y="6199632"/>
+            <a:off x="749808" y="6181344"/>
             <a:ext cx="10789920" cy="201168"/>
           </a:xfrm>
           <a:prstGeom prst="rect">
@@ -8755,7 +8838,7 @@
               </a:defRPr>
             </a:pPr>
             <a:r>
-              <a:t>파일 전체 4/4 · 이 슬라이드 다음에 같은 파일의 나머지 줄이 이어집니다.</a:t>
+              <a:t>파일 전체 4/5 · 이 슬라이드 다음에 같은 파일의 나머지 줄이 이어집니다.</a:t>
             </a:r>
           </a:p>
         </p:txBody>
@@ -8812,7 +8895,7 @@
               </a:defRPr>
             </a:pPr>
             <a:r>
-              <a:t>파일을 새로 만들고 저장한다 (1/1)</a:t>
+              <a:t>파일을 계속 작성하고 저장한다 (5/5)</a:t>
             </a:r>
           </a:p>
         </p:txBody>
@@ -8851,7 +8934,7 @@
               </a:defRPr>
             </a:pPr>
             <a:r>
-              <a:t>~/agv_ws/src/agv_bringup/config/vision.yaml</a:t>
+              <a:t>~/agv_ws/src/agv_vision/agv_vision/yolo_node.py</a:t>
             </a:r>
           </a:p>
         </p:txBody>
@@ -9000,8 +9083,8 @@
         </p:nvSpPr>
         <p:spPr>
           <a:xfrm>
-            <a:off x="658368" y="1682496"/>
-            <a:ext cx="10972800" cy="347472"/>
+            <a:off x="658368" y="1627632"/>
+            <a:ext cx="10972800" cy="256032"/>
           </a:xfrm>
           <a:prstGeom prst="rect">
             <a:avLst/>
@@ -9018,7 +9101,7 @@
               <a:spcAft>
                 <a:spcPts val="0"/>
               </a:spcAft>
-              <a:defRPr sz="1700" b="1">
+              <a:defRPr sz="1500" b="1">
                 <a:solidFill>
                   <a:srgbClr val="122C4E"/>
                 </a:solidFill>
@@ -9039,8 +9122,8 @@
         </p:nvSpPr>
         <p:spPr>
           <a:xfrm>
-            <a:off x="658368" y="2103120"/>
-            <a:ext cx="10972800" cy="493776"/>
+            <a:off x="658368" y="1956816"/>
+            <a:ext cx="10972800" cy="603504"/>
           </a:xfrm>
           <a:prstGeom prst="rect">
             <a:avLst/>
@@ -9084,7 +9167,11 @@
               </a:defRPr>
             </a:pPr>
             <a:r>
-              <a:t>파일 생성/열기: mkdir -p ~/agv_ws/src/agv_bringup/config    &amp;&amp;    nano ~/agv_ws/src/agv_bringup/config/vision.yaml</a:t>
+              <a:t>파일 생성: mkdir -p ~/agv_ws/src/agv_vision/agv_vision</a:t>
+            </a:r>
+            <a:br/>
+            <a:r>
+              <a:t>파일 열기: nano ~/agv_ws/src/agv_vision/agv_vision/yolo_node.py</a:t>
             </a:r>
           </a:p>
         </p:txBody>
@@ -9097,8 +9184,8 @@
         </p:nvSpPr>
         <p:spPr>
           <a:xfrm>
-            <a:off x="658368" y="2761488"/>
-            <a:ext cx="10972800" cy="3383280"/>
+            <a:off x="658368" y="2706624"/>
+            <a:ext cx="10972800" cy="3364992"/>
           </a:xfrm>
           <a:prstGeom prst="rect">
             <a:avLst/>
@@ -9142,27 +9229,35 @@
               </a:defRPr>
             </a:pPr>
             <a:r>
-              <a:t>yolo_node:</a:t>
+              <a:t>    try:</a:t>
             </a:r>
             <a:br/>
             <a:r>
-              <a:t>  ros__parameters:</a:t>
+              <a:t>        rclpy.spin(node)</a:t>
             </a:r>
             <a:br/>
             <a:r>
-              <a:t>    use_sim_time: true</a:t>
+              <a:t>    except KeyboardInterrupt:</a:t>
             </a:r>
             <a:br/>
             <a:r>
-              <a:t>    enable_yolo: false</a:t>
+              <a:t>        pass</a:t>
             </a:r>
             <a:br/>
             <a:r>
-              <a:t>    model_path: yolo11n.pt</a:t>
+              <a:t>    finally:</a:t>
             </a:r>
             <a:br/>
             <a:r>
-              <a:t>    confidence_threshold: 0.50</a:t>
+              <a:t>        node.destroy_node()</a:t>
+            </a:r>
+            <a:br/>
+            <a:r>
+              <a:t>        if rclpy.ok():</a:t>
+            </a:r>
+            <a:br/>
+            <a:r>
+              <a:t>            rclpy.shutdown()</a:t>
             </a:r>
           </a:p>
         </p:txBody>
@@ -9175,7 +9270,7 @@
         </p:nvSpPr>
         <p:spPr>
           <a:xfrm>
-            <a:off x="749808" y="6199632"/>
+            <a:off x="749808" y="6181344"/>
             <a:ext cx="10789920" cy="201168"/>
           </a:xfrm>
           <a:prstGeom prst="rect">
@@ -9201,7 +9296,7 @@
               </a:defRPr>
             </a:pPr>
             <a:r>
-              <a:t>파일 전체 1/1 · 이 슬라이드 다음에 같은 파일의 나머지 줄이 이어집니다.</a:t>
+              <a:t>파일 전체 5/5 · 이 슬라이드 다음에 같은 파일의 나머지 줄이 이어집니다.</a:t>
             </a:r>
           </a:p>
         </p:txBody>
@@ -9297,7 +9392,7 @@
               </a:defRPr>
             </a:pPr>
             <a:r>
-              <a:t>~/agv_ws/src/agv_vision/setup.py</a:t>
+              <a:t>~/agv_ws/src/agv_bringup/config/vision.yaml</a:t>
             </a:r>
           </a:p>
         </p:txBody>
@@ -9446,8 +9541,8 @@
         </p:nvSpPr>
         <p:spPr>
           <a:xfrm>
-            <a:off x="658368" y="1682496"/>
-            <a:ext cx="10972800" cy="347472"/>
+            <a:off x="658368" y="1627632"/>
+            <a:ext cx="10972800" cy="256032"/>
           </a:xfrm>
           <a:prstGeom prst="rect">
             <a:avLst/>
@@ -9464,7 +9559,7 @@
               <a:spcAft>
                 <a:spcPts val="0"/>
               </a:spcAft>
-              <a:defRPr sz="1700" b="1">
+              <a:defRPr sz="1500" b="1">
                 <a:solidFill>
                   <a:srgbClr val="122C4E"/>
                 </a:solidFill>
@@ -9485,8 +9580,8 @@
         </p:nvSpPr>
         <p:spPr>
           <a:xfrm>
-            <a:off x="658368" y="2103120"/>
-            <a:ext cx="10972800" cy="493776"/>
+            <a:off x="658368" y="1956816"/>
+            <a:ext cx="10972800" cy="603504"/>
           </a:xfrm>
           <a:prstGeom prst="rect">
             <a:avLst/>
@@ -9530,7 +9625,11 @@
               </a:defRPr>
             </a:pPr>
             <a:r>
-              <a:t>파일 생성/열기: mkdir -p ~/agv_ws/src/agv_vision    &amp;&amp;    nano ~/agv_ws/src/agv_vision/setup.py</a:t>
+              <a:t>파일 생성: mkdir -p ~/agv_ws/src/agv_bringup/config</a:t>
+            </a:r>
+            <a:br/>
+            <a:r>
+              <a:t>파일 열기: nano ~/agv_ws/src/agv_bringup/config/vision.yaml</a:t>
             </a:r>
           </a:p>
         </p:txBody>
@@ -9543,8 +9642,8 @@
         </p:nvSpPr>
         <p:spPr>
           <a:xfrm>
-            <a:off x="658368" y="2761488"/>
-            <a:ext cx="10972800" cy="3383280"/>
+            <a:off x="658368" y="2706624"/>
+            <a:ext cx="10972800" cy="3364992"/>
           </a:xfrm>
           <a:prstGeom prst="rect">
             <a:avLst/>
@@ -9588,35 +9687,27 @@
               </a:defRPr>
             </a:pPr>
             <a:r>
-              <a:t>from setuptools import find_packages, setup</a:t>
+              <a:t>yolo_node:</a:t>
             </a:r>
             <a:br/>
             <a:r>
-              <a:t>package_name = 'agv_vision'</a:t>
+              <a:t>  ros__parameters:</a:t>
             </a:r>
             <a:br/>
             <a:r>
-              <a:t>setup(name=package_name, version='0.1.0', packages=find_packages(exclude=['test']),</a:t>
+              <a:t>    use_sim_time: true</a:t>
             </a:r>
             <a:br/>
             <a:r>
-              <a:t>    data_files=[('share/ament_index/resource_index/packages',</a:t>
+              <a:t>    enable_yolo: false</a:t>
             </a:r>
             <a:br/>
             <a:r>
-              <a:t>    ['resource/' + package_name]), ('share/' + package_name, ['package.xml'])],</a:t>
+              <a:t>    model_path: yolo11n.pt</a:t>
             </a:r>
             <a:br/>
             <a:r>
-              <a:t>    install_requires=['setuptools'], zip_safe=True, maintainer='AGV student',</a:t>
-            </a:r>
-            <a:br/>
-            <a:r>
-              <a:t>    maintainer_email='student@example.com', license='Apache-2.0',</a:t>
-            </a:r>
-            <a:br/>
-            <a:r>
-              <a:t>    entry_points={'console_scripts': ['yolo_node = agv_vision.yolo_node:main']})</a:t>
+              <a:t>    confidence_threshold: 0.50</a:t>
             </a:r>
           </a:p>
         </p:txBody>
@@ -9629,7 +9720,7 @@
         </p:nvSpPr>
         <p:spPr>
           <a:xfrm>
-            <a:off x="749808" y="6199632"/>
+            <a:off x="749808" y="6181344"/>
             <a:ext cx="10789920" cy="201168"/>
           </a:xfrm>
           <a:prstGeom prst="rect">
@@ -9712,7 +9803,7 @@
               </a:defRPr>
             </a:pPr>
             <a:r>
-              <a:t>build → source → run 순서로 실행한다</a:t>
+              <a:t>파일을 새로 만들고 저장한다 (1/1)</a:t>
             </a:r>
           </a:p>
         </p:txBody>
@@ -9751,7 +9842,7 @@
               </a:defRPr>
             </a:pPr>
             <a:r>
-              <a:t>새 파일 또는 수정 파일은 build와 source 뒤에만 실행 이름·설정에 반영됩니다.</a:t>
+              <a:t>~/agv_ws/src/agv_vision/setup.py</a:t>
             </a:r>
           </a:p>
         </p:txBody>
@@ -9887,23 +9978,124 @@
               </a:defRPr>
             </a:pPr>
             <a:r>
-              <a:t>현재 단계 실행    |    현재 폴더 ~/agv_ws    |    현재 터미널</a:t>
-            </a:r>
-          </a:p>
-        </p:txBody>
-      </p:sp>
-      <p:sp>
-        <p:nvSpPr>
-          <p:cNvPr id="7" name="Rounded Rectangle 6"/>
+              <a:t>현재 단계 12/13    |    현재 폴더 ~/agv_ws    |    현재 터미널</a:t>
+            </a:r>
+          </a:p>
+        </p:txBody>
+      </p:sp>
+      <p:sp>
+        <p:nvSpPr>
+          <p:cNvPr id="7" name="TextBox 6"/>
+          <p:cNvSpPr txBox="1"/>
+          <p:nvPr/>
+        </p:nvSpPr>
+        <p:spPr>
+          <a:xfrm>
+            <a:off x="658368" y="1627632"/>
+            <a:ext cx="10972800" cy="256032"/>
+          </a:xfrm>
+          <a:prstGeom prst="rect">
+            <a:avLst/>
+          </a:prstGeom>
+          <a:noFill/>
+        </p:spPr>
+        <p:txBody>
+          <a:bodyPr wrap="square" lIns="73152" rIns="73152" tIns="36576" bIns="36576">
+            <a:spAutoFit/>
+          </a:bodyPr>
+          <a:lstStyle/>
+          <a:p>
+            <a:pPr algn="l">
+              <a:spcAft>
+                <a:spcPts val="0"/>
+              </a:spcAft>
+              <a:defRPr sz="1500" b="1">
+                <a:solidFill>
+                  <a:srgbClr val="122C4E"/>
+                </a:solidFill>
+                <a:latin typeface="Noto Sans CJK KR"/>
+              </a:defRPr>
+            </a:pPr>
+            <a:r>
+              <a:t>이번 단계: 파일의 전체 내용을 중간 생략 없이 작성합니다. 아래 줄 범위를 끝까지 입력하세요.</a:t>
+            </a:r>
+          </a:p>
+        </p:txBody>
+      </p:sp>
+      <p:sp>
+        <p:nvSpPr>
+          <p:cNvPr id="8" name="Rectangle 7"/>
           <p:cNvSpPr/>
           <p:nvPr/>
         </p:nvSpPr>
         <p:spPr>
           <a:xfrm>
-            <a:off x="658368" y="1700784"/>
-            <a:ext cx="10972800" cy="3182112"/>
-          </a:xfrm>
-          <a:prstGeom prst="roundRect">
+            <a:off x="658368" y="1956816"/>
+            <a:ext cx="10972800" cy="603504"/>
+          </a:xfrm>
+          <a:prstGeom prst="rect">
+            <a:avLst/>
+          </a:prstGeom>
+          <a:solidFill>
+            <a:srgbClr val="F4F7FB"/>
+          </a:solidFill>
+          <a:ln>
+            <a:solidFill>
+              <a:srgbClr val="F4F7FB"/>
+            </a:solidFill>
+          </a:ln>
+        </p:spPr>
+        <p:style>
+          <a:lnRef idx="1">
+            <a:schemeClr val="accent1"/>
+          </a:lnRef>
+          <a:fillRef idx="3">
+            <a:schemeClr val="accent1"/>
+          </a:fillRef>
+          <a:effectRef idx="2">
+            <a:schemeClr val="accent1"/>
+          </a:effectRef>
+          <a:fontRef idx="minor">
+            <a:schemeClr val="lt1"/>
+          </a:fontRef>
+        </p:style>
+        <p:txBody>
+          <a:bodyPr rtlCol="0" anchor="ctr" wrap="square" lIns="73152" rIns="73152" tIns="36576" bIns="36576"/>
+          <a:lstStyle/>
+          <a:p>
+            <a:pPr algn="l">
+              <a:spcAft>
+                <a:spcPts val="0"/>
+              </a:spcAft>
+              <a:defRPr sz="1400" b="0">
+                <a:solidFill>
+                  <a:srgbClr val="122C4E"/>
+                </a:solidFill>
+                <a:latin typeface="DejaVu Sans Mono"/>
+              </a:defRPr>
+            </a:pPr>
+            <a:r>
+              <a:t>파일 생성: mkdir -p ~/agv_ws/src/agv_vision</a:t>
+            </a:r>
+            <a:br/>
+            <a:r>
+              <a:t>파일 열기: nano ~/agv_ws/src/agv_vision/setup.py</a:t>
+            </a:r>
+          </a:p>
+        </p:txBody>
+      </p:sp>
+      <p:sp>
+        <p:nvSpPr>
+          <p:cNvPr id="9" name="Rectangle 8"/>
+          <p:cNvSpPr/>
+          <p:nvPr/>
+        </p:nvSpPr>
+        <p:spPr>
+          <a:xfrm>
+            <a:off x="658368" y="2706624"/>
+            <a:ext cx="10972800" cy="3364992"/>
+          </a:xfrm>
+          <a:prstGeom prst="rect">
             <a:avLst/>
           </a:prstGeom>
           <a:solidFill>
@@ -9930,14 +10122,14 @@
           </a:fontRef>
         </p:style>
         <p:txBody>
-          <a:bodyPr rtlCol="0" anchor="ctr" wrap="square" lIns="73152" rIns="73152" tIns="36576" bIns="36576"/>
+          <a:bodyPr rtlCol="0" anchor="ctr" wrap="square" lIns="164592" rIns="164592" tIns="109728" bIns="36576"/>
           <a:lstStyle/>
           <a:p>
             <a:pPr algn="l">
               <a:spcAft>
                 <a:spcPts val="0"/>
               </a:spcAft>
-              <a:defRPr sz="1600" b="0">
+              <a:defRPr sz="1400" b="0">
                 <a:solidFill>
                   <a:srgbClr val="FFFFFF"/>
                 </a:solidFill>
@@ -9945,25 +10137,49 @@
               </a:defRPr>
             </a:pPr>
             <a:r>
-              <a:t>source ~/agv_ws/install/setup.bash</a:t>
+              <a:t>from setuptools import find_packages, setup</a:t>
             </a:r>
             <a:br/>
             <a:r>
-              <a:t>ros2 run agv_vision yolo_node --ros-args -p enable_yolo:=false</a:t>
-            </a:r>
-          </a:p>
-        </p:txBody>
-      </p:sp>
-      <p:sp>
-        <p:nvSpPr>
-          <p:cNvPr id="8" name="TextBox 7"/>
+              <a:t>package_name = 'agv_vision'</a:t>
+            </a:r>
+            <a:br/>
+            <a:r>
+              <a:t>setup(name=package_name, version='0.1.0', packages=find_packages(exclude=['test']),</a:t>
+            </a:r>
+            <a:br/>
+            <a:r>
+              <a:t>    data_files=[('share/ament_index/resource_index/packages',</a:t>
+            </a:r>
+            <a:br/>
+            <a:r>
+              <a:t>    ['resource/' + package_name]), ('share/' + package_name, ['package.xml'])],</a:t>
+            </a:r>
+            <a:br/>
+            <a:r>
+              <a:t>    install_requires=['setuptools'], zip_safe=True, maintainer='AGV student',</a:t>
+            </a:r>
+            <a:br/>
+            <a:r>
+              <a:t>    maintainer_email='student@example.com', license='Apache-2.0',</a:t>
+            </a:r>
+            <a:br/>
+            <a:r>
+              <a:t>    entry_points={'console_scripts': ['yolo_node = agv_vision.yolo_node:main']})</a:t>
+            </a:r>
+          </a:p>
+        </p:txBody>
+      </p:sp>
+      <p:sp>
+        <p:nvSpPr>
+          <p:cNvPr id="10" name="TextBox 9"/>
           <p:cNvSpPr txBox="1"/>
           <p:nvPr/>
         </p:nvSpPr>
         <p:spPr>
           <a:xfrm>
-            <a:off x="786384" y="5239512"/>
-            <a:ext cx="1261872" cy="237744"/>
+            <a:off x="749808" y="6181344"/>
+            <a:ext cx="10789920" cy="201168"/>
           </a:xfrm>
           <a:prstGeom prst="rect">
             <a:avLst/>
@@ -9980,54 +10196,15 @@
               <a:spcAft>
                 <a:spcPts val="0"/>
               </a:spcAft>
-              <a:defRPr sz="1800" b="1">
-                <a:solidFill>
-                  <a:srgbClr val="2A8B5A"/>
-                </a:solidFill>
-                <a:latin typeface="Noto Sans CJK KR"/>
-              </a:defRPr>
-            </a:pPr>
-            <a:r>
-              <a:t>확인 기준</a:t>
-            </a:r>
-          </a:p>
-        </p:txBody>
-      </p:sp>
-      <p:sp>
-        <p:nvSpPr>
-          <p:cNvPr id="9" name="TextBox 8"/>
-          <p:cNvSpPr txBox="1"/>
-          <p:nvPr/>
-        </p:nvSpPr>
-        <p:spPr>
-          <a:xfrm>
-            <a:off x="786384" y="5532120"/>
-            <a:ext cx="10469880" cy="420624"/>
-          </a:xfrm>
-          <a:prstGeom prst="rect">
-            <a:avLst/>
-          </a:prstGeom>
-          <a:noFill/>
-        </p:spPr>
-        <p:txBody>
-          <a:bodyPr wrap="square" lIns="73152" rIns="73152" tIns="36576" bIns="36576">
-            <a:spAutoFit/>
-          </a:bodyPr>
-          <a:lstStyle/>
-          <a:p>
-            <a:pPr algn="l">
-              <a:spcAft>
-                <a:spcPts val="0"/>
-              </a:spcAft>
-              <a:defRPr sz="1800" b="0">
-                <a:solidFill>
-                  <a:srgbClr val="122C4E"/>
-                </a:solidFill>
-                <a:latin typeface="Noto Sans CJK KR"/>
-              </a:defRPr>
-            </a:pPr>
-            <a:r>
-              <a:t>/detections message 형식과 YOLO enable_yolo/model_path/threshold parameter를 확인한다.</a:t>
+              <a:defRPr sz="1000" b="0">
+                <a:solidFill>
+                  <a:srgbClr val="5C6672"/>
+                </a:solidFill>
+                <a:latin typeface="Noto Sans CJK KR"/>
+              </a:defRPr>
+            </a:pPr>
+            <a:r>
+              <a:t>파일 전체 1/1 · 이 슬라이드 다음에 같은 파일의 나머지 줄이 이어집니다.</a:t>
             </a:r>
           </a:p>
         </p:txBody>
@@ -10084,7 +10261,7 @@
               </a:defRPr>
             </a:pPr>
             <a:r>
-              <a:t>정상 결과: 실제 환경에서 확인한 출력</a:t>
+              <a:t>build → source → run 순서로 실행한다</a:t>
             </a:r>
           </a:p>
         </p:txBody>
@@ -10123,7 +10300,7 @@
               </a:defRPr>
             </a:pPr>
             <a:r>
-              <a:t>실제 ROS 2 환경의 파일·패키지·구성 검증 로그</a:t>
+              <a:t>새 파일 또는 수정 파일은 build와 source 뒤에만 실행 이름·설정에 반영됩니다.</a:t>
             </a:r>
           </a:p>
         </p:txBody>
@@ -10206,40 +10383,136 @@
           </a:p>
         </p:txBody>
       </p:sp>
-      <p:pic>
-        <p:nvPicPr>
-          <p:cNvPr id="6" name="Picture 5" descr="validation_terminal.png"/>
-          <p:cNvPicPr>
-            <a:picLocks noChangeAspect="1"/>
-          </p:cNvPicPr>
-          <p:nvPr/>
-        </p:nvPicPr>
-        <p:blipFill>
-          <a:blip r:embed="rId2"/>
-          <a:stretch>
-            <a:fillRect/>
-          </a:stretch>
-        </p:blipFill>
-        <p:spPr>
-          <a:xfrm>
-            <a:off x="1438886" y="1353312"/>
-            <a:ext cx="9311179" cy="4800600"/>
-          </a:xfrm>
-          <a:prstGeom prst="rect">
-            <a:avLst/>
-          </a:prstGeom>
-        </p:spPr>
-      </p:pic>
-      <p:sp>
-        <p:nvSpPr>
-          <p:cNvPr id="7" name="TextBox 6"/>
+      <p:sp>
+        <p:nvSpPr>
+          <p:cNvPr id="6" name="Rectangle 5"/>
+          <p:cNvSpPr/>
+          <p:nvPr/>
+        </p:nvSpPr>
+        <p:spPr>
+          <a:xfrm>
+            <a:off x="566928" y="1188720"/>
+            <a:ext cx="11064240" cy="347472"/>
+          </a:xfrm>
+          <a:prstGeom prst="rect">
+            <a:avLst/>
+          </a:prstGeom>
+          <a:solidFill>
+            <a:srgbClr val="F4F7FB"/>
+          </a:solidFill>
+          <a:ln>
+            <a:solidFill>
+              <a:srgbClr val="F4F7FB"/>
+            </a:solidFill>
+          </a:ln>
+        </p:spPr>
+        <p:style>
+          <a:lnRef idx="1">
+            <a:schemeClr val="accent1"/>
+          </a:lnRef>
+          <a:fillRef idx="3">
+            <a:schemeClr val="accent1"/>
+          </a:fillRef>
+          <a:effectRef idx="2">
+            <a:schemeClr val="accent1"/>
+          </a:effectRef>
+          <a:fontRef idx="minor">
+            <a:schemeClr val="lt1"/>
+          </a:fontRef>
+        </p:style>
+        <p:txBody>
+          <a:bodyPr rtlCol="0" anchor="ctr" wrap="square" lIns="73152" rIns="73152" tIns="36576" bIns="36576"/>
+          <a:lstStyle/>
+          <a:p>
+            <a:pPr algn="l">
+              <a:spcAft>
+                <a:spcPts val="0"/>
+              </a:spcAft>
+              <a:defRPr sz="1300" b="1">
+                <a:solidFill>
+                  <a:srgbClr val="122C4E"/>
+                </a:solidFill>
+                <a:latin typeface="Noto Sans CJK KR"/>
+              </a:defRPr>
+            </a:pPr>
+            <a:r>
+              <a:t>현재 단계 실행    |    현재 폴더 ~/agv_ws    |    현재 터미널</a:t>
+            </a:r>
+          </a:p>
+        </p:txBody>
+      </p:sp>
+      <p:sp>
+        <p:nvSpPr>
+          <p:cNvPr id="7" name="Rounded Rectangle 6"/>
+          <p:cNvSpPr/>
+          <p:nvPr/>
+        </p:nvSpPr>
+        <p:spPr>
+          <a:xfrm>
+            <a:off x="658368" y="1700784"/>
+            <a:ext cx="10972800" cy="3182112"/>
+          </a:xfrm>
+          <a:prstGeom prst="roundRect">
+            <a:avLst/>
+          </a:prstGeom>
+          <a:solidFill>
+            <a:srgbClr val="1D232D"/>
+          </a:solidFill>
+          <a:ln>
+            <a:solidFill>
+              <a:srgbClr val="1D232D"/>
+            </a:solidFill>
+          </a:ln>
+        </p:spPr>
+        <p:style>
+          <a:lnRef idx="1">
+            <a:schemeClr val="accent1"/>
+          </a:lnRef>
+          <a:fillRef idx="3">
+            <a:schemeClr val="accent1"/>
+          </a:fillRef>
+          <a:effectRef idx="2">
+            <a:schemeClr val="accent1"/>
+          </a:effectRef>
+          <a:fontRef idx="minor">
+            <a:schemeClr val="lt1"/>
+          </a:fontRef>
+        </p:style>
+        <p:txBody>
+          <a:bodyPr rtlCol="0" anchor="ctr" wrap="square" lIns="73152" rIns="73152" tIns="36576" bIns="36576"/>
+          <a:lstStyle/>
+          <a:p>
+            <a:pPr algn="l">
+              <a:spcAft>
+                <a:spcPts val="0"/>
+              </a:spcAft>
+              <a:defRPr sz="1600" b="0">
+                <a:solidFill>
+                  <a:srgbClr val="FFFFFF"/>
+                </a:solidFill>
+                <a:latin typeface="DejaVu Sans Mono"/>
+              </a:defRPr>
+            </a:pPr>
+            <a:r>
+              <a:t>source ~/agv_ws/install/setup.bash</a:t>
+            </a:r>
+            <a:br/>
+            <a:r>
+              <a:t>ros2 run agv_vision yolo_node --ros-args -p enable_yolo:=false</a:t>
+            </a:r>
+          </a:p>
+        </p:txBody>
+      </p:sp>
+      <p:sp>
+        <p:nvSpPr>
+          <p:cNvPr id="8" name="TextBox 7"/>
           <p:cNvSpPr txBox="1"/>
           <p:nvPr/>
         </p:nvSpPr>
         <p:spPr>
           <a:xfrm>
-            <a:off x="777240" y="6217920"/>
-            <a:ext cx="10607040" cy="182880"/>
+            <a:off x="786384" y="5239512"/>
+            <a:ext cx="1261872" cy="237744"/>
           </a:xfrm>
           <a:prstGeom prst="rect">
             <a:avLst/>
@@ -10252,11 +10525,11 @@
           </a:bodyPr>
           <a:lstStyle/>
           <a:p>
-            <a:pPr algn="ctr">
-              <a:spcAft>
-                <a:spcPts val="0"/>
-              </a:spcAft>
-              <a:defRPr sz="1100" b="1">
+            <a:pPr algn="l">
+              <a:spcAft>
+                <a:spcPts val="0"/>
+              </a:spcAft>
+              <a:defRPr sz="1800" b="1">
                 <a:solidFill>
                   <a:srgbClr val="2A8B5A"/>
                 </a:solidFill>
@@ -10264,7 +10537,46 @@
               </a:defRPr>
             </a:pPr>
             <a:r>
-              <a:t>① 명령/설정  ② 정상 출력 또는 화면  ③ 다음 검증 명령으로 재확인</a:t>
+              <a:t>확인 기준</a:t>
+            </a:r>
+          </a:p>
+        </p:txBody>
+      </p:sp>
+      <p:sp>
+        <p:nvSpPr>
+          <p:cNvPr id="9" name="TextBox 8"/>
+          <p:cNvSpPr txBox="1"/>
+          <p:nvPr/>
+        </p:nvSpPr>
+        <p:spPr>
+          <a:xfrm>
+            <a:off x="786384" y="5532120"/>
+            <a:ext cx="10469880" cy="420624"/>
+          </a:xfrm>
+          <a:prstGeom prst="rect">
+            <a:avLst/>
+          </a:prstGeom>
+          <a:noFill/>
+        </p:spPr>
+        <p:txBody>
+          <a:bodyPr wrap="square" lIns="73152" rIns="73152" tIns="36576" bIns="36576">
+            <a:spAutoFit/>
+          </a:bodyPr>
+          <a:lstStyle/>
+          <a:p>
+            <a:pPr algn="l">
+              <a:spcAft>
+                <a:spcPts val="0"/>
+              </a:spcAft>
+              <a:defRPr sz="1800" b="0">
+                <a:solidFill>
+                  <a:srgbClr val="122C4E"/>
+                </a:solidFill>
+                <a:latin typeface="Noto Sans CJK KR"/>
+              </a:defRPr>
+            </a:pPr>
+            <a:r>
+              <a:t>/detections message 형식과 YOLO enable_yolo/model_path/threshold parameter를 확인한다.</a:t>
             </a:r>
           </a:p>
         </p:txBody>
@@ -10782,7 +11094,7 @@
               </a:defRPr>
             </a:pPr>
             <a:r>
-              <a:t>객관적 검증 명령으로 완료를 확인한다</a:t>
+              <a:t>정상 결과: 실제 환경에서 확인한 출력</a:t>
             </a:r>
           </a:p>
         </p:txBody>
@@ -10821,7 +11133,7 @@
               </a:defRPr>
             </a:pPr>
             <a:r>
-              <a:t>화면만 보지 말고 topic·frame·파일·parameter를 다시 확인합니다.</a:t>
+              <a:t>실제 ROS 2 환경의 파일·패키지·구성 검증 로그</a:t>
             </a:r>
           </a:p>
         </p:txBody>
@@ -10904,210 +11216,40 @@
           </a:p>
         </p:txBody>
       </p:sp>
-      <p:sp>
-        <p:nvSpPr>
-          <p:cNvPr id="6" name="Rectangle 5"/>
-          <p:cNvSpPr/>
-          <p:nvPr/>
-        </p:nvSpPr>
-        <p:spPr>
-          <a:xfrm>
-            <a:off x="566928" y="1188720"/>
-            <a:ext cx="11064240" cy="347472"/>
-          </a:xfrm>
-          <a:prstGeom prst="rect">
-            <a:avLst/>
-          </a:prstGeom>
-          <a:solidFill>
-            <a:srgbClr val="F4F7FB"/>
-          </a:solidFill>
-          <a:ln>
-            <a:solidFill>
-              <a:srgbClr val="F4F7FB"/>
-            </a:solidFill>
-          </a:ln>
-        </p:spPr>
-        <p:style>
-          <a:lnRef idx="1">
-            <a:schemeClr val="accent1"/>
-          </a:lnRef>
-          <a:fillRef idx="3">
-            <a:schemeClr val="accent1"/>
-          </a:fillRef>
-          <a:effectRef idx="2">
-            <a:schemeClr val="accent1"/>
-          </a:effectRef>
-          <a:fontRef idx="minor">
-            <a:schemeClr val="lt1"/>
-          </a:fontRef>
-        </p:style>
-        <p:txBody>
-          <a:bodyPr rtlCol="0" anchor="ctr" wrap="square" lIns="73152" rIns="73152" tIns="36576" bIns="36576"/>
-          <a:lstStyle/>
-          <a:p>
-            <a:pPr algn="l">
-              <a:spcAft>
-                <a:spcPts val="0"/>
-              </a:spcAft>
-              <a:defRPr sz="1300" b="1">
-                <a:solidFill>
-                  <a:srgbClr val="122C4E"/>
-                </a:solidFill>
-                <a:latin typeface="Noto Sans CJK KR"/>
-              </a:defRPr>
-            </a:pPr>
-            <a:r>
-              <a:t>현재 단계 검증    |    현재 폴더 ~/agv_ws    |    현재 터미널</a:t>
-            </a:r>
-          </a:p>
-        </p:txBody>
-      </p:sp>
-      <p:sp>
-        <p:nvSpPr>
-          <p:cNvPr id="7" name="Rounded Rectangle 6"/>
-          <p:cNvSpPr/>
-          <p:nvPr/>
-        </p:nvSpPr>
-        <p:spPr>
-          <a:xfrm>
-            <a:off x="658368" y="1755648"/>
-            <a:ext cx="10972800" cy="2148840"/>
-          </a:xfrm>
-          <a:prstGeom prst="roundRect">
-            <a:avLst/>
-          </a:prstGeom>
-          <a:solidFill>
-            <a:srgbClr val="1D232D"/>
-          </a:solidFill>
-          <a:ln>
-            <a:solidFill>
-              <a:srgbClr val="1D232D"/>
-            </a:solidFill>
-          </a:ln>
-        </p:spPr>
-        <p:style>
-          <a:lnRef idx="1">
-            <a:schemeClr val="accent1"/>
-          </a:lnRef>
-          <a:fillRef idx="3">
-            <a:schemeClr val="accent1"/>
-          </a:fillRef>
-          <a:effectRef idx="2">
-            <a:schemeClr val="accent1"/>
-          </a:effectRef>
-          <a:fontRef idx="minor">
-            <a:schemeClr val="lt1"/>
-          </a:fontRef>
-        </p:style>
-        <p:txBody>
-          <a:bodyPr rtlCol="0" anchor="ctr" wrap="square" lIns="73152" rIns="73152" tIns="36576" bIns="36576"/>
-          <a:lstStyle/>
-          <a:p>
-            <a:pPr algn="l">
-              <a:spcAft>
-                <a:spcPts val="0"/>
-              </a:spcAft>
-              <a:defRPr sz="1600" b="0">
-                <a:solidFill>
-                  <a:srgbClr val="FFFFFF"/>
-                </a:solidFill>
-                <a:latin typeface="DejaVu Sans Mono"/>
-              </a:defRPr>
-            </a:pPr>
-            <a:r>
-              <a:t>ros2 interface show agv_interfaces/msg/Detection</a:t>
-            </a:r>
-            <a:br/>
-            <a:r>
-              <a:t>ros2 topic info /detections</a:t>
-            </a:r>
-            <a:br/>
-            <a:r>
-              <a:t>ros2 param get /yolo_node confidence_threshold</a:t>
-            </a:r>
-          </a:p>
-        </p:txBody>
-      </p:sp>
-      <p:sp>
-        <p:nvSpPr>
-          <p:cNvPr id="8" name="Rounded Rectangle 7"/>
-          <p:cNvSpPr/>
-          <p:nvPr/>
-        </p:nvSpPr>
-        <p:spPr>
-          <a:xfrm>
-            <a:off x="658368" y="4206240"/>
-            <a:ext cx="10972800" cy="1554480"/>
-          </a:xfrm>
-          <a:prstGeom prst="roundRect">
-            <a:avLst/>
-          </a:prstGeom>
-          <a:solidFill>
-            <a:srgbClr val="F4F7FB"/>
-          </a:solidFill>
-          <a:ln>
-            <a:solidFill>
-              <a:srgbClr val="D1DFD5"/>
-            </a:solidFill>
-          </a:ln>
-        </p:spPr>
-        <p:style>
-          <a:lnRef idx="1">
-            <a:schemeClr val="accent1"/>
-          </a:lnRef>
-          <a:fillRef idx="3">
-            <a:schemeClr val="accent1"/>
-          </a:fillRef>
-          <a:effectRef idx="2">
-            <a:schemeClr val="accent1"/>
-          </a:effectRef>
-          <a:fontRef idx="minor">
-            <a:schemeClr val="lt1"/>
-          </a:fontRef>
-        </p:style>
-        <p:txBody>
-          <a:bodyPr rtlCol="0" anchor="ctr" wrap="square" lIns="73152" rIns="73152" tIns="36576" bIns="36576"/>
-          <a:lstStyle/>
-          <a:p>
-            <a:pPr algn="l">
-              <a:spcAft>
-                <a:spcPts val="0"/>
-              </a:spcAft>
-              <a:defRPr sz="1800" b="1">
-                <a:solidFill>
-                  <a:srgbClr val="2A8B5A"/>
-                </a:solidFill>
-                <a:latin typeface="Noto Sans CJK KR"/>
-              </a:defRPr>
-            </a:pPr>
-            <a:r>
-              <a:t>완료 체크</a:t>
-            </a:r>
-            <a:br/>
-            <a:r>
-              <a:t>□ 명령이 오류 없이 실행된다.</a:t>
-            </a:r>
-            <a:br/>
-            <a:r>
-              <a:t>□ 기대한 파일·topic·frame·parameter 이름이 보인다.</a:t>
-            </a:r>
-            <a:br/>
-            <a:r>
-              <a:t>□ 값의 단위와 방향을 한 문장으로 설명할 수 있다.</a:t>
-            </a:r>
-          </a:p>
-        </p:txBody>
-      </p:sp>
-      <p:sp>
-        <p:nvSpPr>
-          <p:cNvPr id="9" name="TextBox 8"/>
+      <p:pic>
+        <p:nvPicPr>
+          <p:cNvPr id="6" name="Picture 5" descr="validation_terminal.png"/>
+          <p:cNvPicPr>
+            <a:picLocks noChangeAspect="1"/>
+          </p:cNvPicPr>
+          <p:nvPr/>
+        </p:nvPicPr>
+        <p:blipFill>
+          <a:blip r:embed="rId2"/>
+          <a:stretch>
+            <a:fillRect/>
+          </a:stretch>
+        </p:blipFill>
+        <p:spPr>
+          <a:xfrm>
+            <a:off x="1438886" y="1353312"/>
+            <a:ext cx="9311179" cy="4800600"/>
+          </a:xfrm>
+          <a:prstGeom prst="rect">
+            <a:avLst/>
+          </a:prstGeom>
+        </p:spPr>
+      </p:pic>
+      <p:sp>
+        <p:nvSpPr>
+          <p:cNvPr id="7" name="TextBox 6"/>
           <p:cNvSpPr txBox="1"/>
           <p:nvPr/>
         </p:nvSpPr>
         <p:spPr>
           <a:xfrm>
-            <a:off x="731520" y="5989320"/>
-            <a:ext cx="10789920" cy="237744"/>
+            <a:off x="777240" y="6217920"/>
+            <a:ext cx="10607040" cy="182880"/>
           </a:xfrm>
           <a:prstGeom prst="rect">
             <a:avLst/>
@@ -11120,19 +11262,19 @@
           </a:bodyPr>
           <a:lstStyle/>
           <a:p>
-            <a:pPr algn="l">
-              <a:spcAft>
-                <a:spcPts val="0"/>
-              </a:spcAft>
-              <a:defRPr sz="1500" b="1">
-                <a:solidFill>
-                  <a:srgbClr val="122C4E"/>
-                </a:solidFill>
-                <a:latin typeface="Noto Sans CJK KR"/>
-              </a:defRPr>
-            </a:pPr>
-            <a:r>
-              <a:t>완료 조건: /detections message 형식과 YOLO enable_yolo/model_path/threshold parameter를 확인한다.</a:t>
+            <a:pPr algn="ctr">
+              <a:spcAft>
+                <a:spcPts val="0"/>
+              </a:spcAft>
+              <a:defRPr sz="1100" b="1">
+                <a:solidFill>
+                  <a:srgbClr val="2A8B5A"/>
+                </a:solidFill>
+                <a:latin typeface="Noto Sans CJK KR"/>
+              </a:defRPr>
+            </a:pPr>
+            <a:r>
+              <a:t>① 명령/설정  ② 정상 출력 또는 화면  ③ 다음 검증 명령으로 재확인</a:t>
             </a:r>
           </a:p>
         </p:txBody>
@@ -11189,7 +11331,7 @@
               </a:defRPr>
             </a:pPr>
             <a:r>
-              <a:t>막히면: 증상 → 우선 확인 → 재검증</a:t>
+              <a:t>객관적 검증 명령으로 완료를 확인한다</a:t>
             </a:r>
           </a:p>
         </p:txBody>
@@ -11228,7 +11370,7 @@
               </a:defRPr>
             </a:pPr>
             <a:r>
-              <a:t>오류 메시지를 숨기지 않고 같은 순서로 점검합니다.</a:t>
+              <a:t>화면만 보지 말고 topic·frame·파일·parameter를 다시 확인합니다.</a:t>
             </a:r>
           </a:p>
         </p:txBody>
@@ -11364,7 +11506,7 @@
               </a:defRPr>
             </a:pPr>
             <a:r>
-              <a:t>현재 단계 오류 대응    |    현재 폴더 ~/agv_ws    |    현재 터미널</a:t>
+              <a:t>현재 단계 검증    |    현재 폴더 ~/agv_ws    |    현재 터미널</a:t>
             </a:r>
           </a:p>
         </p:txBody>
@@ -11377,18 +11519,18 @@
         </p:nvSpPr>
         <p:spPr>
           <a:xfrm>
-            <a:off x="694944" y="1755648"/>
-            <a:ext cx="10972800" cy="1115568"/>
+            <a:off x="658368" y="1755648"/>
+            <a:ext cx="10972800" cy="2148840"/>
           </a:xfrm>
           <a:prstGeom prst="roundRect">
             <a:avLst/>
           </a:prstGeom>
           <a:solidFill>
-            <a:srgbClr val="FFF7F4"/>
+            <a:srgbClr val="1D232D"/>
           </a:solidFill>
           <a:ln>
             <a:solidFill>
-              <a:srgbClr val="EDBEB4"/>
+              <a:srgbClr val="1D232D"/>
             </a:solidFill>
           </a:ln>
         </p:spPr>
@@ -11407,115 +11549,54 @@
           </a:fontRef>
         </p:style>
         <p:txBody>
-          <a:bodyPr rtlCol="0" anchor="ctr"/>
-          <a:lstStyle/>
-          <a:p>
-            <a:pPr algn="ctr"/>
-          </a:p>
-        </p:txBody>
-      </p:sp>
-      <p:sp>
-        <p:nvSpPr>
-          <p:cNvPr id="8" name="TextBox 7"/>
-          <p:cNvSpPr txBox="1"/>
-          <p:nvPr/>
-        </p:nvSpPr>
-        <p:spPr>
-          <a:xfrm>
-            <a:off x="896112" y="1901952"/>
-            <a:ext cx="2926080" cy="274320"/>
-          </a:xfrm>
-          <a:prstGeom prst="rect">
-            <a:avLst/>
-          </a:prstGeom>
-          <a:noFill/>
-        </p:spPr>
-        <p:txBody>
-          <a:bodyPr wrap="square" lIns="73152" rIns="73152" tIns="36576" bIns="36576">
-            <a:spAutoFit/>
-          </a:bodyPr>
+          <a:bodyPr rtlCol="0" anchor="ctr" wrap="square" lIns="73152" rIns="73152" tIns="36576" bIns="36576"/>
           <a:lstStyle/>
           <a:p>
             <a:pPr algn="l">
               <a:spcAft>
                 <a:spcPts val="0"/>
               </a:spcAft>
-              <a:defRPr sz="1800" b="1">
-                <a:solidFill>
-                  <a:srgbClr val="BE3B3B"/>
-                </a:solidFill>
-                <a:latin typeface="Noto Sans CJK KR"/>
-              </a:defRPr>
-            </a:pPr>
-            <a:r>
-              <a:t>증상 1: 모델 파일을 못 찾음</a:t>
-            </a:r>
-          </a:p>
-        </p:txBody>
-      </p:sp>
-      <p:sp>
-        <p:nvSpPr>
-          <p:cNvPr id="9" name="TextBox 8"/>
-          <p:cNvSpPr txBox="1"/>
-          <p:nvPr/>
-        </p:nvSpPr>
-        <p:spPr>
-          <a:xfrm>
-            <a:off x="3794760" y="1883664"/>
-            <a:ext cx="7543800" cy="621792"/>
-          </a:xfrm>
-          <a:prstGeom prst="rect">
-            <a:avLst/>
-          </a:prstGeom>
-          <a:noFill/>
-        </p:spPr>
-        <p:txBody>
-          <a:bodyPr wrap="square" lIns="73152" rIns="73152" tIns="36576" bIns="36576">
-            <a:spAutoFit/>
-          </a:bodyPr>
-          <a:lstStyle/>
-          <a:p>
-            <a:pPr algn="l">
-              <a:spcAft>
-                <a:spcPts val="0"/>
-              </a:spcAft>
               <a:defRPr sz="1600" b="0">
                 <a:solidFill>
-                  <a:srgbClr val="122C4E"/>
-                </a:solidFill>
-                <a:latin typeface="Noto Sans CJK KR"/>
-              </a:defRPr>
-            </a:pPr>
-            <a:r>
-              <a:t>우선 확인: model_path와 모델 파일 배포 정책을 확인한다.</a:t>
+                  <a:srgbClr val="FFFFFF"/>
+                </a:solidFill>
+                <a:latin typeface="DejaVu Sans Mono"/>
+              </a:defRPr>
+            </a:pPr>
+            <a:r>
+              <a:t>ros2 interface show agv_interfaces/msg/Detection</a:t>
             </a:r>
             <a:br/>
             <a:r>
-              <a:t>수정 후: ros2 interface show agv_interfaces/msg/Detection</a:t>
-            </a:r>
-          </a:p>
-        </p:txBody>
-      </p:sp>
-      <p:sp>
-        <p:nvSpPr>
-          <p:cNvPr id="10" name="Rounded Rectangle 9"/>
+              <a:t>ros2 topic info /detections</a:t>
+            </a:r>
+            <a:br/>
+            <a:r>
+              <a:t>ros2 param get /yolo_node confidence_threshold</a:t>
+            </a:r>
+          </a:p>
+        </p:txBody>
+      </p:sp>
+      <p:sp>
+        <p:nvSpPr>
+          <p:cNvPr id="8" name="Rounded Rectangle 7"/>
           <p:cNvSpPr/>
           <p:nvPr/>
         </p:nvSpPr>
         <p:spPr>
           <a:xfrm>
-            <a:off x="694944" y="3172968"/>
-            <a:ext cx="10972800" cy="1115568"/>
+            <a:off x="658368" y="4206240"/>
+            <a:ext cx="10972800" cy="1554480"/>
           </a:xfrm>
           <a:prstGeom prst="roundRect">
             <a:avLst/>
           </a:prstGeom>
           <a:solidFill>
-            <a:srgbClr val="FFF7F4"/>
+            <a:srgbClr val="F4F7FB"/>
           </a:solidFill>
           <a:ln>
             <a:solidFill>
-              <a:srgbClr val="EDBEB4"/>
+              <a:srgbClr val="D1DFD5"/>
             </a:solidFill>
           </a:ln>
         </p:spPr>
@@ -11534,23 +11615,48 @@
           </a:fontRef>
         </p:style>
         <p:txBody>
-          <a:bodyPr rtlCol="0" anchor="ctr"/>
-          <a:lstStyle/>
-          <a:p>
-            <a:pPr algn="ctr"/>
-          </a:p>
-        </p:txBody>
-      </p:sp>
-      <p:sp>
-        <p:nvSpPr>
-          <p:cNvPr id="11" name="TextBox 10"/>
+          <a:bodyPr rtlCol="0" anchor="ctr" wrap="square" lIns="73152" rIns="73152" tIns="36576" bIns="36576"/>
+          <a:lstStyle/>
+          <a:p>
+            <a:pPr algn="l">
+              <a:spcAft>
+                <a:spcPts val="0"/>
+              </a:spcAft>
+              <a:defRPr sz="1800" b="1">
+                <a:solidFill>
+                  <a:srgbClr val="2A8B5A"/>
+                </a:solidFill>
+                <a:latin typeface="Noto Sans CJK KR"/>
+              </a:defRPr>
+            </a:pPr>
+            <a:r>
+              <a:t>완료 체크</a:t>
+            </a:r>
+            <a:br/>
+            <a:r>
+              <a:t>□ 명령이 오류 없이 실행된다.</a:t>
+            </a:r>
+            <a:br/>
+            <a:r>
+              <a:t>□ 기대한 파일·topic·frame·parameter 이름이 보인다.</a:t>
+            </a:r>
+            <a:br/>
+            <a:r>
+              <a:t>□ 값의 단위와 방향을 한 문장으로 설명할 수 있다.</a:t>
+            </a:r>
+          </a:p>
+        </p:txBody>
+      </p:sp>
+      <p:sp>
+        <p:nvSpPr>
+          <p:cNvPr id="9" name="TextBox 8"/>
           <p:cNvSpPr txBox="1"/>
           <p:nvPr/>
         </p:nvSpPr>
         <p:spPr>
           <a:xfrm>
-            <a:off x="896112" y="3319272"/>
-            <a:ext cx="2926080" cy="274320"/>
+            <a:off x="731520" y="5989320"/>
+            <a:ext cx="10789920" cy="237744"/>
           </a:xfrm>
           <a:prstGeom prst="rect">
             <a:avLst/>
@@ -11567,46 +11673,7 @@
               <a:spcAft>
                 <a:spcPts val="0"/>
               </a:spcAft>
-              <a:defRPr sz="1800" b="1">
-                <a:solidFill>
-                  <a:srgbClr val="BE3B3B"/>
-                </a:solidFill>
-                <a:latin typeface="Noto Sans CJK KR"/>
-              </a:defRPr>
-            </a:pPr>
-            <a:r>
-              <a:t>증상 2: Custom msg import 실패</a:t>
-            </a:r>
-          </a:p>
-        </p:txBody>
-      </p:sp>
-      <p:sp>
-        <p:nvSpPr>
-          <p:cNvPr id="12" name="TextBox 11"/>
-          <p:cNvSpPr txBox="1"/>
-          <p:nvPr/>
-        </p:nvSpPr>
-        <p:spPr>
-          <a:xfrm>
-            <a:off x="3794760" y="3300984"/>
-            <a:ext cx="7543800" cy="621792"/>
-          </a:xfrm>
-          <a:prstGeom prst="rect">
-            <a:avLst/>
-          </a:prstGeom>
-          <a:noFill/>
-        </p:spPr>
-        <p:txBody>
-          <a:bodyPr wrap="square" lIns="73152" rIns="73152" tIns="36576" bIns="36576">
-            <a:spAutoFit/>
-          </a:bodyPr>
-          <a:lstStyle/>
-          <a:p>
-            <a:pPr algn="l">
-              <a:spcAft>
-                <a:spcPts val="0"/>
-              </a:spcAft>
-              <a:defRPr sz="1600" b="0">
+              <a:defRPr sz="1500" b="1">
                 <a:solidFill>
                   <a:srgbClr val="122C4E"/>
                 </a:solidFill>
@@ -11614,50 +11681,7 @@
               </a:defRPr>
             </a:pPr>
             <a:r>
-              <a:t>우선 확인: agv_interfaces 빌드·source·package dependency를 확인한다.</a:t>
-            </a:r>
-            <a:br/>
-            <a:r>
-              <a:t>수정 후: ros2 interface show agv_interfaces/msg/Detection</a:t>
-            </a:r>
-          </a:p>
-        </p:txBody>
-      </p:sp>
-      <p:sp>
-        <p:nvSpPr>
-          <p:cNvPr id="13" name="TextBox 12"/>
-          <p:cNvSpPr txBox="1"/>
-          <p:nvPr/>
-        </p:nvSpPr>
-        <p:spPr>
-          <a:xfrm>
-            <a:off x="822960" y="5102352"/>
-            <a:ext cx="10607040" cy="402336"/>
-          </a:xfrm>
-          <a:prstGeom prst="rect">
-            <a:avLst/>
-          </a:prstGeom>
-          <a:noFill/>
-        </p:spPr>
-        <p:txBody>
-          <a:bodyPr wrap="square" lIns="73152" rIns="73152" tIns="36576" bIns="36576">
-            <a:spAutoFit/>
-          </a:bodyPr>
-          <a:lstStyle/>
-          <a:p>
-            <a:pPr algn="ctr">
-              <a:spcAft>
-                <a:spcPts val="0"/>
-              </a:spcAft>
-              <a:defRPr sz="1800" b="1">
-                <a:solidFill>
-                  <a:srgbClr val="DB7E22"/>
-                </a:solidFill>
-                <a:latin typeface="Noto Sans CJK KR"/>
-              </a:defRPr>
-            </a:pPr>
-            <a:r>
-              <a:t>공통 순서: ① 현재 폴더 ② source ③ 파일 경로 ④ 이름/타입/단위 ⑤ build·source 후 재실행</a:t>
+              <a:t>완료 조건: /detections message 형식과 YOLO enable_yolo/model_path/threshold parameter를 확인한다.</a:t>
             </a:r>
           </a:p>
         </p:txBody>
@@ -11714,7 +11738,7 @@
               </a:defRPr>
             </a:pPr>
             <a:r>
-              <a:t>미니 실습: 값 하나를 바꾸고 결과를 비교한다</a:t>
+              <a:t>막히면: 증상 → 우선 확인 → 재검증</a:t>
             </a:r>
           </a:p>
         </p:txBody>
@@ -11753,7 +11777,7 @@
               </a:defRPr>
             </a:pPr>
             <a:r>
-              <a:t>정상 결과를 만든 뒤에는 한 번에 하나의 값만 바꿉니다.</a:t>
+              <a:t>오류 메시지를 숨기지 않고 같은 순서로 점검합니다.</a:t>
             </a:r>
           </a:p>
         </p:txBody>
@@ -11889,7 +11913,7 @@
               </a:defRPr>
             </a:pPr>
             <a:r>
-              <a:t>현재 단계 미니 실습    |    현재 폴더 ~/agv_ws    |    현재 터미널</a:t>
+              <a:t>현재 단계 오류 대응    |    현재 폴더 ~/agv_ws    |    현재 터미널</a:t>
             </a:r>
           </a:p>
         </p:txBody>
@@ -11902,18 +11926,18 @@
         </p:nvSpPr>
         <p:spPr>
           <a:xfrm>
-            <a:off x="749808" y="1874519"/>
-            <a:ext cx="10652760" cy="1993392"/>
+            <a:off x="694944" y="1755648"/>
+            <a:ext cx="10972800" cy="1115568"/>
           </a:xfrm>
           <a:prstGeom prst="roundRect">
             <a:avLst/>
           </a:prstGeom>
           <a:solidFill>
-            <a:srgbClr val="FFF8EB"/>
+            <a:srgbClr val="FFF7F4"/>
           </a:solidFill>
           <a:ln>
             <a:solidFill>
-              <a:srgbClr val="ECC680"/>
+              <a:srgbClr val="EDBEB4"/>
             </a:solidFill>
           </a:ln>
         </p:spPr>
@@ -11932,23 +11956,10 @@
           </a:fontRef>
         </p:style>
         <p:txBody>
-          <a:bodyPr rtlCol="0" anchor="ctr" wrap="square" lIns="73152" rIns="73152" tIns="36576" bIns="36576"/>
-          <a:lstStyle/>
-          <a:p>
-            <a:pPr algn="ctr">
-              <a:spcAft>
-                <a:spcPts val="0"/>
-              </a:spcAft>
-              <a:defRPr sz="2300" b="1">
-                <a:solidFill>
-                  <a:srgbClr val="122C4E"/>
-                </a:solidFill>
-                <a:latin typeface="Noto Sans CJK KR"/>
-              </a:defRPr>
-            </a:pPr>
-            <a:r>
-              <a:t>confidence_threshold를 0.50에서 0.70으로 바꿨을 때 어떤 검출이 제거될지 설명하고 parameter 값을 확인한다.</a:t>
-            </a:r>
+          <a:bodyPr rtlCol="0" anchor="ctr"/>
+          <a:lstStyle/>
+          <a:p>
+            <a:pPr algn="ctr"/>
           </a:p>
         </p:txBody>
       </p:sp>
@@ -11960,8 +11971,8 @@
         </p:nvSpPr>
         <p:spPr>
           <a:xfrm>
-            <a:off x="877824" y="4590288"/>
-            <a:ext cx="10241280" cy="594360"/>
+            <a:off x="896112" y="1901952"/>
+            <a:ext cx="2926080" cy="274320"/>
           </a:xfrm>
           <a:prstGeom prst="rect">
             <a:avLst/>
@@ -11974,11 +11985,220 @@
           </a:bodyPr>
           <a:lstStyle/>
           <a:p>
+            <a:pPr algn="l">
+              <a:spcAft>
+                <a:spcPts val="0"/>
+              </a:spcAft>
+              <a:defRPr sz="1800" b="1">
+                <a:solidFill>
+                  <a:srgbClr val="BE3B3B"/>
+                </a:solidFill>
+                <a:latin typeface="Noto Sans CJK KR"/>
+              </a:defRPr>
+            </a:pPr>
+            <a:r>
+              <a:t>증상 1: 모델 파일을 못 찾음</a:t>
+            </a:r>
+          </a:p>
+        </p:txBody>
+      </p:sp>
+      <p:sp>
+        <p:nvSpPr>
+          <p:cNvPr id="9" name="TextBox 8"/>
+          <p:cNvSpPr txBox="1"/>
+          <p:nvPr/>
+        </p:nvSpPr>
+        <p:spPr>
+          <a:xfrm>
+            <a:off x="3794760" y="1883664"/>
+            <a:ext cx="7543800" cy="621792"/>
+          </a:xfrm>
+          <a:prstGeom prst="rect">
+            <a:avLst/>
+          </a:prstGeom>
+          <a:noFill/>
+        </p:spPr>
+        <p:txBody>
+          <a:bodyPr wrap="square" lIns="73152" rIns="73152" tIns="36576" bIns="36576">
+            <a:spAutoFit/>
+          </a:bodyPr>
+          <a:lstStyle/>
+          <a:p>
+            <a:pPr algn="l">
+              <a:spcAft>
+                <a:spcPts val="0"/>
+              </a:spcAft>
+              <a:defRPr sz="1600" b="0">
+                <a:solidFill>
+                  <a:srgbClr val="122C4E"/>
+                </a:solidFill>
+                <a:latin typeface="Noto Sans CJK KR"/>
+              </a:defRPr>
+            </a:pPr>
+            <a:r>
+              <a:t>우선 확인: model_path와 모델 파일 배포 정책을 확인한다.</a:t>
+            </a:r>
+            <a:br/>
+            <a:r>
+              <a:t>수정 후: ros2 interface show agv_interfaces/msg/Detection</a:t>
+            </a:r>
+          </a:p>
+        </p:txBody>
+      </p:sp>
+      <p:sp>
+        <p:nvSpPr>
+          <p:cNvPr id="10" name="Rounded Rectangle 9"/>
+          <p:cNvSpPr/>
+          <p:nvPr/>
+        </p:nvSpPr>
+        <p:spPr>
+          <a:xfrm>
+            <a:off x="694944" y="3172968"/>
+            <a:ext cx="10972800" cy="1115568"/>
+          </a:xfrm>
+          <a:prstGeom prst="roundRect">
+            <a:avLst/>
+          </a:prstGeom>
+          <a:solidFill>
+            <a:srgbClr val="FFF7F4"/>
+          </a:solidFill>
+          <a:ln>
+            <a:solidFill>
+              <a:srgbClr val="EDBEB4"/>
+            </a:solidFill>
+          </a:ln>
+        </p:spPr>
+        <p:style>
+          <a:lnRef idx="1">
+            <a:schemeClr val="accent1"/>
+          </a:lnRef>
+          <a:fillRef idx="3">
+            <a:schemeClr val="accent1"/>
+          </a:fillRef>
+          <a:effectRef idx="2">
+            <a:schemeClr val="accent1"/>
+          </a:effectRef>
+          <a:fontRef idx="minor">
+            <a:schemeClr val="lt1"/>
+          </a:fontRef>
+        </p:style>
+        <p:txBody>
+          <a:bodyPr rtlCol="0" anchor="ctr"/>
+          <a:lstStyle/>
+          <a:p>
+            <a:pPr algn="ctr"/>
+          </a:p>
+        </p:txBody>
+      </p:sp>
+      <p:sp>
+        <p:nvSpPr>
+          <p:cNvPr id="11" name="TextBox 10"/>
+          <p:cNvSpPr txBox="1"/>
+          <p:nvPr/>
+        </p:nvSpPr>
+        <p:spPr>
+          <a:xfrm>
+            <a:off x="896112" y="3319272"/>
+            <a:ext cx="2926080" cy="274320"/>
+          </a:xfrm>
+          <a:prstGeom prst="rect">
+            <a:avLst/>
+          </a:prstGeom>
+          <a:noFill/>
+        </p:spPr>
+        <p:txBody>
+          <a:bodyPr wrap="square" lIns="73152" rIns="73152" tIns="36576" bIns="36576">
+            <a:spAutoFit/>
+          </a:bodyPr>
+          <a:lstStyle/>
+          <a:p>
+            <a:pPr algn="l">
+              <a:spcAft>
+                <a:spcPts val="0"/>
+              </a:spcAft>
+              <a:defRPr sz="1800" b="1">
+                <a:solidFill>
+                  <a:srgbClr val="BE3B3B"/>
+                </a:solidFill>
+                <a:latin typeface="Noto Sans CJK KR"/>
+              </a:defRPr>
+            </a:pPr>
+            <a:r>
+              <a:t>증상 2: Custom msg import 실패</a:t>
+            </a:r>
+          </a:p>
+        </p:txBody>
+      </p:sp>
+      <p:sp>
+        <p:nvSpPr>
+          <p:cNvPr id="12" name="TextBox 11"/>
+          <p:cNvSpPr txBox="1"/>
+          <p:nvPr/>
+        </p:nvSpPr>
+        <p:spPr>
+          <a:xfrm>
+            <a:off x="3794760" y="3300984"/>
+            <a:ext cx="7543800" cy="621792"/>
+          </a:xfrm>
+          <a:prstGeom prst="rect">
+            <a:avLst/>
+          </a:prstGeom>
+          <a:noFill/>
+        </p:spPr>
+        <p:txBody>
+          <a:bodyPr wrap="square" lIns="73152" rIns="73152" tIns="36576" bIns="36576">
+            <a:spAutoFit/>
+          </a:bodyPr>
+          <a:lstStyle/>
+          <a:p>
+            <a:pPr algn="l">
+              <a:spcAft>
+                <a:spcPts val="0"/>
+              </a:spcAft>
+              <a:defRPr sz="1600" b="0">
+                <a:solidFill>
+                  <a:srgbClr val="122C4E"/>
+                </a:solidFill>
+                <a:latin typeface="Noto Sans CJK KR"/>
+              </a:defRPr>
+            </a:pPr>
+            <a:r>
+              <a:t>우선 확인: agv_interfaces 빌드·source·package dependency를 확인한다.</a:t>
+            </a:r>
+            <a:br/>
+            <a:r>
+              <a:t>수정 후: ros2 interface show agv_interfaces/msg/Detection</a:t>
+            </a:r>
+          </a:p>
+        </p:txBody>
+      </p:sp>
+      <p:sp>
+        <p:nvSpPr>
+          <p:cNvPr id="13" name="TextBox 12"/>
+          <p:cNvSpPr txBox="1"/>
+          <p:nvPr/>
+        </p:nvSpPr>
+        <p:spPr>
+          <a:xfrm>
+            <a:off x="822960" y="5102352"/>
+            <a:ext cx="10607040" cy="402336"/>
+          </a:xfrm>
+          <a:prstGeom prst="rect">
+            <a:avLst/>
+          </a:prstGeom>
+          <a:noFill/>
+        </p:spPr>
+        <p:txBody>
+          <a:bodyPr wrap="square" lIns="73152" rIns="73152" tIns="36576" bIns="36576">
+            <a:spAutoFit/>
+          </a:bodyPr>
+          <a:lstStyle/>
+          <a:p>
             <a:pPr algn="ctr">
               <a:spcAft>
                 <a:spcPts val="0"/>
               </a:spcAft>
-              <a:defRPr sz="1900" b="1">
+              <a:defRPr sz="1800" b="1">
                 <a:solidFill>
                   <a:srgbClr val="DB7E22"/>
                 </a:solidFill>
@@ -11986,7 +12206,7 @@
               </a:defRPr>
             </a:pPr>
             <a:r>
-              <a:t>기록할 것: 바꾼 값(단위) · 기대한 변화 · 실제 출력/화면 · 원래 값으로 되돌린 결과</a:t>
+              <a:t>공통 순서: ① 현재 폴더 ② source ③ 파일 경로 ④ 이름/타입/단위 ⑤ build·source 후 재실행</a:t>
             </a:r>
           </a:p>
         </p:txBody>
@@ -12043,7 +12263,7 @@
               </a:defRPr>
             </a:pPr>
             <a:r>
-              <a:t>체크포인트를 저장하고 다음 모듈로 넘긴다</a:t>
+              <a:t>미니 실습: 값 하나를 바꾸고 결과를 비교한다</a:t>
             </a:r>
           </a:p>
         </p:txBody>
@@ -12082,7 +12302,7 @@
               </a:defRPr>
             </a:pPr>
             <a:r>
-              <a:t>현재 Complete는 다음 Starter의 기준선입니다.</a:t>
+              <a:t>정상 결과를 만든 뒤에는 한 번에 하나의 값만 바꿉니다.</a:t>
             </a:r>
           </a:p>
         </p:txBody>
@@ -12218,7 +12438,7 @@
               </a:defRPr>
             </a:pPr>
             <a:r>
-              <a:t>현재 단계 체크포인트    |    현재 폴더 ~/agv_ws    |    현재 터미널</a:t>
+              <a:t>현재 단계 미니 실습    |    현재 폴더 ~/agv_ws    |    현재 터미널</a:t>
             </a:r>
           </a:p>
         </p:txBody>
@@ -12231,18 +12451,18 @@
         </p:nvSpPr>
         <p:spPr>
           <a:xfrm>
-            <a:off x="685800" y="1737360"/>
-            <a:ext cx="10972800" cy="3611880"/>
+            <a:off x="749808" y="1874519"/>
+            <a:ext cx="10652760" cy="1993392"/>
           </a:xfrm>
           <a:prstGeom prst="roundRect">
             <a:avLst/>
           </a:prstGeom>
           <a:solidFill>
-            <a:srgbClr val="F4F7FB"/>
+            <a:srgbClr val="FFF8EB"/>
           </a:solidFill>
           <a:ln>
             <a:solidFill>
-              <a:srgbClr val="D2DCE8"/>
+              <a:srgbClr val="ECC680"/>
             </a:solidFill>
           </a:ln>
         </p:spPr>
@@ -12261,10 +12481,23 @@
           </a:fontRef>
         </p:style>
         <p:txBody>
-          <a:bodyPr rtlCol="0" anchor="ctr"/>
-          <a:lstStyle/>
-          <a:p>
-            <a:pPr algn="ctr"/>
+          <a:bodyPr rtlCol="0" anchor="ctr" wrap="square" lIns="73152" rIns="73152" tIns="36576" bIns="36576"/>
+          <a:lstStyle/>
+          <a:p>
+            <a:pPr algn="ctr">
+              <a:spcAft>
+                <a:spcPts val="0"/>
+              </a:spcAft>
+              <a:defRPr sz="2300" b="1">
+                <a:solidFill>
+                  <a:srgbClr val="122C4E"/>
+                </a:solidFill>
+                <a:latin typeface="Noto Sans CJK KR"/>
+              </a:defRPr>
+            </a:pPr>
+            <a:r>
+              <a:t>confidence_threshold를 0.50에서 0.70으로 바꿨을 때 어떤 검출이 제거될지 설명하고 parameter 값을 확인한다.</a:t>
+            </a:r>
           </a:p>
         </p:txBody>
       </p:sp>
@@ -12276,111 +12509,8 @@
         </p:nvSpPr>
         <p:spPr>
           <a:xfrm>
-            <a:off x="896112" y="1993392"/>
-            <a:ext cx="10332720" cy="2971800"/>
-          </a:xfrm>
-          <a:prstGeom prst="rect">
-            <a:avLst/>
-          </a:prstGeom>
-          <a:noFill/>
-        </p:spPr>
-        <p:txBody>
-          <a:bodyPr wrap="square" lIns="109728" rIns="109728">
-            <a:spAutoFit/>
-          </a:bodyPr>
-          <a:lstStyle/>
-          <a:p>
-            <a:pPr>
-              <a:spcAft>
-                <a:spcPts val="800"/>
-              </a:spcAft>
-              <a:defRPr sz="1800">
-                <a:solidFill>
-                  <a:srgbClr val="122C4E"/>
-                </a:solidFill>
-                <a:latin typeface="Noto Sans CJK KR"/>
-              </a:defRPr>
-            </a:pPr>
-            <a:r>
-              <a:t>• □ 완료 화면: /detections message 형식과 YOLO enable_yolo/model_path/threshold parameter를 확인한다.</a:t>
-            </a:r>
-          </a:p>
-          <a:p>
-            <a:pPr>
-              <a:spcAft>
-                <a:spcPts val="800"/>
-              </a:spcAft>
-              <a:defRPr sz="1800">
-                <a:solidFill>
-                  <a:srgbClr val="122C4E"/>
-                </a:solidFill>
-                <a:latin typeface="Noto Sans CJK KR"/>
-              </a:defRPr>
-            </a:pPr>
-            <a:r>
-              <a:t>• □ Complete 파일: blocks/E_autonomy_logic/M17_yolo_vision/complete/</a:t>
-            </a:r>
-          </a:p>
-          <a:p>
-            <a:pPr>
-              <a:spcAft>
-                <a:spcPts val="800"/>
-              </a:spcAft>
-              <a:defRPr sz="1800">
-                <a:solidFill>
-                  <a:srgbClr val="122C4E"/>
-                </a:solidFill>
-                <a:latin typeface="Noto Sans CJK KR"/>
-              </a:defRPr>
-            </a:pPr>
-            <a:r>
-              <a:t>• □ 정상 로그·캡처: logs/validation.log, screenshots/validation_terminal.png</a:t>
-            </a:r>
-          </a:p>
-          <a:p>
-            <a:pPr>
-              <a:spcAft>
-                <a:spcPts val="800"/>
-              </a:spcAft>
-              <a:defRPr sz="1800">
-                <a:solidFill>
-                  <a:srgbClr val="122C4E"/>
-                </a:solidFill>
-                <a:latin typeface="Noto Sans CJK KR"/>
-              </a:defRPr>
-            </a:pPr>
-            <a:r>
-              <a:t>• □ 버전 식별: CHECKSUM_or_TAG.txt의 SHA-256 manifest</a:t>
-            </a:r>
-          </a:p>
-          <a:p>
-            <a:pPr>
-              <a:spcAft>
-                <a:spcPts val="800"/>
-              </a:spcAft>
-              <a:defRPr sz="1800">
-                <a:solidFill>
-                  <a:srgbClr val="122C4E"/>
-                </a:solidFill>
-                <a:latin typeface="Noto Sans CJK KR"/>
-              </a:defRPr>
-            </a:pPr>
-            <a:r>
-              <a:t>• □ 다음 시작 조건: M18 safety fusion</a:t>
-            </a:r>
-          </a:p>
-        </p:txBody>
-      </p:sp>
-      <p:sp>
-        <p:nvSpPr>
-          <p:cNvPr id="9" name="TextBox 8"/>
-          <p:cNvSpPr txBox="1"/>
-          <p:nvPr/>
-        </p:nvSpPr>
-        <p:spPr>
-          <a:xfrm>
-            <a:off x="868680" y="5596128"/>
-            <a:ext cx="10515600" cy="338328"/>
+            <a:off x="877824" y="4590288"/>
+            <a:ext cx="10241280" cy="594360"/>
           </a:xfrm>
           <a:prstGeom prst="rect">
             <a:avLst/>
@@ -12397,15 +12527,15 @@
               <a:spcAft>
                 <a:spcPts val="0"/>
               </a:spcAft>
-              <a:defRPr sz="1700" b="1">
-                <a:solidFill>
-                  <a:srgbClr val="2A8B5A"/>
-                </a:solidFill>
-                <a:latin typeface="Noto Sans CJK KR"/>
-              </a:defRPr>
-            </a:pPr>
-            <a:r>
-              <a:t>다음 모듈을 시작하기 전, 이 슬라이드의 Complete와 다음 모듈의 Starter를 비교합니다.</a:t>
+              <a:defRPr sz="1900" b="1">
+                <a:solidFill>
+                  <a:srgbClr val="DB7E22"/>
+                </a:solidFill>
+                <a:latin typeface="Noto Sans CJK KR"/>
+              </a:defRPr>
+            </a:pPr>
+            <a:r>
+              <a:t>기록할 것: 바꾼 값(단위) · 기대한 변화 · 실제 출력/화면 · 원래 값으로 되돌린 결과</a:t>
             </a:r>
           </a:p>
         </p:txBody>
@@ -12462,6 +12592,425 @@
               </a:defRPr>
             </a:pPr>
             <a:r>
+              <a:t>체크포인트를 저장하고 다음 모듈로 넘긴다</a:t>
+            </a:r>
+          </a:p>
+        </p:txBody>
+      </p:sp>
+      <p:sp>
+        <p:nvSpPr>
+          <p:cNvPr id="3" name="TextBox 2"/>
+          <p:cNvSpPr txBox="1"/>
+          <p:nvPr/>
+        </p:nvSpPr>
+        <p:spPr>
+          <a:xfrm>
+            <a:off x="603504" y="859536"/>
+            <a:ext cx="10698480" cy="292608"/>
+          </a:xfrm>
+          <a:prstGeom prst="rect">
+            <a:avLst/>
+          </a:prstGeom>
+          <a:noFill/>
+        </p:spPr>
+        <p:txBody>
+          <a:bodyPr wrap="square" lIns="73152" rIns="73152" tIns="36576" bIns="36576">
+            <a:spAutoFit/>
+          </a:bodyPr>
+          <a:lstStyle/>
+          <a:p>
+            <a:pPr algn="l">
+              <a:spcAft>
+                <a:spcPts val="0"/>
+              </a:spcAft>
+              <a:defRPr sz="1700" b="0">
+                <a:solidFill>
+                  <a:srgbClr val="5C6672"/>
+                </a:solidFill>
+                <a:latin typeface="Noto Sans CJK KR"/>
+              </a:defRPr>
+            </a:pPr>
+            <a:r>
+              <a:t>현재 Complete는 다음 Starter의 기준선입니다.</a:t>
+            </a:r>
+          </a:p>
+        </p:txBody>
+      </p:sp>
+      <p:sp>
+        <p:nvSpPr>
+          <p:cNvPr id="4" name="TextBox 3"/>
+          <p:cNvSpPr txBox="1"/>
+          <p:nvPr/>
+        </p:nvSpPr>
+        <p:spPr>
+          <a:xfrm>
+            <a:off x="530352" y="6510528"/>
+            <a:ext cx="7772400" cy="201168"/>
+          </a:xfrm>
+          <a:prstGeom prst="rect">
+            <a:avLst/>
+          </a:prstGeom>
+          <a:noFill/>
+        </p:spPr>
+        <p:txBody>
+          <a:bodyPr wrap="square" lIns="73152" rIns="73152" tIns="36576" bIns="36576">
+            <a:spAutoFit/>
+          </a:bodyPr>
+          <a:lstStyle/>
+          <a:p>
+            <a:pPr algn="l">
+              <a:spcAft>
+                <a:spcPts val="0"/>
+              </a:spcAft>
+              <a:defRPr sz="1000" b="0">
+                <a:solidFill>
+                  <a:srgbClr val="5C6672"/>
+                </a:solidFill>
+                <a:latin typeface="Noto Sans CJK KR"/>
+              </a:defRPr>
+            </a:pPr>
+            <a:r>
+              <a:t>ROS 2 Jazzy · Gazebo Harmonic · M17 · 따라 하기형 AGV 실습</a:t>
+            </a:r>
+          </a:p>
+        </p:txBody>
+      </p:sp>
+      <p:sp>
+        <p:nvSpPr>
+          <p:cNvPr id="5" name="TextBox 4"/>
+          <p:cNvSpPr txBox="1"/>
+          <p:nvPr/>
+        </p:nvSpPr>
+        <p:spPr>
+          <a:xfrm>
+            <a:off x="9144000" y="6510528"/>
+            <a:ext cx="2468880" cy="201168"/>
+          </a:xfrm>
+          <a:prstGeom prst="rect">
+            <a:avLst/>
+          </a:prstGeom>
+          <a:noFill/>
+        </p:spPr>
+        <p:txBody>
+          <a:bodyPr wrap="square" lIns="73152" rIns="73152" tIns="36576" bIns="36576">
+            <a:spAutoFit/>
+          </a:bodyPr>
+          <a:lstStyle/>
+          <a:p>
+            <a:pPr algn="r">
+              <a:spcAft>
+                <a:spcPts val="0"/>
+              </a:spcAft>
+              <a:defRPr sz="1000" b="0">
+                <a:solidFill>
+                  <a:srgbClr val="5C6672"/>
+                </a:solidFill>
+                <a:latin typeface="Noto Sans CJK KR"/>
+              </a:defRPr>
+            </a:pPr>
+            <a:r>
+              <a:t>명령·파일 경로는 슬라이드에서 복사 가능</a:t>
+            </a:r>
+          </a:p>
+        </p:txBody>
+      </p:sp>
+      <p:sp>
+        <p:nvSpPr>
+          <p:cNvPr id="6" name="Rectangle 5"/>
+          <p:cNvSpPr/>
+          <p:nvPr/>
+        </p:nvSpPr>
+        <p:spPr>
+          <a:xfrm>
+            <a:off x="566928" y="1188720"/>
+            <a:ext cx="11064240" cy="347472"/>
+          </a:xfrm>
+          <a:prstGeom prst="rect">
+            <a:avLst/>
+          </a:prstGeom>
+          <a:solidFill>
+            <a:srgbClr val="F4F7FB"/>
+          </a:solidFill>
+          <a:ln>
+            <a:solidFill>
+              <a:srgbClr val="F4F7FB"/>
+            </a:solidFill>
+          </a:ln>
+        </p:spPr>
+        <p:style>
+          <a:lnRef idx="1">
+            <a:schemeClr val="accent1"/>
+          </a:lnRef>
+          <a:fillRef idx="3">
+            <a:schemeClr val="accent1"/>
+          </a:fillRef>
+          <a:effectRef idx="2">
+            <a:schemeClr val="accent1"/>
+          </a:effectRef>
+          <a:fontRef idx="minor">
+            <a:schemeClr val="lt1"/>
+          </a:fontRef>
+        </p:style>
+        <p:txBody>
+          <a:bodyPr rtlCol="0" anchor="ctr" wrap="square" lIns="73152" rIns="73152" tIns="36576" bIns="36576"/>
+          <a:lstStyle/>
+          <a:p>
+            <a:pPr algn="l">
+              <a:spcAft>
+                <a:spcPts val="0"/>
+              </a:spcAft>
+              <a:defRPr sz="1300" b="1">
+                <a:solidFill>
+                  <a:srgbClr val="122C4E"/>
+                </a:solidFill>
+                <a:latin typeface="Noto Sans CJK KR"/>
+              </a:defRPr>
+            </a:pPr>
+            <a:r>
+              <a:t>현재 단계 체크포인트    |    현재 폴더 ~/agv_ws    |    현재 터미널</a:t>
+            </a:r>
+          </a:p>
+        </p:txBody>
+      </p:sp>
+      <p:sp>
+        <p:nvSpPr>
+          <p:cNvPr id="7" name="Rounded Rectangle 6"/>
+          <p:cNvSpPr/>
+          <p:nvPr/>
+        </p:nvSpPr>
+        <p:spPr>
+          <a:xfrm>
+            <a:off x="685800" y="1737360"/>
+            <a:ext cx="10972800" cy="3611880"/>
+          </a:xfrm>
+          <a:prstGeom prst="roundRect">
+            <a:avLst/>
+          </a:prstGeom>
+          <a:solidFill>
+            <a:srgbClr val="F4F7FB"/>
+          </a:solidFill>
+          <a:ln>
+            <a:solidFill>
+              <a:srgbClr val="D2DCE8"/>
+            </a:solidFill>
+          </a:ln>
+        </p:spPr>
+        <p:style>
+          <a:lnRef idx="1">
+            <a:schemeClr val="accent1"/>
+          </a:lnRef>
+          <a:fillRef idx="3">
+            <a:schemeClr val="accent1"/>
+          </a:fillRef>
+          <a:effectRef idx="2">
+            <a:schemeClr val="accent1"/>
+          </a:effectRef>
+          <a:fontRef idx="minor">
+            <a:schemeClr val="lt1"/>
+          </a:fontRef>
+        </p:style>
+        <p:txBody>
+          <a:bodyPr rtlCol="0" anchor="ctr"/>
+          <a:lstStyle/>
+          <a:p>
+            <a:pPr algn="ctr"/>
+          </a:p>
+        </p:txBody>
+      </p:sp>
+      <p:sp>
+        <p:nvSpPr>
+          <p:cNvPr id="8" name="TextBox 7"/>
+          <p:cNvSpPr txBox="1"/>
+          <p:nvPr/>
+        </p:nvSpPr>
+        <p:spPr>
+          <a:xfrm>
+            <a:off x="896112" y="1993392"/>
+            <a:ext cx="10332720" cy="2971800"/>
+          </a:xfrm>
+          <a:prstGeom prst="rect">
+            <a:avLst/>
+          </a:prstGeom>
+          <a:noFill/>
+        </p:spPr>
+        <p:txBody>
+          <a:bodyPr wrap="square" lIns="109728" rIns="109728">
+            <a:spAutoFit/>
+          </a:bodyPr>
+          <a:lstStyle/>
+          <a:p>
+            <a:pPr>
+              <a:spcAft>
+                <a:spcPts val="800"/>
+              </a:spcAft>
+              <a:defRPr sz="1800">
+                <a:solidFill>
+                  <a:srgbClr val="122C4E"/>
+                </a:solidFill>
+                <a:latin typeface="Noto Sans CJK KR"/>
+              </a:defRPr>
+            </a:pPr>
+            <a:r>
+              <a:t>• □ 완료 화면: /detections message 형식과 YOLO enable_yolo/model_path/threshold parameter를 확인한다.</a:t>
+            </a:r>
+          </a:p>
+          <a:p>
+            <a:pPr>
+              <a:spcAft>
+                <a:spcPts val="800"/>
+              </a:spcAft>
+              <a:defRPr sz="1800">
+                <a:solidFill>
+                  <a:srgbClr val="122C4E"/>
+                </a:solidFill>
+                <a:latin typeface="Noto Sans CJK KR"/>
+              </a:defRPr>
+            </a:pPr>
+            <a:r>
+              <a:t>• □ Complete 파일: blocks/E_autonomy_logic/M17_yolo_vision/complete/</a:t>
+            </a:r>
+          </a:p>
+          <a:p>
+            <a:pPr>
+              <a:spcAft>
+                <a:spcPts val="800"/>
+              </a:spcAft>
+              <a:defRPr sz="1800">
+                <a:solidFill>
+                  <a:srgbClr val="122C4E"/>
+                </a:solidFill>
+                <a:latin typeface="Noto Sans CJK KR"/>
+              </a:defRPr>
+            </a:pPr>
+            <a:r>
+              <a:t>• □ 정상 로그·캡처: logs/validation.log, screenshots/validation_terminal.png</a:t>
+            </a:r>
+          </a:p>
+          <a:p>
+            <a:pPr>
+              <a:spcAft>
+                <a:spcPts val="800"/>
+              </a:spcAft>
+              <a:defRPr sz="1800">
+                <a:solidFill>
+                  <a:srgbClr val="122C4E"/>
+                </a:solidFill>
+                <a:latin typeface="Noto Sans CJK KR"/>
+              </a:defRPr>
+            </a:pPr>
+            <a:r>
+              <a:t>• □ 버전 식별: CHECKSUM_or_TAG.txt의 SHA-256 manifest</a:t>
+            </a:r>
+          </a:p>
+          <a:p>
+            <a:pPr>
+              <a:spcAft>
+                <a:spcPts val="800"/>
+              </a:spcAft>
+              <a:defRPr sz="1800">
+                <a:solidFill>
+                  <a:srgbClr val="122C4E"/>
+                </a:solidFill>
+                <a:latin typeface="Noto Sans CJK KR"/>
+              </a:defRPr>
+            </a:pPr>
+            <a:r>
+              <a:t>• □ 다음 시작 조건: M18 safety fusion</a:t>
+            </a:r>
+          </a:p>
+        </p:txBody>
+      </p:sp>
+      <p:sp>
+        <p:nvSpPr>
+          <p:cNvPr id="9" name="TextBox 8"/>
+          <p:cNvSpPr txBox="1"/>
+          <p:nvPr/>
+        </p:nvSpPr>
+        <p:spPr>
+          <a:xfrm>
+            <a:off x="868680" y="5596128"/>
+            <a:ext cx="10515600" cy="338328"/>
+          </a:xfrm>
+          <a:prstGeom prst="rect">
+            <a:avLst/>
+          </a:prstGeom>
+          <a:noFill/>
+        </p:spPr>
+        <p:txBody>
+          <a:bodyPr wrap="square" lIns="73152" rIns="73152" tIns="36576" bIns="36576">
+            <a:spAutoFit/>
+          </a:bodyPr>
+          <a:lstStyle/>
+          <a:p>
+            <a:pPr algn="ctr">
+              <a:spcAft>
+                <a:spcPts val="0"/>
+              </a:spcAft>
+              <a:defRPr sz="1700" b="1">
+                <a:solidFill>
+                  <a:srgbClr val="2A8B5A"/>
+                </a:solidFill>
+                <a:latin typeface="Noto Sans CJK KR"/>
+              </a:defRPr>
+            </a:pPr>
+            <a:r>
+              <a:t>다음 모듈을 시작하기 전, 이 슬라이드의 Complete와 다음 모듈의 Starter를 비교합니다.</a:t>
+            </a:r>
+          </a:p>
+        </p:txBody>
+      </p:sp>
+    </p:spTree>
+  </p:cSld>
+  <p:clrMapOvr>
+    <a:masterClrMapping/>
+  </p:clrMapOvr>
+</p:sld>
+</file>
+
+<file path=ppt/slides/slide25.xml><?xml version="1.0" encoding="utf-8"?>
+<p:sld xmlns:a="http://schemas.openxmlformats.org/drawingml/2006/main" xmlns:p="http://schemas.openxmlformats.org/presentationml/2006/main" xmlns:r="http://schemas.openxmlformats.org/officeDocument/2006/relationships">
+  <p:cSld>
+    <p:spTree>
+      <p:nvGrpSpPr>
+        <p:cNvPr id="1" name=""/>
+        <p:cNvGrpSpPr/>
+        <p:nvPr/>
+      </p:nvGrpSpPr>
+      <p:grpSpPr/>
+      <p:sp>
+        <p:nvSpPr>
+          <p:cNvPr id="2" name="TextBox 1"/>
+          <p:cNvSpPr txBox="1"/>
+          <p:nvPr/>
+        </p:nvSpPr>
+        <p:spPr>
+          <a:xfrm>
+            <a:off x="566928" y="347472"/>
+            <a:ext cx="10881360" cy="438912"/>
+          </a:xfrm>
+          <a:prstGeom prst="rect">
+            <a:avLst/>
+          </a:prstGeom>
+          <a:noFill/>
+        </p:spPr>
+        <p:txBody>
+          <a:bodyPr wrap="square" lIns="73152" rIns="73152" tIns="36576" bIns="36576">
+            <a:spAutoFit/>
+          </a:bodyPr>
+          <a:lstStyle/>
+          <a:p>
+            <a:pPr algn="l">
+              <a:spcAft>
+                <a:spcPts val="0"/>
+              </a:spcAft>
+              <a:defRPr sz="3200" b="1">
+                <a:solidFill>
+                  <a:srgbClr val="122C4E"/>
+                </a:solidFill>
+                <a:latin typeface="Noto Sans CJK KR"/>
+              </a:defRPr>
+            </a:pPr>
+            <a:r>
               <a:t>공식 참고 자료</a:t>
             </a:r>
           </a:p>
@@ -12637,7 +13186,7 @@
         </p:nvSpPr>
         <p:spPr>
           <a:xfrm>
-            <a:off x="914400" y="1810512"/>
+            <a:off x="914400" y="1773936"/>
             <a:ext cx="3840480" cy="256032"/>
           </a:xfrm>
           <a:prstGeom prst="rect">
@@ -12676,8 +13225,8 @@
         </p:nvSpPr>
         <p:spPr>
           <a:xfrm>
-            <a:off x="914400" y="2121408"/>
-            <a:ext cx="9966960" cy="256032"/>
+            <a:off x="914400" y="2048255"/>
+            <a:ext cx="9966960" cy="475488"/>
           </a:xfrm>
           <a:prstGeom prst="rect">
             <a:avLst/>
@@ -12694,7 +13243,7 @@
               <a:spcAft>
                 <a:spcPts val="0"/>
               </a:spcAft>
-              <a:defRPr sz="1200" b="0">
+              <a:defRPr sz="1000" b="0">
                 <a:solidFill>
                   <a:srgbClr val="225B9B"/>
                 </a:solidFill>
@@ -12715,7 +13264,7 @@
         </p:nvSpPr>
         <p:spPr>
           <a:xfrm>
-            <a:off x="914400" y="2816352"/>
+            <a:off x="914400" y="2852928"/>
             <a:ext cx="3840480" cy="256032"/>
           </a:xfrm>
           <a:prstGeom prst="rect">
@@ -12755,7 +13304,7 @@
         <p:spPr>
           <a:xfrm>
             <a:off x="914400" y="3127248"/>
-            <a:ext cx="9966960" cy="256032"/>
+            <a:ext cx="9966960" cy="475488"/>
           </a:xfrm>
           <a:prstGeom prst="rect">
             <a:avLst/>
@@ -12772,7 +13321,7 @@
               <a:spcAft>
                 <a:spcPts val="0"/>
               </a:spcAft>
-              <a:defRPr sz="1200" b="0">
+              <a:defRPr sz="1000" b="0">
                 <a:solidFill>
                   <a:srgbClr val="225B9B"/>
                 </a:solidFill>
@@ -12793,7 +13342,7 @@
         </p:nvSpPr>
         <p:spPr>
           <a:xfrm>
-            <a:off x="914400" y="3822191"/>
+            <a:off x="914400" y="3931920"/>
             <a:ext cx="3840480" cy="256032"/>
           </a:xfrm>
           <a:prstGeom prst="rect">
@@ -12832,8 +13381,8 @@
         </p:nvSpPr>
         <p:spPr>
           <a:xfrm>
-            <a:off x="914400" y="4133087"/>
-            <a:ext cx="9966960" cy="256032"/>
+            <a:off x="914400" y="4206240"/>
+            <a:ext cx="9966960" cy="475488"/>
           </a:xfrm>
           <a:prstGeom prst="rect">
             <a:avLst/>
@@ -12850,7 +13399,7 @@
               <a:spcAft>
                 <a:spcPts val="0"/>
               </a:spcAft>
-              <a:defRPr sz="1200" b="0">
+              <a:defRPr sz="1000" b="0">
                 <a:solidFill>
                   <a:srgbClr val="225B9B"/>
                 </a:solidFill>
@@ -12871,7 +13420,7 @@
         </p:nvSpPr>
         <p:spPr>
           <a:xfrm>
-            <a:off x="914400" y="4828032"/>
+            <a:off x="914400" y="5010912"/>
             <a:ext cx="3840480" cy="256032"/>
           </a:xfrm>
           <a:prstGeom prst="rect">
@@ -12910,8 +13459,8 @@
         </p:nvSpPr>
         <p:spPr>
           <a:xfrm>
-            <a:off x="914400" y="5138928"/>
-            <a:ext cx="9966960" cy="256032"/>
+            <a:off x="914400" y="5285232"/>
+            <a:ext cx="9966960" cy="475488"/>
           </a:xfrm>
           <a:prstGeom prst="rect">
             <a:avLst/>
@@ -12928,7 +13477,7 @@
               <a:spcAft>
                 <a:spcPts val="0"/>
               </a:spcAft>
-              <a:defRPr sz="1200" b="0">
+              <a:defRPr sz="1000" b="0">
                 <a:solidFill>
                   <a:srgbClr val="225B9B"/>
                 </a:solidFill>
@@ -15690,8 +16239,8 @@
         </p:nvSpPr>
         <p:spPr>
           <a:xfrm>
-            <a:off x="658368" y="1682496"/>
-            <a:ext cx="10972800" cy="347472"/>
+            <a:off x="658368" y="1627632"/>
+            <a:ext cx="10972800" cy="256032"/>
           </a:xfrm>
           <a:prstGeom prst="rect">
             <a:avLst/>
@@ -15708,7 +16257,7 @@
               <a:spcAft>
                 <a:spcPts val="0"/>
               </a:spcAft>
-              <a:defRPr sz="1700" b="1">
+              <a:defRPr sz="1500" b="1">
                 <a:solidFill>
                   <a:srgbClr val="122C4E"/>
                 </a:solidFill>
@@ -15729,8 +16278,8 @@
         </p:nvSpPr>
         <p:spPr>
           <a:xfrm>
-            <a:off x="658368" y="2103120"/>
-            <a:ext cx="10972800" cy="493776"/>
+            <a:off x="658368" y="1956816"/>
+            <a:ext cx="10972800" cy="603504"/>
           </a:xfrm>
           <a:prstGeom prst="rect">
             <a:avLst/>
@@ -15774,7 +16323,11 @@
               </a:defRPr>
             </a:pPr>
             <a:r>
-              <a:t>파일 생성/열기: mkdir -p ~/agv_ws/src/agv_interfaces/msg    &amp;&amp;    nano ~/agv_ws/src/agv_interfaces/msg/Detection.msg</a:t>
+              <a:t>파일 생성: mkdir -p ~/agv_ws/src/agv_interfaces/msg</a:t>
+            </a:r>
+            <a:br/>
+            <a:r>
+              <a:t>파일 열기: nano ~/agv_ws/src/agv_interfaces/msg/Detection.msg</a:t>
             </a:r>
           </a:p>
         </p:txBody>
@@ -15787,8 +16340,8 @@
         </p:nvSpPr>
         <p:spPr>
           <a:xfrm>
-            <a:off x="658368" y="2761488"/>
-            <a:ext cx="10972800" cy="3383280"/>
+            <a:off x="658368" y="2706624"/>
+            <a:ext cx="10972800" cy="3364992"/>
           </a:xfrm>
           <a:prstGeom prst="rect">
             <a:avLst/>
@@ -15873,7 +16426,7 @@
         </p:nvSpPr>
         <p:spPr>
           <a:xfrm>
-            <a:off x="749808" y="6199632"/>
+            <a:off x="749808" y="6181344"/>
             <a:ext cx="10789920" cy="201168"/>
           </a:xfrm>
           <a:prstGeom prst="rect">

--- a/blocks/E_autonomy_logic/M17_yolo_vision/M17_Camera_YOLO_Vision_Node.pptx
+++ b/blocks/E_autonomy_logic/M17_yolo_vision/M17_Camera_YOLO_Vision_Node.pptx
@@ -30,6 +30,12 @@
     <p:sldId id="278" r:id="rId30"/>
     <p:sldId id="279" r:id="rId31"/>
     <p:sldId id="280" r:id="rId32"/>
+    <p:sldId id="281" r:id="rId33"/>
+    <p:sldId id="282" r:id="rId34"/>
+    <p:sldId id="283" r:id="rId35"/>
+    <p:sldId id="284" r:id="rId36"/>
+    <p:sldId id="285" r:id="rId37"/>
+    <p:sldId id="286" r:id="rId38"/>
   </p:sldIdLst>
   <p:sldSz cx="12191999" cy="6858000" type="screen4x3"/>
   <p:notesSz cx="6858000" cy="9144000"/>
@@ -616,12 +622,12 @@
           <a:lstStyle/>
           <a:p>
             <a:r>
-              <a:t>[설명] ~/agv_ws/src/agv_interfaces/msg/DetectionArray.msg의 전체 파일을 1/1 구간으로 작성한다.</a:t>
-            </a:r>
-          </a:p>
-          <a:p>
-            <a:r>
-              <a:t>[실행] nano ~/agv_ws/src/agv_interfaces/msg/DetectionArray.msg</a:t>
+              <a:t>[설명] ~/ros2_curri/agv_ws/src/agv_interfaces/msg/DetectionArray.msg의 전체 파일을 1/1 구간으로 작성한다.</a:t>
+            </a:r>
+          </a:p>
+          <a:p>
+            <a:r>
+              <a:t>[실행] nano ~/ros2_curri/agv_ws/src/agv_interfaces/msg/DetectionArray.msg</a:t>
             </a:r>
           </a:p>
           <a:p>
@@ -706,12 +712,12 @@
           <a:lstStyle/>
           <a:p>
             <a:r>
-              <a:t>[설명] ~/agv_ws/src/agv_interfaces/CMakeLists.txt의 전체 파일을 1/1 구간으로 작성한다.</a:t>
-            </a:r>
-          </a:p>
-          <a:p>
-            <a:r>
-              <a:t>[실행] nano ~/agv_ws/src/agv_interfaces/CMakeLists.txt</a:t>
+              <a:t>[설명] ~/ros2_curri/agv_ws/src/agv_interfaces/CMakeLists.txt의 전체 파일을 1/1 구간으로 작성한다.</a:t>
+            </a:r>
+          </a:p>
+          <a:p>
+            <a:r>
+              <a:t>[실행] nano ~/ros2_curri/agv_ws/src/agv_interfaces/CMakeLists.txt</a:t>
             </a:r>
           </a:p>
           <a:p>
@@ -796,12 +802,12 @@
           <a:lstStyle/>
           <a:p>
             <a:r>
-              <a:t>[설명] ~/agv_ws/src/agv_vision/agv_vision/yolo_node.py의 전체 파일을 1/5 구간으로 작성한다.</a:t>
-            </a:r>
-          </a:p>
-          <a:p>
-            <a:r>
-              <a:t>[실행] nano ~/agv_ws/src/agv_vision/agv_vision/yolo_node.py</a:t>
+              <a:t>[설명] ~/ros2_curri/agv_ws/src/agv_vision/agv_vision/yolo_node.py의 전체 파일을 1/10 구간으로 작성한다.</a:t>
+            </a:r>
+          </a:p>
+          <a:p>
+            <a:r>
+              <a:t>[실행] nano ~/ros2_curri/agv_ws/src/agv_vision/agv_vision/yolo_node.py</a:t>
             </a:r>
           </a:p>
           <a:p>
@@ -886,12 +892,12 @@
           <a:lstStyle/>
           <a:p>
             <a:r>
-              <a:t>[설명] ~/agv_ws/src/agv_vision/agv_vision/yolo_node.py의 전체 파일을 2/5 구간으로 작성한다.</a:t>
-            </a:r>
-          </a:p>
-          <a:p>
-            <a:r>
-              <a:t>[실행] nano ~/agv_ws/src/agv_vision/agv_vision/yolo_node.py</a:t>
+              <a:t>[설명] ~/ros2_curri/agv_ws/src/agv_vision/agv_vision/yolo_node.py의 전체 파일을 2/10 구간으로 작성한다.</a:t>
+            </a:r>
+          </a:p>
+          <a:p>
+            <a:r>
+              <a:t>[실행] nano ~/ros2_curri/agv_ws/src/agv_vision/agv_vision/yolo_node.py</a:t>
             </a:r>
           </a:p>
           <a:p>
@@ -976,12 +982,12 @@
           <a:lstStyle/>
           <a:p>
             <a:r>
-              <a:t>[설명] ~/agv_ws/src/agv_vision/agv_vision/yolo_node.py의 전체 파일을 3/5 구간으로 작성한다.</a:t>
-            </a:r>
-          </a:p>
-          <a:p>
-            <a:r>
-              <a:t>[실행] nano ~/agv_ws/src/agv_vision/agv_vision/yolo_node.py</a:t>
+              <a:t>[설명] ~/ros2_curri/agv_ws/src/agv_vision/agv_vision/yolo_node.py의 전체 파일을 3/10 구간으로 작성한다.</a:t>
+            </a:r>
+          </a:p>
+          <a:p>
+            <a:r>
+              <a:t>[실행] nano ~/ros2_curri/agv_ws/src/agv_vision/agv_vision/yolo_node.py</a:t>
             </a:r>
           </a:p>
           <a:p>
@@ -1066,12 +1072,12 @@
           <a:lstStyle/>
           <a:p>
             <a:r>
-              <a:t>[설명] ~/agv_ws/src/agv_vision/agv_vision/yolo_node.py의 전체 파일을 4/5 구간으로 작성한다.</a:t>
-            </a:r>
-          </a:p>
-          <a:p>
-            <a:r>
-              <a:t>[실행] nano ~/agv_ws/src/agv_vision/agv_vision/yolo_node.py</a:t>
+              <a:t>[설명] ~/ros2_curri/agv_ws/src/agv_vision/agv_vision/yolo_node.py의 전체 파일을 4/10 구간으로 작성한다.</a:t>
+            </a:r>
+          </a:p>
+          <a:p>
+            <a:r>
+              <a:t>[실행] nano ~/ros2_curri/agv_ws/src/agv_vision/agv_vision/yolo_node.py</a:t>
             </a:r>
           </a:p>
           <a:p>
@@ -1156,12 +1162,12 @@
           <a:lstStyle/>
           <a:p>
             <a:r>
-              <a:t>[설명] ~/agv_ws/src/agv_vision/agv_vision/yolo_node.py의 전체 파일을 5/5 구간으로 작성한다.</a:t>
-            </a:r>
-          </a:p>
-          <a:p>
-            <a:r>
-              <a:t>[실행] nano ~/agv_ws/src/agv_vision/agv_vision/yolo_node.py</a:t>
+              <a:t>[설명] ~/ros2_curri/agv_ws/src/agv_vision/agv_vision/yolo_node.py의 전체 파일을 5/10 구간으로 작성한다.</a:t>
+            </a:r>
+          </a:p>
+          <a:p>
+            <a:r>
+              <a:t>[실행] nano ~/ros2_curri/agv_ws/src/agv_vision/agv_vision/yolo_node.py</a:t>
             </a:r>
           </a:p>
           <a:p>
@@ -1246,12 +1252,12 @@
           <a:lstStyle/>
           <a:p>
             <a:r>
-              <a:t>[설명] ~/agv_ws/src/agv_bringup/config/vision.yaml의 전체 파일을 1/1 구간으로 작성한다.</a:t>
-            </a:r>
-          </a:p>
-          <a:p>
-            <a:r>
-              <a:t>[실행] nano ~/agv_ws/src/agv_bringup/config/vision.yaml</a:t>
+              <a:t>[설명] ~/ros2_curri/agv_ws/src/agv_vision/agv_vision/yolo_node.py의 전체 파일을 6/10 구간으로 작성한다.</a:t>
+            </a:r>
+          </a:p>
+          <a:p>
+            <a:r>
+              <a:t>[실행] nano ~/ros2_curri/agv_ws/src/agv_vision/agv_vision/yolo_node.py</a:t>
             </a:r>
           </a:p>
           <a:p>
@@ -1336,12 +1342,12 @@
           <a:lstStyle/>
           <a:p>
             <a:r>
-              <a:t>[설명] ~/agv_ws/src/agv_vision/setup.py의 전체 파일을 1/1 구간으로 작성한다.</a:t>
-            </a:r>
-          </a:p>
-          <a:p>
-            <a:r>
-              <a:t>[실행] nano ~/agv_ws/src/agv_vision/setup.py</a:t>
+              <a:t>[설명] ~/ros2_curri/agv_ws/src/agv_vision/agv_vision/yolo_node.py의 전체 파일을 7/10 구간으로 작성한다.</a:t>
+            </a:r>
+          </a:p>
+          <a:p>
+            <a:r>
+              <a:t>[실행] nano ~/ros2_curri/agv_ws/src/agv_vision/agv_vision/yolo_node.py</a:t>
             </a:r>
           </a:p>
           <a:p>
@@ -1426,22 +1432,17 @@
           <a:lstStyle/>
           <a:p>
             <a:r>
-              <a:t>[설명] build/source/run을 생략 없이 실행한다.</a:t>
-            </a:r>
-          </a:p>
-          <a:p>
-            <a:r>
-              <a:t>[실행] source ~/agv_ws/install/setup.bash</a:t>
-            </a:r>
-          </a:p>
-          <a:p>
-            <a:r>
-              <a:t>ros2 run agv_vision yolo_node --ros-args -p enable_yolo:=false</a:t>
-            </a:r>
-          </a:p>
-          <a:p>
-            <a:r>
-              <a:t>[확인] /detections message 형식과 YOLO enable_yolo/model_path/threshold parameter를 확인한다.</a:t>
+              <a:t>[설명] ~/ros2_curri/agv_ws/src/agv_vision/agv_vision/yolo_node.py의 전체 파일을 8/10 구간으로 작성한다.</a:t>
+            </a:r>
+          </a:p>
+          <a:p>
+            <a:r>
+              <a:t>[실행] nano ~/ros2_curri/agv_ws/src/agv_vision/agv_vision/yolo_node.py</a:t>
+            </a:r>
+          </a:p>
+          <a:p>
+            <a:r>
+              <a:t>[확인] 코드를 저장하고 다음 코드 슬라이드 또는 build 단계로 이동한다.</a:t>
             </a:r>
           </a:p>
           <a:p>
@@ -1451,7 +1452,7 @@
           </a:p>
           <a:p>
             <a:r>
-              <a:t>[오류] 오류가 나면 현재 폴더, source, 파일 경로를 먼저 확인한다.</a:t>
+              <a:t>[오류] 들여쓰기·XML 태그·따옴표가 슬라이드와 정확히 같은지 확인한다.</a:t>
             </a:r>
           </a:p>
         </p:txBody>
@@ -1611,17 +1612,17 @@
           <a:lstStyle/>
           <a:p>
             <a:r>
-              <a:t>[설명] 실제 Ubuntu/ROS 2 환경에서 생성한 검증 화면이다.</a:t>
-            </a:r>
-          </a:p>
-          <a:p>
-            <a:r>
-              <a:t>[실행] 슬라이드의 명령 또는 파일 작성 단계를 진행한다.</a:t>
-            </a:r>
-          </a:p>
-          <a:p>
-            <a:r>
-              <a:t>[확인] 캡처의 명령과 다음 슬라이드의 검증 명령을 비교한다.</a:t>
+              <a:t>[설명] ~/ros2_curri/agv_ws/src/agv_vision/agv_vision/yolo_node.py의 전체 파일을 9/10 구간으로 작성한다.</a:t>
+            </a:r>
+          </a:p>
+          <a:p>
+            <a:r>
+              <a:t>[실행] nano ~/ros2_curri/agv_ws/src/agv_vision/agv_vision/yolo_node.py</a:t>
+            </a:r>
+          </a:p>
+          <a:p>
+            <a:r>
+              <a:t>[확인] 코드를 저장하고 다음 코드 슬라이드 또는 build 단계로 이동한다.</a:t>
             </a:r>
           </a:p>
           <a:p>
@@ -1631,7 +1632,7 @@
           </a:p>
           <a:p>
             <a:r>
-              <a:t>[오류] 오류가 나면 현재 폴더, source, 파일 경로를 먼저 확인한다.</a:t>
+              <a:t>[오류] 들여쓰기·XML 태그·따옴표가 슬라이드와 정확히 같은지 확인한다.</a:t>
             </a:r>
           </a:p>
         </p:txBody>
@@ -1701,27 +1702,17 @@
           <a:lstStyle/>
           <a:p>
             <a:r>
-              <a:t>[설명] 검증 명령은 GUI 결과와 별도로 실행해 재현 가능한 완료 기준을 만든다.</a:t>
-            </a:r>
-          </a:p>
-          <a:p>
-            <a:r>
-              <a:t>[실행] ros2 interface show agv_interfaces/msg/Detection</a:t>
-            </a:r>
-          </a:p>
-          <a:p>
-            <a:r>
-              <a:t>ros2 topic info /detections</a:t>
-            </a:r>
-          </a:p>
-          <a:p>
-            <a:r>
-              <a:t>ros2 param get /yolo_node confidence_threshold</a:t>
-            </a:r>
-          </a:p>
-          <a:p>
-            <a:r>
-              <a:t>[확인] /detections message 형식과 YOLO enable_yolo/model_path/threshold parameter를 확인한다.</a:t>
+              <a:t>[설명] ~/ros2_curri/agv_ws/src/agv_vision/agv_vision/yolo_node.py의 전체 파일을 10/10 구간으로 작성한다.</a:t>
+            </a:r>
+          </a:p>
+          <a:p>
+            <a:r>
+              <a:t>[실행] nano ~/ros2_curri/agv_ws/src/agv_vision/agv_vision/yolo_node.py</a:t>
+            </a:r>
+          </a:p>
+          <a:p>
+            <a:r>
+              <a:t>[확인] 코드를 저장하고 다음 코드 슬라이드 또는 build 단계로 이동한다.</a:t>
             </a:r>
           </a:p>
           <a:p>
@@ -1731,7 +1722,7 @@
           </a:p>
           <a:p>
             <a:r>
-              <a:t>[오류] 오류가 나면 현재 폴더, source, 파일 경로를 먼저 확인한다.</a:t>
+              <a:t>[오류] 들여쓰기·XML 태그·따옴표가 슬라이드와 정확히 같은지 확인한다.</a:t>
             </a:r>
           </a:p>
         </p:txBody>
@@ -1801,17 +1792,17 @@
           <a:lstStyle/>
           <a:p>
             <a:r>
-              <a:t>[설명] 오류를 대신 해결하지 말고 증상부터 우선 확인 순서대로 교육생이 실행하게 한다.</a:t>
-            </a:r>
-          </a:p>
-          <a:p>
-            <a:r>
-              <a:t>[실행] 슬라이드의 명령 또는 파일 작성 단계를 진행한다.</a:t>
-            </a:r>
-          </a:p>
-          <a:p>
-            <a:r>
-              <a:t>[확인] 수정 뒤 첫 검증 명령을 다시 실행한다.</a:t>
+              <a:t>[설명] ~/ros2_curri/agv_ws/src/agv_bringup/config/vision.yaml의 전체 파일을 1/1 구간으로 작성한다.</a:t>
+            </a:r>
+          </a:p>
+          <a:p>
+            <a:r>
+              <a:t>[실행] nano ~/ros2_curri/agv_ws/src/agv_bringup/config/vision.yaml</a:t>
+            </a:r>
+          </a:p>
+          <a:p>
+            <a:r>
+              <a:t>[확인] 코드를 저장하고 다음 코드 슬라이드 또는 build 단계로 이동한다.</a:t>
             </a:r>
           </a:p>
           <a:p>
@@ -1821,7 +1812,7 @@
           </a:p>
           <a:p>
             <a:r>
-              <a:t>[오류] 슬라이드의 두 대표 오류를 먼저 사용한다.</a:t>
+              <a:t>[오류] 들여쓰기·XML 태그·따옴표가 슬라이드와 정확히 같은지 확인한다.</a:t>
             </a:r>
           </a:p>
         </p:txBody>
@@ -1891,17 +1882,17 @@
           <a:lstStyle/>
           <a:p>
             <a:r>
-              <a:t>[설명] 교육생이 직접 한 값만 바꿔 원인과 결과를 연결하게 한다.</a:t>
-            </a:r>
-          </a:p>
-          <a:p>
-            <a:r>
-              <a:t>[실행] 슬라이드의 명령 또는 파일 작성 단계를 진행한다.</a:t>
-            </a:r>
-          </a:p>
-          <a:p>
-            <a:r>
-              <a:t>[확인] 원래 값과 변경 값을 모두 기록한다.</a:t>
+              <a:t>[설명] ~/ros2_curri/agv_ws/src/agv_vision/setup.py의 전체 파일을 1/1 구간으로 작성한다.</a:t>
+            </a:r>
+          </a:p>
+          <a:p>
+            <a:r>
+              <a:t>[실행] nano ~/ros2_curri/agv_ws/src/agv_vision/setup.py</a:t>
+            </a:r>
+          </a:p>
+          <a:p>
+            <a:r>
+              <a:t>[확인] 코드를 저장하고 다음 코드 슬라이드 또는 build 단계로 이동한다.</a:t>
             </a:r>
           </a:p>
           <a:p>
@@ -1911,7 +1902,7 @@
           </a:p>
           <a:p>
             <a:r>
-              <a:t>[오류] 오류가 나면 현재 폴더, source, 파일 경로를 먼저 확인한다.</a:t>
+              <a:t>[오류] 들여쓰기·XML 태그·따옴표가 슬라이드와 정확히 같은지 확인한다.</a:t>
             </a:r>
           </a:p>
         </p:txBody>
@@ -1981,17 +1972,22 @@
           <a:lstStyle/>
           <a:p>
             <a:r>
-              <a:t>[설명] 교육생이 Complete·캡처·로그를 저장했는지 확인하고 다음 모듈의 시작 상태를 읽는다.</a:t>
-            </a:r>
-          </a:p>
-          <a:p>
-            <a:r>
-              <a:t>[실행] 슬라이드의 명령 또는 파일 작성 단계를 진행한다.</a:t>
-            </a:r>
-          </a:p>
-          <a:p>
-            <a:r>
-              <a:t>[확인] M18 safety fusion 시작 조건을 말할 수 있다.</a:t>
+              <a:t>[설명] build/source/run을 생략 없이 실행한다.</a:t>
+            </a:r>
+          </a:p>
+          <a:p>
+            <a:r>
+              <a:t>[실행] source ~/ros2_curri/agv_ws/install/setup.bash</a:t>
+            </a:r>
+          </a:p>
+          <a:p>
+            <a:r>
+              <a:t>ros2 run agv_vision yolo_node --ros-args -p enable_yolo:=false</a:t>
+            </a:r>
+          </a:p>
+          <a:p>
+            <a:r>
+              <a:t>[확인] /detections message 형식과 YOLO enable_yolo/model_path/threshold parameter를 확인한다.</a:t>
             </a:r>
           </a:p>
           <a:p>
@@ -2071,7 +2067,7 @@
           <a:lstStyle/>
           <a:p>
             <a:r>
-              <a:t>[설명] 공식 문서는 버전 차이와 확장 학습을 확인할 때 사용한다.</a:t>
+              <a:t>[설명] 실제 Ubuntu/ROS 2 환경에서 생성한 검증 화면이다.</a:t>
             </a:r>
           </a:p>
           <a:p>
@@ -2081,7 +2077,377 @@
           </a:p>
           <a:p>
             <a:r>
-              <a:t>[확인] 학습자는 본문만으로 현재 모듈을 완료한 상태여야 한다.</a:t>
+              <a:t>[확인] 캡처의 명령과 다음 슬라이드의 검증 명령을 비교한다.</a:t>
+            </a:r>
+          </a:p>
+          <a:p>
+            <a:r>
+              <a:t>[멈춤] 교육생이 현재 체크포인트를 통과할 때까지 기다린다.</a:t>
+            </a:r>
+          </a:p>
+          <a:p>
+            <a:r>
+              <a:t>[오류] 오류가 나면 현재 폴더, source, 파일 경로를 먼저 확인한다.</a:t>
+            </a:r>
+          </a:p>
+        </p:txBody>
+      </p:sp>
+      <p:sp>
+        <p:nvSpPr>
+          <p:cNvPr id="4" name="Slide Number Placeholder 3"/>
+          <p:cNvSpPr>
+            <a:spLocks noGrp="1"/>
+          </p:cNvSpPr>
+          <p:nvPr>
+            <p:ph type="sldNum" idx="5" sz="quarter"/>
+          </p:nvPr>
+        </p:nvSpPr>
+        <p:spPr/>
+      </p:sp>
+    </p:spTree>
+  </p:cSld>
+  <p:clrMapOvr>
+    <a:masterClrMapping/>
+  </p:clrMapOvr>
+</p:notes>
+</file>
+
+<file path=ppt/notesSlides/notesSlide26.xml><?xml version="1.0" encoding="utf-8"?>
+<p:notes xmlns:a="http://schemas.openxmlformats.org/drawingml/2006/main" xmlns:p="http://schemas.openxmlformats.org/presentationml/2006/main" xmlns:r="http://schemas.openxmlformats.org/officeDocument/2006/relationships">
+  <p:cSld>
+    <p:spTree>
+      <p:nvGrpSpPr>
+        <p:cNvPr id="1" name=""/>
+        <p:cNvGrpSpPr/>
+        <p:nvPr/>
+      </p:nvGrpSpPr>
+      <p:grpSpPr>
+        <a:xfrm>
+          <a:off x="0" y="0"/>
+          <a:ext cx="0" cy="0"/>
+          <a:chOff x="0" y="0"/>
+          <a:chExt cx="0" cy="0"/>
+        </a:xfrm>
+      </p:grpSpPr>
+      <p:sp>
+        <p:nvSpPr>
+          <p:cNvPr id="2" name="Slide Image Placeholder 1"/>
+          <p:cNvSpPr>
+            <a:spLocks noGrp="1"/>
+          </p:cNvSpPr>
+          <p:nvPr>
+            <p:ph type="sldImg" idx="2"/>
+          </p:nvPr>
+        </p:nvSpPr>
+        <p:spPr/>
+      </p:sp>
+      <p:sp>
+        <p:nvSpPr>
+          <p:cNvPr id="3" name="Notes Placeholder 2"/>
+          <p:cNvSpPr>
+            <a:spLocks noGrp="1"/>
+          </p:cNvSpPr>
+          <p:nvPr>
+            <p:ph type="body" idx="3" sz="quarter"/>
+          </p:nvPr>
+        </p:nvSpPr>
+        <p:spPr/>
+        <p:txBody>
+          <a:bodyPr/>
+          <a:lstStyle/>
+          <a:p>
+            <a:r>
+              <a:t>[설명] 실제 Ubuntu/ROS 2 환경에서 생성한 검증 화면이다.</a:t>
+            </a:r>
+          </a:p>
+          <a:p>
+            <a:r>
+              <a:t>[실행] 슬라이드의 명령 또는 파일 작성 단계를 진행한다.</a:t>
+            </a:r>
+          </a:p>
+          <a:p>
+            <a:r>
+              <a:t>[확인] 캡처의 명령과 다음 슬라이드의 검증 명령을 비교한다.</a:t>
+            </a:r>
+          </a:p>
+          <a:p>
+            <a:r>
+              <a:t>[멈춤] 교육생이 현재 체크포인트를 통과할 때까지 기다린다.</a:t>
+            </a:r>
+          </a:p>
+          <a:p>
+            <a:r>
+              <a:t>[오류] 오류가 나면 현재 폴더, source, 파일 경로를 먼저 확인한다.</a:t>
+            </a:r>
+          </a:p>
+        </p:txBody>
+      </p:sp>
+      <p:sp>
+        <p:nvSpPr>
+          <p:cNvPr id="4" name="Slide Number Placeholder 3"/>
+          <p:cNvSpPr>
+            <a:spLocks noGrp="1"/>
+          </p:cNvSpPr>
+          <p:nvPr>
+            <p:ph type="sldNum" idx="5" sz="quarter"/>
+          </p:nvPr>
+        </p:nvSpPr>
+        <p:spPr/>
+      </p:sp>
+    </p:spTree>
+  </p:cSld>
+  <p:clrMapOvr>
+    <a:masterClrMapping/>
+  </p:clrMapOvr>
+</p:notes>
+</file>
+
+<file path=ppt/notesSlides/notesSlide27.xml><?xml version="1.0" encoding="utf-8"?>
+<p:notes xmlns:a="http://schemas.openxmlformats.org/drawingml/2006/main" xmlns:p="http://schemas.openxmlformats.org/presentationml/2006/main" xmlns:r="http://schemas.openxmlformats.org/officeDocument/2006/relationships">
+  <p:cSld>
+    <p:spTree>
+      <p:nvGrpSpPr>
+        <p:cNvPr id="1" name=""/>
+        <p:cNvGrpSpPr/>
+        <p:nvPr/>
+      </p:nvGrpSpPr>
+      <p:grpSpPr>
+        <a:xfrm>
+          <a:off x="0" y="0"/>
+          <a:ext cx="0" cy="0"/>
+          <a:chOff x="0" y="0"/>
+          <a:chExt cx="0" cy="0"/>
+        </a:xfrm>
+      </p:grpSpPr>
+      <p:sp>
+        <p:nvSpPr>
+          <p:cNvPr id="2" name="Slide Image Placeholder 1"/>
+          <p:cNvSpPr>
+            <a:spLocks noGrp="1"/>
+          </p:cNvSpPr>
+          <p:nvPr>
+            <p:ph type="sldImg" idx="2"/>
+          </p:nvPr>
+        </p:nvSpPr>
+        <p:spPr/>
+      </p:sp>
+      <p:sp>
+        <p:nvSpPr>
+          <p:cNvPr id="3" name="Notes Placeholder 2"/>
+          <p:cNvSpPr>
+            <a:spLocks noGrp="1"/>
+          </p:cNvSpPr>
+          <p:nvPr>
+            <p:ph type="body" idx="3" sz="quarter"/>
+          </p:nvPr>
+        </p:nvSpPr>
+        <p:spPr/>
+        <p:txBody>
+          <a:bodyPr/>
+          <a:lstStyle/>
+          <a:p>
+            <a:r>
+              <a:t>[설명] 검증 명령은 GUI 결과와 별도로 실행해 재현 가능한 완료 기준을 만든다.</a:t>
+            </a:r>
+          </a:p>
+          <a:p>
+            <a:r>
+              <a:t>[실행] ros2 interface show agv_interfaces/msg/Detection</a:t>
+            </a:r>
+          </a:p>
+          <a:p>
+            <a:r>
+              <a:t>ros2 topic info /detections</a:t>
+            </a:r>
+          </a:p>
+          <a:p>
+            <a:r>
+              <a:t>ros2 param get /yolo_node confidence_threshold</a:t>
+            </a:r>
+          </a:p>
+          <a:p>
+            <a:r>
+              <a:t>[확인] /detections message 형식과 YOLO enable_yolo/model_path/threshold parameter를 확인한다.</a:t>
+            </a:r>
+          </a:p>
+          <a:p>
+            <a:r>
+              <a:t>[멈춤] 교육생이 현재 체크포인트를 통과할 때까지 기다린다.</a:t>
+            </a:r>
+          </a:p>
+          <a:p>
+            <a:r>
+              <a:t>[오류] 오류가 나면 현재 폴더, source, 파일 경로를 먼저 확인한다.</a:t>
+            </a:r>
+          </a:p>
+        </p:txBody>
+      </p:sp>
+      <p:sp>
+        <p:nvSpPr>
+          <p:cNvPr id="4" name="Slide Number Placeholder 3"/>
+          <p:cNvSpPr>
+            <a:spLocks noGrp="1"/>
+          </p:cNvSpPr>
+          <p:nvPr>
+            <p:ph type="sldNum" idx="5" sz="quarter"/>
+          </p:nvPr>
+        </p:nvSpPr>
+        <p:spPr/>
+      </p:sp>
+    </p:spTree>
+  </p:cSld>
+  <p:clrMapOvr>
+    <a:masterClrMapping/>
+  </p:clrMapOvr>
+</p:notes>
+</file>
+
+<file path=ppt/notesSlides/notesSlide28.xml><?xml version="1.0" encoding="utf-8"?>
+<p:notes xmlns:a="http://schemas.openxmlformats.org/drawingml/2006/main" xmlns:p="http://schemas.openxmlformats.org/presentationml/2006/main" xmlns:r="http://schemas.openxmlformats.org/officeDocument/2006/relationships">
+  <p:cSld>
+    <p:spTree>
+      <p:nvGrpSpPr>
+        <p:cNvPr id="1" name=""/>
+        <p:cNvGrpSpPr/>
+        <p:nvPr/>
+      </p:nvGrpSpPr>
+      <p:grpSpPr>
+        <a:xfrm>
+          <a:off x="0" y="0"/>
+          <a:ext cx="0" cy="0"/>
+          <a:chOff x="0" y="0"/>
+          <a:chExt cx="0" cy="0"/>
+        </a:xfrm>
+      </p:grpSpPr>
+      <p:sp>
+        <p:nvSpPr>
+          <p:cNvPr id="2" name="Slide Image Placeholder 1"/>
+          <p:cNvSpPr>
+            <a:spLocks noGrp="1"/>
+          </p:cNvSpPr>
+          <p:nvPr>
+            <p:ph type="sldImg" idx="2"/>
+          </p:nvPr>
+        </p:nvSpPr>
+        <p:spPr/>
+      </p:sp>
+      <p:sp>
+        <p:nvSpPr>
+          <p:cNvPr id="3" name="Notes Placeholder 2"/>
+          <p:cNvSpPr>
+            <a:spLocks noGrp="1"/>
+          </p:cNvSpPr>
+          <p:nvPr>
+            <p:ph type="body" idx="3" sz="quarter"/>
+          </p:nvPr>
+        </p:nvSpPr>
+        <p:spPr/>
+        <p:txBody>
+          <a:bodyPr/>
+          <a:lstStyle/>
+          <a:p>
+            <a:r>
+              <a:t>[설명] 오류를 대신 해결하지 말고 증상부터 우선 확인 순서대로 교육생이 실행하게 한다.</a:t>
+            </a:r>
+          </a:p>
+          <a:p>
+            <a:r>
+              <a:t>[실행] 슬라이드의 명령 또는 파일 작성 단계를 진행한다.</a:t>
+            </a:r>
+          </a:p>
+          <a:p>
+            <a:r>
+              <a:t>[확인] 수정 뒤 첫 검증 명령을 다시 실행한다.</a:t>
+            </a:r>
+          </a:p>
+          <a:p>
+            <a:r>
+              <a:t>[멈춤] 교육생이 현재 체크포인트를 통과할 때까지 기다린다.</a:t>
+            </a:r>
+          </a:p>
+          <a:p>
+            <a:r>
+              <a:t>[오류] 슬라이드의 두 대표 오류를 먼저 사용한다.</a:t>
+            </a:r>
+          </a:p>
+        </p:txBody>
+      </p:sp>
+      <p:sp>
+        <p:nvSpPr>
+          <p:cNvPr id="4" name="Slide Number Placeholder 3"/>
+          <p:cNvSpPr>
+            <a:spLocks noGrp="1"/>
+          </p:cNvSpPr>
+          <p:nvPr>
+            <p:ph type="sldNum" idx="5" sz="quarter"/>
+          </p:nvPr>
+        </p:nvSpPr>
+        <p:spPr/>
+      </p:sp>
+    </p:spTree>
+  </p:cSld>
+  <p:clrMapOvr>
+    <a:masterClrMapping/>
+  </p:clrMapOvr>
+</p:notes>
+</file>
+
+<file path=ppt/notesSlides/notesSlide29.xml><?xml version="1.0" encoding="utf-8"?>
+<p:notes xmlns:a="http://schemas.openxmlformats.org/drawingml/2006/main" xmlns:p="http://schemas.openxmlformats.org/presentationml/2006/main" xmlns:r="http://schemas.openxmlformats.org/officeDocument/2006/relationships">
+  <p:cSld>
+    <p:spTree>
+      <p:nvGrpSpPr>
+        <p:cNvPr id="1" name=""/>
+        <p:cNvGrpSpPr/>
+        <p:nvPr/>
+      </p:nvGrpSpPr>
+      <p:grpSpPr>
+        <a:xfrm>
+          <a:off x="0" y="0"/>
+          <a:ext cx="0" cy="0"/>
+          <a:chOff x="0" y="0"/>
+          <a:chExt cx="0" cy="0"/>
+        </a:xfrm>
+      </p:grpSpPr>
+      <p:sp>
+        <p:nvSpPr>
+          <p:cNvPr id="2" name="Slide Image Placeholder 1"/>
+          <p:cNvSpPr>
+            <a:spLocks noGrp="1"/>
+          </p:cNvSpPr>
+          <p:nvPr>
+            <p:ph type="sldImg" idx="2"/>
+          </p:nvPr>
+        </p:nvSpPr>
+        <p:spPr/>
+      </p:sp>
+      <p:sp>
+        <p:nvSpPr>
+          <p:cNvPr id="3" name="Notes Placeholder 2"/>
+          <p:cNvSpPr>
+            <a:spLocks noGrp="1"/>
+          </p:cNvSpPr>
+          <p:nvPr>
+            <p:ph type="body" idx="3" sz="quarter"/>
+          </p:nvPr>
+        </p:nvSpPr>
+        <p:spPr/>
+        <p:txBody>
+          <a:bodyPr/>
+          <a:lstStyle/>
+          <a:p>
+            <a:r>
+              <a:t>[설명] 교육생이 직접 한 값만 바꿔 원인과 결과를 연결하게 한다.</a:t>
+            </a:r>
+          </a:p>
+          <a:p>
+            <a:r>
+              <a:t>[실행] 슬라이드의 명령 또는 파일 작성 단계를 진행한다.</a:t>
+            </a:r>
+          </a:p>
+          <a:p>
+            <a:r>
+              <a:t>[확인] 원래 값과 변경 값을 모두 기록한다.</a:t>
             </a:r>
           </a:p>
           <a:p>
@@ -2166,12 +2532,192 @@
           </a:p>
           <a:p>
             <a:r>
-              <a:t>[실행] pwd; source /opt/ros/jazzy/setup.bash; source ~/agv_ws/install/setup.bash</a:t>
+              <a:t>[실행] pwd; source /opt/ros/jazzy/setup.bash; source ~/ros2_curri/agv_ws/install/setup.bash</a:t>
             </a:r>
           </a:p>
           <a:p>
             <a:r>
               <a:t>[확인] 현재 폴더와 source 상태를 모두 확인한다.</a:t>
+            </a:r>
+          </a:p>
+          <a:p>
+            <a:r>
+              <a:t>[멈춤] 교육생이 현재 체크포인트를 통과할 때까지 기다린다.</a:t>
+            </a:r>
+          </a:p>
+          <a:p>
+            <a:r>
+              <a:t>[오류] 오류가 나면 현재 폴더, source, 파일 경로를 먼저 확인한다.</a:t>
+            </a:r>
+          </a:p>
+        </p:txBody>
+      </p:sp>
+      <p:sp>
+        <p:nvSpPr>
+          <p:cNvPr id="4" name="Slide Number Placeholder 3"/>
+          <p:cNvSpPr>
+            <a:spLocks noGrp="1"/>
+          </p:cNvSpPr>
+          <p:nvPr>
+            <p:ph type="sldNum" idx="5" sz="quarter"/>
+          </p:nvPr>
+        </p:nvSpPr>
+        <p:spPr/>
+      </p:sp>
+    </p:spTree>
+  </p:cSld>
+  <p:clrMapOvr>
+    <a:masterClrMapping/>
+  </p:clrMapOvr>
+</p:notes>
+</file>
+
+<file path=ppt/notesSlides/notesSlide30.xml><?xml version="1.0" encoding="utf-8"?>
+<p:notes xmlns:a="http://schemas.openxmlformats.org/drawingml/2006/main" xmlns:p="http://schemas.openxmlformats.org/presentationml/2006/main" xmlns:r="http://schemas.openxmlformats.org/officeDocument/2006/relationships">
+  <p:cSld>
+    <p:spTree>
+      <p:nvGrpSpPr>
+        <p:cNvPr id="1" name=""/>
+        <p:cNvGrpSpPr/>
+        <p:nvPr/>
+      </p:nvGrpSpPr>
+      <p:grpSpPr>
+        <a:xfrm>
+          <a:off x="0" y="0"/>
+          <a:ext cx="0" cy="0"/>
+          <a:chOff x="0" y="0"/>
+          <a:chExt cx="0" cy="0"/>
+        </a:xfrm>
+      </p:grpSpPr>
+      <p:sp>
+        <p:nvSpPr>
+          <p:cNvPr id="2" name="Slide Image Placeholder 1"/>
+          <p:cNvSpPr>
+            <a:spLocks noGrp="1"/>
+          </p:cNvSpPr>
+          <p:nvPr>
+            <p:ph type="sldImg" idx="2"/>
+          </p:nvPr>
+        </p:nvSpPr>
+        <p:spPr/>
+      </p:sp>
+      <p:sp>
+        <p:nvSpPr>
+          <p:cNvPr id="3" name="Notes Placeholder 2"/>
+          <p:cNvSpPr>
+            <a:spLocks noGrp="1"/>
+          </p:cNvSpPr>
+          <p:nvPr>
+            <p:ph type="body" idx="3" sz="quarter"/>
+          </p:nvPr>
+        </p:nvSpPr>
+        <p:spPr/>
+        <p:txBody>
+          <a:bodyPr/>
+          <a:lstStyle/>
+          <a:p>
+            <a:r>
+              <a:t>[설명] 교육생이 Complete·캡처·로그를 저장했는지 확인하고 다음 모듈의 시작 상태를 읽는다.</a:t>
+            </a:r>
+          </a:p>
+          <a:p>
+            <a:r>
+              <a:t>[실행] 슬라이드의 명령 또는 파일 작성 단계를 진행한다.</a:t>
+            </a:r>
+          </a:p>
+          <a:p>
+            <a:r>
+              <a:t>[확인] M18 safety fusion 시작 조건을 말할 수 있다.</a:t>
+            </a:r>
+          </a:p>
+          <a:p>
+            <a:r>
+              <a:t>[멈춤] 교육생이 현재 체크포인트를 통과할 때까지 기다린다.</a:t>
+            </a:r>
+          </a:p>
+          <a:p>
+            <a:r>
+              <a:t>[오류] 오류가 나면 현재 폴더, source, 파일 경로를 먼저 확인한다.</a:t>
+            </a:r>
+          </a:p>
+        </p:txBody>
+      </p:sp>
+      <p:sp>
+        <p:nvSpPr>
+          <p:cNvPr id="4" name="Slide Number Placeholder 3"/>
+          <p:cNvSpPr>
+            <a:spLocks noGrp="1"/>
+          </p:cNvSpPr>
+          <p:nvPr>
+            <p:ph type="sldNum" idx="5" sz="quarter"/>
+          </p:nvPr>
+        </p:nvSpPr>
+        <p:spPr/>
+      </p:sp>
+    </p:spTree>
+  </p:cSld>
+  <p:clrMapOvr>
+    <a:masterClrMapping/>
+  </p:clrMapOvr>
+</p:notes>
+</file>
+
+<file path=ppt/notesSlides/notesSlide31.xml><?xml version="1.0" encoding="utf-8"?>
+<p:notes xmlns:a="http://schemas.openxmlformats.org/drawingml/2006/main" xmlns:p="http://schemas.openxmlformats.org/presentationml/2006/main" xmlns:r="http://schemas.openxmlformats.org/officeDocument/2006/relationships">
+  <p:cSld>
+    <p:spTree>
+      <p:nvGrpSpPr>
+        <p:cNvPr id="1" name=""/>
+        <p:cNvGrpSpPr/>
+        <p:nvPr/>
+      </p:nvGrpSpPr>
+      <p:grpSpPr>
+        <a:xfrm>
+          <a:off x="0" y="0"/>
+          <a:ext cx="0" cy="0"/>
+          <a:chOff x="0" y="0"/>
+          <a:chExt cx="0" cy="0"/>
+        </a:xfrm>
+      </p:grpSpPr>
+      <p:sp>
+        <p:nvSpPr>
+          <p:cNvPr id="2" name="Slide Image Placeholder 1"/>
+          <p:cNvSpPr>
+            <a:spLocks noGrp="1"/>
+          </p:cNvSpPr>
+          <p:nvPr>
+            <p:ph type="sldImg" idx="2"/>
+          </p:nvPr>
+        </p:nvSpPr>
+        <p:spPr/>
+      </p:sp>
+      <p:sp>
+        <p:nvSpPr>
+          <p:cNvPr id="3" name="Notes Placeholder 2"/>
+          <p:cNvSpPr>
+            <a:spLocks noGrp="1"/>
+          </p:cNvSpPr>
+          <p:nvPr>
+            <p:ph type="body" idx="3" sz="quarter"/>
+          </p:nvPr>
+        </p:nvSpPr>
+        <p:spPr/>
+        <p:txBody>
+          <a:bodyPr/>
+          <a:lstStyle/>
+          <a:p>
+            <a:r>
+              <a:t>[설명] 공식 문서는 버전 차이와 확장 학습을 확인할 때 사용한다.</a:t>
+            </a:r>
+          </a:p>
+          <a:p>
+            <a:r>
+              <a:t>[실행] 슬라이드의 명령 또는 파일 작성 단계를 진행한다.</a:t>
+            </a:r>
+          </a:p>
+          <a:p>
+            <a:r>
+              <a:t>[확인] 학습자는 본문만으로 현재 모듈을 완료한 상태여야 한다.</a:t>
             </a:r>
           </a:p>
           <a:p>
@@ -2526,7 +3072,7 @@
           </a:p>
           <a:p>
             <a:r>
-              <a:t>[실행] cd ~/agv_ws</a:t>
+              <a:t>[실행] cd ~/ros2_curri/agv_ws</a:t>
             </a:r>
           </a:p>
           <a:p>
@@ -2726,12 +3272,12 @@
           <a:lstStyle/>
           <a:p>
             <a:r>
-              <a:t>[설명] ~/agv_ws/src/agv_interfaces/msg/Detection.msg의 전체 파일을 1/1 구간으로 작성한다.</a:t>
-            </a:r>
-          </a:p>
-          <a:p>
-            <a:r>
-              <a:t>[실행] nano ~/agv_ws/src/agv_interfaces/msg/Detection.msg</a:t>
+              <a:t>[설명] ~/ros2_curri/agv_ws/src/agv_interfaces/msg/Detection.msg의 전체 파일을 1/1 구간으로 작성한다.</a:t>
+            </a:r>
+          </a:p>
+          <a:p>
+            <a:r>
+              <a:t>[실행] nano ~/ros2_curri/agv_ws/src/agv_interfaces/msg/Detection.msg</a:t>
             </a:r>
           </a:p>
           <a:p>
@@ -6158,7 +6704,7 @@
               </a:defRPr>
             </a:pPr>
             <a:r>
-              <a:t>~/agv_ws/src/agv_interfaces/msg/DetectionArray.msg</a:t>
+              <a:t>~/ros2_curri/agv_ws/src/agv_interfaces/msg/DetectionArray.msg</a:t>
             </a:r>
           </a:p>
         </p:txBody>
@@ -6294,7 +6840,7 @@
               </a:defRPr>
             </a:pPr>
             <a:r>
-              <a:t>현재 단계 4/5    |    현재 폴더 ~/agv_ws    |    현재 터미널</a:t>
+              <a:t>현재 단계 4/5    |    현재 폴더 ~/ros2_curri/agv_ws    |    현재 터미널</a:t>
             </a:r>
           </a:p>
         </p:txBody>
@@ -6391,11 +6937,11 @@
               </a:defRPr>
             </a:pPr>
             <a:r>
-              <a:t>파일 생성: mkdir -p ~/agv_ws/src/agv_interfaces/msg</a:t>
+              <a:t>파일 생성: mkdir -p ~/ros2_curri/agv_ws/src/agv_interfaces/msg</a:t>
             </a:r>
             <a:br/>
             <a:r>
-              <a:t>파일 열기: nano ~/agv_ws/src/agv_interfaces/msg/DetectionArray.msg</a:t>
+              <a:t>파일 열기: nano ~/ros2_curri/agv_ws/src/agv_interfaces/msg/DetectionArray.msg</a:t>
             </a:r>
           </a:p>
         </p:txBody>
@@ -6592,7 +7138,7 @@
               </a:defRPr>
             </a:pPr>
             <a:r>
-              <a:t>~/agv_ws/src/agv_interfaces/CMakeLists.txt</a:t>
+              <a:t>~/ros2_curri/agv_ws/src/agv_interfaces/CMakeLists.txt</a:t>
             </a:r>
           </a:p>
         </p:txBody>
@@ -6728,7 +7274,7 @@
               </a:defRPr>
             </a:pPr>
             <a:r>
-              <a:t>현재 단계 5/6    |    현재 폴더 ~/agv_ws    |    현재 터미널</a:t>
+              <a:t>현재 단계 5/6    |    현재 폴더 ~/ros2_curri/agv_ws    |    현재 터미널</a:t>
             </a:r>
           </a:p>
         </p:txBody>
@@ -6825,11 +7371,11 @@
               </a:defRPr>
             </a:pPr>
             <a:r>
-              <a:t>파일 생성: mkdir -p ~/agv_ws/src/agv_interfaces</a:t>
+              <a:t>파일 생성: mkdir -p ~/ros2_curri/agv_ws/src/agv_interfaces</a:t>
             </a:r>
             <a:br/>
             <a:r>
-              <a:t>파일 열기: nano ~/agv_ws/src/agv_interfaces/CMakeLists.txt</a:t>
+              <a:t>파일 열기: nano ~/ros2_curri/agv_ws/src/agv_interfaces/CMakeLists.txt</a:t>
             </a:r>
           </a:p>
         </p:txBody>
@@ -7011,7 +7557,7 @@
               </a:defRPr>
             </a:pPr>
             <a:r>
-              <a:t>파일을 새로 만들고 저장한다 (1/5)</a:t>
+              <a:t>파일을 새로 만들고 저장한다 (1/10)</a:t>
             </a:r>
           </a:p>
         </p:txBody>
@@ -7050,7 +7596,7 @@
               </a:defRPr>
             </a:pPr>
             <a:r>
-              <a:t>~/agv_ws/src/agv_vision/agv_vision/yolo_node.py</a:t>
+              <a:t>~/ros2_curri/agv_ws/src/agv_vision/agv_vision/yolo_node.py</a:t>
             </a:r>
           </a:p>
         </p:txBody>
@@ -7186,7 +7732,7 @@
               </a:defRPr>
             </a:pPr>
             <a:r>
-              <a:t>현재 단계 6/11    |    현재 폴더 ~/agv_ws    |    현재 터미널</a:t>
+              <a:t>현재 단계 6/16    |    현재 폴더 ~/ros2_curri/agv_ws    |    현재 터미널</a:t>
             </a:r>
           </a:p>
         </p:txBody>
@@ -7283,11 +7829,11 @@
               </a:defRPr>
             </a:pPr>
             <a:r>
-              <a:t>파일 생성: mkdir -p ~/agv_ws/src/agv_vision/agv_vision</a:t>
+              <a:t>파일 생성: mkdir -p ~/ros2_curri/agv_ws/src/agv_vision/agv_vision</a:t>
             </a:r>
             <a:br/>
             <a:r>
-              <a:t>파일 열기: nano ~/agv_ws/src/agv_vision/agv_vision/yolo_node.py</a:t>
+              <a:t>파일 열기: nano ~/ros2_curri/agv_ws/src/agv_vision/agv_vision/yolo_node.py</a:t>
             </a:r>
           </a:p>
         </p:txBody>
@@ -7368,22 +7914,22 @@
               <a:t>from agv_interfaces.msg import Detection, DetectionArray</a:t>
             </a:r>
             <a:br/>
-            <a:br/>
-            <a:r>
-              <a:t>class YoloNode(Node):</a:t>
+            <a:r>
+              <a:t>import cv2</a:t>
             </a:r>
             <a:br/>
             <a:br/>
             <a:r>
+              <a:t>class YoloNode(Node):</a:t>
+            </a:r>
+            <a:br/>
+            <a:br/>
+            <a:r>
               <a:t>    def __init__(self):</a:t>
             </a:r>
             <a:br/>
             <a:r>
               <a:t>        super().__init__('yolo_node')</a:t>
-            </a:r>
-            <a:br/>
-            <a:r>
-              <a:t>        self.declare_parameter('model_path', 'yolo11n.pt')</a:t>
             </a:r>
           </a:p>
         </p:txBody>
@@ -7422,7 +7968,7 @@
               </a:defRPr>
             </a:pPr>
             <a:r>
-              <a:t>파일 전체 1/5 · 이 슬라이드 다음에 같은 파일의 나머지 줄이 이어집니다.</a:t>
+              <a:t>파일 전체 1/10 · 이 슬라이드 다음에 같은 파일의 나머지 줄이 이어집니다.</a:t>
             </a:r>
           </a:p>
         </p:txBody>
@@ -7479,7 +8025,7 @@
               </a:defRPr>
             </a:pPr>
             <a:r>
-              <a:t>파일을 계속 작성하고 저장한다 (2/5)</a:t>
+              <a:t>파일을 계속 작성하고 저장한다 (2/10)</a:t>
             </a:r>
           </a:p>
         </p:txBody>
@@ -7518,7 +8064,7 @@
               </a:defRPr>
             </a:pPr>
             <a:r>
-              <a:t>~/agv_ws/src/agv_vision/agv_vision/yolo_node.py</a:t>
+              <a:t>~/ros2_curri/agv_ws/src/agv_vision/agv_vision/yolo_node.py</a:t>
             </a:r>
           </a:p>
         </p:txBody>
@@ -7654,7 +8200,7 @@
               </a:defRPr>
             </a:pPr>
             <a:r>
-              <a:t>현재 단계 7/11    |    현재 폴더 ~/agv_ws    |    현재 터미널</a:t>
+              <a:t>현재 단계 7/16    |    현재 폴더 ~/ros2_curri/agv_ws    |    현재 터미널</a:t>
             </a:r>
           </a:p>
         </p:txBody>
@@ -7751,11 +8297,11 @@
               </a:defRPr>
             </a:pPr>
             <a:r>
-              <a:t>파일 생성: mkdir -p ~/agv_ws/src/agv_vision/agv_vision</a:t>
+              <a:t>파일 생성: mkdir -p ~/ros2_curri/agv_ws/src/agv_vision/agv_vision</a:t>
             </a:r>
             <a:br/>
             <a:r>
-              <a:t>파일 열기: nano ~/agv_ws/src/agv_vision/agv_vision/yolo_node.py</a:t>
+              <a:t>파일 열기: nano ~/ros2_curri/agv_ws/src/agv_vision/agv_vision/yolo_node.py</a:t>
             </a:r>
           </a:p>
         </p:txBody>
@@ -7813,6 +8359,10 @@
               </a:defRPr>
             </a:pPr>
             <a:r>
+              <a:t>        self.declare_parameter('model_path', 'yolo11n.pt')</a:t>
+            </a:r>
+            <a:br/>
+            <a:r>
               <a:t>        self.declare_parameter('confidence_threshold', 0.5)</a:t>
             </a:r>
             <a:br/>
@@ -7821,6 +8371,14 @@
             </a:r>
             <a:br/>
             <a:r>
+              <a:t>        self.declare_parameter('enable_red_target_fallback', True)</a:t>
+            </a:r>
+            <a:br/>
+            <a:r>
+              <a:t>        self.declare_parameter('target_width_m', 0.25)</a:t>
+            </a:r>
+            <a:br/>
+            <a:r>
               <a:t>        self.bridge = CvBridge()</a:t>
             </a:r>
             <a:br/>
@@ -7829,6 +8387,14 @@
             </a:r>
             <a:br/>
             <a:r>
+              <a:t>        self.debug_publisher = self.create_publisher(Image, '/vision/debug_image',</a:t>
+            </a:r>
+            <a:br/>
+            <a:r>
+              <a:t>            qos_profile_sensor_data)</a:t>
+            </a:r>
+            <a:br/>
+            <a:r>
               <a:t>        self.create_subscription(Image, '/camera/image_raw', self.callback,</a:t>
             </a:r>
             <a:br/>
@@ -7838,26 +8404,6 @@
             <a:br/>
             <a:r>
               <a:t>        self.model = None</a:t>
-            </a:r>
-            <a:br/>
-            <a:r>
-              <a:t>        if self.get_parameter('enable_yolo').value:</a:t>
-            </a:r>
-            <a:br/>
-            <a:r>
-              <a:t>            try:</a:t>
-            </a:r>
-            <a:br/>
-            <a:r>
-              <a:t>                from ultralytics import YOLO</a:t>
-            </a:r>
-            <a:br/>
-            <a:r>
-              <a:t>                self.model = YOLO(self.get_parameter('model_path').value)</a:t>
-            </a:r>
-            <a:br/>
-            <a:r>
-              <a:t>                self.get_logger().info('YOLO model loaded')</a:t>
             </a:r>
           </a:p>
         </p:txBody>
@@ -7896,7 +8442,7 @@
               </a:defRPr>
             </a:pPr>
             <a:r>
-              <a:t>파일 전체 2/5 · 이 슬라이드 다음에 같은 파일의 나머지 줄이 이어집니다.</a:t>
+              <a:t>파일 전체 2/10 · 이 슬라이드 다음에 같은 파일의 나머지 줄이 이어집니다.</a:t>
             </a:r>
           </a:p>
         </p:txBody>
@@ -7953,7 +8499,7 @@
               </a:defRPr>
             </a:pPr>
             <a:r>
-              <a:t>파일을 계속 작성하고 저장한다 (3/5)</a:t>
+              <a:t>파일을 계속 작성하고 저장한다 (3/10)</a:t>
             </a:r>
           </a:p>
         </p:txBody>
@@ -7992,7 +8538,7 @@
               </a:defRPr>
             </a:pPr>
             <a:r>
-              <a:t>~/agv_ws/src/agv_vision/agv_vision/yolo_node.py</a:t>
+              <a:t>~/ros2_curri/agv_ws/src/agv_vision/agv_vision/yolo_node.py</a:t>
             </a:r>
           </a:p>
         </p:txBody>
@@ -8128,7 +8674,7 @@
               </a:defRPr>
             </a:pPr>
             <a:r>
-              <a:t>현재 단계 8/11    |    현재 폴더 ~/agv_ws    |    현재 터미널</a:t>
+              <a:t>현재 단계 8/16    |    현재 폴더 ~/ros2_curri/agv_ws    |    현재 터미널</a:t>
             </a:r>
           </a:p>
         </p:txBody>
@@ -8225,11 +8771,11 @@
               </a:defRPr>
             </a:pPr>
             <a:r>
-              <a:t>파일 생성: mkdir -p ~/agv_ws/src/agv_vision/agv_vision</a:t>
+              <a:t>파일 생성: mkdir -p ~/ros2_curri/agv_ws/src/agv_vision/agv_vision</a:t>
             </a:r>
             <a:br/>
             <a:r>
-              <a:t>파일 열기: nano ~/agv_ws/src/agv_vision/agv_vision/yolo_node.py</a:t>
+              <a:t>파일 열기: nano ~/ros2_curri/agv_ws/src/agv_vision/agv_vision/yolo_node.py</a:t>
             </a:r>
           </a:p>
         </p:txBody>
@@ -8287,6 +8833,26 @@
               </a:defRPr>
             </a:pPr>
             <a:r>
+              <a:t>        if self.get_parameter('enable_yolo').value:</a:t>
+            </a:r>
+            <a:br/>
+            <a:r>
+              <a:t>            try:</a:t>
+            </a:r>
+            <a:br/>
+            <a:r>
+              <a:t>                from ultralytics import YOLO</a:t>
+            </a:r>
+            <a:br/>
+            <a:r>
+              <a:t>                self.model = YOLO(self.get_parameter('model_path').value)</a:t>
+            </a:r>
+            <a:br/>
+            <a:r>
+              <a:t>                self.get_logger().info('YOLO model loaded')</a:t>
+            </a:r>
+            <a:br/>
+            <a:r>
               <a:t>            except ImportError:</a:t>
             </a:r>
             <a:br/>
@@ -8296,39 +8862,19 @@
             <a:br/>
             <a:br/>
             <a:r>
-              <a:t>    def callback(self, image_message):</a:t>
+              <a:t>    def make_detection(self, header, class_name, confidence, x1, y1, x2, y2, image_width):</a:t>
             </a:r>
             <a:br/>
             <a:r>
-              <a:t>        output = DetectionArray(header=image_message.header)</a:t>
+              <a:t>        """Estimate distance with a pinhole model for the fixed 60-degree course camera."""</a:t>
             </a:r>
             <a:br/>
             <a:r>
-              <a:t>        if self.model is not None:</a:t>
+              <a:t>        width = max(1, x2 - x1)</a:t>
             </a:r>
             <a:br/>
             <a:r>
-              <a:t>            image = self.bridge.imgmsg_to_cv2(image_message, desired_encoding='bgr8')</a:t>
-            </a:r>
-            <a:br/>
-            <a:r>
-              <a:t>            result = self.model(image, verbose=False)[0]</a:t>
-            </a:r>
-            <a:br/>
-            <a:r>
-              <a:t>            threshold = self.get_parameter('confidence_threshold').value</a:t>
-            </a:r>
-            <a:br/>
-            <a:r>
-              <a:t>            for box in result.boxes:</a:t>
-            </a:r>
-            <a:br/>
-            <a:r>
-              <a:t>                confidence = float(box.conf[0])</a:t>
-            </a:r>
-            <a:br/>
-            <a:r>
-              <a:t>                if confidence &lt; threshold:</a:t>
+              <a:t>        focal_px = image_width / (2.0 * 0.57735)</a:t>
             </a:r>
           </a:p>
         </p:txBody>
@@ -8367,7 +8913,7 @@
               </a:defRPr>
             </a:pPr>
             <a:r>
-              <a:t>파일 전체 3/5 · 이 슬라이드 다음에 같은 파일의 나머지 줄이 이어집니다.</a:t>
+              <a:t>파일 전체 3/10 · 이 슬라이드 다음에 같은 파일의 나머지 줄이 이어집니다.</a:t>
             </a:r>
           </a:p>
         </p:txBody>
@@ -8424,7 +8970,7 @@
               </a:defRPr>
             </a:pPr>
             <a:r>
-              <a:t>파일을 계속 작성하고 저장한다 (4/5)</a:t>
+              <a:t>파일을 계속 작성하고 저장한다 (4/10)</a:t>
             </a:r>
           </a:p>
         </p:txBody>
@@ -8463,7 +9009,7 @@
               </a:defRPr>
             </a:pPr>
             <a:r>
-              <a:t>~/agv_ws/src/agv_vision/agv_vision/yolo_node.py</a:t>
+              <a:t>~/ros2_curri/agv_ws/src/agv_vision/agv_vision/yolo_node.py</a:t>
             </a:r>
           </a:p>
         </p:txBody>
@@ -8599,7 +9145,7 @@
               </a:defRPr>
             </a:pPr>
             <a:r>
-              <a:t>현재 단계 9/11    |    현재 폴더 ~/agv_ws    |    현재 터미널</a:t>
+              <a:t>현재 단계 9/16    |    현재 폴더 ~/ros2_curri/agv_ws    |    현재 터미널</a:t>
             </a:r>
           </a:p>
         </p:txBody>
@@ -8696,11 +9242,11 @@
               </a:defRPr>
             </a:pPr>
             <a:r>
-              <a:t>파일 생성: mkdir -p ~/agv_ws/src/agv_vision/agv_vision</a:t>
+              <a:t>파일 생성: mkdir -p ~/ros2_curri/agv_ws/src/agv_vision/agv_vision</a:t>
             </a:r>
             <a:br/>
             <a:r>
-              <a:t>파일 열기: nano ~/agv_ws/src/agv_vision/agv_vision/yolo_node.py</a:t>
+              <a:t>파일 열기: nano ~/ros2_curri/agv_ws/src/agv_vision/agv_vision/yolo_node.py</a:t>
             </a:r>
           </a:p>
         </p:txBody>
@@ -8758,48 +9304,45 @@
               </a:defRPr>
             </a:pPr>
             <a:r>
-              <a:t>                    continue</a:t>
+              <a:t>        distance = float(self.get_parameter('target_width_m').value) * focal_px / width</a:t>
             </a:r>
             <a:br/>
             <a:r>
-              <a:t>                x1, y1, x2, y2 = [int(value) for value in box.xyxy[0].tolist()]</a:t>
+              <a:t>        return Detection(header=header, class_name=class_name,</a:t>
             </a:r>
             <a:br/>
             <a:r>
-              <a:t>                detection = Detection(header=image_message.header,</a:t>
+              <a:t>            confidence=float(confidence), center_x=(x1 + x2) // 2,</a:t>
             </a:r>
             <a:br/>
             <a:r>
-              <a:t>                    class_name=result.names[int(box.cls[0])], confidence=confidence,</a:t>
+              <a:t>            center_y=(y1 + y2) // 2, width=width, height=max(1, y2 - y1),</a:t>
             </a:r>
             <a:br/>
             <a:r>
-              <a:t>                    center_x=(x1 + x2) // 2, center_y=(y1 + y2) // 2, width=x2 - x1,</a:t>
-            </a:r>
-            <a:br/>
-            <a:r>
-              <a:t>                    height=y2 - y1, estimated_distance=0.0)</a:t>
-            </a:r>
-            <a:br/>
-            <a:r>
-              <a:t>                output.detections.append(detection)</a:t>
-            </a:r>
-            <a:br/>
-            <a:r>
-              <a:t>        self.publisher.publish(output)</a:t>
+              <a:t>            estimated_distance=distance)</a:t>
             </a:r>
             <a:br/>
             <a:br/>
             <a:r>
-              <a:t>def main():</a:t>
+              <a:t>    def red_target_detection(self, image, header):</a:t>
             </a:r>
             <a:br/>
             <a:r>
-              <a:t>    rclpy.init()</a:t>
+              <a:t>        """Dependency-free fallback for the red target placed in warehouse.sdf.</a:t>
             </a:r>
             <a:br/>
-            <a:r>
-              <a:t>    node = YoloNode()</a:t>
+            <a:br/>
+            <a:r>
+              <a:t>        This is deliberately labelled as a fallback in the debug image.  It keeps</a:t>
+            </a:r>
+            <a:br/>
+            <a:r>
+              <a:t>        M17--M22 runnable before a learner downloads a YOLO model, while the same</a:t>
+            </a:r>
+            <a:br/>
+            <a:r>
+              <a:t>        Detection message and mission interface are used by real YOLO inference.</a:t>
             </a:r>
           </a:p>
         </p:txBody>
@@ -8838,7 +9381,7 @@
               </a:defRPr>
             </a:pPr>
             <a:r>
-              <a:t>파일 전체 4/5 · 이 슬라이드 다음에 같은 파일의 나머지 줄이 이어집니다.</a:t>
+              <a:t>파일 전체 4/10 · 이 슬라이드 다음에 같은 파일의 나머지 줄이 이어집니다.</a:t>
             </a:r>
           </a:p>
         </p:txBody>
@@ -8895,7 +9438,7 @@
               </a:defRPr>
             </a:pPr>
             <a:r>
-              <a:t>파일을 계속 작성하고 저장한다 (5/5)</a:t>
+              <a:t>파일을 계속 작성하고 저장한다 (5/10)</a:t>
             </a:r>
           </a:p>
         </p:txBody>
@@ -8934,7 +9477,7 @@
               </a:defRPr>
             </a:pPr>
             <a:r>
-              <a:t>~/agv_ws/src/agv_vision/agv_vision/yolo_node.py</a:t>
+              <a:t>~/ros2_curri/agv_ws/src/agv_vision/agv_vision/yolo_node.py</a:t>
             </a:r>
           </a:p>
         </p:txBody>
@@ -9070,7 +9613,7 @@
               </a:defRPr>
             </a:pPr>
             <a:r>
-              <a:t>현재 단계 10/11    |    현재 폴더 ~/agv_ws    |    현재 터미널</a:t>
+              <a:t>현재 단계 10/16    |    현재 폴더 ~/ros2_curri/agv_ws    |    현재 터미널</a:t>
             </a:r>
           </a:p>
         </p:txBody>
@@ -9167,11 +9710,11 @@
               </a:defRPr>
             </a:pPr>
             <a:r>
-              <a:t>파일 생성: mkdir -p ~/agv_ws/src/agv_vision/agv_vision</a:t>
+              <a:t>파일 생성: mkdir -p ~/ros2_curri/agv_ws/src/agv_vision/agv_vision</a:t>
             </a:r>
             <a:br/>
             <a:r>
-              <a:t>파일 열기: nano ~/agv_ws/src/agv_vision/agv_vision/yolo_node.py</a:t>
+              <a:t>파일 열기: nano ~/ros2_curri/agv_ws/src/agv_vision/agv_vision/yolo_node.py</a:t>
             </a:r>
           </a:p>
         </p:txBody>
@@ -9229,35 +9772,51 @@
               </a:defRPr>
             </a:pPr>
             <a:r>
-              <a:t>    try:</a:t>
+              <a:t>        """</a:t>
             </a:r>
             <a:br/>
             <a:r>
-              <a:t>        rclpy.spin(node)</a:t>
+              <a:t>        hsv = cv2.cvtColor(image, cv2.COLOR_BGR2HSV)</a:t>
             </a:r>
             <a:br/>
             <a:r>
-              <a:t>    except KeyboardInterrupt:</a:t>
+              <a:t>        lower_red = cv2.inRange(hsv, (0, 90, 70), (12, 255, 255))</a:t>
             </a:r>
             <a:br/>
             <a:r>
-              <a:t>        pass</a:t>
+              <a:t>        upper_red = cv2.inRange(hsv, (165, 90, 70), (179, 255, 255))</a:t>
             </a:r>
             <a:br/>
             <a:r>
-              <a:t>    finally:</a:t>
+              <a:t>        mask = cv2.bitwise_or(lower_red, upper_red)</a:t>
             </a:r>
             <a:br/>
             <a:r>
-              <a:t>        node.destroy_node()</a:t>
+              <a:t>        contours, _ = cv2.findContours(mask, cv2.RETR_EXTERNAL, cv2.CHAIN_APPROX_SIMPLE)</a:t>
             </a:r>
             <a:br/>
             <a:r>
-              <a:t>        if rclpy.ok():</a:t>
+              <a:t>        if not contours:</a:t>
             </a:r>
             <a:br/>
             <a:r>
-              <a:t>            rclpy.shutdown()</a:t>
+              <a:t>            return None</a:t>
+            </a:r>
+            <a:br/>
+            <a:r>
+              <a:t>        contour = max(contours, key=cv2.contourArea)</a:t>
+            </a:r>
+            <a:br/>
+            <a:r>
+              <a:t>        if cv2.contourArea(contour) &lt; 80:</a:t>
+            </a:r>
+            <a:br/>
+            <a:r>
+              <a:t>            return None</a:t>
+            </a:r>
+            <a:br/>
+            <a:r>
+              <a:t>        x, y, width, height = cv2.boundingRect(contour)</a:t>
             </a:r>
           </a:p>
         </p:txBody>
@@ -9296,7 +9855,7 @@
               </a:defRPr>
             </a:pPr>
             <a:r>
-              <a:t>파일 전체 5/5 · 이 슬라이드 다음에 같은 파일의 나머지 줄이 이어집니다.</a:t>
+              <a:t>파일 전체 5/10 · 이 슬라이드 다음에 같은 파일의 나머지 줄이 이어집니다.</a:t>
             </a:r>
           </a:p>
         </p:txBody>
@@ -9353,7 +9912,7 @@
               </a:defRPr>
             </a:pPr>
             <a:r>
-              <a:t>파일을 새로 만들고 저장한다 (1/1)</a:t>
+              <a:t>파일을 계속 작성하고 저장한다 (6/10)</a:t>
             </a:r>
           </a:p>
         </p:txBody>
@@ -9392,7 +9951,7 @@
               </a:defRPr>
             </a:pPr>
             <a:r>
-              <a:t>~/agv_ws/src/agv_bringup/config/vision.yaml</a:t>
+              <a:t>~/ros2_curri/agv_ws/src/agv_vision/agv_vision/yolo_node.py</a:t>
             </a:r>
           </a:p>
         </p:txBody>
@@ -9528,7 +10087,7 @@
               </a:defRPr>
             </a:pPr>
             <a:r>
-              <a:t>현재 단계 11/12    |    현재 폴더 ~/agv_ws    |    현재 터미널</a:t>
+              <a:t>현재 단계 11/16    |    현재 폴더 ~/ros2_curri/agv_ws    |    현재 터미널</a:t>
             </a:r>
           </a:p>
         </p:txBody>
@@ -9625,11 +10184,11 @@
               </a:defRPr>
             </a:pPr>
             <a:r>
-              <a:t>파일 생성: mkdir -p ~/agv_ws/src/agv_bringup/config</a:t>
+              <a:t>파일 생성: mkdir -p ~/ros2_curri/agv_ws/src/agv_vision/agv_vision</a:t>
             </a:r>
             <a:br/>
             <a:r>
-              <a:t>파일 열기: nano ~/agv_ws/src/agv_bringup/config/vision.yaml</a:t>
+              <a:t>파일 열기: nano ~/ros2_curri/agv_ws/src/agv_vision/agv_vision/yolo_node.py</a:t>
             </a:r>
           </a:p>
         </p:txBody>
@@ -9687,27 +10246,48 @@
               </a:defRPr>
             </a:pPr>
             <a:r>
-              <a:t>yolo_node:</a:t>
+              <a:t>        return self.make_detection(header, 'red_target_fallback', 0.9, x, y, x + width,</a:t>
             </a:r>
             <a:br/>
             <a:r>
-              <a:t>  ros__parameters:</a:t>
+              <a:t>            y + height, image.shape[1])</a:t>
             </a:r>
             <a:br/>
-            <a:r>
-              <a:t>    use_sim_time: true</a:t>
-            </a:r>
             <a:br/>
             <a:r>
-              <a:t>    enable_yolo: false</a:t>
+              <a:t>    def callback(self, image_message):</a:t>
             </a:r>
             <a:br/>
             <a:r>
-              <a:t>    model_path: yolo11n.pt</a:t>
+              <a:t>        image = self.bridge.imgmsg_to_cv2(image_message, desired_encoding='bgr8')</a:t>
             </a:r>
             <a:br/>
             <a:r>
-              <a:t>    confidence_threshold: 0.50</a:t>
+              <a:t>        debug = image.copy()</a:t>
+            </a:r>
+            <a:br/>
+            <a:r>
+              <a:t>        output = DetectionArray(header=image_message.header)</a:t>
+            </a:r>
+            <a:br/>
+            <a:r>
+              <a:t>        label = 'no detection'</a:t>
+            </a:r>
+            <a:br/>
+            <a:r>
+              <a:t>        if self.model is not None:</a:t>
+            </a:r>
+            <a:br/>
+            <a:r>
+              <a:t>            result = self.model(image, verbose=False)[0]</a:t>
+            </a:r>
+            <a:br/>
+            <a:r>
+              <a:t>            threshold = self.get_parameter('confidence_threshold').value</a:t>
+            </a:r>
+            <a:br/>
+            <a:r>
+              <a:t>            for box in result.boxes:</a:t>
             </a:r>
           </a:p>
         </p:txBody>
@@ -9746,7 +10326,7 @@
               </a:defRPr>
             </a:pPr>
             <a:r>
-              <a:t>파일 전체 1/1 · 이 슬라이드 다음에 같은 파일의 나머지 줄이 이어집니다.</a:t>
+              <a:t>파일 전체 6/10 · 이 슬라이드 다음에 같은 파일의 나머지 줄이 이어집니다.</a:t>
             </a:r>
           </a:p>
         </p:txBody>
@@ -9803,7 +10383,7 @@
               </a:defRPr>
             </a:pPr>
             <a:r>
-              <a:t>파일을 새로 만들고 저장한다 (1/1)</a:t>
+              <a:t>파일을 계속 작성하고 저장한다 (7/10)</a:t>
             </a:r>
           </a:p>
         </p:txBody>
@@ -9842,7 +10422,7 @@
               </a:defRPr>
             </a:pPr>
             <a:r>
-              <a:t>~/agv_ws/src/agv_vision/setup.py</a:t>
+              <a:t>~/ros2_curri/agv_ws/src/agv_vision/agv_vision/yolo_node.py</a:t>
             </a:r>
           </a:p>
         </p:txBody>
@@ -9978,7 +10558,7 @@
               </a:defRPr>
             </a:pPr>
             <a:r>
-              <a:t>현재 단계 12/13    |    현재 폴더 ~/agv_ws    |    현재 터미널</a:t>
+              <a:t>현재 단계 12/16    |    현재 폴더 ~/ros2_curri/agv_ws    |    현재 터미널</a:t>
             </a:r>
           </a:p>
         </p:txBody>
@@ -10075,11 +10655,11 @@
               </a:defRPr>
             </a:pPr>
             <a:r>
-              <a:t>파일 생성: mkdir -p ~/agv_ws/src/agv_vision</a:t>
+              <a:t>파일 생성: mkdir -p ~/ros2_curri/agv_ws/src/agv_vision/agv_vision</a:t>
             </a:r>
             <a:br/>
             <a:r>
-              <a:t>파일 열기: nano ~/agv_ws/src/agv_vision/setup.py</a:t>
+              <a:t>파일 열기: nano ~/ros2_curri/agv_ws/src/agv_vision/agv_vision/yolo_node.py</a:t>
             </a:r>
           </a:p>
         </p:txBody>
@@ -10137,35 +10717,51 @@
               </a:defRPr>
             </a:pPr>
             <a:r>
-              <a:t>from setuptools import find_packages, setup</a:t>
+              <a:t>                confidence = float(box.conf[0])</a:t>
             </a:r>
             <a:br/>
             <a:r>
-              <a:t>package_name = 'agv_vision'</a:t>
+              <a:t>                if confidence &lt; threshold:</a:t>
             </a:r>
             <a:br/>
             <a:r>
-              <a:t>setup(name=package_name, version='0.1.0', packages=find_packages(exclude=['test']),</a:t>
+              <a:t>                    continue</a:t>
             </a:r>
             <a:br/>
             <a:r>
-              <a:t>    data_files=[('share/ament_index/resource_index/packages',</a:t>
+              <a:t>                x1, y1, x2, y2 = [int(value) for value in box.xyxy[0].tolist()]</a:t>
             </a:r>
             <a:br/>
             <a:r>
-              <a:t>    ['resource/' + package_name]), ('share/' + package_name, ['package.xml'])],</a:t>
+              <a:t>                detection = self.make_detection(image_message.header,</a:t>
             </a:r>
             <a:br/>
             <a:r>
-              <a:t>    install_requires=['setuptools'], zip_safe=True, maintainer='AGV student',</a:t>
+              <a:t>                    result.names[int(box.cls[0])], confidence, x1, y1, x2, y2,</a:t>
             </a:r>
             <a:br/>
             <a:r>
-              <a:t>    maintainer_email='student@example.com', license='Apache-2.0',</a:t>
+              <a:t>                    image.shape[1])</a:t>
             </a:r>
             <a:br/>
             <a:r>
-              <a:t>    entry_points={'console_scripts': ['yolo_node = agv_vision.yolo_node:main']})</a:t>
+              <a:t>                output.detections.append(detection)</a:t>
+            </a:r>
+            <a:br/>
+            <a:r>
+              <a:t>                cv2.rectangle(debug, (x1, y1), (x2, y2), (30, 220, 30), 2)</a:t>
+            </a:r>
+            <a:br/>
+            <a:r>
+              <a:t>                label = f'YOLO {detection.class_name} {confidence:.2f}'</a:t>
+            </a:r>
+            <a:br/>
+            <a:r>
+              <a:t>        elif self.get_parameter('enable_red_target_fallback').value:</a:t>
+            </a:r>
+            <a:br/>
+            <a:r>
+              <a:t>            detection = self.red_target_detection(image, image_message.header)</a:t>
             </a:r>
           </a:p>
         </p:txBody>
@@ -10204,7 +10800,7 @@
               </a:defRPr>
             </a:pPr>
             <a:r>
-              <a:t>파일 전체 1/1 · 이 슬라이드 다음에 같은 파일의 나머지 줄이 이어집니다.</a:t>
+              <a:t>파일 전체 7/10 · 이 슬라이드 다음에 같은 파일의 나머지 줄이 이어집니다.</a:t>
             </a:r>
           </a:p>
         </p:txBody>
@@ -10261,7 +10857,7 @@
               </a:defRPr>
             </a:pPr>
             <a:r>
-              <a:t>build → source → run 순서로 실행한다</a:t>
+              <a:t>파일을 계속 작성하고 저장한다 (8/10)</a:t>
             </a:r>
           </a:p>
         </p:txBody>
@@ -10300,7 +10896,7 @@
               </a:defRPr>
             </a:pPr>
             <a:r>
-              <a:t>새 파일 또는 수정 파일은 build와 source 뒤에만 실행 이름·설정에 반영됩니다.</a:t>
+              <a:t>~/ros2_curri/agv_ws/src/agv_vision/agv_vision/yolo_node.py</a:t>
             </a:r>
           </a:p>
         </p:txBody>
@@ -10436,23 +11032,124 @@
               </a:defRPr>
             </a:pPr>
             <a:r>
-              <a:t>현재 단계 실행    |    현재 폴더 ~/agv_ws    |    현재 터미널</a:t>
-            </a:r>
-          </a:p>
-        </p:txBody>
-      </p:sp>
-      <p:sp>
-        <p:nvSpPr>
-          <p:cNvPr id="7" name="Rounded Rectangle 6"/>
+              <a:t>현재 단계 13/16    |    현재 폴더 ~/ros2_curri/agv_ws    |    현재 터미널</a:t>
+            </a:r>
+          </a:p>
+        </p:txBody>
+      </p:sp>
+      <p:sp>
+        <p:nvSpPr>
+          <p:cNvPr id="7" name="TextBox 6"/>
+          <p:cNvSpPr txBox="1"/>
+          <p:nvPr/>
+        </p:nvSpPr>
+        <p:spPr>
+          <a:xfrm>
+            <a:off x="658368" y="1627632"/>
+            <a:ext cx="10972800" cy="256032"/>
+          </a:xfrm>
+          <a:prstGeom prst="rect">
+            <a:avLst/>
+          </a:prstGeom>
+          <a:noFill/>
+        </p:spPr>
+        <p:txBody>
+          <a:bodyPr wrap="square" lIns="73152" rIns="73152" tIns="36576" bIns="36576">
+            <a:spAutoFit/>
+          </a:bodyPr>
+          <a:lstStyle/>
+          <a:p>
+            <a:pPr algn="l">
+              <a:spcAft>
+                <a:spcPts val="0"/>
+              </a:spcAft>
+              <a:defRPr sz="1500" b="1">
+                <a:solidFill>
+                  <a:srgbClr val="122C4E"/>
+                </a:solidFill>
+                <a:latin typeface="Noto Sans CJK KR"/>
+              </a:defRPr>
+            </a:pPr>
+            <a:r>
+              <a:t>이번 단계: 파일의 전체 내용을 중간 생략 없이 작성합니다. 아래 줄 범위를 끝까지 입력하세요.</a:t>
+            </a:r>
+          </a:p>
+        </p:txBody>
+      </p:sp>
+      <p:sp>
+        <p:nvSpPr>
+          <p:cNvPr id="8" name="Rectangle 7"/>
           <p:cNvSpPr/>
           <p:nvPr/>
         </p:nvSpPr>
         <p:spPr>
           <a:xfrm>
-            <a:off x="658368" y="1700784"/>
-            <a:ext cx="10972800" cy="3182112"/>
-          </a:xfrm>
-          <a:prstGeom prst="roundRect">
+            <a:off x="658368" y="1956816"/>
+            <a:ext cx="10972800" cy="603504"/>
+          </a:xfrm>
+          <a:prstGeom prst="rect">
+            <a:avLst/>
+          </a:prstGeom>
+          <a:solidFill>
+            <a:srgbClr val="F4F7FB"/>
+          </a:solidFill>
+          <a:ln>
+            <a:solidFill>
+              <a:srgbClr val="F4F7FB"/>
+            </a:solidFill>
+          </a:ln>
+        </p:spPr>
+        <p:style>
+          <a:lnRef idx="1">
+            <a:schemeClr val="accent1"/>
+          </a:lnRef>
+          <a:fillRef idx="3">
+            <a:schemeClr val="accent1"/>
+          </a:fillRef>
+          <a:effectRef idx="2">
+            <a:schemeClr val="accent1"/>
+          </a:effectRef>
+          <a:fontRef idx="minor">
+            <a:schemeClr val="lt1"/>
+          </a:fontRef>
+        </p:style>
+        <p:txBody>
+          <a:bodyPr rtlCol="0" anchor="ctr" wrap="square" lIns="73152" rIns="73152" tIns="36576" bIns="36576"/>
+          <a:lstStyle/>
+          <a:p>
+            <a:pPr algn="l">
+              <a:spcAft>
+                <a:spcPts val="0"/>
+              </a:spcAft>
+              <a:defRPr sz="1400" b="0">
+                <a:solidFill>
+                  <a:srgbClr val="122C4E"/>
+                </a:solidFill>
+                <a:latin typeface="DejaVu Sans Mono"/>
+              </a:defRPr>
+            </a:pPr>
+            <a:r>
+              <a:t>파일 생성: mkdir -p ~/ros2_curri/agv_ws/src/agv_vision/agv_vision</a:t>
+            </a:r>
+            <a:br/>
+            <a:r>
+              <a:t>파일 열기: nano ~/ros2_curri/agv_ws/src/agv_vision/agv_vision/yolo_node.py</a:t>
+            </a:r>
+          </a:p>
+        </p:txBody>
+      </p:sp>
+      <p:sp>
+        <p:nvSpPr>
+          <p:cNvPr id="9" name="Rectangle 8"/>
+          <p:cNvSpPr/>
+          <p:nvPr/>
+        </p:nvSpPr>
+        <p:spPr>
+          <a:xfrm>
+            <a:off x="658368" y="2706624"/>
+            <a:ext cx="10972800" cy="3364992"/>
+          </a:xfrm>
+          <a:prstGeom prst="rect">
             <a:avLst/>
           </a:prstGeom>
           <a:solidFill>
@@ -10479,14 +11176,14 @@
           </a:fontRef>
         </p:style>
         <p:txBody>
-          <a:bodyPr rtlCol="0" anchor="ctr" wrap="square" lIns="73152" rIns="73152" tIns="36576" bIns="36576"/>
+          <a:bodyPr rtlCol="0" anchor="ctr" wrap="square" lIns="164592" rIns="164592" tIns="109728" bIns="36576"/>
           <a:lstStyle/>
           <a:p>
             <a:pPr algn="l">
               <a:spcAft>
                 <a:spcPts val="0"/>
               </a:spcAft>
-              <a:defRPr sz="1600" b="0">
+              <a:defRPr sz="1400" b="0">
                 <a:solidFill>
                   <a:srgbClr val="FFFFFF"/>
                 </a:solidFill>
@@ -10494,25 +11191,65 @@
               </a:defRPr>
             </a:pPr>
             <a:r>
-              <a:t>source ~/agv_ws/install/setup.bash</a:t>
+              <a:t>            if detection is not None:</a:t>
             </a:r>
             <a:br/>
             <a:r>
-              <a:t>ros2 run agv_vision yolo_node --ros-args -p enable_yolo:=false</a:t>
-            </a:r>
-          </a:p>
-        </p:txBody>
-      </p:sp>
-      <p:sp>
-        <p:nvSpPr>
-          <p:cNvPr id="8" name="TextBox 7"/>
+              <a:t>                output.detections.append(detection)</a:t>
+            </a:r>
+            <a:br/>
+            <a:r>
+              <a:t>                x1 = detection.center_x - detection.width // 2</a:t>
+            </a:r>
+            <a:br/>
+            <a:r>
+              <a:t>                y1 = detection.center_y - detection.height // 2</a:t>
+            </a:r>
+            <a:br/>
+            <a:r>
+              <a:t>                x2, y2 = (x1 + detection.width, y1 + detection.height)</a:t>
+            </a:r>
+            <a:br/>
+            <a:r>
+              <a:t>                cv2.rectangle(debug, (x1, y1), (x2, y2), (0, 215, 255), 2)</a:t>
+            </a:r>
+            <a:br/>
+            <a:r>
+              <a:t>                label = f'course fallback target {detection.estimated_distance:.2f} m'</a:t>
+            </a:r>
+            <a:br/>
+            <a:r>
+              <a:t>            else:</a:t>
+            </a:r>
+            <a:br/>
+            <a:r>
+              <a:t>                label = 'course fallback: red target not visible'</a:t>
+            </a:r>
+            <a:br/>
+            <a:r>
+              <a:t>        cv2.putText(debug, label, (12, 28), cv2.FONT_HERSHEY_SIMPLEX, 0.65, (255, 255,</a:t>
+            </a:r>
+            <a:br/>
+            <a:r>
+              <a:t>            255), 2)</a:t>
+            </a:r>
+            <a:br/>
+            <a:r>
+              <a:t>        self.publisher.publish(output)</a:t>
+            </a:r>
+          </a:p>
+        </p:txBody>
+      </p:sp>
+      <p:sp>
+        <p:nvSpPr>
+          <p:cNvPr id="10" name="TextBox 9"/>
           <p:cNvSpPr txBox="1"/>
           <p:nvPr/>
         </p:nvSpPr>
         <p:spPr>
           <a:xfrm>
-            <a:off x="786384" y="5239512"/>
-            <a:ext cx="1261872" cy="237744"/>
+            <a:off x="749808" y="6181344"/>
+            <a:ext cx="10789920" cy="201168"/>
           </a:xfrm>
           <a:prstGeom prst="rect">
             <a:avLst/>
@@ -10529,54 +11266,15 @@
               <a:spcAft>
                 <a:spcPts val="0"/>
               </a:spcAft>
-              <a:defRPr sz="1800" b="1">
-                <a:solidFill>
-                  <a:srgbClr val="2A8B5A"/>
-                </a:solidFill>
-                <a:latin typeface="Noto Sans CJK KR"/>
-              </a:defRPr>
-            </a:pPr>
-            <a:r>
-              <a:t>확인 기준</a:t>
-            </a:r>
-          </a:p>
-        </p:txBody>
-      </p:sp>
-      <p:sp>
-        <p:nvSpPr>
-          <p:cNvPr id="9" name="TextBox 8"/>
-          <p:cNvSpPr txBox="1"/>
-          <p:nvPr/>
-        </p:nvSpPr>
-        <p:spPr>
-          <a:xfrm>
-            <a:off x="786384" y="5532120"/>
-            <a:ext cx="10469880" cy="420624"/>
-          </a:xfrm>
-          <a:prstGeom prst="rect">
-            <a:avLst/>
-          </a:prstGeom>
-          <a:noFill/>
-        </p:spPr>
-        <p:txBody>
-          <a:bodyPr wrap="square" lIns="73152" rIns="73152" tIns="36576" bIns="36576">
-            <a:spAutoFit/>
-          </a:bodyPr>
-          <a:lstStyle/>
-          <a:p>
-            <a:pPr algn="l">
-              <a:spcAft>
-                <a:spcPts val="0"/>
-              </a:spcAft>
-              <a:defRPr sz="1800" b="0">
-                <a:solidFill>
-                  <a:srgbClr val="122C4E"/>
-                </a:solidFill>
-                <a:latin typeface="Noto Sans CJK KR"/>
-              </a:defRPr>
-            </a:pPr>
-            <a:r>
-              <a:t>/detections message 형식과 YOLO enable_yolo/model_path/threshold parameter를 확인한다.</a:t>
+              <a:defRPr sz="1000" b="0">
+                <a:solidFill>
+                  <a:srgbClr val="5C6672"/>
+                </a:solidFill>
+                <a:latin typeface="Noto Sans CJK KR"/>
+              </a:defRPr>
+            </a:pPr>
+            <a:r>
+              <a:t>파일 전체 8/10 · 이 슬라이드 다음에 같은 파일의 나머지 줄이 이어집니다.</a:t>
             </a:r>
           </a:p>
         </p:txBody>
@@ -11094,7 +11792,7 @@
               </a:defRPr>
             </a:pPr>
             <a:r>
-              <a:t>정상 결과: 실제 환경에서 확인한 출력</a:t>
+              <a:t>파일을 계속 작성하고 저장한다 (9/10)</a:t>
             </a:r>
           </a:p>
         </p:txBody>
@@ -11133,7 +11831,7 @@
               </a:defRPr>
             </a:pPr>
             <a:r>
-              <a:t>실제 ROS 2 환경의 파일·패키지·구성 검증 로그</a:t>
+              <a:t>~/ros2_curri/agv_ws/src/agv_vision/agv_vision/yolo_node.py</a:t>
             </a:r>
           </a:p>
         </p:txBody>
@@ -11216,30 +11914,64 @@
           </a:p>
         </p:txBody>
       </p:sp>
-      <p:pic>
-        <p:nvPicPr>
-          <p:cNvPr id="6" name="Picture 5" descr="validation_terminal.png"/>
-          <p:cNvPicPr>
-            <a:picLocks noChangeAspect="1"/>
-          </p:cNvPicPr>
-          <p:nvPr/>
-        </p:nvPicPr>
-        <p:blipFill>
-          <a:blip r:embed="rId2"/>
-          <a:stretch>
-            <a:fillRect/>
-          </a:stretch>
-        </p:blipFill>
-        <p:spPr>
-          <a:xfrm>
-            <a:off x="1438886" y="1353312"/>
-            <a:ext cx="9311179" cy="4800600"/>
-          </a:xfrm>
-          <a:prstGeom prst="rect">
-            <a:avLst/>
-          </a:prstGeom>
-        </p:spPr>
-      </p:pic>
+      <p:sp>
+        <p:nvSpPr>
+          <p:cNvPr id="6" name="Rectangle 5"/>
+          <p:cNvSpPr/>
+          <p:nvPr/>
+        </p:nvSpPr>
+        <p:spPr>
+          <a:xfrm>
+            <a:off x="566928" y="1188720"/>
+            <a:ext cx="11064240" cy="347472"/>
+          </a:xfrm>
+          <a:prstGeom prst="rect">
+            <a:avLst/>
+          </a:prstGeom>
+          <a:solidFill>
+            <a:srgbClr val="F4F7FB"/>
+          </a:solidFill>
+          <a:ln>
+            <a:solidFill>
+              <a:srgbClr val="F4F7FB"/>
+            </a:solidFill>
+          </a:ln>
+        </p:spPr>
+        <p:style>
+          <a:lnRef idx="1">
+            <a:schemeClr val="accent1"/>
+          </a:lnRef>
+          <a:fillRef idx="3">
+            <a:schemeClr val="accent1"/>
+          </a:fillRef>
+          <a:effectRef idx="2">
+            <a:schemeClr val="accent1"/>
+          </a:effectRef>
+          <a:fontRef idx="minor">
+            <a:schemeClr val="lt1"/>
+          </a:fontRef>
+        </p:style>
+        <p:txBody>
+          <a:bodyPr rtlCol="0" anchor="ctr" wrap="square" lIns="73152" rIns="73152" tIns="36576" bIns="36576"/>
+          <a:lstStyle/>
+          <a:p>
+            <a:pPr algn="l">
+              <a:spcAft>
+                <a:spcPts val="0"/>
+              </a:spcAft>
+              <a:defRPr sz="1300" b="1">
+                <a:solidFill>
+                  <a:srgbClr val="122C4E"/>
+                </a:solidFill>
+                <a:latin typeface="Noto Sans CJK KR"/>
+              </a:defRPr>
+            </a:pPr>
+            <a:r>
+              <a:t>현재 단계 14/16    |    현재 폴더 ~/ros2_curri/agv_ws    |    현재 터미널</a:t>
+            </a:r>
+          </a:p>
+        </p:txBody>
+      </p:sp>
       <p:sp>
         <p:nvSpPr>
           <p:cNvPr id="7" name="TextBox 6"/>
@@ -11248,8 +11980,8 @@
         </p:nvSpPr>
         <p:spPr>
           <a:xfrm>
-            <a:off x="777240" y="6217920"/>
-            <a:ext cx="10607040" cy="182880"/>
+            <a:off x="658368" y="1627632"/>
+            <a:ext cx="10972800" cy="256032"/>
           </a:xfrm>
           <a:prstGeom prst="rect">
             <a:avLst/>
@@ -11262,19 +11994,219 @@
           </a:bodyPr>
           <a:lstStyle/>
           <a:p>
-            <a:pPr algn="ctr">
-              <a:spcAft>
-                <a:spcPts val="0"/>
-              </a:spcAft>
-              <a:defRPr sz="1100" b="1">
-                <a:solidFill>
-                  <a:srgbClr val="2A8B5A"/>
-                </a:solidFill>
-                <a:latin typeface="Noto Sans CJK KR"/>
-              </a:defRPr>
-            </a:pPr>
-            <a:r>
-              <a:t>① 명령/설정  ② 정상 출력 또는 화면  ③ 다음 검증 명령으로 재확인</a:t>
+            <a:pPr algn="l">
+              <a:spcAft>
+                <a:spcPts val="0"/>
+              </a:spcAft>
+              <a:defRPr sz="1500" b="1">
+                <a:solidFill>
+                  <a:srgbClr val="122C4E"/>
+                </a:solidFill>
+                <a:latin typeface="Noto Sans CJK KR"/>
+              </a:defRPr>
+            </a:pPr>
+            <a:r>
+              <a:t>이번 단계: 파일의 전체 내용을 중간 생략 없이 작성합니다. 아래 줄 범위를 끝까지 입력하세요.</a:t>
+            </a:r>
+          </a:p>
+        </p:txBody>
+      </p:sp>
+      <p:sp>
+        <p:nvSpPr>
+          <p:cNvPr id="8" name="Rectangle 7"/>
+          <p:cNvSpPr/>
+          <p:nvPr/>
+        </p:nvSpPr>
+        <p:spPr>
+          <a:xfrm>
+            <a:off x="658368" y="1956816"/>
+            <a:ext cx="10972800" cy="603504"/>
+          </a:xfrm>
+          <a:prstGeom prst="rect">
+            <a:avLst/>
+          </a:prstGeom>
+          <a:solidFill>
+            <a:srgbClr val="F4F7FB"/>
+          </a:solidFill>
+          <a:ln>
+            <a:solidFill>
+              <a:srgbClr val="F4F7FB"/>
+            </a:solidFill>
+          </a:ln>
+        </p:spPr>
+        <p:style>
+          <a:lnRef idx="1">
+            <a:schemeClr val="accent1"/>
+          </a:lnRef>
+          <a:fillRef idx="3">
+            <a:schemeClr val="accent1"/>
+          </a:fillRef>
+          <a:effectRef idx="2">
+            <a:schemeClr val="accent1"/>
+          </a:effectRef>
+          <a:fontRef idx="minor">
+            <a:schemeClr val="lt1"/>
+          </a:fontRef>
+        </p:style>
+        <p:txBody>
+          <a:bodyPr rtlCol="0" anchor="ctr" wrap="square" lIns="73152" rIns="73152" tIns="36576" bIns="36576"/>
+          <a:lstStyle/>
+          <a:p>
+            <a:pPr algn="l">
+              <a:spcAft>
+                <a:spcPts val="0"/>
+              </a:spcAft>
+              <a:defRPr sz="1400" b="0">
+                <a:solidFill>
+                  <a:srgbClr val="122C4E"/>
+                </a:solidFill>
+                <a:latin typeface="DejaVu Sans Mono"/>
+              </a:defRPr>
+            </a:pPr>
+            <a:r>
+              <a:t>파일 생성: mkdir -p ~/ros2_curri/agv_ws/src/agv_vision/agv_vision</a:t>
+            </a:r>
+            <a:br/>
+            <a:r>
+              <a:t>파일 열기: nano ~/ros2_curri/agv_ws/src/agv_vision/agv_vision/yolo_node.py</a:t>
+            </a:r>
+          </a:p>
+        </p:txBody>
+      </p:sp>
+      <p:sp>
+        <p:nvSpPr>
+          <p:cNvPr id="9" name="Rectangle 8"/>
+          <p:cNvSpPr/>
+          <p:nvPr/>
+        </p:nvSpPr>
+        <p:spPr>
+          <a:xfrm>
+            <a:off x="658368" y="2706624"/>
+            <a:ext cx="10972800" cy="3364992"/>
+          </a:xfrm>
+          <a:prstGeom prst="rect">
+            <a:avLst/>
+          </a:prstGeom>
+          <a:solidFill>
+            <a:srgbClr val="1D232D"/>
+          </a:solidFill>
+          <a:ln>
+            <a:solidFill>
+              <a:srgbClr val="1D232D"/>
+            </a:solidFill>
+          </a:ln>
+        </p:spPr>
+        <p:style>
+          <a:lnRef idx="1">
+            <a:schemeClr val="accent1"/>
+          </a:lnRef>
+          <a:fillRef idx="3">
+            <a:schemeClr val="accent1"/>
+          </a:fillRef>
+          <a:effectRef idx="2">
+            <a:schemeClr val="accent1"/>
+          </a:effectRef>
+          <a:fontRef idx="minor">
+            <a:schemeClr val="lt1"/>
+          </a:fontRef>
+        </p:style>
+        <p:txBody>
+          <a:bodyPr rtlCol="0" anchor="ctr" wrap="square" lIns="164592" rIns="164592" tIns="109728" bIns="36576"/>
+          <a:lstStyle/>
+          <a:p>
+            <a:pPr algn="l">
+              <a:spcAft>
+                <a:spcPts val="0"/>
+              </a:spcAft>
+              <a:defRPr sz="1400" b="0">
+                <a:solidFill>
+                  <a:srgbClr val="FFFFFF"/>
+                </a:solidFill>
+                <a:latin typeface="DejaVu Sans Mono"/>
+              </a:defRPr>
+            </a:pPr>
+            <a:r>
+              <a:t>        self.debug_publisher.publish(self.bridge.cv2_to_imgmsg(debug, encoding='bgr8'))</a:t>
+            </a:r>
+            <a:br/>
+            <a:br/>
+            <a:r>
+              <a:t>def main():</a:t>
+            </a:r>
+            <a:br/>
+            <a:r>
+              <a:t>    rclpy.init()</a:t>
+            </a:r>
+            <a:br/>
+            <a:r>
+              <a:t>    node = YoloNode()</a:t>
+            </a:r>
+            <a:br/>
+            <a:r>
+              <a:t>    try:</a:t>
+            </a:r>
+            <a:br/>
+            <a:r>
+              <a:t>        rclpy.spin(node)</a:t>
+            </a:r>
+            <a:br/>
+            <a:r>
+              <a:t>    except KeyboardInterrupt:</a:t>
+            </a:r>
+            <a:br/>
+            <a:r>
+              <a:t>        pass</a:t>
+            </a:r>
+            <a:br/>
+            <a:r>
+              <a:t>    finally:</a:t>
+            </a:r>
+            <a:br/>
+            <a:r>
+              <a:t>        node.destroy_node()</a:t>
+            </a:r>
+            <a:br/>
+            <a:r>
+              <a:t>        if rclpy.ok():</a:t>
+            </a:r>
+          </a:p>
+        </p:txBody>
+      </p:sp>
+      <p:sp>
+        <p:nvSpPr>
+          <p:cNvPr id="10" name="TextBox 9"/>
+          <p:cNvSpPr txBox="1"/>
+          <p:nvPr/>
+        </p:nvSpPr>
+        <p:spPr>
+          <a:xfrm>
+            <a:off x="749808" y="6181344"/>
+            <a:ext cx="10789920" cy="201168"/>
+          </a:xfrm>
+          <a:prstGeom prst="rect">
+            <a:avLst/>
+          </a:prstGeom>
+          <a:noFill/>
+        </p:spPr>
+        <p:txBody>
+          <a:bodyPr wrap="square" lIns="73152" rIns="73152" tIns="36576" bIns="36576">
+            <a:spAutoFit/>
+          </a:bodyPr>
+          <a:lstStyle/>
+          <a:p>
+            <a:pPr algn="l">
+              <a:spcAft>
+                <a:spcPts val="0"/>
+              </a:spcAft>
+              <a:defRPr sz="1000" b="0">
+                <a:solidFill>
+                  <a:srgbClr val="5C6672"/>
+                </a:solidFill>
+                <a:latin typeface="Noto Sans CJK KR"/>
+              </a:defRPr>
+            </a:pPr>
+            <a:r>
+              <a:t>파일 전체 9/10 · 이 슬라이드 다음에 같은 파일의 나머지 줄이 이어집니다.</a:t>
             </a:r>
           </a:p>
         </p:txBody>
@@ -11331,7 +12263,7 @@
               </a:defRPr>
             </a:pPr>
             <a:r>
-              <a:t>객관적 검증 명령으로 완료를 확인한다</a:t>
+              <a:t>파일을 계속 작성하고 저장한다 (10/10)</a:t>
             </a:r>
           </a:p>
         </p:txBody>
@@ -11370,7 +12302,7 @@
               </a:defRPr>
             </a:pPr>
             <a:r>
-              <a:t>화면만 보지 말고 topic·frame·파일·parameter를 다시 확인합니다.</a:t>
+              <a:t>~/ros2_curri/agv_ws/src/agv_vision/agv_vision/yolo_node.py</a:t>
             </a:r>
           </a:p>
         </p:txBody>
@@ -11506,23 +12438,124 @@
               </a:defRPr>
             </a:pPr>
             <a:r>
-              <a:t>현재 단계 검증    |    현재 폴더 ~/agv_ws    |    현재 터미널</a:t>
-            </a:r>
-          </a:p>
-        </p:txBody>
-      </p:sp>
-      <p:sp>
-        <p:nvSpPr>
-          <p:cNvPr id="7" name="Rounded Rectangle 6"/>
+              <a:t>현재 단계 15/16    |    현재 폴더 ~/ros2_curri/agv_ws    |    현재 터미널</a:t>
+            </a:r>
+          </a:p>
+        </p:txBody>
+      </p:sp>
+      <p:sp>
+        <p:nvSpPr>
+          <p:cNvPr id="7" name="TextBox 6"/>
+          <p:cNvSpPr txBox="1"/>
+          <p:nvPr/>
+        </p:nvSpPr>
+        <p:spPr>
+          <a:xfrm>
+            <a:off x="658368" y="1627632"/>
+            <a:ext cx="10972800" cy="256032"/>
+          </a:xfrm>
+          <a:prstGeom prst="rect">
+            <a:avLst/>
+          </a:prstGeom>
+          <a:noFill/>
+        </p:spPr>
+        <p:txBody>
+          <a:bodyPr wrap="square" lIns="73152" rIns="73152" tIns="36576" bIns="36576">
+            <a:spAutoFit/>
+          </a:bodyPr>
+          <a:lstStyle/>
+          <a:p>
+            <a:pPr algn="l">
+              <a:spcAft>
+                <a:spcPts val="0"/>
+              </a:spcAft>
+              <a:defRPr sz="1500" b="1">
+                <a:solidFill>
+                  <a:srgbClr val="122C4E"/>
+                </a:solidFill>
+                <a:latin typeface="Noto Sans CJK KR"/>
+              </a:defRPr>
+            </a:pPr>
+            <a:r>
+              <a:t>이번 단계: 파일의 전체 내용을 중간 생략 없이 작성합니다. 아래 줄 범위를 끝까지 입력하세요.</a:t>
+            </a:r>
+          </a:p>
+        </p:txBody>
+      </p:sp>
+      <p:sp>
+        <p:nvSpPr>
+          <p:cNvPr id="8" name="Rectangle 7"/>
           <p:cNvSpPr/>
           <p:nvPr/>
         </p:nvSpPr>
         <p:spPr>
           <a:xfrm>
-            <a:off x="658368" y="1755648"/>
-            <a:ext cx="10972800" cy="2148840"/>
-          </a:xfrm>
-          <a:prstGeom prst="roundRect">
+            <a:off x="658368" y="1956816"/>
+            <a:ext cx="10972800" cy="603504"/>
+          </a:xfrm>
+          <a:prstGeom prst="rect">
+            <a:avLst/>
+          </a:prstGeom>
+          <a:solidFill>
+            <a:srgbClr val="F4F7FB"/>
+          </a:solidFill>
+          <a:ln>
+            <a:solidFill>
+              <a:srgbClr val="F4F7FB"/>
+            </a:solidFill>
+          </a:ln>
+        </p:spPr>
+        <p:style>
+          <a:lnRef idx="1">
+            <a:schemeClr val="accent1"/>
+          </a:lnRef>
+          <a:fillRef idx="3">
+            <a:schemeClr val="accent1"/>
+          </a:fillRef>
+          <a:effectRef idx="2">
+            <a:schemeClr val="accent1"/>
+          </a:effectRef>
+          <a:fontRef idx="minor">
+            <a:schemeClr val="lt1"/>
+          </a:fontRef>
+        </p:style>
+        <p:txBody>
+          <a:bodyPr rtlCol="0" anchor="ctr" wrap="square" lIns="73152" rIns="73152" tIns="36576" bIns="36576"/>
+          <a:lstStyle/>
+          <a:p>
+            <a:pPr algn="l">
+              <a:spcAft>
+                <a:spcPts val="0"/>
+              </a:spcAft>
+              <a:defRPr sz="1400" b="0">
+                <a:solidFill>
+                  <a:srgbClr val="122C4E"/>
+                </a:solidFill>
+                <a:latin typeface="DejaVu Sans Mono"/>
+              </a:defRPr>
+            </a:pPr>
+            <a:r>
+              <a:t>파일 생성: mkdir -p ~/ros2_curri/agv_ws/src/agv_vision/agv_vision</a:t>
+            </a:r>
+            <a:br/>
+            <a:r>
+              <a:t>파일 열기: nano ~/ros2_curri/agv_ws/src/agv_vision/agv_vision/yolo_node.py</a:t>
+            </a:r>
+          </a:p>
+        </p:txBody>
+      </p:sp>
+      <p:sp>
+        <p:nvSpPr>
+          <p:cNvPr id="9" name="Rectangle 8"/>
+          <p:cNvSpPr/>
+          <p:nvPr/>
+        </p:nvSpPr>
+        <p:spPr>
+          <a:xfrm>
+            <a:off x="658368" y="2706624"/>
+            <a:ext cx="10972800" cy="3364992"/>
+          </a:xfrm>
+          <a:prstGeom prst="rect">
             <a:avLst/>
           </a:prstGeom>
           <a:solidFill>
@@ -11549,14 +12582,14 @@
           </a:fontRef>
         </p:style>
         <p:txBody>
-          <a:bodyPr rtlCol="0" anchor="ctr" wrap="square" lIns="73152" rIns="73152" tIns="36576" bIns="36576"/>
+          <a:bodyPr rtlCol="0" anchor="ctr" wrap="square" lIns="164592" rIns="164592" tIns="109728" bIns="36576"/>
           <a:lstStyle/>
           <a:p>
             <a:pPr algn="l">
               <a:spcAft>
                 <a:spcPts val="0"/>
               </a:spcAft>
-              <a:defRPr sz="1600" b="0">
+              <a:defRPr sz="1400" b="0">
                 <a:solidFill>
                   <a:srgbClr val="FFFFFF"/>
                 </a:solidFill>
@@ -11564,99 +12597,21 @@
               </a:defRPr>
             </a:pPr>
             <a:r>
-              <a:t>ros2 interface show agv_interfaces/msg/Detection</a:t>
-            </a:r>
-            <a:br/>
-            <a:r>
-              <a:t>ros2 topic info /detections</a:t>
-            </a:r>
-            <a:br/>
-            <a:r>
-              <a:t>ros2 param get /yolo_node confidence_threshold</a:t>
-            </a:r>
-          </a:p>
-        </p:txBody>
-      </p:sp>
-      <p:sp>
-        <p:nvSpPr>
-          <p:cNvPr id="8" name="Rounded Rectangle 7"/>
-          <p:cNvSpPr/>
-          <p:nvPr/>
-        </p:nvSpPr>
-        <p:spPr>
-          <a:xfrm>
-            <a:off x="658368" y="4206240"/>
-            <a:ext cx="10972800" cy="1554480"/>
-          </a:xfrm>
-          <a:prstGeom prst="roundRect">
-            <a:avLst/>
-          </a:prstGeom>
-          <a:solidFill>
-            <a:srgbClr val="F4F7FB"/>
-          </a:solidFill>
-          <a:ln>
-            <a:solidFill>
-              <a:srgbClr val="D1DFD5"/>
-            </a:solidFill>
-          </a:ln>
-        </p:spPr>
-        <p:style>
-          <a:lnRef idx="1">
-            <a:schemeClr val="accent1"/>
-          </a:lnRef>
-          <a:fillRef idx="3">
-            <a:schemeClr val="accent1"/>
-          </a:fillRef>
-          <a:effectRef idx="2">
-            <a:schemeClr val="accent1"/>
-          </a:effectRef>
-          <a:fontRef idx="minor">
-            <a:schemeClr val="lt1"/>
-          </a:fontRef>
-        </p:style>
-        <p:txBody>
-          <a:bodyPr rtlCol="0" anchor="ctr" wrap="square" lIns="73152" rIns="73152" tIns="36576" bIns="36576"/>
-          <a:lstStyle/>
-          <a:p>
-            <a:pPr algn="l">
-              <a:spcAft>
-                <a:spcPts val="0"/>
-              </a:spcAft>
-              <a:defRPr sz="1800" b="1">
-                <a:solidFill>
-                  <a:srgbClr val="2A8B5A"/>
-                </a:solidFill>
-                <a:latin typeface="Noto Sans CJK KR"/>
-              </a:defRPr>
-            </a:pPr>
-            <a:r>
-              <a:t>완료 체크</a:t>
-            </a:r>
-            <a:br/>
-            <a:r>
-              <a:t>□ 명령이 오류 없이 실행된다.</a:t>
-            </a:r>
-            <a:br/>
-            <a:r>
-              <a:t>□ 기대한 파일·topic·frame·parameter 이름이 보인다.</a:t>
-            </a:r>
-            <a:br/>
-            <a:r>
-              <a:t>□ 값의 단위와 방향을 한 문장으로 설명할 수 있다.</a:t>
-            </a:r>
-          </a:p>
-        </p:txBody>
-      </p:sp>
-      <p:sp>
-        <p:nvSpPr>
-          <p:cNvPr id="9" name="TextBox 8"/>
+              <a:t>            rclpy.shutdown()</a:t>
+            </a:r>
+          </a:p>
+        </p:txBody>
+      </p:sp>
+      <p:sp>
+        <p:nvSpPr>
+          <p:cNvPr id="10" name="TextBox 9"/>
           <p:cNvSpPr txBox="1"/>
           <p:nvPr/>
         </p:nvSpPr>
         <p:spPr>
           <a:xfrm>
-            <a:off x="731520" y="5989320"/>
-            <a:ext cx="10789920" cy="237744"/>
+            <a:off x="749808" y="6181344"/>
+            <a:ext cx="10789920" cy="201168"/>
           </a:xfrm>
           <a:prstGeom prst="rect">
             <a:avLst/>
@@ -11673,15 +12628,15 @@
               <a:spcAft>
                 <a:spcPts val="0"/>
               </a:spcAft>
-              <a:defRPr sz="1500" b="1">
-                <a:solidFill>
-                  <a:srgbClr val="122C4E"/>
-                </a:solidFill>
-                <a:latin typeface="Noto Sans CJK KR"/>
-              </a:defRPr>
-            </a:pPr>
-            <a:r>
-              <a:t>완료 조건: /detections message 형식과 YOLO enable_yolo/model_path/threshold parameter를 확인한다.</a:t>
+              <a:defRPr sz="1000" b="0">
+                <a:solidFill>
+                  <a:srgbClr val="5C6672"/>
+                </a:solidFill>
+                <a:latin typeface="Noto Sans CJK KR"/>
+              </a:defRPr>
+            </a:pPr>
+            <a:r>
+              <a:t>파일 전체 10/10 · 이 슬라이드 다음에 같은 파일의 나머지 줄이 이어집니다.</a:t>
             </a:r>
           </a:p>
         </p:txBody>
@@ -11738,7 +12693,7 @@
               </a:defRPr>
             </a:pPr>
             <a:r>
-              <a:t>막히면: 증상 → 우선 확인 → 재검증</a:t>
+              <a:t>파일을 새로 만들고 저장한다 (1/1)</a:t>
             </a:r>
           </a:p>
         </p:txBody>
@@ -11777,7 +12732,7 @@
               </a:defRPr>
             </a:pPr>
             <a:r>
-              <a:t>오류 메시지를 숨기지 않고 같은 순서로 점검합니다.</a:t>
+              <a:t>~/ros2_curri/agv_ws/src/agv_bringup/config/vision.yaml</a:t>
             </a:r>
           </a:p>
         </p:txBody>
@@ -11913,31 +12868,70 @@
               </a:defRPr>
             </a:pPr>
             <a:r>
-              <a:t>현재 단계 오류 대응    |    현재 폴더 ~/agv_ws    |    현재 터미널</a:t>
-            </a:r>
-          </a:p>
-        </p:txBody>
-      </p:sp>
-      <p:sp>
-        <p:nvSpPr>
-          <p:cNvPr id="7" name="Rounded Rectangle 6"/>
+              <a:t>현재 단계 16/17    |    현재 폴더 ~/ros2_curri/agv_ws    |    현재 터미널</a:t>
+            </a:r>
+          </a:p>
+        </p:txBody>
+      </p:sp>
+      <p:sp>
+        <p:nvSpPr>
+          <p:cNvPr id="7" name="TextBox 6"/>
+          <p:cNvSpPr txBox="1"/>
+          <p:nvPr/>
+        </p:nvSpPr>
+        <p:spPr>
+          <a:xfrm>
+            <a:off x="658368" y="1627632"/>
+            <a:ext cx="10972800" cy="256032"/>
+          </a:xfrm>
+          <a:prstGeom prst="rect">
+            <a:avLst/>
+          </a:prstGeom>
+          <a:noFill/>
+        </p:spPr>
+        <p:txBody>
+          <a:bodyPr wrap="square" lIns="73152" rIns="73152" tIns="36576" bIns="36576">
+            <a:spAutoFit/>
+          </a:bodyPr>
+          <a:lstStyle/>
+          <a:p>
+            <a:pPr algn="l">
+              <a:spcAft>
+                <a:spcPts val="0"/>
+              </a:spcAft>
+              <a:defRPr sz="1500" b="1">
+                <a:solidFill>
+                  <a:srgbClr val="122C4E"/>
+                </a:solidFill>
+                <a:latin typeface="Noto Sans CJK KR"/>
+              </a:defRPr>
+            </a:pPr>
+            <a:r>
+              <a:t>이번 단계: 파일의 전체 내용을 중간 생략 없이 작성합니다. 아래 줄 범위를 끝까지 입력하세요.</a:t>
+            </a:r>
+          </a:p>
+        </p:txBody>
+      </p:sp>
+      <p:sp>
+        <p:nvSpPr>
+          <p:cNvPr id="8" name="Rectangle 7"/>
           <p:cNvSpPr/>
           <p:nvPr/>
         </p:nvSpPr>
         <p:spPr>
           <a:xfrm>
-            <a:off x="694944" y="1755648"/>
-            <a:ext cx="10972800" cy="1115568"/>
-          </a:xfrm>
-          <a:prstGeom prst="roundRect">
+            <a:off x="658368" y="1956816"/>
+            <a:ext cx="10972800" cy="603504"/>
+          </a:xfrm>
+          <a:prstGeom prst="rect">
             <a:avLst/>
           </a:prstGeom>
           <a:solidFill>
-            <a:srgbClr val="FFF7F4"/>
+            <a:srgbClr val="F4F7FB"/>
           </a:solidFill>
           <a:ln>
             <a:solidFill>
-              <a:srgbClr val="EDBEB4"/>
+              <a:srgbClr val="F4F7FB"/>
             </a:solidFill>
           </a:ln>
         </p:spPr>
@@ -11956,115 +12950,50 @@
           </a:fontRef>
         </p:style>
         <p:txBody>
-          <a:bodyPr rtlCol="0" anchor="ctr"/>
-          <a:lstStyle/>
-          <a:p>
-            <a:pPr algn="ctr"/>
-          </a:p>
-        </p:txBody>
-      </p:sp>
-      <p:sp>
-        <p:nvSpPr>
-          <p:cNvPr id="8" name="TextBox 7"/>
-          <p:cNvSpPr txBox="1"/>
-          <p:nvPr/>
-        </p:nvSpPr>
-        <p:spPr>
-          <a:xfrm>
-            <a:off x="896112" y="1901952"/>
-            <a:ext cx="2926080" cy="274320"/>
-          </a:xfrm>
-          <a:prstGeom prst="rect">
-            <a:avLst/>
-          </a:prstGeom>
-          <a:noFill/>
-        </p:spPr>
-        <p:txBody>
-          <a:bodyPr wrap="square" lIns="73152" rIns="73152" tIns="36576" bIns="36576">
-            <a:spAutoFit/>
-          </a:bodyPr>
+          <a:bodyPr rtlCol="0" anchor="ctr" wrap="square" lIns="73152" rIns="73152" tIns="36576" bIns="36576"/>
           <a:lstStyle/>
           <a:p>
             <a:pPr algn="l">
               <a:spcAft>
                 <a:spcPts val="0"/>
               </a:spcAft>
-              <a:defRPr sz="1800" b="1">
-                <a:solidFill>
-                  <a:srgbClr val="BE3B3B"/>
-                </a:solidFill>
-                <a:latin typeface="Noto Sans CJK KR"/>
-              </a:defRPr>
-            </a:pPr>
-            <a:r>
-              <a:t>증상 1: 모델 파일을 못 찾음</a:t>
-            </a:r>
-          </a:p>
-        </p:txBody>
-      </p:sp>
-      <p:sp>
-        <p:nvSpPr>
-          <p:cNvPr id="9" name="TextBox 8"/>
-          <p:cNvSpPr txBox="1"/>
-          <p:nvPr/>
-        </p:nvSpPr>
-        <p:spPr>
-          <a:xfrm>
-            <a:off x="3794760" y="1883664"/>
-            <a:ext cx="7543800" cy="621792"/>
-          </a:xfrm>
-          <a:prstGeom prst="rect">
-            <a:avLst/>
-          </a:prstGeom>
-          <a:noFill/>
-        </p:spPr>
-        <p:txBody>
-          <a:bodyPr wrap="square" lIns="73152" rIns="73152" tIns="36576" bIns="36576">
-            <a:spAutoFit/>
-          </a:bodyPr>
-          <a:lstStyle/>
-          <a:p>
-            <a:pPr algn="l">
-              <a:spcAft>
-                <a:spcPts val="0"/>
-              </a:spcAft>
-              <a:defRPr sz="1600" b="0">
+              <a:defRPr sz="1400" b="0">
                 <a:solidFill>
                   <a:srgbClr val="122C4E"/>
                 </a:solidFill>
-                <a:latin typeface="Noto Sans CJK KR"/>
-              </a:defRPr>
-            </a:pPr>
-            <a:r>
-              <a:t>우선 확인: model_path와 모델 파일 배포 정책을 확인한다.</a:t>
+                <a:latin typeface="DejaVu Sans Mono"/>
+              </a:defRPr>
+            </a:pPr>
+            <a:r>
+              <a:t>파일 생성: mkdir -p ~/ros2_curri/agv_ws/src/agv_bringup/config</a:t>
             </a:r>
             <a:br/>
             <a:r>
-              <a:t>수정 후: ros2 interface show agv_interfaces/msg/Detection</a:t>
-            </a:r>
-          </a:p>
-        </p:txBody>
-      </p:sp>
-      <p:sp>
-        <p:nvSpPr>
-          <p:cNvPr id="10" name="Rounded Rectangle 9"/>
+              <a:t>파일 열기: nano ~/ros2_curri/agv_ws/src/agv_bringup/config/vision.yaml</a:t>
+            </a:r>
+          </a:p>
+        </p:txBody>
+      </p:sp>
+      <p:sp>
+        <p:nvSpPr>
+          <p:cNvPr id="9" name="Rectangle 8"/>
           <p:cNvSpPr/>
           <p:nvPr/>
         </p:nvSpPr>
         <p:spPr>
           <a:xfrm>
-            <a:off x="694944" y="3172968"/>
-            <a:ext cx="10972800" cy="1115568"/>
-          </a:xfrm>
-          <a:prstGeom prst="roundRect">
+            <a:off x="658368" y="2706624"/>
+            <a:ext cx="10972800" cy="3364992"/>
+          </a:xfrm>
+          <a:prstGeom prst="rect">
             <a:avLst/>
           </a:prstGeom>
           <a:solidFill>
-            <a:srgbClr val="FFF7F4"/>
+            <a:srgbClr val="1D232D"/>
           </a:solidFill>
           <a:ln>
             <a:solidFill>
-              <a:srgbClr val="EDBEB4"/>
+              <a:srgbClr val="1D232D"/>
             </a:solidFill>
           </a:ln>
         </p:spPr>
@@ -12083,23 +13012,60 @@
           </a:fontRef>
         </p:style>
         <p:txBody>
-          <a:bodyPr rtlCol="0" anchor="ctr"/>
-          <a:lstStyle/>
-          <a:p>
-            <a:pPr algn="ctr"/>
-          </a:p>
-        </p:txBody>
-      </p:sp>
-      <p:sp>
-        <p:nvSpPr>
-          <p:cNvPr id="11" name="TextBox 10"/>
+          <a:bodyPr rtlCol="0" anchor="ctr" wrap="square" lIns="164592" rIns="164592" tIns="109728" bIns="36576"/>
+          <a:lstStyle/>
+          <a:p>
+            <a:pPr algn="l">
+              <a:spcAft>
+                <a:spcPts val="0"/>
+              </a:spcAft>
+              <a:defRPr sz="1400" b="0">
+                <a:solidFill>
+                  <a:srgbClr val="FFFFFF"/>
+                </a:solidFill>
+                <a:latin typeface="DejaVu Sans Mono"/>
+              </a:defRPr>
+            </a:pPr>
+            <a:r>
+              <a:t>yolo_node:</a:t>
+            </a:r>
+            <a:br/>
+            <a:r>
+              <a:t>  ros__parameters:</a:t>
+            </a:r>
+            <a:br/>
+            <a:r>
+              <a:t>    use_sim_time: true</a:t>
+            </a:r>
+            <a:br/>
+            <a:r>
+              <a:t>    enable_yolo: false</a:t>
+            </a:r>
+            <a:br/>
+            <a:r>
+              <a:t>    enable_red_target_fallback: true</a:t>
+            </a:r>
+            <a:br/>
+            <a:r>
+              <a:t>    model_path: yolo11n.pt</a:t>
+            </a:r>
+            <a:br/>
+            <a:r>
+              <a:t>    confidence_threshold: 0.50</a:t>
+            </a:r>
+          </a:p>
+        </p:txBody>
+      </p:sp>
+      <p:sp>
+        <p:nvSpPr>
+          <p:cNvPr id="10" name="TextBox 9"/>
           <p:cNvSpPr txBox="1"/>
           <p:nvPr/>
         </p:nvSpPr>
         <p:spPr>
           <a:xfrm>
-            <a:off x="896112" y="3319272"/>
-            <a:ext cx="2926080" cy="274320"/>
+            <a:off x="749808" y="6181344"/>
+            <a:ext cx="10789920" cy="201168"/>
           </a:xfrm>
           <a:prstGeom prst="rect">
             <a:avLst/>
@@ -12116,97 +13082,15 @@
               <a:spcAft>
                 <a:spcPts val="0"/>
               </a:spcAft>
-              <a:defRPr sz="1800" b="1">
-                <a:solidFill>
-                  <a:srgbClr val="BE3B3B"/>
-                </a:solidFill>
-                <a:latin typeface="Noto Sans CJK KR"/>
-              </a:defRPr>
-            </a:pPr>
-            <a:r>
-              <a:t>증상 2: Custom msg import 실패</a:t>
-            </a:r>
-          </a:p>
-        </p:txBody>
-      </p:sp>
-      <p:sp>
-        <p:nvSpPr>
-          <p:cNvPr id="12" name="TextBox 11"/>
-          <p:cNvSpPr txBox="1"/>
-          <p:nvPr/>
-        </p:nvSpPr>
-        <p:spPr>
-          <a:xfrm>
-            <a:off x="3794760" y="3300984"/>
-            <a:ext cx="7543800" cy="621792"/>
-          </a:xfrm>
-          <a:prstGeom prst="rect">
-            <a:avLst/>
-          </a:prstGeom>
-          <a:noFill/>
-        </p:spPr>
-        <p:txBody>
-          <a:bodyPr wrap="square" lIns="73152" rIns="73152" tIns="36576" bIns="36576">
-            <a:spAutoFit/>
-          </a:bodyPr>
-          <a:lstStyle/>
-          <a:p>
-            <a:pPr algn="l">
-              <a:spcAft>
-                <a:spcPts val="0"/>
-              </a:spcAft>
-              <a:defRPr sz="1600" b="0">
-                <a:solidFill>
-                  <a:srgbClr val="122C4E"/>
-                </a:solidFill>
-                <a:latin typeface="Noto Sans CJK KR"/>
-              </a:defRPr>
-            </a:pPr>
-            <a:r>
-              <a:t>우선 확인: agv_interfaces 빌드·source·package dependency를 확인한다.</a:t>
-            </a:r>
-            <a:br/>
-            <a:r>
-              <a:t>수정 후: ros2 interface show agv_interfaces/msg/Detection</a:t>
-            </a:r>
-          </a:p>
-        </p:txBody>
-      </p:sp>
-      <p:sp>
-        <p:nvSpPr>
-          <p:cNvPr id="13" name="TextBox 12"/>
-          <p:cNvSpPr txBox="1"/>
-          <p:nvPr/>
-        </p:nvSpPr>
-        <p:spPr>
-          <a:xfrm>
-            <a:off x="822960" y="5102352"/>
-            <a:ext cx="10607040" cy="402336"/>
-          </a:xfrm>
-          <a:prstGeom prst="rect">
-            <a:avLst/>
-          </a:prstGeom>
-          <a:noFill/>
-        </p:spPr>
-        <p:txBody>
-          <a:bodyPr wrap="square" lIns="73152" rIns="73152" tIns="36576" bIns="36576">
-            <a:spAutoFit/>
-          </a:bodyPr>
-          <a:lstStyle/>
-          <a:p>
-            <a:pPr algn="ctr">
-              <a:spcAft>
-                <a:spcPts val="0"/>
-              </a:spcAft>
-              <a:defRPr sz="1800" b="1">
-                <a:solidFill>
-                  <a:srgbClr val="DB7E22"/>
-                </a:solidFill>
-                <a:latin typeface="Noto Sans CJK KR"/>
-              </a:defRPr>
-            </a:pPr>
-            <a:r>
-              <a:t>공통 순서: ① 현재 폴더 ② source ③ 파일 경로 ④ 이름/타입/단위 ⑤ build·source 후 재실행</a:t>
+              <a:defRPr sz="1000" b="0">
+                <a:solidFill>
+                  <a:srgbClr val="5C6672"/>
+                </a:solidFill>
+                <a:latin typeface="Noto Sans CJK KR"/>
+              </a:defRPr>
+            </a:pPr>
+            <a:r>
+              <a:t>파일 전체 1/1 · 이 슬라이드 다음에 같은 파일의 나머지 줄이 이어집니다.</a:t>
             </a:r>
           </a:p>
         </p:txBody>
@@ -12263,7 +13147,7 @@
               </a:defRPr>
             </a:pPr>
             <a:r>
-              <a:t>미니 실습: 값 하나를 바꾸고 결과를 비교한다</a:t>
+              <a:t>파일을 새로 만들고 저장한다 (1/1)</a:t>
             </a:r>
           </a:p>
         </p:txBody>
@@ -12302,7 +13186,7 @@
               </a:defRPr>
             </a:pPr>
             <a:r>
-              <a:t>정상 결과를 만든 뒤에는 한 번에 하나의 값만 바꿉니다.</a:t>
+              <a:t>~/ros2_curri/agv_ws/src/agv_vision/setup.py</a:t>
             </a:r>
           </a:p>
         </p:txBody>
@@ -12438,31 +13322,70 @@
               </a:defRPr>
             </a:pPr>
             <a:r>
-              <a:t>현재 단계 미니 실습    |    현재 폴더 ~/agv_ws    |    현재 터미널</a:t>
-            </a:r>
-          </a:p>
-        </p:txBody>
-      </p:sp>
-      <p:sp>
-        <p:nvSpPr>
-          <p:cNvPr id="7" name="Rounded Rectangle 6"/>
+              <a:t>현재 단계 17/18    |    현재 폴더 ~/ros2_curri/agv_ws    |    현재 터미널</a:t>
+            </a:r>
+          </a:p>
+        </p:txBody>
+      </p:sp>
+      <p:sp>
+        <p:nvSpPr>
+          <p:cNvPr id="7" name="TextBox 6"/>
+          <p:cNvSpPr txBox="1"/>
+          <p:nvPr/>
+        </p:nvSpPr>
+        <p:spPr>
+          <a:xfrm>
+            <a:off x="658368" y="1627632"/>
+            <a:ext cx="10972800" cy="256032"/>
+          </a:xfrm>
+          <a:prstGeom prst="rect">
+            <a:avLst/>
+          </a:prstGeom>
+          <a:noFill/>
+        </p:spPr>
+        <p:txBody>
+          <a:bodyPr wrap="square" lIns="73152" rIns="73152" tIns="36576" bIns="36576">
+            <a:spAutoFit/>
+          </a:bodyPr>
+          <a:lstStyle/>
+          <a:p>
+            <a:pPr algn="l">
+              <a:spcAft>
+                <a:spcPts val="0"/>
+              </a:spcAft>
+              <a:defRPr sz="1500" b="1">
+                <a:solidFill>
+                  <a:srgbClr val="122C4E"/>
+                </a:solidFill>
+                <a:latin typeface="Noto Sans CJK KR"/>
+              </a:defRPr>
+            </a:pPr>
+            <a:r>
+              <a:t>이번 단계: 파일의 전체 내용을 중간 생략 없이 작성합니다. 아래 줄 범위를 끝까지 입력하세요.</a:t>
+            </a:r>
+          </a:p>
+        </p:txBody>
+      </p:sp>
+      <p:sp>
+        <p:nvSpPr>
+          <p:cNvPr id="8" name="Rectangle 7"/>
           <p:cNvSpPr/>
           <p:nvPr/>
         </p:nvSpPr>
         <p:spPr>
           <a:xfrm>
-            <a:off x="749808" y="1874519"/>
-            <a:ext cx="10652760" cy="1993392"/>
-          </a:xfrm>
-          <a:prstGeom prst="roundRect">
+            <a:off x="658368" y="1956816"/>
+            <a:ext cx="10972800" cy="603504"/>
+          </a:xfrm>
+          <a:prstGeom prst="rect">
             <a:avLst/>
           </a:prstGeom>
           <a:solidFill>
-            <a:srgbClr val="FFF8EB"/>
+            <a:srgbClr val="F4F7FB"/>
           </a:solidFill>
           <a:ln>
             <a:solidFill>
-              <a:srgbClr val="ECC680"/>
+              <a:srgbClr val="F4F7FB"/>
             </a:solidFill>
           </a:ln>
         </p:spPr>
@@ -12484,33 +13407,123 @@
           <a:bodyPr rtlCol="0" anchor="ctr" wrap="square" lIns="73152" rIns="73152" tIns="36576" bIns="36576"/>
           <a:lstStyle/>
           <a:p>
-            <a:pPr algn="ctr">
-              <a:spcAft>
-                <a:spcPts val="0"/>
-              </a:spcAft>
-              <a:defRPr sz="2300" b="1">
+            <a:pPr algn="l">
+              <a:spcAft>
+                <a:spcPts val="0"/>
+              </a:spcAft>
+              <a:defRPr sz="1400" b="0">
                 <a:solidFill>
                   <a:srgbClr val="122C4E"/>
                 </a:solidFill>
-                <a:latin typeface="Noto Sans CJK KR"/>
-              </a:defRPr>
-            </a:pPr>
-            <a:r>
-              <a:t>confidence_threshold를 0.50에서 0.70으로 바꿨을 때 어떤 검출이 제거될지 설명하고 parameter 값을 확인한다.</a:t>
-            </a:r>
-          </a:p>
-        </p:txBody>
-      </p:sp>
-      <p:sp>
-        <p:nvSpPr>
-          <p:cNvPr id="8" name="TextBox 7"/>
+                <a:latin typeface="DejaVu Sans Mono"/>
+              </a:defRPr>
+            </a:pPr>
+            <a:r>
+              <a:t>파일 생성: mkdir -p ~/ros2_curri/agv_ws/src/agv_vision</a:t>
+            </a:r>
+            <a:br/>
+            <a:r>
+              <a:t>파일 열기: nano ~/ros2_curri/agv_ws/src/agv_vision/setup.py</a:t>
+            </a:r>
+          </a:p>
+        </p:txBody>
+      </p:sp>
+      <p:sp>
+        <p:nvSpPr>
+          <p:cNvPr id="9" name="Rectangle 8"/>
+          <p:cNvSpPr/>
+          <p:nvPr/>
+        </p:nvSpPr>
+        <p:spPr>
+          <a:xfrm>
+            <a:off x="658368" y="2706624"/>
+            <a:ext cx="10972800" cy="3364992"/>
+          </a:xfrm>
+          <a:prstGeom prst="rect">
+            <a:avLst/>
+          </a:prstGeom>
+          <a:solidFill>
+            <a:srgbClr val="1D232D"/>
+          </a:solidFill>
+          <a:ln>
+            <a:solidFill>
+              <a:srgbClr val="1D232D"/>
+            </a:solidFill>
+          </a:ln>
+        </p:spPr>
+        <p:style>
+          <a:lnRef idx="1">
+            <a:schemeClr val="accent1"/>
+          </a:lnRef>
+          <a:fillRef idx="3">
+            <a:schemeClr val="accent1"/>
+          </a:fillRef>
+          <a:effectRef idx="2">
+            <a:schemeClr val="accent1"/>
+          </a:effectRef>
+          <a:fontRef idx="minor">
+            <a:schemeClr val="lt1"/>
+          </a:fontRef>
+        </p:style>
+        <p:txBody>
+          <a:bodyPr rtlCol="0" anchor="ctr" wrap="square" lIns="164592" rIns="164592" tIns="109728" bIns="36576"/>
+          <a:lstStyle/>
+          <a:p>
+            <a:pPr algn="l">
+              <a:spcAft>
+                <a:spcPts val="0"/>
+              </a:spcAft>
+              <a:defRPr sz="1400" b="0">
+                <a:solidFill>
+                  <a:srgbClr val="FFFFFF"/>
+                </a:solidFill>
+                <a:latin typeface="DejaVu Sans Mono"/>
+              </a:defRPr>
+            </a:pPr>
+            <a:r>
+              <a:t>from setuptools import find_packages, setup</a:t>
+            </a:r>
+            <a:br/>
+            <a:r>
+              <a:t>package_name = 'agv_vision'</a:t>
+            </a:r>
+            <a:br/>
+            <a:r>
+              <a:t>setup(name=package_name, version='0.1.0', packages=find_packages(exclude=['test']),</a:t>
+            </a:r>
+            <a:br/>
+            <a:r>
+              <a:t>    data_files=[('share/ament_index/resource_index/packages',</a:t>
+            </a:r>
+            <a:br/>
+            <a:r>
+              <a:t>    ['resource/' + package_name]), ('share/' + package_name, ['package.xml'])],</a:t>
+            </a:r>
+            <a:br/>
+            <a:r>
+              <a:t>    install_requires=['setuptools'], zip_safe=True, maintainer='AGV student',</a:t>
+            </a:r>
+            <a:br/>
+            <a:r>
+              <a:t>    maintainer_email='student@example.com', license='Apache-2.0',</a:t>
+            </a:r>
+            <a:br/>
+            <a:r>
+              <a:t>    entry_points={'console_scripts': ['yolo_node = agv_vision.yolo_node:main']})</a:t>
+            </a:r>
+          </a:p>
+        </p:txBody>
+      </p:sp>
+      <p:sp>
+        <p:nvSpPr>
+          <p:cNvPr id="10" name="TextBox 9"/>
           <p:cNvSpPr txBox="1"/>
           <p:nvPr/>
         </p:nvSpPr>
         <p:spPr>
           <a:xfrm>
-            <a:off x="877824" y="4590288"/>
-            <a:ext cx="10241280" cy="594360"/>
+            <a:off x="749808" y="6181344"/>
+            <a:ext cx="10789920" cy="201168"/>
           </a:xfrm>
           <a:prstGeom prst="rect">
             <a:avLst/>
@@ -12523,19 +13536,19 @@
           </a:bodyPr>
           <a:lstStyle/>
           <a:p>
-            <a:pPr algn="ctr">
-              <a:spcAft>
-                <a:spcPts val="0"/>
-              </a:spcAft>
-              <a:defRPr sz="1900" b="1">
-                <a:solidFill>
-                  <a:srgbClr val="DB7E22"/>
-                </a:solidFill>
-                <a:latin typeface="Noto Sans CJK KR"/>
-              </a:defRPr>
-            </a:pPr>
-            <a:r>
-              <a:t>기록할 것: 바꾼 값(단위) · 기대한 변화 · 실제 출력/화면 · 원래 값으로 되돌린 결과</a:t>
+            <a:pPr algn="l">
+              <a:spcAft>
+                <a:spcPts val="0"/>
+              </a:spcAft>
+              <a:defRPr sz="1000" b="0">
+                <a:solidFill>
+                  <a:srgbClr val="5C6672"/>
+                </a:solidFill>
+                <a:latin typeface="Noto Sans CJK KR"/>
+              </a:defRPr>
+            </a:pPr>
+            <a:r>
+              <a:t>파일 전체 1/1 · 이 슬라이드 다음에 같은 파일의 나머지 줄이 이어집니다.</a:t>
             </a:r>
           </a:p>
         </p:txBody>
@@ -12592,7 +13605,7 @@
               </a:defRPr>
             </a:pPr>
             <a:r>
-              <a:t>체크포인트를 저장하고 다음 모듈로 넘긴다</a:t>
+              <a:t>build → source → run 순서로 실행한다</a:t>
             </a:r>
           </a:p>
         </p:txBody>
@@ -12631,7 +13644,7 @@
               </a:defRPr>
             </a:pPr>
             <a:r>
-              <a:t>현재 Complete는 다음 Starter의 기준선입니다.</a:t>
+              <a:t>새 파일 또는 수정 파일은 build와 source 뒤에만 실행 이름·설정에 반영됩니다.</a:t>
             </a:r>
           </a:p>
         </p:txBody>
@@ -12767,7 +13780,7 @@
               </a:defRPr>
             </a:pPr>
             <a:r>
-              <a:t>현재 단계 체크포인트    |    현재 폴더 ~/agv_ws    |    현재 터미널</a:t>
+              <a:t>현재 단계 실행    |    현재 폴더 ~/ros2_curri/agv_ws    |    현재 터미널</a:t>
             </a:r>
           </a:p>
         </p:txBody>
@@ -12780,18 +13793,18 @@
         </p:nvSpPr>
         <p:spPr>
           <a:xfrm>
-            <a:off x="685800" y="1737360"/>
-            <a:ext cx="10972800" cy="3611880"/>
+            <a:off x="658368" y="1700784"/>
+            <a:ext cx="10972800" cy="3182112"/>
           </a:xfrm>
           <a:prstGeom prst="roundRect">
             <a:avLst/>
           </a:prstGeom>
           <a:solidFill>
-            <a:srgbClr val="F4F7FB"/>
+            <a:srgbClr val="1D232D"/>
           </a:solidFill>
           <a:ln>
             <a:solidFill>
-              <a:srgbClr val="D2DCE8"/>
+              <a:srgbClr val="1D232D"/>
             </a:solidFill>
           </a:ln>
         </p:spPr>
@@ -12810,10 +13823,27 @@
           </a:fontRef>
         </p:style>
         <p:txBody>
-          <a:bodyPr rtlCol="0" anchor="ctr"/>
-          <a:lstStyle/>
-          <a:p>
-            <a:pPr algn="ctr"/>
+          <a:bodyPr rtlCol="0" anchor="ctr" wrap="square" lIns="73152" rIns="73152" tIns="36576" bIns="36576"/>
+          <a:lstStyle/>
+          <a:p>
+            <a:pPr algn="l">
+              <a:spcAft>
+                <a:spcPts val="0"/>
+              </a:spcAft>
+              <a:defRPr sz="1600" b="0">
+                <a:solidFill>
+                  <a:srgbClr val="FFFFFF"/>
+                </a:solidFill>
+                <a:latin typeface="DejaVu Sans Mono"/>
+              </a:defRPr>
+            </a:pPr>
+            <a:r>
+              <a:t>source ~/ros2_curri/agv_ws/install/setup.bash</a:t>
+            </a:r>
+            <a:br/>
+            <a:r>
+              <a:t>ros2 run agv_vision yolo_node --ros-args -p enable_yolo:=false</a:t>
+            </a:r>
           </a:p>
         </p:txBody>
       </p:sp>
@@ -12825,111 +13855,8 @@
         </p:nvSpPr>
         <p:spPr>
           <a:xfrm>
-            <a:off x="896112" y="1993392"/>
-            <a:ext cx="10332720" cy="2971800"/>
-          </a:xfrm>
-          <a:prstGeom prst="rect">
-            <a:avLst/>
-          </a:prstGeom>
-          <a:noFill/>
-        </p:spPr>
-        <p:txBody>
-          <a:bodyPr wrap="square" lIns="109728" rIns="109728">
-            <a:spAutoFit/>
-          </a:bodyPr>
-          <a:lstStyle/>
-          <a:p>
-            <a:pPr>
-              <a:spcAft>
-                <a:spcPts val="800"/>
-              </a:spcAft>
-              <a:defRPr sz="1800">
-                <a:solidFill>
-                  <a:srgbClr val="122C4E"/>
-                </a:solidFill>
-                <a:latin typeface="Noto Sans CJK KR"/>
-              </a:defRPr>
-            </a:pPr>
-            <a:r>
-              <a:t>• □ 완료 화면: /detections message 형식과 YOLO enable_yolo/model_path/threshold parameter를 확인한다.</a:t>
-            </a:r>
-          </a:p>
-          <a:p>
-            <a:pPr>
-              <a:spcAft>
-                <a:spcPts val="800"/>
-              </a:spcAft>
-              <a:defRPr sz="1800">
-                <a:solidFill>
-                  <a:srgbClr val="122C4E"/>
-                </a:solidFill>
-                <a:latin typeface="Noto Sans CJK KR"/>
-              </a:defRPr>
-            </a:pPr>
-            <a:r>
-              <a:t>• □ Complete 파일: blocks/E_autonomy_logic/M17_yolo_vision/complete/</a:t>
-            </a:r>
-          </a:p>
-          <a:p>
-            <a:pPr>
-              <a:spcAft>
-                <a:spcPts val="800"/>
-              </a:spcAft>
-              <a:defRPr sz="1800">
-                <a:solidFill>
-                  <a:srgbClr val="122C4E"/>
-                </a:solidFill>
-                <a:latin typeface="Noto Sans CJK KR"/>
-              </a:defRPr>
-            </a:pPr>
-            <a:r>
-              <a:t>• □ 정상 로그·캡처: logs/validation.log, screenshots/validation_terminal.png</a:t>
-            </a:r>
-          </a:p>
-          <a:p>
-            <a:pPr>
-              <a:spcAft>
-                <a:spcPts val="800"/>
-              </a:spcAft>
-              <a:defRPr sz="1800">
-                <a:solidFill>
-                  <a:srgbClr val="122C4E"/>
-                </a:solidFill>
-                <a:latin typeface="Noto Sans CJK KR"/>
-              </a:defRPr>
-            </a:pPr>
-            <a:r>
-              <a:t>• □ 버전 식별: CHECKSUM_or_TAG.txt의 SHA-256 manifest</a:t>
-            </a:r>
-          </a:p>
-          <a:p>
-            <a:pPr>
-              <a:spcAft>
-                <a:spcPts val="800"/>
-              </a:spcAft>
-              <a:defRPr sz="1800">
-                <a:solidFill>
-                  <a:srgbClr val="122C4E"/>
-                </a:solidFill>
-                <a:latin typeface="Noto Sans CJK KR"/>
-              </a:defRPr>
-            </a:pPr>
-            <a:r>
-              <a:t>• □ 다음 시작 조건: M18 safety fusion</a:t>
-            </a:r>
-          </a:p>
-        </p:txBody>
-      </p:sp>
-      <p:sp>
-        <p:nvSpPr>
-          <p:cNvPr id="9" name="TextBox 8"/>
-          <p:cNvSpPr txBox="1"/>
-          <p:nvPr/>
-        </p:nvSpPr>
-        <p:spPr>
-          <a:xfrm>
-            <a:off x="868680" y="5596128"/>
-            <a:ext cx="10515600" cy="338328"/>
+            <a:off x="786384" y="5239512"/>
+            <a:ext cx="1261872" cy="237744"/>
           </a:xfrm>
           <a:prstGeom prst="rect">
             <a:avLst/>
@@ -12942,11 +13869,11 @@
           </a:bodyPr>
           <a:lstStyle/>
           <a:p>
-            <a:pPr algn="ctr">
-              <a:spcAft>
-                <a:spcPts val="0"/>
-              </a:spcAft>
-              <a:defRPr sz="1700" b="1">
+            <a:pPr algn="l">
+              <a:spcAft>
+                <a:spcPts val="0"/>
+              </a:spcAft>
+              <a:defRPr sz="1800" b="1">
                 <a:solidFill>
                   <a:srgbClr val="2A8B5A"/>
                 </a:solidFill>
@@ -12954,7 +13881,46 @@
               </a:defRPr>
             </a:pPr>
             <a:r>
-              <a:t>다음 모듈을 시작하기 전, 이 슬라이드의 Complete와 다음 모듈의 Starter를 비교합니다.</a:t>
+              <a:t>확인 기준</a:t>
+            </a:r>
+          </a:p>
+        </p:txBody>
+      </p:sp>
+      <p:sp>
+        <p:nvSpPr>
+          <p:cNvPr id="9" name="TextBox 8"/>
+          <p:cNvSpPr txBox="1"/>
+          <p:nvPr/>
+        </p:nvSpPr>
+        <p:spPr>
+          <a:xfrm>
+            <a:off x="786384" y="5532120"/>
+            <a:ext cx="10469880" cy="420624"/>
+          </a:xfrm>
+          <a:prstGeom prst="rect">
+            <a:avLst/>
+          </a:prstGeom>
+          <a:noFill/>
+        </p:spPr>
+        <p:txBody>
+          <a:bodyPr wrap="square" lIns="73152" rIns="73152" tIns="36576" bIns="36576">
+            <a:spAutoFit/>
+          </a:bodyPr>
+          <a:lstStyle/>
+          <a:p>
+            <a:pPr algn="l">
+              <a:spcAft>
+                <a:spcPts val="0"/>
+              </a:spcAft>
+              <a:defRPr sz="1800" b="0">
+                <a:solidFill>
+                  <a:srgbClr val="122C4E"/>
+                </a:solidFill>
+                <a:latin typeface="Noto Sans CJK KR"/>
+              </a:defRPr>
+            </a:pPr>
+            <a:r>
+              <a:t>/detections message 형식과 YOLO enable_yolo/model_path/threshold parameter를 확인한다.</a:t>
             </a:r>
           </a:p>
         </p:txBody>
@@ -13011,7 +13977,7 @@
               </a:defRPr>
             </a:pPr>
             <a:r>
-              <a:t>공식 참고 자료</a:t>
+              <a:t>정상 결과: 실제 환경에서 확인한 출력</a:t>
             </a:r>
           </a:p>
         </p:txBody>
@@ -13050,7 +14016,7 @@
               </a:defRPr>
             </a:pPr>
             <a:r>
-              <a:t>본문 단계는 링크를 열지 않아도 완료할 수 있으며, 링크는 개념을 더 확인할 때만 사용합니다.</a:t>
+              <a:t>실제 ROS 2 환경의 파일·패키지·구성 검증 로그</a:t>
             </a:r>
           </a:p>
         </p:txBody>
@@ -13133,18 +14099,492 @@
           </a:p>
         </p:txBody>
       </p:sp>
-      <p:sp>
-        <p:nvSpPr>
-          <p:cNvPr id="6" name="Rounded Rectangle 5"/>
+      <p:pic>
+        <p:nvPicPr>
+          <p:cNvPr id="6" name="Picture 5" descr="validation_terminal.png"/>
+          <p:cNvPicPr>
+            <a:picLocks noChangeAspect="1"/>
+          </p:cNvPicPr>
+          <p:nvPr/>
+        </p:nvPicPr>
+        <p:blipFill>
+          <a:blip r:embed="rId2"/>
+          <a:stretch>
+            <a:fillRect/>
+          </a:stretch>
+        </p:blipFill>
+        <p:spPr>
+          <a:xfrm>
+            <a:off x="1616852" y="1353312"/>
+            <a:ext cx="8955247" cy="4800600"/>
+          </a:xfrm>
+          <a:prstGeom prst="rect">
+            <a:avLst/>
+          </a:prstGeom>
+        </p:spPr>
+      </p:pic>
+      <p:sp>
+        <p:nvSpPr>
+          <p:cNvPr id="7" name="TextBox 6"/>
+          <p:cNvSpPr txBox="1"/>
+          <p:nvPr/>
+        </p:nvSpPr>
+        <p:spPr>
+          <a:xfrm>
+            <a:off x="777240" y="6217920"/>
+            <a:ext cx="10607040" cy="182880"/>
+          </a:xfrm>
+          <a:prstGeom prst="rect">
+            <a:avLst/>
+          </a:prstGeom>
+          <a:noFill/>
+        </p:spPr>
+        <p:txBody>
+          <a:bodyPr wrap="square" lIns="73152" rIns="73152" tIns="36576" bIns="36576">
+            <a:spAutoFit/>
+          </a:bodyPr>
+          <a:lstStyle/>
+          <a:p>
+            <a:pPr algn="ctr">
+              <a:spcAft>
+                <a:spcPts val="0"/>
+              </a:spcAft>
+              <a:defRPr sz="1100" b="1">
+                <a:solidFill>
+                  <a:srgbClr val="2A8B5A"/>
+                </a:solidFill>
+                <a:latin typeface="Noto Sans CJK KR"/>
+              </a:defRPr>
+            </a:pPr>
+            <a:r>
+              <a:t>① 명령/설정  ② 정상 출력 또는 화면  ③ 다음 검증 명령으로 재확인</a:t>
+            </a:r>
+          </a:p>
+        </p:txBody>
+      </p:sp>
+    </p:spTree>
+  </p:cSld>
+  <p:clrMapOvr>
+    <a:masterClrMapping/>
+  </p:clrMapOvr>
+</p:sld>
+</file>
+
+<file path=ppt/slides/slide26.xml><?xml version="1.0" encoding="utf-8"?>
+<p:sld xmlns:a="http://schemas.openxmlformats.org/drawingml/2006/main" xmlns:p="http://schemas.openxmlformats.org/presentationml/2006/main" xmlns:r="http://schemas.openxmlformats.org/officeDocument/2006/relationships">
+  <p:cSld>
+    <p:spTree>
+      <p:nvGrpSpPr>
+        <p:cNvPr id="1" name=""/>
+        <p:cNvGrpSpPr/>
+        <p:nvPr/>
+      </p:nvGrpSpPr>
+      <p:grpSpPr/>
+      <p:sp>
+        <p:nvSpPr>
+          <p:cNvPr id="2" name="TextBox 1"/>
+          <p:cNvSpPr txBox="1"/>
+          <p:nvPr/>
+        </p:nvSpPr>
+        <p:spPr>
+          <a:xfrm>
+            <a:off x="566928" y="347472"/>
+            <a:ext cx="10881360" cy="438912"/>
+          </a:xfrm>
+          <a:prstGeom prst="rect">
+            <a:avLst/>
+          </a:prstGeom>
+          <a:noFill/>
+        </p:spPr>
+        <p:txBody>
+          <a:bodyPr wrap="square" lIns="73152" rIns="73152" tIns="36576" bIns="36576">
+            <a:spAutoFit/>
+          </a:bodyPr>
+          <a:lstStyle/>
+          <a:p>
+            <a:pPr algn="l">
+              <a:spcAft>
+                <a:spcPts val="0"/>
+              </a:spcAft>
+              <a:defRPr sz="3200" b="1">
+                <a:solidFill>
+                  <a:srgbClr val="122C4E"/>
+                </a:solidFill>
+                <a:latin typeface="Noto Sans CJK KR"/>
+              </a:defRPr>
+            </a:pPr>
+            <a:r>
+              <a:t>정상 결과: 실제 환경에서 확인한 출력</a:t>
+            </a:r>
+          </a:p>
+        </p:txBody>
+      </p:sp>
+      <p:sp>
+        <p:nvSpPr>
+          <p:cNvPr id="3" name="TextBox 2"/>
+          <p:cNvSpPr txBox="1"/>
+          <p:nvPr/>
+        </p:nvSpPr>
+        <p:spPr>
+          <a:xfrm>
+            <a:off x="603504" y="859536"/>
+            <a:ext cx="10698480" cy="292608"/>
+          </a:xfrm>
+          <a:prstGeom prst="rect">
+            <a:avLst/>
+          </a:prstGeom>
+          <a:noFill/>
+        </p:spPr>
+        <p:txBody>
+          <a:bodyPr wrap="square" lIns="73152" rIns="73152" tIns="36576" bIns="36576">
+            <a:spAutoFit/>
+          </a:bodyPr>
+          <a:lstStyle/>
+          <a:p>
+            <a:pPr algn="l">
+              <a:spcAft>
+                <a:spcPts val="0"/>
+              </a:spcAft>
+              <a:defRPr sz="1700" b="0">
+                <a:solidFill>
+                  <a:srgbClr val="5C6672"/>
+                </a:solidFill>
+                <a:latin typeface="Noto Sans CJK KR"/>
+              </a:defRPr>
+            </a:pPr>
+            <a:r>
+              <a:t>실제 /vision/debug_image: fallback이 ‘target not visible’을 표시해 camera pose·FOV·world 배치를 점검하는 오류 사례</a:t>
+            </a:r>
+          </a:p>
+        </p:txBody>
+      </p:sp>
+      <p:sp>
+        <p:nvSpPr>
+          <p:cNvPr id="4" name="TextBox 3"/>
+          <p:cNvSpPr txBox="1"/>
+          <p:nvPr/>
+        </p:nvSpPr>
+        <p:spPr>
+          <a:xfrm>
+            <a:off x="530352" y="6510528"/>
+            <a:ext cx="7772400" cy="201168"/>
+          </a:xfrm>
+          <a:prstGeom prst="rect">
+            <a:avLst/>
+          </a:prstGeom>
+          <a:noFill/>
+        </p:spPr>
+        <p:txBody>
+          <a:bodyPr wrap="square" lIns="73152" rIns="73152" tIns="36576" bIns="36576">
+            <a:spAutoFit/>
+          </a:bodyPr>
+          <a:lstStyle/>
+          <a:p>
+            <a:pPr algn="l">
+              <a:spcAft>
+                <a:spcPts val="0"/>
+              </a:spcAft>
+              <a:defRPr sz="1000" b="0">
+                <a:solidFill>
+                  <a:srgbClr val="5C6672"/>
+                </a:solidFill>
+                <a:latin typeface="Noto Sans CJK KR"/>
+              </a:defRPr>
+            </a:pPr>
+            <a:r>
+              <a:t>ROS 2 Jazzy · Gazebo Harmonic · M17 · 따라 하기형 AGV 실습</a:t>
+            </a:r>
+          </a:p>
+        </p:txBody>
+      </p:sp>
+      <p:sp>
+        <p:nvSpPr>
+          <p:cNvPr id="5" name="TextBox 4"/>
+          <p:cNvSpPr txBox="1"/>
+          <p:nvPr/>
+        </p:nvSpPr>
+        <p:spPr>
+          <a:xfrm>
+            <a:off x="9144000" y="6510528"/>
+            <a:ext cx="2468880" cy="201168"/>
+          </a:xfrm>
+          <a:prstGeom prst="rect">
+            <a:avLst/>
+          </a:prstGeom>
+          <a:noFill/>
+        </p:spPr>
+        <p:txBody>
+          <a:bodyPr wrap="square" lIns="73152" rIns="73152" tIns="36576" bIns="36576">
+            <a:spAutoFit/>
+          </a:bodyPr>
+          <a:lstStyle/>
+          <a:p>
+            <a:pPr algn="r">
+              <a:spcAft>
+                <a:spcPts val="0"/>
+              </a:spcAft>
+              <a:defRPr sz="1000" b="0">
+                <a:solidFill>
+                  <a:srgbClr val="5C6672"/>
+                </a:solidFill>
+                <a:latin typeface="Noto Sans CJK KR"/>
+              </a:defRPr>
+            </a:pPr>
+            <a:r>
+              <a:t>명령·파일 경로는 슬라이드에서 복사 가능</a:t>
+            </a:r>
+          </a:p>
+        </p:txBody>
+      </p:sp>
+      <p:pic>
+        <p:nvPicPr>
+          <p:cNvPr id="6" name="Picture 5" descr="01_vision_debug_actual.png"/>
+          <p:cNvPicPr>
+            <a:picLocks noChangeAspect="1"/>
+          </p:cNvPicPr>
+          <p:nvPr/>
+        </p:nvPicPr>
+        <p:blipFill>
+          <a:blip r:embed="rId2"/>
+          <a:stretch>
+            <a:fillRect/>
+          </a:stretch>
+        </p:blipFill>
+        <p:spPr>
+          <a:xfrm>
+            <a:off x="2894076" y="1353312"/>
+            <a:ext cx="6400800" cy="4800600"/>
+          </a:xfrm>
+          <a:prstGeom prst="rect">
+            <a:avLst/>
+          </a:prstGeom>
+        </p:spPr>
+      </p:pic>
+      <p:sp>
+        <p:nvSpPr>
+          <p:cNvPr id="7" name="TextBox 6"/>
+          <p:cNvSpPr txBox="1"/>
+          <p:nvPr/>
+        </p:nvSpPr>
+        <p:spPr>
+          <a:xfrm>
+            <a:off x="777240" y="6217920"/>
+            <a:ext cx="10607040" cy="182880"/>
+          </a:xfrm>
+          <a:prstGeom prst="rect">
+            <a:avLst/>
+          </a:prstGeom>
+          <a:noFill/>
+        </p:spPr>
+        <p:txBody>
+          <a:bodyPr wrap="square" lIns="73152" rIns="73152" tIns="36576" bIns="36576">
+            <a:spAutoFit/>
+          </a:bodyPr>
+          <a:lstStyle/>
+          <a:p>
+            <a:pPr algn="ctr">
+              <a:spcAft>
+                <a:spcPts val="0"/>
+              </a:spcAft>
+              <a:defRPr sz="1100" b="1">
+                <a:solidFill>
+                  <a:srgbClr val="2A8B5A"/>
+                </a:solidFill>
+                <a:latin typeface="Noto Sans CJK KR"/>
+              </a:defRPr>
+            </a:pPr>
+            <a:r>
+              <a:t>① 명령/설정  ② 정상 출력 또는 화면  ③ 다음 검증 명령으로 재확인</a:t>
+            </a:r>
+          </a:p>
+        </p:txBody>
+      </p:sp>
+    </p:spTree>
+  </p:cSld>
+  <p:clrMapOvr>
+    <a:masterClrMapping/>
+  </p:clrMapOvr>
+</p:sld>
+</file>
+
+<file path=ppt/slides/slide27.xml><?xml version="1.0" encoding="utf-8"?>
+<p:sld xmlns:a="http://schemas.openxmlformats.org/drawingml/2006/main" xmlns:p="http://schemas.openxmlformats.org/presentationml/2006/main" xmlns:r="http://schemas.openxmlformats.org/officeDocument/2006/relationships">
+  <p:cSld>
+    <p:spTree>
+      <p:nvGrpSpPr>
+        <p:cNvPr id="1" name=""/>
+        <p:cNvGrpSpPr/>
+        <p:nvPr/>
+      </p:nvGrpSpPr>
+      <p:grpSpPr/>
+      <p:sp>
+        <p:nvSpPr>
+          <p:cNvPr id="2" name="TextBox 1"/>
+          <p:cNvSpPr txBox="1"/>
+          <p:nvPr/>
+        </p:nvSpPr>
+        <p:spPr>
+          <a:xfrm>
+            <a:off x="566928" y="347472"/>
+            <a:ext cx="10881360" cy="438912"/>
+          </a:xfrm>
+          <a:prstGeom prst="rect">
+            <a:avLst/>
+          </a:prstGeom>
+          <a:noFill/>
+        </p:spPr>
+        <p:txBody>
+          <a:bodyPr wrap="square" lIns="73152" rIns="73152" tIns="36576" bIns="36576">
+            <a:spAutoFit/>
+          </a:bodyPr>
+          <a:lstStyle/>
+          <a:p>
+            <a:pPr algn="l">
+              <a:spcAft>
+                <a:spcPts val="0"/>
+              </a:spcAft>
+              <a:defRPr sz="3200" b="1">
+                <a:solidFill>
+                  <a:srgbClr val="122C4E"/>
+                </a:solidFill>
+                <a:latin typeface="Noto Sans CJK KR"/>
+              </a:defRPr>
+            </a:pPr>
+            <a:r>
+              <a:t>객관적 검증 명령으로 완료를 확인한다</a:t>
+            </a:r>
+          </a:p>
+        </p:txBody>
+      </p:sp>
+      <p:sp>
+        <p:nvSpPr>
+          <p:cNvPr id="3" name="TextBox 2"/>
+          <p:cNvSpPr txBox="1"/>
+          <p:nvPr/>
+        </p:nvSpPr>
+        <p:spPr>
+          <a:xfrm>
+            <a:off x="603504" y="859536"/>
+            <a:ext cx="10698480" cy="292608"/>
+          </a:xfrm>
+          <a:prstGeom prst="rect">
+            <a:avLst/>
+          </a:prstGeom>
+          <a:noFill/>
+        </p:spPr>
+        <p:txBody>
+          <a:bodyPr wrap="square" lIns="73152" rIns="73152" tIns="36576" bIns="36576">
+            <a:spAutoFit/>
+          </a:bodyPr>
+          <a:lstStyle/>
+          <a:p>
+            <a:pPr algn="l">
+              <a:spcAft>
+                <a:spcPts val="0"/>
+              </a:spcAft>
+              <a:defRPr sz="1700" b="0">
+                <a:solidFill>
+                  <a:srgbClr val="5C6672"/>
+                </a:solidFill>
+                <a:latin typeface="Noto Sans CJK KR"/>
+              </a:defRPr>
+            </a:pPr>
+            <a:r>
+              <a:t>화면만 보지 말고 topic·frame·파일·parameter를 다시 확인합니다.</a:t>
+            </a:r>
+          </a:p>
+        </p:txBody>
+      </p:sp>
+      <p:sp>
+        <p:nvSpPr>
+          <p:cNvPr id="4" name="TextBox 3"/>
+          <p:cNvSpPr txBox="1"/>
+          <p:nvPr/>
+        </p:nvSpPr>
+        <p:spPr>
+          <a:xfrm>
+            <a:off x="530352" y="6510528"/>
+            <a:ext cx="7772400" cy="201168"/>
+          </a:xfrm>
+          <a:prstGeom prst="rect">
+            <a:avLst/>
+          </a:prstGeom>
+          <a:noFill/>
+        </p:spPr>
+        <p:txBody>
+          <a:bodyPr wrap="square" lIns="73152" rIns="73152" tIns="36576" bIns="36576">
+            <a:spAutoFit/>
+          </a:bodyPr>
+          <a:lstStyle/>
+          <a:p>
+            <a:pPr algn="l">
+              <a:spcAft>
+                <a:spcPts val="0"/>
+              </a:spcAft>
+              <a:defRPr sz="1000" b="0">
+                <a:solidFill>
+                  <a:srgbClr val="5C6672"/>
+                </a:solidFill>
+                <a:latin typeface="Noto Sans CJK KR"/>
+              </a:defRPr>
+            </a:pPr>
+            <a:r>
+              <a:t>ROS 2 Jazzy · Gazebo Harmonic · M17 · 따라 하기형 AGV 실습</a:t>
+            </a:r>
+          </a:p>
+        </p:txBody>
+      </p:sp>
+      <p:sp>
+        <p:nvSpPr>
+          <p:cNvPr id="5" name="TextBox 4"/>
+          <p:cNvSpPr txBox="1"/>
+          <p:nvPr/>
+        </p:nvSpPr>
+        <p:spPr>
+          <a:xfrm>
+            <a:off x="9144000" y="6510528"/>
+            <a:ext cx="2468880" cy="201168"/>
+          </a:xfrm>
+          <a:prstGeom prst="rect">
+            <a:avLst/>
+          </a:prstGeom>
+          <a:noFill/>
+        </p:spPr>
+        <p:txBody>
+          <a:bodyPr wrap="square" lIns="73152" rIns="73152" tIns="36576" bIns="36576">
+            <a:spAutoFit/>
+          </a:bodyPr>
+          <a:lstStyle/>
+          <a:p>
+            <a:pPr algn="r">
+              <a:spcAft>
+                <a:spcPts val="0"/>
+              </a:spcAft>
+              <a:defRPr sz="1000" b="0">
+                <a:solidFill>
+                  <a:srgbClr val="5C6672"/>
+                </a:solidFill>
+                <a:latin typeface="Noto Sans CJK KR"/>
+              </a:defRPr>
+            </a:pPr>
+            <a:r>
+              <a:t>명령·파일 경로는 슬라이드에서 복사 가능</a:t>
+            </a:r>
+          </a:p>
+        </p:txBody>
+      </p:sp>
+      <p:sp>
+        <p:nvSpPr>
+          <p:cNvPr id="6" name="Rectangle 5"/>
           <p:cNvSpPr/>
           <p:nvPr/>
         </p:nvSpPr>
         <p:spPr>
           <a:xfrm>
-            <a:off x="658368" y="1554480"/>
-            <a:ext cx="10972800" cy="4526280"/>
-          </a:xfrm>
-          <a:prstGeom prst="roundRect">
+            <a:off x="566928" y="1188720"/>
+            <a:ext cx="11064240" cy="347472"/>
+          </a:xfrm>
+          <a:prstGeom prst="rect">
             <a:avLst/>
           </a:prstGeom>
           <a:solidFill>
@@ -13152,7 +14592,7 @@
           </a:solidFill>
           <a:ln>
             <a:solidFill>
-              <a:srgbClr val="D7DFE9"/>
+              <a:srgbClr val="F4F7FB"/>
             </a:solidFill>
           </a:ln>
         </p:spPr>
@@ -13171,23 +14611,172 @@
           </a:fontRef>
         </p:style>
         <p:txBody>
-          <a:bodyPr rtlCol="0" anchor="ctr"/>
-          <a:lstStyle/>
-          <a:p>
-            <a:pPr algn="ctr"/>
-          </a:p>
-        </p:txBody>
-      </p:sp>
-      <p:sp>
-        <p:nvSpPr>
-          <p:cNvPr id="7" name="TextBox 6"/>
+          <a:bodyPr rtlCol="0" anchor="ctr" wrap="square" lIns="73152" rIns="73152" tIns="36576" bIns="36576"/>
+          <a:lstStyle/>
+          <a:p>
+            <a:pPr algn="l">
+              <a:spcAft>
+                <a:spcPts val="0"/>
+              </a:spcAft>
+              <a:defRPr sz="1300" b="1">
+                <a:solidFill>
+                  <a:srgbClr val="122C4E"/>
+                </a:solidFill>
+                <a:latin typeface="Noto Sans CJK KR"/>
+              </a:defRPr>
+            </a:pPr>
+            <a:r>
+              <a:t>현재 단계 검증    |    현재 폴더 ~/ros2_curri/agv_ws    |    현재 터미널</a:t>
+            </a:r>
+          </a:p>
+        </p:txBody>
+      </p:sp>
+      <p:sp>
+        <p:nvSpPr>
+          <p:cNvPr id="7" name="Rounded Rectangle 6"/>
+          <p:cNvSpPr/>
+          <p:nvPr/>
+        </p:nvSpPr>
+        <p:spPr>
+          <a:xfrm>
+            <a:off x="658368" y="1755648"/>
+            <a:ext cx="10972800" cy="2148840"/>
+          </a:xfrm>
+          <a:prstGeom prst="roundRect">
+            <a:avLst/>
+          </a:prstGeom>
+          <a:solidFill>
+            <a:srgbClr val="1D232D"/>
+          </a:solidFill>
+          <a:ln>
+            <a:solidFill>
+              <a:srgbClr val="1D232D"/>
+            </a:solidFill>
+          </a:ln>
+        </p:spPr>
+        <p:style>
+          <a:lnRef idx="1">
+            <a:schemeClr val="accent1"/>
+          </a:lnRef>
+          <a:fillRef idx="3">
+            <a:schemeClr val="accent1"/>
+          </a:fillRef>
+          <a:effectRef idx="2">
+            <a:schemeClr val="accent1"/>
+          </a:effectRef>
+          <a:fontRef idx="minor">
+            <a:schemeClr val="lt1"/>
+          </a:fontRef>
+        </p:style>
+        <p:txBody>
+          <a:bodyPr rtlCol="0" anchor="ctr" wrap="square" lIns="73152" rIns="73152" tIns="36576" bIns="36576"/>
+          <a:lstStyle/>
+          <a:p>
+            <a:pPr algn="l">
+              <a:spcAft>
+                <a:spcPts val="0"/>
+              </a:spcAft>
+              <a:defRPr sz="1600" b="0">
+                <a:solidFill>
+                  <a:srgbClr val="FFFFFF"/>
+                </a:solidFill>
+                <a:latin typeface="DejaVu Sans Mono"/>
+              </a:defRPr>
+            </a:pPr>
+            <a:r>
+              <a:t>ros2 interface show agv_interfaces/msg/Detection</a:t>
+            </a:r>
+            <a:br/>
+            <a:r>
+              <a:t>ros2 topic info /detections</a:t>
+            </a:r>
+            <a:br/>
+            <a:r>
+              <a:t>ros2 param get /yolo_node confidence_threshold</a:t>
+            </a:r>
+          </a:p>
+        </p:txBody>
+      </p:sp>
+      <p:sp>
+        <p:nvSpPr>
+          <p:cNvPr id="8" name="Rounded Rectangle 7"/>
+          <p:cNvSpPr/>
+          <p:nvPr/>
+        </p:nvSpPr>
+        <p:spPr>
+          <a:xfrm>
+            <a:off x="658368" y="4206240"/>
+            <a:ext cx="10972800" cy="1554480"/>
+          </a:xfrm>
+          <a:prstGeom prst="roundRect">
+            <a:avLst/>
+          </a:prstGeom>
+          <a:solidFill>
+            <a:srgbClr val="F4F7FB"/>
+          </a:solidFill>
+          <a:ln>
+            <a:solidFill>
+              <a:srgbClr val="D1DFD5"/>
+            </a:solidFill>
+          </a:ln>
+        </p:spPr>
+        <p:style>
+          <a:lnRef idx="1">
+            <a:schemeClr val="accent1"/>
+          </a:lnRef>
+          <a:fillRef idx="3">
+            <a:schemeClr val="accent1"/>
+          </a:fillRef>
+          <a:effectRef idx="2">
+            <a:schemeClr val="accent1"/>
+          </a:effectRef>
+          <a:fontRef idx="minor">
+            <a:schemeClr val="lt1"/>
+          </a:fontRef>
+        </p:style>
+        <p:txBody>
+          <a:bodyPr rtlCol="0" anchor="ctr" wrap="square" lIns="73152" rIns="73152" tIns="36576" bIns="36576"/>
+          <a:lstStyle/>
+          <a:p>
+            <a:pPr algn="l">
+              <a:spcAft>
+                <a:spcPts val="0"/>
+              </a:spcAft>
+              <a:defRPr sz="1800" b="1">
+                <a:solidFill>
+                  <a:srgbClr val="2A8B5A"/>
+                </a:solidFill>
+                <a:latin typeface="Noto Sans CJK KR"/>
+              </a:defRPr>
+            </a:pPr>
+            <a:r>
+              <a:t>완료 체크</a:t>
+            </a:r>
+            <a:br/>
+            <a:r>
+              <a:t>□ 명령이 오류 없이 실행된다.</a:t>
+            </a:r>
+            <a:br/>
+            <a:r>
+              <a:t>□ 기대한 파일·topic·frame·parameter 이름이 보인다.</a:t>
+            </a:r>
+            <a:br/>
+            <a:r>
+              <a:t>□ 값의 단위와 방향을 한 문장으로 설명할 수 있다.</a:t>
+            </a:r>
+          </a:p>
+        </p:txBody>
+      </p:sp>
+      <p:sp>
+        <p:nvSpPr>
+          <p:cNvPr id="9" name="TextBox 8"/>
           <p:cNvSpPr txBox="1"/>
           <p:nvPr/>
         </p:nvSpPr>
         <p:spPr>
           <a:xfrm>
-            <a:off x="914400" y="1773936"/>
-            <a:ext cx="3840480" cy="256032"/>
+            <a:off x="731520" y="5989320"/>
+            <a:ext cx="10789920" cy="237744"/>
           </a:xfrm>
           <a:prstGeom prst="rect">
             <a:avLst/>
@@ -13204,7 +14793,7 @@
               <a:spcAft>
                 <a:spcPts val="0"/>
               </a:spcAft>
-              <a:defRPr sz="1700" b="1">
+              <a:defRPr sz="1500" b="1">
                 <a:solidFill>
                   <a:srgbClr val="122C4E"/>
                 </a:solidFill>
@@ -13212,21 +14801,39 @@
               </a:defRPr>
             </a:pPr>
             <a:r>
-              <a:t>ROS 2 Jazzy — Gazebo Simulation</a:t>
-            </a:r>
-          </a:p>
-        </p:txBody>
-      </p:sp>
-      <p:sp>
-        <p:nvSpPr>
-          <p:cNvPr id="8" name="TextBox 7"/>
+              <a:t>완료 조건: /detections message 형식과 YOLO enable_yolo/model_path/threshold parameter를 확인한다.</a:t>
+            </a:r>
+          </a:p>
+        </p:txBody>
+      </p:sp>
+    </p:spTree>
+  </p:cSld>
+  <p:clrMapOvr>
+    <a:masterClrMapping/>
+  </p:clrMapOvr>
+</p:sld>
+</file>
+
+<file path=ppt/slides/slide28.xml><?xml version="1.0" encoding="utf-8"?>
+<p:sld xmlns:a="http://schemas.openxmlformats.org/drawingml/2006/main" xmlns:p="http://schemas.openxmlformats.org/presentationml/2006/main" xmlns:r="http://schemas.openxmlformats.org/officeDocument/2006/relationships">
+  <p:cSld>
+    <p:spTree>
+      <p:nvGrpSpPr>
+        <p:cNvPr id="1" name=""/>
+        <p:cNvGrpSpPr/>
+        <p:nvPr/>
+      </p:nvGrpSpPr>
+      <p:grpSpPr/>
+      <p:sp>
+        <p:nvSpPr>
+          <p:cNvPr id="2" name="TextBox 1"/>
           <p:cNvSpPr txBox="1"/>
           <p:nvPr/>
         </p:nvSpPr>
         <p:spPr>
           <a:xfrm>
-            <a:off x="914400" y="2048255"/>
-            <a:ext cx="9966960" cy="475488"/>
+            <a:off x="566928" y="347472"/>
+            <a:ext cx="10881360" cy="438912"/>
           </a:xfrm>
           <a:prstGeom prst="rect">
             <a:avLst/>
@@ -13243,29 +14850,29 @@
               <a:spcAft>
                 <a:spcPts val="0"/>
               </a:spcAft>
-              <a:defRPr sz="1000" b="0">
-                <a:solidFill>
-                  <a:srgbClr val="225B9B"/>
-                </a:solidFill>
-                <a:latin typeface="DejaVu Sans Mono"/>
-              </a:defRPr>
-            </a:pPr>
-            <a:r>
-              <a:t>https://docs.ros.org/en/jazzy/Tutorials/Advanced/Simulators/Gazebo/Simulation-Gazebo.html</a:t>
-            </a:r>
-          </a:p>
-        </p:txBody>
-      </p:sp>
-      <p:sp>
-        <p:nvSpPr>
-          <p:cNvPr id="9" name="TextBox 8"/>
+              <a:defRPr sz="3200" b="1">
+                <a:solidFill>
+                  <a:srgbClr val="122C4E"/>
+                </a:solidFill>
+                <a:latin typeface="Noto Sans CJK KR"/>
+              </a:defRPr>
+            </a:pPr>
+            <a:r>
+              <a:t>막히면: 증상 → 우선 확인 → 재검증</a:t>
+            </a:r>
+          </a:p>
+        </p:txBody>
+      </p:sp>
+      <p:sp>
+        <p:nvSpPr>
+          <p:cNvPr id="3" name="TextBox 2"/>
           <p:cNvSpPr txBox="1"/>
           <p:nvPr/>
         </p:nvSpPr>
         <p:spPr>
           <a:xfrm>
-            <a:off x="914400" y="2852928"/>
-            <a:ext cx="3840480" cy="256032"/>
+            <a:off x="603504" y="859536"/>
+            <a:ext cx="10698480" cy="292608"/>
           </a:xfrm>
           <a:prstGeom prst="rect">
             <a:avLst/>
@@ -13282,29 +14889,29 @@
               <a:spcAft>
                 <a:spcPts val="0"/>
               </a:spcAft>
-              <a:defRPr sz="1700" b="1">
-                <a:solidFill>
-                  <a:srgbClr val="122C4E"/>
-                </a:solidFill>
-                <a:latin typeface="Noto Sans CJK KR"/>
-              </a:defRPr>
-            </a:pPr>
-            <a:r>
-              <a:t>ROS 2 Jazzy — URDF / robot_state_publisher</a:t>
-            </a:r>
-          </a:p>
-        </p:txBody>
-      </p:sp>
-      <p:sp>
-        <p:nvSpPr>
-          <p:cNvPr id="10" name="TextBox 9"/>
+              <a:defRPr sz="1700" b="0">
+                <a:solidFill>
+                  <a:srgbClr val="5C6672"/>
+                </a:solidFill>
+                <a:latin typeface="Noto Sans CJK KR"/>
+              </a:defRPr>
+            </a:pPr>
+            <a:r>
+              <a:t>오류 메시지를 숨기지 않고 같은 순서로 점검합니다.</a:t>
+            </a:r>
+          </a:p>
+        </p:txBody>
+      </p:sp>
+      <p:sp>
+        <p:nvSpPr>
+          <p:cNvPr id="4" name="TextBox 3"/>
           <p:cNvSpPr txBox="1"/>
           <p:nvPr/>
         </p:nvSpPr>
         <p:spPr>
           <a:xfrm>
-            <a:off x="914400" y="3127248"/>
-            <a:ext cx="9966960" cy="475488"/>
+            <a:off x="530352" y="6510528"/>
+            <a:ext cx="7772400" cy="201168"/>
           </a:xfrm>
           <a:prstGeom prst="rect">
             <a:avLst/>
@@ -13323,27 +14930,27 @@
               </a:spcAft>
               <a:defRPr sz="1000" b="0">
                 <a:solidFill>
-                  <a:srgbClr val="225B9B"/>
-                </a:solidFill>
-                <a:latin typeface="DejaVu Sans Mono"/>
-              </a:defRPr>
-            </a:pPr>
-            <a:r>
-              <a:t>https://docs.ros.org/en/jazzy/Tutorials/Intermediate/URDF/Using-URDF-with-Robot-State-Publisher-py.html</a:t>
-            </a:r>
-          </a:p>
-        </p:txBody>
-      </p:sp>
-      <p:sp>
-        <p:nvSpPr>
-          <p:cNvPr id="11" name="TextBox 10"/>
+                  <a:srgbClr val="5C6672"/>
+                </a:solidFill>
+                <a:latin typeface="Noto Sans CJK KR"/>
+              </a:defRPr>
+            </a:pPr>
+            <a:r>
+              <a:t>ROS 2 Jazzy · Gazebo Harmonic · M17 · 따라 하기형 AGV 실습</a:t>
+            </a:r>
+          </a:p>
+        </p:txBody>
+      </p:sp>
+      <p:sp>
+        <p:nvSpPr>
+          <p:cNvPr id="5" name="TextBox 4"/>
           <p:cNvSpPr txBox="1"/>
           <p:nvPr/>
         </p:nvSpPr>
         <p:spPr>
           <a:xfrm>
-            <a:off x="914400" y="3931920"/>
-            <a:ext cx="3840480" cy="256032"/>
+            <a:off x="9144000" y="6510528"/>
+            <a:ext cx="2468880" cy="201168"/>
           </a:xfrm>
           <a:prstGeom prst="rect">
             <a:avLst/>
@@ -13356,11 +14963,69 @@
           </a:bodyPr>
           <a:lstStyle/>
           <a:p>
+            <a:pPr algn="r">
+              <a:spcAft>
+                <a:spcPts val="0"/>
+              </a:spcAft>
+              <a:defRPr sz="1000" b="0">
+                <a:solidFill>
+                  <a:srgbClr val="5C6672"/>
+                </a:solidFill>
+                <a:latin typeface="Noto Sans CJK KR"/>
+              </a:defRPr>
+            </a:pPr>
+            <a:r>
+              <a:t>명령·파일 경로는 슬라이드에서 복사 가능</a:t>
+            </a:r>
+          </a:p>
+        </p:txBody>
+      </p:sp>
+      <p:sp>
+        <p:nvSpPr>
+          <p:cNvPr id="6" name="Rectangle 5"/>
+          <p:cNvSpPr/>
+          <p:nvPr/>
+        </p:nvSpPr>
+        <p:spPr>
+          <a:xfrm>
+            <a:off x="566928" y="1188720"/>
+            <a:ext cx="11064240" cy="347472"/>
+          </a:xfrm>
+          <a:prstGeom prst="rect">
+            <a:avLst/>
+          </a:prstGeom>
+          <a:solidFill>
+            <a:srgbClr val="F4F7FB"/>
+          </a:solidFill>
+          <a:ln>
+            <a:solidFill>
+              <a:srgbClr val="F4F7FB"/>
+            </a:solidFill>
+          </a:ln>
+        </p:spPr>
+        <p:style>
+          <a:lnRef idx="1">
+            <a:schemeClr val="accent1"/>
+          </a:lnRef>
+          <a:fillRef idx="3">
+            <a:schemeClr val="accent1"/>
+          </a:fillRef>
+          <a:effectRef idx="2">
+            <a:schemeClr val="accent1"/>
+          </a:effectRef>
+          <a:fontRef idx="minor">
+            <a:schemeClr val="lt1"/>
+          </a:fontRef>
+        </p:style>
+        <p:txBody>
+          <a:bodyPr rtlCol="0" anchor="ctr" wrap="square" lIns="73152" rIns="73152" tIns="36576" bIns="36576"/>
+          <a:lstStyle/>
+          <a:p>
             <a:pPr algn="l">
               <a:spcAft>
                 <a:spcPts val="0"/>
               </a:spcAft>
-              <a:defRPr sz="1700" b="1">
+              <a:defRPr sz="1300" b="1">
                 <a:solidFill>
                   <a:srgbClr val="122C4E"/>
                 </a:solidFill>
@@ -13368,21 +15033,66 @@
               </a:defRPr>
             </a:pPr>
             <a:r>
-              <a:t>Gazebo — ROS 2 Integration / ros_gz_bridge</a:t>
-            </a:r>
-          </a:p>
-        </p:txBody>
-      </p:sp>
-      <p:sp>
-        <p:nvSpPr>
-          <p:cNvPr id="12" name="TextBox 11"/>
+              <a:t>현재 단계 오류 대응    |    현재 폴더 ~/ros2_curri/agv_ws    |    현재 터미널</a:t>
+            </a:r>
+          </a:p>
+        </p:txBody>
+      </p:sp>
+      <p:sp>
+        <p:nvSpPr>
+          <p:cNvPr id="7" name="Rounded Rectangle 6"/>
+          <p:cNvSpPr/>
+          <p:nvPr/>
+        </p:nvSpPr>
+        <p:spPr>
+          <a:xfrm>
+            <a:off x="694944" y="1755648"/>
+            <a:ext cx="10972800" cy="1115568"/>
+          </a:xfrm>
+          <a:prstGeom prst="roundRect">
+            <a:avLst/>
+          </a:prstGeom>
+          <a:solidFill>
+            <a:srgbClr val="FFF7F4"/>
+          </a:solidFill>
+          <a:ln>
+            <a:solidFill>
+              <a:srgbClr val="EDBEB4"/>
+            </a:solidFill>
+          </a:ln>
+        </p:spPr>
+        <p:style>
+          <a:lnRef idx="1">
+            <a:schemeClr val="accent1"/>
+          </a:lnRef>
+          <a:fillRef idx="3">
+            <a:schemeClr val="accent1"/>
+          </a:fillRef>
+          <a:effectRef idx="2">
+            <a:schemeClr val="accent1"/>
+          </a:effectRef>
+          <a:fontRef idx="minor">
+            <a:schemeClr val="lt1"/>
+          </a:fontRef>
+        </p:style>
+        <p:txBody>
+          <a:bodyPr rtlCol="0" anchor="ctr"/>
+          <a:lstStyle/>
+          <a:p>
+            <a:pPr algn="ctr"/>
+          </a:p>
+        </p:txBody>
+      </p:sp>
+      <p:sp>
+        <p:nvSpPr>
+          <p:cNvPr id="8" name="TextBox 7"/>
           <p:cNvSpPr txBox="1"/>
           <p:nvPr/>
         </p:nvSpPr>
         <p:spPr>
           <a:xfrm>
-            <a:off x="914400" y="4206240"/>
-            <a:ext cx="9966960" cy="475488"/>
+            <a:off x="896112" y="1901952"/>
+            <a:ext cx="2926080" cy="274320"/>
           </a:xfrm>
           <a:prstGeom prst="rect">
             <a:avLst/>
@@ -13399,29 +15109,29 @@
               <a:spcAft>
                 <a:spcPts val="0"/>
               </a:spcAft>
-              <a:defRPr sz="1000" b="0">
-                <a:solidFill>
-                  <a:srgbClr val="225B9B"/>
-                </a:solidFill>
-                <a:latin typeface="DejaVu Sans Mono"/>
-              </a:defRPr>
-            </a:pPr>
-            <a:r>
-              <a:t>https://gazebosim.org/docs/latest/ros2_integration/</a:t>
-            </a:r>
-          </a:p>
-        </p:txBody>
-      </p:sp>
-      <p:sp>
-        <p:nvSpPr>
-          <p:cNvPr id="13" name="TextBox 12"/>
+              <a:defRPr sz="1800" b="1">
+                <a:solidFill>
+                  <a:srgbClr val="BE3B3B"/>
+                </a:solidFill>
+                <a:latin typeface="Noto Sans CJK KR"/>
+              </a:defRPr>
+            </a:pPr>
+            <a:r>
+              <a:t>증상 1: 모델 파일을 못 찾음</a:t>
+            </a:r>
+          </a:p>
+        </p:txBody>
+      </p:sp>
+      <p:sp>
+        <p:nvSpPr>
+          <p:cNvPr id="9" name="TextBox 8"/>
           <p:cNvSpPr txBox="1"/>
           <p:nvPr/>
         </p:nvSpPr>
         <p:spPr>
           <a:xfrm>
-            <a:off x="914400" y="5010912"/>
-            <a:ext cx="3840480" cy="256032"/>
+            <a:off x="3794760" y="1883664"/>
+            <a:ext cx="7543800" cy="621792"/>
           </a:xfrm>
           <a:prstGeom prst="rect">
             <a:avLst/>
@@ -13438,7 +15148,7 @@
               <a:spcAft>
                 <a:spcPts val="0"/>
               </a:spcAft>
-              <a:defRPr sz="1700" b="1">
+              <a:defRPr sz="1600" b="0">
                 <a:solidFill>
                   <a:srgbClr val="122C4E"/>
                 </a:solidFill>
@@ -13446,21 +15156,70 @@
               </a:defRPr>
             </a:pPr>
             <a:r>
-              <a:t>ROS 2 Jazzy — rosbag2 Recording and Playback</a:t>
-            </a:r>
-          </a:p>
-        </p:txBody>
-      </p:sp>
-      <p:sp>
-        <p:nvSpPr>
-          <p:cNvPr id="14" name="TextBox 13"/>
+              <a:t>우선 확인: model_path와 모델 파일 배포 정책을 확인한다.</a:t>
+            </a:r>
+            <a:br/>
+            <a:r>
+              <a:t>수정 후: ros2 interface show agv_interfaces/msg/Detection</a:t>
+            </a:r>
+          </a:p>
+        </p:txBody>
+      </p:sp>
+      <p:sp>
+        <p:nvSpPr>
+          <p:cNvPr id="10" name="Rounded Rectangle 9"/>
+          <p:cNvSpPr/>
+          <p:nvPr/>
+        </p:nvSpPr>
+        <p:spPr>
+          <a:xfrm>
+            <a:off x="694944" y="3172968"/>
+            <a:ext cx="10972800" cy="1115568"/>
+          </a:xfrm>
+          <a:prstGeom prst="roundRect">
+            <a:avLst/>
+          </a:prstGeom>
+          <a:solidFill>
+            <a:srgbClr val="FFF7F4"/>
+          </a:solidFill>
+          <a:ln>
+            <a:solidFill>
+              <a:srgbClr val="EDBEB4"/>
+            </a:solidFill>
+          </a:ln>
+        </p:spPr>
+        <p:style>
+          <a:lnRef idx="1">
+            <a:schemeClr val="accent1"/>
+          </a:lnRef>
+          <a:fillRef idx="3">
+            <a:schemeClr val="accent1"/>
+          </a:fillRef>
+          <a:effectRef idx="2">
+            <a:schemeClr val="accent1"/>
+          </a:effectRef>
+          <a:fontRef idx="minor">
+            <a:schemeClr val="lt1"/>
+          </a:fontRef>
+        </p:style>
+        <p:txBody>
+          <a:bodyPr rtlCol="0" anchor="ctr"/>
+          <a:lstStyle/>
+          <a:p>
+            <a:pPr algn="ctr"/>
+          </a:p>
+        </p:txBody>
+      </p:sp>
+      <p:sp>
+        <p:nvSpPr>
+          <p:cNvPr id="11" name="TextBox 10"/>
           <p:cNvSpPr txBox="1"/>
           <p:nvPr/>
         </p:nvSpPr>
         <p:spPr>
           <a:xfrm>
-            <a:off x="914400" y="5285232"/>
-            <a:ext cx="9966960" cy="475488"/>
+            <a:off x="896112" y="3319272"/>
+            <a:ext cx="2926080" cy="274320"/>
           </a:xfrm>
           <a:prstGeom prst="rect">
             <a:avLst/>
@@ -13477,15 +15236,426 @@
               <a:spcAft>
                 <a:spcPts val="0"/>
               </a:spcAft>
+              <a:defRPr sz="1800" b="1">
+                <a:solidFill>
+                  <a:srgbClr val="BE3B3B"/>
+                </a:solidFill>
+                <a:latin typeface="Noto Sans CJK KR"/>
+              </a:defRPr>
+            </a:pPr>
+            <a:r>
+              <a:t>증상 2: Custom msg import 실패</a:t>
+            </a:r>
+          </a:p>
+        </p:txBody>
+      </p:sp>
+      <p:sp>
+        <p:nvSpPr>
+          <p:cNvPr id="12" name="TextBox 11"/>
+          <p:cNvSpPr txBox="1"/>
+          <p:nvPr/>
+        </p:nvSpPr>
+        <p:spPr>
+          <a:xfrm>
+            <a:off x="3794760" y="3300984"/>
+            <a:ext cx="7543800" cy="621792"/>
+          </a:xfrm>
+          <a:prstGeom prst="rect">
+            <a:avLst/>
+          </a:prstGeom>
+          <a:noFill/>
+        </p:spPr>
+        <p:txBody>
+          <a:bodyPr wrap="square" lIns="73152" rIns="73152" tIns="36576" bIns="36576">
+            <a:spAutoFit/>
+          </a:bodyPr>
+          <a:lstStyle/>
+          <a:p>
+            <a:pPr algn="l">
+              <a:spcAft>
+                <a:spcPts val="0"/>
+              </a:spcAft>
+              <a:defRPr sz="1600" b="0">
+                <a:solidFill>
+                  <a:srgbClr val="122C4E"/>
+                </a:solidFill>
+                <a:latin typeface="Noto Sans CJK KR"/>
+              </a:defRPr>
+            </a:pPr>
+            <a:r>
+              <a:t>우선 확인: agv_interfaces 빌드·source·package dependency를 확인한다.</a:t>
+            </a:r>
+            <a:br/>
+            <a:r>
+              <a:t>수정 후: ros2 interface show agv_interfaces/msg/Detection</a:t>
+            </a:r>
+          </a:p>
+        </p:txBody>
+      </p:sp>
+      <p:sp>
+        <p:nvSpPr>
+          <p:cNvPr id="13" name="TextBox 12"/>
+          <p:cNvSpPr txBox="1"/>
+          <p:nvPr/>
+        </p:nvSpPr>
+        <p:spPr>
+          <a:xfrm>
+            <a:off x="822960" y="5102352"/>
+            <a:ext cx="10607040" cy="402336"/>
+          </a:xfrm>
+          <a:prstGeom prst="rect">
+            <a:avLst/>
+          </a:prstGeom>
+          <a:noFill/>
+        </p:spPr>
+        <p:txBody>
+          <a:bodyPr wrap="square" lIns="73152" rIns="73152" tIns="36576" bIns="36576">
+            <a:spAutoFit/>
+          </a:bodyPr>
+          <a:lstStyle/>
+          <a:p>
+            <a:pPr algn="ctr">
+              <a:spcAft>
+                <a:spcPts val="0"/>
+              </a:spcAft>
+              <a:defRPr sz="1800" b="1">
+                <a:solidFill>
+                  <a:srgbClr val="DB7E22"/>
+                </a:solidFill>
+                <a:latin typeface="Noto Sans CJK KR"/>
+              </a:defRPr>
+            </a:pPr>
+            <a:r>
+              <a:t>공통 순서: ① 현재 폴더 ② source ③ 파일 경로 ④ 이름/타입/단위 ⑤ build·source 후 재실행</a:t>
+            </a:r>
+          </a:p>
+        </p:txBody>
+      </p:sp>
+    </p:spTree>
+  </p:cSld>
+  <p:clrMapOvr>
+    <a:masterClrMapping/>
+  </p:clrMapOvr>
+</p:sld>
+</file>
+
+<file path=ppt/slides/slide29.xml><?xml version="1.0" encoding="utf-8"?>
+<p:sld xmlns:a="http://schemas.openxmlformats.org/drawingml/2006/main" xmlns:p="http://schemas.openxmlformats.org/presentationml/2006/main" xmlns:r="http://schemas.openxmlformats.org/officeDocument/2006/relationships">
+  <p:cSld>
+    <p:spTree>
+      <p:nvGrpSpPr>
+        <p:cNvPr id="1" name=""/>
+        <p:cNvGrpSpPr/>
+        <p:nvPr/>
+      </p:nvGrpSpPr>
+      <p:grpSpPr/>
+      <p:sp>
+        <p:nvSpPr>
+          <p:cNvPr id="2" name="TextBox 1"/>
+          <p:cNvSpPr txBox="1"/>
+          <p:nvPr/>
+        </p:nvSpPr>
+        <p:spPr>
+          <a:xfrm>
+            <a:off x="566928" y="347472"/>
+            <a:ext cx="10881360" cy="438912"/>
+          </a:xfrm>
+          <a:prstGeom prst="rect">
+            <a:avLst/>
+          </a:prstGeom>
+          <a:noFill/>
+        </p:spPr>
+        <p:txBody>
+          <a:bodyPr wrap="square" lIns="73152" rIns="73152" tIns="36576" bIns="36576">
+            <a:spAutoFit/>
+          </a:bodyPr>
+          <a:lstStyle/>
+          <a:p>
+            <a:pPr algn="l">
+              <a:spcAft>
+                <a:spcPts val="0"/>
+              </a:spcAft>
+              <a:defRPr sz="3200" b="1">
+                <a:solidFill>
+                  <a:srgbClr val="122C4E"/>
+                </a:solidFill>
+                <a:latin typeface="Noto Sans CJK KR"/>
+              </a:defRPr>
+            </a:pPr>
+            <a:r>
+              <a:t>미니 실습: 값 하나를 바꾸고 결과를 비교한다</a:t>
+            </a:r>
+          </a:p>
+        </p:txBody>
+      </p:sp>
+      <p:sp>
+        <p:nvSpPr>
+          <p:cNvPr id="3" name="TextBox 2"/>
+          <p:cNvSpPr txBox="1"/>
+          <p:nvPr/>
+        </p:nvSpPr>
+        <p:spPr>
+          <a:xfrm>
+            <a:off x="603504" y="859536"/>
+            <a:ext cx="10698480" cy="292608"/>
+          </a:xfrm>
+          <a:prstGeom prst="rect">
+            <a:avLst/>
+          </a:prstGeom>
+          <a:noFill/>
+        </p:spPr>
+        <p:txBody>
+          <a:bodyPr wrap="square" lIns="73152" rIns="73152" tIns="36576" bIns="36576">
+            <a:spAutoFit/>
+          </a:bodyPr>
+          <a:lstStyle/>
+          <a:p>
+            <a:pPr algn="l">
+              <a:spcAft>
+                <a:spcPts val="0"/>
+              </a:spcAft>
+              <a:defRPr sz="1700" b="0">
+                <a:solidFill>
+                  <a:srgbClr val="5C6672"/>
+                </a:solidFill>
+                <a:latin typeface="Noto Sans CJK KR"/>
+              </a:defRPr>
+            </a:pPr>
+            <a:r>
+              <a:t>정상 결과를 만든 뒤에는 한 번에 하나의 값만 바꿉니다.</a:t>
+            </a:r>
+          </a:p>
+        </p:txBody>
+      </p:sp>
+      <p:sp>
+        <p:nvSpPr>
+          <p:cNvPr id="4" name="TextBox 3"/>
+          <p:cNvSpPr txBox="1"/>
+          <p:nvPr/>
+        </p:nvSpPr>
+        <p:spPr>
+          <a:xfrm>
+            <a:off x="530352" y="6510528"/>
+            <a:ext cx="7772400" cy="201168"/>
+          </a:xfrm>
+          <a:prstGeom prst="rect">
+            <a:avLst/>
+          </a:prstGeom>
+          <a:noFill/>
+        </p:spPr>
+        <p:txBody>
+          <a:bodyPr wrap="square" lIns="73152" rIns="73152" tIns="36576" bIns="36576">
+            <a:spAutoFit/>
+          </a:bodyPr>
+          <a:lstStyle/>
+          <a:p>
+            <a:pPr algn="l">
+              <a:spcAft>
+                <a:spcPts val="0"/>
+              </a:spcAft>
               <a:defRPr sz="1000" b="0">
                 <a:solidFill>
-                  <a:srgbClr val="225B9B"/>
-                </a:solidFill>
-                <a:latin typeface="DejaVu Sans Mono"/>
-              </a:defRPr>
-            </a:pPr>
-            <a:r>
-              <a:t>https://docs.ros.org/en/jazzy/Tutorials/Beginner-CLI-Tools/Recording-And-Playing-Back-Data/Recording-And-Playing-Back-Data.html</a:t>
+                  <a:srgbClr val="5C6672"/>
+                </a:solidFill>
+                <a:latin typeface="Noto Sans CJK KR"/>
+              </a:defRPr>
+            </a:pPr>
+            <a:r>
+              <a:t>ROS 2 Jazzy · Gazebo Harmonic · M17 · 따라 하기형 AGV 실습</a:t>
+            </a:r>
+          </a:p>
+        </p:txBody>
+      </p:sp>
+      <p:sp>
+        <p:nvSpPr>
+          <p:cNvPr id="5" name="TextBox 4"/>
+          <p:cNvSpPr txBox="1"/>
+          <p:nvPr/>
+        </p:nvSpPr>
+        <p:spPr>
+          <a:xfrm>
+            <a:off x="9144000" y="6510528"/>
+            <a:ext cx="2468880" cy="201168"/>
+          </a:xfrm>
+          <a:prstGeom prst="rect">
+            <a:avLst/>
+          </a:prstGeom>
+          <a:noFill/>
+        </p:spPr>
+        <p:txBody>
+          <a:bodyPr wrap="square" lIns="73152" rIns="73152" tIns="36576" bIns="36576">
+            <a:spAutoFit/>
+          </a:bodyPr>
+          <a:lstStyle/>
+          <a:p>
+            <a:pPr algn="r">
+              <a:spcAft>
+                <a:spcPts val="0"/>
+              </a:spcAft>
+              <a:defRPr sz="1000" b="0">
+                <a:solidFill>
+                  <a:srgbClr val="5C6672"/>
+                </a:solidFill>
+                <a:latin typeface="Noto Sans CJK KR"/>
+              </a:defRPr>
+            </a:pPr>
+            <a:r>
+              <a:t>명령·파일 경로는 슬라이드에서 복사 가능</a:t>
+            </a:r>
+          </a:p>
+        </p:txBody>
+      </p:sp>
+      <p:sp>
+        <p:nvSpPr>
+          <p:cNvPr id="6" name="Rectangle 5"/>
+          <p:cNvSpPr/>
+          <p:nvPr/>
+        </p:nvSpPr>
+        <p:spPr>
+          <a:xfrm>
+            <a:off x="566928" y="1188720"/>
+            <a:ext cx="11064240" cy="347472"/>
+          </a:xfrm>
+          <a:prstGeom prst="rect">
+            <a:avLst/>
+          </a:prstGeom>
+          <a:solidFill>
+            <a:srgbClr val="F4F7FB"/>
+          </a:solidFill>
+          <a:ln>
+            <a:solidFill>
+              <a:srgbClr val="F4F7FB"/>
+            </a:solidFill>
+          </a:ln>
+        </p:spPr>
+        <p:style>
+          <a:lnRef idx="1">
+            <a:schemeClr val="accent1"/>
+          </a:lnRef>
+          <a:fillRef idx="3">
+            <a:schemeClr val="accent1"/>
+          </a:fillRef>
+          <a:effectRef idx="2">
+            <a:schemeClr val="accent1"/>
+          </a:effectRef>
+          <a:fontRef idx="minor">
+            <a:schemeClr val="lt1"/>
+          </a:fontRef>
+        </p:style>
+        <p:txBody>
+          <a:bodyPr rtlCol="0" anchor="ctr" wrap="square" lIns="73152" rIns="73152" tIns="36576" bIns="36576"/>
+          <a:lstStyle/>
+          <a:p>
+            <a:pPr algn="l">
+              <a:spcAft>
+                <a:spcPts val="0"/>
+              </a:spcAft>
+              <a:defRPr sz="1300" b="1">
+                <a:solidFill>
+                  <a:srgbClr val="122C4E"/>
+                </a:solidFill>
+                <a:latin typeface="Noto Sans CJK KR"/>
+              </a:defRPr>
+            </a:pPr>
+            <a:r>
+              <a:t>현재 단계 미니 실습    |    현재 폴더 ~/ros2_curri/agv_ws    |    현재 터미널</a:t>
+            </a:r>
+          </a:p>
+        </p:txBody>
+      </p:sp>
+      <p:sp>
+        <p:nvSpPr>
+          <p:cNvPr id="7" name="Rounded Rectangle 6"/>
+          <p:cNvSpPr/>
+          <p:nvPr/>
+        </p:nvSpPr>
+        <p:spPr>
+          <a:xfrm>
+            <a:off x="749808" y="1874519"/>
+            <a:ext cx="10652760" cy="1993392"/>
+          </a:xfrm>
+          <a:prstGeom prst="roundRect">
+            <a:avLst/>
+          </a:prstGeom>
+          <a:solidFill>
+            <a:srgbClr val="FFF8EB"/>
+          </a:solidFill>
+          <a:ln>
+            <a:solidFill>
+              <a:srgbClr val="ECC680"/>
+            </a:solidFill>
+          </a:ln>
+        </p:spPr>
+        <p:style>
+          <a:lnRef idx="1">
+            <a:schemeClr val="accent1"/>
+          </a:lnRef>
+          <a:fillRef idx="3">
+            <a:schemeClr val="accent1"/>
+          </a:fillRef>
+          <a:effectRef idx="2">
+            <a:schemeClr val="accent1"/>
+          </a:effectRef>
+          <a:fontRef idx="minor">
+            <a:schemeClr val="lt1"/>
+          </a:fontRef>
+        </p:style>
+        <p:txBody>
+          <a:bodyPr rtlCol="0" anchor="ctr" wrap="square" lIns="73152" rIns="73152" tIns="36576" bIns="36576"/>
+          <a:lstStyle/>
+          <a:p>
+            <a:pPr algn="ctr">
+              <a:spcAft>
+                <a:spcPts val="0"/>
+              </a:spcAft>
+              <a:defRPr sz="2300" b="1">
+                <a:solidFill>
+                  <a:srgbClr val="122C4E"/>
+                </a:solidFill>
+                <a:latin typeface="Noto Sans CJK KR"/>
+              </a:defRPr>
+            </a:pPr>
+            <a:r>
+              <a:t>confidence_threshold를 0.50에서 0.70으로 바꿨을 때 어떤 검출이 제거될지 설명하고 parameter 값을 확인한다.</a:t>
+            </a:r>
+          </a:p>
+        </p:txBody>
+      </p:sp>
+      <p:sp>
+        <p:nvSpPr>
+          <p:cNvPr id="8" name="TextBox 7"/>
+          <p:cNvSpPr txBox="1"/>
+          <p:nvPr/>
+        </p:nvSpPr>
+        <p:spPr>
+          <a:xfrm>
+            <a:off x="877824" y="4590288"/>
+            <a:ext cx="10241280" cy="594360"/>
+          </a:xfrm>
+          <a:prstGeom prst="rect">
+            <a:avLst/>
+          </a:prstGeom>
+          <a:noFill/>
+        </p:spPr>
+        <p:txBody>
+          <a:bodyPr wrap="square" lIns="73152" rIns="73152" tIns="36576" bIns="36576">
+            <a:spAutoFit/>
+          </a:bodyPr>
+          <a:lstStyle/>
+          <a:p>
+            <a:pPr algn="ctr">
+              <a:spcAft>
+                <a:spcPts val="0"/>
+              </a:spcAft>
+              <a:defRPr sz="1900" b="1">
+                <a:solidFill>
+                  <a:srgbClr val="DB7E22"/>
+                </a:solidFill>
+                <a:latin typeface="Noto Sans CJK KR"/>
+              </a:defRPr>
+            </a:pPr>
+            <a:r>
+              <a:t>기록할 것: 바꾼 값(단위) · 기대한 변화 · 실제 출력/화면 · 원래 값으로 되돌린 결과</a:t>
             </a:r>
           </a:p>
         </p:txBody>
@@ -13717,7 +15887,7 @@
               </a:defRPr>
             </a:pPr>
             <a:r>
-              <a:t>현재 단계 시작    |    현재 폴더 ~/agv_ws    |    현재 터미널</a:t>
+              <a:t>현재 단계 시작    |    현재 폴더 ~/ros2_curri/agv_ws    |    현재 터미널</a:t>
             </a:r>
           </a:p>
         </p:txBody>
@@ -13833,7 +16003,7 @@
               </a:defRPr>
             </a:pPr>
             <a:r>
-              <a:t>• 현재 폴더: ~/agv_ws</a:t>
+              <a:t>• 현재 폴더: ~/ros2_curri/agv_ws</a:t>
             </a:r>
           </a:p>
           <a:p>
@@ -13904,7 +16074,957 @@
               </a:defRPr>
             </a:pPr>
             <a:r>
-              <a:t>확인: pwd가 ~/agv_ws이고, 이전 모듈의 완료 조건을 한 문장으로 설명할 수 있으면 시작합니다.</a:t>
+              <a:t>확인: pwd가 ~/ros2_curri/agv_ws이고, 이전 모듈의 완료 조건을 한 문장으로 설명할 수 있으면 시작합니다.</a:t>
+            </a:r>
+          </a:p>
+        </p:txBody>
+      </p:sp>
+    </p:spTree>
+  </p:cSld>
+  <p:clrMapOvr>
+    <a:masterClrMapping/>
+  </p:clrMapOvr>
+</p:sld>
+</file>
+
+<file path=ppt/slides/slide30.xml><?xml version="1.0" encoding="utf-8"?>
+<p:sld xmlns:a="http://schemas.openxmlformats.org/drawingml/2006/main" xmlns:p="http://schemas.openxmlformats.org/presentationml/2006/main" xmlns:r="http://schemas.openxmlformats.org/officeDocument/2006/relationships">
+  <p:cSld>
+    <p:spTree>
+      <p:nvGrpSpPr>
+        <p:cNvPr id="1" name=""/>
+        <p:cNvGrpSpPr/>
+        <p:nvPr/>
+      </p:nvGrpSpPr>
+      <p:grpSpPr/>
+      <p:sp>
+        <p:nvSpPr>
+          <p:cNvPr id="2" name="TextBox 1"/>
+          <p:cNvSpPr txBox="1"/>
+          <p:nvPr/>
+        </p:nvSpPr>
+        <p:spPr>
+          <a:xfrm>
+            <a:off x="566928" y="347472"/>
+            <a:ext cx="10881360" cy="438912"/>
+          </a:xfrm>
+          <a:prstGeom prst="rect">
+            <a:avLst/>
+          </a:prstGeom>
+          <a:noFill/>
+        </p:spPr>
+        <p:txBody>
+          <a:bodyPr wrap="square" lIns="73152" rIns="73152" tIns="36576" bIns="36576">
+            <a:spAutoFit/>
+          </a:bodyPr>
+          <a:lstStyle/>
+          <a:p>
+            <a:pPr algn="l">
+              <a:spcAft>
+                <a:spcPts val="0"/>
+              </a:spcAft>
+              <a:defRPr sz="3200" b="1">
+                <a:solidFill>
+                  <a:srgbClr val="122C4E"/>
+                </a:solidFill>
+                <a:latin typeface="Noto Sans CJK KR"/>
+              </a:defRPr>
+            </a:pPr>
+            <a:r>
+              <a:t>체크포인트를 저장하고 다음 모듈로 넘긴다</a:t>
+            </a:r>
+          </a:p>
+        </p:txBody>
+      </p:sp>
+      <p:sp>
+        <p:nvSpPr>
+          <p:cNvPr id="3" name="TextBox 2"/>
+          <p:cNvSpPr txBox="1"/>
+          <p:nvPr/>
+        </p:nvSpPr>
+        <p:spPr>
+          <a:xfrm>
+            <a:off x="603504" y="859536"/>
+            <a:ext cx="10698480" cy="292608"/>
+          </a:xfrm>
+          <a:prstGeom prst="rect">
+            <a:avLst/>
+          </a:prstGeom>
+          <a:noFill/>
+        </p:spPr>
+        <p:txBody>
+          <a:bodyPr wrap="square" lIns="73152" rIns="73152" tIns="36576" bIns="36576">
+            <a:spAutoFit/>
+          </a:bodyPr>
+          <a:lstStyle/>
+          <a:p>
+            <a:pPr algn="l">
+              <a:spcAft>
+                <a:spcPts val="0"/>
+              </a:spcAft>
+              <a:defRPr sz="1700" b="0">
+                <a:solidFill>
+                  <a:srgbClr val="5C6672"/>
+                </a:solidFill>
+                <a:latin typeface="Noto Sans CJK KR"/>
+              </a:defRPr>
+            </a:pPr>
+            <a:r>
+              <a:t>현재 Complete는 다음 Starter의 기준선입니다.</a:t>
+            </a:r>
+          </a:p>
+        </p:txBody>
+      </p:sp>
+      <p:sp>
+        <p:nvSpPr>
+          <p:cNvPr id="4" name="TextBox 3"/>
+          <p:cNvSpPr txBox="1"/>
+          <p:nvPr/>
+        </p:nvSpPr>
+        <p:spPr>
+          <a:xfrm>
+            <a:off x="530352" y="6510528"/>
+            <a:ext cx="7772400" cy="201168"/>
+          </a:xfrm>
+          <a:prstGeom prst="rect">
+            <a:avLst/>
+          </a:prstGeom>
+          <a:noFill/>
+        </p:spPr>
+        <p:txBody>
+          <a:bodyPr wrap="square" lIns="73152" rIns="73152" tIns="36576" bIns="36576">
+            <a:spAutoFit/>
+          </a:bodyPr>
+          <a:lstStyle/>
+          <a:p>
+            <a:pPr algn="l">
+              <a:spcAft>
+                <a:spcPts val="0"/>
+              </a:spcAft>
+              <a:defRPr sz="1000" b="0">
+                <a:solidFill>
+                  <a:srgbClr val="5C6672"/>
+                </a:solidFill>
+                <a:latin typeface="Noto Sans CJK KR"/>
+              </a:defRPr>
+            </a:pPr>
+            <a:r>
+              <a:t>ROS 2 Jazzy · Gazebo Harmonic · M17 · 따라 하기형 AGV 실습</a:t>
+            </a:r>
+          </a:p>
+        </p:txBody>
+      </p:sp>
+      <p:sp>
+        <p:nvSpPr>
+          <p:cNvPr id="5" name="TextBox 4"/>
+          <p:cNvSpPr txBox="1"/>
+          <p:nvPr/>
+        </p:nvSpPr>
+        <p:spPr>
+          <a:xfrm>
+            <a:off x="9144000" y="6510528"/>
+            <a:ext cx="2468880" cy="201168"/>
+          </a:xfrm>
+          <a:prstGeom prst="rect">
+            <a:avLst/>
+          </a:prstGeom>
+          <a:noFill/>
+        </p:spPr>
+        <p:txBody>
+          <a:bodyPr wrap="square" lIns="73152" rIns="73152" tIns="36576" bIns="36576">
+            <a:spAutoFit/>
+          </a:bodyPr>
+          <a:lstStyle/>
+          <a:p>
+            <a:pPr algn="r">
+              <a:spcAft>
+                <a:spcPts val="0"/>
+              </a:spcAft>
+              <a:defRPr sz="1000" b="0">
+                <a:solidFill>
+                  <a:srgbClr val="5C6672"/>
+                </a:solidFill>
+                <a:latin typeface="Noto Sans CJK KR"/>
+              </a:defRPr>
+            </a:pPr>
+            <a:r>
+              <a:t>명령·파일 경로는 슬라이드에서 복사 가능</a:t>
+            </a:r>
+          </a:p>
+        </p:txBody>
+      </p:sp>
+      <p:sp>
+        <p:nvSpPr>
+          <p:cNvPr id="6" name="Rectangle 5"/>
+          <p:cNvSpPr/>
+          <p:nvPr/>
+        </p:nvSpPr>
+        <p:spPr>
+          <a:xfrm>
+            <a:off x="566928" y="1188720"/>
+            <a:ext cx="11064240" cy="347472"/>
+          </a:xfrm>
+          <a:prstGeom prst="rect">
+            <a:avLst/>
+          </a:prstGeom>
+          <a:solidFill>
+            <a:srgbClr val="F4F7FB"/>
+          </a:solidFill>
+          <a:ln>
+            <a:solidFill>
+              <a:srgbClr val="F4F7FB"/>
+            </a:solidFill>
+          </a:ln>
+        </p:spPr>
+        <p:style>
+          <a:lnRef idx="1">
+            <a:schemeClr val="accent1"/>
+          </a:lnRef>
+          <a:fillRef idx="3">
+            <a:schemeClr val="accent1"/>
+          </a:fillRef>
+          <a:effectRef idx="2">
+            <a:schemeClr val="accent1"/>
+          </a:effectRef>
+          <a:fontRef idx="minor">
+            <a:schemeClr val="lt1"/>
+          </a:fontRef>
+        </p:style>
+        <p:txBody>
+          <a:bodyPr rtlCol="0" anchor="ctr" wrap="square" lIns="73152" rIns="73152" tIns="36576" bIns="36576"/>
+          <a:lstStyle/>
+          <a:p>
+            <a:pPr algn="l">
+              <a:spcAft>
+                <a:spcPts val="0"/>
+              </a:spcAft>
+              <a:defRPr sz="1300" b="1">
+                <a:solidFill>
+                  <a:srgbClr val="122C4E"/>
+                </a:solidFill>
+                <a:latin typeface="Noto Sans CJK KR"/>
+              </a:defRPr>
+            </a:pPr>
+            <a:r>
+              <a:t>현재 단계 체크포인트    |    현재 폴더 ~/ros2_curri/agv_ws    |    현재 터미널</a:t>
+            </a:r>
+          </a:p>
+        </p:txBody>
+      </p:sp>
+      <p:sp>
+        <p:nvSpPr>
+          <p:cNvPr id="7" name="Rounded Rectangle 6"/>
+          <p:cNvSpPr/>
+          <p:nvPr/>
+        </p:nvSpPr>
+        <p:spPr>
+          <a:xfrm>
+            <a:off x="685800" y="1737360"/>
+            <a:ext cx="10972800" cy="3611880"/>
+          </a:xfrm>
+          <a:prstGeom prst="roundRect">
+            <a:avLst/>
+          </a:prstGeom>
+          <a:solidFill>
+            <a:srgbClr val="F4F7FB"/>
+          </a:solidFill>
+          <a:ln>
+            <a:solidFill>
+              <a:srgbClr val="D2DCE8"/>
+            </a:solidFill>
+          </a:ln>
+        </p:spPr>
+        <p:style>
+          <a:lnRef idx="1">
+            <a:schemeClr val="accent1"/>
+          </a:lnRef>
+          <a:fillRef idx="3">
+            <a:schemeClr val="accent1"/>
+          </a:fillRef>
+          <a:effectRef idx="2">
+            <a:schemeClr val="accent1"/>
+          </a:effectRef>
+          <a:fontRef idx="minor">
+            <a:schemeClr val="lt1"/>
+          </a:fontRef>
+        </p:style>
+        <p:txBody>
+          <a:bodyPr rtlCol="0" anchor="ctr"/>
+          <a:lstStyle/>
+          <a:p>
+            <a:pPr algn="ctr"/>
+          </a:p>
+        </p:txBody>
+      </p:sp>
+      <p:sp>
+        <p:nvSpPr>
+          <p:cNvPr id="8" name="TextBox 7"/>
+          <p:cNvSpPr txBox="1"/>
+          <p:nvPr/>
+        </p:nvSpPr>
+        <p:spPr>
+          <a:xfrm>
+            <a:off x="896112" y="1993392"/>
+            <a:ext cx="10332720" cy="2971800"/>
+          </a:xfrm>
+          <a:prstGeom prst="rect">
+            <a:avLst/>
+          </a:prstGeom>
+          <a:noFill/>
+        </p:spPr>
+        <p:txBody>
+          <a:bodyPr wrap="square" lIns="109728" rIns="109728">
+            <a:spAutoFit/>
+          </a:bodyPr>
+          <a:lstStyle/>
+          <a:p>
+            <a:pPr>
+              <a:spcAft>
+                <a:spcPts val="800"/>
+              </a:spcAft>
+              <a:defRPr sz="1800">
+                <a:solidFill>
+                  <a:srgbClr val="122C4E"/>
+                </a:solidFill>
+                <a:latin typeface="Noto Sans CJK KR"/>
+              </a:defRPr>
+            </a:pPr>
+            <a:r>
+              <a:t>• □ 완료 화면: /detections message 형식과 YOLO enable_yolo/model_path/threshold parameter를 확인한다.</a:t>
+            </a:r>
+          </a:p>
+          <a:p>
+            <a:pPr>
+              <a:spcAft>
+                <a:spcPts val="800"/>
+              </a:spcAft>
+              <a:defRPr sz="1800">
+                <a:solidFill>
+                  <a:srgbClr val="122C4E"/>
+                </a:solidFill>
+                <a:latin typeface="Noto Sans CJK KR"/>
+              </a:defRPr>
+            </a:pPr>
+            <a:r>
+              <a:t>• □ Complete 파일: blocks/E_autonomy_logic/M17_yolo_vision/complete/</a:t>
+            </a:r>
+          </a:p>
+          <a:p>
+            <a:pPr>
+              <a:spcAft>
+                <a:spcPts val="800"/>
+              </a:spcAft>
+              <a:defRPr sz="1800">
+                <a:solidFill>
+                  <a:srgbClr val="122C4E"/>
+                </a:solidFill>
+                <a:latin typeface="Noto Sans CJK KR"/>
+              </a:defRPr>
+            </a:pPr>
+            <a:r>
+              <a:t>• □ 정상 로그·캡처: logs/validation.log, screenshots/validation_terminal.png</a:t>
+            </a:r>
+          </a:p>
+          <a:p>
+            <a:pPr>
+              <a:spcAft>
+                <a:spcPts val="800"/>
+              </a:spcAft>
+              <a:defRPr sz="1800">
+                <a:solidFill>
+                  <a:srgbClr val="122C4E"/>
+                </a:solidFill>
+                <a:latin typeface="Noto Sans CJK KR"/>
+              </a:defRPr>
+            </a:pPr>
+            <a:r>
+              <a:t>• □ 버전 식별: CHECKSUM_or_TAG.txt의 SHA-256 manifest</a:t>
+            </a:r>
+          </a:p>
+          <a:p>
+            <a:pPr>
+              <a:spcAft>
+                <a:spcPts val="800"/>
+              </a:spcAft>
+              <a:defRPr sz="1800">
+                <a:solidFill>
+                  <a:srgbClr val="122C4E"/>
+                </a:solidFill>
+                <a:latin typeface="Noto Sans CJK KR"/>
+              </a:defRPr>
+            </a:pPr>
+            <a:r>
+              <a:t>• □ 다음 시작 조건: M18 safety fusion</a:t>
+            </a:r>
+          </a:p>
+        </p:txBody>
+      </p:sp>
+      <p:sp>
+        <p:nvSpPr>
+          <p:cNvPr id="9" name="TextBox 8"/>
+          <p:cNvSpPr txBox="1"/>
+          <p:nvPr/>
+        </p:nvSpPr>
+        <p:spPr>
+          <a:xfrm>
+            <a:off x="868680" y="5596128"/>
+            <a:ext cx="10515600" cy="338328"/>
+          </a:xfrm>
+          <a:prstGeom prst="rect">
+            <a:avLst/>
+          </a:prstGeom>
+          <a:noFill/>
+        </p:spPr>
+        <p:txBody>
+          <a:bodyPr wrap="square" lIns="73152" rIns="73152" tIns="36576" bIns="36576">
+            <a:spAutoFit/>
+          </a:bodyPr>
+          <a:lstStyle/>
+          <a:p>
+            <a:pPr algn="ctr">
+              <a:spcAft>
+                <a:spcPts val="0"/>
+              </a:spcAft>
+              <a:defRPr sz="1700" b="1">
+                <a:solidFill>
+                  <a:srgbClr val="2A8B5A"/>
+                </a:solidFill>
+                <a:latin typeface="Noto Sans CJK KR"/>
+              </a:defRPr>
+            </a:pPr>
+            <a:r>
+              <a:t>다음 모듈을 시작하기 전, 이 슬라이드의 Complete와 다음 모듈의 Starter를 비교합니다.</a:t>
+            </a:r>
+          </a:p>
+        </p:txBody>
+      </p:sp>
+    </p:spTree>
+  </p:cSld>
+  <p:clrMapOvr>
+    <a:masterClrMapping/>
+  </p:clrMapOvr>
+</p:sld>
+</file>
+
+<file path=ppt/slides/slide31.xml><?xml version="1.0" encoding="utf-8"?>
+<p:sld xmlns:a="http://schemas.openxmlformats.org/drawingml/2006/main" xmlns:p="http://schemas.openxmlformats.org/presentationml/2006/main" xmlns:r="http://schemas.openxmlformats.org/officeDocument/2006/relationships">
+  <p:cSld>
+    <p:spTree>
+      <p:nvGrpSpPr>
+        <p:cNvPr id="1" name=""/>
+        <p:cNvGrpSpPr/>
+        <p:nvPr/>
+      </p:nvGrpSpPr>
+      <p:grpSpPr/>
+      <p:sp>
+        <p:nvSpPr>
+          <p:cNvPr id="2" name="TextBox 1"/>
+          <p:cNvSpPr txBox="1"/>
+          <p:nvPr/>
+        </p:nvSpPr>
+        <p:spPr>
+          <a:xfrm>
+            <a:off x="566928" y="347472"/>
+            <a:ext cx="10881360" cy="438912"/>
+          </a:xfrm>
+          <a:prstGeom prst="rect">
+            <a:avLst/>
+          </a:prstGeom>
+          <a:noFill/>
+        </p:spPr>
+        <p:txBody>
+          <a:bodyPr wrap="square" lIns="73152" rIns="73152" tIns="36576" bIns="36576">
+            <a:spAutoFit/>
+          </a:bodyPr>
+          <a:lstStyle/>
+          <a:p>
+            <a:pPr algn="l">
+              <a:spcAft>
+                <a:spcPts val="0"/>
+              </a:spcAft>
+              <a:defRPr sz="3200" b="1">
+                <a:solidFill>
+                  <a:srgbClr val="122C4E"/>
+                </a:solidFill>
+                <a:latin typeface="Noto Sans CJK KR"/>
+              </a:defRPr>
+            </a:pPr>
+            <a:r>
+              <a:t>공식 참고 자료</a:t>
+            </a:r>
+          </a:p>
+        </p:txBody>
+      </p:sp>
+      <p:sp>
+        <p:nvSpPr>
+          <p:cNvPr id="3" name="TextBox 2"/>
+          <p:cNvSpPr txBox="1"/>
+          <p:nvPr/>
+        </p:nvSpPr>
+        <p:spPr>
+          <a:xfrm>
+            <a:off x="603504" y="859536"/>
+            <a:ext cx="10698480" cy="292608"/>
+          </a:xfrm>
+          <a:prstGeom prst="rect">
+            <a:avLst/>
+          </a:prstGeom>
+          <a:noFill/>
+        </p:spPr>
+        <p:txBody>
+          <a:bodyPr wrap="square" lIns="73152" rIns="73152" tIns="36576" bIns="36576">
+            <a:spAutoFit/>
+          </a:bodyPr>
+          <a:lstStyle/>
+          <a:p>
+            <a:pPr algn="l">
+              <a:spcAft>
+                <a:spcPts val="0"/>
+              </a:spcAft>
+              <a:defRPr sz="1700" b="0">
+                <a:solidFill>
+                  <a:srgbClr val="5C6672"/>
+                </a:solidFill>
+                <a:latin typeface="Noto Sans CJK KR"/>
+              </a:defRPr>
+            </a:pPr>
+            <a:r>
+              <a:t>본문 단계는 링크를 열지 않아도 완료할 수 있으며, 링크는 개념을 더 확인할 때만 사용합니다.</a:t>
+            </a:r>
+          </a:p>
+        </p:txBody>
+      </p:sp>
+      <p:sp>
+        <p:nvSpPr>
+          <p:cNvPr id="4" name="TextBox 3"/>
+          <p:cNvSpPr txBox="1"/>
+          <p:nvPr/>
+        </p:nvSpPr>
+        <p:spPr>
+          <a:xfrm>
+            <a:off x="530352" y="6510528"/>
+            <a:ext cx="7772400" cy="201168"/>
+          </a:xfrm>
+          <a:prstGeom prst="rect">
+            <a:avLst/>
+          </a:prstGeom>
+          <a:noFill/>
+        </p:spPr>
+        <p:txBody>
+          <a:bodyPr wrap="square" lIns="73152" rIns="73152" tIns="36576" bIns="36576">
+            <a:spAutoFit/>
+          </a:bodyPr>
+          <a:lstStyle/>
+          <a:p>
+            <a:pPr algn="l">
+              <a:spcAft>
+                <a:spcPts val="0"/>
+              </a:spcAft>
+              <a:defRPr sz="1000" b="0">
+                <a:solidFill>
+                  <a:srgbClr val="5C6672"/>
+                </a:solidFill>
+                <a:latin typeface="Noto Sans CJK KR"/>
+              </a:defRPr>
+            </a:pPr>
+            <a:r>
+              <a:t>ROS 2 Jazzy · Gazebo Harmonic · M17 · 따라 하기형 AGV 실습</a:t>
+            </a:r>
+          </a:p>
+        </p:txBody>
+      </p:sp>
+      <p:sp>
+        <p:nvSpPr>
+          <p:cNvPr id="5" name="TextBox 4"/>
+          <p:cNvSpPr txBox="1"/>
+          <p:nvPr/>
+        </p:nvSpPr>
+        <p:spPr>
+          <a:xfrm>
+            <a:off x="9144000" y="6510528"/>
+            <a:ext cx="2468880" cy="201168"/>
+          </a:xfrm>
+          <a:prstGeom prst="rect">
+            <a:avLst/>
+          </a:prstGeom>
+          <a:noFill/>
+        </p:spPr>
+        <p:txBody>
+          <a:bodyPr wrap="square" lIns="73152" rIns="73152" tIns="36576" bIns="36576">
+            <a:spAutoFit/>
+          </a:bodyPr>
+          <a:lstStyle/>
+          <a:p>
+            <a:pPr algn="r">
+              <a:spcAft>
+                <a:spcPts val="0"/>
+              </a:spcAft>
+              <a:defRPr sz="1000" b="0">
+                <a:solidFill>
+                  <a:srgbClr val="5C6672"/>
+                </a:solidFill>
+                <a:latin typeface="Noto Sans CJK KR"/>
+              </a:defRPr>
+            </a:pPr>
+            <a:r>
+              <a:t>명령·파일 경로는 슬라이드에서 복사 가능</a:t>
+            </a:r>
+          </a:p>
+        </p:txBody>
+      </p:sp>
+      <p:sp>
+        <p:nvSpPr>
+          <p:cNvPr id="6" name="Rounded Rectangle 5"/>
+          <p:cNvSpPr/>
+          <p:nvPr/>
+        </p:nvSpPr>
+        <p:spPr>
+          <a:xfrm>
+            <a:off x="658368" y="1554480"/>
+            <a:ext cx="10972800" cy="4526280"/>
+          </a:xfrm>
+          <a:prstGeom prst="roundRect">
+            <a:avLst/>
+          </a:prstGeom>
+          <a:solidFill>
+            <a:srgbClr val="F4F7FB"/>
+          </a:solidFill>
+          <a:ln>
+            <a:solidFill>
+              <a:srgbClr val="D7DFE9"/>
+            </a:solidFill>
+          </a:ln>
+        </p:spPr>
+        <p:style>
+          <a:lnRef idx="1">
+            <a:schemeClr val="accent1"/>
+          </a:lnRef>
+          <a:fillRef idx="3">
+            <a:schemeClr val="accent1"/>
+          </a:fillRef>
+          <a:effectRef idx="2">
+            <a:schemeClr val="accent1"/>
+          </a:effectRef>
+          <a:fontRef idx="minor">
+            <a:schemeClr val="lt1"/>
+          </a:fontRef>
+        </p:style>
+        <p:txBody>
+          <a:bodyPr rtlCol="0" anchor="ctr"/>
+          <a:lstStyle/>
+          <a:p>
+            <a:pPr algn="ctr"/>
+          </a:p>
+        </p:txBody>
+      </p:sp>
+      <p:sp>
+        <p:nvSpPr>
+          <p:cNvPr id="7" name="TextBox 6"/>
+          <p:cNvSpPr txBox="1"/>
+          <p:nvPr/>
+        </p:nvSpPr>
+        <p:spPr>
+          <a:xfrm>
+            <a:off x="914400" y="1773936"/>
+            <a:ext cx="3840480" cy="256032"/>
+          </a:xfrm>
+          <a:prstGeom prst="rect">
+            <a:avLst/>
+          </a:prstGeom>
+          <a:noFill/>
+        </p:spPr>
+        <p:txBody>
+          <a:bodyPr wrap="square" lIns="73152" rIns="73152" tIns="36576" bIns="36576">
+            <a:spAutoFit/>
+          </a:bodyPr>
+          <a:lstStyle/>
+          <a:p>
+            <a:pPr algn="l">
+              <a:spcAft>
+                <a:spcPts val="0"/>
+              </a:spcAft>
+              <a:defRPr sz="1700" b="1">
+                <a:solidFill>
+                  <a:srgbClr val="122C4E"/>
+                </a:solidFill>
+                <a:latin typeface="Noto Sans CJK KR"/>
+              </a:defRPr>
+            </a:pPr>
+            <a:r>
+              <a:t>ROS 2 Jazzy — Gazebo Simulation</a:t>
+            </a:r>
+          </a:p>
+        </p:txBody>
+      </p:sp>
+      <p:sp>
+        <p:nvSpPr>
+          <p:cNvPr id="8" name="TextBox 7"/>
+          <p:cNvSpPr txBox="1"/>
+          <p:nvPr/>
+        </p:nvSpPr>
+        <p:spPr>
+          <a:xfrm>
+            <a:off x="914400" y="2048255"/>
+            <a:ext cx="9966960" cy="475488"/>
+          </a:xfrm>
+          <a:prstGeom prst="rect">
+            <a:avLst/>
+          </a:prstGeom>
+          <a:noFill/>
+        </p:spPr>
+        <p:txBody>
+          <a:bodyPr wrap="square" lIns="73152" rIns="73152" tIns="36576" bIns="36576">
+            <a:spAutoFit/>
+          </a:bodyPr>
+          <a:lstStyle/>
+          <a:p>
+            <a:pPr algn="l">
+              <a:spcAft>
+                <a:spcPts val="0"/>
+              </a:spcAft>
+              <a:defRPr sz="1000" b="0">
+                <a:solidFill>
+                  <a:srgbClr val="225B9B"/>
+                </a:solidFill>
+                <a:latin typeface="DejaVu Sans Mono"/>
+              </a:defRPr>
+            </a:pPr>
+            <a:r>
+              <a:t>https://docs.ros.org/en/jazzy/Tutorials/Advanced/Simulators/Gazebo/Simulation-Gazebo.html</a:t>
+            </a:r>
+          </a:p>
+        </p:txBody>
+      </p:sp>
+      <p:sp>
+        <p:nvSpPr>
+          <p:cNvPr id="9" name="TextBox 8"/>
+          <p:cNvSpPr txBox="1"/>
+          <p:nvPr/>
+        </p:nvSpPr>
+        <p:spPr>
+          <a:xfrm>
+            <a:off x="914400" y="2852928"/>
+            <a:ext cx="3840480" cy="256032"/>
+          </a:xfrm>
+          <a:prstGeom prst="rect">
+            <a:avLst/>
+          </a:prstGeom>
+          <a:noFill/>
+        </p:spPr>
+        <p:txBody>
+          <a:bodyPr wrap="square" lIns="73152" rIns="73152" tIns="36576" bIns="36576">
+            <a:spAutoFit/>
+          </a:bodyPr>
+          <a:lstStyle/>
+          <a:p>
+            <a:pPr algn="l">
+              <a:spcAft>
+                <a:spcPts val="0"/>
+              </a:spcAft>
+              <a:defRPr sz="1700" b="1">
+                <a:solidFill>
+                  <a:srgbClr val="122C4E"/>
+                </a:solidFill>
+                <a:latin typeface="Noto Sans CJK KR"/>
+              </a:defRPr>
+            </a:pPr>
+            <a:r>
+              <a:t>ROS 2 Jazzy — URDF / robot_state_publisher</a:t>
+            </a:r>
+          </a:p>
+        </p:txBody>
+      </p:sp>
+      <p:sp>
+        <p:nvSpPr>
+          <p:cNvPr id="10" name="TextBox 9"/>
+          <p:cNvSpPr txBox="1"/>
+          <p:nvPr/>
+        </p:nvSpPr>
+        <p:spPr>
+          <a:xfrm>
+            <a:off x="914400" y="3127248"/>
+            <a:ext cx="9966960" cy="475488"/>
+          </a:xfrm>
+          <a:prstGeom prst="rect">
+            <a:avLst/>
+          </a:prstGeom>
+          <a:noFill/>
+        </p:spPr>
+        <p:txBody>
+          <a:bodyPr wrap="square" lIns="73152" rIns="73152" tIns="36576" bIns="36576">
+            <a:spAutoFit/>
+          </a:bodyPr>
+          <a:lstStyle/>
+          <a:p>
+            <a:pPr algn="l">
+              <a:spcAft>
+                <a:spcPts val="0"/>
+              </a:spcAft>
+              <a:defRPr sz="1000" b="0">
+                <a:solidFill>
+                  <a:srgbClr val="225B9B"/>
+                </a:solidFill>
+                <a:latin typeface="DejaVu Sans Mono"/>
+              </a:defRPr>
+            </a:pPr>
+            <a:r>
+              <a:t>https://docs.ros.org/en/jazzy/Tutorials/Intermediate/URDF/Using-URDF-with-Robot-State-Publisher-py.html</a:t>
+            </a:r>
+          </a:p>
+        </p:txBody>
+      </p:sp>
+      <p:sp>
+        <p:nvSpPr>
+          <p:cNvPr id="11" name="TextBox 10"/>
+          <p:cNvSpPr txBox="1"/>
+          <p:nvPr/>
+        </p:nvSpPr>
+        <p:spPr>
+          <a:xfrm>
+            <a:off x="914400" y="3931920"/>
+            <a:ext cx="3840480" cy="256032"/>
+          </a:xfrm>
+          <a:prstGeom prst="rect">
+            <a:avLst/>
+          </a:prstGeom>
+          <a:noFill/>
+        </p:spPr>
+        <p:txBody>
+          <a:bodyPr wrap="square" lIns="73152" rIns="73152" tIns="36576" bIns="36576">
+            <a:spAutoFit/>
+          </a:bodyPr>
+          <a:lstStyle/>
+          <a:p>
+            <a:pPr algn="l">
+              <a:spcAft>
+                <a:spcPts val="0"/>
+              </a:spcAft>
+              <a:defRPr sz="1700" b="1">
+                <a:solidFill>
+                  <a:srgbClr val="122C4E"/>
+                </a:solidFill>
+                <a:latin typeface="Noto Sans CJK KR"/>
+              </a:defRPr>
+            </a:pPr>
+            <a:r>
+              <a:t>Gazebo — ROS 2 Integration / ros_gz_bridge</a:t>
+            </a:r>
+          </a:p>
+        </p:txBody>
+      </p:sp>
+      <p:sp>
+        <p:nvSpPr>
+          <p:cNvPr id="12" name="TextBox 11"/>
+          <p:cNvSpPr txBox="1"/>
+          <p:nvPr/>
+        </p:nvSpPr>
+        <p:spPr>
+          <a:xfrm>
+            <a:off x="914400" y="4206240"/>
+            <a:ext cx="9966960" cy="475488"/>
+          </a:xfrm>
+          <a:prstGeom prst="rect">
+            <a:avLst/>
+          </a:prstGeom>
+          <a:noFill/>
+        </p:spPr>
+        <p:txBody>
+          <a:bodyPr wrap="square" lIns="73152" rIns="73152" tIns="36576" bIns="36576">
+            <a:spAutoFit/>
+          </a:bodyPr>
+          <a:lstStyle/>
+          <a:p>
+            <a:pPr algn="l">
+              <a:spcAft>
+                <a:spcPts val="0"/>
+              </a:spcAft>
+              <a:defRPr sz="1000" b="0">
+                <a:solidFill>
+                  <a:srgbClr val="225B9B"/>
+                </a:solidFill>
+                <a:latin typeface="DejaVu Sans Mono"/>
+              </a:defRPr>
+            </a:pPr>
+            <a:r>
+              <a:t>https://gazebosim.org/docs/latest/ros2_integration/</a:t>
+            </a:r>
+          </a:p>
+        </p:txBody>
+      </p:sp>
+      <p:sp>
+        <p:nvSpPr>
+          <p:cNvPr id="13" name="TextBox 12"/>
+          <p:cNvSpPr txBox="1"/>
+          <p:nvPr/>
+        </p:nvSpPr>
+        <p:spPr>
+          <a:xfrm>
+            <a:off x="914400" y="5010912"/>
+            <a:ext cx="3840480" cy="256032"/>
+          </a:xfrm>
+          <a:prstGeom prst="rect">
+            <a:avLst/>
+          </a:prstGeom>
+          <a:noFill/>
+        </p:spPr>
+        <p:txBody>
+          <a:bodyPr wrap="square" lIns="73152" rIns="73152" tIns="36576" bIns="36576">
+            <a:spAutoFit/>
+          </a:bodyPr>
+          <a:lstStyle/>
+          <a:p>
+            <a:pPr algn="l">
+              <a:spcAft>
+                <a:spcPts val="0"/>
+              </a:spcAft>
+              <a:defRPr sz="1700" b="1">
+                <a:solidFill>
+                  <a:srgbClr val="122C4E"/>
+                </a:solidFill>
+                <a:latin typeface="Noto Sans CJK KR"/>
+              </a:defRPr>
+            </a:pPr>
+            <a:r>
+              <a:t>ROS 2 Jazzy — rosbag2 Recording and Playback</a:t>
+            </a:r>
+          </a:p>
+        </p:txBody>
+      </p:sp>
+      <p:sp>
+        <p:nvSpPr>
+          <p:cNvPr id="14" name="TextBox 13"/>
+          <p:cNvSpPr txBox="1"/>
+          <p:nvPr/>
+        </p:nvSpPr>
+        <p:spPr>
+          <a:xfrm>
+            <a:off x="914400" y="5285232"/>
+            <a:ext cx="9966960" cy="475488"/>
+          </a:xfrm>
+          <a:prstGeom prst="rect">
+            <a:avLst/>
+          </a:prstGeom>
+          <a:noFill/>
+        </p:spPr>
+        <p:txBody>
+          <a:bodyPr wrap="square" lIns="73152" rIns="73152" tIns="36576" bIns="36576">
+            <a:spAutoFit/>
+          </a:bodyPr>
+          <a:lstStyle/>
+          <a:p>
+            <a:pPr algn="l">
+              <a:spcAft>
+                <a:spcPts val="0"/>
+              </a:spcAft>
+              <a:defRPr sz="1000" b="0">
+                <a:solidFill>
+                  <a:srgbClr val="225B9B"/>
+                </a:solidFill>
+                <a:latin typeface="DejaVu Sans Mono"/>
+              </a:defRPr>
+            </a:pPr>
+            <a:r>
+              <a:t>https://docs.ros.org/en/jazzy/Tutorials/Beginner-CLI-Tools/Recording-And-Playing-Back-Data/Recording-And-Playing-Back-Data.html</a:t>
             </a:r>
           </a:p>
         </p:txBody>
@@ -15019,7 +18139,7 @@
               </a:defRPr>
             </a:pPr>
             <a:r>
-              <a:t>~/agv_ws/src/</a:t>
+              <a:t>~/ros2_curri/agv_ws/src/</a:t>
             </a:r>
             <a:br/>
             <a:r>
@@ -15314,7 +18434,7 @@
               </a:defRPr>
             </a:pPr>
             <a:r>
-              <a:t>현재 단계 1/2    |    현재 폴더 ~/agv_ws    |    현재 터미널</a:t>
+              <a:t>현재 단계 1/2    |    현재 폴더 ~/ros2_curri/agv_ws    |    현재 터미널</a:t>
             </a:r>
           </a:p>
         </p:txBody>
@@ -15450,7 +18570,7 @@
               </a:defRPr>
             </a:pPr>
             <a:r>
-              <a:t>cd ~/agv_ws</a:t>
+              <a:t>cd ~/ros2_curri/agv_ws</a:t>
             </a:r>
             <a:br/>
             <a:r>
@@ -15772,7 +18892,7 @@
               </a:defRPr>
             </a:pPr>
             <a:r>
-              <a:t>현재 단계 2/2    |    현재 폴더 ~/agv_ws    |    현재 터미널</a:t>
+              <a:t>현재 단계 2/2    |    현재 폴더 ~/ros2_curri/agv_ws    |    현재 터미널</a:t>
             </a:r>
           </a:p>
         </p:txBody>
@@ -16090,7 +19210,7 @@
               </a:defRPr>
             </a:pPr>
             <a:r>
-              <a:t>~/agv_ws/src/agv_interfaces/msg/Detection.msg</a:t>
+              <a:t>~/ros2_curri/agv_ws/src/agv_interfaces/msg/Detection.msg</a:t>
             </a:r>
           </a:p>
         </p:txBody>
@@ -16226,7 +19346,7 @@
               </a:defRPr>
             </a:pPr>
             <a:r>
-              <a:t>현재 단계 3/4    |    현재 폴더 ~/agv_ws    |    현재 터미널</a:t>
+              <a:t>현재 단계 3/4    |    현재 폴더 ~/ros2_curri/agv_ws    |    현재 터미널</a:t>
             </a:r>
           </a:p>
         </p:txBody>
@@ -16323,11 +19443,11 @@
               </a:defRPr>
             </a:pPr>
             <a:r>
-              <a:t>파일 생성: mkdir -p ~/agv_ws/src/agv_interfaces/msg</a:t>
+              <a:t>파일 생성: mkdir -p ~/ros2_curri/agv_ws/src/agv_interfaces/msg</a:t>
             </a:r>
             <a:br/>
             <a:r>
-              <a:t>파일 열기: nano ~/agv_ws/src/agv_interfaces/msg/Detection.msg</a:t>
+              <a:t>파일 열기: nano ~/ros2_curri/agv_ws/src/agv_interfaces/msg/Detection.msg</a:t>
             </a:r>
           </a:p>
         </p:txBody>

--- a/blocks/E_autonomy_logic/M17_yolo_vision/M17_Camera_YOLO_Vision_Node.pptx
+++ b/blocks/E_autonomy_logic/M17_yolo_vision/M17_Camera_YOLO_Vision_Node.pptx
@@ -36,6 +36,9 @@
     <p:sldId id="284" r:id="rId36"/>
     <p:sldId id="285" r:id="rId37"/>
     <p:sldId id="286" r:id="rId38"/>
+    <p:sldId id="287" r:id="rId39"/>
+    <p:sldId id="288" r:id="rId40"/>
+    <p:sldId id="289" r:id="rId41"/>
   </p:sldIdLst>
   <p:sldSz cx="12191999" cy="6858000" type="screen4x3"/>
   <p:notesSz cx="6858000" cy="9144000"/>
@@ -622,17 +625,32 @@
           <a:lstStyle/>
           <a:p>
             <a:r>
-              <a:t>[설명] ~/ros2_curri/agv_ws/src/agv_interfaces/msg/DetectionArray.msg의 전체 파일을 1/1 구간으로 작성한다.</a:t>
-            </a:r>
-          </a:p>
-          <a:p>
-            <a:r>
-              <a:t>[실행] nano ~/ros2_curri/agv_ws/src/agv_interfaces/msg/DetectionArray.msg</a:t>
-            </a:r>
-          </a:p>
-          <a:p>
-            <a:r>
-              <a:t>[확인] 코드를 저장하고 다음 코드 슬라이드 또는 build 단계로 이동한다.</a:t>
+              <a:t>[설명] vision node보다 custom message package가 먼저 install/source되어야 import된다.</a:t>
+            </a:r>
+          </a:p>
+          <a:p>
+            <a:r>
+              <a:t>[실행] cd ~/ros2_curri/agv_ws</a:t>
+            </a:r>
+          </a:p>
+          <a:p>
+            <a:r>
+              <a:t>colcon build --symlink-install --packages-select agv_interfaces agv_vision</a:t>
+            </a:r>
+          </a:p>
+          <a:p>
+            <a:r>
+              <a:t>source install/setup.bash</a:t>
+            </a:r>
+          </a:p>
+          <a:p>
+            <a:r>
+              <a:t>ros2 interface show agv_interfaces/msg/Detection</a:t>
+            </a:r>
+          </a:p>
+          <a:p>
+            <a:r>
+              <a:t>[확인] 명령 출력에서 슬라이드의 확인 항목을 찾는다.</a:t>
             </a:r>
           </a:p>
           <a:p>
@@ -642,7 +660,7 @@
           </a:p>
           <a:p>
             <a:r>
-              <a:t>[오류] 들여쓰기·XML 태그·따옴표가 슬라이드와 정확히 같은지 확인한다.</a:t>
+              <a:t>[오류] 오류가 나면 현재 폴더, source, 파일 경로를 먼저 확인한다.</a:t>
             </a:r>
           </a:p>
         </p:txBody>
@@ -712,17 +730,27 @@
           <a:lstStyle/>
           <a:p>
             <a:r>
-              <a:t>[설명] ~/ros2_curri/agv_ws/src/agv_interfaces/CMakeLists.txt의 전체 파일을 1/1 구간으로 작성한다.</a:t>
-            </a:r>
-          </a:p>
-          <a:p>
-            <a:r>
-              <a:t>[실행] nano ~/ros2_curri/agv_ws/src/agv_interfaces/CMakeLists.txt</a:t>
-            </a:r>
-          </a:p>
-          <a:p>
-            <a:r>
-              <a:t>[확인] 코드를 저장하고 다음 코드 슬라이드 또는 build 단계로 이동한다.</a:t>
+              <a:t>[설명] 모델 파일과 Python dependency는 교육 환경에서 고정해야 재현된다.</a:t>
+            </a:r>
+          </a:p>
+          <a:p>
+            <a:r>
+              <a:t>[실행] ros2 run agv_vision yolo_node --ros-args \</a:t>
+            </a:r>
+          </a:p>
+          <a:p>
+            <a:r>
+              <a:t>  -p enable_yolo:=false</a:t>
+            </a:r>
+          </a:p>
+          <a:p>
+            <a:r>
+              <a:t># ultralytics와 모델 파일 준비 뒤에만 true로 변경</a:t>
+            </a:r>
+          </a:p>
+          <a:p>
+            <a:r>
+              <a:t>[확인] 명령 출력에서 슬라이드의 확인 항목을 찾는다.</a:t>
             </a:r>
           </a:p>
           <a:p>
@@ -732,7 +760,7 @@
           </a:p>
           <a:p>
             <a:r>
-              <a:t>[오류] 들여쓰기·XML 태그·따옴표가 슬라이드와 정확히 같은지 확인한다.</a:t>
+              <a:t>[오류] 오류가 나면 현재 폴더, source, 파일 경로를 먼저 확인한다.</a:t>
             </a:r>
           </a:p>
         </p:txBody>
@@ -802,12 +830,12 @@
           <a:lstStyle/>
           <a:p>
             <a:r>
-              <a:t>[설명] ~/ros2_curri/agv_ws/src/agv_vision/agv_vision/yolo_node.py의 전체 파일을 1/10 구간으로 작성한다.</a:t>
-            </a:r>
-          </a:p>
-          <a:p>
-            <a:r>
-              <a:t>[실행] nano ~/ros2_curri/agv_ws/src/agv_vision/agv_vision/yolo_node.py</a:t>
+              <a:t>[설명] ~/ros2_curri/agv_ws/src/agv_interfaces/msg/Detection.msg의 전체 파일을 1/1 구간으로 작성한다.</a:t>
+            </a:r>
+          </a:p>
+          <a:p>
+            <a:r>
+              <a:t>[실행] nano ~/ros2_curri/agv_ws/src/agv_interfaces/msg/Detection.msg</a:t>
             </a:r>
           </a:p>
           <a:p>
@@ -892,12 +920,12 @@
           <a:lstStyle/>
           <a:p>
             <a:r>
-              <a:t>[설명] ~/ros2_curri/agv_ws/src/agv_vision/agv_vision/yolo_node.py의 전체 파일을 2/10 구간으로 작성한다.</a:t>
-            </a:r>
-          </a:p>
-          <a:p>
-            <a:r>
-              <a:t>[실행] nano ~/ros2_curri/agv_ws/src/agv_vision/agv_vision/yolo_node.py</a:t>
+              <a:t>[설명] ~/ros2_curri/agv_ws/src/agv_interfaces/msg/DetectionArray.msg의 전체 파일을 1/1 구간으로 작성한다.</a:t>
+            </a:r>
+          </a:p>
+          <a:p>
+            <a:r>
+              <a:t>[실행] nano ~/ros2_curri/agv_ws/src/agv_interfaces/msg/DetectionArray.msg</a:t>
             </a:r>
           </a:p>
           <a:p>
@@ -982,12 +1010,12 @@
           <a:lstStyle/>
           <a:p>
             <a:r>
-              <a:t>[설명] ~/ros2_curri/agv_ws/src/agv_vision/agv_vision/yolo_node.py의 전체 파일을 3/10 구간으로 작성한다.</a:t>
-            </a:r>
-          </a:p>
-          <a:p>
-            <a:r>
-              <a:t>[실행] nano ~/ros2_curri/agv_ws/src/agv_vision/agv_vision/yolo_node.py</a:t>
+              <a:t>[설명] ~/ros2_curri/agv_ws/src/agv_interfaces/CMakeLists.txt의 전체 파일을 1/1 구간으로 작성한다.</a:t>
+            </a:r>
+          </a:p>
+          <a:p>
+            <a:r>
+              <a:t>[실행] nano ~/ros2_curri/agv_ws/src/agv_interfaces/CMakeLists.txt</a:t>
             </a:r>
           </a:p>
           <a:p>
@@ -1072,7 +1100,7 @@
           <a:lstStyle/>
           <a:p>
             <a:r>
-              <a:t>[설명] ~/ros2_curri/agv_ws/src/agv_vision/agv_vision/yolo_node.py의 전체 파일을 4/10 구간으로 작성한다.</a:t>
+              <a:t>[설명] ~/ros2_curri/agv_ws/src/agv_vision/agv_vision/yolo_node.py의 전체 파일을 1/10 구간으로 작성한다.</a:t>
             </a:r>
           </a:p>
           <a:p>
@@ -1162,7 +1190,7 @@
           <a:lstStyle/>
           <a:p>
             <a:r>
-              <a:t>[설명] ~/ros2_curri/agv_ws/src/agv_vision/agv_vision/yolo_node.py의 전체 파일을 5/10 구간으로 작성한다.</a:t>
+              <a:t>[설명] ~/ros2_curri/agv_ws/src/agv_vision/agv_vision/yolo_node.py의 전체 파일을 2/10 구간으로 작성한다.</a:t>
             </a:r>
           </a:p>
           <a:p>
@@ -1252,7 +1280,7 @@
           <a:lstStyle/>
           <a:p>
             <a:r>
-              <a:t>[설명] ~/ros2_curri/agv_ws/src/agv_vision/agv_vision/yolo_node.py의 전체 파일을 6/10 구간으로 작성한다.</a:t>
+              <a:t>[설명] ~/ros2_curri/agv_ws/src/agv_vision/agv_vision/yolo_node.py의 전체 파일을 3/10 구간으로 작성한다.</a:t>
             </a:r>
           </a:p>
           <a:p>
@@ -1342,7 +1370,7 @@
           <a:lstStyle/>
           <a:p>
             <a:r>
-              <a:t>[설명] ~/ros2_curri/agv_ws/src/agv_vision/agv_vision/yolo_node.py의 전체 파일을 7/10 구간으로 작성한다.</a:t>
+              <a:t>[설명] ~/ros2_curri/agv_ws/src/agv_vision/agv_vision/yolo_node.py의 전체 파일을 4/10 구간으로 작성한다.</a:t>
             </a:r>
           </a:p>
           <a:p>
@@ -1432,7 +1460,7 @@
           <a:lstStyle/>
           <a:p>
             <a:r>
-              <a:t>[설명] ~/ros2_curri/agv_ws/src/agv_vision/agv_vision/yolo_node.py의 전체 파일을 8/10 구간으로 작성한다.</a:t>
+              <a:t>[설명] ~/ros2_curri/agv_ws/src/agv_vision/agv_vision/yolo_node.py의 전체 파일을 5/10 구간으로 작성한다.</a:t>
             </a:r>
           </a:p>
           <a:p>
@@ -1612,7 +1640,7 @@
           <a:lstStyle/>
           <a:p>
             <a:r>
-              <a:t>[설명] ~/ros2_curri/agv_ws/src/agv_vision/agv_vision/yolo_node.py의 전체 파일을 9/10 구간으로 작성한다.</a:t>
+              <a:t>[설명] ~/ros2_curri/agv_ws/src/agv_vision/agv_vision/yolo_node.py의 전체 파일을 6/10 구간으로 작성한다.</a:t>
             </a:r>
           </a:p>
           <a:p>
@@ -1702,7 +1730,7 @@
           <a:lstStyle/>
           <a:p>
             <a:r>
-              <a:t>[설명] ~/ros2_curri/agv_ws/src/agv_vision/agv_vision/yolo_node.py의 전체 파일을 10/10 구간으로 작성한다.</a:t>
+              <a:t>[설명] ~/ros2_curri/agv_ws/src/agv_vision/agv_vision/yolo_node.py의 전체 파일을 7/10 구간으로 작성한다.</a:t>
             </a:r>
           </a:p>
           <a:p>
@@ -1792,12 +1820,12 @@
           <a:lstStyle/>
           <a:p>
             <a:r>
-              <a:t>[설명] ~/ros2_curri/agv_ws/src/agv_bringup/config/vision.yaml의 전체 파일을 1/1 구간으로 작성한다.</a:t>
-            </a:r>
-          </a:p>
-          <a:p>
-            <a:r>
-              <a:t>[실행] nano ~/ros2_curri/agv_ws/src/agv_bringup/config/vision.yaml</a:t>
+              <a:t>[설명] ~/ros2_curri/agv_ws/src/agv_vision/agv_vision/yolo_node.py의 전체 파일을 8/10 구간으로 작성한다.</a:t>
+            </a:r>
+          </a:p>
+          <a:p>
+            <a:r>
+              <a:t>[실행] nano ~/ros2_curri/agv_ws/src/agv_vision/agv_vision/yolo_node.py</a:t>
             </a:r>
           </a:p>
           <a:p>
@@ -1882,12 +1910,12 @@
           <a:lstStyle/>
           <a:p>
             <a:r>
-              <a:t>[설명] ~/ros2_curri/agv_ws/src/agv_vision/setup.py의 전체 파일을 1/1 구간으로 작성한다.</a:t>
-            </a:r>
-          </a:p>
-          <a:p>
-            <a:r>
-              <a:t>[실행] nano ~/ros2_curri/agv_ws/src/agv_vision/setup.py</a:t>
+              <a:t>[설명] ~/ros2_curri/agv_ws/src/agv_vision/agv_vision/yolo_node.py의 전체 파일을 9/10 구간으로 작성한다.</a:t>
+            </a:r>
+          </a:p>
+          <a:p>
+            <a:r>
+              <a:t>[실행] nano ~/ros2_curri/agv_ws/src/agv_vision/agv_vision/yolo_node.py</a:t>
             </a:r>
           </a:p>
           <a:p>
@@ -1972,22 +2000,17 @@
           <a:lstStyle/>
           <a:p>
             <a:r>
-              <a:t>[설명] build/source/run을 생략 없이 실행한다.</a:t>
-            </a:r>
-          </a:p>
-          <a:p>
-            <a:r>
-              <a:t>[실행] source ~/ros2_curri/agv_ws/install/setup.bash</a:t>
-            </a:r>
-          </a:p>
-          <a:p>
-            <a:r>
-              <a:t>ros2 run agv_vision yolo_node --ros-args -p enable_yolo:=false</a:t>
-            </a:r>
-          </a:p>
-          <a:p>
-            <a:r>
-              <a:t>[확인] /detections message 형식과 YOLO enable_yolo/model_path/threshold parameter를 확인한다.</a:t>
+              <a:t>[설명] ~/ros2_curri/agv_ws/src/agv_vision/agv_vision/yolo_node.py의 전체 파일을 10/10 구간으로 작성한다.</a:t>
+            </a:r>
+          </a:p>
+          <a:p>
+            <a:r>
+              <a:t>[실행] nano ~/ros2_curri/agv_ws/src/agv_vision/agv_vision/yolo_node.py</a:t>
+            </a:r>
+          </a:p>
+          <a:p>
+            <a:r>
+              <a:t>[확인] 코드를 저장하고 다음 코드 슬라이드 또는 build 단계로 이동한다.</a:t>
             </a:r>
           </a:p>
           <a:p>
@@ -1997,7 +2020,7 @@
           </a:p>
           <a:p>
             <a:r>
-              <a:t>[오류] 오류가 나면 현재 폴더, source, 파일 경로를 먼저 확인한다.</a:t>
+              <a:t>[오류] 들여쓰기·XML 태그·따옴표가 슬라이드와 정확히 같은지 확인한다.</a:t>
             </a:r>
           </a:p>
         </p:txBody>
@@ -2067,17 +2090,17 @@
           <a:lstStyle/>
           <a:p>
             <a:r>
-              <a:t>[설명] 실제 Ubuntu/ROS 2 환경에서 생성한 검증 화면이다.</a:t>
-            </a:r>
-          </a:p>
-          <a:p>
-            <a:r>
-              <a:t>[실행] 슬라이드의 명령 또는 파일 작성 단계를 진행한다.</a:t>
-            </a:r>
-          </a:p>
-          <a:p>
-            <a:r>
-              <a:t>[확인] 캡처의 명령과 다음 슬라이드의 검증 명령을 비교한다.</a:t>
+              <a:t>[설명] ~/ros2_curri/agv_ws/src/agv_bringup/config/vision.yaml의 전체 파일을 1/1 구간으로 작성한다.</a:t>
+            </a:r>
+          </a:p>
+          <a:p>
+            <a:r>
+              <a:t>[실행] nano ~/ros2_curri/agv_ws/src/agv_bringup/config/vision.yaml</a:t>
+            </a:r>
+          </a:p>
+          <a:p>
+            <a:r>
+              <a:t>[확인] 코드를 저장하고 다음 코드 슬라이드 또는 build 단계로 이동한다.</a:t>
             </a:r>
           </a:p>
           <a:p>
@@ -2087,7 +2110,7 @@
           </a:p>
           <a:p>
             <a:r>
-              <a:t>[오류] 오류가 나면 현재 폴더, source, 파일 경로를 먼저 확인한다.</a:t>
+              <a:t>[오류] 들여쓰기·XML 태그·따옴표가 슬라이드와 정확히 같은지 확인한다.</a:t>
             </a:r>
           </a:p>
         </p:txBody>
@@ -2157,17 +2180,17 @@
           <a:lstStyle/>
           <a:p>
             <a:r>
-              <a:t>[설명] 실제 Ubuntu/ROS 2 환경에서 생성한 검증 화면이다.</a:t>
-            </a:r>
-          </a:p>
-          <a:p>
-            <a:r>
-              <a:t>[실행] 슬라이드의 명령 또는 파일 작성 단계를 진행한다.</a:t>
-            </a:r>
-          </a:p>
-          <a:p>
-            <a:r>
-              <a:t>[확인] 캡처의 명령과 다음 슬라이드의 검증 명령을 비교한다.</a:t>
+              <a:t>[설명] ~/ros2_curri/agv_ws/src/agv_vision/setup.py의 전체 파일을 1/1 구간으로 작성한다.</a:t>
+            </a:r>
+          </a:p>
+          <a:p>
+            <a:r>
+              <a:t>[실행] nano ~/ros2_curri/agv_ws/src/agv_vision/setup.py</a:t>
+            </a:r>
+          </a:p>
+          <a:p>
+            <a:r>
+              <a:t>[확인] 코드를 저장하고 다음 코드 슬라이드 또는 build 단계로 이동한다.</a:t>
             </a:r>
           </a:p>
           <a:p>
@@ -2177,7 +2200,7 @@
           </a:p>
           <a:p>
             <a:r>
-              <a:t>[오류] 오류가 나면 현재 폴더, source, 파일 경로를 먼저 확인한다.</a:t>
+              <a:t>[오류] 들여쓰기·XML 태그·따옴표가 슬라이드와 정확히 같은지 확인한다.</a:t>
             </a:r>
           </a:p>
         </p:txBody>
@@ -2247,22 +2270,17 @@
           <a:lstStyle/>
           <a:p>
             <a:r>
-              <a:t>[설명] 검증 명령은 GUI 결과와 별도로 실행해 재현 가능한 완료 기준을 만든다.</a:t>
-            </a:r>
-          </a:p>
-          <a:p>
-            <a:r>
-              <a:t>[실행] ros2 interface show agv_interfaces/msg/Detection</a:t>
-            </a:r>
-          </a:p>
-          <a:p>
-            <a:r>
-              <a:t>ros2 topic info /detections</a:t>
-            </a:r>
-          </a:p>
-          <a:p>
-            <a:r>
-              <a:t>ros2 param get /yolo_node confidence_threshold</a:t>
+              <a:t>[설명] build/source/run을 생략 없이 실행한다.</a:t>
+            </a:r>
+          </a:p>
+          <a:p>
+            <a:r>
+              <a:t>[실행] source ~/ros2_curri/agv_ws/install/setup.bash</a:t>
+            </a:r>
+          </a:p>
+          <a:p>
+            <a:r>
+              <a:t>ros2 run agv_vision yolo_node --ros-args -p enable_yolo:=false</a:t>
             </a:r>
           </a:p>
           <a:p>
@@ -2347,7 +2365,7 @@
           <a:lstStyle/>
           <a:p>
             <a:r>
-              <a:t>[설명] 오류를 대신 해결하지 말고 증상부터 우선 확인 순서대로 교육생이 실행하게 한다.</a:t>
+              <a:t>[설명] 실제 Ubuntu/ROS 2 환경에서 생성한 검증 화면이다.</a:t>
             </a:r>
           </a:p>
           <a:p>
@@ -2357,7 +2375,7 @@
           </a:p>
           <a:p>
             <a:r>
-              <a:t>[확인] 수정 뒤 첫 검증 명령을 다시 실행한다.</a:t>
+              <a:t>[확인] ① 명령/설정  ② 정상 출력 또는 화면  ③ 다음 검증 명령으로 재확인</a:t>
             </a:r>
           </a:p>
           <a:p>
@@ -2367,7 +2385,7 @@
           </a:p>
           <a:p>
             <a:r>
-              <a:t>[오류] 슬라이드의 두 대표 오류를 먼저 사용한다.</a:t>
+              <a:t>[오류] 오류가 나면 현재 폴더, source, 파일 경로를 먼저 확인한다.</a:t>
             </a:r>
           </a:p>
         </p:txBody>
@@ -2437,7 +2455,7 @@
           <a:lstStyle/>
           <a:p>
             <a:r>
-              <a:t>[설명] 교육생이 직접 한 값만 바꿔 원인과 결과를 연결하게 한다.</a:t>
+              <a:t>[설명] 실제 Ubuntu/ROS 2 환경에서 생성한 검증 화면이다.</a:t>
             </a:r>
           </a:p>
           <a:p>
@@ -2447,7 +2465,7 @@
           </a:p>
           <a:p>
             <a:r>
-              <a:t>[확인] 원래 값과 변경 값을 모두 기록한다.</a:t>
+              <a:t>[확인] 명령·설정과 화면의 topic·frame·결과 이름을 대조합니다.</a:t>
             </a:r>
           </a:p>
           <a:p>
@@ -2617,17 +2635,27 @@
           <a:lstStyle/>
           <a:p>
             <a:r>
-              <a:t>[설명] 교육생이 Complete·캡처·로그를 저장했는지 확인하고 다음 모듈의 시작 상태를 읽는다.</a:t>
-            </a:r>
-          </a:p>
-          <a:p>
-            <a:r>
-              <a:t>[실행] 슬라이드의 명령 또는 파일 작성 단계를 진행한다.</a:t>
-            </a:r>
-          </a:p>
-          <a:p>
-            <a:r>
-              <a:t>[확인] M18 safety fusion 시작 조건을 말할 수 있다.</a:t>
+              <a:t>[설명] 검증 명령은 GUI 결과와 별도로 실행해 재현 가능한 완료 기준을 만든다.</a:t>
+            </a:r>
+          </a:p>
+          <a:p>
+            <a:r>
+              <a:t>[실행] ros2 interface show agv_interfaces/msg/Detection</a:t>
+            </a:r>
+          </a:p>
+          <a:p>
+            <a:r>
+              <a:t>ros2 topic info /detections</a:t>
+            </a:r>
+          </a:p>
+          <a:p>
+            <a:r>
+              <a:t>ros2 param get /yolo_node confidence_threshold</a:t>
+            </a:r>
+          </a:p>
+          <a:p>
+            <a:r>
+              <a:t>[확인] /detections message 형식과 YOLO enable_yolo/model_path/threshold parameter를 확인한다.</a:t>
             </a:r>
           </a:p>
           <a:p>
@@ -2707,6 +2735,276 @@
           <a:lstStyle/>
           <a:p>
             <a:r>
+              <a:t>[설명] 오류를 대신 해결하지 말고 증상부터 우선 확인 순서대로 교육생이 실행하게 한다.</a:t>
+            </a:r>
+          </a:p>
+          <a:p>
+            <a:r>
+              <a:t>[실행] 슬라이드의 명령 또는 파일 작성 단계를 진행한다.</a:t>
+            </a:r>
+          </a:p>
+          <a:p>
+            <a:r>
+              <a:t>[확인] 수정 뒤 첫 검증 명령을 다시 실행한다.</a:t>
+            </a:r>
+          </a:p>
+          <a:p>
+            <a:r>
+              <a:t>[멈춤] 교육생이 현재 체크포인트를 통과할 때까지 기다린다.</a:t>
+            </a:r>
+          </a:p>
+          <a:p>
+            <a:r>
+              <a:t>[오류] 슬라이드의 두 대표 오류를 먼저 사용한다.</a:t>
+            </a:r>
+          </a:p>
+        </p:txBody>
+      </p:sp>
+      <p:sp>
+        <p:nvSpPr>
+          <p:cNvPr id="4" name="Slide Number Placeholder 3"/>
+          <p:cNvSpPr>
+            <a:spLocks noGrp="1"/>
+          </p:cNvSpPr>
+          <p:nvPr>
+            <p:ph type="sldNum" idx="5" sz="quarter"/>
+          </p:nvPr>
+        </p:nvSpPr>
+        <p:spPr/>
+      </p:sp>
+    </p:spTree>
+  </p:cSld>
+  <p:clrMapOvr>
+    <a:masterClrMapping/>
+  </p:clrMapOvr>
+</p:notes>
+</file>
+
+<file path=ppt/notesSlides/notesSlide32.xml><?xml version="1.0" encoding="utf-8"?>
+<p:notes xmlns:a="http://schemas.openxmlformats.org/drawingml/2006/main" xmlns:p="http://schemas.openxmlformats.org/presentationml/2006/main" xmlns:r="http://schemas.openxmlformats.org/officeDocument/2006/relationships">
+  <p:cSld>
+    <p:spTree>
+      <p:nvGrpSpPr>
+        <p:cNvPr id="1" name=""/>
+        <p:cNvGrpSpPr/>
+        <p:nvPr/>
+      </p:nvGrpSpPr>
+      <p:grpSpPr>
+        <a:xfrm>
+          <a:off x="0" y="0"/>
+          <a:ext cx="0" cy="0"/>
+          <a:chOff x="0" y="0"/>
+          <a:chExt cx="0" cy="0"/>
+        </a:xfrm>
+      </p:grpSpPr>
+      <p:sp>
+        <p:nvSpPr>
+          <p:cNvPr id="2" name="Slide Image Placeholder 1"/>
+          <p:cNvSpPr>
+            <a:spLocks noGrp="1"/>
+          </p:cNvSpPr>
+          <p:nvPr>
+            <p:ph type="sldImg" idx="2"/>
+          </p:nvPr>
+        </p:nvSpPr>
+        <p:spPr/>
+      </p:sp>
+      <p:sp>
+        <p:nvSpPr>
+          <p:cNvPr id="3" name="Notes Placeholder 2"/>
+          <p:cNvSpPr>
+            <a:spLocks noGrp="1"/>
+          </p:cNvSpPr>
+          <p:nvPr>
+            <p:ph type="body" idx="3" sz="quarter"/>
+          </p:nvPr>
+        </p:nvSpPr>
+        <p:spPr/>
+        <p:txBody>
+          <a:bodyPr/>
+          <a:lstStyle/>
+          <a:p>
+            <a:r>
+              <a:t>[설명] 교육생이 직접 한 값만 바꿔 원인과 결과를 연결하게 한다.</a:t>
+            </a:r>
+          </a:p>
+          <a:p>
+            <a:r>
+              <a:t>[실행] 슬라이드의 명령 또는 파일 작성 단계를 진행한다.</a:t>
+            </a:r>
+          </a:p>
+          <a:p>
+            <a:r>
+              <a:t>[확인] 원래 값과 변경 값을 모두 기록한다.</a:t>
+            </a:r>
+          </a:p>
+          <a:p>
+            <a:r>
+              <a:t>[멈춤] 교육생이 현재 체크포인트를 통과할 때까지 기다린다.</a:t>
+            </a:r>
+          </a:p>
+          <a:p>
+            <a:r>
+              <a:t>[오류] 오류가 나면 현재 폴더, source, 파일 경로를 먼저 확인한다.</a:t>
+            </a:r>
+          </a:p>
+        </p:txBody>
+      </p:sp>
+      <p:sp>
+        <p:nvSpPr>
+          <p:cNvPr id="4" name="Slide Number Placeholder 3"/>
+          <p:cNvSpPr>
+            <a:spLocks noGrp="1"/>
+          </p:cNvSpPr>
+          <p:nvPr>
+            <p:ph type="sldNum" idx="5" sz="quarter"/>
+          </p:nvPr>
+        </p:nvSpPr>
+        <p:spPr/>
+      </p:sp>
+    </p:spTree>
+  </p:cSld>
+  <p:clrMapOvr>
+    <a:masterClrMapping/>
+  </p:clrMapOvr>
+</p:notes>
+</file>
+
+<file path=ppt/notesSlides/notesSlide33.xml><?xml version="1.0" encoding="utf-8"?>
+<p:notes xmlns:a="http://schemas.openxmlformats.org/drawingml/2006/main" xmlns:p="http://schemas.openxmlformats.org/presentationml/2006/main" xmlns:r="http://schemas.openxmlformats.org/officeDocument/2006/relationships">
+  <p:cSld>
+    <p:spTree>
+      <p:nvGrpSpPr>
+        <p:cNvPr id="1" name=""/>
+        <p:cNvGrpSpPr/>
+        <p:nvPr/>
+      </p:nvGrpSpPr>
+      <p:grpSpPr>
+        <a:xfrm>
+          <a:off x="0" y="0"/>
+          <a:ext cx="0" cy="0"/>
+          <a:chOff x="0" y="0"/>
+          <a:chExt cx="0" cy="0"/>
+        </a:xfrm>
+      </p:grpSpPr>
+      <p:sp>
+        <p:nvSpPr>
+          <p:cNvPr id="2" name="Slide Image Placeholder 1"/>
+          <p:cNvSpPr>
+            <a:spLocks noGrp="1"/>
+          </p:cNvSpPr>
+          <p:nvPr>
+            <p:ph type="sldImg" idx="2"/>
+          </p:nvPr>
+        </p:nvSpPr>
+        <p:spPr/>
+      </p:sp>
+      <p:sp>
+        <p:nvSpPr>
+          <p:cNvPr id="3" name="Notes Placeholder 2"/>
+          <p:cNvSpPr>
+            <a:spLocks noGrp="1"/>
+          </p:cNvSpPr>
+          <p:nvPr>
+            <p:ph type="body" idx="3" sz="quarter"/>
+          </p:nvPr>
+        </p:nvSpPr>
+        <p:spPr/>
+        <p:txBody>
+          <a:bodyPr/>
+          <a:lstStyle/>
+          <a:p>
+            <a:r>
+              <a:t>[설명] 교육생이 Complete·캡처·로그를 저장했는지 확인하고 다음 모듈의 시작 상태를 읽는다.</a:t>
+            </a:r>
+          </a:p>
+          <a:p>
+            <a:r>
+              <a:t>[실행] 슬라이드의 명령 또는 파일 작성 단계를 진행한다.</a:t>
+            </a:r>
+          </a:p>
+          <a:p>
+            <a:r>
+              <a:t>[확인] M18 safety fusion 시작 조건을 말할 수 있다.</a:t>
+            </a:r>
+          </a:p>
+          <a:p>
+            <a:r>
+              <a:t>[멈춤] 교육생이 현재 체크포인트를 통과할 때까지 기다린다.</a:t>
+            </a:r>
+          </a:p>
+          <a:p>
+            <a:r>
+              <a:t>[오류] 오류가 나면 현재 폴더, source, 파일 경로를 먼저 확인한다.</a:t>
+            </a:r>
+          </a:p>
+        </p:txBody>
+      </p:sp>
+      <p:sp>
+        <p:nvSpPr>
+          <p:cNvPr id="4" name="Slide Number Placeholder 3"/>
+          <p:cNvSpPr>
+            <a:spLocks noGrp="1"/>
+          </p:cNvSpPr>
+          <p:nvPr>
+            <p:ph type="sldNum" idx="5" sz="quarter"/>
+          </p:nvPr>
+        </p:nvSpPr>
+        <p:spPr/>
+      </p:sp>
+    </p:spTree>
+  </p:cSld>
+  <p:clrMapOvr>
+    <a:masterClrMapping/>
+  </p:clrMapOvr>
+</p:notes>
+</file>
+
+<file path=ppt/notesSlides/notesSlide34.xml><?xml version="1.0" encoding="utf-8"?>
+<p:notes xmlns:a="http://schemas.openxmlformats.org/drawingml/2006/main" xmlns:p="http://schemas.openxmlformats.org/presentationml/2006/main" xmlns:r="http://schemas.openxmlformats.org/officeDocument/2006/relationships">
+  <p:cSld>
+    <p:spTree>
+      <p:nvGrpSpPr>
+        <p:cNvPr id="1" name=""/>
+        <p:cNvGrpSpPr/>
+        <p:nvPr/>
+      </p:nvGrpSpPr>
+      <p:grpSpPr>
+        <a:xfrm>
+          <a:off x="0" y="0"/>
+          <a:ext cx="0" cy="0"/>
+          <a:chOff x="0" y="0"/>
+          <a:chExt cx="0" cy="0"/>
+        </a:xfrm>
+      </p:grpSpPr>
+      <p:sp>
+        <p:nvSpPr>
+          <p:cNvPr id="2" name="Slide Image Placeholder 1"/>
+          <p:cNvSpPr>
+            <a:spLocks noGrp="1"/>
+          </p:cNvSpPr>
+          <p:nvPr>
+            <p:ph type="sldImg" idx="2"/>
+          </p:nvPr>
+        </p:nvSpPr>
+        <p:spPr/>
+      </p:sp>
+      <p:sp>
+        <p:nvSpPr>
+          <p:cNvPr id="3" name="Notes Placeholder 2"/>
+          <p:cNvSpPr>
+            <a:spLocks noGrp="1"/>
+          </p:cNvSpPr>
+          <p:nvPr>
+            <p:ph type="body" idx="3" sz="quarter"/>
+          </p:nvPr>
+        </p:nvSpPr>
+        <p:spPr/>
+        <p:txBody>
+          <a:bodyPr/>
+          <a:lstStyle/>
+          <a:p>
+            <a:r>
               <a:t>[설명] 공식 문서는 버전 차이와 확장 학습을 확인할 때 사용한다.</a:t>
             </a:r>
           </a:p>
@@ -3067,32 +3365,17 @@
           <a:lstStyle/>
           <a:p>
             <a:r>
-              <a:t>[설명] vision node보다 custom message package가 먼저 install/source되어야 import된다.</a:t>
-            </a:r>
-          </a:p>
-          <a:p>
-            <a:r>
-              <a:t>[실행] cd ~/ros2_curri/agv_ws</a:t>
-            </a:r>
-          </a:p>
-          <a:p>
-            <a:r>
-              <a:t>colcon build --symlink-install --packages-select agv_interfaces agv_vision</a:t>
-            </a:r>
-          </a:p>
-          <a:p>
-            <a:r>
-              <a:t>source install/setup.bash</a:t>
-            </a:r>
-          </a:p>
-          <a:p>
-            <a:r>
-              <a:t>ros2 interface show agv_interfaces/msg/Detection</a:t>
-            </a:r>
-          </a:p>
-          <a:p>
-            <a:r>
-              <a:t>[확인] 명령 출력에서 슬라이드의 확인 항목을 찾는다.</a:t>
+              <a:t>[설명] 파일을 코드 문법보다 먼저 역할·사용법·확인 화면으로 설명한다.</a:t>
+            </a:r>
+          </a:p>
+          <a:p>
+            <a:r>
+              <a:t>[실행] 슬라이드의 명령 또는 파일 작성 단계를 진행한다.</a:t>
+            </a:r>
+          </a:p>
+          <a:p>
+            <a:r>
+              <a:t>[확인] 교육생이 각 파일의 산출물과 확인 위치를 말할 수 있다.</a:t>
             </a:r>
           </a:p>
           <a:p>
@@ -3172,27 +3455,17 @@
           <a:lstStyle/>
           <a:p>
             <a:r>
-              <a:t>[설명] 모델 파일과 Python dependency는 교육 환경에서 고정해야 재현된다.</a:t>
-            </a:r>
-          </a:p>
-          <a:p>
-            <a:r>
-              <a:t>[실행] ros2 run agv_vision yolo_node --ros-args \</a:t>
-            </a:r>
-          </a:p>
-          <a:p>
-            <a:r>
-              <a:t>  -p enable_yolo:=false</a:t>
-            </a:r>
-          </a:p>
-          <a:p>
-            <a:r>
-              <a:t># ultralytics와 모델 파일 준비 뒤에만 true로 변경</a:t>
-            </a:r>
-          </a:p>
-          <a:p>
-            <a:r>
-              <a:t>[확인] 명령 출력에서 슬라이드의 확인 항목을 찾는다.</a:t>
+              <a:t>[설명] 파일을 코드 문법보다 먼저 역할·사용법·확인 화면으로 설명한다.</a:t>
+            </a:r>
+          </a:p>
+          <a:p>
+            <a:r>
+              <a:t>[실행] 슬라이드의 명령 또는 파일 작성 단계를 진행한다.</a:t>
+            </a:r>
+          </a:p>
+          <a:p>
+            <a:r>
+              <a:t>[확인] 교육생이 각 파일의 산출물과 확인 위치를 말할 수 있다.</a:t>
             </a:r>
           </a:p>
           <a:p>
@@ -3272,17 +3545,17 @@
           <a:lstStyle/>
           <a:p>
             <a:r>
-              <a:t>[설명] ~/ros2_curri/agv_ws/src/agv_interfaces/msg/Detection.msg의 전체 파일을 1/1 구간으로 작성한다.</a:t>
-            </a:r>
-          </a:p>
-          <a:p>
-            <a:r>
-              <a:t>[실행] nano ~/ros2_curri/agv_ws/src/agv_interfaces/msg/Detection.msg</a:t>
-            </a:r>
-          </a:p>
-          <a:p>
-            <a:r>
-              <a:t>[확인] 코드를 저장하고 다음 코드 슬라이드 또는 build 단계로 이동한다.</a:t>
+              <a:t>[설명] 파일을 코드 문법보다 먼저 역할·사용법·확인 화면으로 설명한다.</a:t>
+            </a:r>
+          </a:p>
+          <a:p>
+            <a:r>
+              <a:t>[실행] 슬라이드의 명령 또는 파일 작성 단계를 진행한다.</a:t>
+            </a:r>
+          </a:p>
+          <a:p>
+            <a:r>
+              <a:t>[확인] 교육생이 각 파일의 산출물과 확인 위치를 말할 수 있다.</a:t>
             </a:r>
           </a:p>
           <a:p>
@@ -3292,7 +3565,7 @@
           </a:p>
           <a:p>
             <a:r>
-              <a:t>[오류] 들여쓰기·XML 태그·따옴표가 슬라이드와 정확히 같은지 확인한다.</a:t>
+              <a:t>[오류] 오류가 나면 현재 폴더, source, 파일 경로를 먼저 확인한다.</a:t>
             </a:r>
           </a:p>
         </p:txBody>
@@ -6665,7 +6938,7 @@
               </a:defRPr>
             </a:pPr>
             <a:r>
-              <a:t>파일을 새로 만들고 저장한다 (1/1)</a:t>
+              <a:t>interface를 먼저 빌드한다</a:t>
             </a:r>
           </a:p>
         </p:txBody>
@@ -6704,7 +6977,7 @@
               </a:defRPr>
             </a:pPr>
             <a:r>
-              <a:t>~/ros2_curri/agv_ws/src/agv_interfaces/msg/DetectionArray.msg</a:t>
+              <a:t>한 장에는 한 행동만 수행합니다.</a:t>
             </a:r>
           </a:p>
         </p:txBody>
@@ -6840,7 +7113,7 @@
               </a:defRPr>
             </a:pPr>
             <a:r>
-              <a:t>현재 단계 4/5    |    현재 폴더 ~/ros2_curri/agv_ws    |    현재 터미널</a:t>
+              <a:t>현재 단계 1/2    |    현재 폴더 ~/ros2_curri/agv_ws    |    현재 터미널</a:t>
             </a:r>
           </a:p>
         </p:txBody>
@@ -6853,25 +7126,64 @@
         </p:nvSpPr>
         <p:spPr>
           <a:xfrm>
-            <a:off x="658368" y="1627632"/>
-            <a:ext cx="10972800" cy="256032"/>
-          </a:xfrm>
-          <a:prstGeom prst="rect">
-            <a:avLst/>
-          </a:prstGeom>
-          <a:noFill/>
-        </p:spPr>
-        <p:txBody>
-          <a:bodyPr wrap="square" lIns="73152" rIns="73152" tIns="36576" bIns="36576">
-            <a:spAutoFit/>
-          </a:bodyPr>
-          <a:lstStyle/>
-          <a:p>
-            <a:pPr algn="l">
-              <a:spcAft>
-                <a:spcPts val="0"/>
-              </a:spcAft>
-              <a:defRPr sz="1500" b="1">
+            <a:off x="676656" y="1764792"/>
+            <a:ext cx="1828800" cy="347472"/>
+          </a:xfrm>
+          <a:prstGeom prst="rect">
+            <a:avLst/>
+          </a:prstGeom>
+          <a:noFill/>
+        </p:spPr>
+        <p:txBody>
+          <a:bodyPr wrap="square" lIns="73152" rIns="73152" tIns="36576" bIns="36576">
+            <a:spAutoFit/>
+          </a:bodyPr>
+          <a:lstStyle/>
+          <a:p>
+            <a:pPr algn="l">
+              <a:spcAft>
+                <a:spcPts val="0"/>
+              </a:spcAft>
+              <a:defRPr sz="1800" b="1">
+                <a:solidFill>
+                  <a:srgbClr val="225B9B"/>
+                </a:solidFill>
+                <a:latin typeface="Noto Sans CJK KR"/>
+              </a:defRPr>
+            </a:pPr>
+            <a:r>
+              <a:t>왜 하는가</a:t>
+            </a:r>
+          </a:p>
+        </p:txBody>
+      </p:sp>
+      <p:sp>
+        <p:nvSpPr>
+          <p:cNvPr id="8" name="TextBox 7"/>
+          <p:cNvSpPr txBox="1"/>
+          <p:nvPr/>
+        </p:nvSpPr>
+        <p:spPr>
+          <a:xfrm>
+            <a:off x="676656" y="2103120"/>
+            <a:ext cx="10789920" cy="512064"/>
+          </a:xfrm>
+          <a:prstGeom prst="rect">
+            <a:avLst/>
+          </a:prstGeom>
+          <a:noFill/>
+        </p:spPr>
+        <p:txBody>
+          <a:bodyPr wrap="square" lIns="73152" rIns="73152" tIns="36576" bIns="36576">
+            <a:spAutoFit/>
+          </a:bodyPr>
+          <a:lstStyle/>
+          <a:p>
+            <a:pPr algn="l">
+              <a:spcAft>
+                <a:spcPts val="0"/>
+              </a:spcAft>
+              <a:defRPr sz="2000" b="0">
                 <a:solidFill>
                   <a:srgbClr val="122C4E"/>
                 </a:solidFill>
@@ -6879,85 +7191,23 @@
               </a:defRPr>
             </a:pPr>
             <a:r>
-              <a:t>이번 단계: 파일의 전체 내용을 중간 생략 없이 작성합니다. 아래 줄 범위를 끝까지 입력하세요.</a:t>
-            </a:r>
-          </a:p>
-        </p:txBody>
-      </p:sp>
-      <p:sp>
-        <p:nvSpPr>
-          <p:cNvPr id="8" name="Rectangle 7"/>
+              <a:t>vision node보다 custom message package가 먼저 install/source되어야 import된다.</a:t>
+            </a:r>
+          </a:p>
+        </p:txBody>
+      </p:sp>
+      <p:sp>
+        <p:nvSpPr>
+          <p:cNvPr id="9" name="Rounded Rectangle 8"/>
           <p:cNvSpPr/>
           <p:nvPr/>
         </p:nvSpPr>
         <p:spPr>
           <a:xfrm>
-            <a:off x="658368" y="1956816"/>
-            <a:ext cx="10972800" cy="603504"/>
-          </a:xfrm>
-          <a:prstGeom prst="rect">
-            <a:avLst/>
-          </a:prstGeom>
-          <a:solidFill>
-            <a:srgbClr val="F4F7FB"/>
-          </a:solidFill>
-          <a:ln>
-            <a:solidFill>
-              <a:srgbClr val="F4F7FB"/>
-            </a:solidFill>
-          </a:ln>
-        </p:spPr>
-        <p:style>
-          <a:lnRef idx="1">
-            <a:schemeClr val="accent1"/>
-          </a:lnRef>
-          <a:fillRef idx="3">
-            <a:schemeClr val="accent1"/>
-          </a:fillRef>
-          <a:effectRef idx="2">
-            <a:schemeClr val="accent1"/>
-          </a:effectRef>
-          <a:fontRef idx="minor">
-            <a:schemeClr val="lt1"/>
-          </a:fontRef>
-        </p:style>
-        <p:txBody>
-          <a:bodyPr rtlCol="0" anchor="ctr" wrap="square" lIns="73152" rIns="73152" tIns="36576" bIns="36576"/>
-          <a:lstStyle/>
-          <a:p>
-            <a:pPr algn="l">
-              <a:spcAft>
-                <a:spcPts val="0"/>
-              </a:spcAft>
-              <a:defRPr sz="1400" b="0">
-                <a:solidFill>
-                  <a:srgbClr val="122C4E"/>
-                </a:solidFill>
-                <a:latin typeface="DejaVu Sans Mono"/>
-              </a:defRPr>
-            </a:pPr>
-            <a:r>
-              <a:t>파일 생성: mkdir -p ~/ros2_curri/agv_ws/src/agv_interfaces/msg</a:t>
-            </a:r>
-            <a:br/>
-            <a:r>
-              <a:t>파일 열기: nano ~/ros2_curri/agv_ws/src/agv_interfaces/msg/DetectionArray.msg</a:t>
-            </a:r>
-          </a:p>
-        </p:txBody>
-      </p:sp>
-      <p:sp>
-        <p:nvSpPr>
-          <p:cNvPr id="9" name="Rectangle 8"/>
-          <p:cNvSpPr/>
-          <p:nvPr/>
-        </p:nvSpPr>
-        <p:spPr>
-          <a:xfrm>
-            <a:off x="658368" y="2706624"/>
-            <a:ext cx="10972800" cy="3364992"/>
-          </a:xfrm>
-          <a:prstGeom prst="rect">
+            <a:off x="676656" y="2871216"/>
+            <a:ext cx="10835640" cy="2331720"/>
+          </a:xfrm>
+          <a:prstGeom prst="roundRect">
             <a:avLst/>
           </a:prstGeom>
           <a:solidFill>
@@ -6984,14 +7234,14 @@
           </a:fontRef>
         </p:style>
         <p:txBody>
-          <a:bodyPr rtlCol="0" anchor="ctr" wrap="square" lIns="164592" rIns="164592" tIns="109728" bIns="36576"/>
-          <a:lstStyle/>
-          <a:p>
-            <a:pPr algn="l">
-              <a:spcAft>
-                <a:spcPts val="0"/>
-              </a:spcAft>
-              <a:defRPr sz="1400" b="0">
+          <a:bodyPr rtlCol="0" anchor="ctr" wrap="square" lIns="73152" rIns="73152" tIns="36576" bIns="36576"/>
+          <a:lstStyle/>
+          <a:p>
+            <a:pPr algn="l">
+              <a:spcAft>
+                <a:spcPts val="0"/>
+              </a:spcAft>
+              <a:defRPr sz="1600" b="0">
                 <a:solidFill>
                   <a:srgbClr val="FFFFFF"/>
                 </a:solidFill>
@@ -6999,11 +7249,19 @@
               </a:defRPr>
             </a:pPr>
             <a:r>
-              <a:t>std_msgs/Header header</a:t>
+              <a:t>cd ~/ros2_curri/agv_ws</a:t>
             </a:r>
             <a:br/>
             <a:r>
-              <a:t>Detection[] detections</a:t>
+              <a:t>colcon build --symlink-install --packages-select agv_interfaces agv_vision</a:t>
+            </a:r>
+            <a:br/>
+            <a:r>
+              <a:t>source install/setup.bash</a:t>
+            </a:r>
+            <a:br/>
+            <a:r>
+              <a:t>ros2 interface show agv_interfaces/msg/Detection</a:t>
             </a:r>
           </a:p>
         </p:txBody>
@@ -7016,33 +7274,72 @@
         </p:nvSpPr>
         <p:spPr>
           <a:xfrm>
-            <a:off x="749808" y="6181344"/>
-            <a:ext cx="10789920" cy="201168"/>
-          </a:xfrm>
-          <a:prstGeom prst="rect">
-            <a:avLst/>
-          </a:prstGeom>
-          <a:noFill/>
-        </p:spPr>
-        <p:txBody>
-          <a:bodyPr wrap="square" lIns="73152" rIns="73152" tIns="36576" bIns="36576">
-            <a:spAutoFit/>
-          </a:bodyPr>
-          <a:lstStyle/>
-          <a:p>
-            <a:pPr algn="l">
-              <a:spcAft>
-                <a:spcPts val="0"/>
-              </a:spcAft>
-              <a:defRPr sz="1000" b="0">
-                <a:solidFill>
-                  <a:srgbClr val="5C6672"/>
-                </a:solidFill>
-                <a:latin typeface="Noto Sans CJK KR"/>
-              </a:defRPr>
-            </a:pPr>
-            <a:r>
-              <a:t>파일 전체 1/1 · 이 슬라이드 다음에 같은 파일의 나머지 줄이 이어집니다.</a:t>
+            <a:off x="768096" y="5468112"/>
+            <a:ext cx="1143000" cy="256032"/>
+          </a:xfrm>
+          <a:prstGeom prst="rect">
+            <a:avLst/>
+          </a:prstGeom>
+          <a:noFill/>
+        </p:spPr>
+        <p:txBody>
+          <a:bodyPr wrap="square" lIns="73152" rIns="73152" tIns="36576" bIns="36576">
+            <a:spAutoFit/>
+          </a:bodyPr>
+          <a:lstStyle/>
+          <a:p>
+            <a:pPr algn="l">
+              <a:spcAft>
+                <a:spcPts val="0"/>
+              </a:spcAft>
+              <a:defRPr sz="1800" b="1">
+                <a:solidFill>
+                  <a:srgbClr val="2A8B5A"/>
+                </a:solidFill>
+                <a:latin typeface="Noto Sans CJK KR"/>
+              </a:defRPr>
+            </a:pPr>
+            <a:r>
+              <a:t>확인</a:t>
+            </a:r>
+          </a:p>
+        </p:txBody>
+      </p:sp>
+      <p:sp>
+        <p:nvSpPr>
+          <p:cNvPr id="11" name="TextBox 10"/>
+          <p:cNvSpPr txBox="1"/>
+          <p:nvPr/>
+        </p:nvSpPr>
+        <p:spPr>
+          <a:xfrm>
+            <a:off x="768096" y="5742432"/>
+            <a:ext cx="10561320" cy="347472"/>
+          </a:xfrm>
+          <a:prstGeom prst="rect">
+            <a:avLst/>
+          </a:prstGeom>
+          <a:noFill/>
+        </p:spPr>
+        <p:txBody>
+          <a:bodyPr wrap="square" lIns="73152" rIns="73152" tIns="36576" bIns="36576">
+            <a:spAutoFit/>
+          </a:bodyPr>
+          <a:lstStyle/>
+          <a:p>
+            <a:pPr algn="l">
+              <a:spcAft>
+                <a:spcPts val="0"/>
+              </a:spcAft>
+              <a:defRPr sz="1800" b="0">
+                <a:solidFill>
+                  <a:srgbClr val="122C4E"/>
+                </a:solidFill>
+                <a:latin typeface="Noto Sans CJK KR"/>
+              </a:defRPr>
+            </a:pPr>
+            <a:r>
+              <a:t>명령의 출력에서 topic·frame·파일 이름 또는 성공 메시지를 찾으면 이 단계가 완료됩니다.</a:t>
             </a:r>
           </a:p>
         </p:txBody>
@@ -7099,7 +7396,7 @@
               </a:defRPr>
             </a:pPr>
             <a:r>
-              <a:t>파일을 새로 만들고 저장한다 (1/1)</a:t>
+              <a:t>YOLO 실행 정책을 정한다</a:t>
             </a:r>
           </a:p>
         </p:txBody>
@@ -7138,7 +7435,7 @@
               </a:defRPr>
             </a:pPr>
             <a:r>
-              <a:t>~/ros2_curri/agv_ws/src/agv_interfaces/CMakeLists.txt</a:t>
+              <a:t>한 장에는 한 행동만 수행합니다.</a:t>
             </a:r>
           </a:p>
         </p:txBody>
@@ -7274,7 +7571,7 @@
               </a:defRPr>
             </a:pPr>
             <a:r>
-              <a:t>현재 단계 5/6    |    현재 폴더 ~/ros2_curri/agv_ws    |    현재 터미널</a:t>
+              <a:t>현재 단계 2/2    |    현재 폴더 ~/ros2_curri/agv_ws    |    현재 터미널</a:t>
             </a:r>
           </a:p>
         </p:txBody>
@@ -7287,25 +7584,64 @@
         </p:nvSpPr>
         <p:spPr>
           <a:xfrm>
-            <a:off x="658368" y="1627632"/>
-            <a:ext cx="10972800" cy="256032"/>
-          </a:xfrm>
-          <a:prstGeom prst="rect">
-            <a:avLst/>
-          </a:prstGeom>
-          <a:noFill/>
-        </p:spPr>
-        <p:txBody>
-          <a:bodyPr wrap="square" lIns="73152" rIns="73152" tIns="36576" bIns="36576">
-            <a:spAutoFit/>
-          </a:bodyPr>
-          <a:lstStyle/>
-          <a:p>
-            <a:pPr algn="l">
-              <a:spcAft>
-                <a:spcPts val="0"/>
-              </a:spcAft>
-              <a:defRPr sz="1500" b="1">
+            <a:off x="676656" y="1764792"/>
+            <a:ext cx="1828800" cy="347472"/>
+          </a:xfrm>
+          <a:prstGeom prst="rect">
+            <a:avLst/>
+          </a:prstGeom>
+          <a:noFill/>
+        </p:spPr>
+        <p:txBody>
+          <a:bodyPr wrap="square" lIns="73152" rIns="73152" tIns="36576" bIns="36576">
+            <a:spAutoFit/>
+          </a:bodyPr>
+          <a:lstStyle/>
+          <a:p>
+            <a:pPr algn="l">
+              <a:spcAft>
+                <a:spcPts val="0"/>
+              </a:spcAft>
+              <a:defRPr sz="1800" b="1">
+                <a:solidFill>
+                  <a:srgbClr val="225B9B"/>
+                </a:solidFill>
+                <a:latin typeface="Noto Sans CJK KR"/>
+              </a:defRPr>
+            </a:pPr>
+            <a:r>
+              <a:t>왜 하는가</a:t>
+            </a:r>
+          </a:p>
+        </p:txBody>
+      </p:sp>
+      <p:sp>
+        <p:nvSpPr>
+          <p:cNvPr id="8" name="TextBox 7"/>
+          <p:cNvSpPr txBox="1"/>
+          <p:nvPr/>
+        </p:nvSpPr>
+        <p:spPr>
+          <a:xfrm>
+            <a:off x="676656" y="2103120"/>
+            <a:ext cx="10789920" cy="512064"/>
+          </a:xfrm>
+          <a:prstGeom prst="rect">
+            <a:avLst/>
+          </a:prstGeom>
+          <a:noFill/>
+        </p:spPr>
+        <p:txBody>
+          <a:bodyPr wrap="square" lIns="73152" rIns="73152" tIns="36576" bIns="36576">
+            <a:spAutoFit/>
+          </a:bodyPr>
+          <a:lstStyle/>
+          <a:p>
+            <a:pPr algn="l">
+              <a:spcAft>
+                <a:spcPts val="0"/>
+              </a:spcAft>
+              <a:defRPr sz="2000" b="0">
                 <a:solidFill>
                   <a:srgbClr val="122C4E"/>
                 </a:solidFill>
@@ -7313,85 +7649,23 @@
               </a:defRPr>
             </a:pPr>
             <a:r>
-              <a:t>이번 단계: 파일의 전체 내용을 중간 생략 없이 작성합니다. 아래 줄 범위를 끝까지 입력하세요.</a:t>
-            </a:r>
-          </a:p>
-        </p:txBody>
-      </p:sp>
-      <p:sp>
-        <p:nvSpPr>
-          <p:cNvPr id="8" name="Rectangle 7"/>
+              <a:t>모델 파일과 Python dependency는 교육 환경에서 고정해야 재현된다.</a:t>
+            </a:r>
+          </a:p>
+        </p:txBody>
+      </p:sp>
+      <p:sp>
+        <p:nvSpPr>
+          <p:cNvPr id="9" name="Rounded Rectangle 8"/>
           <p:cNvSpPr/>
           <p:nvPr/>
         </p:nvSpPr>
         <p:spPr>
           <a:xfrm>
-            <a:off x="658368" y="1956816"/>
-            <a:ext cx="10972800" cy="603504"/>
-          </a:xfrm>
-          <a:prstGeom prst="rect">
-            <a:avLst/>
-          </a:prstGeom>
-          <a:solidFill>
-            <a:srgbClr val="F4F7FB"/>
-          </a:solidFill>
-          <a:ln>
-            <a:solidFill>
-              <a:srgbClr val="F4F7FB"/>
-            </a:solidFill>
-          </a:ln>
-        </p:spPr>
-        <p:style>
-          <a:lnRef idx="1">
-            <a:schemeClr val="accent1"/>
-          </a:lnRef>
-          <a:fillRef idx="3">
-            <a:schemeClr val="accent1"/>
-          </a:fillRef>
-          <a:effectRef idx="2">
-            <a:schemeClr val="accent1"/>
-          </a:effectRef>
-          <a:fontRef idx="minor">
-            <a:schemeClr val="lt1"/>
-          </a:fontRef>
-        </p:style>
-        <p:txBody>
-          <a:bodyPr rtlCol="0" anchor="ctr" wrap="square" lIns="73152" rIns="73152" tIns="36576" bIns="36576"/>
-          <a:lstStyle/>
-          <a:p>
-            <a:pPr algn="l">
-              <a:spcAft>
-                <a:spcPts val="0"/>
-              </a:spcAft>
-              <a:defRPr sz="1400" b="0">
-                <a:solidFill>
-                  <a:srgbClr val="122C4E"/>
-                </a:solidFill>
-                <a:latin typeface="DejaVu Sans Mono"/>
-              </a:defRPr>
-            </a:pPr>
-            <a:r>
-              <a:t>파일 생성: mkdir -p ~/ros2_curri/agv_ws/src/agv_interfaces</a:t>
-            </a:r>
-            <a:br/>
-            <a:r>
-              <a:t>파일 열기: nano ~/ros2_curri/agv_ws/src/agv_interfaces/CMakeLists.txt</a:t>
-            </a:r>
-          </a:p>
-        </p:txBody>
-      </p:sp>
-      <p:sp>
-        <p:nvSpPr>
-          <p:cNvPr id="9" name="Rectangle 8"/>
-          <p:cNvSpPr/>
-          <p:nvPr/>
-        </p:nvSpPr>
-        <p:spPr>
-          <a:xfrm>
-            <a:off x="658368" y="2706624"/>
-            <a:ext cx="10972800" cy="3364992"/>
-          </a:xfrm>
-          <a:prstGeom prst="rect">
+            <a:off x="676656" y="2871216"/>
+            <a:ext cx="10835640" cy="2331720"/>
+          </a:xfrm>
+          <a:prstGeom prst="roundRect">
             <a:avLst/>
           </a:prstGeom>
           <a:solidFill>
@@ -7418,14 +7692,14 @@
           </a:fontRef>
         </p:style>
         <p:txBody>
-          <a:bodyPr rtlCol="0" anchor="ctr" wrap="square" lIns="164592" rIns="164592" tIns="109728" bIns="36576"/>
-          <a:lstStyle/>
-          <a:p>
-            <a:pPr algn="l">
-              <a:spcAft>
-                <a:spcPts val="0"/>
-              </a:spcAft>
-              <a:defRPr sz="1400" b="0">
+          <a:bodyPr rtlCol="0" anchor="ctr" wrap="square" lIns="73152" rIns="73152" tIns="36576" bIns="36576"/>
+          <a:lstStyle/>
+          <a:p>
+            <a:pPr algn="l">
+              <a:spcAft>
+                <a:spcPts val="0"/>
+              </a:spcAft>
+              <a:defRPr sz="1600" b="0">
                 <a:solidFill>
                   <a:srgbClr val="FFFFFF"/>
                 </a:solidFill>
@@ -7433,35 +7707,15 @@
               </a:defRPr>
             </a:pPr>
             <a:r>
-              <a:t>cmake_minimum_required(VERSION 3.8)</a:t>
+              <a:t>ros2 run agv_vision yolo_node --ros-args \</a:t>
             </a:r>
             <a:br/>
             <a:r>
-              <a:t>project(agv_interfaces)</a:t>
+              <a:t>  -p enable_yolo:=false</a:t>
             </a:r>
             <a:br/>
             <a:r>
-              <a:t>find_package(ament_cmake REQUIRED)</a:t>
-            </a:r>
-            <a:br/>
-            <a:r>
-              <a:t>find_package(rosidl_default_generators REQUIRED)</a:t>
-            </a:r>
-            <a:br/>
-            <a:r>
-              <a:t>find_package(std_msgs REQUIRED)</a:t>
-            </a:r>
-            <a:br/>
-            <a:r>
-              <a:t>rosidl_generate_interfaces(${PROJECT_NAME} "msg/Detection.msg" "msg/DetectionArray.msg" DEPENDENCIES std_msgs)</a:t>
-            </a:r>
-            <a:br/>
-            <a:r>
-              <a:t>ament_export_dependencies(rosidl_default_runtime)</a:t>
-            </a:r>
-            <a:br/>
-            <a:r>
-              <a:t>ament_package()</a:t>
+              <a:t># ultralytics와 모델 파일 준비 뒤에만 true로 변경</a:t>
             </a:r>
           </a:p>
         </p:txBody>
@@ -7474,33 +7728,72 @@
         </p:nvSpPr>
         <p:spPr>
           <a:xfrm>
-            <a:off x="749808" y="6181344"/>
-            <a:ext cx="10789920" cy="201168"/>
-          </a:xfrm>
-          <a:prstGeom prst="rect">
-            <a:avLst/>
-          </a:prstGeom>
-          <a:noFill/>
-        </p:spPr>
-        <p:txBody>
-          <a:bodyPr wrap="square" lIns="73152" rIns="73152" tIns="36576" bIns="36576">
-            <a:spAutoFit/>
-          </a:bodyPr>
-          <a:lstStyle/>
-          <a:p>
-            <a:pPr algn="l">
-              <a:spcAft>
-                <a:spcPts val="0"/>
-              </a:spcAft>
-              <a:defRPr sz="1000" b="0">
-                <a:solidFill>
-                  <a:srgbClr val="5C6672"/>
-                </a:solidFill>
-                <a:latin typeface="Noto Sans CJK KR"/>
-              </a:defRPr>
-            </a:pPr>
-            <a:r>
-              <a:t>파일 전체 1/1 · 이 슬라이드 다음에 같은 파일의 나머지 줄이 이어집니다.</a:t>
+            <a:off x="768096" y="5468112"/>
+            <a:ext cx="1143000" cy="256032"/>
+          </a:xfrm>
+          <a:prstGeom prst="rect">
+            <a:avLst/>
+          </a:prstGeom>
+          <a:noFill/>
+        </p:spPr>
+        <p:txBody>
+          <a:bodyPr wrap="square" lIns="73152" rIns="73152" tIns="36576" bIns="36576">
+            <a:spAutoFit/>
+          </a:bodyPr>
+          <a:lstStyle/>
+          <a:p>
+            <a:pPr algn="l">
+              <a:spcAft>
+                <a:spcPts val="0"/>
+              </a:spcAft>
+              <a:defRPr sz="1800" b="1">
+                <a:solidFill>
+                  <a:srgbClr val="2A8B5A"/>
+                </a:solidFill>
+                <a:latin typeface="Noto Sans CJK KR"/>
+              </a:defRPr>
+            </a:pPr>
+            <a:r>
+              <a:t>확인</a:t>
+            </a:r>
+          </a:p>
+        </p:txBody>
+      </p:sp>
+      <p:sp>
+        <p:nvSpPr>
+          <p:cNvPr id="11" name="TextBox 10"/>
+          <p:cNvSpPr txBox="1"/>
+          <p:nvPr/>
+        </p:nvSpPr>
+        <p:spPr>
+          <a:xfrm>
+            <a:off x="768096" y="5742432"/>
+            <a:ext cx="10561320" cy="347472"/>
+          </a:xfrm>
+          <a:prstGeom prst="rect">
+            <a:avLst/>
+          </a:prstGeom>
+          <a:noFill/>
+        </p:spPr>
+        <p:txBody>
+          <a:bodyPr wrap="square" lIns="73152" rIns="73152" tIns="36576" bIns="36576">
+            <a:spAutoFit/>
+          </a:bodyPr>
+          <a:lstStyle/>
+          <a:p>
+            <a:pPr algn="l">
+              <a:spcAft>
+                <a:spcPts val="0"/>
+              </a:spcAft>
+              <a:defRPr sz="1800" b="0">
+                <a:solidFill>
+                  <a:srgbClr val="122C4E"/>
+                </a:solidFill>
+                <a:latin typeface="Noto Sans CJK KR"/>
+              </a:defRPr>
+            </a:pPr>
+            <a:r>
+              <a:t>명령의 출력에서 topic·frame·파일 이름 또는 성공 메시지를 찾으면 이 단계가 완료됩니다.</a:t>
             </a:r>
           </a:p>
         </p:txBody>
@@ -7557,7 +7850,7 @@
               </a:defRPr>
             </a:pPr>
             <a:r>
-              <a:t>파일을 새로 만들고 저장한다 (1/10)</a:t>
+              <a:t>파일을 새로 만들고 저장한다 (1/1)</a:t>
             </a:r>
           </a:p>
         </p:txBody>
@@ -7596,7 +7889,7 @@
               </a:defRPr>
             </a:pPr>
             <a:r>
-              <a:t>~/ros2_curri/agv_ws/src/agv_vision/agv_vision/yolo_node.py</a:t>
+              <a:t>~/ros2_curri/agv_ws/src/agv_interfaces/msg/Detection.msg</a:t>
             </a:r>
           </a:p>
         </p:txBody>
@@ -7732,7 +8025,7 @@
               </a:defRPr>
             </a:pPr>
             <a:r>
-              <a:t>현재 단계 6/16    |    현재 폴더 ~/ros2_curri/agv_ws    |    현재 터미널</a:t>
+              <a:t>현재 단계 3/4    |    현재 폴더 ~/ros2_curri/agv_ws    |    현재 터미널</a:t>
             </a:r>
           </a:p>
         </p:txBody>
@@ -7829,11 +8122,11 @@
               </a:defRPr>
             </a:pPr>
             <a:r>
-              <a:t>파일 생성: mkdir -p ~/ros2_curri/agv_ws/src/agv_vision/agv_vision</a:t>
+              <a:t>파일 생성: mkdir -p ~/ros2_curri/agv_ws/src/agv_interfaces/msg</a:t>
             </a:r>
             <a:br/>
             <a:r>
-              <a:t>파일 열기: nano ~/ros2_curri/agv_ws/src/agv_vision/agv_vision/yolo_node.py</a:t>
+              <a:t>파일 열기: nano ~/ros2_curri/agv_ws/src/agv_interfaces/msg/Detection.msg</a:t>
             </a:r>
           </a:p>
         </p:txBody>
@@ -7891,45 +8184,35 @@
               </a:defRPr>
             </a:pPr>
             <a:r>
-              <a:t>import rclpy</a:t>
+              <a:t>std_msgs/Header header</a:t>
             </a:r>
             <a:br/>
             <a:r>
-              <a:t>from rclpy.node import Node</a:t>
+              <a:t>string class_name</a:t>
             </a:r>
             <a:br/>
             <a:r>
-              <a:t>from rclpy.qos import qos_profile_sensor_data</a:t>
+              <a:t>float32 confidence</a:t>
             </a:r>
             <a:br/>
             <a:r>
-              <a:t>from sensor_msgs.msg import Image</a:t>
+              <a:t>int32 center_x</a:t>
             </a:r>
             <a:br/>
             <a:r>
-              <a:t>from cv_bridge import CvBridge</a:t>
+              <a:t>int32 center_y</a:t>
             </a:r>
             <a:br/>
             <a:r>
-              <a:t>from agv_interfaces.msg import Detection, DetectionArray</a:t>
+              <a:t>int32 width</a:t>
             </a:r>
             <a:br/>
             <a:r>
-              <a:t>import cv2</a:t>
+              <a:t>int32 height</a:t>
             </a:r>
             <a:br/>
-            <a:br/>
-            <a:r>
-              <a:t>class YoloNode(Node):</a:t>
-            </a:r>
-            <a:br/>
-            <a:br/>
-            <a:r>
-              <a:t>    def __init__(self):</a:t>
-            </a:r>
-            <a:br/>
-            <a:r>
-              <a:t>        super().__init__('yolo_node')</a:t>
+            <a:r>
+              <a:t>float32 estimated_distance</a:t>
             </a:r>
           </a:p>
         </p:txBody>
@@ -7968,7 +8251,7 @@
               </a:defRPr>
             </a:pPr>
             <a:r>
-              <a:t>파일 전체 1/10 · 이 슬라이드 다음에 같은 파일의 나머지 줄이 이어집니다.</a:t>
+              <a:t>파일 전체 1/1 · 이 슬라이드 다음에 같은 파일의 나머지 줄이 이어집니다.</a:t>
             </a:r>
           </a:p>
         </p:txBody>
@@ -8025,7 +8308,7 @@
               </a:defRPr>
             </a:pPr>
             <a:r>
-              <a:t>파일을 계속 작성하고 저장한다 (2/10)</a:t>
+              <a:t>파일을 새로 만들고 저장한다 (1/1)</a:t>
             </a:r>
           </a:p>
         </p:txBody>
@@ -8064,7 +8347,7 @@
               </a:defRPr>
             </a:pPr>
             <a:r>
-              <a:t>~/ros2_curri/agv_ws/src/agv_vision/agv_vision/yolo_node.py</a:t>
+              <a:t>~/ros2_curri/agv_ws/src/agv_interfaces/msg/DetectionArray.msg</a:t>
             </a:r>
           </a:p>
         </p:txBody>
@@ -8200,7 +8483,7 @@
               </a:defRPr>
             </a:pPr>
             <a:r>
-              <a:t>현재 단계 7/16    |    현재 폴더 ~/ros2_curri/agv_ws    |    현재 터미널</a:t>
+              <a:t>현재 단계 4/5    |    현재 폴더 ~/ros2_curri/agv_ws    |    현재 터미널</a:t>
             </a:r>
           </a:p>
         </p:txBody>
@@ -8297,11 +8580,11 @@
               </a:defRPr>
             </a:pPr>
             <a:r>
-              <a:t>파일 생성: mkdir -p ~/ros2_curri/agv_ws/src/agv_vision/agv_vision</a:t>
+              <a:t>파일 생성: mkdir -p ~/ros2_curri/agv_ws/src/agv_interfaces/msg</a:t>
             </a:r>
             <a:br/>
             <a:r>
-              <a:t>파일 열기: nano ~/ros2_curri/agv_ws/src/agv_vision/agv_vision/yolo_node.py</a:t>
+              <a:t>파일 열기: nano ~/ros2_curri/agv_ws/src/agv_interfaces/msg/DetectionArray.msg</a:t>
             </a:r>
           </a:p>
         </p:txBody>
@@ -8359,51 +8642,11 @@
               </a:defRPr>
             </a:pPr>
             <a:r>
-              <a:t>        self.declare_parameter('model_path', 'yolo11n.pt')</a:t>
+              <a:t>std_msgs/Header header</a:t>
             </a:r>
             <a:br/>
             <a:r>
-              <a:t>        self.declare_parameter('confidence_threshold', 0.5)</a:t>
-            </a:r>
-            <a:br/>
-            <a:r>
-              <a:t>        self.declare_parameter('enable_yolo', False)</a:t>
-            </a:r>
-            <a:br/>
-            <a:r>
-              <a:t>        self.declare_parameter('enable_red_target_fallback', True)</a:t>
-            </a:r>
-            <a:br/>
-            <a:r>
-              <a:t>        self.declare_parameter('target_width_m', 0.25)</a:t>
-            </a:r>
-            <a:br/>
-            <a:r>
-              <a:t>        self.bridge = CvBridge()</a:t>
-            </a:r>
-            <a:br/>
-            <a:r>
-              <a:t>        self.publisher = self.create_publisher(DetectionArray, '/detections', 10)</a:t>
-            </a:r>
-            <a:br/>
-            <a:r>
-              <a:t>        self.debug_publisher = self.create_publisher(Image, '/vision/debug_image',</a:t>
-            </a:r>
-            <a:br/>
-            <a:r>
-              <a:t>            qos_profile_sensor_data)</a:t>
-            </a:r>
-            <a:br/>
-            <a:r>
-              <a:t>        self.create_subscription(Image, '/camera/image_raw', self.callback,</a:t>
-            </a:r>
-            <a:br/>
-            <a:r>
-              <a:t>            qos_profile_sensor_data)</a:t>
-            </a:r>
-            <a:br/>
-            <a:r>
-              <a:t>        self.model = None</a:t>
+              <a:t>Detection[] detections</a:t>
             </a:r>
           </a:p>
         </p:txBody>
@@ -8442,7 +8685,7 @@
               </a:defRPr>
             </a:pPr>
             <a:r>
-              <a:t>파일 전체 2/10 · 이 슬라이드 다음에 같은 파일의 나머지 줄이 이어집니다.</a:t>
+              <a:t>파일 전체 1/1 · 이 슬라이드 다음에 같은 파일의 나머지 줄이 이어집니다.</a:t>
             </a:r>
           </a:p>
         </p:txBody>
@@ -8499,7 +8742,7 @@
               </a:defRPr>
             </a:pPr>
             <a:r>
-              <a:t>파일을 계속 작성하고 저장한다 (3/10)</a:t>
+              <a:t>파일을 새로 만들고 저장한다 (1/1)</a:t>
             </a:r>
           </a:p>
         </p:txBody>
@@ -8538,7 +8781,7 @@
               </a:defRPr>
             </a:pPr>
             <a:r>
-              <a:t>~/ros2_curri/agv_ws/src/agv_vision/agv_vision/yolo_node.py</a:t>
+              <a:t>~/ros2_curri/agv_ws/src/agv_interfaces/CMakeLists.txt</a:t>
             </a:r>
           </a:p>
         </p:txBody>
@@ -8674,7 +8917,7 @@
               </a:defRPr>
             </a:pPr>
             <a:r>
-              <a:t>현재 단계 8/16    |    현재 폴더 ~/ros2_curri/agv_ws    |    현재 터미널</a:t>
+              <a:t>현재 단계 5/6    |    현재 폴더 ~/ros2_curri/agv_ws    |    현재 터미널</a:t>
             </a:r>
           </a:p>
         </p:txBody>
@@ -8771,11 +9014,11 @@
               </a:defRPr>
             </a:pPr>
             <a:r>
-              <a:t>파일 생성: mkdir -p ~/ros2_curri/agv_ws/src/agv_vision/agv_vision</a:t>
+              <a:t>파일 생성: mkdir -p ~/ros2_curri/agv_ws/src/agv_interfaces</a:t>
             </a:r>
             <a:br/>
             <a:r>
-              <a:t>파일 열기: nano ~/ros2_curri/agv_ws/src/agv_vision/agv_vision/yolo_node.py</a:t>
+              <a:t>파일 열기: nano ~/ros2_curri/agv_ws/src/agv_interfaces/CMakeLists.txt</a:t>
             </a:r>
           </a:p>
         </p:txBody>
@@ -8833,48 +9076,35 @@
               </a:defRPr>
             </a:pPr>
             <a:r>
-              <a:t>        if self.get_parameter('enable_yolo').value:</a:t>
+              <a:t>cmake_minimum_required(VERSION 3.8)</a:t>
             </a:r>
             <a:br/>
             <a:r>
-              <a:t>            try:</a:t>
+              <a:t>project(agv_interfaces)</a:t>
             </a:r>
             <a:br/>
             <a:r>
-              <a:t>                from ultralytics import YOLO</a:t>
+              <a:t>find_package(ament_cmake REQUIRED)</a:t>
             </a:r>
             <a:br/>
             <a:r>
-              <a:t>                self.model = YOLO(self.get_parameter('model_path').value)</a:t>
+              <a:t>find_package(rosidl_default_generators REQUIRED)</a:t>
             </a:r>
             <a:br/>
             <a:r>
-              <a:t>                self.get_logger().info('YOLO model loaded')</a:t>
+              <a:t>find_package(std_msgs REQUIRED)</a:t>
             </a:r>
             <a:br/>
             <a:r>
-              <a:t>            except ImportError:</a:t>
+              <a:t>rosidl_generate_interfaces(${PROJECT_NAME} "msg/Detection.msg" "msg/DetectionArray.msg" DEPENDENCIES std_msgs)</a:t>
             </a:r>
             <a:br/>
             <a:r>
-              <a:t>                self.get_logger().error('ultralytics is not installed: follow M17 before enable_yolo:=true')</a:t>
+              <a:t>ament_export_dependencies(rosidl_default_runtime)</a:t>
             </a:r>
             <a:br/>
-            <a:br/>
-            <a:r>
-              <a:t>    def make_detection(self, header, class_name, confidence, x1, y1, x2, y2, image_width):</a:t>
-            </a:r>
-            <a:br/>
-            <a:r>
-              <a:t>        """Estimate distance with a pinhole model for the fixed 60-degree course camera."""</a:t>
-            </a:r>
-            <a:br/>
-            <a:r>
-              <a:t>        width = max(1, x2 - x1)</a:t>
-            </a:r>
-            <a:br/>
-            <a:r>
-              <a:t>        focal_px = image_width / (2.0 * 0.57735)</a:t>
+            <a:r>
+              <a:t>ament_package()</a:t>
             </a:r>
           </a:p>
         </p:txBody>
@@ -8913,7 +9143,7 @@
               </a:defRPr>
             </a:pPr>
             <a:r>
-              <a:t>파일 전체 3/10 · 이 슬라이드 다음에 같은 파일의 나머지 줄이 이어집니다.</a:t>
+              <a:t>파일 전체 1/1 · 이 슬라이드 다음에 같은 파일의 나머지 줄이 이어집니다.</a:t>
             </a:r>
           </a:p>
         </p:txBody>
@@ -8970,7 +9200,7 @@
               </a:defRPr>
             </a:pPr>
             <a:r>
-              <a:t>파일을 계속 작성하고 저장한다 (4/10)</a:t>
+              <a:t>파일을 새로 만들고 저장한다 (1/10)</a:t>
             </a:r>
           </a:p>
         </p:txBody>
@@ -9145,7 +9375,7 @@
               </a:defRPr>
             </a:pPr>
             <a:r>
-              <a:t>현재 단계 9/16    |    현재 폴더 ~/ros2_curri/agv_ws    |    현재 터미널</a:t>
+              <a:t>현재 단계 6/16    |    현재 폴더 ~/ros2_curri/agv_ws    |    현재 터미널</a:t>
             </a:r>
           </a:p>
         </p:txBody>
@@ -9304,45 +9534,45 @@
               </a:defRPr>
             </a:pPr>
             <a:r>
-              <a:t>        distance = float(self.get_parameter('target_width_m').value) * focal_px / width</a:t>
+              <a:t>import rclpy</a:t>
             </a:r>
             <a:br/>
             <a:r>
-              <a:t>        return Detection(header=header, class_name=class_name,</a:t>
+              <a:t>from rclpy.node import Node</a:t>
             </a:r>
             <a:br/>
             <a:r>
-              <a:t>            confidence=float(confidence), center_x=(x1 + x2) // 2,</a:t>
+              <a:t>from rclpy.qos import qos_profile_sensor_data</a:t>
             </a:r>
             <a:br/>
             <a:r>
-              <a:t>            center_y=(y1 + y2) // 2, width=width, height=max(1, y2 - y1),</a:t>
+              <a:t>from sensor_msgs.msg import Image</a:t>
             </a:r>
             <a:br/>
             <a:r>
-              <a:t>            estimated_distance=distance)</a:t>
+              <a:t>from cv_bridge import CvBridge</a:t>
+            </a:r>
+            <a:br/>
+            <a:r>
+              <a:t>from agv_interfaces.msg import Detection, DetectionArray</a:t>
+            </a:r>
+            <a:br/>
+            <a:r>
+              <a:t>import cv2</a:t>
             </a:r>
             <a:br/>
             <a:br/>
             <a:r>
-              <a:t>    def red_target_detection(self, image, header):</a:t>
-            </a:r>
-            <a:br/>
-            <a:r>
-              <a:t>        """Dependency-free fallback for the red target placed in warehouse.sdf.</a:t>
+              <a:t>class YoloNode(Node):</a:t>
             </a:r>
             <a:br/>
             <a:br/>
             <a:r>
-              <a:t>        This is deliberately labelled as a fallback in the debug image.  It keeps</a:t>
+              <a:t>    def __init__(self):</a:t>
             </a:r>
             <a:br/>
             <a:r>
-              <a:t>        M17--M22 runnable before a learner downloads a YOLO model, while the same</a:t>
-            </a:r>
-            <a:br/>
-            <a:r>
-              <a:t>        Detection message and mission interface are used by real YOLO inference.</a:t>
+              <a:t>        super().__init__('yolo_node')</a:t>
             </a:r>
           </a:p>
         </p:txBody>
@@ -9381,7 +9611,7 @@
               </a:defRPr>
             </a:pPr>
             <a:r>
-              <a:t>파일 전체 4/10 · 이 슬라이드 다음에 같은 파일의 나머지 줄이 이어집니다.</a:t>
+              <a:t>파일 전체 1/10 · 이 슬라이드 다음에 같은 파일의 나머지 줄이 이어집니다.</a:t>
             </a:r>
           </a:p>
         </p:txBody>
@@ -9438,7 +9668,7 @@
               </a:defRPr>
             </a:pPr>
             <a:r>
-              <a:t>파일을 계속 작성하고 저장한다 (5/10)</a:t>
+              <a:t>파일을 계속 작성하고 저장한다 (2/10)</a:t>
             </a:r>
           </a:p>
         </p:txBody>
@@ -9613,7 +9843,7 @@
               </a:defRPr>
             </a:pPr>
             <a:r>
-              <a:t>현재 단계 10/16    |    현재 폴더 ~/ros2_curri/agv_ws    |    현재 터미널</a:t>
+              <a:t>현재 단계 7/16    |    현재 폴더 ~/ros2_curri/agv_ws    |    현재 터미널</a:t>
             </a:r>
           </a:p>
         </p:txBody>
@@ -9772,51 +10002,51 @@
               </a:defRPr>
             </a:pPr>
             <a:r>
-              <a:t>        """</a:t>
+              <a:t>        self.declare_parameter('model_path', 'yolo11n.pt')</a:t>
             </a:r>
             <a:br/>
             <a:r>
-              <a:t>        hsv = cv2.cvtColor(image, cv2.COLOR_BGR2HSV)</a:t>
+              <a:t>        self.declare_parameter('confidence_threshold', 0.5)</a:t>
             </a:r>
             <a:br/>
             <a:r>
-              <a:t>        lower_red = cv2.inRange(hsv, (0, 90, 70), (12, 255, 255))</a:t>
+              <a:t>        self.declare_parameter('enable_yolo', False)</a:t>
             </a:r>
             <a:br/>
             <a:r>
-              <a:t>        upper_red = cv2.inRange(hsv, (165, 90, 70), (179, 255, 255))</a:t>
+              <a:t>        self.declare_parameter('enable_red_target_fallback', True)</a:t>
             </a:r>
             <a:br/>
             <a:r>
-              <a:t>        mask = cv2.bitwise_or(lower_red, upper_red)</a:t>
+              <a:t>        self.declare_parameter('target_width_m', 0.25)</a:t>
             </a:r>
             <a:br/>
             <a:r>
-              <a:t>        contours, _ = cv2.findContours(mask, cv2.RETR_EXTERNAL, cv2.CHAIN_APPROX_SIMPLE)</a:t>
+              <a:t>        self.bridge = CvBridge()</a:t>
             </a:r>
             <a:br/>
             <a:r>
-              <a:t>        if not contours:</a:t>
+              <a:t>        self.publisher = self.create_publisher(DetectionArray, '/detections', 10)</a:t>
             </a:r>
             <a:br/>
             <a:r>
-              <a:t>            return None</a:t>
+              <a:t>        self.debug_publisher = self.create_publisher(Image, '/vision/debug_image',</a:t>
             </a:r>
             <a:br/>
             <a:r>
-              <a:t>        contour = max(contours, key=cv2.contourArea)</a:t>
+              <a:t>            qos_profile_sensor_data)</a:t>
             </a:r>
             <a:br/>
             <a:r>
-              <a:t>        if cv2.contourArea(contour) &lt; 80:</a:t>
+              <a:t>        self.create_subscription(Image, '/camera/image_raw', self.callback,</a:t>
             </a:r>
             <a:br/>
             <a:r>
-              <a:t>            return None</a:t>
+              <a:t>            qos_profile_sensor_data)</a:t>
             </a:r>
             <a:br/>
             <a:r>
-              <a:t>        x, y, width, height = cv2.boundingRect(contour)</a:t>
+              <a:t>        self.model = None</a:t>
             </a:r>
           </a:p>
         </p:txBody>
@@ -9855,7 +10085,7 @@
               </a:defRPr>
             </a:pPr>
             <a:r>
-              <a:t>파일 전체 5/10 · 이 슬라이드 다음에 같은 파일의 나머지 줄이 이어집니다.</a:t>
+              <a:t>파일 전체 2/10 · 이 슬라이드 다음에 같은 파일의 나머지 줄이 이어집니다.</a:t>
             </a:r>
           </a:p>
         </p:txBody>
@@ -9912,7 +10142,7 @@
               </a:defRPr>
             </a:pPr>
             <a:r>
-              <a:t>파일을 계속 작성하고 저장한다 (6/10)</a:t>
+              <a:t>파일을 계속 작성하고 저장한다 (3/10)</a:t>
             </a:r>
           </a:p>
         </p:txBody>
@@ -10087,7 +10317,7 @@
               </a:defRPr>
             </a:pPr>
             <a:r>
-              <a:t>현재 단계 11/16    |    현재 폴더 ~/ros2_curri/agv_ws    |    현재 터미널</a:t>
+              <a:t>현재 단계 8/16    |    현재 폴더 ~/ros2_curri/agv_ws    |    현재 터미널</a:t>
             </a:r>
           </a:p>
         </p:txBody>
@@ -10246,48 +10476,48 @@
               </a:defRPr>
             </a:pPr>
             <a:r>
-              <a:t>        return self.make_detection(header, 'red_target_fallback', 0.9, x, y, x + width,</a:t>
+              <a:t>        if self.get_parameter('enable_yolo').value:</a:t>
             </a:r>
             <a:br/>
             <a:r>
-              <a:t>            y + height, image.shape[1])</a:t>
+              <a:t>            try:</a:t>
+            </a:r>
+            <a:br/>
+            <a:r>
+              <a:t>                from ultralytics import YOLO</a:t>
+            </a:r>
+            <a:br/>
+            <a:r>
+              <a:t>                self.model = YOLO(self.get_parameter('model_path').value)</a:t>
+            </a:r>
+            <a:br/>
+            <a:r>
+              <a:t>                self.get_logger().info('YOLO model loaded')</a:t>
+            </a:r>
+            <a:br/>
+            <a:r>
+              <a:t>            except ImportError:</a:t>
+            </a:r>
+            <a:br/>
+            <a:r>
+              <a:t>                self.get_logger().error('ultralytics is not installed: follow M17 before enable_yolo:=true')</a:t>
             </a:r>
             <a:br/>
             <a:br/>
             <a:r>
-              <a:t>    def callback(self, image_message):</a:t>
+              <a:t>    def make_detection(self, header, class_name, confidence, x1, y1, x2, y2, image_width):</a:t>
             </a:r>
             <a:br/>
             <a:r>
-              <a:t>        image = self.bridge.imgmsg_to_cv2(image_message, desired_encoding='bgr8')</a:t>
+              <a:t>        """Estimate distance with a pinhole model for the fixed 60-degree course camera."""</a:t>
             </a:r>
             <a:br/>
             <a:r>
-              <a:t>        debug = image.copy()</a:t>
+              <a:t>        width = max(1, x2 - x1)</a:t>
             </a:r>
             <a:br/>
             <a:r>
-              <a:t>        output = DetectionArray(header=image_message.header)</a:t>
-            </a:r>
-            <a:br/>
-            <a:r>
-              <a:t>        label = 'no detection'</a:t>
-            </a:r>
-            <a:br/>
-            <a:r>
-              <a:t>        if self.model is not None:</a:t>
-            </a:r>
-            <a:br/>
-            <a:r>
-              <a:t>            result = self.model(image, verbose=False)[0]</a:t>
-            </a:r>
-            <a:br/>
-            <a:r>
-              <a:t>            threshold = self.get_parameter('confidence_threshold').value</a:t>
-            </a:r>
-            <a:br/>
-            <a:r>
-              <a:t>            for box in result.boxes:</a:t>
+              <a:t>        focal_px = image_width / (2.0 * 0.57735)</a:t>
             </a:r>
           </a:p>
         </p:txBody>
@@ -10326,7 +10556,7 @@
               </a:defRPr>
             </a:pPr>
             <a:r>
-              <a:t>파일 전체 6/10 · 이 슬라이드 다음에 같은 파일의 나머지 줄이 이어집니다.</a:t>
+              <a:t>파일 전체 3/10 · 이 슬라이드 다음에 같은 파일의 나머지 줄이 이어집니다.</a:t>
             </a:r>
           </a:p>
         </p:txBody>
@@ -10383,7 +10613,7 @@
               </a:defRPr>
             </a:pPr>
             <a:r>
-              <a:t>파일을 계속 작성하고 저장한다 (7/10)</a:t>
+              <a:t>파일을 계속 작성하고 저장한다 (4/10)</a:t>
             </a:r>
           </a:p>
         </p:txBody>
@@ -10558,7 +10788,7 @@
               </a:defRPr>
             </a:pPr>
             <a:r>
-              <a:t>현재 단계 12/16    |    현재 폴더 ~/ros2_curri/agv_ws    |    현재 터미널</a:t>
+              <a:t>현재 단계 9/16    |    현재 폴더 ~/ros2_curri/agv_ws    |    현재 터미널</a:t>
             </a:r>
           </a:p>
         </p:txBody>
@@ -10717,51 +10947,45 @@
               </a:defRPr>
             </a:pPr>
             <a:r>
-              <a:t>                confidence = float(box.conf[0])</a:t>
+              <a:t>        distance = float(self.get_parameter('target_width_m').value) * focal_px / width</a:t>
             </a:r>
             <a:br/>
             <a:r>
-              <a:t>                if confidence &lt; threshold:</a:t>
+              <a:t>        return Detection(header=header, class_name=class_name,</a:t>
             </a:r>
             <a:br/>
             <a:r>
-              <a:t>                    continue</a:t>
+              <a:t>            confidence=float(confidence), center_x=(x1 + x2) // 2,</a:t>
             </a:r>
             <a:br/>
             <a:r>
-              <a:t>                x1, y1, x2, y2 = [int(value) for value in box.xyxy[0].tolist()]</a:t>
+              <a:t>            center_y=(y1 + y2) // 2, width=width, height=max(1, y2 - y1),</a:t>
             </a:r>
             <a:br/>
             <a:r>
-              <a:t>                detection = self.make_detection(image_message.header,</a:t>
+              <a:t>            estimated_distance=distance)</a:t>
             </a:r>
             <a:br/>
-            <a:r>
-              <a:t>                    result.names[int(box.cls[0])], confidence, x1, y1, x2, y2,</a:t>
-            </a:r>
             <a:br/>
             <a:r>
-              <a:t>                    image.shape[1])</a:t>
+              <a:t>    def red_target_detection(self, image, header):</a:t>
             </a:r>
             <a:br/>
             <a:r>
-              <a:t>                output.detections.append(detection)</a:t>
+              <a:t>        """Dependency-free fallback for the red target placed in warehouse.sdf.</a:t>
             </a:r>
             <a:br/>
-            <a:r>
-              <a:t>                cv2.rectangle(debug, (x1, y1), (x2, y2), (30, 220, 30), 2)</a:t>
-            </a:r>
             <a:br/>
             <a:r>
-              <a:t>                label = f'YOLO {detection.class_name} {confidence:.2f}'</a:t>
+              <a:t>        This is deliberately labelled as a fallback in the debug image.  It keeps</a:t>
             </a:r>
             <a:br/>
             <a:r>
-              <a:t>        elif self.get_parameter('enable_red_target_fallback').value:</a:t>
+              <a:t>        M17--M22 runnable before a learner downloads a YOLO model, while the same</a:t>
             </a:r>
             <a:br/>
             <a:r>
-              <a:t>            detection = self.red_target_detection(image, image_message.header)</a:t>
+              <a:t>        Detection message and mission interface are used by real YOLO inference.</a:t>
             </a:r>
           </a:p>
         </p:txBody>
@@ -10800,7 +11024,7 @@
               </a:defRPr>
             </a:pPr>
             <a:r>
-              <a:t>파일 전체 7/10 · 이 슬라이드 다음에 같은 파일의 나머지 줄이 이어집니다.</a:t>
+              <a:t>파일 전체 4/10 · 이 슬라이드 다음에 같은 파일의 나머지 줄이 이어집니다.</a:t>
             </a:r>
           </a:p>
         </p:txBody>
@@ -10857,7 +11081,7 @@
               </a:defRPr>
             </a:pPr>
             <a:r>
-              <a:t>파일을 계속 작성하고 저장한다 (8/10)</a:t>
+              <a:t>파일을 계속 작성하고 저장한다 (5/10)</a:t>
             </a:r>
           </a:p>
         </p:txBody>
@@ -11032,7 +11256,7 @@
               </a:defRPr>
             </a:pPr>
             <a:r>
-              <a:t>현재 단계 13/16    |    현재 폴더 ~/ros2_curri/agv_ws    |    현재 터미널</a:t>
+              <a:t>현재 단계 10/16    |    현재 폴더 ~/ros2_curri/agv_ws    |    현재 터미널</a:t>
             </a:r>
           </a:p>
         </p:txBody>
@@ -11191,51 +11415,51 @@
               </a:defRPr>
             </a:pPr>
             <a:r>
-              <a:t>            if detection is not None:</a:t>
+              <a:t>        """</a:t>
             </a:r>
             <a:br/>
             <a:r>
-              <a:t>                output.detections.append(detection)</a:t>
+              <a:t>        hsv = cv2.cvtColor(image, cv2.COLOR_BGR2HSV)</a:t>
             </a:r>
             <a:br/>
             <a:r>
-              <a:t>                x1 = detection.center_x - detection.width // 2</a:t>
+              <a:t>        lower_red = cv2.inRange(hsv, (0, 90, 70), (12, 255, 255))</a:t>
             </a:r>
             <a:br/>
             <a:r>
-              <a:t>                y1 = detection.center_y - detection.height // 2</a:t>
+              <a:t>        upper_red = cv2.inRange(hsv, (165, 90, 70), (179, 255, 255))</a:t>
             </a:r>
             <a:br/>
             <a:r>
-              <a:t>                x2, y2 = (x1 + detection.width, y1 + detection.height)</a:t>
+              <a:t>        mask = cv2.bitwise_or(lower_red, upper_red)</a:t>
             </a:r>
             <a:br/>
             <a:r>
-              <a:t>                cv2.rectangle(debug, (x1, y1), (x2, y2), (0, 215, 255), 2)</a:t>
+              <a:t>        contours, _ = cv2.findContours(mask, cv2.RETR_EXTERNAL, cv2.CHAIN_APPROX_SIMPLE)</a:t>
             </a:r>
             <a:br/>
             <a:r>
-              <a:t>                label = f'course fallback target {detection.estimated_distance:.2f} m'</a:t>
+              <a:t>        if not contours:</a:t>
             </a:r>
             <a:br/>
             <a:r>
-              <a:t>            else:</a:t>
+              <a:t>            return None</a:t>
             </a:r>
             <a:br/>
             <a:r>
-              <a:t>                label = 'course fallback: red target not visible'</a:t>
+              <a:t>        contour = max(contours, key=cv2.contourArea)</a:t>
             </a:r>
             <a:br/>
             <a:r>
-              <a:t>        cv2.putText(debug, label, (12, 28), cv2.FONT_HERSHEY_SIMPLEX, 0.65, (255, 255,</a:t>
+              <a:t>        if cv2.contourArea(contour) &lt; 80:</a:t>
             </a:r>
             <a:br/>
             <a:r>
-              <a:t>            255), 2)</a:t>
+              <a:t>            return None</a:t>
             </a:r>
             <a:br/>
             <a:r>
-              <a:t>        self.publisher.publish(output)</a:t>
+              <a:t>        x, y, width, height = cv2.boundingRect(contour)</a:t>
             </a:r>
           </a:p>
         </p:txBody>
@@ -11274,7 +11498,7 @@
               </a:defRPr>
             </a:pPr>
             <a:r>
-              <a:t>파일 전체 8/10 · 이 슬라이드 다음에 같은 파일의 나머지 줄이 이어집니다.</a:t>
+              <a:t>파일 전체 5/10 · 이 슬라이드 다음에 같은 파일의 나머지 줄이 이어집니다.</a:t>
             </a:r>
           </a:p>
         </p:txBody>
@@ -11792,7 +12016,7 @@
               </a:defRPr>
             </a:pPr>
             <a:r>
-              <a:t>파일을 계속 작성하고 저장한다 (9/10)</a:t>
+              <a:t>파일을 계속 작성하고 저장한다 (6/10)</a:t>
             </a:r>
           </a:p>
         </p:txBody>
@@ -11967,7 +12191,7 @@
               </a:defRPr>
             </a:pPr>
             <a:r>
-              <a:t>현재 단계 14/16    |    현재 폴더 ~/ros2_curri/agv_ws    |    현재 터미널</a:t>
+              <a:t>현재 단계 11/16    |    현재 폴더 ~/ros2_curri/agv_ws    |    현재 터미널</a:t>
             </a:r>
           </a:p>
         </p:txBody>
@@ -12126,48 +12350,48 @@
               </a:defRPr>
             </a:pPr>
             <a:r>
-              <a:t>        self.debug_publisher.publish(self.bridge.cv2_to_imgmsg(debug, encoding='bgr8'))</a:t>
+              <a:t>        return self.make_detection(header, 'red_target_fallback', 0.9, x, y, x + width,</a:t>
+            </a:r>
+            <a:br/>
+            <a:r>
+              <a:t>            y + height, image.shape[1])</a:t>
             </a:r>
             <a:br/>
             <a:br/>
             <a:r>
-              <a:t>def main():</a:t>
+              <a:t>    def callback(self, image_message):</a:t>
             </a:r>
             <a:br/>
             <a:r>
-              <a:t>    rclpy.init()</a:t>
+              <a:t>        image = self.bridge.imgmsg_to_cv2(image_message, desired_encoding='bgr8')</a:t>
             </a:r>
             <a:br/>
             <a:r>
-              <a:t>    node = YoloNode()</a:t>
+              <a:t>        debug = image.copy()</a:t>
             </a:r>
             <a:br/>
             <a:r>
-              <a:t>    try:</a:t>
+              <a:t>        output = DetectionArray(header=image_message.header)</a:t>
             </a:r>
             <a:br/>
             <a:r>
-              <a:t>        rclpy.spin(node)</a:t>
+              <a:t>        label = 'no detection'</a:t>
             </a:r>
             <a:br/>
             <a:r>
-              <a:t>    except KeyboardInterrupt:</a:t>
+              <a:t>        if self.model is not None:</a:t>
             </a:r>
             <a:br/>
             <a:r>
-              <a:t>        pass</a:t>
+              <a:t>            result = self.model(image, verbose=False)[0]</a:t>
             </a:r>
             <a:br/>
             <a:r>
-              <a:t>    finally:</a:t>
+              <a:t>            threshold = self.get_parameter('confidence_threshold').value</a:t>
             </a:r>
             <a:br/>
             <a:r>
-              <a:t>        node.destroy_node()</a:t>
-            </a:r>
-            <a:br/>
-            <a:r>
-              <a:t>        if rclpy.ok():</a:t>
+              <a:t>            for box in result.boxes:</a:t>
             </a:r>
           </a:p>
         </p:txBody>
@@ -12206,7 +12430,7 @@
               </a:defRPr>
             </a:pPr>
             <a:r>
-              <a:t>파일 전체 9/10 · 이 슬라이드 다음에 같은 파일의 나머지 줄이 이어집니다.</a:t>
+              <a:t>파일 전체 6/10 · 이 슬라이드 다음에 같은 파일의 나머지 줄이 이어집니다.</a:t>
             </a:r>
           </a:p>
         </p:txBody>
@@ -12263,7 +12487,7 @@
               </a:defRPr>
             </a:pPr>
             <a:r>
-              <a:t>파일을 계속 작성하고 저장한다 (10/10)</a:t>
+              <a:t>파일을 계속 작성하고 저장한다 (7/10)</a:t>
             </a:r>
           </a:p>
         </p:txBody>
@@ -12438,7 +12662,7 @@
               </a:defRPr>
             </a:pPr>
             <a:r>
-              <a:t>현재 단계 15/16    |    현재 폴더 ~/ros2_curri/agv_ws    |    현재 터미널</a:t>
+              <a:t>현재 단계 12/16    |    현재 폴더 ~/ros2_curri/agv_ws    |    현재 터미널</a:t>
             </a:r>
           </a:p>
         </p:txBody>
@@ -12597,7 +12821,51 @@
               </a:defRPr>
             </a:pPr>
             <a:r>
-              <a:t>            rclpy.shutdown()</a:t>
+              <a:t>                confidence = float(box.conf[0])</a:t>
+            </a:r>
+            <a:br/>
+            <a:r>
+              <a:t>                if confidence &lt; threshold:</a:t>
+            </a:r>
+            <a:br/>
+            <a:r>
+              <a:t>                    continue</a:t>
+            </a:r>
+            <a:br/>
+            <a:r>
+              <a:t>                x1, y1, x2, y2 = [int(value) for value in box.xyxy[0].tolist()]</a:t>
+            </a:r>
+            <a:br/>
+            <a:r>
+              <a:t>                detection = self.make_detection(image_message.header,</a:t>
+            </a:r>
+            <a:br/>
+            <a:r>
+              <a:t>                    result.names[int(box.cls[0])], confidence, x1, y1, x2, y2,</a:t>
+            </a:r>
+            <a:br/>
+            <a:r>
+              <a:t>                    image.shape[1])</a:t>
+            </a:r>
+            <a:br/>
+            <a:r>
+              <a:t>                output.detections.append(detection)</a:t>
+            </a:r>
+            <a:br/>
+            <a:r>
+              <a:t>                cv2.rectangle(debug, (x1, y1), (x2, y2), (30, 220, 30), 2)</a:t>
+            </a:r>
+            <a:br/>
+            <a:r>
+              <a:t>                label = f'YOLO {detection.class_name} {confidence:.2f}'</a:t>
+            </a:r>
+            <a:br/>
+            <a:r>
+              <a:t>        elif self.get_parameter('enable_red_target_fallback').value:</a:t>
+            </a:r>
+            <a:br/>
+            <a:r>
+              <a:t>            detection = self.red_target_detection(image, image_message.header)</a:t>
             </a:r>
           </a:p>
         </p:txBody>
@@ -12636,7 +12904,7 @@
               </a:defRPr>
             </a:pPr>
             <a:r>
-              <a:t>파일 전체 10/10 · 이 슬라이드 다음에 같은 파일의 나머지 줄이 이어집니다.</a:t>
+              <a:t>파일 전체 7/10 · 이 슬라이드 다음에 같은 파일의 나머지 줄이 이어집니다.</a:t>
             </a:r>
           </a:p>
         </p:txBody>
@@ -12693,7 +12961,7 @@
               </a:defRPr>
             </a:pPr>
             <a:r>
-              <a:t>파일을 새로 만들고 저장한다 (1/1)</a:t>
+              <a:t>파일을 계속 작성하고 저장한다 (8/10)</a:t>
             </a:r>
           </a:p>
         </p:txBody>
@@ -12732,7 +13000,7 @@
               </a:defRPr>
             </a:pPr>
             <a:r>
-              <a:t>~/ros2_curri/agv_ws/src/agv_bringup/config/vision.yaml</a:t>
+              <a:t>~/ros2_curri/agv_ws/src/agv_vision/agv_vision/yolo_node.py</a:t>
             </a:r>
           </a:p>
         </p:txBody>
@@ -12868,7 +13136,7 @@
               </a:defRPr>
             </a:pPr>
             <a:r>
-              <a:t>현재 단계 16/17    |    현재 폴더 ~/ros2_curri/agv_ws    |    현재 터미널</a:t>
+              <a:t>현재 단계 13/16    |    현재 폴더 ~/ros2_curri/agv_ws    |    현재 터미널</a:t>
             </a:r>
           </a:p>
         </p:txBody>
@@ -12965,11 +13233,11 @@
               </a:defRPr>
             </a:pPr>
             <a:r>
-              <a:t>파일 생성: mkdir -p ~/ros2_curri/agv_ws/src/agv_bringup/config</a:t>
+              <a:t>파일 생성: mkdir -p ~/ros2_curri/agv_ws/src/agv_vision/agv_vision</a:t>
             </a:r>
             <a:br/>
             <a:r>
-              <a:t>파일 열기: nano ~/ros2_curri/agv_ws/src/agv_bringup/config/vision.yaml</a:t>
+              <a:t>파일 열기: nano ~/ros2_curri/agv_ws/src/agv_vision/agv_vision/yolo_node.py</a:t>
             </a:r>
           </a:p>
         </p:txBody>
@@ -13027,31 +13295,51 @@
               </a:defRPr>
             </a:pPr>
             <a:r>
-              <a:t>yolo_node:</a:t>
+              <a:t>            if detection is not None:</a:t>
             </a:r>
             <a:br/>
             <a:r>
-              <a:t>  ros__parameters:</a:t>
+              <a:t>                output.detections.append(detection)</a:t>
             </a:r>
             <a:br/>
             <a:r>
-              <a:t>    use_sim_time: true</a:t>
+              <a:t>                x1 = detection.center_x - detection.width // 2</a:t>
             </a:r>
             <a:br/>
             <a:r>
-              <a:t>    enable_yolo: false</a:t>
+              <a:t>                y1 = detection.center_y - detection.height // 2</a:t>
             </a:r>
             <a:br/>
             <a:r>
-              <a:t>    enable_red_target_fallback: true</a:t>
+              <a:t>                x2, y2 = (x1 + detection.width, y1 + detection.height)</a:t>
             </a:r>
             <a:br/>
             <a:r>
-              <a:t>    model_path: yolo11n.pt</a:t>
+              <a:t>                cv2.rectangle(debug, (x1, y1), (x2, y2), (0, 215, 255), 2)</a:t>
             </a:r>
             <a:br/>
             <a:r>
-              <a:t>    confidence_threshold: 0.50</a:t>
+              <a:t>                label = f'course fallback target {detection.estimated_distance:.2f} m'</a:t>
+            </a:r>
+            <a:br/>
+            <a:r>
+              <a:t>            else:</a:t>
+            </a:r>
+            <a:br/>
+            <a:r>
+              <a:t>                label = 'course fallback: red target not visible'</a:t>
+            </a:r>
+            <a:br/>
+            <a:r>
+              <a:t>        cv2.putText(debug, label, (12, 28), cv2.FONT_HERSHEY_SIMPLEX, 0.65, (255, 255,</a:t>
+            </a:r>
+            <a:br/>
+            <a:r>
+              <a:t>            255), 2)</a:t>
+            </a:r>
+            <a:br/>
+            <a:r>
+              <a:t>        self.publisher.publish(output)</a:t>
             </a:r>
           </a:p>
         </p:txBody>
@@ -13090,7 +13378,7 @@
               </a:defRPr>
             </a:pPr>
             <a:r>
-              <a:t>파일 전체 1/1 · 이 슬라이드 다음에 같은 파일의 나머지 줄이 이어집니다.</a:t>
+              <a:t>파일 전체 8/10 · 이 슬라이드 다음에 같은 파일의 나머지 줄이 이어집니다.</a:t>
             </a:r>
           </a:p>
         </p:txBody>
@@ -13147,7 +13435,7 @@
               </a:defRPr>
             </a:pPr>
             <a:r>
-              <a:t>파일을 새로 만들고 저장한다 (1/1)</a:t>
+              <a:t>파일을 계속 작성하고 저장한다 (9/10)</a:t>
             </a:r>
           </a:p>
         </p:txBody>
@@ -13186,7 +13474,7 @@
               </a:defRPr>
             </a:pPr>
             <a:r>
-              <a:t>~/ros2_curri/agv_ws/src/agv_vision/setup.py</a:t>
+              <a:t>~/ros2_curri/agv_ws/src/agv_vision/agv_vision/yolo_node.py</a:t>
             </a:r>
           </a:p>
         </p:txBody>
@@ -13322,7 +13610,7 @@
               </a:defRPr>
             </a:pPr>
             <a:r>
-              <a:t>현재 단계 17/18    |    현재 폴더 ~/ros2_curri/agv_ws    |    현재 터미널</a:t>
+              <a:t>현재 단계 14/16    |    현재 폴더 ~/ros2_curri/agv_ws    |    현재 터미널</a:t>
             </a:r>
           </a:p>
         </p:txBody>
@@ -13419,11 +13707,11 @@
               </a:defRPr>
             </a:pPr>
             <a:r>
-              <a:t>파일 생성: mkdir -p ~/ros2_curri/agv_ws/src/agv_vision</a:t>
+              <a:t>파일 생성: mkdir -p ~/ros2_curri/agv_ws/src/agv_vision/agv_vision</a:t>
             </a:r>
             <a:br/>
             <a:r>
-              <a:t>파일 열기: nano ~/ros2_curri/agv_ws/src/agv_vision/setup.py</a:t>
+              <a:t>파일 열기: nano ~/ros2_curri/agv_ws/src/agv_vision/agv_vision/yolo_node.py</a:t>
             </a:r>
           </a:p>
         </p:txBody>
@@ -13481,35 +13769,48 @@
               </a:defRPr>
             </a:pPr>
             <a:r>
-              <a:t>from setuptools import find_packages, setup</a:t>
+              <a:t>        self.debug_publisher.publish(self.bridge.cv2_to_imgmsg(debug, encoding='bgr8'))</a:t>
             </a:r>
             <a:br/>
-            <a:r>
-              <a:t>package_name = 'agv_vision'</a:t>
-            </a:r>
             <a:br/>
             <a:r>
-              <a:t>setup(name=package_name, version='0.1.0', packages=find_packages(exclude=['test']),</a:t>
+              <a:t>def main():</a:t>
             </a:r>
             <a:br/>
             <a:r>
-              <a:t>    data_files=[('share/ament_index/resource_index/packages',</a:t>
+              <a:t>    rclpy.init()</a:t>
             </a:r>
             <a:br/>
             <a:r>
-              <a:t>    ['resource/' + package_name]), ('share/' + package_name, ['package.xml'])],</a:t>
+              <a:t>    node = YoloNode()</a:t>
             </a:r>
             <a:br/>
             <a:r>
-              <a:t>    install_requires=['setuptools'], zip_safe=True, maintainer='AGV student',</a:t>
+              <a:t>    try:</a:t>
             </a:r>
             <a:br/>
             <a:r>
-              <a:t>    maintainer_email='student@example.com', license='Apache-2.0',</a:t>
+              <a:t>        rclpy.spin(node)</a:t>
             </a:r>
             <a:br/>
             <a:r>
-              <a:t>    entry_points={'console_scripts': ['yolo_node = agv_vision.yolo_node:main']})</a:t>
+              <a:t>    except KeyboardInterrupt:</a:t>
+            </a:r>
+            <a:br/>
+            <a:r>
+              <a:t>        pass</a:t>
+            </a:r>
+            <a:br/>
+            <a:r>
+              <a:t>    finally:</a:t>
+            </a:r>
+            <a:br/>
+            <a:r>
+              <a:t>        node.destroy_node()</a:t>
+            </a:r>
+            <a:br/>
+            <a:r>
+              <a:t>        if rclpy.ok():</a:t>
             </a:r>
           </a:p>
         </p:txBody>
@@ -13548,7 +13849,7 @@
               </a:defRPr>
             </a:pPr>
             <a:r>
-              <a:t>파일 전체 1/1 · 이 슬라이드 다음에 같은 파일의 나머지 줄이 이어집니다.</a:t>
+              <a:t>파일 전체 9/10 · 이 슬라이드 다음에 같은 파일의 나머지 줄이 이어집니다.</a:t>
             </a:r>
           </a:p>
         </p:txBody>
@@ -13605,7 +13906,7 @@
               </a:defRPr>
             </a:pPr>
             <a:r>
-              <a:t>build → source → run 순서로 실행한다</a:t>
+              <a:t>파일을 계속 작성하고 저장한다 (10/10)</a:t>
             </a:r>
           </a:p>
         </p:txBody>
@@ -13644,7 +13945,7 @@
               </a:defRPr>
             </a:pPr>
             <a:r>
-              <a:t>새 파일 또는 수정 파일은 build와 source 뒤에만 실행 이름·설정에 반영됩니다.</a:t>
+              <a:t>~/ros2_curri/agv_ws/src/agv_vision/agv_vision/yolo_node.py</a:t>
             </a:r>
           </a:p>
         </p:txBody>
@@ -13780,23 +14081,124 @@
               </a:defRPr>
             </a:pPr>
             <a:r>
-              <a:t>현재 단계 실행    |    현재 폴더 ~/ros2_curri/agv_ws    |    현재 터미널</a:t>
-            </a:r>
-          </a:p>
-        </p:txBody>
-      </p:sp>
-      <p:sp>
-        <p:nvSpPr>
-          <p:cNvPr id="7" name="Rounded Rectangle 6"/>
+              <a:t>현재 단계 15/16    |    현재 폴더 ~/ros2_curri/agv_ws    |    현재 터미널</a:t>
+            </a:r>
+          </a:p>
+        </p:txBody>
+      </p:sp>
+      <p:sp>
+        <p:nvSpPr>
+          <p:cNvPr id="7" name="TextBox 6"/>
+          <p:cNvSpPr txBox="1"/>
+          <p:nvPr/>
+        </p:nvSpPr>
+        <p:spPr>
+          <a:xfrm>
+            <a:off x="658368" y="1627632"/>
+            <a:ext cx="10972800" cy="256032"/>
+          </a:xfrm>
+          <a:prstGeom prst="rect">
+            <a:avLst/>
+          </a:prstGeom>
+          <a:noFill/>
+        </p:spPr>
+        <p:txBody>
+          <a:bodyPr wrap="square" lIns="73152" rIns="73152" tIns="36576" bIns="36576">
+            <a:spAutoFit/>
+          </a:bodyPr>
+          <a:lstStyle/>
+          <a:p>
+            <a:pPr algn="l">
+              <a:spcAft>
+                <a:spcPts val="0"/>
+              </a:spcAft>
+              <a:defRPr sz="1500" b="1">
+                <a:solidFill>
+                  <a:srgbClr val="122C4E"/>
+                </a:solidFill>
+                <a:latin typeface="Noto Sans CJK KR"/>
+              </a:defRPr>
+            </a:pPr>
+            <a:r>
+              <a:t>이번 단계: 파일의 전체 내용을 중간 생략 없이 작성합니다. 아래 줄 범위를 끝까지 입력하세요.</a:t>
+            </a:r>
+          </a:p>
+        </p:txBody>
+      </p:sp>
+      <p:sp>
+        <p:nvSpPr>
+          <p:cNvPr id="8" name="Rectangle 7"/>
           <p:cNvSpPr/>
           <p:nvPr/>
         </p:nvSpPr>
         <p:spPr>
           <a:xfrm>
-            <a:off x="658368" y="1700784"/>
-            <a:ext cx="10972800" cy="3182112"/>
-          </a:xfrm>
-          <a:prstGeom prst="roundRect">
+            <a:off x="658368" y="1956816"/>
+            <a:ext cx="10972800" cy="603504"/>
+          </a:xfrm>
+          <a:prstGeom prst="rect">
+            <a:avLst/>
+          </a:prstGeom>
+          <a:solidFill>
+            <a:srgbClr val="F4F7FB"/>
+          </a:solidFill>
+          <a:ln>
+            <a:solidFill>
+              <a:srgbClr val="F4F7FB"/>
+            </a:solidFill>
+          </a:ln>
+        </p:spPr>
+        <p:style>
+          <a:lnRef idx="1">
+            <a:schemeClr val="accent1"/>
+          </a:lnRef>
+          <a:fillRef idx="3">
+            <a:schemeClr val="accent1"/>
+          </a:fillRef>
+          <a:effectRef idx="2">
+            <a:schemeClr val="accent1"/>
+          </a:effectRef>
+          <a:fontRef idx="minor">
+            <a:schemeClr val="lt1"/>
+          </a:fontRef>
+        </p:style>
+        <p:txBody>
+          <a:bodyPr rtlCol="0" anchor="ctr" wrap="square" lIns="73152" rIns="73152" tIns="36576" bIns="36576"/>
+          <a:lstStyle/>
+          <a:p>
+            <a:pPr algn="l">
+              <a:spcAft>
+                <a:spcPts val="0"/>
+              </a:spcAft>
+              <a:defRPr sz="1400" b="0">
+                <a:solidFill>
+                  <a:srgbClr val="122C4E"/>
+                </a:solidFill>
+                <a:latin typeface="DejaVu Sans Mono"/>
+              </a:defRPr>
+            </a:pPr>
+            <a:r>
+              <a:t>파일 생성: mkdir -p ~/ros2_curri/agv_ws/src/agv_vision/agv_vision</a:t>
+            </a:r>
+            <a:br/>
+            <a:r>
+              <a:t>파일 열기: nano ~/ros2_curri/agv_ws/src/agv_vision/agv_vision/yolo_node.py</a:t>
+            </a:r>
+          </a:p>
+        </p:txBody>
+      </p:sp>
+      <p:sp>
+        <p:nvSpPr>
+          <p:cNvPr id="9" name="Rectangle 8"/>
+          <p:cNvSpPr/>
+          <p:nvPr/>
+        </p:nvSpPr>
+        <p:spPr>
+          <a:xfrm>
+            <a:off x="658368" y="2706624"/>
+            <a:ext cx="10972800" cy="3364992"/>
+          </a:xfrm>
+          <a:prstGeom prst="rect">
             <a:avLst/>
           </a:prstGeom>
           <a:solidFill>
@@ -13823,14 +14225,14 @@
           </a:fontRef>
         </p:style>
         <p:txBody>
-          <a:bodyPr rtlCol="0" anchor="ctr" wrap="square" lIns="73152" rIns="73152" tIns="36576" bIns="36576"/>
-          <a:lstStyle/>
-          <a:p>
-            <a:pPr algn="l">
-              <a:spcAft>
-                <a:spcPts val="0"/>
-              </a:spcAft>
-              <a:defRPr sz="1600" b="0">
+          <a:bodyPr rtlCol="0" anchor="ctr" wrap="square" lIns="164592" rIns="164592" tIns="109728" bIns="36576"/>
+          <a:lstStyle/>
+          <a:p>
+            <a:pPr algn="l">
+              <a:spcAft>
+                <a:spcPts val="0"/>
+              </a:spcAft>
+              <a:defRPr sz="1400" b="0">
                 <a:solidFill>
                   <a:srgbClr val="FFFFFF"/>
                 </a:solidFill>
@@ -13838,89 +14240,46 @@
               </a:defRPr>
             </a:pPr>
             <a:r>
-              <a:t>source ~/ros2_curri/agv_ws/install/setup.bash</a:t>
-            </a:r>
-            <a:br/>
-            <a:r>
-              <a:t>ros2 run agv_vision yolo_node --ros-args -p enable_yolo:=false</a:t>
-            </a:r>
-          </a:p>
-        </p:txBody>
-      </p:sp>
-      <p:sp>
-        <p:nvSpPr>
-          <p:cNvPr id="8" name="TextBox 7"/>
-          <p:cNvSpPr txBox="1"/>
-          <p:nvPr/>
-        </p:nvSpPr>
-        <p:spPr>
-          <a:xfrm>
-            <a:off x="786384" y="5239512"/>
-            <a:ext cx="1261872" cy="237744"/>
-          </a:xfrm>
-          <a:prstGeom prst="rect">
-            <a:avLst/>
-          </a:prstGeom>
-          <a:noFill/>
-        </p:spPr>
-        <p:txBody>
-          <a:bodyPr wrap="square" lIns="73152" rIns="73152" tIns="36576" bIns="36576">
-            <a:spAutoFit/>
-          </a:bodyPr>
-          <a:lstStyle/>
-          <a:p>
-            <a:pPr algn="l">
-              <a:spcAft>
-                <a:spcPts val="0"/>
-              </a:spcAft>
-              <a:defRPr sz="1800" b="1">
-                <a:solidFill>
-                  <a:srgbClr val="2A8B5A"/>
-                </a:solidFill>
-                <a:latin typeface="Noto Sans CJK KR"/>
-              </a:defRPr>
-            </a:pPr>
-            <a:r>
-              <a:t>확인 기준</a:t>
-            </a:r>
-          </a:p>
-        </p:txBody>
-      </p:sp>
-      <p:sp>
-        <p:nvSpPr>
-          <p:cNvPr id="9" name="TextBox 8"/>
-          <p:cNvSpPr txBox="1"/>
-          <p:nvPr/>
-        </p:nvSpPr>
-        <p:spPr>
-          <a:xfrm>
-            <a:off x="786384" y="5532120"/>
-            <a:ext cx="10469880" cy="420624"/>
-          </a:xfrm>
-          <a:prstGeom prst="rect">
-            <a:avLst/>
-          </a:prstGeom>
-          <a:noFill/>
-        </p:spPr>
-        <p:txBody>
-          <a:bodyPr wrap="square" lIns="73152" rIns="73152" tIns="36576" bIns="36576">
-            <a:spAutoFit/>
-          </a:bodyPr>
-          <a:lstStyle/>
-          <a:p>
-            <a:pPr algn="l">
-              <a:spcAft>
-                <a:spcPts val="0"/>
-              </a:spcAft>
-              <a:defRPr sz="1800" b="0">
-                <a:solidFill>
-                  <a:srgbClr val="122C4E"/>
-                </a:solidFill>
-                <a:latin typeface="Noto Sans CJK KR"/>
-              </a:defRPr>
-            </a:pPr>
-            <a:r>
-              <a:t>/detections message 형식과 YOLO enable_yolo/model_path/threshold parameter를 확인한다.</a:t>
+              <a:t>            rclpy.shutdown()</a:t>
+            </a:r>
+          </a:p>
+        </p:txBody>
+      </p:sp>
+      <p:sp>
+        <p:nvSpPr>
+          <p:cNvPr id="10" name="TextBox 9"/>
+          <p:cNvSpPr txBox="1"/>
+          <p:nvPr/>
+        </p:nvSpPr>
+        <p:spPr>
+          <a:xfrm>
+            <a:off x="749808" y="6181344"/>
+            <a:ext cx="10789920" cy="201168"/>
+          </a:xfrm>
+          <a:prstGeom prst="rect">
+            <a:avLst/>
+          </a:prstGeom>
+          <a:noFill/>
+        </p:spPr>
+        <p:txBody>
+          <a:bodyPr wrap="square" lIns="73152" rIns="73152" tIns="36576" bIns="36576">
+            <a:spAutoFit/>
+          </a:bodyPr>
+          <a:lstStyle/>
+          <a:p>
+            <a:pPr algn="l">
+              <a:spcAft>
+                <a:spcPts val="0"/>
+              </a:spcAft>
+              <a:defRPr sz="1000" b="0">
+                <a:solidFill>
+                  <a:srgbClr val="5C6672"/>
+                </a:solidFill>
+                <a:latin typeface="Noto Sans CJK KR"/>
+              </a:defRPr>
+            </a:pPr>
+            <a:r>
+              <a:t>파일 전체 10/10 · 이 슬라이드 다음에 같은 파일의 나머지 줄이 이어집니다.</a:t>
             </a:r>
           </a:p>
         </p:txBody>
@@ -13977,7 +14336,7 @@
               </a:defRPr>
             </a:pPr>
             <a:r>
-              <a:t>정상 결과: 실제 환경에서 확인한 출력</a:t>
+              <a:t>파일을 새로 만들고 저장한다 (1/1)</a:t>
             </a:r>
           </a:p>
         </p:txBody>
@@ -14016,7 +14375,7 @@
               </a:defRPr>
             </a:pPr>
             <a:r>
-              <a:t>실제 ROS 2 환경의 파일·패키지·구성 검증 로그</a:t>
+              <a:t>~/ros2_curri/agv_ws/src/agv_bringup/config/vision.yaml</a:t>
             </a:r>
           </a:p>
         </p:txBody>
@@ -14099,30 +14458,64 @@
           </a:p>
         </p:txBody>
       </p:sp>
-      <p:pic>
-        <p:nvPicPr>
-          <p:cNvPr id="6" name="Picture 5" descr="validation_terminal.png"/>
-          <p:cNvPicPr>
-            <a:picLocks noChangeAspect="1"/>
-          </p:cNvPicPr>
-          <p:nvPr/>
-        </p:nvPicPr>
-        <p:blipFill>
-          <a:blip r:embed="rId2"/>
-          <a:stretch>
-            <a:fillRect/>
-          </a:stretch>
-        </p:blipFill>
-        <p:spPr>
-          <a:xfrm>
-            <a:off x="1616852" y="1353312"/>
-            <a:ext cx="8955247" cy="4800600"/>
-          </a:xfrm>
-          <a:prstGeom prst="rect">
-            <a:avLst/>
-          </a:prstGeom>
-        </p:spPr>
-      </p:pic>
+      <p:sp>
+        <p:nvSpPr>
+          <p:cNvPr id="6" name="Rectangle 5"/>
+          <p:cNvSpPr/>
+          <p:nvPr/>
+        </p:nvSpPr>
+        <p:spPr>
+          <a:xfrm>
+            <a:off x="566928" y="1188720"/>
+            <a:ext cx="11064240" cy="347472"/>
+          </a:xfrm>
+          <a:prstGeom prst="rect">
+            <a:avLst/>
+          </a:prstGeom>
+          <a:solidFill>
+            <a:srgbClr val="F4F7FB"/>
+          </a:solidFill>
+          <a:ln>
+            <a:solidFill>
+              <a:srgbClr val="F4F7FB"/>
+            </a:solidFill>
+          </a:ln>
+        </p:spPr>
+        <p:style>
+          <a:lnRef idx="1">
+            <a:schemeClr val="accent1"/>
+          </a:lnRef>
+          <a:fillRef idx="3">
+            <a:schemeClr val="accent1"/>
+          </a:fillRef>
+          <a:effectRef idx="2">
+            <a:schemeClr val="accent1"/>
+          </a:effectRef>
+          <a:fontRef idx="minor">
+            <a:schemeClr val="lt1"/>
+          </a:fontRef>
+        </p:style>
+        <p:txBody>
+          <a:bodyPr rtlCol="0" anchor="ctr" wrap="square" lIns="73152" rIns="73152" tIns="36576" bIns="36576"/>
+          <a:lstStyle/>
+          <a:p>
+            <a:pPr algn="l">
+              <a:spcAft>
+                <a:spcPts val="0"/>
+              </a:spcAft>
+              <a:defRPr sz="1300" b="1">
+                <a:solidFill>
+                  <a:srgbClr val="122C4E"/>
+                </a:solidFill>
+                <a:latin typeface="Noto Sans CJK KR"/>
+              </a:defRPr>
+            </a:pPr>
+            <a:r>
+              <a:t>현재 단계 16/17    |    현재 폴더 ~/ros2_curri/agv_ws    |    현재 터미널</a:t>
+            </a:r>
+          </a:p>
+        </p:txBody>
+      </p:sp>
       <p:sp>
         <p:nvSpPr>
           <p:cNvPr id="7" name="TextBox 6"/>
@@ -14131,33 +14524,216 @@
         </p:nvSpPr>
         <p:spPr>
           <a:xfrm>
-            <a:off x="777240" y="6217920"/>
-            <a:ext cx="10607040" cy="182880"/>
-          </a:xfrm>
-          <a:prstGeom prst="rect">
-            <a:avLst/>
-          </a:prstGeom>
-          <a:noFill/>
-        </p:spPr>
-        <p:txBody>
-          <a:bodyPr wrap="square" lIns="73152" rIns="73152" tIns="36576" bIns="36576">
-            <a:spAutoFit/>
-          </a:bodyPr>
-          <a:lstStyle/>
-          <a:p>
-            <a:pPr algn="ctr">
-              <a:spcAft>
-                <a:spcPts val="0"/>
-              </a:spcAft>
-              <a:defRPr sz="1100" b="1">
-                <a:solidFill>
-                  <a:srgbClr val="2A8B5A"/>
-                </a:solidFill>
-                <a:latin typeface="Noto Sans CJK KR"/>
-              </a:defRPr>
-            </a:pPr>
-            <a:r>
-              <a:t>① 명령/설정  ② 정상 출력 또는 화면  ③ 다음 검증 명령으로 재확인</a:t>
+            <a:off x="658368" y="1627632"/>
+            <a:ext cx="10972800" cy="256032"/>
+          </a:xfrm>
+          <a:prstGeom prst="rect">
+            <a:avLst/>
+          </a:prstGeom>
+          <a:noFill/>
+        </p:spPr>
+        <p:txBody>
+          <a:bodyPr wrap="square" lIns="73152" rIns="73152" tIns="36576" bIns="36576">
+            <a:spAutoFit/>
+          </a:bodyPr>
+          <a:lstStyle/>
+          <a:p>
+            <a:pPr algn="l">
+              <a:spcAft>
+                <a:spcPts val="0"/>
+              </a:spcAft>
+              <a:defRPr sz="1500" b="1">
+                <a:solidFill>
+                  <a:srgbClr val="122C4E"/>
+                </a:solidFill>
+                <a:latin typeface="Noto Sans CJK KR"/>
+              </a:defRPr>
+            </a:pPr>
+            <a:r>
+              <a:t>이번 단계: 파일의 전체 내용을 중간 생략 없이 작성합니다. 아래 줄 범위를 끝까지 입력하세요.</a:t>
+            </a:r>
+          </a:p>
+        </p:txBody>
+      </p:sp>
+      <p:sp>
+        <p:nvSpPr>
+          <p:cNvPr id="8" name="Rectangle 7"/>
+          <p:cNvSpPr/>
+          <p:nvPr/>
+        </p:nvSpPr>
+        <p:spPr>
+          <a:xfrm>
+            <a:off x="658368" y="1956816"/>
+            <a:ext cx="10972800" cy="603504"/>
+          </a:xfrm>
+          <a:prstGeom prst="rect">
+            <a:avLst/>
+          </a:prstGeom>
+          <a:solidFill>
+            <a:srgbClr val="F4F7FB"/>
+          </a:solidFill>
+          <a:ln>
+            <a:solidFill>
+              <a:srgbClr val="F4F7FB"/>
+            </a:solidFill>
+          </a:ln>
+        </p:spPr>
+        <p:style>
+          <a:lnRef idx="1">
+            <a:schemeClr val="accent1"/>
+          </a:lnRef>
+          <a:fillRef idx="3">
+            <a:schemeClr val="accent1"/>
+          </a:fillRef>
+          <a:effectRef idx="2">
+            <a:schemeClr val="accent1"/>
+          </a:effectRef>
+          <a:fontRef idx="minor">
+            <a:schemeClr val="lt1"/>
+          </a:fontRef>
+        </p:style>
+        <p:txBody>
+          <a:bodyPr rtlCol="0" anchor="ctr" wrap="square" lIns="73152" rIns="73152" tIns="36576" bIns="36576"/>
+          <a:lstStyle/>
+          <a:p>
+            <a:pPr algn="l">
+              <a:spcAft>
+                <a:spcPts val="0"/>
+              </a:spcAft>
+              <a:defRPr sz="1400" b="0">
+                <a:solidFill>
+                  <a:srgbClr val="122C4E"/>
+                </a:solidFill>
+                <a:latin typeface="DejaVu Sans Mono"/>
+              </a:defRPr>
+            </a:pPr>
+            <a:r>
+              <a:t>파일 생성: mkdir -p ~/ros2_curri/agv_ws/src/agv_bringup/config</a:t>
+            </a:r>
+            <a:br/>
+            <a:r>
+              <a:t>파일 열기: nano ~/ros2_curri/agv_ws/src/agv_bringup/config/vision.yaml</a:t>
+            </a:r>
+          </a:p>
+        </p:txBody>
+      </p:sp>
+      <p:sp>
+        <p:nvSpPr>
+          <p:cNvPr id="9" name="Rectangle 8"/>
+          <p:cNvSpPr/>
+          <p:nvPr/>
+        </p:nvSpPr>
+        <p:spPr>
+          <a:xfrm>
+            <a:off x="658368" y="2706624"/>
+            <a:ext cx="10972800" cy="3364992"/>
+          </a:xfrm>
+          <a:prstGeom prst="rect">
+            <a:avLst/>
+          </a:prstGeom>
+          <a:solidFill>
+            <a:srgbClr val="1D232D"/>
+          </a:solidFill>
+          <a:ln>
+            <a:solidFill>
+              <a:srgbClr val="1D232D"/>
+            </a:solidFill>
+          </a:ln>
+        </p:spPr>
+        <p:style>
+          <a:lnRef idx="1">
+            <a:schemeClr val="accent1"/>
+          </a:lnRef>
+          <a:fillRef idx="3">
+            <a:schemeClr val="accent1"/>
+          </a:fillRef>
+          <a:effectRef idx="2">
+            <a:schemeClr val="accent1"/>
+          </a:effectRef>
+          <a:fontRef idx="minor">
+            <a:schemeClr val="lt1"/>
+          </a:fontRef>
+        </p:style>
+        <p:txBody>
+          <a:bodyPr rtlCol="0" anchor="ctr" wrap="square" lIns="164592" rIns="164592" tIns="109728" bIns="36576"/>
+          <a:lstStyle/>
+          <a:p>
+            <a:pPr algn="l">
+              <a:spcAft>
+                <a:spcPts val="0"/>
+              </a:spcAft>
+              <a:defRPr sz="1400" b="0">
+                <a:solidFill>
+                  <a:srgbClr val="FFFFFF"/>
+                </a:solidFill>
+                <a:latin typeface="DejaVu Sans Mono"/>
+              </a:defRPr>
+            </a:pPr>
+            <a:r>
+              <a:t>yolo_node:</a:t>
+            </a:r>
+            <a:br/>
+            <a:r>
+              <a:t>  ros__parameters:</a:t>
+            </a:r>
+            <a:br/>
+            <a:r>
+              <a:t>    use_sim_time: true</a:t>
+            </a:r>
+            <a:br/>
+            <a:r>
+              <a:t>    enable_yolo: false</a:t>
+            </a:r>
+            <a:br/>
+            <a:r>
+              <a:t>    enable_red_target_fallback: true</a:t>
+            </a:r>
+            <a:br/>
+            <a:r>
+              <a:t>    model_path: yolo11n.pt</a:t>
+            </a:r>
+            <a:br/>
+            <a:r>
+              <a:t>    confidence_threshold: 0.50</a:t>
+            </a:r>
+          </a:p>
+        </p:txBody>
+      </p:sp>
+      <p:sp>
+        <p:nvSpPr>
+          <p:cNvPr id="10" name="TextBox 9"/>
+          <p:cNvSpPr txBox="1"/>
+          <p:nvPr/>
+        </p:nvSpPr>
+        <p:spPr>
+          <a:xfrm>
+            <a:off x="749808" y="6181344"/>
+            <a:ext cx="10789920" cy="201168"/>
+          </a:xfrm>
+          <a:prstGeom prst="rect">
+            <a:avLst/>
+          </a:prstGeom>
+          <a:noFill/>
+        </p:spPr>
+        <p:txBody>
+          <a:bodyPr wrap="square" lIns="73152" rIns="73152" tIns="36576" bIns="36576">
+            <a:spAutoFit/>
+          </a:bodyPr>
+          <a:lstStyle/>
+          <a:p>
+            <a:pPr algn="l">
+              <a:spcAft>
+                <a:spcPts val="0"/>
+              </a:spcAft>
+              <a:defRPr sz="1000" b="0">
+                <a:solidFill>
+                  <a:srgbClr val="5C6672"/>
+                </a:solidFill>
+                <a:latin typeface="Noto Sans CJK KR"/>
+              </a:defRPr>
+            </a:pPr>
+            <a:r>
+              <a:t>파일 전체 1/1 · 이 슬라이드 다음에 같은 파일의 나머지 줄이 이어집니다.</a:t>
             </a:r>
           </a:p>
         </p:txBody>
@@ -14214,7 +14790,7 @@
               </a:defRPr>
             </a:pPr>
             <a:r>
-              <a:t>정상 결과: 실제 환경에서 확인한 출력</a:t>
+              <a:t>파일을 새로 만들고 저장한다 (1/1)</a:t>
             </a:r>
           </a:p>
         </p:txBody>
@@ -14253,7 +14829,7 @@
               </a:defRPr>
             </a:pPr>
             <a:r>
-              <a:t>실제 /vision/debug_image: fallback이 ‘target not visible’을 표시해 camera pose·FOV·world 배치를 점검하는 오류 사례</a:t>
+              <a:t>~/ros2_curri/agv_ws/src/agv_vision/setup.py</a:t>
             </a:r>
           </a:p>
         </p:txBody>
@@ -14336,30 +14912,64 @@
           </a:p>
         </p:txBody>
       </p:sp>
-      <p:pic>
-        <p:nvPicPr>
-          <p:cNvPr id="6" name="Picture 5" descr="01_vision_debug_actual.png"/>
-          <p:cNvPicPr>
-            <a:picLocks noChangeAspect="1"/>
-          </p:cNvPicPr>
-          <p:nvPr/>
-        </p:nvPicPr>
-        <p:blipFill>
-          <a:blip r:embed="rId2"/>
-          <a:stretch>
-            <a:fillRect/>
-          </a:stretch>
-        </p:blipFill>
-        <p:spPr>
-          <a:xfrm>
-            <a:off x="2894076" y="1353312"/>
-            <a:ext cx="6400800" cy="4800600"/>
-          </a:xfrm>
-          <a:prstGeom prst="rect">
-            <a:avLst/>
-          </a:prstGeom>
-        </p:spPr>
-      </p:pic>
+      <p:sp>
+        <p:nvSpPr>
+          <p:cNvPr id="6" name="Rectangle 5"/>
+          <p:cNvSpPr/>
+          <p:nvPr/>
+        </p:nvSpPr>
+        <p:spPr>
+          <a:xfrm>
+            <a:off x="566928" y="1188720"/>
+            <a:ext cx="11064240" cy="347472"/>
+          </a:xfrm>
+          <a:prstGeom prst="rect">
+            <a:avLst/>
+          </a:prstGeom>
+          <a:solidFill>
+            <a:srgbClr val="F4F7FB"/>
+          </a:solidFill>
+          <a:ln>
+            <a:solidFill>
+              <a:srgbClr val="F4F7FB"/>
+            </a:solidFill>
+          </a:ln>
+        </p:spPr>
+        <p:style>
+          <a:lnRef idx="1">
+            <a:schemeClr val="accent1"/>
+          </a:lnRef>
+          <a:fillRef idx="3">
+            <a:schemeClr val="accent1"/>
+          </a:fillRef>
+          <a:effectRef idx="2">
+            <a:schemeClr val="accent1"/>
+          </a:effectRef>
+          <a:fontRef idx="minor">
+            <a:schemeClr val="lt1"/>
+          </a:fontRef>
+        </p:style>
+        <p:txBody>
+          <a:bodyPr rtlCol="0" anchor="ctr" wrap="square" lIns="73152" rIns="73152" tIns="36576" bIns="36576"/>
+          <a:lstStyle/>
+          <a:p>
+            <a:pPr algn="l">
+              <a:spcAft>
+                <a:spcPts val="0"/>
+              </a:spcAft>
+              <a:defRPr sz="1300" b="1">
+                <a:solidFill>
+                  <a:srgbClr val="122C4E"/>
+                </a:solidFill>
+                <a:latin typeface="Noto Sans CJK KR"/>
+              </a:defRPr>
+            </a:pPr>
+            <a:r>
+              <a:t>현재 단계 17/18    |    현재 폴더 ~/ros2_curri/agv_ws    |    현재 터미널</a:t>
+            </a:r>
+          </a:p>
+        </p:txBody>
+      </p:sp>
       <p:sp>
         <p:nvSpPr>
           <p:cNvPr id="7" name="TextBox 6"/>
@@ -14368,33 +14978,220 @@
         </p:nvSpPr>
         <p:spPr>
           <a:xfrm>
-            <a:off x="777240" y="6217920"/>
-            <a:ext cx="10607040" cy="182880"/>
-          </a:xfrm>
-          <a:prstGeom prst="rect">
-            <a:avLst/>
-          </a:prstGeom>
-          <a:noFill/>
-        </p:spPr>
-        <p:txBody>
-          <a:bodyPr wrap="square" lIns="73152" rIns="73152" tIns="36576" bIns="36576">
-            <a:spAutoFit/>
-          </a:bodyPr>
-          <a:lstStyle/>
-          <a:p>
-            <a:pPr algn="ctr">
-              <a:spcAft>
-                <a:spcPts val="0"/>
-              </a:spcAft>
-              <a:defRPr sz="1100" b="1">
-                <a:solidFill>
-                  <a:srgbClr val="2A8B5A"/>
-                </a:solidFill>
-                <a:latin typeface="Noto Sans CJK KR"/>
-              </a:defRPr>
-            </a:pPr>
-            <a:r>
-              <a:t>① 명령/설정  ② 정상 출력 또는 화면  ③ 다음 검증 명령으로 재확인</a:t>
+            <a:off x="658368" y="1627632"/>
+            <a:ext cx="10972800" cy="256032"/>
+          </a:xfrm>
+          <a:prstGeom prst="rect">
+            <a:avLst/>
+          </a:prstGeom>
+          <a:noFill/>
+        </p:spPr>
+        <p:txBody>
+          <a:bodyPr wrap="square" lIns="73152" rIns="73152" tIns="36576" bIns="36576">
+            <a:spAutoFit/>
+          </a:bodyPr>
+          <a:lstStyle/>
+          <a:p>
+            <a:pPr algn="l">
+              <a:spcAft>
+                <a:spcPts val="0"/>
+              </a:spcAft>
+              <a:defRPr sz="1500" b="1">
+                <a:solidFill>
+                  <a:srgbClr val="122C4E"/>
+                </a:solidFill>
+                <a:latin typeface="Noto Sans CJK KR"/>
+              </a:defRPr>
+            </a:pPr>
+            <a:r>
+              <a:t>이번 단계: 파일의 전체 내용을 중간 생략 없이 작성합니다. 아래 줄 범위를 끝까지 입력하세요.</a:t>
+            </a:r>
+          </a:p>
+        </p:txBody>
+      </p:sp>
+      <p:sp>
+        <p:nvSpPr>
+          <p:cNvPr id="8" name="Rectangle 7"/>
+          <p:cNvSpPr/>
+          <p:nvPr/>
+        </p:nvSpPr>
+        <p:spPr>
+          <a:xfrm>
+            <a:off x="658368" y="1956816"/>
+            <a:ext cx="10972800" cy="603504"/>
+          </a:xfrm>
+          <a:prstGeom prst="rect">
+            <a:avLst/>
+          </a:prstGeom>
+          <a:solidFill>
+            <a:srgbClr val="F4F7FB"/>
+          </a:solidFill>
+          <a:ln>
+            <a:solidFill>
+              <a:srgbClr val="F4F7FB"/>
+            </a:solidFill>
+          </a:ln>
+        </p:spPr>
+        <p:style>
+          <a:lnRef idx="1">
+            <a:schemeClr val="accent1"/>
+          </a:lnRef>
+          <a:fillRef idx="3">
+            <a:schemeClr val="accent1"/>
+          </a:fillRef>
+          <a:effectRef idx="2">
+            <a:schemeClr val="accent1"/>
+          </a:effectRef>
+          <a:fontRef idx="minor">
+            <a:schemeClr val="lt1"/>
+          </a:fontRef>
+        </p:style>
+        <p:txBody>
+          <a:bodyPr rtlCol="0" anchor="ctr" wrap="square" lIns="73152" rIns="73152" tIns="36576" bIns="36576"/>
+          <a:lstStyle/>
+          <a:p>
+            <a:pPr algn="l">
+              <a:spcAft>
+                <a:spcPts val="0"/>
+              </a:spcAft>
+              <a:defRPr sz="1400" b="0">
+                <a:solidFill>
+                  <a:srgbClr val="122C4E"/>
+                </a:solidFill>
+                <a:latin typeface="DejaVu Sans Mono"/>
+              </a:defRPr>
+            </a:pPr>
+            <a:r>
+              <a:t>파일 생성: mkdir -p ~/ros2_curri/agv_ws/src/agv_vision</a:t>
+            </a:r>
+            <a:br/>
+            <a:r>
+              <a:t>파일 열기: nano ~/ros2_curri/agv_ws/src/agv_vision/setup.py</a:t>
+            </a:r>
+          </a:p>
+        </p:txBody>
+      </p:sp>
+      <p:sp>
+        <p:nvSpPr>
+          <p:cNvPr id="9" name="Rectangle 8"/>
+          <p:cNvSpPr/>
+          <p:nvPr/>
+        </p:nvSpPr>
+        <p:spPr>
+          <a:xfrm>
+            <a:off x="658368" y="2706624"/>
+            <a:ext cx="10972800" cy="3364992"/>
+          </a:xfrm>
+          <a:prstGeom prst="rect">
+            <a:avLst/>
+          </a:prstGeom>
+          <a:solidFill>
+            <a:srgbClr val="1D232D"/>
+          </a:solidFill>
+          <a:ln>
+            <a:solidFill>
+              <a:srgbClr val="1D232D"/>
+            </a:solidFill>
+          </a:ln>
+        </p:spPr>
+        <p:style>
+          <a:lnRef idx="1">
+            <a:schemeClr val="accent1"/>
+          </a:lnRef>
+          <a:fillRef idx="3">
+            <a:schemeClr val="accent1"/>
+          </a:fillRef>
+          <a:effectRef idx="2">
+            <a:schemeClr val="accent1"/>
+          </a:effectRef>
+          <a:fontRef idx="minor">
+            <a:schemeClr val="lt1"/>
+          </a:fontRef>
+        </p:style>
+        <p:txBody>
+          <a:bodyPr rtlCol="0" anchor="ctr" wrap="square" lIns="164592" rIns="164592" tIns="109728" bIns="36576"/>
+          <a:lstStyle/>
+          <a:p>
+            <a:pPr algn="l">
+              <a:spcAft>
+                <a:spcPts val="0"/>
+              </a:spcAft>
+              <a:defRPr sz="1400" b="0">
+                <a:solidFill>
+                  <a:srgbClr val="FFFFFF"/>
+                </a:solidFill>
+                <a:latin typeface="DejaVu Sans Mono"/>
+              </a:defRPr>
+            </a:pPr>
+            <a:r>
+              <a:t>from setuptools import find_packages, setup</a:t>
+            </a:r>
+            <a:br/>
+            <a:r>
+              <a:t>package_name = 'agv_vision'</a:t>
+            </a:r>
+            <a:br/>
+            <a:r>
+              <a:t>setup(name=package_name, version='0.1.0', packages=find_packages(exclude=['test']),</a:t>
+            </a:r>
+            <a:br/>
+            <a:r>
+              <a:t>    data_files=[('share/ament_index/resource_index/packages',</a:t>
+            </a:r>
+            <a:br/>
+            <a:r>
+              <a:t>    ['resource/' + package_name]), ('share/' + package_name, ['package.xml'])],</a:t>
+            </a:r>
+            <a:br/>
+            <a:r>
+              <a:t>    install_requires=['setuptools'], zip_safe=True, maintainer='AGV student',</a:t>
+            </a:r>
+            <a:br/>
+            <a:r>
+              <a:t>    maintainer_email='student@example.com', license='Apache-2.0',</a:t>
+            </a:r>
+            <a:br/>
+            <a:r>
+              <a:t>    entry_points={'console_scripts': ['yolo_node = agv_vision.yolo_node:main']})</a:t>
+            </a:r>
+          </a:p>
+        </p:txBody>
+      </p:sp>
+      <p:sp>
+        <p:nvSpPr>
+          <p:cNvPr id="10" name="TextBox 9"/>
+          <p:cNvSpPr txBox="1"/>
+          <p:nvPr/>
+        </p:nvSpPr>
+        <p:spPr>
+          <a:xfrm>
+            <a:off x="749808" y="6181344"/>
+            <a:ext cx="10789920" cy="201168"/>
+          </a:xfrm>
+          <a:prstGeom prst="rect">
+            <a:avLst/>
+          </a:prstGeom>
+          <a:noFill/>
+        </p:spPr>
+        <p:txBody>
+          <a:bodyPr wrap="square" lIns="73152" rIns="73152" tIns="36576" bIns="36576">
+            <a:spAutoFit/>
+          </a:bodyPr>
+          <a:lstStyle/>
+          <a:p>
+            <a:pPr algn="l">
+              <a:spcAft>
+                <a:spcPts val="0"/>
+              </a:spcAft>
+              <a:defRPr sz="1000" b="0">
+                <a:solidFill>
+                  <a:srgbClr val="5C6672"/>
+                </a:solidFill>
+                <a:latin typeface="Noto Sans CJK KR"/>
+              </a:defRPr>
+            </a:pPr>
+            <a:r>
+              <a:t>파일 전체 1/1 · 이 슬라이드 다음에 같은 파일의 나머지 줄이 이어집니다.</a:t>
             </a:r>
           </a:p>
         </p:txBody>
@@ -14451,7 +15248,7 @@
               </a:defRPr>
             </a:pPr>
             <a:r>
-              <a:t>객관적 검증 명령으로 완료를 확인한다</a:t>
+              <a:t>build → source → run 순서로 실행한다</a:t>
             </a:r>
           </a:p>
         </p:txBody>
@@ -14490,7 +15287,7 @@
               </a:defRPr>
             </a:pPr>
             <a:r>
-              <a:t>화면만 보지 말고 topic·frame·파일·parameter를 다시 확인합니다.</a:t>
+              <a:t>새 파일 또는 수정 파일은 build와 source 뒤에만 실행 이름·설정에 반영됩니다.</a:t>
             </a:r>
           </a:p>
         </p:txBody>
@@ -14626,7 +15423,7 @@
               </a:defRPr>
             </a:pPr>
             <a:r>
-              <a:t>현재 단계 검증    |    현재 폴더 ~/ros2_curri/agv_ws    |    현재 터미널</a:t>
+              <a:t>현재 단계 실행    |    현재 폴더 ~/ros2_curri/agv_ws    |    현재 터미널</a:t>
             </a:r>
           </a:p>
         </p:txBody>
@@ -14639,8 +15436,8 @@
         </p:nvSpPr>
         <p:spPr>
           <a:xfrm>
-            <a:off x="658368" y="1755648"/>
-            <a:ext cx="10972800" cy="2148840"/>
+            <a:off x="658368" y="1700784"/>
+            <a:ext cx="10972800" cy="3182112"/>
           </a:xfrm>
           <a:prstGeom prst="roundRect">
             <a:avLst/>
@@ -14684,58 +15481,35 @@
               </a:defRPr>
             </a:pPr>
             <a:r>
-              <a:t>ros2 interface show agv_interfaces/msg/Detection</a:t>
+              <a:t>source ~/ros2_curri/agv_ws/install/setup.bash</a:t>
             </a:r>
             <a:br/>
             <a:r>
-              <a:t>ros2 topic info /detections</a:t>
-            </a:r>
-            <a:br/>
-            <a:r>
-              <a:t>ros2 param get /yolo_node confidence_threshold</a:t>
-            </a:r>
-          </a:p>
-        </p:txBody>
-      </p:sp>
-      <p:sp>
-        <p:nvSpPr>
-          <p:cNvPr id="8" name="Rounded Rectangle 7"/>
-          <p:cNvSpPr/>
-          <p:nvPr/>
-        </p:nvSpPr>
-        <p:spPr>
-          <a:xfrm>
-            <a:off x="658368" y="4206240"/>
-            <a:ext cx="10972800" cy="1554480"/>
-          </a:xfrm>
-          <a:prstGeom prst="roundRect">
-            <a:avLst/>
-          </a:prstGeom>
-          <a:solidFill>
-            <a:srgbClr val="F4F7FB"/>
-          </a:solidFill>
-          <a:ln>
-            <a:solidFill>
-              <a:srgbClr val="D1DFD5"/>
-            </a:solidFill>
-          </a:ln>
-        </p:spPr>
-        <p:style>
-          <a:lnRef idx="1">
-            <a:schemeClr val="accent1"/>
-          </a:lnRef>
-          <a:fillRef idx="3">
-            <a:schemeClr val="accent1"/>
-          </a:fillRef>
-          <a:effectRef idx="2">
-            <a:schemeClr val="accent1"/>
-          </a:effectRef>
-          <a:fontRef idx="minor">
-            <a:schemeClr val="lt1"/>
-          </a:fontRef>
-        </p:style>
-        <p:txBody>
-          <a:bodyPr rtlCol="0" anchor="ctr" wrap="square" lIns="73152" rIns="73152" tIns="36576" bIns="36576"/>
+              <a:t>ros2 run agv_vision yolo_node --ros-args -p enable_yolo:=false</a:t>
+            </a:r>
+          </a:p>
+        </p:txBody>
+      </p:sp>
+      <p:sp>
+        <p:nvSpPr>
+          <p:cNvPr id="8" name="TextBox 7"/>
+          <p:cNvSpPr txBox="1"/>
+          <p:nvPr/>
+        </p:nvSpPr>
+        <p:spPr>
+          <a:xfrm>
+            <a:off x="786384" y="5239512"/>
+            <a:ext cx="1261872" cy="237744"/>
+          </a:xfrm>
+          <a:prstGeom prst="rect">
+            <a:avLst/>
+          </a:prstGeom>
+          <a:noFill/>
+        </p:spPr>
+        <p:txBody>
+          <a:bodyPr wrap="square" lIns="73152" rIns="73152" tIns="36576" bIns="36576">
+            <a:spAutoFit/>
+          </a:bodyPr>
           <a:lstStyle/>
           <a:p>
             <a:pPr algn="l">
@@ -14750,19 +15524,7 @@
               </a:defRPr>
             </a:pPr>
             <a:r>
-              <a:t>완료 체크</a:t>
-            </a:r>
-            <a:br/>
-            <a:r>
-              <a:t>□ 명령이 오류 없이 실행된다.</a:t>
-            </a:r>
-            <a:br/>
-            <a:r>
-              <a:t>□ 기대한 파일·topic·frame·parameter 이름이 보인다.</a:t>
-            </a:r>
-            <a:br/>
-            <a:r>
-              <a:t>□ 값의 단위와 방향을 한 문장으로 설명할 수 있다.</a:t>
+              <a:t>확인 기준</a:t>
             </a:r>
           </a:p>
         </p:txBody>
@@ -14775,25 +15537,25 @@
         </p:nvSpPr>
         <p:spPr>
           <a:xfrm>
-            <a:off x="731520" y="5989320"/>
-            <a:ext cx="10789920" cy="237744"/>
-          </a:xfrm>
-          <a:prstGeom prst="rect">
-            <a:avLst/>
-          </a:prstGeom>
-          <a:noFill/>
-        </p:spPr>
-        <p:txBody>
-          <a:bodyPr wrap="square" lIns="73152" rIns="73152" tIns="36576" bIns="36576">
-            <a:spAutoFit/>
-          </a:bodyPr>
-          <a:lstStyle/>
-          <a:p>
-            <a:pPr algn="l">
-              <a:spcAft>
-                <a:spcPts val="0"/>
-              </a:spcAft>
-              <a:defRPr sz="1500" b="1">
+            <a:off x="786384" y="5532120"/>
+            <a:ext cx="10469880" cy="420624"/>
+          </a:xfrm>
+          <a:prstGeom prst="rect">
+            <a:avLst/>
+          </a:prstGeom>
+          <a:noFill/>
+        </p:spPr>
+        <p:txBody>
+          <a:bodyPr wrap="square" lIns="73152" rIns="73152" tIns="36576" bIns="36576">
+            <a:spAutoFit/>
+          </a:bodyPr>
+          <a:lstStyle/>
+          <a:p>
+            <a:pPr algn="l">
+              <a:spcAft>
+                <a:spcPts val="0"/>
+              </a:spcAft>
+              <a:defRPr sz="1800" b="0">
                 <a:solidFill>
                   <a:srgbClr val="122C4E"/>
                 </a:solidFill>
@@ -14801,7 +15563,7 @@
               </a:defRPr>
             </a:pPr>
             <a:r>
-              <a:t>완료 조건: /detections message 형식과 YOLO enable_yolo/model_path/threshold parameter를 확인한다.</a:t>
+              <a:t>/detections message 형식과 YOLO enable_yolo/model_path/threshold parameter를 확인한다.</a:t>
             </a:r>
           </a:p>
         </p:txBody>
@@ -14858,7 +15620,7 @@
               </a:defRPr>
             </a:pPr>
             <a:r>
-              <a:t>막히면: 증상 → 우선 확인 → 재검증</a:t>
+              <a:t>정상 결과: 실제 환경에서 확인한 출력</a:t>
             </a:r>
           </a:p>
         </p:txBody>
@@ -14897,7 +15659,7 @@
               </a:defRPr>
             </a:pPr>
             <a:r>
-              <a:t>오류 메시지를 숨기지 않고 같은 순서로 점검합니다.</a:t>
+              <a:t>실제 ROS 2 환경의 파일·패키지·구성 검증 로그</a:t>
             </a:r>
           </a:p>
         </p:txBody>
@@ -14980,328 +15742,40 @@
           </a:p>
         </p:txBody>
       </p:sp>
-      <p:sp>
-        <p:nvSpPr>
-          <p:cNvPr id="6" name="Rectangle 5"/>
-          <p:cNvSpPr/>
-          <p:nvPr/>
-        </p:nvSpPr>
-        <p:spPr>
-          <a:xfrm>
-            <a:off x="566928" y="1188720"/>
-            <a:ext cx="11064240" cy="347472"/>
-          </a:xfrm>
-          <a:prstGeom prst="rect">
-            <a:avLst/>
-          </a:prstGeom>
-          <a:solidFill>
-            <a:srgbClr val="F4F7FB"/>
-          </a:solidFill>
-          <a:ln>
-            <a:solidFill>
-              <a:srgbClr val="F4F7FB"/>
-            </a:solidFill>
-          </a:ln>
-        </p:spPr>
-        <p:style>
-          <a:lnRef idx="1">
-            <a:schemeClr val="accent1"/>
-          </a:lnRef>
-          <a:fillRef idx="3">
-            <a:schemeClr val="accent1"/>
-          </a:fillRef>
-          <a:effectRef idx="2">
-            <a:schemeClr val="accent1"/>
-          </a:effectRef>
-          <a:fontRef idx="minor">
-            <a:schemeClr val="lt1"/>
-          </a:fontRef>
-        </p:style>
-        <p:txBody>
-          <a:bodyPr rtlCol="0" anchor="ctr" wrap="square" lIns="73152" rIns="73152" tIns="36576" bIns="36576"/>
-          <a:lstStyle/>
-          <a:p>
-            <a:pPr algn="l">
-              <a:spcAft>
-                <a:spcPts val="0"/>
-              </a:spcAft>
-              <a:defRPr sz="1300" b="1">
-                <a:solidFill>
-                  <a:srgbClr val="122C4E"/>
-                </a:solidFill>
-                <a:latin typeface="Noto Sans CJK KR"/>
-              </a:defRPr>
-            </a:pPr>
-            <a:r>
-              <a:t>현재 단계 오류 대응    |    현재 폴더 ~/ros2_curri/agv_ws    |    현재 터미널</a:t>
-            </a:r>
-          </a:p>
-        </p:txBody>
-      </p:sp>
-      <p:sp>
-        <p:nvSpPr>
-          <p:cNvPr id="7" name="Rounded Rectangle 6"/>
-          <p:cNvSpPr/>
-          <p:nvPr/>
-        </p:nvSpPr>
-        <p:spPr>
-          <a:xfrm>
-            <a:off x="694944" y="1755648"/>
-            <a:ext cx="10972800" cy="1115568"/>
-          </a:xfrm>
-          <a:prstGeom prst="roundRect">
-            <a:avLst/>
-          </a:prstGeom>
-          <a:solidFill>
-            <a:srgbClr val="FFF7F4"/>
-          </a:solidFill>
-          <a:ln>
-            <a:solidFill>
-              <a:srgbClr val="EDBEB4"/>
-            </a:solidFill>
-          </a:ln>
-        </p:spPr>
-        <p:style>
-          <a:lnRef idx="1">
-            <a:schemeClr val="accent1"/>
-          </a:lnRef>
-          <a:fillRef idx="3">
-            <a:schemeClr val="accent1"/>
-          </a:fillRef>
-          <a:effectRef idx="2">
-            <a:schemeClr val="accent1"/>
-          </a:effectRef>
-          <a:fontRef idx="minor">
-            <a:schemeClr val="lt1"/>
-          </a:fontRef>
-        </p:style>
-        <p:txBody>
-          <a:bodyPr rtlCol="0" anchor="ctr"/>
-          <a:lstStyle/>
-          <a:p>
-            <a:pPr algn="ctr"/>
-          </a:p>
-        </p:txBody>
-      </p:sp>
-      <p:sp>
-        <p:nvSpPr>
-          <p:cNvPr id="8" name="TextBox 7"/>
-          <p:cNvSpPr txBox="1"/>
-          <p:nvPr/>
-        </p:nvSpPr>
-        <p:spPr>
-          <a:xfrm>
-            <a:off x="896112" y="1901952"/>
-            <a:ext cx="2926080" cy="274320"/>
-          </a:xfrm>
-          <a:prstGeom prst="rect">
-            <a:avLst/>
-          </a:prstGeom>
-          <a:noFill/>
-        </p:spPr>
-        <p:txBody>
-          <a:bodyPr wrap="square" lIns="73152" rIns="73152" tIns="36576" bIns="36576">
-            <a:spAutoFit/>
-          </a:bodyPr>
-          <a:lstStyle/>
-          <a:p>
-            <a:pPr algn="l">
-              <a:spcAft>
-                <a:spcPts val="0"/>
-              </a:spcAft>
-              <a:defRPr sz="1800" b="1">
-                <a:solidFill>
-                  <a:srgbClr val="BE3B3B"/>
-                </a:solidFill>
-                <a:latin typeface="Noto Sans CJK KR"/>
-              </a:defRPr>
-            </a:pPr>
-            <a:r>
-              <a:t>증상 1: 모델 파일을 못 찾음</a:t>
-            </a:r>
-          </a:p>
-        </p:txBody>
-      </p:sp>
-      <p:sp>
-        <p:nvSpPr>
-          <p:cNvPr id="9" name="TextBox 8"/>
-          <p:cNvSpPr txBox="1"/>
-          <p:nvPr/>
-        </p:nvSpPr>
-        <p:spPr>
-          <a:xfrm>
-            <a:off x="3794760" y="1883664"/>
-            <a:ext cx="7543800" cy="621792"/>
-          </a:xfrm>
-          <a:prstGeom prst="rect">
-            <a:avLst/>
-          </a:prstGeom>
-          <a:noFill/>
-        </p:spPr>
-        <p:txBody>
-          <a:bodyPr wrap="square" lIns="73152" rIns="73152" tIns="36576" bIns="36576">
-            <a:spAutoFit/>
-          </a:bodyPr>
-          <a:lstStyle/>
-          <a:p>
-            <a:pPr algn="l">
-              <a:spcAft>
-                <a:spcPts val="0"/>
-              </a:spcAft>
-              <a:defRPr sz="1600" b="0">
-                <a:solidFill>
-                  <a:srgbClr val="122C4E"/>
-                </a:solidFill>
-                <a:latin typeface="Noto Sans CJK KR"/>
-              </a:defRPr>
-            </a:pPr>
-            <a:r>
-              <a:t>우선 확인: model_path와 모델 파일 배포 정책을 확인한다.</a:t>
-            </a:r>
-            <a:br/>
-            <a:r>
-              <a:t>수정 후: ros2 interface show agv_interfaces/msg/Detection</a:t>
-            </a:r>
-          </a:p>
-        </p:txBody>
-      </p:sp>
-      <p:sp>
-        <p:nvSpPr>
-          <p:cNvPr id="10" name="Rounded Rectangle 9"/>
-          <p:cNvSpPr/>
-          <p:nvPr/>
-        </p:nvSpPr>
-        <p:spPr>
-          <a:xfrm>
-            <a:off x="694944" y="3172968"/>
-            <a:ext cx="10972800" cy="1115568"/>
-          </a:xfrm>
-          <a:prstGeom prst="roundRect">
-            <a:avLst/>
-          </a:prstGeom>
-          <a:solidFill>
-            <a:srgbClr val="FFF7F4"/>
-          </a:solidFill>
-          <a:ln>
-            <a:solidFill>
-              <a:srgbClr val="EDBEB4"/>
-            </a:solidFill>
-          </a:ln>
-        </p:spPr>
-        <p:style>
-          <a:lnRef idx="1">
-            <a:schemeClr val="accent1"/>
-          </a:lnRef>
-          <a:fillRef idx="3">
-            <a:schemeClr val="accent1"/>
-          </a:fillRef>
-          <a:effectRef idx="2">
-            <a:schemeClr val="accent1"/>
-          </a:effectRef>
-          <a:fontRef idx="minor">
-            <a:schemeClr val="lt1"/>
-          </a:fontRef>
-        </p:style>
-        <p:txBody>
-          <a:bodyPr rtlCol="0" anchor="ctr"/>
-          <a:lstStyle/>
-          <a:p>
-            <a:pPr algn="ctr"/>
-          </a:p>
-        </p:txBody>
-      </p:sp>
-      <p:sp>
-        <p:nvSpPr>
-          <p:cNvPr id="11" name="TextBox 10"/>
-          <p:cNvSpPr txBox="1"/>
-          <p:nvPr/>
-        </p:nvSpPr>
-        <p:spPr>
-          <a:xfrm>
-            <a:off x="896112" y="3319272"/>
-            <a:ext cx="2926080" cy="274320"/>
-          </a:xfrm>
-          <a:prstGeom prst="rect">
-            <a:avLst/>
-          </a:prstGeom>
-          <a:noFill/>
-        </p:spPr>
-        <p:txBody>
-          <a:bodyPr wrap="square" lIns="73152" rIns="73152" tIns="36576" bIns="36576">
-            <a:spAutoFit/>
-          </a:bodyPr>
-          <a:lstStyle/>
-          <a:p>
-            <a:pPr algn="l">
-              <a:spcAft>
-                <a:spcPts val="0"/>
-              </a:spcAft>
-              <a:defRPr sz="1800" b="1">
-                <a:solidFill>
-                  <a:srgbClr val="BE3B3B"/>
-                </a:solidFill>
-                <a:latin typeface="Noto Sans CJK KR"/>
-              </a:defRPr>
-            </a:pPr>
-            <a:r>
-              <a:t>증상 2: Custom msg import 실패</a:t>
-            </a:r>
-          </a:p>
-        </p:txBody>
-      </p:sp>
-      <p:sp>
-        <p:nvSpPr>
-          <p:cNvPr id="12" name="TextBox 11"/>
-          <p:cNvSpPr txBox="1"/>
-          <p:nvPr/>
-        </p:nvSpPr>
-        <p:spPr>
-          <a:xfrm>
-            <a:off x="3794760" y="3300984"/>
-            <a:ext cx="7543800" cy="621792"/>
-          </a:xfrm>
-          <a:prstGeom prst="rect">
-            <a:avLst/>
-          </a:prstGeom>
-          <a:noFill/>
-        </p:spPr>
-        <p:txBody>
-          <a:bodyPr wrap="square" lIns="73152" rIns="73152" tIns="36576" bIns="36576">
-            <a:spAutoFit/>
-          </a:bodyPr>
-          <a:lstStyle/>
-          <a:p>
-            <a:pPr algn="l">
-              <a:spcAft>
-                <a:spcPts val="0"/>
-              </a:spcAft>
-              <a:defRPr sz="1600" b="0">
-                <a:solidFill>
-                  <a:srgbClr val="122C4E"/>
-                </a:solidFill>
-                <a:latin typeface="Noto Sans CJK KR"/>
-              </a:defRPr>
-            </a:pPr>
-            <a:r>
-              <a:t>우선 확인: agv_interfaces 빌드·source·package dependency를 확인한다.</a:t>
-            </a:r>
-            <a:br/>
-            <a:r>
-              <a:t>수정 후: ros2 interface show agv_interfaces/msg/Detection</a:t>
-            </a:r>
-          </a:p>
-        </p:txBody>
-      </p:sp>
-      <p:sp>
-        <p:nvSpPr>
-          <p:cNvPr id="13" name="TextBox 12"/>
-          <p:cNvSpPr txBox="1"/>
-          <p:nvPr/>
-        </p:nvSpPr>
-        <p:spPr>
-          <a:xfrm>
-            <a:off x="822960" y="5102352"/>
-            <a:ext cx="10607040" cy="402336"/>
+      <p:pic>
+        <p:nvPicPr>
+          <p:cNvPr id="6" name="Picture 5" descr="validation_terminal.png"/>
+          <p:cNvPicPr>
+            <a:picLocks noChangeAspect="1"/>
+          </p:cNvPicPr>
+          <p:nvPr/>
+        </p:nvPicPr>
+        <p:blipFill>
+          <a:blip r:embed="rId2"/>
+          <a:stretch>
+            <a:fillRect/>
+          </a:stretch>
+        </p:blipFill>
+        <p:spPr>
+          <a:xfrm>
+            <a:off x="1616852" y="1353312"/>
+            <a:ext cx="8955247" cy="4800600"/>
+          </a:xfrm>
+          <a:prstGeom prst="rect">
+            <a:avLst/>
+          </a:prstGeom>
+        </p:spPr>
+      </p:pic>
+      <p:sp>
+        <p:nvSpPr>
+          <p:cNvPr id="7" name="TextBox 6"/>
+          <p:cNvSpPr txBox="1"/>
+          <p:nvPr/>
+        </p:nvSpPr>
+        <p:spPr>
+          <a:xfrm>
+            <a:off x="777240" y="6144768"/>
+            <a:ext cx="10607040" cy="310896"/>
           </a:xfrm>
           <a:prstGeom prst="rect">
             <a:avLst/>
@@ -15318,15 +15792,15 @@
               <a:spcAft>
                 <a:spcPts val="0"/>
               </a:spcAft>
-              <a:defRPr sz="1800" b="1">
-                <a:solidFill>
-                  <a:srgbClr val="DB7E22"/>
-                </a:solidFill>
-                <a:latin typeface="Noto Sans CJK KR"/>
-              </a:defRPr>
-            </a:pPr>
-            <a:r>
-              <a:t>공통 순서: ① 현재 폴더 ② source ③ 파일 경로 ④ 이름/타입/단위 ⑤ build·source 후 재실행</a:t>
+              <a:defRPr sz="1100" b="1">
+                <a:solidFill>
+                  <a:srgbClr val="2A8B5A"/>
+                </a:solidFill>
+                <a:latin typeface="Noto Sans CJK KR"/>
+              </a:defRPr>
+            </a:pPr>
+            <a:r>
+              <a:t>화면에서 확인: ① 명령/설정  ② 정상 출력 또는 화면  ③ 다음 검증 명령으로 재확인</a:t>
             </a:r>
           </a:p>
         </p:txBody>
@@ -15383,7 +15857,7 @@
               </a:defRPr>
             </a:pPr>
             <a:r>
-              <a:t>미니 실습: 값 하나를 바꾸고 결과를 비교한다</a:t>
+              <a:t>정상 결과: 실제 환경에서 확인한 출력</a:t>
             </a:r>
           </a:p>
         </p:txBody>
@@ -15422,7 +15896,7 @@
               </a:defRPr>
             </a:pPr>
             <a:r>
-              <a:t>정상 결과를 만든 뒤에는 한 번에 하나의 값만 바꿉니다.</a:t>
+              <a:t>실제 /vision/debug_image: fallback이 ‘target not visible’을 표시해 camera pose·FOV·world 배치를 점검하는 오류 사례</a:t>
             </a:r>
           </a:p>
         </p:txBody>
@@ -15505,157 +15979,65 @@
           </a:p>
         </p:txBody>
       </p:sp>
-      <p:sp>
-        <p:nvSpPr>
-          <p:cNvPr id="6" name="Rectangle 5"/>
-          <p:cNvSpPr/>
-          <p:nvPr/>
-        </p:nvSpPr>
-        <p:spPr>
-          <a:xfrm>
-            <a:off x="566928" y="1188720"/>
-            <a:ext cx="11064240" cy="347472"/>
-          </a:xfrm>
-          <a:prstGeom prst="rect">
-            <a:avLst/>
-          </a:prstGeom>
-          <a:solidFill>
-            <a:srgbClr val="F4F7FB"/>
-          </a:solidFill>
-          <a:ln>
-            <a:solidFill>
-              <a:srgbClr val="F4F7FB"/>
-            </a:solidFill>
-          </a:ln>
-        </p:spPr>
-        <p:style>
-          <a:lnRef idx="1">
-            <a:schemeClr val="accent1"/>
-          </a:lnRef>
-          <a:fillRef idx="3">
-            <a:schemeClr val="accent1"/>
-          </a:fillRef>
-          <a:effectRef idx="2">
-            <a:schemeClr val="accent1"/>
-          </a:effectRef>
-          <a:fontRef idx="minor">
-            <a:schemeClr val="lt1"/>
-          </a:fontRef>
-        </p:style>
-        <p:txBody>
-          <a:bodyPr rtlCol="0" anchor="ctr" wrap="square" lIns="73152" rIns="73152" tIns="36576" bIns="36576"/>
-          <a:lstStyle/>
-          <a:p>
-            <a:pPr algn="l">
-              <a:spcAft>
-                <a:spcPts val="0"/>
-              </a:spcAft>
-              <a:defRPr sz="1300" b="1">
-                <a:solidFill>
-                  <a:srgbClr val="122C4E"/>
-                </a:solidFill>
-                <a:latin typeface="Noto Sans CJK KR"/>
-              </a:defRPr>
-            </a:pPr>
-            <a:r>
-              <a:t>현재 단계 미니 실습    |    현재 폴더 ~/ros2_curri/agv_ws    |    현재 터미널</a:t>
-            </a:r>
-          </a:p>
-        </p:txBody>
-      </p:sp>
-      <p:sp>
-        <p:nvSpPr>
-          <p:cNvPr id="7" name="Rounded Rectangle 6"/>
-          <p:cNvSpPr/>
-          <p:nvPr/>
-        </p:nvSpPr>
-        <p:spPr>
-          <a:xfrm>
-            <a:off x="749808" y="1874519"/>
-            <a:ext cx="10652760" cy="1993392"/>
-          </a:xfrm>
-          <a:prstGeom prst="roundRect">
-            <a:avLst/>
-          </a:prstGeom>
-          <a:solidFill>
-            <a:srgbClr val="FFF8EB"/>
-          </a:solidFill>
-          <a:ln>
-            <a:solidFill>
-              <a:srgbClr val="ECC680"/>
-            </a:solidFill>
-          </a:ln>
-        </p:spPr>
-        <p:style>
-          <a:lnRef idx="1">
-            <a:schemeClr val="accent1"/>
-          </a:lnRef>
-          <a:fillRef idx="3">
-            <a:schemeClr val="accent1"/>
-          </a:fillRef>
-          <a:effectRef idx="2">
-            <a:schemeClr val="accent1"/>
-          </a:effectRef>
-          <a:fontRef idx="minor">
-            <a:schemeClr val="lt1"/>
-          </a:fontRef>
-        </p:style>
-        <p:txBody>
-          <a:bodyPr rtlCol="0" anchor="ctr" wrap="square" lIns="73152" rIns="73152" tIns="36576" bIns="36576"/>
+      <p:pic>
+        <p:nvPicPr>
+          <p:cNvPr id="6" name="Picture 5" descr="01_vision_debug_actual.png"/>
+          <p:cNvPicPr>
+            <a:picLocks noChangeAspect="1"/>
+          </p:cNvPicPr>
+          <p:nvPr/>
+        </p:nvPicPr>
+        <p:blipFill>
+          <a:blip r:embed="rId2"/>
+          <a:stretch>
+            <a:fillRect/>
+          </a:stretch>
+        </p:blipFill>
+        <p:spPr>
+          <a:xfrm>
+            <a:off x="2894076" y="1353312"/>
+            <a:ext cx="6400800" cy="4800600"/>
+          </a:xfrm>
+          <a:prstGeom prst="rect">
+            <a:avLst/>
+          </a:prstGeom>
+        </p:spPr>
+      </p:pic>
+      <p:sp>
+        <p:nvSpPr>
+          <p:cNvPr id="7" name="TextBox 6"/>
+          <p:cNvSpPr txBox="1"/>
+          <p:nvPr/>
+        </p:nvSpPr>
+        <p:spPr>
+          <a:xfrm>
+            <a:off x="777240" y="6144768"/>
+            <a:ext cx="10607040" cy="310896"/>
+          </a:xfrm>
+          <a:prstGeom prst="rect">
+            <a:avLst/>
+          </a:prstGeom>
+          <a:noFill/>
+        </p:spPr>
+        <p:txBody>
+          <a:bodyPr wrap="square" lIns="73152" rIns="73152" tIns="36576" bIns="36576">
+            <a:spAutoFit/>
+          </a:bodyPr>
           <a:lstStyle/>
           <a:p>
             <a:pPr algn="ctr">
               <a:spcAft>
                 <a:spcPts val="0"/>
               </a:spcAft>
-              <a:defRPr sz="2300" b="1">
-                <a:solidFill>
-                  <a:srgbClr val="122C4E"/>
-                </a:solidFill>
-                <a:latin typeface="Noto Sans CJK KR"/>
-              </a:defRPr>
-            </a:pPr>
-            <a:r>
-              <a:t>confidence_threshold를 0.50에서 0.70으로 바꿨을 때 어떤 검출이 제거될지 설명하고 parameter 값을 확인한다.</a:t>
-            </a:r>
-          </a:p>
-        </p:txBody>
-      </p:sp>
-      <p:sp>
-        <p:nvSpPr>
-          <p:cNvPr id="8" name="TextBox 7"/>
-          <p:cNvSpPr txBox="1"/>
-          <p:nvPr/>
-        </p:nvSpPr>
-        <p:spPr>
-          <a:xfrm>
-            <a:off x="877824" y="4590288"/>
-            <a:ext cx="10241280" cy="594360"/>
-          </a:xfrm>
-          <a:prstGeom prst="rect">
-            <a:avLst/>
-          </a:prstGeom>
-          <a:noFill/>
-        </p:spPr>
-        <p:txBody>
-          <a:bodyPr wrap="square" lIns="73152" rIns="73152" tIns="36576" bIns="36576">
-            <a:spAutoFit/>
-          </a:bodyPr>
-          <a:lstStyle/>
-          <a:p>
-            <a:pPr algn="ctr">
-              <a:spcAft>
-                <a:spcPts val="0"/>
-              </a:spcAft>
-              <a:defRPr sz="1900" b="1">
-                <a:solidFill>
-                  <a:srgbClr val="DB7E22"/>
-                </a:solidFill>
-                <a:latin typeface="Noto Sans CJK KR"/>
-              </a:defRPr>
-            </a:pPr>
-            <a:r>
-              <a:t>기록할 것: 바꾼 값(단위) · 기대한 변화 · 실제 출력/화면 · 원래 값으로 되돌린 결과</a:t>
+              <a:defRPr sz="1100" b="1">
+                <a:solidFill>
+                  <a:srgbClr val="2A8B5A"/>
+                </a:solidFill>
+                <a:latin typeface="Noto Sans CJK KR"/>
+              </a:defRPr>
+            </a:pPr>
+            <a:r>
+              <a:t>화면에서 확인: 명령·설정과 화면의 topic·frame·결과 이름을 대조합니다.</a:t>
             </a:r>
           </a:p>
         </p:txBody>
@@ -16131,7 +16513,7 @@
               </a:defRPr>
             </a:pPr>
             <a:r>
-              <a:t>체크포인트를 저장하고 다음 모듈로 넘긴다</a:t>
+              <a:t>객관적 검증 명령으로 완료를 확인한다</a:t>
             </a:r>
           </a:p>
         </p:txBody>
@@ -16170,7 +16552,7 @@
               </a:defRPr>
             </a:pPr>
             <a:r>
-              <a:t>현재 Complete는 다음 Starter의 기준선입니다.</a:t>
+              <a:t>화면만 보지 말고 topic·frame·파일·parameter를 다시 확인합니다.</a:t>
             </a:r>
           </a:p>
         </p:txBody>
@@ -16306,7 +16688,7 @@
               </a:defRPr>
             </a:pPr>
             <a:r>
-              <a:t>현재 단계 체크포인트    |    현재 폴더 ~/ros2_curri/agv_ws    |    현재 터미널</a:t>
+              <a:t>현재 단계 검증    |    현재 폴더 ~/ros2_curri/agv_ws    |    현재 터미널</a:t>
             </a:r>
           </a:p>
         </p:txBody>
@@ -16319,8 +16701,74 @@
         </p:nvSpPr>
         <p:spPr>
           <a:xfrm>
-            <a:off x="685800" y="1737360"/>
-            <a:ext cx="10972800" cy="3611880"/>
+            <a:off x="658368" y="1755648"/>
+            <a:ext cx="10972800" cy="2148840"/>
+          </a:xfrm>
+          <a:prstGeom prst="roundRect">
+            <a:avLst/>
+          </a:prstGeom>
+          <a:solidFill>
+            <a:srgbClr val="1D232D"/>
+          </a:solidFill>
+          <a:ln>
+            <a:solidFill>
+              <a:srgbClr val="1D232D"/>
+            </a:solidFill>
+          </a:ln>
+        </p:spPr>
+        <p:style>
+          <a:lnRef idx="1">
+            <a:schemeClr val="accent1"/>
+          </a:lnRef>
+          <a:fillRef idx="3">
+            <a:schemeClr val="accent1"/>
+          </a:fillRef>
+          <a:effectRef idx="2">
+            <a:schemeClr val="accent1"/>
+          </a:effectRef>
+          <a:fontRef idx="minor">
+            <a:schemeClr val="lt1"/>
+          </a:fontRef>
+        </p:style>
+        <p:txBody>
+          <a:bodyPr rtlCol="0" anchor="ctr" wrap="square" lIns="73152" rIns="73152" tIns="36576" bIns="36576"/>
+          <a:lstStyle/>
+          <a:p>
+            <a:pPr algn="l">
+              <a:spcAft>
+                <a:spcPts val="0"/>
+              </a:spcAft>
+              <a:defRPr sz="1600" b="0">
+                <a:solidFill>
+                  <a:srgbClr val="FFFFFF"/>
+                </a:solidFill>
+                <a:latin typeface="DejaVu Sans Mono"/>
+              </a:defRPr>
+            </a:pPr>
+            <a:r>
+              <a:t>ros2 interface show agv_interfaces/msg/Detection</a:t>
+            </a:r>
+            <a:br/>
+            <a:r>
+              <a:t>ros2 topic info /detections</a:t>
+            </a:r>
+            <a:br/>
+            <a:r>
+              <a:t>ros2 param get /yolo_node confidence_threshold</a:t>
+            </a:r>
+          </a:p>
+        </p:txBody>
+      </p:sp>
+      <p:sp>
+        <p:nvSpPr>
+          <p:cNvPr id="8" name="Rounded Rectangle 7"/>
+          <p:cNvSpPr/>
+          <p:nvPr/>
+        </p:nvSpPr>
+        <p:spPr>
+          <a:xfrm>
+            <a:off x="658368" y="4206240"/>
+            <a:ext cx="10972800" cy="1554480"/>
           </a:xfrm>
           <a:prstGeom prst="roundRect">
             <a:avLst/>
@@ -16330,7 +16778,7 @@
           </a:solidFill>
           <a:ln>
             <a:solidFill>
-              <a:srgbClr val="D2DCE8"/>
+              <a:srgbClr val="D1DFD5"/>
             </a:solidFill>
           </a:ln>
         </p:spPr>
@@ -16349,40 +16797,65 @@
           </a:fontRef>
         </p:style>
         <p:txBody>
-          <a:bodyPr rtlCol="0" anchor="ctr"/>
-          <a:lstStyle/>
-          <a:p>
-            <a:pPr algn="ctr"/>
-          </a:p>
-        </p:txBody>
-      </p:sp>
-      <p:sp>
-        <p:nvSpPr>
-          <p:cNvPr id="8" name="TextBox 7"/>
-          <p:cNvSpPr txBox="1"/>
-          <p:nvPr/>
-        </p:nvSpPr>
-        <p:spPr>
-          <a:xfrm>
-            <a:off x="896112" y="1993392"/>
-            <a:ext cx="10332720" cy="2971800"/>
-          </a:xfrm>
-          <a:prstGeom prst="rect">
-            <a:avLst/>
-          </a:prstGeom>
-          <a:noFill/>
-        </p:spPr>
-        <p:txBody>
-          <a:bodyPr wrap="square" lIns="109728" rIns="109728">
-            <a:spAutoFit/>
-          </a:bodyPr>
-          <a:lstStyle/>
-          <a:p>
-            <a:pPr>
-              <a:spcAft>
-                <a:spcPts val="800"/>
-              </a:spcAft>
-              <a:defRPr sz="1800">
+          <a:bodyPr rtlCol="0" anchor="ctr" wrap="square" lIns="73152" rIns="73152" tIns="36576" bIns="36576"/>
+          <a:lstStyle/>
+          <a:p>
+            <a:pPr algn="l">
+              <a:spcAft>
+                <a:spcPts val="0"/>
+              </a:spcAft>
+              <a:defRPr sz="1800" b="1">
+                <a:solidFill>
+                  <a:srgbClr val="2A8B5A"/>
+                </a:solidFill>
+                <a:latin typeface="Noto Sans CJK KR"/>
+              </a:defRPr>
+            </a:pPr>
+            <a:r>
+              <a:t>완료 체크</a:t>
+            </a:r>
+            <a:br/>
+            <a:r>
+              <a:t>□ 명령이 오류 없이 실행된다.</a:t>
+            </a:r>
+            <a:br/>
+            <a:r>
+              <a:t>□ 기대한 파일·topic·frame·parameter 이름이 보인다.</a:t>
+            </a:r>
+            <a:br/>
+            <a:r>
+              <a:t>□ 값의 단위와 방향을 한 문장으로 설명할 수 있다.</a:t>
+            </a:r>
+          </a:p>
+        </p:txBody>
+      </p:sp>
+      <p:sp>
+        <p:nvSpPr>
+          <p:cNvPr id="9" name="TextBox 8"/>
+          <p:cNvSpPr txBox="1"/>
+          <p:nvPr/>
+        </p:nvSpPr>
+        <p:spPr>
+          <a:xfrm>
+            <a:off x="731520" y="5989320"/>
+            <a:ext cx="10789920" cy="237744"/>
+          </a:xfrm>
+          <a:prstGeom prst="rect">
+            <a:avLst/>
+          </a:prstGeom>
+          <a:noFill/>
+        </p:spPr>
+        <p:txBody>
+          <a:bodyPr wrap="square" lIns="73152" rIns="73152" tIns="36576" bIns="36576">
+            <a:spAutoFit/>
+          </a:bodyPr>
+          <a:lstStyle/>
+          <a:p>
+            <a:pPr algn="l">
+              <a:spcAft>
+                <a:spcPts val="0"/>
+              </a:spcAft>
+              <a:defRPr sz="1500" b="1">
                 <a:solidFill>
                   <a:srgbClr val="122C4E"/>
                 </a:solidFill>
@@ -16390,110 +16863,7 @@
               </a:defRPr>
             </a:pPr>
             <a:r>
-              <a:t>• □ 완료 화면: /detections message 형식과 YOLO enable_yolo/model_path/threshold parameter를 확인한다.</a:t>
-            </a:r>
-          </a:p>
-          <a:p>
-            <a:pPr>
-              <a:spcAft>
-                <a:spcPts val="800"/>
-              </a:spcAft>
-              <a:defRPr sz="1800">
-                <a:solidFill>
-                  <a:srgbClr val="122C4E"/>
-                </a:solidFill>
-                <a:latin typeface="Noto Sans CJK KR"/>
-              </a:defRPr>
-            </a:pPr>
-            <a:r>
-              <a:t>• □ Complete 파일: blocks/E_autonomy_logic/M17_yolo_vision/complete/</a:t>
-            </a:r>
-          </a:p>
-          <a:p>
-            <a:pPr>
-              <a:spcAft>
-                <a:spcPts val="800"/>
-              </a:spcAft>
-              <a:defRPr sz="1800">
-                <a:solidFill>
-                  <a:srgbClr val="122C4E"/>
-                </a:solidFill>
-                <a:latin typeface="Noto Sans CJK KR"/>
-              </a:defRPr>
-            </a:pPr>
-            <a:r>
-              <a:t>• □ 정상 로그·캡처: logs/validation.log, screenshots/validation_terminal.png</a:t>
-            </a:r>
-          </a:p>
-          <a:p>
-            <a:pPr>
-              <a:spcAft>
-                <a:spcPts val="800"/>
-              </a:spcAft>
-              <a:defRPr sz="1800">
-                <a:solidFill>
-                  <a:srgbClr val="122C4E"/>
-                </a:solidFill>
-                <a:latin typeface="Noto Sans CJK KR"/>
-              </a:defRPr>
-            </a:pPr>
-            <a:r>
-              <a:t>• □ 버전 식별: CHECKSUM_or_TAG.txt의 SHA-256 manifest</a:t>
-            </a:r>
-          </a:p>
-          <a:p>
-            <a:pPr>
-              <a:spcAft>
-                <a:spcPts val="800"/>
-              </a:spcAft>
-              <a:defRPr sz="1800">
-                <a:solidFill>
-                  <a:srgbClr val="122C4E"/>
-                </a:solidFill>
-                <a:latin typeface="Noto Sans CJK KR"/>
-              </a:defRPr>
-            </a:pPr>
-            <a:r>
-              <a:t>• □ 다음 시작 조건: M18 safety fusion</a:t>
-            </a:r>
-          </a:p>
-        </p:txBody>
-      </p:sp>
-      <p:sp>
-        <p:nvSpPr>
-          <p:cNvPr id="9" name="TextBox 8"/>
-          <p:cNvSpPr txBox="1"/>
-          <p:nvPr/>
-        </p:nvSpPr>
-        <p:spPr>
-          <a:xfrm>
-            <a:off x="868680" y="5596128"/>
-            <a:ext cx="10515600" cy="338328"/>
-          </a:xfrm>
-          <a:prstGeom prst="rect">
-            <a:avLst/>
-          </a:prstGeom>
-          <a:noFill/>
-        </p:spPr>
-        <p:txBody>
-          <a:bodyPr wrap="square" lIns="73152" rIns="73152" tIns="36576" bIns="36576">
-            <a:spAutoFit/>
-          </a:bodyPr>
-          <a:lstStyle/>
-          <a:p>
-            <a:pPr algn="ctr">
-              <a:spcAft>
-                <a:spcPts val="0"/>
-              </a:spcAft>
-              <a:defRPr sz="1700" b="1">
-                <a:solidFill>
-                  <a:srgbClr val="2A8B5A"/>
-                </a:solidFill>
-                <a:latin typeface="Noto Sans CJK KR"/>
-              </a:defRPr>
-            </a:pPr>
-            <a:r>
-              <a:t>다음 모듈을 시작하기 전, 이 슬라이드의 Complete와 다음 모듈의 Starter를 비교합니다.</a:t>
+              <a:t>완료 조건: /detections message 형식과 YOLO enable_yolo/model_path/threshold parameter를 확인한다.</a:t>
             </a:r>
           </a:p>
         </p:txBody>
@@ -16550,6 +16920,1279 @@
               </a:defRPr>
             </a:pPr>
             <a:r>
+              <a:t>막히면: 증상 → 우선 확인 → 재검증</a:t>
+            </a:r>
+          </a:p>
+        </p:txBody>
+      </p:sp>
+      <p:sp>
+        <p:nvSpPr>
+          <p:cNvPr id="3" name="TextBox 2"/>
+          <p:cNvSpPr txBox="1"/>
+          <p:nvPr/>
+        </p:nvSpPr>
+        <p:spPr>
+          <a:xfrm>
+            <a:off x="603504" y="859536"/>
+            <a:ext cx="10698480" cy="292608"/>
+          </a:xfrm>
+          <a:prstGeom prst="rect">
+            <a:avLst/>
+          </a:prstGeom>
+          <a:noFill/>
+        </p:spPr>
+        <p:txBody>
+          <a:bodyPr wrap="square" lIns="73152" rIns="73152" tIns="36576" bIns="36576">
+            <a:spAutoFit/>
+          </a:bodyPr>
+          <a:lstStyle/>
+          <a:p>
+            <a:pPr algn="l">
+              <a:spcAft>
+                <a:spcPts val="0"/>
+              </a:spcAft>
+              <a:defRPr sz="1700" b="0">
+                <a:solidFill>
+                  <a:srgbClr val="5C6672"/>
+                </a:solidFill>
+                <a:latin typeface="Noto Sans CJK KR"/>
+              </a:defRPr>
+            </a:pPr>
+            <a:r>
+              <a:t>오류 메시지를 숨기지 않고 같은 순서로 점검합니다.</a:t>
+            </a:r>
+          </a:p>
+        </p:txBody>
+      </p:sp>
+      <p:sp>
+        <p:nvSpPr>
+          <p:cNvPr id="4" name="TextBox 3"/>
+          <p:cNvSpPr txBox="1"/>
+          <p:nvPr/>
+        </p:nvSpPr>
+        <p:spPr>
+          <a:xfrm>
+            <a:off x="530352" y="6510528"/>
+            <a:ext cx="7772400" cy="201168"/>
+          </a:xfrm>
+          <a:prstGeom prst="rect">
+            <a:avLst/>
+          </a:prstGeom>
+          <a:noFill/>
+        </p:spPr>
+        <p:txBody>
+          <a:bodyPr wrap="square" lIns="73152" rIns="73152" tIns="36576" bIns="36576">
+            <a:spAutoFit/>
+          </a:bodyPr>
+          <a:lstStyle/>
+          <a:p>
+            <a:pPr algn="l">
+              <a:spcAft>
+                <a:spcPts val="0"/>
+              </a:spcAft>
+              <a:defRPr sz="1000" b="0">
+                <a:solidFill>
+                  <a:srgbClr val="5C6672"/>
+                </a:solidFill>
+                <a:latin typeface="Noto Sans CJK KR"/>
+              </a:defRPr>
+            </a:pPr>
+            <a:r>
+              <a:t>ROS 2 Jazzy · Gazebo Harmonic · M17 · 따라 하기형 AGV 실습</a:t>
+            </a:r>
+          </a:p>
+        </p:txBody>
+      </p:sp>
+      <p:sp>
+        <p:nvSpPr>
+          <p:cNvPr id="5" name="TextBox 4"/>
+          <p:cNvSpPr txBox="1"/>
+          <p:nvPr/>
+        </p:nvSpPr>
+        <p:spPr>
+          <a:xfrm>
+            <a:off x="9144000" y="6510528"/>
+            <a:ext cx="2468880" cy="201168"/>
+          </a:xfrm>
+          <a:prstGeom prst="rect">
+            <a:avLst/>
+          </a:prstGeom>
+          <a:noFill/>
+        </p:spPr>
+        <p:txBody>
+          <a:bodyPr wrap="square" lIns="73152" rIns="73152" tIns="36576" bIns="36576">
+            <a:spAutoFit/>
+          </a:bodyPr>
+          <a:lstStyle/>
+          <a:p>
+            <a:pPr algn="r">
+              <a:spcAft>
+                <a:spcPts val="0"/>
+              </a:spcAft>
+              <a:defRPr sz="1000" b="0">
+                <a:solidFill>
+                  <a:srgbClr val="5C6672"/>
+                </a:solidFill>
+                <a:latin typeface="Noto Sans CJK KR"/>
+              </a:defRPr>
+            </a:pPr>
+            <a:r>
+              <a:t>명령·파일 경로는 슬라이드에서 복사 가능</a:t>
+            </a:r>
+          </a:p>
+        </p:txBody>
+      </p:sp>
+      <p:sp>
+        <p:nvSpPr>
+          <p:cNvPr id="6" name="Rectangle 5"/>
+          <p:cNvSpPr/>
+          <p:nvPr/>
+        </p:nvSpPr>
+        <p:spPr>
+          <a:xfrm>
+            <a:off x="566928" y="1188720"/>
+            <a:ext cx="11064240" cy="347472"/>
+          </a:xfrm>
+          <a:prstGeom prst="rect">
+            <a:avLst/>
+          </a:prstGeom>
+          <a:solidFill>
+            <a:srgbClr val="F4F7FB"/>
+          </a:solidFill>
+          <a:ln>
+            <a:solidFill>
+              <a:srgbClr val="F4F7FB"/>
+            </a:solidFill>
+          </a:ln>
+        </p:spPr>
+        <p:style>
+          <a:lnRef idx="1">
+            <a:schemeClr val="accent1"/>
+          </a:lnRef>
+          <a:fillRef idx="3">
+            <a:schemeClr val="accent1"/>
+          </a:fillRef>
+          <a:effectRef idx="2">
+            <a:schemeClr val="accent1"/>
+          </a:effectRef>
+          <a:fontRef idx="minor">
+            <a:schemeClr val="lt1"/>
+          </a:fontRef>
+        </p:style>
+        <p:txBody>
+          <a:bodyPr rtlCol="0" anchor="ctr" wrap="square" lIns="73152" rIns="73152" tIns="36576" bIns="36576"/>
+          <a:lstStyle/>
+          <a:p>
+            <a:pPr algn="l">
+              <a:spcAft>
+                <a:spcPts val="0"/>
+              </a:spcAft>
+              <a:defRPr sz="1300" b="1">
+                <a:solidFill>
+                  <a:srgbClr val="122C4E"/>
+                </a:solidFill>
+                <a:latin typeface="Noto Sans CJK KR"/>
+              </a:defRPr>
+            </a:pPr>
+            <a:r>
+              <a:t>현재 단계 오류 대응    |    현재 폴더 ~/ros2_curri/agv_ws    |    현재 터미널</a:t>
+            </a:r>
+          </a:p>
+        </p:txBody>
+      </p:sp>
+      <p:sp>
+        <p:nvSpPr>
+          <p:cNvPr id="7" name="Rounded Rectangle 6"/>
+          <p:cNvSpPr/>
+          <p:nvPr/>
+        </p:nvSpPr>
+        <p:spPr>
+          <a:xfrm>
+            <a:off x="694944" y="1755648"/>
+            <a:ext cx="10972800" cy="1115568"/>
+          </a:xfrm>
+          <a:prstGeom prst="roundRect">
+            <a:avLst/>
+          </a:prstGeom>
+          <a:solidFill>
+            <a:srgbClr val="FFF7F4"/>
+          </a:solidFill>
+          <a:ln>
+            <a:solidFill>
+              <a:srgbClr val="EDBEB4"/>
+            </a:solidFill>
+          </a:ln>
+        </p:spPr>
+        <p:style>
+          <a:lnRef idx="1">
+            <a:schemeClr val="accent1"/>
+          </a:lnRef>
+          <a:fillRef idx="3">
+            <a:schemeClr val="accent1"/>
+          </a:fillRef>
+          <a:effectRef idx="2">
+            <a:schemeClr val="accent1"/>
+          </a:effectRef>
+          <a:fontRef idx="minor">
+            <a:schemeClr val="lt1"/>
+          </a:fontRef>
+        </p:style>
+        <p:txBody>
+          <a:bodyPr rtlCol="0" anchor="ctr"/>
+          <a:lstStyle/>
+          <a:p>
+            <a:pPr algn="ctr"/>
+          </a:p>
+        </p:txBody>
+      </p:sp>
+      <p:sp>
+        <p:nvSpPr>
+          <p:cNvPr id="8" name="TextBox 7"/>
+          <p:cNvSpPr txBox="1"/>
+          <p:nvPr/>
+        </p:nvSpPr>
+        <p:spPr>
+          <a:xfrm>
+            <a:off x="896112" y="1901952"/>
+            <a:ext cx="2926080" cy="274320"/>
+          </a:xfrm>
+          <a:prstGeom prst="rect">
+            <a:avLst/>
+          </a:prstGeom>
+          <a:noFill/>
+        </p:spPr>
+        <p:txBody>
+          <a:bodyPr wrap="square" lIns="73152" rIns="73152" tIns="36576" bIns="36576">
+            <a:spAutoFit/>
+          </a:bodyPr>
+          <a:lstStyle/>
+          <a:p>
+            <a:pPr algn="l">
+              <a:spcAft>
+                <a:spcPts val="0"/>
+              </a:spcAft>
+              <a:defRPr sz="1800" b="1">
+                <a:solidFill>
+                  <a:srgbClr val="BE3B3B"/>
+                </a:solidFill>
+                <a:latin typeface="Noto Sans CJK KR"/>
+              </a:defRPr>
+            </a:pPr>
+            <a:r>
+              <a:t>증상 1: 모델 파일을 못 찾음</a:t>
+            </a:r>
+          </a:p>
+        </p:txBody>
+      </p:sp>
+      <p:sp>
+        <p:nvSpPr>
+          <p:cNvPr id="9" name="TextBox 8"/>
+          <p:cNvSpPr txBox="1"/>
+          <p:nvPr/>
+        </p:nvSpPr>
+        <p:spPr>
+          <a:xfrm>
+            <a:off x="3794760" y="1883664"/>
+            <a:ext cx="7543800" cy="621792"/>
+          </a:xfrm>
+          <a:prstGeom prst="rect">
+            <a:avLst/>
+          </a:prstGeom>
+          <a:noFill/>
+        </p:spPr>
+        <p:txBody>
+          <a:bodyPr wrap="square" lIns="73152" rIns="73152" tIns="36576" bIns="36576">
+            <a:spAutoFit/>
+          </a:bodyPr>
+          <a:lstStyle/>
+          <a:p>
+            <a:pPr algn="l">
+              <a:spcAft>
+                <a:spcPts val="0"/>
+              </a:spcAft>
+              <a:defRPr sz="1600" b="0">
+                <a:solidFill>
+                  <a:srgbClr val="122C4E"/>
+                </a:solidFill>
+                <a:latin typeface="Noto Sans CJK KR"/>
+              </a:defRPr>
+            </a:pPr>
+            <a:r>
+              <a:t>우선 확인: model_path와 모델 파일 배포 정책을 확인한다.</a:t>
+            </a:r>
+            <a:br/>
+            <a:r>
+              <a:t>수정 후: ros2 interface show agv_interfaces/msg/Detection</a:t>
+            </a:r>
+          </a:p>
+        </p:txBody>
+      </p:sp>
+      <p:sp>
+        <p:nvSpPr>
+          <p:cNvPr id="10" name="Rounded Rectangle 9"/>
+          <p:cNvSpPr/>
+          <p:nvPr/>
+        </p:nvSpPr>
+        <p:spPr>
+          <a:xfrm>
+            <a:off x="694944" y="3172968"/>
+            <a:ext cx="10972800" cy="1115568"/>
+          </a:xfrm>
+          <a:prstGeom prst="roundRect">
+            <a:avLst/>
+          </a:prstGeom>
+          <a:solidFill>
+            <a:srgbClr val="FFF7F4"/>
+          </a:solidFill>
+          <a:ln>
+            <a:solidFill>
+              <a:srgbClr val="EDBEB4"/>
+            </a:solidFill>
+          </a:ln>
+        </p:spPr>
+        <p:style>
+          <a:lnRef idx="1">
+            <a:schemeClr val="accent1"/>
+          </a:lnRef>
+          <a:fillRef idx="3">
+            <a:schemeClr val="accent1"/>
+          </a:fillRef>
+          <a:effectRef idx="2">
+            <a:schemeClr val="accent1"/>
+          </a:effectRef>
+          <a:fontRef idx="minor">
+            <a:schemeClr val="lt1"/>
+          </a:fontRef>
+        </p:style>
+        <p:txBody>
+          <a:bodyPr rtlCol="0" anchor="ctr"/>
+          <a:lstStyle/>
+          <a:p>
+            <a:pPr algn="ctr"/>
+          </a:p>
+        </p:txBody>
+      </p:sp>
+      <p:sp>
+        <p:nvSpPr>
+          <p:cNvPr id="11" name="TextBox 10"/>
+          <p:cNvSpPr txBox="1"/>
+          <p:nvPr/>
+        </p:nvSpPr>
+        <p:spPr>
+          <a:xfrm>
+            <a:off x="896112" y="3319272"/>
+            <a:ext cx="2926080" cy="274320"/>
+          </a:xfrm>
+          <a:prstGeom prst="rect">
+            <a:avLst/>
+          </a:prstGeom>
+          <a:noFill/>
+        </p:spPr>
+        <p:txBody>
+          <a:bodyPr wrap="square" lIns="73152" rIns="73152" tIns="36576" bIns="36576">
+            <a:spAutoFit/>
+          </a:bodyPr>
+          <a:lstStyle/>
+          <a:p>
+            <a:pPr algn="l">
+              <a:spcAft>
+                <a:spcPts val="0"/>
+              </a:spcAft>
+              <a:defRPr sz="1800" b="1">
+                <a:solidFill>
+                  <a:srgbClr val="BE3B3B"/>
+                </a:solidFill>
+                <a:latin typeface="Noto Sans CJK KR"/>
+              </a:defRPr>
+            </a:pPr>
+            <a:r>
+              <a:t>증상 2: Custom msg import 실패</a:t>
+            </a:r>
+          </a:p>
+        </p:txBody>
+      </p:sp>
+      <p:sp>
+        <p:nvSpPr>
+          <p:cNvPr id="12" name="TextBox 11"/>
+          <p:cNvSpPr txBox="1"/>
+          <p:nvPr/>
+        </p:nvSpPr>
+        <p:spPr>
+          <a:xfrm>
+            <a:off x="3794760" y="3300984"/>
+            <a:ext cx="7543800" cy="621792"/>
+          </a:xfrm>
+          <a:prstGeom prst="rect">
+            <a:avLst/>
+          </a:prstGeom>
+          <a:noFill/>
+        </p:spPr>
+        <p:txBody>
+          <a:bodyPr wrap="square" lIns="73152" rIns="73152" tIns="36576" bIns="36576">
+            <a:spAutoFit/>
+          </a:bodyPr>
+          <a:lstStyle/>
+          <a:p>
+            <a:pPr algn="l">
+              <a:spcAft>
+                <a:spcPts val="0"/>
+              </a:spcAft>
+              <a:defRPr sz="1600" b="0">
+                <a:solidFill>
+                  <a:srgbClr val="122C4E"/>
+                </a:solidFill>
+                <a:latin typeface="Noto Sans CJK KR"/>
+              </a:defRPr>
+            </a:pPr>
+            <a:r>
+              <a:t>우선 확인: agv_interfaces 빌드·source·package dependency를 확인한다.</a:t>
+            </a:r>
+            <a:br/>
+            <a:r>
+              <a:t>수정 후: ros2 interface show agv_interfaces/msg/Detection</a:t>
+            </a:r>
+          </a:p>
+        </p:txBody>
+      </p:sp>
+      <p:sp>
+        <p:nvSpPr>
+          <p:cNvPr id="13" name="TextBox 12"/>
+          <p:cNvSpPr txBox="1"/>
+          <p:nvPr/>
+        </p:nvSpPr>
+        <p:spPr>
+          <a:xfrm>
+            <a:off x="822960" y="5102352"/>
+            <a:ext cx="10607040" cy="402336"/>
+          </a:xfrm>
+          <a:prstGeom prst="rect">
+            <a:avLst/>
+          </a:prstGeom>
+          <a:noFill/>
+        </p:spPr>
+        <p:txBody>
+          <a:bodyPr wrap="square" lIns="73152" rIns="73152" tIns="36576" bIns="36576">
+            <a:spAutoFit/>
+          </a:bodyPr>
+          <a:lstStyle/>
+          <a:p>
+            <a:pPr algn="ctr">
+              <a:spcAft>
+                <a:spcPts val="0"/>
+              </a:spcAft>
+              <a:defRPr sz="1800" b="1">
+                <a:solidFill>
+                  <a:srgbClr val="DB7E22"/>
+                </a:solidFill>
+                <a:latin typeface="Noto Sans CJK KR"/>
+              </a:defRPr>
+            </a:pPr>
+            <a:r>
+              <a:t>공통 순서: ① 현재 폴더 ② source ③ 파일 경로 ④ 이름/타입/단위 ⑤ build·source 후 재실행</a:t>
+            </a:r>
+          </a:p>
+        </p:txBody>
+      </p:sp>
+    </p:spTree>
+  </p:cSld>
+  <p:clrMapOvr>
+    <a:masterClrMapping/>
+  </p:clrMapOvr>
+</p:sld>
+</file>
+
+<file path=ppt/slides/slide32.xml><?xml version="1.0" encoding="utf-8"?>
+<p:sld xmlns:a="http://schemas.openxmlformats.org/drawingml/2006/main" xmlns:p="http://schemas.openxmlformats.org/presentationml/2006/main" xmlns:r="http://schemas.openxmlformats.org/officeDocument/2006/relationships">
+  <p:cSld>
+    <p:spTree>
+      <p:nvGrpSpPr>
+        <p:cNvPr id="1" name=""/>
+        <p:cNvGrpSpPr/>
+        <p:nvPr/>
+      </p:nvGrpSpPr>
+      <p:grpSpPr/>
+      <p:sp>
+        <p:nvSpPr>
+          <p:cNvPr id="2" name="TextBox 1"/>
+          <p:cNvSpPr txBox="1"/>
+          <p:nvPr/>
+        </p:nvSpPr>
+        <p:spPr>
+          <a:xfrm>
+            <a:off x="566928" y="347472"/>
+            <a:ext cx="10881360" cy="438912"/>
+          </a:xfrm>
+          <a:prstGeom prst="rect">
+            <a:avLst/>
+          </a:prstGeom>
+          <a:noFill/>
+        </p:spPr>
+        <p:txBody>
+          <a:bodyPr wrap="square" lIns="73152" rIns="73152" tIns="36576" bIns="36576">
+            <a:spAutoFit/>
+          </a:bodyPr>
+          <a:lstStyle/>
+          <a:p>
+            <a:pPr algn="l">
+              <a:spcAft>
+                <a:spcPts val="0"/>
+              </a:spcAft>
+              <a:defRPr sz="3200" b="1">
+                <a:solidFill>
+                  <a:srgbClr val="122C4E"/>
+                </a:solidFill>
+                <a:latin typeface="Noto Sans CJK KR"/>
+              </a:defRPr>
+            </a:pPr>
+            <a:r>
+              <a:t>미니 실습: 값 하나를 바꾸고 결과를 비교한다</a:t>
+            </a:r>
+          </a:p>
+        </p:txBody>
+      </p:sp>
+      <p:sp>
+        <p:nvSpPr>
+          <p:cNvPr id="3" name="TextBox 2"/>
+          <p:cNvSpPr txBox="1"/>
+          <p:nvPr/>
+        </p:nvSpPr>
+        <p:spPr>
+          <a:xfrm>
+            <a:off x="603504" y="859536"/>
+            <a:ext cx="10698480" cy="292608"/>
+          </a:xfrm>
+          <a:prstGeom prst="rect">
+            <a:avLst/>
+          </a:prstGeom>
+          <a:noFill/>
+        </p:spPr>
+        <p:txBody>
+          <a:bodyPr wrap="square" lIns="73152" rIns="73152" tIns="36576" bIns="36576">
+            <a:spAutoFit/>
+          </a:bodyPr>
+          <a:lstStyle/>
+          <a:p>
+            <a:pPr algn="l">
+              <a:spcAft>
+                <a:spcPts val="0"/>
+              </a:spcAft>
+              <a:defRPr sz="1700" b="0">
+                <a:solidFill>
+                  <a:srgbClr val="5C6672"/>
+                </a:solidFill>
+                <a:latin typeface="Noto Sans CJK KR"/>
+              </a:defRPr>
+            </a:pPr>
+            <a:r>
+              <a:t>정상 결과를 만든 뒤에는 한 번에 하나의 값만 바꿉니다.</a:t>
+            </a:r>
+          </a:p>
+        </p:txBody>
+      </p:sp>
+      <p:sp>
+        <p:nvSpPr>
+          <p:cNvPr id="4" name="TextBox 3"/>
+          <p:cNvSpPr txBox="1"/>
+          <p:nvPr/>
+        </p:nvSpPr>
+        <p:spPr>
+          <a:xfrm>
+            <a:off x="530352" y="6510528"/>
+            <a:ext cx="7772400" cy="201168"/>
+          </a:xfrm>
+          <a:prstGeom prst="rect">
+            <a:avLst/>
+          </a:prstGeom>
+          <a:noFill/>
+        </p:spPr>
+        <p:txBody>
+          <a:bodyPr wrap="square" lIns="73152" rIns="73152" tIns="36576" bIns="36576">
+            <a:spAutoFit/>
+          </a:bodyPr>
+          <a:lstStyle/>
+          <a:p>
+            <a:pPr algn="l">
+              <a:spcAft>
+                <a:spcPts val="0"/>
+              </a:spcAft>
+              <a:defRPr sz="1000" b="0">
+                <a:solidFill>
+                  <a:srgbClr val="5C6672"/>
+                </a:solidFill>
+                <a:latin typeface="Noto Sans CJK KR"/>
+              </a:defRPr>
+            </a:pPr>
+            <a:r>
+              <a:t>ROS 2 Jazzy · Gazebo Harmonic · M17 · 따라 하기형 AGV 실습</a:t>
+            </a:r>
+          </a:p>
+        </p:txBody>
+      </p:sp>
+      <p:sp>
+        <p:nvSpPr>
+          <p:cNvPr id="5" name="TextBox 4"/>
+          <p:cNvSpPr txBox="1"/>
+          <p:nvPr/>
+        </p:nvSpPr>
+        <p:spPr>
+          <a:xfrm>
+            <a:off x="9144000" y="6510528"/>
+            <a:ext cx="2468880" cy="201168"/>
+          </a:xfrm>
+          <a:prstGeom prst="rect">
+            <a:avLst/>
+          </a:prstGeom>
+          <a:noFill/>
+        </p:spPr>
+        <p:txBody>
+          <a:bodyPr wrap="square" lIns="73152" rIns="73152" tIns="36576" bIns="36576">
+            <a:spAutoFit/>
+          </a:bodyPr>
+          <a:lstStyle/>
+          <a:p>
+            <a:pPr algn="r">
+              <a:spcAft>
+                <a:spcPts val="0"/>
+              </a:spcAft>
+              <a:defRPr sz="1000" b="0">
+                <a:solidFill>
+                  <a:srgbClr val="5C6672"/>
+                </a:solidFill>
+                <a:latin typeface="Noto Sans CJK KR"/>
+              </a:defRPr>
+            </a:pPr>
+            <a:r>
+              <a:t>명령·파일 경로는 슬라이드에서 복사 가능</a:t>
+            </a:r>
+          </a:p>
+        </p:txBody>
+      </p:sp>
+      <p:sp>
+        <p:nvSpPr>
+          <p:cNvPr id="6" name="Rectangle 5"/>
+          <p:cNvSpPr/>
+          <p:nvPr/>
+        </p:nvSpPr>
+        <p:spPr>
+          <a:xfrm>
+            <a:off x="566928" y="1188720"/>
+            <a:ext cx="11064240" cy="347472"/>
+          </a:xfrm>
+          <a:prstGeom prst="rect">
+            <a:avLst/>
+          </a:prstGeom>
+          <a:solidFill>
+            <a:srgbClr val="F4F7FB"/>
+          </a:solidFill>
+          <a:ln>
+            <a:solidFill>
+              <a:srgbClr val="F4F7FB"/>
+            </a:solidFill>
+          </a:ln>
+        </p:spPr>
+        <p:style>
+          <a:lnRef idx="1">
+            <a:schemeClr val="accent1"/>
+          </a:lnRef>
+          <a:fillRef idx="3">
+            <a:schemeClr val="accent1"/>
+          </a:fillRef>
+          <a:effectRef idx="2">
+            <a:schemeClr val="accent1"/>
+          </a:effectRef>
+          <a:fontRef idx="minor">
+            <a:schemeClr val="lt1"/>
+          </a:fontRef>
+        </p:style>
+        <p:txBody>
+          <a:bodyPr rtlCol="0" anchor="ctr" wrap="square" lIns="73152" rIns="73152" tIns="36576" bIns="36576"/>
+          <a:lstStyle/>
+          <a:p>
+            <a:pPr algn="l">
+              <a:spcAft>
+                <a:spcPts val="0"/>
+              </a:spcAft>
+              <a:defRPr sz="1300" b="1">
+                <a:solidFill>
+                  <a:srgbClr val="122C4E"/>
+                </a:solidFill>
+                <a:latin typeface="Noto Sans CJK KR"/>
+              </a:defRPr>
+            </a:pPr>
+            <a:r>
+              <a:t>현재 단계 미니 실습    |    현재 폴더 ~/ros2_curri/agv_ws    |    현재 터미널</a:t>
+            </a:r>
+          </a:p>
+        </p:txBody>
+      </p:sp>
+      <p:sp>
+        <p:nvSpPr>
+          <p:cNvPr id="7" name="Rounded Rectangle 6"/>
+          <p:cNvSpPr/>
+          <p:nvPr/>
+        </p:nvSpPr>
+        <p:spPr>
+          <a:xfrm>
+            <a:off x="749808" y="1874519"/>
+            <a:ext cx="10652760" cy="1993392"/>
+          </a:xfrm>
+          <a:prstGeom prst="roundRect">
+            <a:avLst/>
+          </a:prstGeom>
+          <a:solidFill>
+            <a:srgbClr val="FFF8EB"/>
+          </a:solidFill>
+          <a:ln>
+            <a:solidFill>
+              <a:srgbClr val="ECC680"/>
+            </a:solidFill>
+          </a:ln>
+        </p:spPr>
+        <p:style>
+          <a:lnRef idx="1">
+            <a:schemeClr val="accent1"/>
+          </a:lnRef>
+          <a:fillRef idx="3">
+            <a:schemeClr val="accent1"/>
+          </a:fillRef>
+          <a:effectRef idx="2">
+            <a:schemeClr val="accent1"/>
+          </a:effectRef>
+          <a:fontRef idx="minor">
+            <a:schemeClr val="lt1"/>
+          </a:fontRef>
+        </p:style>
+        <p:txBody>
+          <a:bodyPr rtlCol="0" anchor="ctr" wrap="square" lIns="73152" rIns="73152" tIns="36576" bIns="36576"/>
+          <a:lstStyle/>
+          <a:p>
+            <a:pPr algn="ctr">
+              <a:spcAft>
+                <a:spcPts val="0"/>
+              </a:spcAft>
+              <a:defRPr sz="2300" b="1">
+                <a:solidFill>
+                  <a:srgbClr val="122C4E"/>
+                </a:solidFill>
+                <a:latin typeface="Noto Sans CJK KR"/>
+              </a:defRPr>
+            </a:pPr>
+            <a:r>
+              <a:t>confidence_threshold를 0.50에서 0.70으로 바꿨을 때 어떤 검출이 제거될지 설명하고 parameter 값을 확인한다.</a:t>
+            </a:r>
+          </a:p>
+        </p:txBody>
+      </p:sp>
+      <p:sp>
+        <p:nvSpPr>
+          <p:cNvPr id="8" name="TextBox 7"/>
+          <p:cNvSpPr txBox="1"/>
+          <p:nvPr/>
+        </p:nvSpPr>
+        <p:spPr>
+          <a:xfrm>
+            <a:off x="877824" y="4590288"/>
+            <a:ext cx="10241280" cy="594360"/>
+          </a:xfrm>
+          <a:prstGeom prst="rect">
+            <a:avLst/>
+          </a:prstGeom>
+          <a:noFill/>
+        </p:spPr>
+        <p:txBody>
+          <a:bodyPr wrap="square" lIns="73152" rIns="73152" tIns="36576" bIns="36576">
+            <a:spAutoFit/>
+          </a:bodyPr>
+          <a:lstStyle/>
+          <a:p>
+            <a:pPr algn="ctr">
+              <a:spcAft>
+                <a:spcPts val="0"/>
+              </a:spcAft>
+              <a:defRPr sz="1900" b="1">
+                <a:solidFill>
+                  <a:srgbClr val="DB7E22"/>
+                </a:solidFill>
+                <a:latin typeface="Noto Sans CJK KR"/>
+              </a:defRPr>
+            </a:pPr>
+            <a:r>
+              <a:t>기록할 것: 바꾼 값(단위) · 기대한 변화 · 실제 출력/화면 · 원래 값으로 되돌린 결과</a:t>
+            </a:r>
+          </a:p>
+        </p:txBody>
+      </p:sp>
+    </p:spTree>
+  </p:cSld>
+  <p:clrMapOvr>
+    <a:masterClrMapping/>
+  </p:clrMapOvr>
+</p:sld>
+</file>
+
+<file path=ppt/slides/slide33.xml><?xml version="1.0" encoding="utf-8"?>
+<p:sld xmlns:a="http://schemas.openxmlformats.org/drawingml/2006/main" xmlns:p="http://schemas.openxmlformats.org/presentationml/2006/main" xmlns:r="http://schemas.openxmlformats.org/officeDocument/2006/relationships">
+  <p:cSld>
+    <p:spTree>
+      <p:nvGrpSpPr>
+        <p:cNvPr id="1" name=""/>
+        <p:cNvGrpSpPr/>
+        <p:nvPr/>
+      </p:nvGrpSpPr>
+      <p:grpSpPr/>
+      <p:sp>
+        <p:nvSpPr>
+          <p:cNvPr id="2" name="TextBox 1"/>
+          <p:cNvSpPr txBox="1"/>
+          <p:nvPr/>
+        </p:nvSpPr>
+        <p:spPr>
+          <a:xfrm>
+            <a:off x="566928" y="347472"/>
+            <a:ext cx="10881360" cy="438912"/>
+          </a:xfrm>
+          <a:prstGeom prst="rect">
+            <a:avLst/>
+          </a:prstGeom>
+          <a:noFill/>
+        </p:spPr>
+        <p:txBody>
+          <a:bodyPr wrap="square" lIns="73152" rIns="73152" tIns="36576" bIns="36576">
+            <a:spAutoFit/>
+          </a:bodyPr>
+          <a:lstStyle/>
+          <a:p>
+            <a:pPr algn="l">
+              <a:spcAft>
+                <a:spcPts val="0"/>
+              </a:spcAft>
+              <a:defRPr sz="3200" b="1">
+                <a:solidFill>
+                  <a:srgbClr val="122C4E"/>
+                </a:solidFill>
+                <a:latin typeface="Noto Sans CJK KR"/>
+              </a:defRPr>
+            </a:pPr>
+            <a:r>
+              <a:t>체크포인트를 저장하고 다음 모듈로 넘긴다</a:t>
+            </a:r>
+          </a:p>
+        </p:txBody>
+      </p:sp>
+      <p:sp>
+        <p:nvSpPr>
+          <p:cNvPr id="3" name="TextBox 2"/>
+          <p:cNvSpPr txBox="1"/>
+          <p:nvPr/>
+        </p:nvSpPr>
+        <p:spPr>
+          <a:xfrm>
+            <a:off x="603504" y="859536"/>
+            <a:ext cx="10698480" cy="292608"/>
+          </a:xfrm>
+          <a:prstGeom prst="rect">
+            <a:avLst/>
+          </a:prstGeom>
+          <a:noFill/>
+        </p:spPr>
+        <p:txBody>
+          <a:bodyPr wrap="square" lIns="73152" rIns="73152" tIns="36576" bIns="36576">
+            <a:spAutoFit/>
+          </a:bodyPr>
+          <a:lstStyle/>
+          <a:p>
+            <a:pPr algn="l">
+              <a:spcAft>
+                <a:spcPts val="0"/>
+              </a:spcAft>
+              <a:defRPr sz="1700" b="0">
+                <a:solidFill>
+                  <a:srgbClr val="5C6672"/>
+                </a:solidFill>
+                <a:latin typeface="Noto Sans CJK KR"/>
+              </a:defRPr>
+            </a:pPr>
+            <a:r>
+              <a:t>현재 Complete는 다음 Starter의 기준선입니다.</a:t>
+            </a:r>
+          </a:p>
+        </p:txBody>
+      </p:sp>
+      <p:sp>
+        <p:nvSpPr>
+          <p:cNvPr id="4" name="TextBox 3"/>
+          <p:cNvSpPr txBox="1"/>
+          <p:nvPr/>
+        </p:nvSpPr>
+        <p:spPr>
+          <a:xfrm>
+            <a:off x="530352" y="6510528"/>
+            <a:ext cx="7772400" cy="201168"/>
+          </a:xfrm>
+          <a:prstGeom prst="rect">
+            <a:avLst/>
+          </a:prstGeom>
+          <a:noFill/>
+        </p:spPr>
+        <p:txBody>
+          <a:bodyPr wrap="square" lIns="73152" rIns="73152" tIns="36576" bIns="36576">
+            <a:spAutoFit/>
+          </a:bodyPr>
+          <a:lstStyle/>
+          <a:p>
+            <a:pPr algn="l">
+              <a:spcAft>
+                <a:spcPts val="0"/>
+              </a:spcAft>
+              <a:defRPr sz="1000" b="0">
+                <a:solidFill>
+                  <a:srgbClr val="5C6672"/>
+                </a:solidFill>
+                <a:latin typeface="Noto Sans CJK KR"/>
+              </a:defRPr>
+            </a:pPr>
+            <a:r>
+              <a:t>ROS 2 Jazzy · Gazebo Harmonic · M17 · 따라 하기형 AGV 실습</a:t>
+            </a:r>
+          </a:p>
+        </p:txBody>
+      </p:sp>
+      <p:sp>
+        <p:nvSpPr>
+          <p:cNvPr id="5" name="TextBox 4"/>
+          <p:cNvSpPr txBox="1"/>
+          <p:nvPr/>
+        </p:nvSpPr>
+        <p:spPr>
+          <a:xfrm>
+            <a:off x="9144000" y="6510528"/>
+            <a:ext cx="2468880" cy="201168"/>
+          </a:xfrm>
+          <a:prstGeom prst="rect">
+            <a:avLst/>
+          </a:prstGeom>
+          <a:noFill/>
+        </p:spPr>
+        <p:txBody>
+          <a:bodyPr wrap="square" lIns="73152" rIns="73152" tIns="36576" bIns="36576">
+            <a:spAutoFit/>
+          </a:bodyPr>
+          <a:lstStyle/>
+          <a:p>
+            <a:pPr algn="r">
+              <a:spcAft>
+                <a:spcPts val="0"/>
+              </a:spcAft>
+              <a:defRPr sz="1000" b="0">
+                <a:solidFill>
+                  <a:srgbClr val="5C6672"/>
+                </a:solidFill>
+                <a:latin typeface="Noto Sans CJK KR"/>
+              </a:defRPr>
+            </a:pPr>
+            <a:r>
+              <a:t>명령·파일 경로는 슬라이드에서 복사 가능</a:t>
+            </a:r>
+          </a:p>
+        </p:txBody>
+      </p:sp>
+      <p:sp>
+        <p:nvSpPr>
+          <p:cNvPr id="6" name="Rectangle 5"/>
+          <p:cNvSpPr/>
+          <p:nvPr/>
+        </p:nvSpPr>
+        <p:spPr>
+          <a:xfrm>
+            <a:off x="566928" y="1188720"/>
+            <a:ext cx="11064240" cy="347472"/>
+          </a:xfrm>
+          <a:prstGeom prst="rect">
+            <a:avLst/>
+          </a:prstGeom>
+          <a:solidFill>
+            <a:srgbClr val="F4F7FB"/>
+          </a:solidFill>
+          <a:ln>
+            <a:solidFill>
+              <a:srgbClr val="F4F7FB"/>
+            </a:solidFill>
+          </a:ln>
+        </p:spPr>
+        <p:style>
+          <a:lnRef idx="1">
+            <a:schemeClr val="accent1"/>
+          </a:lnRef>
+          <a:fillRef idx="3">
+            <a:schemeClr val="accent1"/>
+          </a:fillRef>
+          <a:effectRef idx="2">
+            <a:schemeClr val="accent1"/>
+          </a:effectRef>
+          <a:fontRef idx="minor">
+            <a:schemeClr val="lt1"/>
+          </a:fontRef>
+        </p:style>
+        <p:txBody>
+          <a:bodyPr rtlCol="0" anchor="ctr" wrap="square" lIns="73152" rIns="73152" tIns="36576" bIns="36576"/>
+          <a:lstStyle/>
+          <a:p>
+            <a:pPr algn="l">
+              <a:spcAft>
+                <a:spcPts val="0"/>
+              </a:spcAft>
+              <a:defRPr sz="1300" b="1">
+                <a:solidFill>
+                  <a:srgbClr val="122C4E"/>
+                </a:solidFill>
+                <a:latin typeface="Noto Sans CJK KR"/>
+              </a:defRPr>
+            </a:pPr>
+            <a:r>
+              <a:t>현재 단계 체크포인트    |    현재 폴더 ~/ros2_curri/agv_ws    |    현재 터미널</a:t>
+            </a:r>
+          </a:p>
+        </p:txBody>
+      </p:sp>
+      <p:sp>
+        <p:nvSpPr>
+          <p:cNvPr id="7" name="Rounded Rectangle 6"/>
+          <p:cNvSpPr/>
+          <p:nvPr/>
+        </p:nvSpPr>
+        <p:spPr>
+          <a:xfrm>
+            <a:off x="685800" y="1737360"/>
+            <a:ext cx="10972800" cy="3611880"/>
+          </a:xfrm>
+          <a:prstGeom prst="roundRect">
+            <a:avLst/>
+          </a:prstGeom>
+          <a:solidFill>
+            <a:srgbClr val="F4F7FB"/>
+          </a:solidFill>
+          <a:ln>
+            <a:solidFill>
+              <a:srgbClr val="D2DCE8"/>
+            </a:solidFill>
+          </a:ln>
+        </p:spPr>
+        <p:style>
+          <a:lnRef idx="1">
+            <a:schemeClr val="accent1"/>
+          </a:lnRef>
+          <a:fillRef idx="3">
+            <a:schemeClr val="accent1"/>
+          </a:fillRef>
+          <a:effectRef idx="2">
+            <a:schemeClr val="accent1"/>
+          </a:effectRef>
+          <a:fontRef idx="minor">
+            <a:schemeClr val="lt1"/>
+          </a:fontRef>
+        </p:style>
+        <p:txBody>
+          <a:bodyPr rtlCol="0" anchor="ctr"/>
+          <a:lstStyle/>
+          <a:p>
+            <a:pPr algn="ctr"/>
+          </a:p>
+        </p:txBody>
+      </p:sp>
+      <p:sp>
+        <p:nvSpPr>
+          <p:cNvPr id="8" name="TextBox 7"/>
+          <p:cNvSpPr txBox="1"/>
+          <p:nvPr/>
+        </p:nvSpPr>
+        <p:spPr>
+          <a:xfrm>
+            <a:off x="896112" y="1993392"/>
+            <a:ext cx="10332720" cy="2971800"/>
+          </a:xfrm>
+          <a:prstGeom prst="rect">
+            <a:avLst/>
+          </a:prstGeom>
+          <a:noFill/>
+        </p:spPr>
+        <p:txBody>
+          <a:bodyPr wrap="square" lIns="109728" rIns="109728">
+            <a:spAutoFit/>
+          </a:bodyPr>
+          <a:lstStyle/>
+          <a:p>
+            <a:pPr>
+              <a:spcAft>
+                <a:spcPts val="800"/>
+              </a:spcAft>
+              <a:defRPr sz="1800">
+                <a:solidFill>
+                  <a:srgbClr val="122C4E"/>
+                </a:solidFill>
+                <a:latin typeface="Noto Sans CJK KR"/>
+              </a:defRPr>
+            </a:pPr>
+            <a:r>
+              <a:t>• □ 완료 화면: /detections message 형식과 YOLO enable_yolo/model_path/threshold parameter를 확인한다.</a:t>
+            </a:r>
+          </a:p>
+          <a:p>
+            <a:pPr>
+              <a:spcAft>
+                <a:spcPts val="800"/>
+              </a:spcAft>
+              <a:defRPr sz="1800">
+                <a:solidFill>
+                  <a:srgbClr val="122C4E"/>
+                </a:solidFill>
+                <a:latin typeface="Noto Sans CJK KR"/>
+              </a:defRPr>
+            </a:pPr>
+            <a:r>
+              <a:t>• □ Complete 파일: blocks/E_autonomy_logic/M17_yolo_vision/complete/</a:t>
+            </a:r>
+          </a:p>
+          <a:p>
+            <a:pPr>
+              <a:spcAft>
+                <a:spcPts val="800"/>
+              </a:spcAft>
+              <a:defRPr sz="1800">
+                <a:solidFill>
+                  <a:srgbClr val="122C4E"/>
+                </a:solidFill>
+                <a:latin typeface="Noto Sans CJK KR"/>
+              </a:defRPr>
+            </a:pPr>
+            <a:r>
+              <a:t>• □ 정상 로그·캡처: logs/validation.log, screenshots/validation_terminal.png</a:t>
+            </a:r>
+          </a:p>
+          <a:p>
+            <a:pPr>
+              <a:spcAft>
+                <a:spcPts val="800"/>
+              </a:spcAft>
+              <a:defRPr sz="1800">
+                <a:solidFill>
+                  <a:srgbClr val="122C4E"/>
+                </a:solidFill>
+                <a:latin typeface="Noto Sans CJK KR"/>
+              </a:defRPr>
+            </a:pPr>
+            <a:r>
+              <a:t>• □ 버전 식별: CHECKSUM_or_TAG.txt의 SHA-256 manifest</a:t>
+            </a:r>
+          </a:p>
+          <a:p>
+            <a:pPr>
+              <a:spcAft>
+                <a:spcPts val="800"/>
+              </a:spcAft>
+              <a:defRPr sz="1800">
+                <a:solidFill>
+                  <a:srgbClr val="122C4E"/>
+                </a:solidFill>
+                <a:latin typeface="Noto Sans CJK KR"/>
+              </a:defRPr>
+            </a:pPr>
+            <a:r>
+              <a:t>• □ 다음 시작 조건: M18 safety fusion</a:t>
+            </a:r>
+          </a:p>
+        </p:txBody>
+      </p:sp>
+      <p:sp>
+        <p:nvSpPr>
+          <p:cNvPr id="9" name="TextBox 8"/>
+          <p:cNvSpPr txBox="1"/>
+          <p:nvPr/>
+        </p:nvSpPr>
+        <p:spPr>
+          <a:xfrm>
+            <a:off x="868680" y="5596128"/>
+            <a:ext cx="10515600" cy="338328"/>
+          </a:xfrm>
+          <a:prstGeom prst="rect">
+            <a:avLst/>
+          </a:prstGeom>
+          <a:noFill/>
+        </p:spPr>
+        <p:txBody>
+          <a:bodyPr wrap="square" lIns="73152" rIns="73152" tIns="36576" bIns="36576">
+            <a:spAutoFit/>
+          </a:bodyPr>
+          <a:lstStyle/>
+          <a:p>
+            <a:pPr algn="ctr">
+              <a:spcAft>
+                <a:spcPts val="0"/>
+              </a:spcAft>
+              <a:defRPr sz="1700" b="1">
+                <a:solidFill>
+                  <a:srgbClr val="2A8B5A"/>
+                </a:solidFill>
+                <a:latin typeface="Noto Sans CJK KR"/>
+              </a:defRPr>
+            </a:pPr>
+            <a:r>
+              <a:t>다음 모듈을 시작하기 전, 이 슬라이드의 Complete와 다음 모듈의 Starter를 비교합니다.</a:t>
+            </a:r>
+          </a:p>
+        </p:txBody>
+      </p:sp>
+    </p:spTree>
+  </p:cSld>
+  <p:clrMapOvr>
+    <a:masterClrMapping/>
+  </p:clrMapOvr>
+</p:sld>
+</file>
+
+<file path=ppt/slides/slide34.xml><?xml version="1.0" encoding="utf-8"?>
+<p:sld xmlns:a="http://schemas.openxmlformats.org/drawingml/2006/main" xmlns:p="http://schemas.openxmlformats.org/presentationml/2006/main" xmlns:r="http://schemas.openxmlformats.org/officeDocument/2006/relationships">
+  <p:cSld>
+    <p:spTree>
+      <p:nvGrpSpPr>
+        <p:cNvPr id="1" name=""/>
+        <p:cNvGrpSpPr/>
+        <p:nvPr/>
+      </p:nvGrpSpPr>
+      <p:grpSpPr/>
+      <p:sp>
+        <p:nvSpPr>
+          <p:cNvPr id="2" name="TextBox 1"/>
+          <p:cNvSpPr txBox="1"/>
+          <p:nvPr/>
+        </p:nvSpPr>
+        <p:spPr>
+          <a:xfrm>
+            <a:off x="566928" y="347472"/>
+            <a:ext cx="10881360" cy="438912"/>
+          </a:xfrm>
+          <a:prstGeom prst="rect">
+            <a:avLst/>
+          </a:prstGeom>
+          <a:noFill/>
+        </p:spPr>
+        <p:txBody>
+          <a:bodyPr wrap="square" lIns="73152" rIns="73152" tIns="36576" bIns="36576">
+            <a:spAutoFit/>
+          </a:bodyPr>
+          <a:lstStyle/>
+          <a:p>
+            <a:pPr algn="l">
+              <a:spcAft>
+                <a:spcPts val="0"/>
+              </a:spcAft>
+              <a:defRPr sz="3200" b="1">
+                <a:solidFill>
+                  <a:srgbClr val="122C4E"/>
+                </a:solidFill>
+                <a:latin typeface="Noto Sans CJK KR"/>
+              </a:defRPr>
+            </a:pPr>
+            <a:r>
               <a:t>공식 참고 자료</a:t>
             </a:r>
           </a:p>
@@ -18259,7 +19902,7 @@
               </a:defRPr>
             </a:pPr>
             <a:r>
-              <a:t>interface를 먼저 빌드한다</a:t>
+              <a:t>코드/설정이 실제로 만드는 것 (1/3)</a:t>
             </a:r>
           </a:p>
         </p:txBody>
@@ -18298,7 +19941,7 @@
               </a:defRPr>
             </a:pPr>
             <a:r>
-              <a:t>한 장에는 한 행동만 수행합니다.</a:t>
+              <a:t>파일을 입력하기 전에 ‘무엇을 만들고 어디서 볼지’를 먼저 연결합니다.</a:t>
             </a:r>
           </a:p>
         </p:txBody>
@@ -18434,109 +20077,31 @@
               </a:defRPr>
             </a:pPr>
             <a:r>
-              <a:t>현재 단계 1/2    |    현재 폴더 ~/ros2_curri/agv_ws    |    현재 터미널</a:t>
-            </a:r>
-          </a:p>
-        </p:txBody>
-      </p:sp>
-      <p:sp>
-        <p:nvSpPr>
-          <p:cNvPr id="7" name="TextBox 6"/>
-          <p:cNvSpPr txBox="1"/>
-          <p:nvPr/>
-        </p:nvSpPr>
-        <p:spPr>
-          <a:xfrm>
-            <a:off x="676656" y="1764792"/>
-            <a:ext cx="1828800" cy="347472"/>
-          </a:xfrm>
-          <a:prstGeom prst="rect">
-            <a:avLst/>
-          </a:prstGeom>
-          <a:noFill/>
-        </p:spPr>
-        <p:txBody>
-          <a:bodyPr wrap="square" lIns="73152" rIns="73152" tIns="36576" bIns="36576">
-            <a:spAutoFit/>
-          </a:bodyPr>
-          <a:lstStyle/>
-          <a:p>
-            <a:pPr algn="l">
-              <a:spcAft>
-                <a:spcPts val="0"/>
-              </a:spcAft>
-              <a:defRPr sz="1800" b="1">
-                <a:solidFill>
-                  <a:srgbClr val="225B9B"/>
-                </a:solidFill>
-                <a:latin typeface="Noto Sans CJK KR"/>
-              </a:defRPr>
-            </a:pPr>
-            <a:r>
-              <a:t>왜 하는가</a:t>
-            </a:r>
-          </a:p>
-        </p:txBody>
-      </p:sp>
-      <p:sp>
-        <p:nvSpPr>
-          <p:cNvPr id="8" name="TextBox 7"/>
-          <p:cNvSpPr txBox="1"/>
-          <p:nvPr/>
-        </p:nvSpPr>
-        <p:spPr>
-          <a:xfrm>
-            <a:off x="676656" y="2103120"/>
-            <a:ext cx="10789920" cy="512064"/>
-          </a:xfrm>
-          <a:prstGeom prst="rect">
-            <a:avLst/>
-          </a:prstGeom>
-          <a:noFill/>
-        </p:spPr>
-        <p:txBody>
-          <a:bodyPr wrap="square" lIns="73152" rIns="73152" tIns="36576" bIns="36576">
-            <a:spAutoFit/>
-          </a:bodyPr>
-          <a:lstStyle/>
-          <a:p>
-            <a:pPr algn="l">
-              <a:spcAft>
-                <a:spcPts val="0"/>
-              </a:spcAft>
-              <a:defRPr sz="2000" b="0">
-                <a:solidFill>
-                  <a:srgbClr val="122C4E"/>
-                </a:solidFill>
-                <a:latin typeface="Noto Sans CJK KR"/>
-              </a:defRPr>
-            </a:pPr>
-            <a:r>
-              <a:t>vision node보다 custom message package가 먼저 install/source되어야 import된다.</a:t>
-            </a:r>
-          </a:p>
-        </p:txBody>
-      </p:sp>
-      <p:sp>
-        <p:nvSpPr>
-          <p:cNvPr id="9" name="Rounded Rectangle 8"/>
+              <a:t>현재 단계 파일 역할    |    현재 폴더 ~/ros2_curri/agv_ws    |    현재 터미널</a:t>
+            </a:r>
+          </a:p>
+        </p:txBody>
+      </p:sp>
+      <p:sp>
+        <p:nvSpPr>
+          <p:cNvPr id="7" name="Rounded Rectangle 6"/>
           <p:cNvSpPr/>
           <p:nvPr/>
         </p:nvSpPr>
         <p:spPr>
           <a:xfrm>
-            <a:off x="676656" y="2871216"/>
-            <a:ext cx="10835640" cy="2331720"/>
+            <a:off x="640080" y="1627632"/>
+            <a:ext cx="10972800" cy="2048256"/>
           </a:xfrm>
           <a:prstGeom prst="roundRect">
             <a:avLst/>
           </a:prstGeom>
           <a:solidFill>
-            <a:srgbClr val="1D232D"/>
+            <a:srgbClr val="F4F7FB"/>
           </a:solidFill>
           <a:ln>
             <a:solidFill>
-              <a:srgbClr val="1D232D"/>
+              <a:srgbClr val="CCDBEB"/>
             </a:solidFill>
           </a:ln>
         </p:spPr>
@@ -18555,112 +20120,608 @@
           </a:fontRef>
         </p:style>
         <p:txBody>
-          <a:bodyPr rtlCol="0" anchor="ctr" wrap="square" lIns="73152" rIns="73152" tIns="36576" bIns="36576"/>
-          <a:lstStyle/>
-          <a:p>
-            <a:pPr algn="l">
-              <a:spcAft>
-                <a:spcPts val="0"/>
-              </a:spcAft>
-              <a:defRPr sz="1600" b="0">
-                <a:solidFill>
-                  <a:srgbClr val="FFFFFF"/>
+          <a:bodyPr rtlCol="0" anchor="ctr"/>
+          <a:lstStyle/>
+          <a:p>
+            <a:pPr algn="ctr"/>
+          </a:p>
+        </p:txBody>
+      </p:sp>
+      <p:sp>
+        <p:nvSpPr>
+          <p:cNvPr id="8" name="TextBox 7"/>
+          <p:cNvSpPr txBox="1"/>
+          <p:nvPr/>
+        </p:nvSpPr>
+        <p:spPr>
+          <a:xfrm>
+            <a:off x="850392" y="1764792"/>
+            <a:ext cx="10424160" cy="256032"/>
+          </a:xfrm>
+          <a:prstGeom prst="rect">
+            <a:avLst/>
+          </a:prstGeom>
+          <a:noFill/>
+        </p:spPr>
+        <p:txBody>
+          <a:bodyPr wrap="square" lIns="73152" rIns="73152" tIns="36576" bIns="36576">
+            <a:spAutoFit/>
+          </a:bodyPr>
+          <a:lstStyle/>
+          <a:p>
+            <a:pPr algn="l">
+              <a:spcAft>
+                <a:spcPts val="0"/>
+              </a:spcAft>
+              <a:defRPr sz="1300" b="1">
+                <a:solidFill>
+                  <a:srgbClr val="225B9B"/>
                 </a:solidFill>
                 <a:latin typeface="DejaVu Sans Mono"/>
               </a:defRPr>
             </a:pPr>
             <a:r>
-              <a:t>cd ~/ros2_curri/agv_ws</a:t>
+              <a:t>~/ros2_curri/agv_ws/src/agv_interfaces/msg/Detection.msg</a:t>
+            </a:r>
+          </a:p>
+        </p:txBody>
+      </p:sp>
+      <p:sp>
+        <p:nvSpPr>
+          <p:cNvPr id="9" name="TextBox 8"/>
+          <p:cNvSpPr txBox="1"/>
+          <p:nvPr/>
+        </p:nvSpPr>
+        <p:spPr>
+          <a:xfrm>
+            <a:off x="868680" y="2130552"/>
+            <a:ext cx="1234440" cy="228600"/>
+          </a:xfrm>
+          <a:prstGeom prst="rect">
+            <a:avLst/>
+          </a:prstGeom>
+          <a:noFill/>
+        </p:spPr>
+        <p:txBody>
+          <a:bodyPr wrap="square" lIns="73152" rIns="73152" tIns="36576" bIns="36576">
+            <a:spAutoFit/>
+          </a:bodyPr>
+          <a:lstStyle/>
+          <a:p>
+            <a:pPr algn="l">
+              <a:spcAft>
+                <a:spcPts val="0"/>
+              </a:spcAft>
+              <a:defRPr sz="1500" b="1">
+                <a:solidFill>
+                  <a:srgbClr val="2A8B5A"/>
+                </a:solidFill>
+                <a:latin typeface="Noto Sans CJK KR"/>
+              </a:defRPr>
+            </a:pPr>
+            <a:r>
+              <a:t>만드는 것</a:t>
+            </a:r>
+          </a:p>
+        </p:txBody>
+      </p:sp>
+      <p:sp>
+        <p:nvSpPr>
+          <p:cNvPr id="10" name="TextBox 9"/>
+          <p:cNvSpPr txBox="1"/>
+          <p:nvPr/>
+        </p:nvSpPr>
+        <p:spPr>
+          <a:xfrm>
+            <a:off x="1975104" y="2112264"/>
+            <a:ext cx="9189720" cy="274320"/>
+          </a:xfrm>
+          <a:prstGeom prst="rect">
+            <a:avLst/>
+          </a:prstGeom>
+          <a:noFill/>
+        </p:spPr>
+        <p:txBody>
+          <a:bodyPr wrap="square" lIns="73152" rIns="73152" tIns="36576" bIns="36576">
+            <a:spAutoFit/>
+          </a:bodyPr>
+          <a:lstStyle/>
+          <a:p>
+            <a:pPr algn="l">
+              <a:spcAft>
+                <a:spcPts val="0"/>
+              </a:spcAft>
+              <a:defRPr sz="1500" b="0">
+                <a:solidFill>
+                  <a:srgbClr val="122C4E"/>
+                </a:solidFill>
+                <a:latin typeface="Noto Sans CJK KR"/>
+              </a:defRPr>
+            </a:pPr>
+            <a:r>
+              <a:t>이번 모듈의 재현 가능한 파일</a:t>
+            </a:r>
+          </a:p>
+        </p:txBody>
+      </p:sp>
+      <p:sp>
+        <p:nvSpPr>
+          <p:cNvPr id="11" name="TextBox 10"/>
+          <p:cNvSpPr txBox="1"/>
+          <p:nvPr/>
+        </p:nvSpPr>
+        <p:spPr>
+          <a:xfrm>
+            <a:off x="868680" y="2505456"/>
+            <a:ext cx="1234440" cy="228600"/>
+          </a:xfrm>
+          <a:prstGeom prst="rect">
+            <a:avLst/>
+          </a:prstGeom>
+          <a:noFill/>
+        </p:spPr>
+        <p:txBody>
+          <a:bodyPr wrap="square" lIns="73152" rIns="73152" tIns="36576" bIns="36576">
+            <a:spAutoFit/>
+          </a:bodyPr>
+          <a:lstStyle/>
+          <a:p>
+            <a:pPr algn="l">
+              <a:spcAft>
+                <a:spcPts val="0"/>
+              </a:spcAft>
+              <a:defRPr sz="1500" b="1">
+                <a:solidFill>
+                  <a:srgbClr val="DB7E22"/>
+                </a:solidFill>
+                <a:latin typeface="Noto Sans CJK KR"/>
+              </a:defRPr>
+            </a:pPr>
+            <a:r>
+              <a:t>코드 읽기</a:t>
+            </a:r>
+          </a:p>
+        </p:txBody>
+      </p:sp>
+      <p:sp>
+        <p:nvSpPr>
+          <p:cNvPr id="12" name="TextBox 11"/>
+          <p:cNvSpPr txBox="1"/>
+          <p:nvPr/>
+        </p:nvSpPr>
+        <p:spPr>
+          <a:xfrm>
+            <a:off x="1975104" y="2487168"/>
+            <a:ext cx="9189720" cy="301752"/>
+          </a:xfrm>
+          <a:prstGeom prst="rect">
+            <a:avLst/>
+          </a:prstGeom>
+          <a:noFill/>
+        </p:spPr>
+        <p:txBody>
+          <a:bodyPr wrap="square" lIns="73152" rIns="73152" tIns="36576" bIns="36576">
+            <a:spAutoFit/>
+          </a:bodyPr>
+          <a:lstStyle/>
+          <a:p>
+            <a:pPr algn="l">
+              <a:spcAft>
+                <a:spcPts val="0"/>
+              </a:spcAft>
+              <a:defRPr sz="1400" b="0">
+                <a:solidFill>
+                  <a:srgbClr val="122C4E"/>
+                </a:solidFill>
+                <a:latin typeface="Noto Sans CJK KR"/>
+              </a:defRPr>
+            </a:pPr>
+            <a:r>
+              <a:t>파일명·경로·핵심 이름을 슬라이드와 동일하게 작성한다.</a:t>
+            </a:r>
+          </a:p>
+        </p:txBody>
+      </p:sp>
+      <p:sp>
+        <p:nvSpPr>
+          <p:cNvPr id="13" name="TextBox 12"/>
+          <p:cNvSpPr txBox="1"/>
+          <p:nvPr/>
+        </p:nvSpPr>
+        <p:spPr>
+          <a:xfrm>
+            <a:off x="868680" y="2889504"/>
+            <a:ext cx="1234440" cy="228600"/>
+          </a:xfrm>
+          <a:prstGeom prst="rect">
+            <a:avLst/>
+          </a:prstGeom>
+          <a:noFill/>
+        </p:spPr>
+        <p:txBody>
+          <a:bodyPr wrap="square" lIns="73152" rIns="73152" tIns="36576" bIns="36576">
+            <a:spAutoFit/>
+          </a:bodyPr>
+          <a:lstStyle/>
+          <a:p>
+            <a:pPr algn="l">
+              <a:spcAft>
+                <a:spcPts val="0"/>
+              </a:spcAft>
+              <a:defRPr sz="1500" b="1">
+                <a:solidFill>
+                  <a:srgbClr val="225B9B"/>
+                </a:solidFill>
+                <a:latin typeface="Noto Sans CJK KR"/>
+              </a:defRPr>
+            </a:pPr>
+            <a:r>
+              <a:t>사용/확인</a:t>
+            </a:r>
+          </a:p>
+        </p:txBody>
+      </p:sp>
+      <p:sp>
+        <p:nvSpPr>
+          <p:cNvPr id="14" name="TextBox 13"/>
+          <p:cNvSpPr txBox="1"/>
+          <p:nvPr/>
+        </p:nvSpPr>
+        <p:spPr>
+          <a:xfrm>
+            <a:off x="1975104" y="2871216"/>
+            <a:ext cx="9189720" cy="512064"/>
+          </a:xfrm>
+          <a:prstGeom prst="rect">
+            <a:avLst/>
+          </a:prstGeom>
+          <a:noFill/>
+        </p:spPr>
+        <p:txBody>
+          <a:bodyPr wrap="square" lIns="73152" rIns="73152" tIns="36576" bIns="36576">
+            <a:spAutoFit/>
+          </a:bodyPr>
+          <a:lstStyle/>
+          <a:p>
+            <a:pPr algn="l">
+              <a:spcAft>
+                <a:spcPts val="0"/>
+              </a:spcAft>
+              <a:defRPr sz="1300" b="0">
+                <a:solidFill>
+                  <a:srgbClr val="122C4E"/>
+                </a:solidFill>
+                <a:latin typeface="Noto Sans CJK KR"/>
+              </a:defRPr>
+            </a:pPr>
+            <a:r>
+              <a:t>사용: build/source 뒤 실행 단계에서 사용한다.</a:t>
             </a:r>
             <a:br/>
             <a:r>
-              <a:t>colcon build --symlink-install --packages-select agv_interfaces agv_vision</a:t>
+              <a:t>화면/출력: 검증 명령의 파일·topic 이름</a:t>
+            </a:r>
+          </a:p>
+        </p:txBody>
+      </p:sp>
+      <p:sp>
+        <p:nvSpPr>
+          <p:cNvPr id="15" name="Rounded Rectangle 14"/>
+          <p:cNvSpPr/>
+          <p:nvPr/>
+        </p:nvSpPr>
+        <p:spPr>
+          <a:xfrm>
+            <a:off x="640080" y="3941063"/>
+            <a:ext cx="10972800" cy="2048256"/>
+          </a:xfrm>
+          <a:prstGeom prst="roundRect">
+            <a:avLst/>
+          </a:prstGeom>
+          <a:solidFill>
+            <a:srgbClr val="F4F7FB"/>
+          </a:solidFill>
+          <a:ln>
+            <a:solidFill>
+              <a:srgbClr val="CCDBEB"/>
+            </a:solidFill>
+          </a:ln>
+        </p:spPr>
+        <p:style>
+          <a:lnRef idx="1">
+            <a:schemeClr val="accent1"/>
+          </a:lnRef>
+          <a:fillRef idx="3">
+            <a:schemeClr val="accent1"/>
+          </a:fillRef>
+          <a:effectRef idx="2">
+            <a:schemeClr val="accent1"/>
+          </a:effectRef>
+          <a:fontRef idx="minor">
+            <a:schemeClr val="lt1"/>
+          </a:fontRef>
+        </p:style>
+        <p:txBody>
+          <a:bodyPr rtlCol="0" anchor="ctr"/>
+          <a:lstStyle/>
+          <a:p>
+            <a:pPr algn="ctr"/>
+          </a:p>
+        </p:txBody>
+      </p:sp>
+      <p:sp>
+        <p:nvSpPr>
+          <p:cNvPr id="16" name="TextBox 15"/>
+          <p:cNvSpPr txBox="1"/>
+          <p:nvPr/>
+        </p:nvSpPr>
+        <p:spPr>
+          <a:xfrm>
+            <a:off x="850392" y="4078224"/>
+            <a:ext cx="10424160" cy="256032"/>
+          </a:xfrm>
+          <a:prstGeom prst="rect">
+            <a:avLst/>
+          </a:prstGeom>
+          <a:noFill/>
+        </p:spPr>
+        <p:txBody>
+          <a:bodyPr wrap="square" lIns="73152" rIns="73152" tIns="36576" bIns="36576">
+            <a:spAutoFit/>
+          </a:bodyPr>
+          <a:lstStyle/>
+          <a:p>
+            <a:pPr algn="l">
+              <a:spcAft>
+                <a:spcPts val="0"/>
+              </a:spcAft>
+              <a:defRPr sz="1300" b="1">
+                <a:solidFill>
+                  <a:srgbClr val="225B9B"/>
+                </a:solidFill>
+                <a:latin typeface="DejaVu Sans Mono"/>
+              </a:defRPr>
+            </a:pPr>
+            <a:r>
+              <a:t>~/ros2_curri/agv_ws/src/agv_interfaces/msg/DetectionArray.msg</a:t>
+            </a:r>
+          </a:p>
+        </p:txBody>
+      </p:sp>
+      <p:sp>
+        <p:nvSpPr>
+          <p:cNvPr id="17" name="TextBox 16"/>
+          <p:cNvSpPr txBox="1"/>
+          <p:nvPr/>
+        </p:nvSpPr>
+        <p:spPr>
+          <a:xfrm>
+            <a:off x="868680" y="4443983"/>
+            <a:ext cx="1234440" cy="228600"/>
+          </a:xfrm>
+          <a:prstGeom prst="rect">
+            <a:avLst/>
+          </a:prstGeom>
+          <a:noFill/>
+        </p:spPr>
+        <p:txBody>
+          <a:bodyPr wrap="square" lIns="73152" rIns="73152" tIns="36576" bIns="36576">
+            <a:spAutoFit/>
+          </a:bodyPr>
+          <a:lstStyle/>
+          <a:p>
+            <a:pPr algn="l">
+              <a:spcAft>
+                <a:spcPts val="0"/>
+              </a:spcAft>
+              <a:defRPr sz="1500" b="1">
+                <a:solidFill>
+                  <a:srgbClr val="2A8B5A"/>
+                </a:solidFill>
+                <a:latin typeface="Noto Sans CJK KR"/>
+              </a:defRPr>
+            </a:pPr>
+            <a:r>
+              <a:t>만드는 것</a:t>
+            </a:r>
+          </a:p>
+        </p:txBody>
+      </p:sp>
+      <p:sp>
+        <p:nvSpPr>
+          <p:cNvPr id="18" name="TextBox 17"/>
+          <p:cNvSpPr txBox="1"/>
+          <p:nvPr/>
+        </p:nvSpPr>
+        <p:spPr>
+          <a:xfrm>
+            <a:off x="1975104" y="4425696"/>
+            <a:ext cx="9189720" cy="274320"/>
+          </a:xfrm>
+          <a:prstGeom prst="rect">
+            <a:avLst/>
+          </a:prstGeom>
+          <a:noFill/>
+        </p:spPr>
+        <p:txBody>
+          <a:bodyPr wrap="square" lIns="73152" rIns="73152" tIns="36576" bIns="36576">
+            <a:spAutoFit/>
+          </a:bodyPr>
+          <a:lstStyle/>
+          <a:p>
+            <a:pPr algn="l">
+              <a:spcAft>
+                <a:spcPts val="0"/>
+              </a:spcAft>
+              <a:defRPr sz="1500" b="0">
+                <a:solidFill>
+                  <a:srgbClr val="122C4E"/>
+                </a:solidFill>
+                <a:latin typeface="Noto Sans CJK KR"/>
+              </a:defRPr>
+            </a:pPr>
+            <a:r>
+              <a:t>이번 모듈의 재현 가능한 파일</a:t>
+            </a:r>
+          </a:p>
+        </p:txBody>
+      </p:sp>
+      <p:sp>
+        <p:nvSpPr>
+          <p:cNvPr id="19" name="TextBox 18"/>
+          <p:cNvSpPr txBox="1"/>
+          <p:nvPr/>
+        </p:nvSpPr>
+        <p:spPr>
+          <a:xfrm>
+            <a:off x="868680" y="4818888"/>
+            <a:ext cx="1234440" cy="228600"/>
+          </a:xfrm>
+          <a:prstGeom prst="rect">
+            <a:avLst/>
+          </a:prstGeom>
+          <a:noFill/>
+        </p:spPr>
+        <p:txBody>
+          <a:bodyPr wrap="square" lIns="73152" rIns="73152" tIns="36576" bIns="36576">
+            <a:spAutoFit/>
+          </a:bodyPr>
+          <a:lstStyle/>
+          <a:p>
+            <a:pPr algn="l">
+              <a:spcAft>
+                <a:spcPts val="0"/>
+              </a:spcAft>
+              <a:defRPr sz="1500" b="1">
+                <a:solidFill>
+                  <a:srgbClr val="DB7E22"/>
+                </a:solidFill>
+                <a:latin typeface="Noto Sans CJK KR"/>
+              </a:defRPr>
+            </a:pPr>
+            <a:r>
+              <a:t>코드 읽기</a:t>
+            </a:r>
+          </a:p>
+        </p:txBody>
+      </p:sp>
+      <p:sp>
+        <p:nvSpPr>
+          <p:cNvPr id="20" name="TextBox 19"/>
+          <p:cNvSpPr txBox="1"/>
+          <p:nvPr/>
+        </p:nvSpPr>
+        <p:spPr>
+          <a:xfrm>
+            <a:off x="1975104" y="4800600"/>
+            <a:ext cx="9189720" cy="301752"/>
+          </a:xfrm>
+          <a:prstGeom prst="rect">
+            <a:avLst/>
+          </a:prstGeom>
+          <a:noFill/>
+        </p:spPr>
+        <p:txBody>
+          <a:bodyPr wrap="square" lIns="73152" rIns="73152" tIns="36576" bIns="36576">
+            <a:spAutoFit/>
+          </a:bodyPr>
+          <a:lstStyle/>
+          <a:p>
+            <a:pPr algn="l">
+              <a:spcAft>
+                <a:spcPts val="0"/>
+              </a:spcAft>
+              <a:defRPr sz="1400" b="0">
+                <a:solidFill>
+                  <a:srgbClr val="122C4E"/>
+                </a:solidFill>
+                <a:latin typeface="Noto Sans CJK KR"/>
+              </a:defRPr>
+            </a:pPr>
+            <a:r>
+              <a:t>파일명·경로·핵심 이름을 슬라이드와 동일하게 작성한다.</a:t>
+            </a:r>
+          </a:p>
+        </p:txBody>
+      </p:sp>
+      <p:sp>
+        <p:nvSpPr>
+          <p:cNvPr id="21" name="TextBox 20"/>
+          <p:cNvSpPr txBox="1"/>
+          <p:nvPr/>
+        </p:nvSpPr>
+        <p:spPr>
+          <a:xfrm>
+            <a:off x="868680" y="5202936"/>
+            <a:ext cx="1234440" cy="228600"/>
+          </a:xfrm>
+          <a:prstGeom prst="rect">
+            <a:avLst/>
+          </a:prstGeom>
+          <a:noFill/>
+        </p:spPr>
+        <p:txBody>
+          <a:bodyPr wrap="square" lIns="73152" rIns="73152" tIns="36576" bIns="36576">
+            <a:spAutoFit/>
+          </a:bodyPr>
+          <a:lstStyle/>
+          <a:p>
+            <a:pPr algn="l">
+              <a:spcAft>
+                <a:spcPts val="0"/>
+              </a:spcAft>
+              <a:defRPr sz="1500" b="1">
+                <a:solidFill>
+                  <a:srgbClr val="225B9B"/>
+                </a:solidFill>
+                <a:latin typeface="Noto Sans CJK KR"/>
+              </a:defRPr>
+            </a:pPr>
+            <a:r>
+              <a:t>사용/확인</a:t>
+            </a:r>
+          </a:p>
+        </p:txBody>
+      </p:sp>
+      <p:sp>
+        <p:nvSpPr>
+          <p:cNvPr id="22" name="TextBox 21"/>
+          <p:cNvSpPr txBox="1"/>
+          <p:nvPr/>
+        </p:nvSpPr>
+        <p:spPr>
+          <a:xfrm>
+            <a:off x="1975104" y="5184648"/>
+            <a:ext cx="9189720" cy="512064"/>
+          </a:xfrm>
+          <a:prstGeom prst="rect">
+            <a:avLst/>
+          </a:prstGeom>
+          <a:noFill/>
+        </p:spPr>
+        <p:txBody>
+          <a:bodyPr wrap="square" lIns="73152" rIns="73152" tIns="36576" bIns="36576">
+            <a:spAutoFit/>
+          </a:bodyPr>
+          <a:lstStyle/>
+          <a:p>
+            <a:pPr algn="l">
+              <a:spcAft>
+                <a:spcPts val="0"/>
+              </a:spcAft>
+              <a:defRPr sz="1300" b="0">
+                <a:solidFill>
+                  <a:srgbClr val="122C4E"/>
+                </a:solidFill>
+                <a:latin typeface="Noto Sans CJK KR"/>
+              </a:defRPr>
+            </a:pPr>
+            <a:r>
+              <a:t>사용: build/source 뒤 실행 단계에서 사용한다.</a:t>
             </a:r>
             <a:br/>
             <a:r>
-              <a:t>source install/setup.bash</a:t>
-            </a:r>
-            <a:br/>
-            <a:r>
-              <a:t>ros2 interface show agv_interfaces/msg/Detection</a:t>
-            </a:r>
-          </a:p>
-        </p:txBody>
-      </p:sp>
-      <p:sp>
-        <p:nvSpPr>
-          <p:cNvPr id="10" name="TextBox 9"/>
-          <p:cNvSpPr txBox="1"/>
-          <p:nvPr/>
-        </p:nvSpPr>
-        <p:spPr>
-          <a:xfrm>
-            <a:off x="768096" y="5468112"/>
-            <a:ext cx="1143000" cy="256032"/>
-          </a:xfrm>
-          <a:prstGeom prst="rect">
-            <a:avLst/>
-          </a:prstGeom>
-          <a:noFill/>
-        </p:spPr>
-        <p:txBody>
-          <a:bodyPr wrap="square" lIns="73152" rIns="73152" tIns="36576" bIns="36576">
-            <a:spAutoFit/>
-          </a:bodyPr>
-          <a:lstStyle/>
-          <a:p>
-            <a:pPr algn="l">
-              <a:spcAft>
-                <a:spcPts val="0"/>
-              </a:spcAft>
-              <a:defRPr sz="1800" b="1">
-                <a:solidFill>
-                  <a:srgbClr val="2A8B5A"/>
-                </a:solidFill>
-                <a:latin typeface="Noto Sans CJK KR"/>
-              </a:defRPr>
-            </a:pPr>
-            <a:r>
-              <a:t>확인</a:t>
-            </a:r>
-          </a:p>
-        </p:txBody>
-      </p:sp>
-      <p:sp>
-        <p:nvSpPr>
-          <p:cNvPr id="11" name="TextBox 10"/>
-          <p:cNvSpPr txBox="1"/>
-          <p:nvPr/>
-        </p:nvSpPr>
-        <p:spPr>
-          <a:xfrm>
-            <a:off x="768096" y="5742432"/>
-            <a:ext cx="10561320" cy="347472"/>
-          </a:xfrm>
-          <a:prstGeom prst="rect">
-            <a:avLst/>
-          </a:prstGeom>
-          <a:noFill/>
-        </p:spPr>
-        <p:txBody>
-          <a:bodyPr wrap="square" lIns="73152" rIns="73152" tIns="36576" bIns="36576">
-            <a:spAutoFit/>
-          </a:bodyPr>
-          <a:lstStyle/>
-          <a:p>
-            <a:pPr algn="l">
-              <a:spcAft>
-                <a:spcPts val="0"/>
-              </a:spcAft>
-              <a:defRPr sz="1800" b="0">
-                <a:solidFill>
-                  <a:srgbClr val="122C4E"/>
-                </a:solidFill>
-                <a:latin typeface="Noto Sans CJK KR"/>
-              </a:defRPr>
-            </a:pPr>
-            <a:r>
-              <a:t>명령의 출력에서 topic·frame·파일 이름 또는 성공 메시지를 찾으면 이 단계가 완료됩니다.</a:t>
+              <a:t>화면/출력: 검증 명령의 파일·topic 이름</a:t>
             </a:r>
           </a:p>
         </p:txBody>
@@ -18717,7 +20778,7 @@
               </a:defRPr>
             </a:pPr>
             <a:r>
-              <a:t>YOLO 실행 정책을 정한다</a:t>
+              <a:t>코드/설정이 실제로 만드는 것 (2/3)</a:t>
             </a:r>
           </a:p>
         </p:txBody>
@@ -18756,7 +20817,7 @@
               </a:defRPr>
             </a:pPr>
             <a:r>
-              <a:t>한 장에는 한 행동만 수행합니다.</a:t>
+              <a:t>파일을 입력하기 전에 ‘무엇을 만들고 어디서 볼지’를 먼저 연결합니다.</a:t>
             </a:r>
           </a:p>
         </p:txBody>
@@ -18892,109 +20953,31 @@
               </a:defRPr>
             </a:pPr>
             <a:r>
-              <a:t>현재 단계 2/2    |    현재 폴더 ~/ros2_curri/agv_ws    |    현재 터미널</a:t>
-            </a:r>
-          </a:p>
-        </p:txBody>
-      </p:sp>
-      <p:sp>
-        <p:nvSpPr>
-          <p:cNvPr id="7" name="TextBox 6"/>
-          <p:cNvSpPr txBox="1"/>
-          <p:nvPr/>
-        </p:nvSpPr>
-        <p:spPr>
-          <a:xfrm>
-            <a:off x="676656" y="1764792"/>
-            <a:ext cx="1828800" cy="347472"/>
-          </a:xfrm>
-          <a:prstGeom prst="rect">
-            <a:avLst/>
-          </a:prstGeom>
-          <a:noFill/>
-        </p:spPr>
-        <p:txBody>
-          <a:bodyPr wrap="square" lIns="73152" rIns="73152" tIns="36576" bIns="36576">
-            <a:spAutoFit/>
-          </a:bodyPr>
-          <a:lstStyle/>
-          <a:p>
-            <a:pPr algn="l">
-              <a:spcAft>
-                <a:spcPts val="0"/>
-              </a:spcAft>
-              <a:defRPr sz="1800" b="1">
-                <a:solidFill>
-                  <a:srgbClr val="225B9B"/>
-                </a:solidFill>
-                <a:latin typeface="Noto Sans CJK KR"/>
-              </a:defRPr>
-            </a:pPr>
-            <a:r>
-              <a:t>왜 하는가</a:t>
-            </a:r>
-          </a:p>
-        </p:txBody>
-      </p:sp>
-      <p:sp>
-        <p:nvSpPr>
-          <p:cNvPr id="8" name="TextBox 7"/>
-          <p:cNvSpPr txBox="1"/>
-          <p:nvPr/>
-        </p:nvSpPr>
-        <p:spPr>
-          <a:xfrm>
-            <a:off x="676656" y="2103120"/>
-            <a:ext cx="10789920" cy="512064"/>
-          </a:xfrm>
-          <a:prstGeom prst="rect">
-            <a:avLst/>
-          </a:prstGeom>
-          <a:noFill/>
-        </p:spPr>
-        <p:txBody>
-          <a:bodyPr wrap="square" lIns="73152" rIns="73152" tIns="36576" bIns="36576">
-            <a:spAutoFit/>
-          </a:bodyPr>
-          <a:lstStyle/>
-          <a:p>
-            <a:pPr algn="l">
-              <a:spcAft>
-                <a:spcPts val="0"/>
-              </a:spcAft>
-              <a:defRPr sz="2000" b="0">
-                <a:solidFill>
-                  <a:srgbClr val="122C4E"/>
-                </a:solidFill>
-                <a:latin typeface="Noto Sans CJK KR"/>
-              </a:defRPr>
-            </a:pPr>
-            <a:r>
-              <a:t>모델 파일과 Python dependency는 교육 환경에서 고정해야 재현된다.</a:t>
-            </a:r>
-          </a:p>
-        </p:txBody>
-      </p:sp>
-      <p:sp>
-        <p:nvSpPr>
-          <p:cNvPr id="9" name="Rounded Rectangle 8"/>
+              <a:t>현재 단계 파일 역할    |    현재 폴더 ~/ros2_curri/agv_ws    |    현재 터미널</a:t>
+            </a:r>
+          </a:p>
+        </p:txBody>
+      </p:sp>
+      <p:sp>
+        <p:nvSpPr>
+          <p:cNvPr id="7" name="Rounded Rectangle 6"/>
           <p:cNvSpPr/>
           <p:nvPr/>
         </p:nvSpPr>
         <p:spPr>
           <a:xfrm>
-            <a:off x="676656" y="2871216"/>
-            <a:ext cx="10835640" cy="2331720"/>
+            <a:off x="640080" y="1627632"/>
+            <a:ext cx="10972800" cy="2048256"/>
           </a:xfrm>
           <a:prstGeom prst="roundRect">
             <a:avLst/>
           </a:prstGeom>
           <a:solidFill>
-            <a:srgbClr val="1D232D"/>
+            <a:srgbClr val="F4F7FB"/>
           </a:solidFill>
           <a:ln>
             <a:solidFill>
-              <a:srgbClr val="1D232D"/>
+              <a:srgbClr val="CCDBEB"/>
             </a:solidFill>
           </a:ln>
         </p:spPr>
@@ -19013,108 +20996,608 @@
           </a:fontRef>
         </p:style>
         <p:txBody>
-          <a:bodyPr rtlCol="0" anchor="ctr" wrap="square" lIns="73152" rIns="73152" tIns="36576" bIns="36576"/>
-          <a:lstStyle/>
-          <a:p>
-            <a:pPr algn="l">
-              <a:spcAft>
-                <a:spcPts val="0"/>
-              </a:spcAft>
-              <a:defRPr sz="1600" b="0">
-                <a:solidFill>
-                  <a:srgbClr val="FFFFFF"/>
+          <a:bodyPr rtlCol="0" anchor="ctr"/>
+          <a:lstStyle/>
+          <a:p>
+            <a:pPr algn="ctr"/>
+          </a:p>
+        </p:txBody>
+      </p:sp>
+      <p:sp>
+        <p:nvSpPr>
+          <p:cNvPr id="8" name="TextBox 7"/>
+          <p:cNvSpPr txBox="1"/>
+          <p:nvPr/>
+        </p:nvSpPr>
+        <p:spPr>
+          <a:xfrm>
+            <a:off x="850392" y="1764792"/>
+            <a:ext cx="10424160" cy="256032"/>
+          </a:xfrm>
+          <a:prstGeom prst="rect">
+            <a:avLst/>
+          </a:prstGeom>
+          <a:noFill/>
+        </p:spPr>
+        <p:txBody>
+          <a:bodyPr wrap="square" lIns="73152" rIns="73152" tIns="36576" bIns="36576">
+            <a:spAutoFit/>
+          </a:bodyPr>
+          <a:lstStyle/>
+          <a:p>
+            <a:pPr algn="l">
+              <a:spcAft>
+                <a:spcPts val="0"/>
+              </a:spcAft>
+              <a:defRPr sz="1300" b="1">
+                <a:solidFill>
+                  <a:srgbClr val="225B9B"/>
                 </a:solidFill>
                 <a:latin typeface="DejaVu Sans Mono"/>
               </a:defRPr>
             </a:pPr>
             <a:r>
-              <a:t>ros2 run agv_vision yolo_node --ros-args \</a:t>
+              <a:t>~/ros2_curri/agv_ws/src/agv_interfaces/CMakeLists.txt</a:t>
+            </a:r>
+          </a:p>
+        </p:txBody>
+      </p:sp>
+      <p:sp>
+        <p:nvSpPr>
+          <p:cNvPr id="9" name="TextBox 8"/>
+          <p:cNvSpPr txBox="1"/>
+          <p:nvPr/>
+        </p:nvSpPr>
+        <p:spPr>
+          <a:xfrm>
+            <a:off x="868680" y="2130552"/>
+            <a:ext cx="1234440" cy="228600"/>
+          </a:xfrm>
+          <a:prstGeom prst="rect">
+            <a:avLst/>
+          </a:prstGeom>
+          <a:noFill/>
+        </p:spPr>
+        <p:txBody>
+          <a:bodyPr wrap="square" lIns="73152" rIns="73152" tIns="36576" bIns="36576">
+            <a:spAutoFit/>
+          </a:bodyPr>
+          <a:lstStyle/>
+          <a:p>
+            <a:pPr algn="l">
+              <a:spcAft>
+                <a:spcPts val="0"/>
+              </a:spcAft>
+              <a:defRPr sz="1500" b="1">
+                <a:solidFill>
+                  <a:srgbClr val="2A8B5A"/>
+                </a:solidFill>
+                <a:latin typeface="Noto Sans CJK KR"/>
+              </a:defRPr>
+            </a:pPr>
+            <a:r>
+              <a:t>만드는 것</a:t>
+            </a:r>
+          </a:p>
+        </p:txBody>
+      </p:sp>
+      <p:sp>
+        <p:nvSpPr>
+          <p:cNvPr id="10" name="TextBox 9"/>
+          <p:cNvSpPr txBox="1"/>
+          <p:nvPr/>
+        </p:nvSpPr>
+        <p:spPr>
+          <a:xfrm>
+            <a:off x="1975104" y="2112264"/>
+            <a:ext cx="9189720" cy="274320"/>
+          </a:xfrm>
+          <a:prstGeom prst="rect">
+            <a:avLst/>
+          </a:prstGeom>
+          <a:noFill/>
+        </p:spPr>
+        <p:txBody>
+          <a:bodyPr wrap="square" lIns="73152" rIns="73152" tIns="36576" bIns="36576">
+            <a:spAutoFit/>
+          </a:bodyPr>
+          <a:lstStyle/>
+          <a:p>
+            <a:pPr algn="l">
+              <a:spcAft>
+                <a:spcPts val="0"/>
+              </a:spcAft>
+              <a:defRPr sz="1500" b="0">
+                <a:solidFill>
+                  <a:srgbClr val="122C4E"/>
+                </a:solidFill>
+                <a:latin typeface="Noto Sans CJK KR"/>
+              </a:defRPr>
+            </a:pPr>
+            <a:r>
+              <a:t>이번 모듈의 재현 가능한 파일</a:t>
+            </a:r>
+          </a:p>
+        </p:txBody>
+      </p:sp>
+      <p:sp>
+        <p:nvSpPr>
+          <p:cNvPr id="11" name="TextBox 10"/>
+          <p:cNvSpPr txBox="1"/>
+          <p:nvPr/>
+        </p:nvSpPr>
+        <p:spPr>
+          <a:xfrm>
+            <a:off x="868680" y="2505456"/>
+            <a:ext cx="1234440" cy="228600"/>
+          </a:xfrm>
+          <a:prstGeom prst="rect">
+            <a:avLst/>
+          </a:prstGeom>
+          <a:noFill/>
+        </p:spPr>
+        <p:txBody>
+          <a:bodyPr wrap="square" lIns="73152" rIns="73152" tIns="36576" bIns="36576">
+            <a:spAutoFit/>
+          </a:bodyPr>
+          <a:lstStyle/>
+          <a:p>
+            <a:pPr algn="l">
+              <a:spcAft>
+                <a:spcPts val="0"/>
+              </a:spcAft>
+              <a:defRPr sz="1500" b="1">
+                <a:solidFill>
+                  <a:srgbClr val="DB7E22"/>
+                </a:solidFill>
+                <a:latin typeface="Noto Sans CJK KR"/>
+              </a:defRPr>
+            </a:pPr>
+            <a:r>
+              <a:t>코드 읽기</a:t>
+            </a:r>
+          </a:p>
+        </p:txBody>
+      </p:sp>
+      <p:sp>
+        <p:nvSpPr>
+          <p:cNvPr id="12" name="TextBox 11"/>
+          <p:cNvSpPr txBox="1"/>
+          <p:nvPr/>
+        </p:nvSpPr>
+        <p:spPr>
+          <a:xfrm>
+            <a:off x="1975104" y="2487168"/>
+            <a:ext cx="9189720" cy="301752"/>
+          </a:xfrm>
+          <a:prstGeom prst="rect">
+            <a:avLst/>
+          </a:prstGeom>
+          <a:noFill/>
+        </p:spPr>
+        <p:txBody>
+          <a:bodyPr wrap="square" lIns="73152" rIns="73152" tIns="36576" bIns="36576">
+            <a:spAutoFit/>
+          </a:bodyPr>
+          <a:lstStyle/>
+          <a:p>
+            <a:pPr algn="l">
+              <a:spcAft>
+                <a:spcPts val="0"/>
+              </a:spcAft>
+              <a:defRPr sz="1400" b="0">
+                <a:solidFill>
+                  <a:srgbClr val="122C4E"/>
+                </a:solidFill>
+                <a:latin typeface="Noto Sans CJK KR"/>
+              </a:defRPr>
+            </a:pPr>
+            <a:r>
+              <a:t>파일명·경로·핵심 이름을 슬라이드와 동일하게 작성한다.</a:t>
+            </a:r>
+          </a:p>
+        </p:txBody>
+      </p:sp>
+      <p:sp>
+        <p:nvSpPr>
+          <p:cNvPr id="13" name="TextBox 12"/>
+          <p:cNvSpPr txBox="1"/>
+          <p:nvPr/>
+        </p:nvSpPr>
+        <p:spPr>
+          <a:xfrm>
+            <a:off x="868680" y="2889504"/>
+            <a:ext cx="1234440" cy="228600"/>
+          </a:xfrm>
+          <a:prstGeom prst="rect">
+            <a:avLst/>
+          </a:prstGeom>
+          <a:noFill/>
+        </p:spPr>
+        <p:txBody>
+          <a:bodyPr wrap="square" lIns="73152" rIns="73152" tIns="36576" bIns="36576">
+            <a:spAutoFit/>
+          </a:bodyPr>
+          <a:lstStyle/>
+          <a:p>
+            <a:pPr algn="l">
+              <a:spcAft>
+                <a:spcPts val="0"/>
+              </a:spcAft>
+              <a:defRPr sz="1500" b="1">
+                <a:solidFill>
+                  <a:srgbClr val="225B9B"/>
+                </a:solidFill>
+                <a:latin typeface="Noto Sans CJK KR"/>
+              </a:defRPr>
+            </a:pPr>
+            <a:r>
+              <a:t>사용/확인</a:t>
+            </a:r>
+          </a:p>
+        </p:txBody>
+      </p:sp>
+      <p:sp>
+        <p:nvSpPr>
+          <p:cNvPr id="14" name="TextBox 13"/>
+          <p:cNvSpPr txBox="1"/>
+          <p:nvPr/>
+        </p:nvSpPr>
+        <p:spPr>
+          <a:xfrm>
+            <a:off x="1975104" y="2871216"/>
+            <a:ext cx="9189720" cy="512064"/>
+          </a:xfrm>
+          <a:prstGeom prst="rect">
+            <a:avLst/>
+          </a:prstGeom>
+          <a:noFill/>
+        </p:spPr>
+        <p:txBody>
+          <a:bodyPr wrap="square" lIns="73152" rIns="73152" tIns="36576" bIns="36576">
+            <a:spAutoFit/>
+          </a:bodyPr>
+          <a:lstStyle/>
+          <a:p>
+            <a:pPr algn="l">
+              <a:spcAft>
+                <a:spcPts val="0"/>
+              </a:spcAft>
+              <a:defRPr sz="1300" b="0">
+                <a:solidFill>
+                  <a:srgbClr val="122C4E"/>
+                </a:solidFill>
+                <a:latin typeface="Noto Sans CJK KR"/>
+              </a:defRPr>
+            </a:pPr>
+            <a:r>
+              <a:t>사용: build/source 뒤 실행 단계에서 사용한다.</a:t>
             </a:r>
             <a:br/>
             <a:r>
-              <a:t>  -p enable_yolo:=false</a:t>
+              <a:t>화면/출력: 검증 명령의 파일·topic 이름</a:t>
+            </a:r>
+          </a:p>
+        </p:txBody>
+      </p:sp>
+      <p:sp>
+        <p:nvSpPr>
+          <p:cNvPr id="15" name="Rounded Rectangle 14"/>
+          <p:cNvSpPr/>
+          <p:nvPr/>
+        </p:nvSpPr>
+        <p:spPr>
+          <a:xfrm>
+            <a:off x="640080" y="3941063"/>
+            <a:ext cx="10972800" cy="2048256"/>
+          </a:xfrm>
+          <a:prstGeom prst="roundRect">
+            <a:avLst/>
+          </a:prstGeom>
+          <a:solidFill>
+            <a:srgbClr val="F4F7FB"/>
+          </a:solidFill>
+          <a:ln>
+            <a:solidFill>
+              <a:srgbClr val="CCDBEB"/>
+            </a:solidFill>
+          </a:ln>
+        </p:spPr>
+        <p:style>
+          <a:lnRef idx="1">
+            <a:schemeClr val="accent1"/>
+          </a:lnRef>
+          <a:fillRef idx="3">
+            <a:schemeClr val="accent1"/>
+          </a:fillRef>
+          <a:effectRef idx="2">
+            <a:schemeClr val="accent1"/>
+          </a:effectRef>
+          <a:fontRef idx="minor">
+            <a:schemeClr val="lt1"/>
+          </a:fontRef>
+        </p:style>
+        <p:txBody>
+          <a:bodyPr rtlCol="0" anchor="ctr"/>
+          <a:lstStyle/>
+          <a:p>
+            <a:pPr algn="ctr"/>
+          </a:p>
+        </p:txBody>
+      </p:sp>
+      <p:sp>
+        <p:nvSpPr>
+          <p:cNvPr id="16" name="TextBox 15"/>
+          <p:cNvSpPr txBox="1"/>
+          <p:nvPr/>
+        </p:nvSpPr>
+        <p:spPr>
+          <a:xfrm>
+            <a:off x="850392" y="4078224"/>
+            <a:ext cx="10424160" cy="256032"/>
+          </a:xfrm>
+          <a:prstGeom prst="rect">
+            <a:avLst/>
+          </a:prstGeom>
+          <a:noFill/>
+        </p:spPr>
+        <p:txBody>
+          <a:bodyPr wrap="square" lIns="73152" rIns="73152" tIns="36576" bIns="36576">
+            <a:spAutoFit/>
+          </a:bodyPr>
+          <a:lstStyle/>
+          <a:p>
+            <a:pPr algn="l">
+              <a:spcAft>
+                <a:spcPts val="0"/>
+              </a:spcAft>
+              <a:defRPr sz="1300" b="1">
+                <a:solidFill>
+                  <a:srgbClr val="225B9B"/>
+                </a:solidFill>
+                <a:latin typeface="DejaVu Sans Mono"/>
+              </a:defRPr>
+            </a:pPr>
+            <a:r>
+              <a:t>~/ros2_curri/agv_ws/src/agv_vision/agv_vision/yolo_node.py</a:t>
+            </a:r>
+          </a:p>
+        </p:txBody>
+      </p:sp>
+      <p:sp>
+        <p:nvSpPr>
+          <p:cNvPr id="17" name="TextBox 16"/>
+          <p:cNvSpPr txBox="1"/>
+          <p:nvPr/>
+        </p:nvSpPr>
+        <p:spPr>
+          <a:xfrm>
+            <a:off x="868680" y="4443983"/>
+            <a:ext cx="1234440" cy="228600"/>
+          </a:xfrm>
+          <a:prstGeom prst="rect">
+            <a:avLst/>
+          </a:prstGeom>
+          <a:noFill/>
+        </p:spPr>
+        <p:txBody>
+          <a:bodyPr wrap="square" lIns="73152" rIns="73152" tIns="36576" bIns="36576">
+            <a:spAutoFit/>
+          </a:bodyPr>
+          <a:lstStyle/>
+          <a:p>
+            <a:pPr algn="l">
+              <a:spcAft>
+                <a:spcPts val="0"/>
+              </a:spcAft>
+              <a:defRPr sz="1500" b="1">
+                <a:solidFill>
+                  <a:srgbClr val="2A8B5A"/>
+                </a:solidFill>
+                <a:latin typeface="Noto Sans CJK KR"/>
+              </a:defRPr>
+            </a:pPr>
+            <a:r>
+              <a:t>만드는 것</a:t>
+            </a:r>
+          </a:p>
+        </p:txBody>
+      </p:sp>
+      <p:sp>
+        <p:nvSpPr>
+          <p:cNvPr id="18" name="TextBox 17"/>
+          <p:cNvSpPr txBox="1"/>
+          <p:nvPr/>
+        </p:nvSpPr>
+        <p:spPr>
+          <a:xfrm>
+            <a:off x="1975104" y="4425696"/>
+            <a:ext cx="9189720" cy="274320"/>
+          </a:xfrm>
+          <a:prstGeom prst="rect">
+            <a:avLst/>
+          </a:prstGeom>
+          <a:noFill/>
+        </p:spPr>
+        <p:txBody>
+          <a:bodyPr wrap="square" lIns="73152" rIns="73152" tIns="36576" bIns="36576">
+            <a:spAutoFit/>
+          </a:bodyPr>
+          <a:lstStyle/>
+          <a:p>
+            <a:pPr algn="l">
+              <a:spcAft>
+                <a:spcPts val="0"/>
+              </a:spcAft>
+              <a:defRPr sz="1500" b="0">
+                <a:solidFill>
+                  <a:srgbClr val="122C4E"/>
+                </a:solidFill>
+                <a:latin typeface="Noto Sans CJK KR"/>
+              </a:defRPr>
+            </a:pPr>
+            <a:r>
+              <a:t>카메라 Image를 받아 검출 결과와 debug Image를 내보내는 인지 노드</a:t>
+            </a:r>
+          </a:p>
+        </p:txBody>
+      </p:sp>
+      <p:sp>
+        <p:nvSpPr>
+          <p:cNvPr id="19" name="TextBox 18"/>
+          <p:cNvSpPr txBox="1"/>
+          <p:nvPr/>
+        </p:nvSpPr>
+        <p:spPr>
+          <a:xfrm>
+            <a:off x="868680" y="4818888"/>
+            <a:ext cx="1234440" cy="228600"/>
+          </a:xfrm>
+          <a:prstGeom prst="rect">
+            <a:avLst/>
+          </a:prstGeom>
+          <a:noFill/>
+        </p:spPr>
+        <p:txBody>
+          <a:bodyPr wrap="square" lIns="73152" rIns="73152" tIns="36576" bIns="36576">
+            <a:spAutoFit/>
+          </a:bodyPr>
+          <a:lstStyle/>
+          <a:p>
+            <a:pPr algn="l">
+              <a:spcAft>
+                <a:spcPts val="0"/>
+              </a:spcAft>
+              <a:defRPr sz="1500" b="1">
+                <a:solidFill>
+                  <a:srgbClr val="DB7E22"/>
+                </a:solidFill>
+                <a:latin typeface="Noto Sans CJK KR"/>
+              </a:defRPr>
+            </a:pPr>
+            <a:r>
+              <a:t>코드 읽기</a:t>
+            </a:r>
+          </a:p>
+        </p:txBody>
+      </p:sp>
+      <p:sp>
+        <p:nvSpPr>
+          <p:cNvPr id="20" name="TextBox 19"/>
+          <p:cNvSpPr txBox="1"/>
+          <p:nvPr/>
+        </p:nvSpPr>
+        <p:spPr>
+          <a:xfrm>
+            <a:off x="1975104" y="4800600"/>
+            <a:ext cx="9189720" cy="301752"/>
+          </a:xfrm>
+          <a:prstGeom prst="rect">
+            <a:avLst/>
+          </a:prstGeom>
+          <a:noFill/>
+        </p:spPr>
+        <p:txBody>
+          <a:bodyPr wrap="square" lIns="73152" rIns="73152" tIns="36576" bIns="36576">
+            <a:spAutoFit/>
+          </a:bodyPr>
+          <a:lstStyle/>
+          <a:p>
+            <a:pPr algn="l">
+              <a:spcAft>
+                <a:spcPts val="0"/>
+              </a:spcAft>
+              <a:defRPr sz="1400" b="0">
+                <a:solidFill>
+                  <a:srgbClr val="122C4E"/>
+                </a:solidFill>
+                <a:latin typeface="Noto Sans CJK KR"/>
+              </a:defRPr>
+            </a:pPr>
+            <a:r>
+              <a:t>subscription → cv_bridge 변환 → 검출 → Detection/debug publish 순서로 읽는다.</a:t>
+            </a:r>
+          </a:p>
+        </p:txBody>
+      </p:sp>
+      <p:sp>
+        <p:nvSpPr>
+          <p:cNvPr id="21" name="TextBox 20"/>
+          <p:cNvSpPr txBox="1"/>
+          <p:nvPr/>
+        </p:nvSpPr>
+        <p:spPr>
+          <a:xfrm>
+            <a:off x="868680" y="5202936"/>
+            <a:ext cx="1234440" cy="228600"/>
+          </a:xfrm>
+          <a:prstGeom prst="rect">
+            <a:avLst/>
+          </a:prstGeom>
+          <a:noFill/>
+        </p:spPr>
+        <p:txBody>
+          <a:bodyPr wrap="square" lIns="73152" rIns="73152" tIns="36576" bIns="36576">
+            <a:spAutoFit/>
+          </a:bodyPr>
+          <a:lstStyle/>
+          <a:p>
+            <a:pPr algn="l">
+              <a:spcAft>
+                <a:spcPts val="0"/>
+              </a:spcAft>
+              <a:defRPr sz="1500" b="1">
+                <a:solidFill>
+                  <a:srgbClr val="225B9B"/>
+                </a:solidFill>
+                <a:latin typeface="Noto Sans CJK KR"/>
+              </a:defRPr>
+            </a:pPr>
+            <a:r>
+              <a:t>사용/확인</a:t>
+            </a:r>
+          </a:p>
+        </p:txBody>
+      </p:sp>
+      <p:sp>
+        <p:nvSpPr>
+          <p:cNvPr id="22" name="TextBox 21"/>
+          <p:cNvSpPr txBox="1"/>
+          <p:nvPr/>
+        </p:nvSpPr>
+        <p:spPr>
+          <a:xfrm>
+            <a:off x="1975104" y="5184648"/>
+            <a:ext cx="9189720" cy="512064"/>
+          </a:xfrm>
+          <a:prstGeom prst="rect">
+            <a:avLst/>
+          </a:prstGeom>
+          <a:noFill/>
+        </p:spPr>
+        <p:txBody>
+          <a:bodyPr wrap="square" lIns="73152" rIns="73152" tIns="36576" bIns="36576">
+            <a:spAutoFit/>
+          </a:bodyPr>
+          <a:lstStyle/>
+          <a:p>
+            <a:pPr algn="l">
+              <a:spcAft>
+                <a:spcPts val="0"/>
+              </a:spcAft>
+              <a:defRPr sz="1300" b="0">
+                <a:solidFill>
+                  <a:srgbClr val="122C4E"/>
+                </a:solidFill>
+                <a:latin typeface="Noto Sans CJK KR"/>
+              </a:defRPr>
+            </a:pPr>
+            <a:r>
+              <a:t>사용: enable_yolo=false로 fallback부터 실행하고 모델 준비 뒤 true로 바꾼다.</a:t>
             </a:r>
             <a:br/>
             <a:r>
-              <a:t># ultralytics와 모델 파일 준비 뒤에만 true로 변경</a:t>
-            </a:r>
-          </a:p>
-        </p:txBody>
-      </p:sp>
-      <p:sp>
-        <p:nvSpPr>
-          <p:cNvPr id="10" name="TextBox 9"/>
-          <p:cNvSpPr txBox="1"/>
-          <p:nvPr/>
-        </p:nvSpPr>
-        <p:spPr>
-          <a:xfrm>
-            <a:off x="768096" y="5468112"/>
-            <a:ext cx="1143000" cy="256032"/>
-          </a:xfrm>
-          <a:prstGeom prst="rect">
-            <a:avLst/>
-          </a:prstGeom>
-          <a:noFill/>
-        </p:spPr>
-        <p:txBody>
-          <a:bodyPr wrap="square" lIns="73152" rIns="73152" tIns="36576" bIns="36576">
-            <a:spAutoFit/>
-          </a:bodyPr>
-          <a:lstStyle/>
-          <a:p>
-            <a:pPr algn="l">
-              <a:spcAft>
-                <a:spcPts val="0"/>
-              </a:spcAft>
-              <a:defRPr sz="1800" b="1">
-                <a:solidFill>
-                  <a:srgbClr val="2A8B5A"/>
-                </a:solidFill>
-                <a:latin typeface="Noto Sans CJK KR"/>
-              </a:defRPr>
-            </a:pPr>
-            <a:r>
-              <a:t>확인</a:t>
-            </a:r>
-          </a:p>
-        </p:txBody>
-      </p:sp>
-      <p:sp>
-        <p:nvSpPr>
-          <p:cNvPr id="11" name="TextBox 10"/>
-          <p:cNvSpPr txBox="1"/>
-          <p:nvPr/>
-        </p:nvSpPr>
-        <p:spPr>
-          <a:xfrm>
-            <a:off x="768096" y="5742432"/>
-            <a:ext cx="10561320" cy="347472"/>
-          </a:xfrm>
-          <a:prstGeom prst="rect">
-            <a:avLst/>
-          </a:prstGeom>
-          <a:noFill/>
-        </p:spPr>
-        <p:txBody>
-          <a:bodyPr wrap="square" lIns="73152" rIns="73152" tIns="36576" bIns="36576">
-            <a:spAutoFit/>
-          </a:bodyPr>
-          <a:lstStyle/>
-          <a:p>
-            <a:pPr algn="l">
-              <a:spcAft>
-                <a:spcPts val="0"/>
-              </a:spcAft>
-              <a:defRPr sz="1800" b="0">
-                <a:solidFill>
-                  <a:srgbClr val="122C4E"/>
-                </a:solidFill>
-                <a:latin typeface="Noto Sans CJK KR"/>
-              </a:defRPr>
-            </a:pPr>
-            <a:r>
-              <a:t>명령의 출력에서 topic·frame·파일 이름 또는 성공 메시지를 찾으면 이 단계가 완료됩니다.</a:t>
+              <a:t>화면/출력: /vision/debug_image의 노란 box와 target 거리</a:t>
             </a:r>
           </a:p>
         </p:txBody>
@@ -19171,7 +21654,7 @@
               </a:defRPr>
             </a:pPr>
             <a:r>
-              <a:t>파일을 새로 만들고 저장한다 (1/1)</a:t>
+              <a:t>코드/설정이 실제로 만드는 것 (3/3)</a:t>
             </a:r>
           </a:p>
         </p:txBody>
@@ -19210,7 +21693,7 @@
               </a:defRPr>
             </a:pPr>
             <a:r>
-              <a:t>~/ros2_curri/agv_ws/src/agv_interfaces/msg/Detection.msg</a:t>
+              <a:t>파일을 입력하기 전에 ‘무엇을 만들고 어디서 볼지’를 먼저 연결합니다.</a:t>
             </a:r>
           </a:p>
         </p:txBody>
@@ -19346,62 +21829,23 @@
               </a:defRPr>
             </a:pPr>
             <a:r>
-              <a:t>현재 단계 3/4    |    현재 폴더 ~/ros2_curri/agv_ws    |    현재 터미널</a:t>
-            </a:r>
-          </a:p>
-        </p:txBody>
-      </p:sp>
-      <p:sp>
-        <p:nvSpPr>
-          <p:cNvPr id="7" name="TextBox 6"/>
-          <p:cNvSpPr txBox="1"/>
-          <p:nvPr/>
-        </p:nvSpPr>
-        <p:spPr>
-          <a:xfrm>
-            <a:off x="658368" y="1627632"/>
-            <a:ext cx="10972800" cy="256032"/>
-          </a:xfrm>
-          <a:prstGeom prst="rect">
-            <a:avLst/>
-          </a:prstGeom>
-          <a:noFill/>
-        </p:spPr>
-        <p:txBody>
-          <a:bodyPr wrap="square" lIns="73152" rIns="73152" tIns="36576" bIns="36576">
-            <a:spAutoFit/>
-          </a:bodyPr>
-          <a:lstStyle/>
-          <a:p>
-            <a:pPr algn="l">
-              <a:spcAft>
-                <a:spcPts val="0"/>
-              </a:spcAft>
-              <a:defRPr sz="1500" b="1">
-                <a:solidFill>
-                  <a:srgbClr val="122C4E"/>
-                </a:solidFill>
-                <a:latin typeface="Noto Sans CJK KR"/>
-              </a:defRPr>
-            </a:pPr>
-            <a:r>
-              <a:t>이번 단계: 파일의 전체 내용을 중간 생략 없이 작성합니다. 아래 줄 범위를 끝까지 입력하세요.</a:t>
-            </a:r>
-          </a:p>
-        </p:txBody>
-      </p:sp>
-      <p:sp>
-        <p:nvSpPr>
-          <p:cNvPr id="8" name="Rectangle 7"/>
+              <a:t>현재 단계 파일 역할    |    현재 폴더 ~/ros2_curri/agv_ws    |    현재 터미널</a:t>
+            </a:r>
+          </a:p>
+        </p:txBody>
+      </p:sp>
+      <p:sp>
+        <p:nvSpPr>
+          <p:cNvPr id="7" name="Rounded Rectangle 6"/>
           <p:cNvSpPr/>
           <p:nvPr/>
         </p:nvSpPr>
         <p:spPr>
           <a:xfrm>
-            <a:off x="658368" y="1956816"/>
-            <a:ext cx="10972800" cy="603504"/>
-          </a:xfrm>
-          <a:prstGeom prst="rect">
+            <a:off x="640080" y="1627632"/>
+            <a:ext cx="10972800" cy="2048256"/>
+          </a:xfrm>
+          <a:prstGeom prst="roundRect">
             <a:avLst/>
           </a:prstGeom>
           <a:solidFill>
@@ -19409,7 +21853,7 @@
           </a:solidFill>
           <a:ln>
             <a:solidFill>
-              <a:srgbClr val="F4F7FB"/>
+              <a:srgbClr val="CCDBEB"/>
             </a:solidFill>
           </a:ln>
         </p:spPr>
@@ -19428,7 +21872,189 @@
           </a:fontRef>
         </p:style>
         <p:txBody>
-          <a:bodyPr rtlCol="0" anchor="ctr" wrap="square" lIns="73152" rIns="73152" tIns="36576" bIns="36576"/>
+          <a:bodyPr rtlCol="0" anchor="ctr"/>
+          <a:lstStyle/>
+          <a:p>
+            <a:pPr algn="ctr"/>
+          </a:p>
+        </p:txBody>
+      </p:sp>
+      <p:sp>
+        <p:nvSpPr>
+          <p:cNvPr id="8" name="TextBox 7"/>
+          <p:cNvSpPr txBox="1"/>
+          <p:nvPr/>
+        </p:nvSpPr>
+        <p:spPr>
+          <a:xfrm>
+            <a:off x="850392" y="1764792"/>
+            <a:ext cx="10424160" cy="256032"/>
+          </a:xfrm>
+          <a:prstGeom prst="rect">
+            <a:avLst/>
+          </a:prstGeom>
+          <a:noFill/>
+        </p:spPr>
+        <p:txBody>
+          <a:bodyPr wrap="square" lIns="73152" rIns="73152" tIns="36576" bIns="36576">
+            <a:spAutoFit/>
+          </a:bodyPr>
+          <a:lstStyle/>
+          <a:p>
+            <a:pPr algn="l">
+              <a:spcAft>
+                <a:spcPts val="0"/>
+              </a:spcAft>
+              <a:defRPr sz="1300" b="1">
+                <a:solidFill>
+                  <a:srgbClr val="225B9B"/>
+                </a:solidFill>
+                <a:latin typeface="DejaVu Sans Mono"/>
+              </a:defRPr>
+            </a:pPr>
+            <a:r>
+              <a:t>~/ros2_curri/agv_ws/src/agv_bringup/config/vision.yaml</a:t>
+            </a:r>
+          </a:p>
+        </p:txBody>
+      </p:sp>
+      <p:sp>
+        <p:nvSpPr>
+          <p:cNvPr id="9" name="TextBox 8"/>
+          <p:cNvSpPr txBox="1"/>
+          <p:nvPr/>
+        </p:nvSpPr>
+        <p:spPr>
+          <a:xfrm>
+            <a:off x="868680" y="2130552"/>
+            <a:ext cx="1234440" cy="228600"/>
+          </a:xfrm>
+          <a:prstGeom prst="rect">
+            <a:avLst/>
+          </a:prstGeom>
+          <a:noFill/>
+        </p:spPr>
+        <p:txBody>
+          <a:bodyPr wrap="square" lIns="73152" rIns="73152" tIns="36576" bIns="36576">
+            <a:spAutoFit/>
+          </a:bodyPr>
+          <a:lstStyle/>
+          <a:p>
+            <a:pPr algn="l">
+              <a:spcAft>
+                <a:spcPts val="0"/>
+              </a:spcAft>
+              <a:defRPr sz="1500" b="1">
+                <a:solidFill>
+                  <a:srgbClr val="2A8B5A"/>
+                </a:solidFill>
+                <a:latin typeface="Noto Sans CJK KR"/>
+              </a:defRPr>
+            </a:pPr>
+            <a:r>
+              <a:t>만드는 것</a:t>
+            </a:r>
+          </a:p>
+        </p:txBody>
+      </p:sp>
+      <p:sp>
+        <p:nvSpPr>
+          <p:cNvPr id="10" name="TextBox 9"/>
+          <p:cNvSpPr txBox="1"/>
+          <p:nvPr/>
+        </p:nvSpPr>
+        <p:spPr>
+          <a:xfrm>
+            <a:off x="1975104" y="2112264"/>
+            <a:ext cx="9189720" cy="274320"/>
+          </a:xfrm>
+          <a:prstGeom prst="rect">
+            <a:avLst/>
+          </a:prstGeom>
+          <a:noFill/>
+        </p:spPr>
+        <p:txBody>
+          <a:bodyPr wrap="square" lIns="73152" rIns="73152" tIns="36576" bIns="36576">
+            <a:spAutoFit/>
+          </a:bodyPr>
+          <a:lstStyle/>
+          <a:p>
+            <a:pPr algn="l">
+              <a:spcAft>
+                <a:spcPts val="0"/>
+              </a:spcAft>
+              <a:defRPr sz="1500" b="0">
+                <a:solidFill>
+                  <a:srgbClr val="122C4E"/>
+                </a:solidFill>
+                <a:latin typeface="Noto Sans CJK KR"/>
+              </a:defRPr>
+            </a:pPr>
+            <a:r>
+              <a:t>실행 시 읽히는 ROS 2 설정값</a:t>
+            </a:r>
+          </a:p>
+        </p:txBody>
+      </p:sp>
+      <p:sp>
+        <p:nvSpPr>
+          <p:cNvPr id="11" name="TextBox 10"/>
+          <p:cNvSpPr txBox="1"/>
+          <p:nvPr/>
+        </p:nvSpPr>
+        <p:spPr>
+          <a:xfrm>
+            <a:off x="868680" y="2505456"/>
+            <a:ext cx="1234440" cy="228600"/>
+          </a:xfrm>
+          <a:prstGeom prst="rect">
+            <a:avLst/>
+          </a:prstGeom>
+          <a:noFill/>
+        </p:spPr>
+        <p:txBody>
+          <a:bodyPr wrap="square" lIns="73152" rIns="73152" tIns="36576" bIns="36576">
+            <a:spAutoFit/>
+          </a:bodyPr>
+          <a:lstStyle/>
+          <a:p>
+            <a:pPr algn="l">
+              <a:spcAft>
+                <a:spcPts val="0"/>
+              </a:spcAft>
+              <a:defRPr sz="1500" b="1">
+                <a:solidFill>
+                  <a:srgbClr val="DB7E22"/>
+                </a:solidFill>
+                <a:latin typeface="Noto Sans CJK KR"/>
+              </a:defRPr>
+            </a:pPr>
+            <a:r>
+              <a:t>코드 읽기</a:t>
+            </a:r>
+          </a:p>
+        </p:txBody>
+      </p:sp>
+      <p:sp>
+        <p:nvSpPr>
+          <p:cNvPr id="12" name="TextBox 11"/>
+          <p:cNvSpPr txBox="1"/>
+          <p:nvPr/>
+        </p:nvSpPr>
+        <p:spPr>
+          <a:xfrm>
+            <a:off x="1975104" y="2487168"/>
+            <a:ext cx="9189720" cy="301752"/>
+          </a:xfrm>
+          <a:prstGeom prst="rect">
+            <a:avLst/>
+          </a:prstGeom>
+          <a:noFill/>
+        </p:spPr>
+        <p:txBody>
+          <a:bodyPr wrap="square" lIns="73152" rIns="73152" tIns="36576" bIns="36576">
+            <a:spAutoFit/>
+          </a:bodyPr>
           <a:lstStyle/>
           <a:p>
             <a:pPr algn="l">
@@ -19439,39 +22065,117 @@
                 <a:solidFill>
                   <a:srgbClr val="122C4E"/>
                 </a:solidFill>
-                <a:latin typeface="DejaVu Sans Mono"/>
-              </a:defRPr>
-            </a:pPr>
-            <a:r>
-              <a:t>파일 생성: mkdir -p ~/ros2_curri/agv_ws/src/agv_interfaces/msg</a:t>
+                <a:latin typeface="Noto Sans CJK KR"/>
+              </a:defRPr>
+            </a:pPr>
+            <a:r>
+              <a:t>이름 → type/value → launch에서 전달되는 위치를 비교한다.</a:t>
+            </a:r>
+          </a:p>
+        </p:txBody>
+      </p:sp>
+      <p:sp>
+        <p:nvSpPr>
+          <p:cNvPr id="13" name="TextBox 12"/>
+          <p:cNvSpPr txBox="1"/>
+          <p:nvPr/>
+        </p:nvSpPr>
+        <p:spPr>
+          <a:xfrm>
+            <a:off x="868680" y="2889504"/>
+            <a:ext cx="1234440" cy="228600"/>
+          </a:xfrm>
+          <a:prstGeom prst="rect">
+            <a:avLst/>
+          </a:prstGeom>
+          <a:noFill/>
+        </p:spPr>
+        <p:txBody>
+          <a:bodyPr wrap="square" lIns="73152" rIns="73152" tIns="36576" bIns="36576">
+            <a:spAutoFit/>
+          </a:bodyPr>
+          <a:lstStyle/>
+          <a:p>
+            <a:pPr algn="l">
+              <a:spcAft>
+                <a:spcPts val="0"/>
+              </a:spcAft>
+              <a:defRPr sz="1500" b="1">
+                <a:solidFill>
+                  <a:srgbClr val="225B9B"/>
+                </a:solidFill>
+                <a:latin typeface="Noto Sans CJK KR"/>
+              </a:defRPr>
+            </a:pPr>
+            <a:r>
+              <a:t>사용/확인</a:t>
+            </a:r>
+          </a:p>
+        </p:txBody>
+      </p:sp>
+      <p:sp>
+        <p:nvSpPr>
+          <p:cNvPr id="14" name="TextBox 13"/>
+          <p:cNvSpPr txBox="1"/>
+          <p:nvPr/>
+        </p:nvSpPr>
+        <p:spPr>
+          <a:xfrm>
+            <a:off x="1975104" y="2871216"/>
+            <a:ext cx="9189720" cy="512064"/>
+          </a:xfrm>
+          <a:prstGeom prst="rect">
+            <a:avLst/>
+          </a:prstGeom>
+          <a:noFill/>
+        </p:spPr>
+        <p:txBody>
+          <a:bodyPr wrap="square" lIns="73152" rIns="73152" tIns="36576" bIns="36576">
+            <a:spAutoFit/>
+          </a:bodyPr>
+          <a:lstStyle/>
+          <a:p>
+            <a:pPr algn="l">
+              <a:spcAft>
+                <a:spcPts val="0"/>
+              </a:spcAft>
+              <a:defRPr sz="1300" b="0">
+                <a:solidFill>
+                  <a:srgbClr val="122C4E"/>
+                </a:solidFill>
+                <a:latin typeface="Noto Sans CJK KR"/>
+              </a:defRPr>
+            </a:pPr>
+            <a:r>
+              <a:t>사용: launch 실행 뒤 ros2 param/topic 명령으로 확인한다.</a:t>
             </a:r>
             <a:br/>
             <a:r>
-              <a:t>파일 열기: nano ~/ros2_curri/agv_ws/src/agv_interfaces/msg/Detection.msg</a:t>
-            </a:r>
-          </a:p>
-        </p:txBody>
-      </p:sp>
-      <p:sp>
-        <p:nvSpPr>
-          <p:cNvPr id="9" name="Rectangle 8"/>
+              <a:t>화면/출력: terminal의 parameter/topic 출력</a:t>
+            </a:r>
+          </a:p>
+        </p:txBody>
+      </p:sp>
+      <p:sp>
+        <p:nvSpPr>
+          <p:cNvPr id="15" name="Rounded Rectangle 14"/>
           <p:cNvSpPr/>
           <p:nvPr/>
         </p:nvSpPr>
         <p:spPr>
           <a:xfrm>
-            <a:off x="658368" y="2706624"/>
-            <a:ext cx="10972800" cy="3364992"/>
-          </a:xfrm>
-          <a:prstGeom prst="rect">
+            <a:off x="640080" y="3941063"/>
+            <a:ext cx="10972800" cy="2048256"/>
+          </a:xfrm>
+          <a:prstGeom prst="roundRect">
             <a:avLst/>
           </a:prstGeom>
           <a:solidFill>
-            <a:srgbClr val="1D232D"/>
+            <a:srgbClr val="F4F7FB"/>
           </a:solidFill>
           <a:ln>
             <a:solidFill>
-              <a:srgbClr val="1D232D"/>
+              <a:srgbClr val="CCDBEB"/>
             </a:solidFill>
           </a:ln>
         </p:spPr>
@@ -19490,7 +22194,189 @@
           </a:fontRef>
         </p:style>
         <p:txBody>
-          <a:bodyPr rtlCol="0" anchor="ctr" wrap="square" lIns="164592" rIns="164592" tIns="109728" bIns="36576"/>
+          <a:bodyPr rtlCol="0" anchor="ctr"/>
+          <a:lstStyle/>
+          <a:p>
+            <a:pPr algn="ctr"/>
+          </a:p>
+        </p:txBody>
+      </p:sp>
+      <p:sp>
+        <p:nvSpPr>
+          <p:cNvPr id="16" name="TextBox 15"/>
+          <p:cNvSpPr txBox="1"/>
+          <p:nvPr/>
+        </p:nvSpPr>
+        <p:spPr>
+          <a:xfrm>
+            <a:off x="850392" y="4078224"/>
+            <a:ext cx="10424160" cy="256032"/>
+          </a:xfrm>
+          <a:prstGeom prst="rect">
+            <a:avLst/>
+          </a:prstGeom>
+          <a:noFill/>
+        </p:spPr>
+        <p:txBody>
+          <a:bodyPr wrap="square" lIns="73152" rIns="73152" tIns="36576" bIns="36576">
+            <a:spAutoFit/>
+          </a:bodyPr>
+          <a:lstStyle/>
+          <a:p>
+            <a:pPr algn="l">
+              <a:spcAft>
+                <a:spcPts val="0"/>
+              </a:spcAft>
+              <a:defRPr sz="1300" b="1">
+                <a:solidFill>
+                  <a:srgbClr val="225B9B"/>
+                </a:solidFill>
+                <a:latin typeface="DejaVu Sans Mono"/>
+              </a:defRPr>
+            </a:pPr>
+            <a:r>
+              <a:t>~/ros2_curri/agv_ws/src/agv_vision/setup.py</a:t>
+            </a:r>
+          </a:p>
+        </p:txBody>
+      </p:sp>
+      <p:sp>
+        <p:nvSpPr>
+          <p:cNvPr id="17" name="TextBox 16"/>
+          <p:cNvSpPr txBox="1"/>
+          <p:nvPr/>
+        </p:nvSpPr>
+        <p:spPr>
+          <a:xfrm>
+            <a:off x="868680" y="4443983"/>
+            <a:ext cx="1234440" cy="228600"/>
+          </a:xfrm>
+          <a:prstGeom prst="rect">
+            <a:avLst/>
+          </a:prstGeom>
+          <a:noFill/>
+        </p:spPr>
+        <p:txBody>
+          <a:bodyPr wrap="square" lIns="73152" rIns="73152" tIns="36576" bIns="36576">
+            <a:spAutoFit/>
+          </a:bodyPr>
+          <a:lstStyle/>
+          <a:p>
+            <a:pPr algn="l">
+              <a:spcAft>
+                <a:spcPts val="0"/>
+              </a:spcAft>
+              <a:defRPr sz="1500" b="1">
+                <a:solidFill>
+                  <a:srgbClr val="2A8B5A"/>
+                </a:solidFill>
+                <a:latin typeface="Noto Sans CJK KR"/>
+              </a:defRPr>
+            </a:pPr>
+            <a:r>
+              <a:t>만드는 것</a:t>
+            </a:r>
+          </a:p>
+        </p:txBody>
+      </p:sp>
+      <p:sp>
+        <p:nvSpPr>
+          <p:cNvPr id="18" name="TextBox 17"/>
+          <p:cNvSpPr txBox="1"/>
+          <p:nvPr/>
+        </p:nvSpPr>
+        <p:spPr>
+          <a:xfrm>
+            <a:off x="1975104" y="4425696"/>
+            <a:ext cx="9189720" cy="274320"/>
+          </a:xfrm>
+          <a:prstGeom prst="rect">
+            <a:avLst/>
+          </a:prstGeom>
+          <a:noFill/>
+        </p:spPr>
+        <p:txBody>
+          <a:bodyPr wrap="square" lIns="73152" rIns="73152" tIns="36576" bIns="36576">
+            <a:spAutoFit/>
+          </a:bodyPr>
+          <a:lstStyle/>
+          <a:p>
+            <a:pPr algn="l">
+              <a:spcAft>
+                <a:spcPts val="0"/>
+              </a:spcAft>
+              <a:defRPr sz="1500" b="0">
+                <a:solidFill>
+                  <a:srgbClr val="122C4E"/>
+                </a:solidFill>
+                <a:latin typeface="Noto Sans CJK KR"/>
+              </a:defRPr>
+            </a:pPr>
+            <a:r>
+              <a:t>ROS 2 node 또는 실행 보조 로직</a:t>
+            </a:r>
+          </a:p>
+        </p:txBody>
+      </p:sp>
+      <p:sp>
+        <p:nvSpPr>
+          <p:cNvPr id="19" name="TextBox 18"/>
+          <p:cNvSpPr txBox="1"/>
+          <p:nvPr/>
+        </p:nvSpPr>
+        <p:spPr>
+          <a:xfrm>
+            <a:off x="868680" y="4818888"/>
+            <a:ext cx="1234440" cy="228600"/>
+          </a:xfrm>
+          <a:prstGeom prst="rect">
+            <a:avLst/>
+          </a:prstGeom>
+          <a:noFill/>
+        </p:spPr>
+        <p:txBody>
+          <a:bodyPr wrap="square" lIns="73152" rIns="73152" tIns="36576" bIns="36576">
+            <a:spAutoFit/>
+          </a:bodyPr>
+          <a:lstStyle/>
+          <a:p>
+            <a:pPr algn="l">
+              <a:spcAft>
+                <a:spcPts val="0"/>
+              </a:spcAft>
+              <a:defRPr sz="1500" b="1">
+                <a:solidFill>
+                  <a:srgbClr val="DB7E22"/>
+                </a:solidFill>
+                <a:latin typeface="Noto Sans CJK KR"/>
+              </a:defRPr>
+            </a:pPr>
+            <a:r>
+              <a:t>코드 읽기</a:t>
+            </a:r>
+          </a:p>
+        </p:txBody>
+      </p:sp>
+      <p:sp>
+        <p:nvSpPr>
+          <p:cNvPr id="20" name="TextBox 19"/>
+          <p:cNvSpPr txBox="1"/>
+          <p:nvPr/>
+        </p:nvSpPr>
+        <p:spPr>
+          <a:xfrm>
+            <a:off x="1975104" y="4800600"/>
+            <a:ext cx="9189720" cy="301752"/>
+          </a:xfrm>
+          <a:prstGeom prst="rect">
+            <a:avLst/>
+          </a:prstGeom>
+          <a:noFill/>
+        </p:spPr>
+        <p:txBody>
+          <a:bodyPr wrap="square" lIns="73152" rIns="73152" tIns="36576" bIns="36576">
+            <a:spAutoFit/>
+          </a:bodyPr>
           <a:lstStyle/>
           <a:p>
             <a:pPr algn="l">
@@ -19499,80 +22385,95 @@
               </a:spcAft>
               <a:defRPr sz="1400" b="0">
                 <a:solidFill>
-                  <a:srgbClr val="FFFFFF"/>
-                </a:solidFill>
-                <a:latin typeface="DejaVu Sans Mono"/>
-              </a:defRPr>
-            </a:pPr>
-            <a:r>
-              <a:t>std_msgs/Header header</a:t>
+                  <a:srgbClr val="122C4E"/>
+                </a:solidFill>
+                <a:latin typeface="Noto Sans CJK KR"/>
+              </a:defRPr>
+            </a:pPr>
+            <a:r>
+              <a:t>import → Node 생성 → publisher/subscription → callback/main 순서로 읽는다.</a:t>
+            </a:r>
+          </a:p>
+        </p:txBody>
+      </p:sp>
+      <p:sp>
+        <p:nvSpPr>
+          <p:cNvPr id="21" name="TextBox 20"/>
+          <p:cNvSpPr txBox="1"/>
+          <p:nvPr/>
+        </p:nvSpPr>
+        <p:spPr>
+          <a:xfrm>
+            <a:off x="868680" y="5202936"/>
+            <a:ext cx="1234440" cy="228600"/>
+          </a:xfrm>
+          <a:prstGeom prst="rect">
+            <a:avLst/>
+          </a:prstGeom>
+          <a:noFill/>
+        </p:spPr>
+        <p:txBody>
+          <a:bodyPr wrap="square" lIns="73152" rIns="73152" tIns="36576" bIns="36576">
+            <a:spAutoFit/>
+          </a:bodyPr>
+          <a:lstStyle/>
+          <a:p>
+            <a:pPr algn="l">
+              <a:spcAft>
+                <a:spcPts val="0"/>
+              </a:spcAft>
+              <a:defRPr sz="1500" b="1">
+                <a:solidFill>
+                  <a:srgbClr val="225B9B"/>
+                </a:solidFill>
+                <a:latin typeface="Noto Sans CJK KR"/>
+              </a:defRPr>
+            </a:pPr>
+            <a:r>
+              <a:t>사용/확인</a:t>
+            </a:r>
+          </a:p>
+        </p:txBody>
+      </p:sp>
+      <p:sp>
+        <p:nvSpPr>
+          <p:cNvPr id="22" name="TextBox 21"/>
+          <p:cNvSpPr txBox="1"/>
+          <p:nvPr/>
+        </p:nvSpPr>
+        <p:spPr>
+          <a:xfrm>
+            <a:off x="1975104" y="5184648"/>
+            <a:ext cx="9189720" cy="512064"/>
+          </a:xfrm>
+          <a:prstGeom prst="rect">
+            <a:avLst/>
+          </a:prstGeom>
+          <a:noFill/>
+        </p:spPr>
+        <p:txBody>
+          <a:bodyPr wrap="square" lIns="73152" rIns="73152" tIns="36576" bIns="36576">
+            <a:spAutoFit/>
+          </a:bodyPr>
+          <a:lstStyle/>
+          <a:p>
+            <a:pPr algn="l">
+              <a:spcAft>
+                <a:spcPts val="0"/>
+              </a:spcAft>
+              <a:defRPr sz="1300" b="0">
+                <a:solidFill>
+                  <a:srgbClr val="122C4E"/>
+                </a:solidFill>
+                <a:latin typeface="Noto Sans CJK KR"/>
+              </a:defRPr>
+            </a:pPr>
+            <a:r>
+              <a:t>사용: package를 build·source한 뒤 ros2 run 또는 launch에서 실행한다.</a:t>
             </a:r>
             <a:br/>
             <a:r>
-              <a:t>string class_name</a:t>
-            </a:r>
-            <a:br/>
-            <a:r>
-              <a:t>float32 confidence</a:t>
-            </a:r>
-            <a:br/>
-            <a:r>
-              <a:t>int32 center_x</a:t>
-            </a:r>
-            <a:br/>
-            <a:r>
-              <a:t>int32 center_y</a:t>
-            </a:r>
-            <a:br/>
-            <a:r>
-              <a:t>int32 width</a:t>
-            </a:r>
-            <a:br/>
-            <a:r>
-              <a:t>int32 height</a:t>
-            </a:r>
-            <a:br/>
-            <a:r>
-              <a:t>float32 estimated_distance</a:t>
-            </a:r>
-          </a:p>
-        </p:txBody>
-      </p:sp>
-      <p:sp>
-        <p:nvSpPr>
-          <p:cNvPr id="10" name="TextBox 9"/>
-          <p:cNvSpPr txBox="1"/>
-          <p:nvPr/>
-        </p:nvSpPr>
-        <p:spPr>
-          <a:xfrm>
-            <a:off x="749808" y="6181344"/>
-            <a:ext cx="10789920" cy="201168"/>
-          </a:xfrm>
-          <a:prstGeom prst="rect">
-            <a:avLst/>
-          </a:prstGeom>
-          <a:noFill/>
-        </p:spPr>
-        <p:txBody>
-          <a:bodyPr wrap="square" lIns="73152" rIns="73152" tIns="36576" bIns="36576">
-            <a:spAutoFit/>
-          </a:bodyPr>
-          <a:lstStyle/>
-          <a:p>
-            <a:pPr algn="l">
-              <a:spcAft>
-                <a:spcPts val="0"/>
-              </a:spcAft>
-              <a:defRPr sz="1000" b="0">
-                <a:solidFill>
-                  <a:srgbClr val="5C6672"/>
-                </a:solidFill>
-                <a:latin typeface="Noto Sans CJK KR"/>
-              </a:defRPr>
-            </a:pPr>
-            <a:r>
-              <a:t>파일 전체 1/1 · 이 슬라이드 다음에 같은 파일의 나머지 줄이 이어집니다.</a:t>
+              <a:t>화면/출력: terminal의 node/topic/log 출력</a:t>
             </a:r>
           </a:p>
         </p:txBody>

--- a/blocks/E_autonomy_logic/M17_yolo_vision/M17_Camera_YOLO_Vision_Node.pptx
+++ b/blocks/E_autonomy_logic/M17_yolo_vision/M17_Camera_YOLO_Vision_Node.pptx
@@ -10427,7 +10427,7 @@
               <a:spcAft>
                 <a:spcPts val="0"/>
               </a:spcAft>
-              <a:defRPr sz="1800" b="1">
+              <a:defRPr sz="1400" b="1">
                 <a:solidFill>
                   <a:srgbClr val="FFFFFF"/>
                 </a:solidFill>
@@ -10435,7 +10435,7 @@
               </a:defRPr>
             </a:pPr>
             <a:r>
-              <a:t>M17 · Block E · ROS 2 + Gazebo Sim AGV</a:t>
+              <a:t>ROS 2 기반 AGV End-to-End 개발 커리큘럼 · M17 · Block E</a:t>
             </a:r>
           </a:p>
         </p:txBody>
@@ -10645,7 +10645,7 @@
               <a:spcAft>
                 <a:spcPts val="0"/>
               </a:spcAft>
-              <a:defRPr sz="1000" b="0">
+              <a:defRPr sz="900" b="0">
                 <a:solidFill>
                   <a:srgbClr val="5C6672"/>
                 </a:solidFill>
@@ -10653,7 +10653,7 @@
               </a:defRPr>
             </a:pPr>
             <a:r>
-              <a:t>ROS 2 Jazzy · Gazebo Harmonic · M17 · 따라 하기형 AGV 실습</a:t>
+              <a:t>ROS 2 기반 AGV End-to-End 개발 커리큘럼 · M17 · Block E</a:t>
             </a:r>
           </a:p>
         </p:txBody>
@@ -10819,7 +10819,7 @@
               <a:spcAft>
                 <a:spcPts val="0"/>
               </a:spcAft>
-              <a:defRPr sz="1000" b="0">
+              <a:defRPr sz="900" b="0">
                 <a:solidFill>
                   <a:srgbClr val="5C6672"/>
                 </a:solidFill>
@@ -10827,7 +10827,7 @@
               </a:defRPr>
             </a:pPr>
             <a:r>
-              <a:t>ROS 2 Jazzy · Gazebo Harmonic · M17 · 따라 하기형 AGV 실습</a:t>
+              <a:t>ROS 2 기반 AGV End-to-End 개발 커리큘럼 · M17 · Block E</a:t>
             </a:r>
           </a:p>
         </p:txBody>
@@ -11695,7 +11695,7 @@
               <a:spcAft>
                 <a:spcPts val="0"/>
               </a:spcAft>
-              <a:defRPr sz="1000" b="0">
+              <a:defRPr sz="900" b="0">
                 <a:solidFill>
                   <a:srgbClr val="5C6672"/>
                 </a:solidFill>
@@ -11703,7 +11703,7 @@
               </a:defRPr>
             </a:pPr>
             <a:r>
-              <a:t>ROS 2 Jazzy · Gazebo Harmonic · M17 · 따라 하기형 AGV 실습</a:t>
+              <a:t>ROS 2 기반 AGV End-to-End 개발 커리큘럼 · M17 · Block E</a:t>
             </a:r>
           </a:p>
         </p:txBody>
@@ -12571,7 +12571,7 @@
               <a:spcAft>
                 <a:spcPts val="0"/>
               </a:spcAft>
-              <a:defRPr sz="1000" b="0">
+              <a:defRPr sz="900" b="0">
                 <a:solidFill>
                   <a:srgbClr val="5C6672"/>
                 </a:solidFill>
@@ -12579,7 +12579,7 @@
               </a:defRPr>
             </a:pPr>
             <a:r>
-              <a:t>ROS 2 Jazzy · Gazebo Harmonic · M17 · 따라 하기형 AGV 실습</a:t>
+              <a:t>ROS 2 기반 AGV End-to-End 개발 커리큘럼 · M17 · Block E</a:t>
             </a:r>
           </a:p>
         </p:txBody>
@@ -13447,7 +13447,7 @@
               <a:spcAft>
                 <a:spcPts val="0"/>
               </a:spcAft>
-              <a:defRPr sz="1000" b="0">
+              <a:defRPr sz="900" b="0">
                 <a:solidFill>
                   <a:srgbClr val="5C6672"/>
                 </a:solidFill>
@@ -13455,7 +13455,7 @@
               </a:defRPr>
             </a:pPr>
             <a:r>
-              <a:t>ROS 2 Jazzy · Gazebo Harmonic · M17 · 따라 하기형 AGV 실습</a:t>
+              <a:t>ROS 2 기반 AGV End-to-End 개발 커리큘럼 · M17 · Block E</a:t>
             </a:r>
           </a:p>
         </p:txBody>
@@ -14001,7 +14001,7 @@
               <a:spcAft>
                 <a:spcPts val="0"/>
               </a:spcAft>
-              <a:defRPr sz="1000" b="0">
+              <a:defRPr sz="900" b="0">
                 <a:solidFill>
                   <a:srgbClr val="5C6672"/>
                 </a:solidFill>
@@ -14009,7 +14009,7 @@
               </a:defRPr>
             </a:pPr>
             <a:r>
-              <a:t>ROS 2 Jazzy · Gazebo Harmonic · M17 · 따라 하기형 AGV 실습</a:t>
+              <a:t>ROS 2 기반 AGV End-to-End 개발 커리큘럼 · M17 · Block E</a:t>
             </a:r>
           </a:p>
         </p:txBody>
@@ -14420,7 +14420,7 @@
               <a:spcAft>
                 <a:spcPts val="0"/>
               </a:spcAft>
-              <a:defRPr sz="1000" b="0">
+              <a:defRPr sz="900" b="0">
                 <a:solidFill>
                   <a:srgbClr val="5C6672"/>
                 </a:solidFill>
@@ -14428,7 +14428,7 @@
               </a:defRPr>
             </a:pPr>
             <a:r>
-              <a:t>ROS 2 Jazzy · Gazebo Harmonic · M17 · 따라 하기형 AGV 실습</a:t>
+              <a:t>ROS 2 기반 AGV End-to-End 개발 커리큘럼 · M17 · Block E</a:t>
             </a:r>
           </a:p>
         </p:txBody>
@@ -14948,7 +14948,7 @@
               <a:spcAft>
                 <a:spcPts val="0"/>
               </a:spcAft>
-              <a:defRPr sz="1000" b="0">
+              <a:defRPr sz="900" b="0">
                 <a:solidFill>
                   <a:srgbClr val="5C6672"/>
                 </a:solidFill>
@@ -14956,7 +14956,7 @@
               </a:defRPr>
             </a:pPr>
             <a:r>
-              <a:t>ROS 2 Jazzy · Gazebo Harmonic · M17 · 따라 하기형 AGV 실습</a:t>
+              <a:t>ROS 2 기반 AGV End-to-End 개발 커리큘럼 · M17 · Block E</a:t>
             </a:r>
           </a:p>
         </p:txBody>
@@ -15737,7 +15737,7 @@
               <a:spcAft>
                 <a:spcPts val="0"/>
               </a:spcAft>
-              <a:defRPr sz="1000" b="0">
+              <a:defRPr sz="900" b="0">
                 <a:solidFill>
                   <a:srgbClr val="5C6672"/>
                 </a:solidFill>
@@ -15745,7 +15745,7 @@
               </a:defRPr>
             </a:pPr>
             <a:r>
-              <a:t>ROS 2 Jazzy · Gazebo Harmonic · M17 · 따라 하기형 AGV 실습</a:t>
+              <a:t>ROS 2 기반 AGV End-to-End 개발 커리큘럼 · M17 · Block E</a:t>
             </a:r>
           </a:p>
         </p:txBody>
@@ -16306,7 +16306,7 @@
               <a:spcAft>
                 <a:spcPts val="0"/>
               </a:spcAft>
-              <a:defRPr sz="1000" b="0">
+              <a:defRPr sz="900" b="0">
                 <a:solidFill>
                   <a:srgbClr val="5C6672"/>
                 </a:solidFill>
@@ -16314,7 +16314,7 @@
               </a:defRPr>
             </a:pPr>
             <a:r>
-              <a:t>ROS 2 Jazzy · Gazebo Harmonic · M17 · 따라 하기형 AGV 실습</a:t>
+              <a:t>ROS 2 기반 AGV End-to-End 개발 커리큘럼 · M17 · Block E</a:t>
             </a:r>
           </a:p>
         </p:txBody>
@@ -16780,7 +16780,7 @@
               <a:spcAft>
                 <a:spcPts val="0"/>
               </a:spcAft>
-              <a:defRPr sz="1000" b="0">
+              <a:defRPr sz="900" b="0">
                 <a:solidFill>
                   <a:srgbClr val="5C6672"/>
                 </a:solidFill>
@@ -16788,7 +16788,7 @@
               </a:defRPr>
             </a:pPr>
             <a:r>
-              <a:t>ROS 2 Jazzy · Gazebo Harmonic · M17 · 따라 하기형 AGV 실습</a:t>
+              <a:t>ROS 2 기반 AGV End-to-End 개발 커리큘럼 · M17 · Block E</a:t>
             </a:r>
           </a:p>
         </p:txBody>
@@ -17254,7 +17254,7 @@
               <a:spcAft>
                 <a:spcPts val="0"/>
               </a:spcAft>
-              <a:defRPr sz="1000" b="0">
+              <a:defRPr sz="900" b="0">
                 <a:solidFill>
                   <a:srgbClr val="5C6672"/>
                 </a:solidFill>
@@ -17262,7 +17262,7 @@
               </a:defRPr>
             </a:pPr>
             <a:r>
-              <a:t>ROS 2 Jazzy · Gazebo Harmonic · M17 · 따라 하기형 AGV 실습</a:t>
+              <a:t>ROS 2 기반 AGV End-to-End 개발 커리큘럼 · M17 · Block E</a:t>
             </a:r>
           </a:p>
         </p:txBody>
@@ -17715,7 +17715,7 @@
               <a:spcAft>
                 <a:spcPts val="0"/>
               </a:spcAft>
-              <a:defRPr sz="1000" b="0">
+              <a:defRPr sz="900" b="0">
                 <a:solidFill>
                   <a:srgbClr val="5C6672"/>
                 </a:solidFill>
@@ -17723,7 +17723,7 @@
               </a:defRPr>
             </a:pPr>
             <a:r>
-              <a:t>ROS 2 Jazzy · Gazebo Harmonic · M17 · 따라 하기형 AGV 실습</a:t>
+              <a:t>ROS 2 기반 AGV End-to-End 개발 커리큘럼 · M17 · Block E</a:t>
             </a:r>
           </a:p>
         </p:txBody>
@@ -18146,7 +18146,7 @@
               <a:spcAft>
                 <a:spcPts val="0"/>
               </a:spcAft>
-              <a:defRPr sz="1000" b="0">
+              <a:defRPr sz="900" b="0">
                 <a:solidFill>
                   <a:srgbClr val="5C6672"/>
                 </a:solidFill>
@@ -18154,7 +18154,7 @@
               </a:defRPr>
             </a:pPr>
             <a:r>
-              <a:t>ROS 2 Jazzy · Gazebo Harmonic · M17 · 따라 하기형 AGV 실습</a:t>
+              <a:t>ROS 2 기반 AGV End-to-End 개발 커리큘럼 · M17 · Block E</a:t>
             </a:r>
           </a:p>
         </p:txBody>
@@ -18674,7 +18674,7 @@
               <a:spcAft>
                 <a:spcPts val="0"/>
               </a:spcAft>
-              <a:defRPr sz="1000" b="0">
+              <a:defRPr sz="900" b="0">
                 <a:solidFill>
                   <a:srgbClr val="5C6672"/>
                 </a:solidFill>
@@ -18682,7 +18682,7 @@
               </a:defRPr>
             </a:pPr>
             <a:r>
-              <a:t>ROS 2 Jazzy · Gazebo Harmonic · M17 · 따라 하기형 AGV 실습</a:t>
+              <a:t>ROS 2 기반 AGV End-to-End 개발 커리큘럼 · M17 · Block E</a:t>
             </a:r>
           </a:p>
         </p:txBody>
@@ -19463,7 +19463,7 @@
               <a:spcAft>
                 <a:spcPts val="0"/>
               </a:spcAft>
-              <a:defRPr sz="1000" b="0">
+              <a:defRPr sz="900" b="0">
                 <a:solidFill>
                   <a:srgbClr val="5C6672"/>
                 </a:solidFill>
@@ -19471,7 +19471,7 @@
               </a:defRPr>
             </a:pPr>
             <a:r>
-              <a:t>ROS 2 Jazzy · Gazebo Harmonic · M17 · 따라 하기형 AGV 실습</a:t>
+              <a:t>ROS 2 기반 AGV End-to-End 개발 커리큘럼 · M17 · Block E</a:t>
             </a:r>
           </a:p>
         </p:txBody>
@@ -20032,7 +20032,7 @@
               <a:spcAft>
                 <a:spcPts val="0"/>
               </a:spcAft>
-              <a:defRPr sz="1000" b="0">
+              <a:defRPr sz="900" b="0">
                 <a:solidFill>
                   <a:srgbClr val="5C6672"/>
                 </a:solidFill>
@@ -20040,7 +20040,7 @@
               </a:defRPr>
             </a:pPr>
             <a:r>
-              <a:t>ROS 2 Jazzy · Gazebo Harmonic · M17 · 따라 하기형 AGV 실습</a:t>
+              <a:t>ROS 2 기반 AGV End-to-End 개발 커리큘럼 · M17 · Block E</a:t>
             </a:r>
           </a:p>
         </p:txBody>
@@ -20490,7 +20490,7 @@
               <a:spcAft>
                 <a:spcPts val="0"/>
               </a:spcAft>
-              <a:defRPr sz="1000" b="0">
+              <a:defRPr sz="900" b="0">
                 <a:solidFill>
                   <a:srgbClr val="5C6672"/>
                 </a:solidFill>
@@ -20498,7 +20498,7 @@
               </a:defRPr>
             </a:pPr>
             <a:r>
-              <a:t>ROS 2 Jazzy · Gazebo Harmonic · M17 · 따라 하기형 AGV 실습</a:t>
+              <a:t>ROS 2 기반 AGV End-to-End 개발 커리큘럼 · M17 · Block E</a:t>
             </a:r>
           </a:p>
         </p:txBody>
@@ -21018,7 +21018,7 @@
               <a:spcAft>
                 <a:spcPts val="0"/>
               </a:spcAft>
-              <a:defRPr sz="1000" b="0">
+              <a:defRPr sz="900" b="0">
                 <a:solidFill>
                   <a:srgbClr val="5C6672"/>
                 </a:solidFill>
@@ -21026,7 +21026,7 @@
               </a:defRPr>
             </a:pPr>
             <a:r>
-              <a:t>ROS 2 Jazzy · Gazebo Harmonic · M17 · 따라 하기형 AGV 실습</a:t>
+              <a:t>ROS 2 기반 AGV End-to-End 개발 커리큘럼 · M17 · Block E</a:t>
             </a:r>
           </a:p>
         </p:txBody>
@@ -21807,7 +21807,7 @@
               <a:spcAft>
                 <a:spcPts val="0"/>
               </a:spcAft>
-              <a:defRPr sz="1000" b="0">
+              <a:defRPr sz="900" b="0">
                 <a:solidFill>
                   <a:srgbClr val="5C6672"/>
                 </a:solidFill>
@@ -21815,7 +21815,7 @@
               </a:defRPr>
             </a:pPr>
             <a:r>
-              <a:t>ROS 2 Jazzy · Gazebo Harmonic · M17 · 따라 하기형 AGV 실습</a:t>
+              <a:t>ROS 2 기반 AGV End-to-End 개발 커리큘럼 · M17 · Block E</a:t>
             </a:r>
           </a:p>
         </p:txBody>
@@ -22241,7 +22241,7 @@
               <a:spcAft>
                 <a:spcPts val="0"/>
               </a:spcAft>
-              <a:defRPr sz="1000" b="0">
+              <a:defRPr sz="900" b="0">
                 <a:solidFill>
                   <a:srgbClr val="5C6672"/>
                 </a:solidFill>
@@ -22249,7 +22249,7 @@
               </a:defRPr>
             </a:pPr>
             <a:r>
-              <a:t>ROS 2 Jazzy · Gazebo Harmonic · M17 · 따라 하기형 AGV 실습</a:t>
+              <a:t>ROS 2 기반 AGV End-to-End 개발 커리큘럼 · M17 · Block E</a:t>
             </a:r>
           </a:p>
         </p:txBody>
@@ -22769,7 +22769,7 @@
               <a:spcAft>
                 <a:spcPts val="0"/>
               </a:spcAft>
-              <a:defRPr sz="1000" b="0">
+              <a:defRPr sz="900" b="0">
                 <a:solidFill>
                   <a:srgbClr val="5C6672"/>
                 </a:solidFill>
@@ -22777,7 +22777,7 @@
               </a:defRPr>
             </a:pPr>
             <a:r>
-              <a:t>ROS 2 Jazzy · Gazebo Harmonic · M17 · 따라 하기형 AGV 실습</a:t>
+              <a:t>ROS 2 기반 AGV End-to-End 개발 커리큘럼 · M17 · Block E</a:t>
             </a:r>
           </a:p>
         </p:txBody>
@@ -23558,7 +23558,7 @@
               <a:spcAft>
                 <a:spcPts val="0"/>
               </a:spcAft>
-              <a:defRPr sz="1000" b="0">
+              <a:defRPr sz="900" b="0">
                 <a:solidFill>
                   <a:srgbClr val="5C6672"/>
                 </a:solidFill>
@@ -23566,7 +23566,7 @@
               </a:defRPr>
             </a:pPr>
             <a:r>
-              <a:t>ROS 2 Jazzy · Gazebo Harmonic · M17 · 따라 하기형 AGV 실습</a:t>
+              <a:t>ROS 2 기반 AGV End-to-End 개발 커리큘럼 · M17 · Block E</a:t>
             </a:r>
           </a:p>
         </p:txBody>
@@ -23977,7 +23977,7 @@
               <a:spcAft>
                 <a:spcPts val="0"/>
               </a:spcAft>
-              <a:defRPr sz="1000" b="0">
+              <a:defRPr sz="900" b="0">
                 <a:solidFill>
                   <a:srgbClr val="5C6672"/>
                 </a:solidFill>
@@ -23985,7 +23985,7 @@
               </a:defRPr>
             </a:pPr>
             <a:r>
-              <a:t>ROS 2 Jazzy · Gazebo Harmonic · M17 · 따라 하기형 AGV 실습</a:t>
+              <a:t>ROS 2 기반 AGV End-to-End 개발 커리큘럼 · M17 · Block E</a:t>
             </a:r>
           </a:p>
         </p:txBody>
@@ -24546,7 +24546,7 @@
               <a:spcAft>
                 <a:spcPts val="0"/>
               </a:spcAft>
-              <a:defRPr sz="1000" b="0">
+              <a:defRPr sz="900" b="0">
                 <a:solidFill>
                   <a:srgbClr val="5C6672"/>
                 </a:solidFill>
@@ -24554,7 +24554,7 @@
               </a:defRPr>
             </a:pPr>
             <a:r>
-              <a:t>ROS 2 Jazzy · Gazebo Harmonic · M17 · 따라 하기형 AGV 실습</a:t>
+              <a:t>ROS 2 기반 AGV End-to-End 개발 커리큘럼 · M17 · Block E</a:t>
             </a:r>
           </a:p>
         </p:txBody>
@@ -25004,7 +25004,7 @@
               <a:spcAft>
                 <a:spcPts val="0"/>
               </a:spcAft>
-              <a:defRPr sz="1000" b="0">
+              <a:defRPr sz="900" b="0">
                 <a:solidFill>
                   <a:srgbClr val="5C6672"/>
                 </a:solidFill>
@@ -25012,7 +25012,7 @@
               </a:defRPr>
             </a:pPr>
             <a:r>
-              <a:t>ROS 2 Jazzy · Gazebo Harmonic · M17 · 따라 하기형 AGV 실습</a:t>
+              <a:t>ROS 2 기반 AGV End-to-End 개발 커리큘럼 · M17 · Block E</a:t>
             </a:r>
           </a:p>
         </p:txBody>
@@ -25532,7 +25532,7 @@
               <a:spcAft>
                 <a:spcPts val="0"/>
               </a:spcAft>
-              <a:defRPr sz="1000" b="0">
+              <a:defRPr sz="900" b="0">
                 <a:solidFill>
                   <a:srgbClr val="5C6672"/>
                 </a:solidFill>
@@ -25540,7 +25540,7 @@
               </a:defRPr>
             </a:pPr>
             <a:r>
-              <a:t>ROS 2 Jazzy · Gazebo Harmonic · M17 · 따라 하기형 AGV 실습</a:t>
+              <a:t>ROS 2 기반 AGV End-to-End 개발 커리큘럼 · M17 · Block E</a:t>
             </a:r>
           </a:p>
         </p:txBody>
@@ -26321,7 +26321,7 @@
               <a:spcAft>
                 <a:spcPts val="0"/>
               </a:spcAft>
-              <a:defRPr sz="1000" b="0">
+              <a:defRPr sz="900" b="0">
                 <a:solidFill>
                   <a:srgbClr val="5C6672"/>
                 </a:solidFill>
@@ -26329,7 +26329,7 @@
               </a:defRPr>
             </a:pPr>
             <a:r>
-              <a:t>ROS 2 Jazzy · Gazebo Harmonic · M17 · 따라 하기형 AGV 실습</a:t>
+              <a:t>ROS 2 기반 AGV End-to-End 개발 커리큘럼 · M17 · Block E</a:t>
             </a:r>
           </a:p>
         </p:txBody>
@@ -26890,7 +26890,7 @@
               <a:spcAft>
                 <a:spcPts val="0"/>
               </a:spcAft>
-              <a:defRPr sz="1000" b="0">
+              <a:defRPr sz="900" b="0">
                 <a:solidFill>
                   <a:srgbClr val="5C6672"/>
                 </a:solidFill>
@@ -26898,7 +26898,7 @@
               </a:defRPr>
             </a:pPr>
             <a:r>
-              <a:t>ROS 2 Jazzy · Gazebo Harmonic · M17 · 따라 하기형 AGV 실습</a:t>
+              <a:t>ROS 2 기반 AGV End-to-End 개발 커리큘럼 · M17 · Block E</a:t>
             </a:r>
           </a:p>
         </p:txBody>
@@ -27364,7 +27364,7 @@
               <a:spcAft>
                 <a:spcPts val="0"/>
               </a:spcAft>
-              <a:defRPr sz="1000" b="0">
+              <a:defRPr sz="900" b="0">
                 <a:solidFill>
                   <a:srgbClr val="5C6672"/>
                 </a:solidFill>
@@ -27372,7 +27372,7 @@
               </a:defRPr>
             </a:pPr>
             <a:r>
-              <a:t>ROS 2 Jazzy · Gazebo Harmonic · M17 · 따라 하기형 AGV 실습</a:t>
+              <a:t>ROS 2 기반 AGV End-to-End 개발 커리큘럼 · M17 · Block E</a:t>
             </a:r>
           </a:p>
         </p:txBody>
@@ -27838,7 +27838,7 @@
               <a:spcAft>
                 <a:spcPts val="0"/>
               </a:spcAft>
-              <a:defRPr sz="1000" b="0">
+              <a:defRPr sz="900" b="0">
                 <a:solidFill>
                   <a:srgbClr val="5C6672"/>
                 </a:solidFill>
@@ -27846,7 +27846,7 @@
               </a:defRPr>
             </a:pPr>
             <a:r>
-              <a:t>ROS 2 Jazzy · Gazebo Harmonic · M17 · 따라 하기형 AGV 실습</a:t>
+              <a:t>ROS 2 기반 AGV End-to-End 개발 커리큘럼 · M17 · Block E</a:t>
             </a:r>
           </a:p>
         </p:txBody>
@@ -28289,7 +28289,7 @@
               <a:spcAft>
                 <a:spcPts val="0"/>
               </a:spcAft>
-              <a:defRPr sz="1000" b="0">
+              <a:defRPr sz="900" b="0">
                 <a:solidFill>
                   <a:srgbClr val="5C6672"/>
                 </a:solidFill>
@@ -28297,7 +28297,7 @@
               </a:defRPr>
             </a:pPr>
             <a:r>
-              <a:t>ROS 2 Jazzy · Gazebo Harmonic · M17 · 따라 하기형 AGV 실습</a:t>
+              <a:t>ROS 2 기반 AGV End-to-End 개발 커리큘럼 · M17 · Block E</a:t>
             </a:r>
           </a:p>
         </p:txBody>
@@ -28817,7 +28817,7 @@
               <a:spcAft>
                 <a:spcPts val="0"/>
               </a:spcAft>
-              <a:defRPr sz="1000" b="0">
+              <a:defRPr sz="900" b="0">
                 <a:solidFill>
                   <a:srgbClr val="5C6672"/>
                 </a:solidFill>
@@ -28825,7 +28825,7 @@
               </a:defRPr>
             </a:pPr>
             <a:r>
-              <a:t>ROS 2 Jazzy · Gazebo Harmonic · M17 · 따라 하기형 AGV 실습</a:t>
+              <a:t>ROS 2 기반 AGV End-to-End 개발 커리큘럼 · M17 · Block E</a:t>
             </a:r>
           </a:p>
         </p:txBody>
@@ -29610,7 +29610,7 @@
               <a:spcAft>
                 <a:spcPts val="0"/>
               </a:spcAft>
-              <a:defRPr sz="1000" b="0">
+              <a:defRPr sz="900" b="0">
                 <a:solidFill>
                   <a:srgbClr val="5C6672"/>
                 </a:solidFill>
@@ -29618,7 +29618,7 @@
               </a:defRPr>
             </a:pPr>
             <a:r>
-              <a:t>ROS 2 Jazzy · Gazebo Harmonic · M17 · 따라 하기형 AGV 실습</a:t>
+              <a:t>ROS 2 기반 AGV End-to-End 개발 커리큘럼 · M17 · Block E</a:t>
             </a:r>
           </a:p>
         </p:txBody>
@@ -29943,7 +29943,7 @@
               <a:spcAft>
                 <a:spcPts val="0"/>
               </a:spcAft>
-              <a:defRPr sz="1000" b="0">
+              <a:defRPr sz="900" b="0">
                 <a:solidFill>
                   <a:srgbClr val="5C6672"/>
                 </a:solidFill>
@@ -29951,7 +29951,7 @@
               </a:defRPr>
             </a:pPr>
             <a:r>
-              <a:t>ROS 2 Jazzy · Gazebo Harmonic · M17 · 따라 하기형 AGV 실습</a:t>
+              <a:t>ROS 2 기반 AGV End-to-End 개발 커리큘럼 · M17 · Block E</a:t>
             </a:r>
           </a:p>
         </p:txBody>
@@ -30512,7 +30512,7 @@
               <a:spcAft>
                 <a:spcPts val="0"/>
               </a:spcAft>
-              <a:defRPr sz="1000" b="0">
+              <a:defRPr sz="900" b="0">
                 <a:solidFill>
                   <a:srgbClr val="5C6672"/>
                 </a:solidFill>
@@ -30520,7 +30520,7 @@
               </a:defRPr>
             </a:pPr>
             <a:r>
-              <a:t>ROS 2 Jazzy · Gazebo Harmonic · M17 · 따라 하기형 AGV 실습</a:t>
+              <a:t>ROS 2 기반 AGV End-to-End 개발 커리큘럼 · M17 · Block E</a:t>
             </a:r>
           </a:p>
         </p:txBody>
@@ -30978,7 +30978,7 @@
               <a:spcAft>
                 <a:spcPts val="0"/>
               </a:spcAft>
-              <a:defRPr sz="1000" b="0">
+              <a:defRPr sz="900" b="0">
                 <a:solidFill>
                   <a:srgbClr val="5C6672"/>
                 </a:solidFill>
@@ -30986,7 +30986,7 @@
               </a:defRPr>
             </a:pPr>
             <a:r>
-              <a:t>ROS 2 Jazzy · Gazebo Harmonic · M17 · 따라 하기형 AGV 실습</a:t>
+              <a:t>ROS 2 기반 AGV End-to-End 개발 커리큘럼 · M17 · Block E</a:t>
             </a:r>
           </a:p>
         </p:txBody>
@@ -31506,7 +31506,7 @@
               <a:spcAft>
                 <a:spcPts val="0"/>
               </a:spcAft>
-              <a:defRPr sz="1000" b="0">
+              <a:defRPr sz="900" b="0">
                 <a:solidFill>
                   <a:srgbClr val="5C6672"/>
                 </a:solidFill>
@@ -31514,7 +31514,7 @@
               </a:defRPr>
             </a:pPr>
             <a:r>
-              <a:t>ROS 2 Jazzy · Gazebo Harmonic · M17 · 따라 하기형 AGV 실습</a:t>
+              <a:t>ROS 2 기반 AGV End-to-End 개발 커리큘럼 · M17 · Block E</a:t>
             </a:r>
           </a:p>
         </p:txBody>
@@ -32295,7 +32295,7 @@
               <a:spcAft>
                 <a:spcPts val="0"/>
               </a:spcAft>
-              <a:defRPr sz="1000" b="0">
+              <a:defRPr sz="900" b="0">
                 <a:solidFill>
                   <a:srgbClr val="5C6672"/>
                 </a:solidFill>
@@ -32303,7 +32303,7 @@
               </a:defRPr>
             </a:pPr>
             <a:r>
-              <a:t>ROS 2 Jazzy · Gazebo Harmonic · M17 · 따라 하기형 AGV 실습</a:t>
+              <a:t>ROS 2 기반 AGV End-to-End 개발 커리큘럼 · M17 · Block E</a:t>
             </a:r>
           </a:p>
         </p:txBody>
@@ -33084,7 +33084,7 @@
               <a:spcAft>
                 <a:spcPts val="0"/>
               </a:spcAft>
-              <a:defRPr sz="1000" b="0">
+              <a:defRPr sz="900" b="0">
                 <a:solidFill>
                   <a:srgbClr val="5C6672"/>
                 </a:solidFill>
@@ -33092,7 +33092,7 @@
               </a:defRPr>
             </a:pPr>
             <a:r>
-              <a:t>ROS 2 Jazzy · Gazebo Harmonic · M17 · 따라 하기형 AGV 실습</a:t>
+              <a:t>ROS 2 기반 AGV End-to-End 개발 커리큘럼 · M17 · Block E</a:t>
             </a:r>
           </a:p>
         </p:txBody>
@@ -33881,7 +33881,7 @@
               <a:spcAft>
                 <a:spcPts val="0"/>
               </a:spcAft>
-              <a:defRPr sz="1000" b="0">
+              <a:defRPr sz="900" b="0">
                 <a:solidFill>
                   <a:srgbClr val="5C6672"/>
                 </a:solidFill>
@@ -33889,7 +33889,7 @@
               </a:defRPr>
             </a:pPr>
             <a:r>
-              <a:t>ROS 2 Jazzy · Gazebo Harmonic · M17 · 따라 하기형 AGV 실습</a:t>
+              <a:t>ROS 2 기반 AGV End-to-End 개발 커리큘럼 · M17 · Block E</a:t>
             </a:r>
           </a:p>
         </p:txBody>
@@ -34670,7 +34670,7 @@
               <a:spcAft>
                 <a:spcPts val="0"/>
               </a:spcAft>
-              <a:defRPr sz="1000" b="0">
+              <a:defRPr sz="900" b="0">
                 <a:solidFill>
                   <a:srgbClr val="5C6672"/>
                 </a:solidFill>
@@ -34678,7 +34678,7 @@
               </a:defRPr>
             </a:pPr>
             <a:r>
-              <a:t>ROS 2 Jazzy · Gazebo Harmonic · M17 · 따라 하기형 AGV 실습</a:t>
+              <a:t>ROS 2 기반 AGV End-to-End 개발 커리큘럼 · M17 · Block E</a:t>
             </a:r>
           </a:p>
         </p:txBody>
@@ -35243,7 +35243,7 @@
               <a:spcAft>
                 <a:spcPts val="0"/>
               </a:spcAft>
-              <a:defRPr sz="1000" b="0">
+              <a:defRPr sz="900" b="0">
                 <a:solidFill>
                   <a:srgbClr val="5C6672"/>
                 </a:solidFill>
@@ -35251,7 +35251,7 @@
               </a:defRPr>
             </a:pPr>
             <a:r>
-              <a:t>ROS 2 Jazzy · Gazebo Harmonic · M17 · 따라 하기형 AGV 실습</a:t>
+              <a:t>ROS 2 기반 AGV End-to-End 개발 커리큘럼 · M17 · Block E</a:t>
             </a:r>
           </a:p>
         </p:txBody>
@@ -35711,7 +35711,7 @@
               <a:spcAft>
                 <a:spcPts val="0"/>
               </a:spcAft>
-              <a:defRPr sz="1000" b="0">
+              <a:defRPr sz="900" b="0">
                 <a:solidFill>
                   <a:srgbClr val="5C6672"/>
                 </a:solidFill>
@@ -35719,7 +35719,7 @@
               </a:defRPr>
             </a:pPr>
             <a:r>
-              <a:t>ROS 2 Jazzy · Gazebo Harmonic · M17 · 따라 하기형 AGV 실습</a:t>
+              <a:t>ROS 2 기반 AGV End-to-End 개발 커리큘럼 · M17 · Block E</a:t>
             </a:r>
           </a:p>
         </p:txBody>
@@ -36185,7 +36185,7 @@
               <a:spcAft>
                 <a:spcPts val="0"/>
               </a:spcAft>
-              <a:defRPr sz="1000" b="0">
+              <a:defRPr sz="900" b="0">
                 <a:solidFill>
                   <a:srgbClr val="5C6672"/>
                 </a:solidFill>
@@ -36193,7 +36193,7 @@
               </a:defRPr>
             </a:pPr>
             <a:r>
-              <a:t>ROS 2 Jazzy · Gazebo Harmonic · M17 · 따라 하기형 AGV 실습</a:t>
+              <a:t>ROS 2 기반 AGV End-to-End 개발 커리큘럼 · M17 · Block E</a:t>
             </a:r>
           </a:p>
         </p:txBody>
@@ -36825,7 +36825,7 @@
               <a:spcAft>
                 <a:spcPts val="0"/>
               </a:spcAft>
-              <a:defRPr sz="1000" b="0">
+              <a:defRPr sz="900" b="0">
                 <a:solidFill>
                   <a:srgbClr val="5C6672"/>
                 </a:solidFill>
@@ -36833,7 +36833,7 @@
               </a:defRPr>
             </a:pPr>
             <a:r>
-              <a:t>ROS 2 Jazzy · Gazebo Harmonic · M17 · 따라 하기형 AGV 실습</a:t>
+              <a:t>ROS 2 기반 AGV End-to-End 개발 커리큘럼 · M17 · Block E</a:t>
             </a:r>
           </a:p>
         </p:txBody>
@@ -37296,7 +37296,7 @@
               <a:spcAft>
                 <a:spcPts val="0"/>
               </a:spcAft>
-              <a:defRPr sz="1000" b="0">
+              <a:defRPr sz="900" b="0">
                 <a:solidFill>
                   <a:srgbClr val="5C6672"/>
                 </a:solidFill>
@@ -37304,7 +37304,7 @@
               </a:defRPr>
             </a:pPr>
             <a:r>
-              <a:t>ROS 2 Jazzy · Gazebo Harmonic · M17 · 따라 하기형 AGV 실습</a:t>
+              <a:t>ROS 2 기반 AGV End-to-End 개발 커리큘럼 · M17 · Block E</a:t>
             </a:r>
           </a:p>
         </p:txBody>
@@ -37764,7 +37764,7 @@
               <a:spcAft>
                 <a:spcPts val="0"/>
               </a:spcAft>
-              <a:defRPr sz="1000" b="0">
+              <a:defRPr sz="900" b="0">
                 <a:solidFill>
                   <a:srgbClr val="5C6672"/>
                 </a:solidFill>
@@ -37772,7 +37772,7 @@
               </a:defRPr>
             </a:pPr>
             <a:r>
-              <a:t>ROS 2 Jazzy · Gazebo Harmonic · M17 · 따라 하기형 AGV 실습</a:t>
+              <a:t>ROS 2 기반 AGV End-to-End 개발 커리큘럼 · M17 · Block E</a:t>
             </a:r>
           </a:p>
         </p:txBody>
@@ -38238,7 +38238,7 @@
               <a:spcAft>
                 <a:spcPts val="0"/>
               </a:spcAft>
-              <a:defRPr sz="1000" b="0">
+              <a:defRPr sz="900" b="0">
                 <a:solidFill>
                   <a:srgbClr val="5C6672"/>
                 </a:solidFill>
@@ -38246,7 +38246,7 @@
               </a:defRPr>
             </a:pPr>
             <a:r>
-              <a:t>ROS 2 Jazzy · Gazebo Harmonic · M17 · 따라 하기형 AGV 실습</a:t>
+              <a:t>ROS 2 기반 AGV End-to-End 개발 커리큘럼 · M17 · Block E</a:t>
             </a:r>
           </a:p>
         </p:txBody>
@@ -38709,7 +38709,7 @@
               <a:spcAft>
                 <a:spcPts val="0"/>
               </a:spcAft>
-              <a:defRPr sz="1000" b="0">
+              <a:defRPr sz="900" b="0">
                 <a:solidFill>
                   <a:srgbClr val="5C6672"/>
                 </a:solidFill>
@@ -38717,7 +38717,7 @@
               </a:defRPr>
             </a:pPr>
             <a:r>
-              <a:t>ROS 2 Jazzy · Gazebo Harmonic · M17 · 따라 하기형 AGV 실습</a:t>
+              <a:t>ROS 2 기반 AGV End-to-End 개발 커리큘럼 · M17 · Block E</a:t>
             </a:r>
           </a:p>
         </p:txBody>
@@ -39183,7 +39183,7 @@
               <a:spcAft>
                 <a:spcPts val="0"/>
               </a:spcAft>
-              <a:defRPr sz="1000" b="0">
+              <a:defRPr sz="900" b="0">
                 <a:solidFill>
                   <a:srgbClr val="5C6672"/>
                 </a:solidFill>
@@ -39191,7 +39191,7 @@
               </a:defRPr>
             </a:pPr>
             <a:r>
-              <a:t>ROS 2 Jazzy · Gazebo Harmonic · M17 · 따라 하기형 AGV 실습</a:t>
+              <a:t>ROS 2 기반 AGV End-to-End 개발 커리큘럼 · M17 · Block E</a:t>
             </a:r>
           </a:p>
         </p:txBody>
@@ -39657,7 +39657,7 @@
               <a:spcAft>
                 <a:spcPts val="0"/>
               </a:spcAft>
-              <a:defRPr sz="1000" b="0">
+              <a:defRPr sz="900" b="0">
                 <a:solidFill>
                   <a:srgbClr val="5C6672"/>
                 </a:solidFill>
@@ -39665,7 +39665,7 @@
               </a:defRPr>
             </a:pPr>
             <a:r>
-              <a:t>ROS 2 Jazzy · Gazebo Harmonic · M17 · 따라 하기형 AGV 실습</a:t>
+              <a:t>ROS 2 기반 AGV End-to-End 개발 커리큘럼 · M17 · Block E</a:t>
             </a:r>
           </a:p>
         </p:txBody>
@@ -40128,7 +40128,7 @@
               <a:spcAft>
                 <a:spcPts val="0"/>
               </a:spcAft>
-              <a:defRPr sz="1000" b="0">
+              <a:defRPr sz="900" b="0">
                 <a:solidFill>
                   <a:srgbClr val="5C6672"/>
                 </a:solidFill>
@@ -40136,7 +40136,7 @@
               </a:defRPr>
             </a:pPr>
             <a:r>
-              <a:t>ROS 2 Jazzy · Gazebo Harmonic · M17 · 따라 하기형 AGV 실습</a:t>
+              <a:t>ROS 2 기반 AGV End-to-End 개발 커리큘럼 · M17 · Block E</a:t>
             </a:r>
           </a:p>
         </p:txBody>
@@ -40558,7 +40558,7 @@
               <a:spcAft>
                 <a:spcPts val="0"/>
               </a:spcAft>
-              <a:defRPr sz="1000" b="0">
+              <a:defRPr sz="900" b="0">
                 <a:solidFill>
                   <a:srgbClr val="5C6672"/>
                 </a:solidFill>
@@ -40566,7 +40566,7 @@
               </a:defRPr>
             </a:pPr>
             <a:r>
-              <a:t>ROS 2 Jazzy · Gazebo Harmonic · M17 · 따라 하기형 AGV 실습</a:t>
+              <a:t>ROS 2 기반 AGV End-to-End 개발 커리큘럼 · M17 · Block E</a:t>
             </a:r>
           </a:p>
         </p:txBody>
@@ -41086,7 +41086,7 @@
               <a:spcAft>
                 <a:spcPts val="0"/>
               </a:spcAft>
-              <a:defRPr sz="1000" b="0">
+              <a:defRPr sz="900" b="0">
                 <a:solidFill>
                   <a:srgbClr val="5C6672"/>
                 </a:solidFill>
@@ -41094,7 +41094,7 @@
               </a:defRPr>
             </a:pPr>
             <a:r>
-              <a:t>ROS 2 Jazzy · Gazebo Harmonic · M17 · 따라 하기형 AGV 실습</a:t>
+              <a:t>ROS 2 기반 AGV End-to-End 개발 커리큘럼 · M17 · Block E</a:t>
             </a:r>
           </a:p>
         </p:txBody>
@@ -41875,7 +41875,7 @@
               <a:spcAft>
                 <a:spcPts val="0"/>
               </a:spcAft>
-              <a:defRPr sz="1000" b="0">
+              <a:defRPr sz="900" b="0">
                 <a:solidFill>
                   <a:srgbClr val="5C6672"/>
                 </a:solidFill>
@@ -41883,7 +41883,7 @@
               </a:defRPr>
             </a:pPr>
             <a:r>
-              <a:t>ROS 2 Jazzy · Gazebo Harmonic · M17 · 따라 하기형 AGV 실습</a:t>
+              <a:t>ROS 2 기반 AGV End-to-End 개발 커리큘럼 · M17 · Block E</a:t>
             </a:r>
           </a:p>
         </p:txBody>
@@ -42112,7 +42112,7 @@
               <a:spcAft>
                 <a:spcPts val="0"/>
               </a:spcAft>
-              <a:defRPr sz="1000" b="0">
+              <a:defRPr sz="900" b="0">
                 <a:solidFill>
                   <a:srgbClr val="5C6672"/>
                 </a:solidFill>
@@ -42120,7 +42120,7 @@
               </a:defRPr>
             </a:pPr>
             <a:r>
-              <a:t>ROS 2 Jazzy · Gazebo Harmonic · M17 · 따라 하기형 AGV 실습</a:t>
+              <a:t>ROS 2 기반 AGV End-to-End 개발 커리큘럼 · M17 · Block E</a:t>
             </a:r>
           </a:p>
         </p:txBody>
@@ -42681,7 +42681,7 @@
               <a:spcAft>
                 <a:spcPts val="0"/>
               </a:spcAft>
-              <a:defRPr sz="1000" b="0">
+              <a:defRPr sz="900" b="0">
                 <a:solidFill>
                   <a:srgbClr val="5C6672"/>
                 </a:solidFill>
@@ -42689,7 +42689,7 @@
               </a:defRPr>
             </a:pPr>
             <a:r>
-              <a:t>ROS 2 Jazzy · Gazebo Harmonic · M17 · 따라 하기형 AGV 실습</a:t>
+              <a:t>ROS 2 기반 AGV End-to-End 개발 커리큘럼 · M17 · Block E</a:t>
             </a:r>
           </a:p>
         </p:txBody>
@@ -43135,7 +43135,7 @@
               <a:spcAft>
                 <a:spcPts val="0"/>
               </a:spcAft>
-              <a:defRPr sz="1000" b="0">
+              <a:defRPr sz="900" b="0">
                 <a:solidFill>
                   <a:srgbClr val="5C6672"/>
                 </a:solidFill>
@@ -43143,7 +43143,7 @@
               </a:defRPr>
             </a:pPr>
             <a:r>
-              <a:t>ROS 2 Jazzy · Gazebo Harmonic · M17 · 따라 하기형 AGV 실습</a:t>
+              <a:t>ROS 2 기반 AGV End-to-End 개발 커리큘럼 · M17 · Block E</a:t>
             </a:r>
           </a:p>
         </p:txBody>
@@ -43663,7 +43663,7 @@
               <a:spcAft>
                 <a:spcPts val="0"/>
               </a:spcAft>
-              <a:defRPr sz="1000" b="0">
+              <a:defRPr sz="900" b="0">
                 <a:solidFill>
                   <a:srgbClr val="5C6672"/>
                 </a:solidFill>
@@ -43671,7 +43671,7 @@
               </a:defRPr>
             </a:pPr>
             <a:r>
-              <a:t>ROS 2 Jazzy · Gazebo Harmonic · M17 · 따라 하기형 AGV 실습</a:t>
+              <a:t>ROS 2 기반 AGV End-to-End 개발 커리큘럼 · M17 · Block E</a:t>
             </a:r>
           </a:p>
         </p:txBody>
@@ -44456,7 +44456,7 @@
               <a:spcAft>
                 <a:spcPts val="0"/>
               </a:spcAft>
-              <a:defRPr sz="1000" b="0">
+              <a:defRPr sz="900" b="0">
                 <a:solidFill>
                   <a:srgbClr val="5C6672"/>
                 </a:solidFill>
@@ -44464,7 +44464,7 @@
               </a:defRPr>
             </a:pPr>
             <a:r>
-              <a:t>ROS 2 Jazzy · Gazebo Harmonic · M17 · 따라 하기형 AGV 실습</a:t>
+              <a:t>ROS 2 기반 AGV End-to-End 개발 커리큘럼 · M17 · Block E</a:t>
             </a:r>
           </a:p>
         </p:txBody>
@@ -45249,7 +45249,7 @@
               <a:spcAft>
                 <a:spcPts val="0"/>
               </a:spcAft>
-              <a:defRPr sz="1000" b="0">
+              <a:defRPr sz="900" b="0">
                 <a:solidFill>
                   <a:srgbClr val="5C6672"/>
                 </a:solidFill>
@@ -45257,7 +45257,7 @@
               </a:defRPr>
             </a:pPr>
             <a:r>
-              <a:t>ROS 2 Jazzy · Gazebo Harmonic · M17 · 따라 하기형 AGV 실습</a:t>
+              <a:t>ROS 2 기반 AGV End-to-End 개발 커리큘럼 · M17 · Block E</a:t>
             </a:r>
           </a:p>
         </p:txBody>
@@ -45707,7 +45707,7 @@
               <a:spcAft>
                 <a:spcPts val="0"/>
               </a:spcAft>
-              <a:defRPr sz="1000" b="0">
+              <a:defRPr sz="900" b="0">
                 <a:solidFill>
                   <a:srgbClr val="5C6672"/>
                 </a:solidFill>
@@ -45715,7 +45715,7 @@
               </a:defRPr>
             </a:pPr>
             <a:r>
-              <a:t>ROS 2 Jazzy · Gazebo Harmonic · M17 · 따라 하기형 AGV 실습</a:t>
+              <a:t>ROS 2 기반 AGV End-to-End 개발 커리큘럼 · M17 · Block E</a:t>
             </a:r>
           </a:p>
         </p:txBody>
@@ -46165,7 +46165,7 @@
               <a:spcAft>
                 <a:spcPts val="0"/>
               </a:spcAft>
-              <a:defRPr sz="1000" b="0">
+              <a:defRPr sz="900" b="0">
                 <a:solidFill>
                   <a:srgbClr val="5C6672"/>
                 </a:solidFill>
@@ -46173,7 +46173,7 @@
               </a:defRPr>
             </a:pPr>
             <a:r>
-              <a:t>ROS 2 Jazzy · Gazebo Harmonic · M17 · 따라 하기형 AGV 실습</a:t>
+              <a:t>ROS 2 기반 AGV End-to-End 개발 커리큘럼 · M17 · Block E</a:t>
             </a:r>
           </a:p>
         </p:txBody>
@@ -46619,7 +46619,7 @@
               <a:spcAft>
                 <a:spcPts val="0"/>
               </a:spcAft>
-              <a:defRPr sz="1000" b="0">
+              <a:defRPr sz="900" b="0">
                 <a:solidFill>
                   <a:srgbClr val="5C6672"/>
                 </a:solidFill>
@@ -46627,7 +46627,7 @@
               </a:defRPr>
             </a:pPr>
             <a:r>
-              <a:t>ROS 2 Jazzy · Gazebo Harmonic · M17 · 따라 하기형 AGV 실습</a:t>
+              <a:t>ROS 2 기반 AGV End-to-End 개발 커리큘럼 · M17 · Block E</a:t>
             </a:r>
           </a:p>
         </p:txBody>
@@ -46991,7 +46991,7 @@
               <a:spcAft>
                 <a:spcPts val="0"/>
               </a:spcAft>
-              <a:defRPr sz="1000" b="0">
+              <a:defRPr sz="900" b="0">
                 <a:solidFill>
                   <a:srgbClr val="5C6672"/>
                 </a:solidFill>
@@ -46999,7 +46999,7 @@
               </a:defRPr>
             </a:pPr>
             <a:r>
-              <a:t>ROS 2 Jazzy · Gazebo Harmonic · M17 · 따라 하기형 AGV 실습</a:t>
+              <a:t>ROS 2 기반 AGV End-to-End 개발 커리큘럼 · M17 · Block E</a:t>
             </a:r>
           </a:p>
         </p:txBody>
@@ -47228,7 +47228,7 @@
               <a:spcAft>
                 <a:spcPts val="0"/>
               </a:spcAft>
-              <a:defRPr sz="1000" b="0">
+              <a:defRPr sz="900" b="0">
                 <a:solidFill>
                   <a:srgbClr val="5C6672"/>
                 </a:solidFill>
@@ -47236,7 +47236,7 @@
               </a:defRPr>
             </a:pPr>
             <a:r>
-              <a:t>ROS 2 Jazzy · Gazebo Harmonic · M17 · 따라 하기형 AGV 실습</a:t>
+              <a:t>ROS 2 기반 AGV End-to-End 개발 커리큘럼 · M17 · Block E</a:t>
             </a:r>
           </a:p>
         </p:txBody>
@@ -47778,7 +47778,7 @@
               <a:spcAft>
                 <a:spcPts val="0"/>
               </a:spcAft>
-              <a:defRPr sz="1000" b="0">
+              <a:defRPr sz="900" b="0">
                 <a:solidFill>
                   <a:srgbClr val="5C6672"/>
                 </a:solidFill>
@@ -47786,7 +47786,7 @@
               </a:defRPr>
             </a:pPr>
             <a:r>
-              <a:t>ROS 2 Jazzy · Gazebo Harmonic · M17 · 따라 하기형 AGV 실습</a:t>
+              <a:t>ROS 2 기반 AGV End-to-End 개발 커리큘럼 · M17 · Block E</a:t>
             </a:r>
           </a:p>
         </p:txBody>
@@ -48185,7 +48185,7 @@
               <a:spcAft>
                 <a:spcPts val="0"/>
               </a:spcAft>
-              <a:defRPr sz="1000" b="0">
+              <a:defRPr sz="900" b="0">
                 <a:solidFill>
                   <a:srgbClr val="5C6672"/>
                 </a:solidFill>
@@ -48193,7 +48193,7 @@
               </a:defRPr>
             </a:pPr>
             <a:r>
-              <a:t>ROS 2 Jazzy · Gazebo Harmonic · M17 · 따라 하기형 AGV 실습</a:t>
+              <a:t>ROS 2 기반 AGV End-to-End 개발 커리큘럼 · M17 · Block E</a:t>
             </a:r>
           </a:p>
         </p:txBody>
@@ -48710,7 +48710,7 @@
               <a:spcAft>
                 <a:spcPts val="0"/>
               </a:spcAft>
-              <a:defRPr sz="1000" b="0">
+              <a:defRPr sz="900" b="0">
                 <a:solidFill>
                   <a:srgbClr val="5C6672"/>
                 </a:solidFill>
@@ -48718,7 +48718,7 @@
               </a:defRPr>
             </a:pPr>
             <a:r>
-              <a:t>ROS 2 Jazzy · Gazebo Harmonic · M17 · 따라 하기형 AGV 실습</a:t>
+              <a:t>ROS 2 기반 AGV End-to-End 개발 커리큘럼 · M17 · Block E</a:t>
             </a:r>
           </a:p>
         </p:txBody>
@@ -49094,7 +49094,7 @@
               <a:spcAft>
                 <a:spcPts val="0"/>
               </a:spcAft>
-              <a:defRPr sz="1000" b="0">
+              <a:defRPr sz="900" b="0">
                 <a:solidFill>
                   <a:srgbClr val="5C6672"/>
                 </a:solidFill>
@@ -49102,7 +49102,7 @@
               </a:defRPr>
             </a:pPr>
             <a:r>
-              <a:t>ROS 2 Jazzy · Gazebo Harmonic · M17 · 따라 하기형 AGV 실습</a:t>
+              <a:t>ROS 2 기반 AGV End-to-End 개발 커리큘럼 · M17 · Block E</a:t>
             </a:r>
           </a:p>
         </p:txBody>
@@ -49423,7 +49423,7 @@
               <a:spcAft>
                 <a:spcPts val="0"/>
               </a:spcAft>
-              <a:defRPr sz="1000" b="0">
+              <a:defRPr sz="900" b="0">
                 <a:solidFill>
                   <a:srgbClr val="5C6672"/>
                 </a:solidFill>
@@ -49431,7 +49431,7 @@
               </a:defRPr>
             </a:pPr>
             <a:r>
-              <a:t>ROS 2 Jazzy · Gazebo Harmonic · M17 · 따라 하기형 AGV 실습</a:t>
+              <a:t>ROS 2 기반 AGV End-to-End 개발 커리큘럼 · M17 · Block E</a:t>
             </a:r>
           </a:p>
         </p:txBody>
@@ -49842,7 +49842,7 @@
               <a:spcAft>
                 <a:spcPts val="0"/>
               </a:spcAft>
-              <a:defRPr sz="1000" b="0">
+              <a:defRPr sz="900" b="0">
                 <a:solidFill>
                   <a:srgbClr val="5C6672"/>
                 </a:solidFill>
@@ -49850,7 +49850,7 @@
               </a:defRPr>
             </a:pPr>
             <a:r>
-              <a:t>ROS 2 Jazzy · Gazebo Harmonic · M17 · 따라 하기형 AGV 실습</a:t>
+              <a:t>ROS 2 기반 AGV End-to-End 개발 커리큘럼 · M17 · Block E</a:t>
             </a:r>
           </a:p>
         </p:txBody>
@@ -50373,7 +50373,7 @@
               <a:spcAft>
                 <a:spcPts val="0"/>
               </a:spcAft>
-              <a:defRPr sz="1000" b="0">
+              <a:defRPr sz="900" b="0">
                 <a:solidFill>
                   <a:srgbClr val="5C6672"/>
                 </a:solidFill>
@@ -50381,7 +50381,7 @@
               </a:defRPr>
             </a:pPr>
             <a:r>
-              <a:t>ROS 2 Jazzy · Gazebo Harmonic · M17 · 따라 하기형 AGV 실습</a:t>
+              <a:t>ROS 2 기반 AGV End-to-End 개발 커리큘럼 · M17 · Block E</a:t>
             </a:r>
           </a:p>
         </p:txBody>
@@ -50680,7 +50680,7 @@
               <a:spcAft>
                 <a:spcPts val="0"/>
               </a:spcAft>
-              <a:defRPr sz="1000" b="0">
+              <a:defRPr sz="900" b="0">
                 <a:solidFill>
                   <a:srgbClr val="5C6672"/>
                 </a:solidFill>
@@ -50688,7 +50688,7 @@
               </a:defRPr>
             </a:pPr>
             <a:r>
-              <a:t>ROS 2 Jazzy · Gazebo Harmonic · M17 · 따라 하기형 AGV 실습</a:t>
+              <a:t>ROS 2 기반 AGV End-to-End 개발 커리큘럼 · M17 · Block E</a:t>
             </a:r>
           </a:p>
         </p:txBody>

--- a/blocks/E_autonomy_logic/M17_yolo_vision/M17_Camera_YOLO_Vision_Node.pptx
+++ b/blocks/E_autonomy_logic/M17_yolo_vision/M17_Camera_YOLO_Vision_Node.pptx
@@ -80,6 +80,7 @@
     <p:sldId id="328" r:id="rId80"/>
     <p:sldId id="329" r:id="rId81"/>
     <p:sldId id="330" r:id="rId82"/>
+    <p:sldId id="331" r:id="rId83"/>
   </p:sldIdLst>
   <p:sldSz cx="12191999" cy="6858000" type="screen4x3"/>
   <p:notesSz cx="6858000" cy="9144000"/>
@@ -6526,7 +6527,7 @@
           </a:p>
           <a:p>
             <a:r>
-              <a:t>[확인] ① 명령/설정  ② 정상 출력 또는 화면  ③ 다음 검증 명령으로 재확인</a:t>
+              <a:t>[확인] 명령·설정과 화면의 topic·frame·결과 이름을 대조합니다.</a:t>
             </a:r>
           </a:p>
           <a:p>
@@ -6696,27 +6697,17 @@
           <a:lstStyle/>
           <a:p>
             <a:r>
-              <a:t>[설명] 검증 명령은 GUI 결과와 별도로 실행해 재현 가능한 완료 기준을 만든다.</a:t>
-            </a:r>
-          </a:p>
-          <a:p>
-            <a:r>
-              <a:t>[실행] ros2 interface show agv_interfaces/msg/Detection</a:t>
-            </a:r>
-          </a:p>
-          <a:p>
-            <a:r>
-              <a:t>ros2 topic info /detections</a:t>
-            </a:r>
-          </a:p>
-          <a:p>
-            <a:r>
-              <a:t>ros2 param get /yolo_node confidence_threshold</a:t>
-            </a:r>
-          </a:p>
-          <a:p>
-            <a:r>
-              <a:t>[확인] /detections message 형식과 YOLO enable_yolo/model_path/threshold parameter를 확인한다.</a:t>
+              <a:t>[설명] 실제 Ubuntu/ROS 2 환경에서 생성한 검증 화면이다.</a:t>
+            </a:r>
+          </a:p>
+          <a:p>
+            <a:r>
+              <a:t>[실행] 슬라이드의 명령 또는 파일 작성 단계를 진행한다.</a:t>
+            </a:r>
+          </a:p>
+          <a:p>
+            <a:r>
+              <a:t>[확인] ① 명령/설정  ② 정상 출력 또는 화면  ③ 다음 검증 명령으로 재확인</a:t>
             </a:r>
           </a:p>
           <a:p>
@@ -6796,17 +6787,27 @@
           <a:lstStyle/>
           <a:p>
             <a:r>
-              <a:t>[설명] 오류를 대신 해결하지 말고 증상부터 우선 확인 순서대로 교육생이 실행하게 한다.</a:t>
-            </a:r>
-          </a:p>
-          <a:p>
-            <a:r>
-              <a:t>[실행] 슬라이드의 명령 또는 파일 작성 단계를 진행한다.</a:t>
-            </a:r>
-          </a:p>
-          <a:p>
-            <a:r>
-              <a:t>[확인] 수정 뒤 첫 검증 명령을 다시 실행한다.</a:t>
+              <a:t>[설명] 검증 명령은 GUI 결과와 별도로 실행해 재현 가능한 완료 기준을 만든다.</a:t>
+            </a:r>
+          </a:p>
+          <a:p>
+            <a:r>
+              <a:t>[실행] ros2 interface show agv_interfaces/msg/Detection</a:t>
+            </a:r>
+          </a:p>
+          <a:p>
+            <a:r>
+              <a:t>ros2 topic info /detections</a:t>
+            </a:r>
+          </a:p>
+          <a:p>
+            <a:r>
+              <a:t>ros2 param get /yolo_node confidence_threshold</a:t>
+            </a:r>
+          </a:p>
+          <a:p>
+            <a:r>
+              <a:t>[확인] /detections message 형식과 YOLO enable_yolo/model_path/threshold parameter를 확인한다.</a:t>
             </a:r>
           </a:p>
           <a:p>
@@ -6816,7 +6817,7 @@
           </a:p>
           <a:p>
             <a:r>
-              <a:t>[오류] 슬라이드의 두 대표 오류를 먼저 사용한다.</a:t>
+              <a:t>[오류] 오류가 나면 현재 폴더, source, 파일 경로를 먼저 확인한다.</a:t>
             </a:r>
           </a:p>
         </p:txBody>
@@ -6886,37 +6887,17 @@
           <a:lstStyle/>
           <a:p>
             <a:r>
-              <a:t>[설명] Complete는 정답 복사본이 아니라 막혔을 때 비교·복구하는 안전망이다.</a:t>
-            </a:r>
-          </a:p>
-          <a:p>
-            <a:r>
-              <a:t>[실행] cd ~/ros2_curri</a:t>
-            </a:r>
-          </a:p>
-          <a:p>
-            <a:r>
-              <a:t>diff -ru my_agv_ws/src blocks/E_autonomy_logic/M17_yolo_vision/complete/agv_ws/src || true</a:t>
-            </a:r>
-          </a:p>
-          <a:p>
-            <a:r>
-              <a:t>cp -a my_agv_ws/src my_agv_ws/src_before_M17</a:t>
-            </a:r>
-          </a:p>
-          <a:p>
-            <a:r>
-              <a:t>cp -a blocks/E_autonomy_logic/M17_yolo_vision/complete/agv_ws/src/. my_agv_ws/src/</a:t>
-            </a:r>
-          </a:p>
-          <a:p>
-            <a:r>
-              <a:t>cd my_agv_ws &amp;&amp; colcon build --symlink-install &amp;&amp; source install/setup.bash</a:t>
-            </a:r>
-          </a:p>
-          <a:p>
-            <a:r>
-              <a:t>[확인] diff에서 내 파일과 Complete의 차이를 설명할 수 있다.</a:t>
+              <a:t>[설명] 오류를 대신 해결하지 말고 증상부터 우선 확인 순서대로 교육생이 실행하게 한다.</a:t>
+            </a:r>
+          </a:p>
+          <a:p>
+            <a:r>
+              <a:t>[실행] 슬라이드의 명령 또는 파일 작성 단계를 진행한다.</a:t>
+            </a:r>
+          </a:p>
+          <a:p>
+            <a:r>
+              <a:t>[확인] 수정 뒤 첫 검증 명령을 다시 실행한다.</a:t>
             </a:r>
           </a:p>
           <a:p>
@@ -6926,7 +6907,7 @@
           </a:p>
           <a:p>
             <a:r>
-              <a:t>[오류] 오류가 나면 현재 폴더, source, 파일 경로를 먼저 확인한다.</a:t>
+              <a:t>[오류] 슬라이드의 두 대표 오류를 먼저 사용한다.</a:t>
             </a:r>
           </a:p>
         </p:txBody>
@@ -6996,17 +6977,37 @@
           <a:lstStyle/>
           <a:p>
             <a:r>
-              <a:t>[설명] 교육생이 직접 한 값만 바꿔 원인과 결과를 연결하게 한다.</a:t>
-            </a:r>
-          </a:p>
-          <a:p>
-            <a:r>
-              <a:t>[실행] 슬라이드의 명령 또는 파일 작성 단계를 진행한다.</a:t>
-            </a:r>
-          </a:p>
-          <a:p>
-            <a:r>
-              <a:t>[확인] 원래 값과 변경 값을 모두 기록한다.</a:t>
+              <a:t>[설명] Complete는 정답 복사본이 아니라 막혔을 때 비교·복구하는 안전망이다.</a:t>
+            </a:r>
+          </a:p>
+          <a:p>
+            <a:r>
+              <a:t>[실행] cd ~/ros2_curri</a:t>
+            </a:r>
+          </a:p>
+          <a:p>
+            <a:r>
+              <a:t>diff -ru my_agv_ws/src blocks/E_autonomy_logic/M17_yolo_vision/complete/agv_ws/src || true</a:t>
+            </a:r>
+          </a:p>
+          <a:p>
+            <a:r>
+              <a:t>cp -a my_agv_ws/src my_agv_ws/src_before_M17</a:t>
+            </a:r>
+          </a:p>
+          <a:p>
+            <a:r>
+              <a:t>cp -a blocks/E_autonomy_logic/M17_yolo_vision/complete/agv_ws/src/. my_agv_ws/src/</a:t>
+            </a:r>
+          </a:p>
+          <a:p>
+            <a:r>
+              <a:t>cd my_agv_ws &amp;&amp; colcon build --symlink-install &amp;&amp; source install/setup.bash</a:t>
+            </a:r>
+          </a:p>
+          <a:p>
+            <a:r>
+              <a:t>[확인] diff에서 내 파일과 Complete의 차이를 설명할 수 있다.</a:t>
             </a:r>
           </a:p>
           <a:p>
@@ -7086,7 +7087,7 @@
           <a:lstStyle/>
           <a:p>
             <a:r>
-              <a:t>[설명] 교육생이 자신의 workspace·캡처·로그를 저장했는지 확인하고 다음 모듈의 시작 상태를 읽는다.</a:t>
+              <a:t>[설명] 교육생이 직접 한 값만 바꿔 원인과 결과를 연결하게 한다.</a:t>
             </a:r>
           </a:p>
           <a:p>
@@ -7096,7 +7097,7 @@
           </a:p>
           <a:p>
             <a:r>
-              <a:t>[확인] M18 safety fusion 시작 조건을 말할 수 있다.</a:t>
+              <a:t>[확인] 원래 값과 변경 값을 모두 기록한다.</a:t>
             </a:r>
           </a:p>
           <a:p>
@@ -7132,6 +7133,96 @@
 </file>
 
 <file path=ppt/notesSlides/notesSlide75.xml><?xml version="1.0" encoding="utf-8"?>
+<p:notes xmlns:a="http://schemas.openxmlformats.org/drawingml/2006/main" xmlns:p="http://schemas.openxmlformats.org/presentationml/2006/main" xmlns:r="http://schemas.openxmlformats.org/officeDocument/2006/relationships">
+  <p:cSld>
+    <p:spTree>
+      <p:nvGrpSpPr>
+        <p:cNvPr id="1" name=""/>
+        <p:cNvGrpSpPr/>
+        <p:nvPr/>
+      </p:nvGrpSpPr>
+      <p:grpSpPr>
+        <a:xfrm>
+          <a:off x="0" y="0"/>
+          <a:ext cx="0" cy="0"/>
+          <a:chOff x="0" y="0"/>
+          <a:chExt cx="0" cy="0"/>
+        </a:xfrm>
+      </p:grpSpPr>
+      <p:sp>
+        <p:nvSpPr>
+          <p:cNvPr id="2" name="Slide Image Placeholder 1"/>
+          <p:cNvSpPr>
+            <a:spLocks noGrp="1"/>
+          </p:cNvSpPr>
+          <p:nvPr>
+            <p:ph type="sldImg" idx="2"/>
+          </p:nvPr>
+        </p:nvSpPr>
+        <p:spPr/>
+      </p:sp>
+      <p:sp>
+        <p:nvSpPr>
+          <p:cNvPr id="3" name="Notes Placeholder 2"/>
+          <p:cNvSpPr>
+            <a:spLocks noGrp="1"/>
+          </p:cNvSpPr>
+          <p:nvPr>
+            <p:ph type="body" idx="3" sz="quarter"/>
+          </p:nvPr>
+        </p:nvSpPr>
+        <p:spPr/>
+        <p:txBody>
+          <a:bodyPr/>
+          <a:lstStyle/>
+          <a:p>
+            <a:r>
+              <a:t>[설명] 교육생이 자신의 workspace·캡처·로그를 저장했는지 확인하고 다음 모듈의 시작 상태를 읽는다.</a:t>
+            </a:r>
+          </a:p>
+          <a:p>
+            <a:r>
+              <a:t>[실행] 슬라이드의 명령 또는 파일 작성 단계를 진행한다.</a:t>
+            </a:r>
+          </a:p>
+          <a:p>
+            <a:r>
+              <a:t>[확인] M18 safety fusion 시작 조건을 말할 수 있다.</a:t>
+            </a:r>
+          </a:p>
+          <a:p>
+            <a:r>
+              <a:t>[멈춤] 교육생이 현재 체크포인트를 통과할 때까지 기다린다.</a:t>
+            </a:r>
+          </a:p>
+          <a:p>
+            <a:r>
+              <a:t>[오류] 오류가 나면 현재 폴더, source, 파일 경로를 먼저 확인한다.</a:t>
+            </a:r>
+          </a:p>
+        </p:txBody>
+      </p:sp>
+      <p:sp>
+        <p:nvSpPr>
+          <p:cNvPr id="4" name="Slide Number Placeholder 3"/>
+          <p:cNvSpPr>
+            <a:spLocks noGrp="1"/>
+          </p:cNvSpPr>
+          <p:nvPr>
+            <p:ph type="sldNum" idx="5" sz="quarter"/>
+          </p:nvPr>
+        </p:nvSpPr>
+        <p:spPr/>
+      </p:sp>
+    </p:spTree>
+  </p:cSld>
+  <p:clrMapOvr>
+    <a:masterClrMapping/>
+  </p:clrMapOvr>
+</p:notes>
+</file>
+
+<file path=ppt/notesSlides/notesSlide76.xml><?xml version="1.0" encoding="utf-8"?>
 <p:notes xmlns:a="http://schemas.openxmlformats.org/drawingml/2006/main" xmlns:p="http://schemas.openxmlformats.org/presentationml/2006/main" xmlns:r="http://schemas.openxmlformats.org/officeDocument/2006/relationships">
   <p:cSld>
     <p:spTree>
@@ -14188,7 +14279,7 @@
           </a:fontRef>
         </p:style>
         <p:txBody>
-          <a:bodyPr rtlCol="0" anchor="ctr" wrap="square" lIns="73152" rIns="73152" tIns="36576" bIns="36576"/>
+          <a:bodyPr rtlCol="0" anchor="ctr" wrap="square" lIns="109728" rIns="109728" tIns="73152" bIns="73152"/>
           <a:lstStyle/>
           <a:p>
             <a:pPr algn="l">
@@ -14205,15 +14296,51 @@
             <a:r>
               <a:t>cd ~/ros2_curri/my_agv_ws/src</a:t>
             </a:r>
-            <a:br/>
+          </a:p>
+          <a:p>
+            <a:pPr algn="l">
+              <a:spcAft>
+                <a:spcPts val="0"/>
+              </a:spcAft>
+              <a:defRPr sz="1500" b="0">
+                <a:solidFill>
+                  <a:srgbClr val="FFFFFF"/>
+                </a:solidFill>
+                <a:latin typeface="DejaVu Sans Mono"/>
+              </a:defRPr>
+            </a:pPr>
             <a:r>
               <a:t>ros2 pkg create --build-type ament_cmake agv_interfaces</a:t>
             </a:r>
-            <a:br/>
+          </a:p>
+          <a:p>
+            <a:pPr algn="l">
+              <a:spcAft>
+                <a:spcPts val="0"/>
+              </a:spcAft>
+              <a:defRPr sz="1500" b="0">
+                <a:solidFill>
+                  <a:srgbClr val="FFFFFF"/>
+                </a:solidFill>
+                <a:latin typeface="DejaVu Sans Mono"/>
+              </a:defRPr>
+            </a:pPr>
             <a:r>
               <a:t>ros2 pkg create --build-type ament_python agv_bringup</a:t>
             </a:r>
-            <a:br/>
+          </a:p>
+          <a:p>
+            <a:pPr algn="l">
+              <a:spcAft>
+                <a:spcPts val="0"/>
+              </a:spcAft>
+              <a:defRPr sz="1500" b="0">
+                <a:solidFill>
+                  <a:srgbClr val="FFFFFF"/>
+                </a:solidFill>
+                <a:latin typeface="DejaVu Sans Mono"/>
+              </a:defRPr>
+            </a:pPr>
             <a:r>
               <a:t>mkdir -p agv_interfaces/msg agv_bringup/config agv_bringup/launch</a:t>
             </a:r>
@@ -14724,7 +14851,7 @@
           </a:fontRef>
         </p:style>
         <p:txBody>
-          <a:bodyPr rtlCol="0" anchor="ctr" wrap="square" lIns="73152" rIns="73152" tIns="36576" bIns="36576"/>
+          <a:bodyPr rtlCol="0" anchor="ctr" wrap="square" lIns="109728" rIns="109728" tIns="73152" bIns="73152"/>
           <a:lstStyle/>
           <a:p>
             <a:pPr algn="l">
@@ -14741,7 +14868,19 @@
             <a:r>
               <a:t>mkdir -p ~/ros2_curri/my_agv_ws/src/agv_interfaces</a:t>
             </a:r>
-            <a:br/>
+          </a:p>
+          <a:p>
+            <a:pPr algn="l">
+              <a:spcAft>
+                <a:spcPts val="0"/>
+              </a:spcAft>
+              <a:defRPr sz="1600" b="0">
+                <a:solidFill>
+                  <a:srgbClr val="FFFFFF"/>
+                </a:solidFill>
+                <a:latin typeface="DejaVu Sans Mono"/>
+              </a:defRPr>
+            </a:pPr>
             <a:r>
               <a:t>nano ~/ros2_curri/my_agv_ws/src/agv_interfaces/package.xml</a:t>
             </a:r>
@@ -16555,7 +16694,7 @@
           </a:fontRef>
         </p:style>
         <p:txBody>
-          <a:bodyPr rtlCol="0" anchor="ctr" wrap="square" lIns="164592" rIns="164592" tIns="109728" bIns="36576"/>
+          <a:bodyPr rtlCol="0" anchor="ctr" wrap="square" lIns="164592" rIns="164592" tIns="109728" bIns="73152"/>
           <a:lstStyle/>
           <a:p>
             <a:pPr algn="l">
@@ -16572,47 +16711,179 @@
             <a:r>
               <a:t>&lt;?xml version="1.0" ?&gt;</a:t>
             </a:r>
-            <a:br/>
+          </a:p>
+          <a:p>
+            <a:pPr algn="l">
+              <a:spcAft>
+                <a:spcPts val="0"/>
+              </a:spcAft>
+              <a:defRPr sz="1400" b="0">
+                <a:solidFill>
+                  <a:srgbClr val="FFFFFF"/>
+                </a:solidFill>
+                <a:latin typeface="DejaVu Sans Mono"/>
+              </a:defRPr>
+            </a:pPr>
             <a:r>
               <a:t>&lt;package format="3"&gt;</a:t>
             </a:r>
-            <a:br/>
+          </a:p>
+          <a:p>
+            <a:pPr algn="l">
+              <a:spcAft>
+                <a:spcPts val="0"/>
+              </a:spcAft>
+              <a:defRPr sz="1400" b="0">
+                <a:solidFill>
+                  <a:srgbClr val="FFFFFF"/>
+                </a:solidFill>
+                <a:latin typeface="DejaVu Sans Mono"/>
+              </a:defRPr>
+            </a:pPr>
             <a:r>
               <a:t>  &lt;name&gt;agv_interfaces&lt;/name&gt;</a:t>
             </a:r>
-            <a:br/>
+          </a:p>
+          <a:p>
+            <a:pPr algn="l">
+              <a:spcAft>
+                <a:spcPts val="0"/>
+              </a:spcAft>
+              <a:defRPr sz="1400" b="0">
+                <a:solidFill>
+                  <a:srgbClr val="FFFFFF"/>
+                </a:solidFill>
+                <a:latin typeface="DejaVu Sans Mono"/>
+              </a:defRPr>
+            </a:pPr>
             <a:r>
               <a:t>  &lt;version&gt;0.1.0&lt;/version&gt;</a:t>
             </a:r>
-            <a:br/>
+          </a:p>
+          <a:p>
+            <a:pPr algn="l">
+              <a:spcAft>
+                <a:spcPts val="0"/>
+              </a:spcAft>
+              <a:defRPr sz="1400" b="0">
+                <a:solidFill>
+                  <a:srgbClr val="FFFFFF"/>
+                </a:solidFill>
+                <a:latin typeface="DejaVu Sans Mono"/>
+              </a:defRPr>
+            </a:pPr>
             <a:r>
               <a:t>  </a:t>
             </a:r>
-            <a:br/>
+          </a:p>
+          <a:p>
+            <a:pPr algn="l">
+              <a:spcAft>
+                <a:spcPts val="0"/>
+              </a:spcAft>
+              <a:defRPr sz="1400" b="0">
+                <a:solidFill>
+                  <a:srgbClr val="FFFFFF"/>
+                </a:solidFill>
+                <a:latin typeface="DejaVu Sans Mono"/>
+              </a:defRPr>
+            </a:pPr>
             <a:r>
               <a:t>  </a:t>
             </a:r>
-            <a:br/>
+          </a:p>
+          <a:p>
+            <a:pPr algn="l">
+              <a:spcAft>
+                <a:spcPts val="0"/>
+              </a:spcAft>
+              <a:defRPr sz="1400" b="0">
+                <a:solidFill>
+                  <a:srgbClr val="FFFFFF"/>
+                </a:solidFill>
+                <a:latin typeface="DejaVu Sans Mono"/>
+              </a:defRPr>
+            </a:pPr>
             <a:r>
               <a:t>  &lt;description&gt;Custom messages for AGV perception.&lt;/description&gt;</a:t>
             </a:r>
-            <a:br/>
+          </a:p>
+          <a:p>
+            <a:pPr algn="l">
+              <a:spcAft>
+                <a:spcPts val="0"/>
+              </a:spcAft>
+              <a:defRPr sz="1400" b="0">
+                <a:solidFill>
+                  <a:srgbClr val="FFFFFF"/>
+                </a:solidFill>
+                <a:latin typeface="DejaVu Sans Mono"/>
+              </a:defRPr>
+            </a:pPr>
             <a:r>
               <a:t>  &lt;maintainer email="student@example.com"&gt;AGV student&lt;/maintainer&gt;</a:t>
             </a:r>
-            <a:br/>
+          </a:p>
+          <a:p>
+            <a:pPr algn="l">
+              <a:spcAft>
+                <a:spcPts val="0"/>
+              </a:spcAft>
+              <a:defRPr sz="1400" b="0">
+                <a:solidFill>
+                  <a:srgbClr val="FFFFFF"/>
+                </a:solidFill>
+                <a:latin typeface="DejaVu Sans Mono"/>
+              </a:defRPr>
+            </a:pPr>
             <a:r>
               <a:t>  &lt;license&gt;Apache-2.0&lt;/license&gt;</a:t>
             </a:r>
-            <a:br/>
+          </a:p>
+          <a:p>
+            <a:pPr algn="l">
+              <a:spcAft>
+                <a:spcPts val="0"/>
+              </a:spcAft>
+              <a:defRPr sz="1400" b="0">
+                <a:solidFill>
+                  <a:srgbClr val="FFFFFF"/>
+                </a:solidFill>
+                <a:latin typeface="DejaVu Sans Mono"/>
+              </a:defRPr>
+            </a:pPr>
             <a:r>
               <a:t>  </a:t>
             </a:r>
-            <a:br/>
+          </a:p>
+          <a:p>
+            <a:pPr algn="l">
+              <a:spcAft>
+                <a:spcPts val="0"/>
+              </a:spcAft>
+              <a:defRPr sz="1400" b="0">
+                <a:solidFill>
+                  <a:srgbClr val="FFFFFF"/>
+                </a:solidFill>
+                <a:latin typeface="DejaVu Sans Mono"/>
+              </a:defRPr>
+            </a:pPr>
             <a:r>
               <a:t>  </a:t>
             </a:r>
-            <a:br/>
+          </a:p>
+          <a:p>
+            <a:pPr algn="l">
+              <a:spcAft>
+                <a:spcPts val="0"/>
+              </a:spcAft>
+              <a:defRPr sz="1400" b="0">
+                <a:solidFill>
+                  <a:srgbClr val="FFFFFF"/>
+                </a:solidFill>
+                <a:latin typeface="DejaVu Sans Mono"/>
+              </a:defRPr>
+            </a:pPr>
             <a:r>
               <a:t>  &lt;buildtool_depend&gt;ament_cmake&lt;/buildtool_depend&gt;</a:t>
             </a:r>
@@ -17029,7 +17300,7 @@
           </a:fontRef>
         </p:style>
         <p:txBody>
-          <a:bodyPr rtlCol="0" anchor="ctr" wrap="square" lIns="164592" rIns="164592" tIns="109728" bIns="36576"/>
+          <a:bodyPr rtlCol="0" anchor="ctr" wrap="square" lIns="164592" rIns="164592" tIns="109728" bIns="73152"/>
           <a:lstStyle/>
           <a:p>
             <a:pPr algn="l">
@@ -17046,47 +17317,179 @@
             <a:r>
               <a:t>  &lt;buildtool_depend&gt;rosidl_default_generators&lt;/buildtool_depend&gt;</a:t>
             </a:r>
-            <a:br/>
+          </a:p>
+          <a:p>
+            <a:pPr algn="l">
+              <a:spcAft>
+                <a:spcPts val="0"/>
+              </a:spcAft>
+              <a:defRPr sz="1400" b="0">
+                <a:solidFill>
+                  <a:srgbClr val="FFFFFF"/>
+                </a:solidFill>
+                <a:latin typeface="DejaVu Sans Mono"/>
+              </a:defRPr>
+            </a:pPr>
             <a:r>
               <a:t>  </a:t>
             </a:r>
-            <a:br/>
+          </a:p>
+          <a:p>
+            <a:pPr algn="l">
+              <a:spcAft>
+                <a:spcPts val="0"/>
+              </a:spcAft>
+              <a:defRPr sz="1400" b="0">
+                <a:solidFill>
+                  <a:srgbClr val="FFFFFF"/>
+                </a:solidFill>
+                <a:latin typeface="DejaVu Sans Mono"/>
+              </a:defRPr>
+            </a:pPr>
             <a:r>
               <a:t>  </a:t>
             </a:r>
-            <a:br/>
+          </a:p>
+          <a:p>
+            <a:pPr algn="l">
+              <a:spcAft>
+                <a:spcPts val="0"/>
+              </a:spcAft>
+              <a:defRPr sz="1400" b="0">
+                <a:solidFill>
+                  <a:srgbClr val="FFFFFF"/>
+                </a:solidFill>
+                <a:latin typeface="DejaVu Sans Mono"/>
+              </a:defRPr>
+            </a:pPr>
             <a:r>
               <a:t>  &lt;depend&gt;std_msgs&lt;/depend&gt;</a:t>
             </a:r>
-            <a:br/>
+          </a:p>
+          <a:p>
+            <a:pPr algn="l">
+              <a:spcAft>
+                <a:spcPts val="0"/>
+              </a:spcAft>
+              <a:defRPr sz="1400" b="0">
+                <a:solidFill>
+                  <a:srgbClr val="FFFFFF"/>
+                </a:solidFill>
+                <a:latin typeface="DejaVu Sans Mono"/>
+              </a:defRPr>
+            </a:pPr>
             <a:r>
               <a:t>  &lt;member_of_group&gt;rosidl_interface_packages&lt;/member_of_group&gt;</a:t>
             </a:r>
-            <a:br/>
+          </a:p>
+          <a:p>
+            <a:pPr algn="l">
+              <a:spcAft>
+                <a:spcPts val="0"/>
+              </a:spcAft>
+              <a:defRPr sz="1400" b="0">
+                <a:solidFill>
+                  <a:srgbClr val="FFFFFF"/>
+                </a:solidFill>
+                <a:latin typeface="DejaVu Sans Mono"/>
+              </a:defRPr>
+            </a:pPr>
             <a:r>
               <a:t>  &lt;exec_depend&gt;rosidl_default_runtime&lt;/exec_depend&gt;</a:t>
             </a:r>
-            <a:br/>
+          </a:p>
+          <a:p>
+            <a:pPr algn="l">
+              <a:spcAft>
+                <a:spcPts val="0"/>
+              </a:spcAft>
+              <a:defRPr sz="1400" b="0">
+                <a:solidFill>
+                  <a:srgbClr val="FFFFFF"/>
+                </a:solidFill>
+                <a:latin typeface="DejaVu Sans Mono"/>
+              </a:defRPr>
+            </a:pPr>
             <a:r>
               <a:t>  </a:t>
             </a:r>
-            <a:br/>
+          </a:p>
+          <a:p>
+            <a:pPr algn="l">
+              <a:spcAft>
+                <a:spcPts val="0"/>
+              </a:spcAft>
+              <a:defRPr sz="1400" b="0">
+                <a:solidFill>
+                  <a:srgbClr val="FFFFFF"/>
+                </a:solidFill>
+                <a:latin typeface="DejaVu Sans Mono"/>
+              </a:defRPr>
+            </a:pPr>
             <a:r>
               <a:t>  </a:t>
             </a:r>
-            <a:br/>
+          </a:p>
+          <a:p>
+            <a:pPr algn="l">
+              <a:spcAft>
+                <a:spcPts val="0"/>
+              </a:spcAft>
+              <a:defRPr sz="1400" b="0">
+                <a:solidFill>
+                  <a:srgbClr val="FFFFFF"/>
+                </a:solidFill>
+                <a:latin typeface="DejaVu Sans Mono"/>
+              </a:defRPr>
+            </a:pPr>
             <a:r>
               <a:t>  &lt;export&gt;</a:t>
             </a:r>
-            <a:br/>
+          </a:p>
+          <a:p>
+            <a:pPr algn="l">
+              <a:spcAft>
+                <a:spcPts val="0"/>
+              </a:spcAft>
+              <a:defRPr sz="1400" b="0">
+                <a:solidFill>
+                  <a:srgbClr val="FFFFFF"/>
+                </a:solidFill>
+                <a:latin typeface="DejaVu Sans Mono"/>
+              </a:defRPr>
+            </a:pPr>
             <a:r>
               <a:t>    &lt;build_type&gt;ament_cmake&lt;/build_type&gt;</a:t>
             </a:r>
-            <a:br/>
+          </a:p>
+          <a:p>
+            <a:pPr algn="l">
+              <a:spcAft>
+                <a:spcPts val="0"/>
+              </a:spcAft>
+              <a:defRPr sz="1400" b="0">
+                <a:solidFill>
+                  <a:srgbClr val="FFFFFF"/>
+                </a:solidFill>
+                <a:latin typeface="DejaVu Sans Mono"/>
+              </a:defRPr>
+            </a:pPr>
             <a:r>
               <a:t>  &lt;/export&gt;</a:t>
             </a:r>
-            <a:br/>
+          </a:p>
+          <a:p>
+            <a:pPr algn="l">
+              <a:spcAft>
+                <a:spcPts val="0"/>
+              </a:spcAft>
+              <a:defRPr sz="1400" b="0">
+                <a:solidFill>
+                  <a:srgbClr val="FFFFFF"/>
+                </a:solidFill>
+                <a:latin typeface="DejaVu Sans Mono"/>
+              </a:defRPr>
+            </a:pPr>
             <a:r>
               <a:t>  </a:t>
             </a:r>
@@ -17964,7 +18367,7 @@
           </a:fontRef>
         </p:style>
         <p:txBody>
-          <a:bodyPr rtlCol="0" anchor="ctr" wrap="square" lIns="164592" rIns="164592" tIns="109728" bIns="36576"/>
+          <a:bodyPr rtlCol="0" anchor="ctr" wrap="square" lIns="164592" rIns="164592" tIns="109728" bIns="73152"/>
           <a:lstStyle/>
           <a:p>
             <a:pPr algn="l">
@@ -17978,7 +18381,19 @@
                 <a:latin typeface="DejaVu Sans Mono"/>
               </a:defRPr>
             </a:pPr>
-            <a:br/>
+          </a:p>
+          <a:p>
+            <a:pPr algn="l">
+              <a:spcAft>
+                <a:spcPts val="0"/>
+              </a:spcAft>
+              <a:defRPr sz="1400" b="0">
+                <a:solidFill>
+                  <a:srgbClr val="FFFFFF"/>
+                </a:solidFill>
+                <a:latin typeface="DejaVu Sans Mono"/>
+              </a:defRPr>
+            </a:pPr>
             <a:r>
               <a:t>&lt;/package&gt;</a:t>
             </a:r>
@@ -18450,7 +18865,7 @@
           </a:fontRef>
         </p:style>
         <p:txBody>
-          <a:bodyPr rtlCol="0" anchor="ctr" wrap="square" lIns="73152" rIns="73152" tIns="36576" bIns="36576"/>
+          <a:bodyPr rtlCol="0" anchor="ctr" wrap="square" lIns="109728" rIns="109728" tIns="73152" bIns="73152"/>
           <a:lstStyle/>
           <a:p>
             <a:pPr algn="l">
@@ -18467,7 +18882,19 @@
             <a:r>
               <a:t>mkdir -p ~/ros2_curri/my_agv_ws/src/agv_interfaces/msg</a:t>
             </a:r>
-            <a:br/>
+          </a:p>
+          <a:p>
+            <a:pPr algn="l">
+              <a:spcAft>
+                <a:spcPts val="0"/>
+              </a:spcAft>
+              <a:defRPr sz="1600" b="0">
+                <a:solidFill>
+                  <a:srgbClr val="FFFFFF"/>
+                </a:solidFill>
+                <a:latin typeface="DejaVu Sans Mono"/>
+              </a:defRPr>
+            </a:pPr>
             <a:r>
               <a:t>nano ~/ros2_curri/my_agv_ws/src/agv_interfaces/msg/Detection.msg</a:t>
             </a:r>
@@ -20281,7 +20708,7 @@
           </a:fontRef>
         </p:style>
         <p:txBody>
-          <a:bodyPr rtlCol="0" anchor="ctr" wrap="square" lIns="164592" rIns="164592" tIns="109728" bIns="36576"/>
+          <a:bodyPr rtlCol="0" anchor="ctr" wrap="square" lIns="164592" rIns="164592" tIns="109728" bIns="73152"/>
           <a:lstStyle/>
           <a:p>
             <a:pPr algn="l">
@@ -20298,31 +20725,115 @@
             <a:r>
               <a:t>std_msgs/Header header</a:t>
             </a:r>
-            <a:br/>
+          </a:p>
+          <a:p>
+            <a:pPr algn="l">
+              <a:spcAft>
+                <a:spcPts val="0"/>
+              </a:spcAft>
+              <a:defRPr sz="1400" b="0">
+                <a:solidFill>
+                  <a:srgbClr val="FFFFFF"/>
+                </a:solidFill>
+                <a:latin typeface="DejaVu Sans Mono"/>
+              </a:defRPr>
+            </a:pPr>
             <a:r>
               <a:t>string class_name</a:t>
             </a:r>
-            <a:br/>
+          </a:p>
+          <a:p>
+            <a:pPr algn="l">
+              <a:spcAft>
+                <a:spcPts val="0"/>
+              </a:spcAft>
+              <a:defRPr sz="1400" b="0">
+                <a:solidFill>
+                  <a:srgbClr val="FFFFFF"/>
+                </a:solidFill>
+                <a:latin typeface="DejaVu Sans Mono"/>
+              </a:defRPr>
+            </a:pPr>
             <a:r>
               <a:t>float32 confidence</a:t>
             </a:r>
-            <a:br/>
+          </a:p>
+          <a:p>
+            <a:pPr algn="l">
+              <a:spcAft>
+                <a:spcPts val="0"/>
+              </a:spcAft>
+              <a:defRPr sz="1400" b="0">
+                <a:solidFill>
+                  <a:srgbClr val="FFFFFF"/>
+                </a:solidFill>
+                <a:latin typeface="DejaVu Sans Mono"/>
+              </a:defRPr>
+            </a:pPr>
             <a:r>
               <a:t>int32 center_x</a:t>
             </a:r>
-            <a:br/>
+          </a:p>
+          <a:p>
+            <a:pPr algn="l">
+              <a:spcAft>
+                <a:spcPts val="0"/>
+              </a:spcAft>
+              <a:defRPr sz="1400" b="0">
+                <a:solidFill>
+                  <a:srgbClr val="FFFFFF"/>
+                </a:solidFill>
+                <a:latin typeface="DejaVu Sans Mono"/>
+              </a:defRPr>
+            </a:pPr>
             <a:r>
               <a:t>int32 center_y</a:t>
             </a:r>
-            <a:br/>
+          </a:p>
+          <a:p>
+            <a:pPr algn="l">
+              <a:spcAft>
+                <a:spcPts val="0"/>
+              </a:spcAft>
+              <a:defRPr sz="1400" b="0">
+                <a:solidFill>
+                  <a:srgbClr val="FFFFFF"/>
+                </a:solidFill>
+                <a:latin typeface="DejaVu Sans Mono"/>
+              </a:defRPr>
+            </a:pPr>
             <a:r>
               <a:t>int32 width</a:t>
             </a:r>
-            <a:br/>
+          </a:p>
+          <a:p>
+            <a:pPr algn="l">
+              <a:spcAft>
+                <a:spcPts val="0"/>
+              </a:spcAft>
+              <a:defRPr sz="1400" b="0">
+                <a:solidFill>
+                  <a:srgbClr val="FFFFFF"/>
+                </a:solidFill>
+                <a:latin typeface="DejaVu Sans Mono"/>
+              </a:defRPr>
+            </a:pPr>
             <a:r>
               <a:t>int32 height</a:t>
             </a:r>
-            <a:br/>
+          </a:p>
+          <a:p>
+            <a:pPr algn="l">
+              <a:spcAft>
+                <a:spcPts val="0"/>
+              </a:spcAft>
+              <a:defRPr sz="1400" b="0">
+                <a:solidFill>
+                  <a:srgbClr val="FFFFFF"/>
+                </a:solidFill>
+                <a:latin typeface="DejaVu Sans Mono"/>
+              </a:defRPr>
+            </a:pPr>
             <a:r>
               <a:t>float32 estimated_distance</a:t>
             </a:r>
@@ -20794,7 +21305,7 @@
           </a:fontRef>
         </p:style>
         <p:txBody>
-          <a:bodyPr rtlCol="0" anchor="ctr" wrap="square" lIns="73152" rIns="73152" tIns="36576" bIns="36576"/>
+          <a:bodyPr rtlCol="0" anchor="ctr" wrap="square" lIns="109728" rIns="109728" tIns="73152" bIns="73152"/>
           <a:lstStyle/>
           <a:p>
             <a:pPr algn="l">
@@ -20811,7 +21322,19 @@
             <a:r>
               <a:t>mkdir -p ~/ros2_curri/my_agv_ws/src/agv_interfaces/msg</a:t>
             </a:r>
-            <a:br/>
+          </a:p>
+          <a:p>
+            <a:pPr algn="l">
+              <a:spcAft>
+                <a:spcPts val="0"/>
+              </a:spcAft>
+              <a:defRPr sz="1600" b="0">
+                <a:solidFill>
+                  <a:srgbClr val="FFFFFF"/>
+                </a:solidFill>
+                <a:latin typeface="DejaVu Sans Mono"/>
+              </a:defRPr>
+            </a:pPr>
             <a:r>
               <a:t>nano ~/ros2_curri/my_agv_ws/src/agv_interfaces/msg/DetectionArray.msg</a:t>
             </a:r>
@@ -22056,7 +22579,7 @@
           </a:fontRef>
         </p:style>
         <p:txBody>
-          <a:bodyPr rtlCol="0" anchor="ctr" wrap="square" lIns="164592" rIns="164592" tIns="109728" bIns="36576"/>
+          <a:bodyPr rtlCol="0" anchor="ctr" wrap="square" lIns="164592" rIns="164592" tIns="109728" bIns="73152"/>
           <a:lstStyle/>
           <a:p>
             <a:pPr algn="l">
@@ -22073,7 +22596,19 @@
             <a:r>
               <a:t>std_msgs/Header header</a:t>
             </a:r>
-            <a:br/>
+          </a:p>
+          <a:p>
+            <a:pPr algn="l">
+              <a:spcAft>
+                <a:spcPts val="0"/>
+              </a:spcAft>
+              <a:defRPr sz="1400" b="0">
+                <a:solidFill>
+                  <a:srgbClr val="FFFFFF"/>
+                </a:solidFill>
+                <a:latin typeface="DejaVu Sans Mono"/>
+              </a:defRPr>
+            </a:pPr>
             <a:r>
               <a:t>Detection[] detections</a:t>
             </a:r>
@@ -22545,7 +23080,7 @@
           </a:fontRef>
         </p:style>
         <p:txBody>
-          <a:bodyPr rtlCol="0" anchor="ctr" wrap="square" lIns="73152" rIns="73152" tIns="36576" bIns="36576"/>
+          <a:bodyPr rtlCol="0" anchor="ctr" wrap="square" lIns="109728" rIns="109728" tIns="73152" bIns="73152"/>
           <a:lstStyle/>
           <a:p>
             <a:pPr algn="l">
@@ -22562,7 +23097,19 @@
             <a:r>
               <a:t>mkdir -p ~/ros2_curri/my_agv_ws/src/agv_interfaces</a:t>
             </a:r>
-            <a:br/>
+          </a:p>
+          <a:p>
+            <a:pPr algn="l">
+              <a:spcAft>
+                <a:spcPts val="0"/>
+              </a:spcAft>
+              <a:defRPr sz="1600" b="0">
+                <a:solidFill>
+                  <a:srgbClr val="FFFFFF"/>
+                </a:solidFill>
+                <a:latin typeface="DejaVu Sans Mono"/>
+              </a:defRPr>
+            </a:pPr>
             <a:r>
               <a:t>nano ~/ros2_curri/my_agv_ws/src/agv_interfaces/CMakeLists.txt</a:t>
             </a:r>
@@ -24795,7 +25342,7 @@
           </a:fontRef>
         </p:style>
         <p:txBody>
-          <a:bodyPr rtlCol="0" anchor="ctr" wrap="square" lIns="164592" rIns="164592" tIns="109728" bIns="36576"/>
+          <a:bodyPr rtlCol="0" anchor="ctr" wrap="square" lIns="164592" rIns="164592" tIns="109728" bIns="73152"/>
           <a:lstStyle/>
           <a:p>
             <a:pPr algn="l">
@@ -24812,31 +25359,115 @@
             <a:r>
               <a:t>cmake_minimum_required(VERSION 3.8)</a:t>
             </a:r>
-            <a:br/>
+          </a:p>
+          <a:p>
+            <a:pPr algn="l">
+              <a:spcAft>
+                <a:spcPts val="0"/>
+              </a:spcAft>
+              <a:defRPr sz="1400" b="0">
+                <a:solidFill>
+                  <a:srgbClr val="FFFFFF"/>
+                </a:solidFill>
+                <a:latin typeface="DejaVu Sans Mono"/>
+              </a:defRPr>
+            </a:pPr>
             <a:r>
               <a:t>project(agv_interfaces)</a:t>
             </a:r>
-            <a:br/>
+          </a:p>
+          <a:p>
+            <a:pPr algn="l">
+              <a:spcAft>
+                <a:spcPts val="0"/>
+              </a:spcAft>
+              <a:defRPr sz="1400" b="0">
+                <a:solidFill>
+                  <a:srgbClr val="FFFFFF"/>
+                </a:solidFill>
+                <a:latin typeface="DejaVu Sans Mono"/>
+              </a:defRPr>
+            </a:pPr>
             <a:r>
               <a:t>find_package(ament_cmake REQUIRED)</a:t>
             </a:r>
-            <a:br/>
+          </a:p>
+          <a:p>
+            <a:pPr algn="l">
+              <a:spcAft>
+                <a:spcPts val="0"/>
+              </a:spcAft>
+              <a:defRPr sz="1400" b="0">
+                <a:solidFill>
+                  <a:srgbClr val="FFFFFF"/>
+                </a:solidFill>
+                <a:latin typeface="DejaVu Sans Mono"/>
+              </a:defRPr>
+            </a:pPr>
             <a:r>
               <a:t>find_package(rosidl_default_generators REQUIRED)</a:t>
             </a:r>
-            <a:br/>
+          </a:p>
+          <a:p>
+            <a:pPr algn="l">
+              <a:spcAft>
+                <a:spcPts val="0"/>
+              </a:spcAft>
+              <a:defRPr sz="1400" b="0">
+                <a:solidFill>
+                  <a:srgbClr val="FFFFFF"/>
+                </a:solidFill>
+                <a:latin typeface="DejaVu Sans Mono"/>
+              </a:defRPr>
+            </a:pPr>
             <a:r>
               <a:t>find_package(std_msgs REQUIRED)</a:t>
             </a:r>
-            <a:br/>
+          </a:p>
+          <a:p>
+            <a:pPr algn="l">
+              <a:spcAft>
+                <a:spcPts val="0"/>
+              </a:spcAft>
+              <a:defRPr sz="1400" b="0">
+                <a:solidFill>
+                  <a:srgbClr val="FFFFFF"/>
+                </a:solidFill>
+                <a:latin typeface="DejaVu Sans Mono"/>
+              </a:defRPr>
+            </a:pPr>
             <a:r>
               <a:t>rosidl_generate_interfaces(${PROJECT_NAME} "msg/Detection.msg" "msg/DetectionArray.msg" DEPENDENCIES std_msgs)</a:t>
             </a:r>
-            <a:br/>
+          </a:p>
+          <a:p>
+            <a:pPr algn="l">
+              <a:spcAft>
+                <a:spcPts val="0"/>
+              </a:spcAft>
+              <a:defRPr sz="1400" b="0">
+                <a:solidFill>
+                  <a:srgbClr val="FFFFFF"/>
+                </a:solidFill>
+                <a:latin typeface="DejaVu Sans Mono"/>
+              </a:defRPr>
+            </a:pPr>
             <a:r>
               <a:t>ament_export_dependencies(rosidl_default_runtime)</a:t>
             </a:r>
-            <a:br/>
+          </a:p>
+          <a:p>
+            <a:pPr algn="l">
+              <a:spcAft>
+                <a:spcPts val="0"/>
+              </a:spcAft>
+              <a:defRPr sz="1400" b="0">
+                <a:solidFill>
+                  <a:srgbClr val="FFFFFF"/>
+                </a:solidFill>
+                <a:latin typeface="DejaVu Sans Mono"/>
+              </a:defRPr>
+            </a:pPr>
             <a:r>
               <a:t>ament_package()</a:t>
             </a:r>
@@ -25308,7 +25939,7 @@
           </a:fontRef>
         </p:style>
         <p:txBody>
-          <a:bodyPr rtlCol="0" anchor="ctr" wrap="square" lIns="73152" rIns="73152" tIns="36576" bIns="36576"/>
+          <a:bodyPr rtlCol="0" anchor="ctr" wrap="square" lIns="109728" rIns="109728" tIns="73152" bIns="73152"/>
           <a:lstStyle/>
           <a:p>
             <a:pPr algn="l">
@@ -25325,7 +25956,19 @@
             <a:r>
               <a:t>mkdir -p ~/ros2_curri/my_agv_ws/src/agv_bringup</a:t>
             </a:r>
-            <a:br/>
+          </a:p>
+          <a:p>
+            <a:pPr algn="l">
+              <a:spcAft>
+                <a:spcPts val="0"/>
+              </a:spcAft>
+              <a:defRPr sz="1600" b="0">
+                <a:solidFill>
+                  <a:srgbClr val="FFFFFF"/>
+                </a:solidFill>
+                <a:latin typeface="DejaVu Sans Mono"/>
+              </a:defRPr>
+            </a:pPr>
             <a:r>
               <a:t>nano ~/ros2_curri/my_agv_ws/src/agv_bringup/package.xml</a:t>
             </a:r>
@@ -27139,7 +27782,7 @@
           </a:fontRef>
         </p:style>
         <p:txBody>
-          <a:bodyPr rtlCol="0" anchor="ctr" wrap="square" lIns="164592" rIns="164592" tIns="109728" bIns="36576"/>
+          <a:bodyPr rtlCol="0" anchor="ctr" wrap="square" lIns="164592" rIns="164592" tIns="109728" bIns="73152"/>
           <a:lstStyle/>
           <a:p>
             <a:pPr algn="l">
@@ -27156,47 +27799,179 @@
             <a:r>
               <a:t>&lt;?xml version="1.0" ?&gt;</a:t>
             </a:r>
-            <a:br/>
+          </a:p>
+          <a:p>
+            <a:pPr algn="l">
+              <a:spcAft>
+                <a:spcPts val="0"/>
+              </a:spcAft>
+              <a:defRPr sz="1400" b="0">
+                <a:solidFill>
+                  <a:srgbClr val="FFFFFF"/>
+                </a:solidFill>
+                <a:latin typeface="DejaVu Sans Mono"/>
+              </a:defRPr>
+            </a:pPr>
             <a:r>
               <a:t>&lt;package format="3"&gt;</a:t>
             </a:r>
-            <a:br/>
+          </a:p>
+          <a:p>
+            <a:pPr algn="l">
+              <a:spcAft>
+                <a:spcPts val="0"/>
+              </a:spcAft>
+              <a:defRPr sz="1400" b="0">
+                <a:solidFill>
+                  <a:srgbClr val="FFFFFF"/>
+                </a:solidFill>
+                <a:latin typeface="DejaVu Sans Mono"/>
+              </a:defRPr>
+            </a:pPr>
             <a:r>
               <a:t>  &lt;name&gt;agv_bringup&lt;/name&gt;</a:t>
             </a:r>
-            <a:br/>
+          </a:p>
+          <a:p>
+            <a:pPr algn="l">
+              <a:spcAft>
+                <a:spcPts val="0"/>
+              </a:spcAft>
+              <a:defRPr sz="1400" b="0">
+                <a:solidFill>
+                  <a:srgbClr val="FFFFFF"/>
+                </a:solidFill>
+                <a:latin typeface="DejaVu Sans Mono"/>
+              </a:defRPr>
+            </a:pPr>
             <a:r>
               <a:t>  &lt;version&gt;0.1.0&lt;/version&gt;</a:t>
             </a:r>
-            <a:br/>
+          </a:p>
+          <a:p>
+            <a:pPr algn="l">
+              <a:spcAft>
+                <a:spcPts val="0"/>
+              </a:spcAft>
+              <a:defRPr sz="1400" b="0">
+                <a:solidFill>
+                  <a:srgbClr val="FFFFFF"/>
+                </a:solidFill>
+                <a:latin typeface="DejaVu Sans Mono"/>
+              </a:defRPr>
+            </a:pPr>
             <a:r>
               <a:t>  </a:t>
             </a:r>
-            <a:br/>
+          </a:p>
+          <a:p>
+            <a:pPr algn="l">
+              <a:spcAft>
+                <a:spcPts val="0"/>
+              </a:spcAft>
+              <a:defRPr sz="1400" b="0">
+                <a:solidFill>
+                  <a:srgbClr val="FFFFFF"/>
+                </a:solidFill>
+                <a:latin typeface="DejaVu Sans Mono"/>
+              </a:defRPr>
+            </a:pPr>
             <a:r>
               <a:t>  </a:t>
             </a:r>
-            <a:br/>
+          </a:p>
+          <a:p>
+            <a:pPr algn="l">
+              <a:spcAft>
+                <a:spcPts val="0"/>
+              </a:spcAft>
+              <a:defRPr sz="1400" b="0">
+                <a:solidFill>
+                  <a:srgbClr val="FFFFFF"/>
+                </a:solidFill>
+                <a:latin typeface="DejaVu Sans Mono"/>
+              </a:defRPr>
+            </a:pPr>
             <a:r>
               <a:t>  &lt;description&gt;One-command launch and parameter files for the educational</a:t>
             </a:r>
-            <a:br/>
+          </a:p>
+          <a:p>
+            <a:pPr algn="l">
+              <a:spcAft>
+                <a:spcPts val="0"/>
+              </a:spcAft>
+              <a:defRPr sz="1400" b="0">
+                <a:solidFill>
+                  <a:srgbClr val="FFFFFF"/>
+                </a:solidFill>
+                <a:latin typeface="DejaVu Sans Mono"/>
+              </a:defRPr>
+            </a:pPr>
             <a:r>
               <a:t>    AGV.&lt;/description&gt;</a:t>
             </a:r>
-            <a:br/>
+          </a:p>
+          <a:p>
+            <a:pPr algn="l">
+              <a:spcAft>
+                <a:spcPts val="0"/>
+              </a:spcAft>
+              <a:defRPr sz="1400" b="0">
+                <a:solidFill>
+                  <a:srgbClr val="FFFFFF"/>
+                </a:solidFill>
+                <a:latin typeface="DejaVu Sans Mono"/>
+              </a:defRPr>
+            </a:pPr>
             <a:r>
               <a:t>  &lt;maintainer email="student@example.com"&gt;AGV student&lt;/maintainer&gt;</a:t>
             </a:r>
-            <a:br/>
+          </a:p>
+          <a:p>
+            <a:pPr algn="l">
+              <a:spcAft>
+                <a:spcPts val="0"/>
+              </a:spcAft>
+              <a:defRPr sz="1400" b="0">
+                <a:solidFill>
+                  <a:srgbClr val="FFFFFF"/>
+                </a:solidFill>
+                <a:latin typeface="DejaVu Sans Mono"/>
+              </a:defRPr>
+            </a:pPr>
             <a:r>
               <a:t>  &lt;license&gt;Apache-2.0&lt;/license&gt;</a:t>
             </a:r>
-            <a:br/>
+          </a:p>
+          <a:p>
+            <a:pPr algn="l">
+              <a:spcAft>
+                <a:spcPts val="0"/>
+              </a:spcAft>
+              <a:defRPr sz="1400" b="0">
+                <a:solidFill>
+                  <a:srgbClr val="FFFFFF"/>
+                </a:solidFill>
+                <a:latin typeface="DejaVu Sans Mono"/>
+              </a:defRPr>
+            </a:pPr>
             <a:r>
               <a:t>  </a:t>
             </a:r>
-            <a:br/>
+          </a:p>
+          <a:p>
+            <a:pPr algn="l">
+              <a:spcAft>
+                <a:spcPts val="0"/>
+              </a:spcAft>
+              <a:defRPr sz="1400" b="0">
+                <a:solidFill>
+                  <a:srgbClr val="FFFFFF"/>
+                </a:solidFill>
+                <a:latin typeface="DejaVu Sans Mono"/>
+              </a:defRPr>
+            </a:pPr>
             <a:r>
               <a:t>  </a:t>
             </a:r>
@@ -27613,7 +28388,7 @@
           </a:fontRef>
         </p:style>
         <p:txBody>
-          <a:bodyPr rtlCol="0" anchor="ctr" wrap="square" lIns="164592" rIns="164592" tIns="109728" bIns="36576"/>
+          <a:bodyPr rtlCol="0" anchor="ctr" wrap="square" lIns="164592" rIns="164592" tIns="109728" bIns="73152"/>
           <a:lstStyle/>
           <a:p>
             <a:pPr algn="l">
@@ -27630,47 +28405,179 @@
             <a:r>
               <a:t>  &lt;buildtool_depend&gt;ament_python&lt;/buildtool_depend&gt;</a:t>
             </a:r>
-            <a:br/>
+          </a:p>
+          <a:p>
+            <a:pPr algn="l">
+              <a:spcAft>
+                <a:spcPts val="0"/>
+              </a:spcAft>
+              <a:defRPr sz="1400" b="0">
+                <a:solidFill>
+                  <a:srgbClr val="FFFFFF"/>
+                </a:solidFill>
+                <a:latin typeface="DejaVu Sans Mono"/>
+              </a:defRPr>
+            </a:pPr>
             <a:r>
               <a:t>  &lt;exec_depend&gt;launch&lt;/exec_depend&gt;</a:t>
             </a:r>
-            <a:br/>
+          </a:p>
+          <a:p>
+            <a:pPr algn="l">
+              <a:spcAft>
+                <a:spcPts val="0"/>
+              </a:spcAft>
+              <a:defRPr sz="1400" b="0">
+                <a:solidFill>
+                  <a:srgbClr val="FFFFFF"/>
+                </a:solidFill>
+                <a:latin typeface="DejaVu Sans Mono"/>
+              </a:defRPr>
+            </a:pPr>
             <a:r>
               <a:t>  &lt;exec_depend&gt;launch_ros&lt;/exec_depend&gt;</a:t>
             </a:r>
-            <a:br/>
+          </a:p>
+          <a:p>
+            <a:pPr algn="l">
+              <a:spcAft>
+                <a:spcPts val="0"/>
+              </a:spcAft>
+              <a:defRPr sz="1400" b="0">
+                <a:solidFill>
+                  <a:srgbClr val="FFFFFF"/>
+                </a:solidFill>
+                <a:latin typeface="DejaVu Sans Mono"/>
+              </a:defRPr>
+            </a:pPr>
             <a:r>
               <a:t>  &lt;exec_depend&gt;agv_description&lt;/exec_depend&gt;</a:t>
             </a:r>
-            <a:br/>
+          </a:p>
+          <a:p>
+            <a:pPr algn="l">
+              <a:spcAft>
+                <a:spcPts val="0"/>
+              </a:spcAft>
+              <a:defRPr sz="1400" b="0">
+                <a:solidFill>
+                  <a:srgbClr val="FFFFFF"/>
+                </a:solidFill>
+                <a:latin typeface="DejaVu Sans Mono"/>
+              </a:defRPr>
+            </a:pPr>
             <a:r>
               <a:t>  &lt;exec_depend&gt;agv_gazebo&lt;/exec_depend&gt;</a:t>
             </a:r>
-            <a:br/>
+          </a:p>
+          <a:p>
+            <a:pPr algn="l">
+              <a:spcAft>
+                <a:spcPts val="0"/>
+              </a:spcAft>
+              <a:defRPr sz="1400" b="0">
+                <a:solidFill>
+                  <a:srgbClr val="FFFFFF"/>
+                </a:solidFill>
+                <a:latin typeface="DejaVu Sans Mono"/>
+              </a:defRPr>
+            </a:pPr>
             <a:r>
               <a:t>  &lt;exec_depend&gt;agv_control&lt;/exec_depend&gt;</a:t>
             </a:r>
-            <a:br/>
+          </a:p>
+          <a:p>
+            <a:pPr algn="l">
+              <a:spcAft>
+                <a:spcPts val="0"/>
+              </a:spcAft>
+              <a:defRPr sz="1400" b="0">
+                <a:solidFill>
+                  <a:srgbClr val="FFFFFF"/>
+                </a:solidFill>
+                <a:latin typeface="DejaVu Sans Mono"/>
+              </a:defRPr>
+            </a:pPr>
             <a:r>
               <a:t>  &lt;exec_depend&gt;agv_sensors&lt;/exec_depend&gt;</a:t>
             </a:r>
-            <a:br/>
+          </a:p>
+          <a:p>
+            <a:pPr algn="l">
+              <a:spcAft>
+                <a:spcPts val="0"/>
+              </a:spcAft>
+              <a:defRPr sz="1400" b="0">
+                <a:solidFill>
+                  <a:srgbClr val="FFFFFF"/>
+                </a:solidFill>
+                <a:latin typeface="DejaVu Sans Mono"/>
+              </a:defRPr>
+            </a:pPr>
             <a:r>
               <a:t>  &lt;exec_depend&gt;agv_vision&lt;/exec_depend&gt;</a:t>
             </a:r>
-            <a:br/>
+          </a:p>
+          <a:p>
+            <a:pPr algn="l">
+              <a:spcAft>
+                <a:spcPts val="0"/>
+              </a:spcAft>
+              <a:defRPr sz="1400" b="0">
+                <a:solidFill>
+                  <a:srgbClr val="FFFFFF"/>
+                </a:solidFill>
+                <a:latin typeface="DejaVu Sans Mono"/>
+              </a:defRPr>
+            </a:pPr>
             <a:r>
               <a:t>  &lt;exec_depend&gt;agv_mission&lt;/exec_depend&gt;</a:t>
             </a:r>
-            <a:br/>
+          </a:p>
+          <a:p>
+            <a:pPr algn="l">
+              <a:spcAft>
+                <a:spcPts val="0"/>
+              </a:spcAft>
+              <a:defRPr sz="1400" b="0">
+                <a:solidFill>
+                  <a:srgbClr val="FFFFFF"/>
+                </a:solidFill>
+                <a:latin typeface="DejaVu Sans Mono"/>
+              </a:defRPr>
+            </a:pPr>
             <a:r>
               <a:t>  &lt;exec_depend&gt;robot_state_publisher&lt;/exec_depend&gt;</a:t>
             </a:r>
-            <a:br/>
+          </a:p>
+          <a:p>
+            <a:pPr algn="l">
+              <a:spcAft>
+                <a:spcPts val="0"/>
+              </a:spcAft>
+              <a:defRPr sz="1400" b="0">
+                <a:solidFill>
+                  <a:srgbClr val="FFFFFF"/>
+                </a:solidFill>
+                <a:latin typeface="DejaVu Sans Mono"/>
+              </a:defRPr>
+            </a:pPr>
             <a:r>
               <a:t>  &lt;exec_depend&gt;rviz2&lt;/exec_depend&gt;</a:t>
             </a:r>
-            <a:br/>
+          </a:p>
+          <a:p>
+            <a:pPr algn="l">
+              <a:spcAft>
+                <a:spcPts val="0"/>
+              </a:spcAft>
+              <a:defRPr sz="1400" b="0">
+                <a:solidFill>
+                  <a:srgbClr val="FFFFFF"/>
+                </a:solidFill>
+                <a:latin typeface="DejaVu Sans Mono"/>
+              </a:defRPr>
+            </a:pPr>
             <a:r>
               <a:t>  </a:t>
             </a:r>
@@ -28087,7 +28994,7 @@
           </a:fontRef>
         </p:style>
         <p:txBody>
-          <a:bodyPr rtlCol="0" anchor="ctr" wrap="square" lIns="164592" rIns="164592" tIns="109728" bIns="36576"/>
+          <a:bodyPr rtlCol="0" anchor="ctr" wrap="square" lIns="164592" rIns="164592" tIns="109728" bIns="73152"/>
           <a:lstStyle/>
           <a:p>
             <a:pPr algn="l">
@@ -28104,24 +29011,96 @@
             <a:r>
               <a:t>  </a:t>
             </a:r>
-            <a:br/>
+          </a:p>
+          <a:p>
+            <a:pPr algn="l">
+              <a:spcAft>
+                <a:spcPts val="0"/>
+              </a:spcAft>
+              <a:defRPr sz="1400" b="0">
+                <a:solidFill>
+                  <a:srgbClr val="FFFFFF"/>
+                </a:solidFill>
+                <a:latin typeface="DejaVu Sans Mono"/>
+              </a:defRPr>
+            </a:pPr>
             <a:r>
               <a:t>  &lt;export&gt;</a:t>
             </a:r>
-            <a:br/>
+          </a:p>
+          <a:p>
+            <a:pPr algn="l">
+              <a:spcAft>
+                <a:spcPts val="0"/>
+              </a:spcAft>
+              <a:defRPr sz="1400" b="0">
+                <a:solidFill>
+                  <a:srgbClr val="FFFFFF"/>
+                </a:solidFill>
+                <a:latin typeface="DejaVu Sans Mono"/>
+              </a:defRPr>
+            </a:pPr>
             <a:r>
               <a:t>    &lt;build_type&gt;ament_python&lt;/build_type&gt;</a:t>
             </a:r>
-            <a:br/>
+          </a:p>
+          <a:p>
+            <a:pPr algn="l">
+              <a:spcAft>
+                <a:spcPts val="0"/>
+              </a:spcAft>
+              <a:defRPr sz="1400" b="0">
+                <a:solidFill>
+                  <a:srgbClr val="FFFFFF"/>
+                </a:solidFill>
+                <a:latin typeface="DejaVu Sans Mono"/>
+              </a:defRPr>
+            </a:pPr>
             <a:r>
               <a:t>  &lt;/export&gt;</a:t>
             </a:r>
-            <a:br/>
+          </a:p>
+          <a:p>
+            <a:pPr algn="l">
+              <a:spcAft>
+                <a:spcPts val="0"/>
+              </a:spcAft>
+              <a:defRPr sz="1400" b="0">
+                <a:solidFill>
+                  <a:srgbClr val="FFFFFF"/>
+                </a:solidFill>
+                <a:latin typeface="DejaVu Sans Mono"/>
+              </a:defRPr>
+            </a:pPr>
             <a:r>
               <a:t>  </a:t>
             </a:r>
-            <a:br/>
-            <a:br/>
+          </a:p>
+          <a:p>
+            <a:pPr algn="l">
+              <a:spcAft>
+                <a:spcPts val="0"/>
+              </a:spcAft>
+              <a:defRPr sz="1400" b="0">
+                <a:solidFill>
+                  <a:srgbClr val="FFFFFF"/>
+                </a:solidFill>
+                <a:latin typeface="DejaVu Sans Mono"/>
+              </a:defRPr>
+            </a:pPr>
+          </a:p>
+          <a:p>
+            <a:pPr algn="l">
+              <a:spcAft>
+                <a:spcPts val="0"/>
+              </a:spcAft>
+              <a:defRPr sz="1400" b="0">
+                <a:solidFill>
+                  <a:srgbClr val="FFFFFF"/>
+                </a:solidFill>
+                <a:latin typeface="DejaVu Sans Mono"/>
+              </a:defRPr>
+            </a:pPr>
             <a:r>
               <a:t>&lt;/package&gt;</a:t>
             </a:r>
@@ -28593,7 +29572,7 @@
           </a:fontRef>
         </p:style>
         <p:txBody>
-          <a:bodyPr rtlCol="0" anchor="ctr" wrap="square" lIns="73152" rIns="73152" tIns="36576" bIns="36576"/>
+          <a:bodyPr rtlCol="0" anchor="ctr" wrap="square" lIns="109728" rIns="109728" tIns="73152" bIns="73152"/>
           <a:lstStyle/>
           <a:p>
             <a:pPr algn="l">
@@ -28610,7 +29589,19 @@
             <a:r>
               <a:t>mkdir -p ~/ros2_curri/my_agv_ws/src/agv_bringup</a:t>
             </a:r>
-            <a:br/>
+          </a:p>
+          <a:p>
+            <a:pPr algn="l">
+              <a:spcAft>
+                <a:spcPts val="0"/>
+              </a:spcAft>
+              <a:defRPr sz="1600" b="0">
+                <a:solidFill>
+                  <a:srgbClr val="FFFFFF"/>
+                </a:solidFill>
+                <a:latin typeface="DejaVu Sans Mono"/>
+              </a:defRPr>
+            </a:pPr>
             <a:r>
               <a:t>nano ~/ros2_curri/my_agv_ws/src/agv_bringup/setup.py</a:t>
             </a:r>
@@ -30761,7 +31752,7 @@
           </a:fontRef>
         </p:style>
         <p:txBody>
-          <a:bodyPr rtlCol="0" anchor="ctr" wrap="square" lIns="164592" rIns="164592" tIns="109728" bIns="36576"/>
+          <a:bodyPr rtlCol="0" anchor="ctr" wrap="square" lIns="164592" rIns="164592" tIns="109728" bIns="73152"/>
           <a:lstStyle/>
           <a:p>
             <a:pPr algn="l">
@@ -30778,39 +31769,147 @@
             <a:r>
               <a:t>from glob import glob</a:t>
             </a:r>
-            <a:br/>
+          </a:p>
+          <a:p>
+            <a:pPr algn="l">
+              <a:spcAft>
+                <a:spcPts val="0"/>
+              </a:spcAft>
+              <a:defRPr sz="1400" b="0">
+                <a:solidFill>
+                  <a:srgbClr val="FFFFFF"/>
+                </a:solidFill>
+                <a:latin typeface="DejaVu Sans Mono"/>
+              </a:defRPr>
+            </a:pPr>
             <a:r>
               <a:t>from setuptools import find_packages, setup</a:t>
             </a:r>
-            <a:br/>
+          </a:p>
+          <a:p>
+            <a:pPr algn="l">
+              <a:spcAft>
+                <a:spcPts val="0"/>
+              </a:spcAft>
+              <a:defRPr sz="1400" b="0">
+                <a:solidFill>
+                  <a:srgbClr val="FFFFFF"/>
+                </a:solidFill>
+                <a:latin typeface="DejaVu Sans Mono"/>
+              </a:defRPr>
+            </a:pPr>
             <a:r>
               <a:t>package_name = 'agv_bringup'</a:t>
             </a:r>
-            <a:br/>
+          </a:p>
+          <a:p>
+            <a:pPr algn="l">
+              <a:spcAft>
+                <a:spcPts val="0"/>
+              </a:spcAft>
+              <a:defRPr sz="1400" b="0">
+                <a:solidFill>
+                  <a:srgbClr val="FFFFFF"/>
+                </a:solidFill>
+                <a:latin typeface="DejaVu Sans Mono"/>
+              </a:defRPr>
+            </a:pPr>
             <a:r>
               <a:t>setup(name=package_name, version='0.1.0', packages=find_packages(exclude=['test']),</a:t>
             </a:r>
-            <a:br/>
+          </a:p>
+          <a:p>
+            <a:pPr algn="l">
+              <a:spcAft>
+                <a:spcPts val="0"/>
+              </a:spcAft>
+              <a:defRPr sz="1400" b="0">
+                <a:solidFill>
+                  <a:srgbClr val="FFFFFF"/>
+                </a:solidFill>
+                <a:latin typeface="DejaVu Sans Mono"/>
+              </a:defRPr>
+            </a:pPr>
             <a:r>
               <a:t>    data_files=[('share/ament_index/resource_index/packages',</a:t>
             </a:r>
-            <a:br/>
+          </a:p>
+          <a:p>
+            <a:pPr algn="l">
+              <a:spcAft>
+                <a:spcPts val="0"/>
+              </a:spcAft>
+              <a:defRPr sz="1400" b="0">
+                <a:solidFill>
+                  <a:srgbClr val="FFFFFF"/>
+                </a:solidFill>
+                <a:latin typeface="DejaVu Sans Mono"/>
+              </a:defRPr>
+            </a:pPr>
             <a:r>
               <a:t>    ['resource/' + package_name]), ('share/' + package_name, ['package.xml']),</a:t>
             </a:r>
-            <a:br/>
+          </a:p>
+          <a:p>
+            <a:pPr algn="l">
+              <a:spcAft>
+                <a:spcPts val="0"/>
+              </a:spcAft>
+              <a:defRPr sz="1400" b="0">
+                <a:solidFill>
+                  <a:srgbClr val="FFFFFF"/>
+                </a:solidFill>
+                <a:latin typeface="DejaVu Sans Mono"/>
+              </a:defRPr>
+            </a:pPr>
             <a:r>
               <a:t>    ('share/' + package_name + '/launch', glob('launch/*.launch.py')),</a:t>
             </a:r>
-            <a:br/>
+          </a:p>
+          <a:p>
+            <a:pPr algn="l">
+              <a:spcAft>
+                <a:spcPts val="0"/>
+              </a:spcAft>
+              <a:defRPr sz="1400" b="0">
+                <a:solidFill>
+                  <a:srgbClr val="FFFFFF"/>
+                </a:solidFill>
+                <a:latin typeface="DejaVu Sans Mono"/>
+              </a:defRPr>
+            </a:pPr>
             <a:r>
               <a:t>    ('share/' + package_name + '/config', glob('config/*.yaml'))],</a:t>
             </a:r>
-            <a:br/>
+          </a:p>
+          <a:p>
+            <a:pPr algn="l">
+              <a:spcAft>
+                <a:spcPts val="0"/>
+              </a:spcAft>
+              <a:defRPr sz="1400" b="0">
+                <a:solidFill>
+                  <a:srgbClr val="FFFFFF"/>
+                </a:solidFill>
+                <a:latin typeface="DejaVu Sans Mono"/>
+              </a:defRPr>
+            </a:pPr>
             <a:r>
               <a:t>    install_requires=['setuptools'], zip_safe=True, maintainer='AGV student',</a:t>
             </a:r>
-            <a:br/>
+          </a:p>
+          <a:p>
+            <a:pPr algn="l">
+              <a:spcAft>
+                <a:spcPts val="0"/>
+              </a:spcAft>
+              <a:defRPr sz="1400" b="0">
+                <a:solidFill>
+                  <a:srgbClr val="FFFFFF"/>
+                </a:solidFill>
+                <a:latin typeface="DejaVu Sans Mono"/>
+              </a:defRPr>
+            </a:pPr>
             <a:r>
               <a:t>    maintainer_email='student@example.com', license='Apache-2.0')</a:t>
             </a:r>
@@ -31282,7 +32381,7 @@
           </a:fontRef>
         </p:style>
         <p:txBody>
-          <a:bodyPr rtlCol="0" anchor="ctr" wrap="square" lIns="73152" rIns="73152" tIns="36576" bIns="36576"/>
+          <a:bodyPr rtlCol="0" anchor="ctr" wrap="square" lIns="109728" rIns="109728" tIns="73152" bIns="73152"/>
           <a:lstStyle/>
           <a:p>
             <a:pPr algn="l">
@@ -31299,7 +32398,19 @@
             <a:r>
               <a:t>mkdir -p ~/ros2_curri/my_agv_ws/src/agv_vision/agv_vision</a:t>
             </a:r>
-            <a:br/>
+          </a:p>
+          <a:p>
+            <a:pPr algn="l">
+              <a:spcAft>
+                <a:spcPts val="0"/>
+              </a:spcAft>
+              <a:defRPr sz="1600" b="0">
+                <a:solidFill>
+                  <a:srgbClr val="FFFFFF"/>
+                </a:solidFill>
+                <a:latin typeface="DejaVu Sans Mono"/>
+              </a:defRPr>
+            </a:pPr>
             <a:r>
               <a:t>nano ~/ros2_curri/my_agv_ws/src/agv_vision/agv_vision/yolo_node.py</a:t>
             </a:r>
@@ -35492,7 +36603,7 @@
           </a:fontRef>
         </p:style>
         <p:txBody>
-          <a:bodyPr rtlCol="0" anchor="ctr" wrap="square" lIns="164592" rIns="164592" tIns="109728" bIns="36576"/>
+          <a:bodyPr rtlCol="0" anchor="ctr" wrap="square" lIns="164592" rIns="164592" tIns="109728" bIns="73152"/>
           <a:lstStyle/>
           <a:p>
             <a:pPr algn="l">
@@ -35509,41 +36620,173 @@
             <a:r>
               <a:t>import rclpy</a:t>
             </a:r>
-            <a:br/>
+          </a:p>
+          <a:p>
+            <a:pPr algn="l">
+              <a:spcAft>
+                <a:spcPts val="0"/>
+              </a:spcAft>
+              <a:defRPr sz="1400" b="0">
+                <a:solidFill>
+                  <a:srgbClr val="FFFFFF"/>
+                </a:solidFill>
+                <a:latin typeface="DejaVu Sans Mono"/>
+              </a:defRPr>
+            </a:pPr>
             <a:r>
               <a:t>from rclpy.node import Node</a:t>
             </a:r>
-            <a:br/>
+          </a:p>
+          <a:p>
+            <a:pPr algn="l">
+              <a:spcAft>
+                <a:spcPts val="0"/>
+              </a:spcAft>
+              <a:defRPr sz="1400" b="0">
+                <a:solidFill>
+                  <a:srgbClr val="FFFFFF"/>
+                </a:solidFill>
+                <a:latin typeface="DejaVu Sans Mono"/>
+              </a:defRPr>
+            </a:pPr>
             <a:r>
               <a:t>from rclpy.qos import qos_profile_sensor_data</a:t>
             </a:r>
-            <a:br/>
+          </a:p>
+          <a:p>
+            <a:pPr algn="l">
+              <a:spcAft>
+                <a:spcPts val="0"/>
+              </a:spcAft>
+              <a:defRPr sz="1400" b="0">
+                <a:solidFill>
+                  <a:srgbClr val="FFFFFF"/>
+                </a:solidFill>
+                <a:latin typeface="DejaVu Sans Mono"/>
+              </a:defRPr>
+            </a:pPr>
             <a:r>
               <a:t>from sensor_msgs.msg import Image</a:t>
             </a:r>
-            <a:br/>
+          </a:p>
+          <a:p>
+            <a:pPr algn="l">
+              <a:spcAft>
+                <a:spcPts val="0"/>
+              </a:spcAft>
+              <a:defRPr sz="1400" b="0">
+                <a:solidFill>
+                  <a:srgbClr val="FFFFFF"/>
+                </a:solidFill>
+                <a:latin typeface="DejaVu Sans Mono"/>
+              </a:defRPr>
+            </a:pPr>
             <a:r>
               <a:t>from cv_bridge import CvBridge</a:t>
             </a:r>
-            <a:br/>
+          </a:p>
+          <a:p>
+            <a:pPr algn="l">
+              <a:spcAft>
+                <a:spcPts val="0"/>
+              </a:spcAft>
+              <a:defRPr sz="1400" b="0">
+                <a:solidFill>
+                  <a:srgbClr val="FFFFFF"/>
+                </a:solidFill>
+                <a:latin typeface="DejaVu Sans Mono"/>
+              </a:defRPr>
+            </a:pPr>
             <a:r>
               <a:t>from agv_interfaces.msg import Detection, DetectionArray</a:t>
             </a:r>
-            <a:br/>
+          </a:p>
+          <a:p>
+            <a:pPr algn="l">
+              <a:spcAft>
+                <a:spcPts val="0"/>
+              </a:spcAft>
+              <a:defRPr sz="1400" b="0">
+                <a:solidFill>
+                  <a:srgbClr val="FFFFFF"/>
+                </a:solidFill>
+                <a:latin typeface="DejaVu Sans Mono"/>
+              </a:defRPr>
+            </a:pPr>
             <a:r>
               <a:t>import cv2</a:t>
             </a:r>
-            <a:br/>
-            <a:br/>
+          </a:p>
+          <a:p>
+            <a:pPr algn="l">
+              <a:spcAft>
+                <a:spcPts val="0"/>
+              </a:spcAft>
+              <a:defRPr sz="1400" b="0">
+                <a:solidFill>
+                  <a:srgbClr val="FFFFFF"/>
+                </a:solidFill>
+                <a:latin typeface="DejaVu Sans Mono"/>
+              </a:defRPr>
+            </a:pPr>
+          </a:p>
+          <a:p>
+            <a:pPr algn="l">
+              <a:spcAft>
+                <a:spcPts val="0"/>
+              </a:spcAft>
+              <a:defRPr sz="1400" b="0">
+                <a:solidFill>
+                  <a:srgbClr val="FFFFFF"/>
+                </a:solidFill>
+                <a:latin typeface="DejaVu Sans Mono"/>
+              </a:defRPr>
+            </a:pPr>
             <a:r>
               <a:t>class YoloNode(Node):</a:t>
             </a:r>
-            <a:br/>
-            <a:br/>
+          </a:p>
+          <a:p>
+            <a:pPr algn="l">
+              <a:spcAft>
+                <a:spcPts val="0"/>
+              </a:spcAft>
+              <a:defRPr sz="1400" b="0">
+                <a:solidFill>
+                  <a:srgbClr val="FFFFFF"/>
+                </a:solidFill>
+                <a:latin typeface="DejaVu Sans Mono"/>
+              </a:defRPr>
+            </a:pPr>
+          </a:p>
+          <a:p>
+            <a:pPr algn="l">
+              <a:spcAft>
+                <a:spcPts val="0"/>
+              </a:spcAft>
+              <a:defRPr sz="1400" b="0">
+                <a:solidFill>
+                  <a:srgbClr val="FFFFFF"/>
+                </a:solidFill>
+                <a:latin typeface="DejaVu Sans Mono"/>
+              </a:defRPr>
+            </a:pPr>
             <a:r>
               <a:t>    def __init__(self):</a:t>
             </a:r>
-            <a:br/>
+          </a:p>
+          <a:p>
+            <a:pPr algn="l">
+              <a:spcAft>
+                <a:spcPts val="0"/>
+              </a:spcAft>
+              <a:defRPr sz="1400" b="0">
+                <a:solidFill>
+                  <a:srgbClr val="FFFFFF"/>
+                </a:solidFill>
+                <a:latin typeface="DejaVu Sans Mono"/>
+              </a:defRPr>
+            </a:pPr>
             <a:r>
               <a:t>        super().__init__('yolo_node')</a:t>
             </a:r>
@@ -35960,7 +37203,7 @@
           </a:fontRef>
         </p:style>
         <p:txBody>
-          <a:bodyPr rtlCol="0" anchor="ctr" wrap="square" lIns="164592" rIns="164592" tIns="109728" bIns="36576"/>
+          <a:bodyPr rtlCol="0" anchor="ctr" wrap="square" lIns="164592" rIns="164592" tIns="109728" bIns="73152"/>
           <a:lstStyle/>
           <a:p>
             <a:pPr algn="l">
@@ -35977,47 +37220,179 @@
             <a:r>
               <a:t>        self.declare_parameter('model_path', 'yolo11n.pt')</a:t>
             </a:r>
-            <a:br/>
+          </a:p>
+          <a:p>
+            <a:pPr algn="l">
+              <a:spcAft>
+                <a:spcPts val="0"/>
+              </a:spcAft>
+              <a:defRPr sz="1400" b="0">
+                <a:solidFill>
+                  <a:srgbClr val="FFFFFF"/>
+                </a:solidFill>
+                <a:latin typeface="DejaVu Sans Mono"/>
+              </a:defRPr>
+            </a:pPr>
             <a:r>
               <a:t>        self.declare_parameter('confidence_threshold', 0.5)</a:t>
             </a:r>
-            <a:br/>
+          </a:p>
+          <a:p>
+            <a:pPr algn="l">
+              <a:spcAft>
+                <a:spcPts val="0"/>
+              </a:spcAft>
+              <a:defRPr sz="1400" b="0">
+                <a:solidFill>
+                  <a:srgbClr val="FFFFFF"/>
+                </a:solidFill>
+                <a:latin typeface="DejaVu Sans Mono"/>
+              </a:defRPr>
+            </a:pPr>
             <a:r>
               <a:t>        self.declare_parameter('enable_yolo', False)</a:t>
             </a:r>
-            <a:br/>
+          </a:p>
+          <a:p>
+            <a:pPr algn="l">
+              <a:spcAft>
+                <a:spcPts val="0"/>
+              </a:spcAft>
+              <a:defRPr sz="1400" b="0">
+                <a:solidFill>
+                  <a:srgbClr val="FFFFFF"/>
+                </a:solidFill>
+                <a:latin typeface="DejaVu Sans Mono"/>
+              </a:defRPr>
+            </a:pPr>
             <a:r>
               <a:t>        self.declare_parameter('enable_red_target_fallback', True)</a:t>
             </a:r>
-            <a:br/>
+          </a:p>
+          <a:p>
+            <a:pPr algn="l">
+              <a:spcAft>
+                <a:spcPts val="0"/>
+              </a:spcAft>
+              <a:defRPr sz="1400" b="0">
+                <a:solidFill>
+                  <a:srgbClr val="FFFFFF"/>
+                </a:solidFill>
+                <a:latin typeface="DejaVu Sans Mono"/>
+              </a:defRPr>
+            </a:pPr>
             <a:r>
               <a:t>        self.declare_parameter('target_width_m', 0.25)</a:t>
             </a:r>
-            <a:br/>
+          </a:p>
+          <a:p>
+            <a:pPr algn="l">
+              <a:spcAft>
+                <a:spcPts val="0"/>
+              </a:spcAft>
+              <a:defRPr sz="1400" b="0">
+                <a:solidFill>
+                  <a:srgbClr val="FFFFFF"/>
+                </a:solidFill>
+                <a:latin typeface="DejaVu Sans Mono"/>
+              </a:defRPr>
+            </a:pPr>
             <a:r>
               <a:t>        self.bridge = CvBridge()</a:t>
             </a:r>
-            <a:br/>
+          </a:p>
+          <a:p>
+            <a:pPr algn="l">
+              <a:spcAft>
+                <a:spcPts val="0"/>
+              </a:spcAft>
+              <a:defRPr sz="1400" b="0">
+                <a:solidFill>
+                  <a:srgbClr val="FFFFFF"/>
+                </a:solidFill>
+                <a:latin typeface="DejaVu Sans Mono"/>
+              </a:defRPr>
+            </a:pPr>
             <a:r>
               <a:t>        self.publisher = self.create_publisher(DetectionArray, '/detections', 10)</a:t>
             </a:r>
-            <a:br/>
+          </a:p>
+          <a:p>
+            <a:pPr algn="l">
+              <a:spcAft>
+                <a:spcPts val="0"/>
+              </a:spcAft>
+              <a:defRPr sz="1400" b="0">
+                <a:solidFill>
+                  <a:srgbClr val="FFFFFF"/>
+                </a:solidFill>
+                <a:latin typeface="DejaVu Sans Mono"/>
+              </a:defRPr>
+            </a:pPr>
             <a:r>
               <a:t>        self.debug_publisher = self.create_publisher(Image, '/vision/debug_image',</a:t>
             </a:r>
-            <a:br/>
+          </a:p>
+          <a:p>
+            <a:pPr algn="l">
+              <a:spcAft>
+                <a:spcPts val="0"/>
+              </a:spcAft>
+              <a:defRPr sz="1400" b="0">
+                <a:solidFill>
+                  <a:srgbClr val="FFFFFF"/>
+                </a:solidFill>
+                <a:latin typeface="DejaVu Sans Mono"/>
+              </a:defRPr>
+            </a:pPr>
             <a:r>
               <a:t>            qos_profile_sensor_data)</a:t>
             </a:r>
-            <a:br/>
+          </a:p>
+          <a:p>
+            <a:pPr algn="l">
+              <a:spcAft>
+                <a:spcPts val="0"/>
+              </a:spcAft>
+              <a:defRPr sz="1400" b="0">
+                <a:solidFill>
+                  <a:srgbClr val="FFFFFF"/>
+                </a:solidFill>
+                <a:latin typeface="DejaVu Sans Mono"/>
+              </a:defRPr>
+            </a:pPr>
             <a:r>
               <a:t>        self.create_subscription(Image, '/camera/image_raw', self.callback,</a:t>
             </a:r>
-            <a:br/>
+          </a:p>
+          <a:p>
+            <a:pPr algn="l">
+              <a:spcAft>
+                <a:spcPts val="0"/>
+              </a:spcAft>
+              <a:defRPr sz="1400" b="0">
+                <a:solidFill>
+                  <a:srgbClr val="FFFFFF"/>
+                </a:solidFill>
+                <a:latin typeface="DejaVu Sans Mono"/>
+              </a:defRPr>
+            </a:pPr>
             <a:r>
               <a:t>            qos_profile_sensor_data)</a:t>
             </a:r>
-            <a:br/>
+          </a:p>
+          <a:p>
+            <a:pPr algn="l">
+              <a:spcAft>
+                <a:spcPts val="0"/>
+              </a:spcAft>
+              <a:defRPr sz="1400" b="0">
+                <a:solidFill>
+                  <a:srgbClr val="FFFFFF"/>
+                </a:solidFill>
+                <a:latin typeface="DejaVu Sans Mono"/>
+              </a:defRPr>
+            </a:pPr>
             <a:r>
               <a:t>        self.model = None</a:t>
             </a:r>
@@ -37074,7 +38449,7 @@
           </a:fontRef>
         </p:style>
         <p:txBody>
-          <a:bodyPr rtlCol="0" anchor="ctr" wrap="square" lIns="164592" rIns="164592" tIns="109728" bIns="36576"/>
+          <a:bodyPr rtlCol="0" anchor="ctr" wrap="square" lIns="164592" rIns="164592" tIns="109728" bIns="73152"/>
           <a:lstStyle/>
           <a:p>
             <a:pPr algn="l">
@@ -37091,44 +38466,176 @@
             <a:r>
               <a:t>        if self.get_parameter('enable_yolo').value:</a:t>
             </a:r>
-            <a:br/>
+          </a:p>
+          <a:p>
+            <a:pPr algn="l">
+              <a:spcAft>
+                <a:spcPts val="0"/>
+              </a:spcAft>
+              <a:defRPr sz="1400" b="0">
+                <a:solidFill>
+                  <a:srgbClr val="FFFFFF"/>
+                </a:solidFill>
+                <a:latin typeface="DejaVu Sans Mono"/>
+              </a:defRPr>
+            </a:pPr>
             <a:r>
               <a:t>            try:</a:t>
             </a:r>
-            <a:br/>
+          </a:p>
+          <a:p>
+            <a:pPr algn="l">
+              <a:spcAft>
+                <a:spcPts val="0"/>
+              </a:spcAft>
+              <a:defRPr sz="1400" b="0">
+                <a:solidFill>
+                  <a:srgbClr val="FFFFFF"/>
+                </a:solidFill>
+                <a:latin typeface="DejaVu Sans Mono"/>
+              </a:defRPr>
+            </a:pPr>
             <a:r>
               <a:t>                from ultralytics import YOLO</a:t>
             </a:r>
-            <a:br/>
+          </a:p>
+          <a:p>
+            <a:pPr algn="l">
+              <a:spcAft>
+                <a:spcPts val="0"/>
+              </a:spcAft>
+              <a:defRPr sz="1400" b="0">
+                <a:solidFill>
+                  <a:srgbClr val="FFFFFF"/>
+                </a:solidFill>
+                <a:latin typeface="DejaVu Sans Mono"/>
+              </a:defRPr>
+            </a:pPr>
             <a:r>
               <a:t>                self.model = YOLO(self.get_parameter('model_path').value)</a:t>
             </a:r>
-            <a:br/>
+          </a:p>
+          <a:p>
+            <a:pPr algn="l">
+              <a:spcAft>
+                <a:spcPts val="0"/>
+              </a:spcAft>
+              <a:defRPr sz="1400" b="0">
+                <a:solidFill>
+                  <a:srgbClr val="FFFFFF"/>
+                </a:solidFill>
+                <a:latin typeface="DejaVu Sans Mono"/>
+              </a:defRPr>
+            </a:pPr>
             <a:r>
               <a:t>                self.get_logger().info('YOLO model loaded')</a:t>
             </a:r>
-            <a:br/>
+          </a:p>
+          <a:p>
+            <a:pPr algn="l">
+              <a:spcAft>
+                <a:spcPts val="0"/>
+              </a:spcAft>
+              <a:defRPr sz="1400" b="0">
+                <a:solidFill>
+                  <a:srgbClr val="FFFFFF"/>
+                </a:solidFill>
+                <a:latin typeface="DejaVu Sans Mono"/>
+              </a:defRPr>
+            </a:pPr>
             <a:r>
               <a:t>            except ImportError:</a:t>
             </a:r>
-            <a:br/>
+          </a:p>
+          <a:p>
+            <a:pPr algn="l">
+              <a:spcAft>
+                <a:spcPts val="0"/>
+              </a:spcAft>
+              <a:defRPr sz="1400" b="0">
+                <a:solidFill>
+                  <a:srgbClr val="FFFFFF"/>
+                </a:solidFill>
+                <a:latin typeface="DejaVu Sans Mono"/>
+              </a:defRPr>
+            </a:pPr>
             <a:r>
               <a:t>                self.get_logger().error('ultralytics is not installed: follow M17 before enable_yolo:=true')</a:t>
             </a:r>
-            <a:br/>
-            <a:br/>
+          </a:p>
+          <a:p>
+            <a:pPr algn="l">
+              <a:spcAft>
+                <a:spcPts val="0"/>
+              </a:spcAft>
+              <a:defRPr sz="1400" b="0">
+                <a:solidFill>
+                  <a:srgbClr val="FFFFFF"/>
+                </a:solidFill>
+                <a:latin typeface="DejaVu Sans Mono"/>
+              </a:defRPr>
+            </a:pPr>
+          </a:p>
+          <a:p>
+            <a:pPr algn="l">
+              <a:spcAft>
+                <a:spcPts val="0"/>
+              </a:spcAft>
+              <a:defRPr sz="1400" b="0">
+                <a:solidFill>
+                  <a:srgbClr val="FFFFFF"/>
+                </a:solidFill>
+                <a:latin typeface="DejaVu Sans Mono"/>
+              </a:defRPr>
+            </a:pPr>
             <a:r>
               <a:t>    def make_detection(self, header, class_name, confidence, x1, y1, x2, y2, image_width):</a:t>
             </a:r>
-            <a:br/>
+          </a:p>
+          <a:p>
+            <a:pPr algn="l">
+              <a:spcAft>
+                <a:spcPts val="0"/>
+              </a:spcAft>
+              <a:defRPr sz="1400" b="0">
+                <a:solidFill>
+                  <a:srgbClr val="FFFFFF"/>
+                </a:solidFill>
+                <a:latin typeface="DejaVu Sans Mono"/>
+              </a:defRPr>
+            </a:pPr>
             <a:r>
               <a:t>        """Estimate distance with a pinhole model for the fixed 60-degree course camera."""</a:t>
             </a:r>
-            <a:br/>
+          </a:p>
+          <a:p>
+            <a:pPr algn="l">
+              <a:spcAft>
+                <a:spcPts val="0"/>
+              </a:spcAft>
+              <a:defRPr sz="1400" b="0">
+                <a:solidFill>
+                  <a:srgbClr val="FFFFFF"/>
+                </a:solidFill>
+                <a:latin typeface="DejaVu Sans Mono"/>
+              </a:defRPr>
+            </a:pPr>
             <a:r>
               <a:t>        width = max(1, x2 - x1)</a:t>
             </a:r>
-            <a:br/>
+          </a:p>
+          <a:p>
+            <a:pPr algn="l">
+              <a:spcAft>
+                <a:spcPts val="0"/>
+              </a:spcAft>
+              <a:defRPr sz="1400" b="0">
+                <a:solidFill>
+                  <a:srgbClr val="FFFFFF"/>
+                </a:solidFill>
+                <a:latin typeface="DejaVu Sans Mono"/>
+              </a:defRPr>
+            </a:pPr>
             <a:r>
               <a:t>        focal_px = image_width / (2.0 * 0.57735)</a:t>
             </a:r>
@@ -37545,7 +39052,7 @@
           </a:fontRef>
         </p:style>
         <p:txBody>
-          <a:bodyPr rtlCol="0" anchor="ctr" wrap="square" lIns="164592" rIns="164592" tIns="109728" bIns="36576"/>
+          <a:bodyPr rtlCol="0" anchor="ctr" wrap="square" lIns="164592" rIns="164592" tIns="109728" bIns="73152"/>
           <a:lstStyle/>
           <a:p>
             <a:pPr algn="l">
@@ -37562,41 +39069,173 @@
             <a:r>
               <a:t>        distance = float(self.get_parameter('target_width_m').value) * focal_px / width</a:t>
             </a:r>
-            <a:br/>
+          </a:p>
+          <a:p>
+            <a:pPr algn="l">
+              <a:spcAft>
+                <a:spcPts val="0"/>
+              </a:spcAft>
+              <a:defRPr sz="1400" b="0">
+                <a:solidFill>
+                  <a:srgbClr val="FFFFFF"/>
+                </a:solidFill>
+                <a:latin typeface="DejaVu Sans Mono"/>
+              </a:defRPr>
+            </a:pPr>
             <a:r>
               <a:t>        return Detection(header=header, class_name=class_name,</a:t>
             </a:r>
-            <a:br/>
+          </a:p>
+          <a:p>
+            <a:pPr algn="l">
+              <a:spcAft>
+                <a:spcPts val="0"/>
+              </a:spcAft>
+              <a:defRPr sz="1400" b="0">
+                <a:solidFill>
+                  <a:srgbClr val="FFFFFF"/>
+                </a:solidFill>
+                <a:latin typeface="DejaVu Sans Mono"/>
+              </a:defRPr>
+            </a:pPr>
             <a:r>
               <a:t>            confidence=float(confidence), center_x=(x1 + x2) // 2,</a:t>
             </a:r>
-            <a:br/>
+          </a:p>
+          <a:p>
+            <a:pPr algn="l">
+              <a:spcAft>
+                <a:spcPts val="0"/>
+              </a:spcAft>
+              <a:defRPr sz="1400" b="0">
+                <a:solidFill>
+                  <a:srgbClr val="FFFFFF"/>
+                </a:solidFill>
+                <a:latin typeface="DejaVu Sans Mono"/>
+              </a:defRPr>
+            </a:pPr>
             <a:r>
               <a:t>            center_y=(y1 + y2) // 2, width=width, height=max(1, y2 - y1),</a:t>
             </a:r>
-            <a:br/>
+          </a:p>
+          <a:p>
+            <a:pPr algn="l">
+              <a:spcAft>
+                <a:spcPts val="0"/>
+              </a:spcAft>
+              <a:defRPr sz="1400" b="0">
+                <a:solidFill>
+                  <a:srgbClr val="FFFFFF"/>
+                </a:solidFill>
+                <a:latin typeface="DejaVu Sans Mono"/>
+              </a:defRPr>
+            </a:pPr>
             <a:r>
               <a:t>            estimated_distance=distance)</a:t>
             </a:r>
-            <a:br/>
-            <a:br/>
+          </a:p>
+          <a:p>
+            <a:pPr algn="l">
+              <a:spcAft>
+                <a:spcPts val="0"/>
+              </a:spcAft>
+              <a:defRPr sz="1400" b="0">
+                <a:solidFill>
+                  <a:srgbClr val="FFFFFF"/>
+                </a:solidFill>
+                <a:latin typeface="DejaVu Sans Mono"/>
+              </a:defRPr>
+            </a:pPr>
+          </a:p>
+          <a:p>
+            <a:pPr algn="l">
+              <a:spcAft>
+                <a:spcPts val="0"/>
+              </a:spcAft>
+              <a:defRPr sz="1400" b="0">
+                <a:solidFill>
+                  <a:srgbClr val="FFFFFF"/>
+                </a:solidFill>
+                <a:latin typeface="DejaVu Sans Mono"/>
+              </a:defRPr>
+            </a:pPr>
             <a:r>
               <a:t>    def red_target_detection(self, image, header):</a:t>
             </a:r>
-            <a:br/>
+          </a:p>
+          <a:p>
+            <a:pPr algn="l">
+              <a:spcAft>
+                <a:spcPts val="0"/>
+              </a:spcAft>
+              <a:defRPr sz="1400" b="0">
+                <a:solidFill>
+                  <a:srgbClr val="FFFFFF"/>
+                </a:solidFill>
+                <a:latin typeface="DejaVu Sans Mono"/>
+              </a:defRPr>
+            </a:pPr>
             <a:r>
               <a:t>        """Dependency-free fallback for the red target placed in warehouse.sdf.</a:t>
             </a:r>
-            <a:br/>
-            <a:br/>
+          </a:p>
+          <a:p>
+            <a:pPr algn="l">
+              <a:spcAft>
+                <a:spcPts val="0"/>
+              </a:spcAft>
+              <a:defRPr sz="1400" b="0">
+                <a:solidFill>
+                  <a:srgbClr val="FFFFFF"/>
+                </a:solidFill>
+                <a:latin typeface="DejaVu Sans Mono"/>
+              </a:defRPr>
+            </a:pPr>
+          </a:p>
+          <a:p>
+            <a:pPr algn="l">
+              <a:spcAft>
+                <a:spcPts val="0"/>
+              </a:spcAft>
+              <a:defRPr sz="1400" b="0">
+                <a:solidFill>
+                  <a:srgbClr val="FFFFFF"/>
+                </a:solidFill>
+                <a:latin typeface="DejaVu Sans Mono"/>
+              </a:defRPr>
+            </a:pPr>
             <a:r>
               <a:t>        This is deliberately labelled as a fallback in the debug image.  It keeps</a:t>
             </a:r>
-            <a:br/>
+          </a:p>
+          <a:p>
+            <a:pPr algn="l">
+              <a:spcAft>
+                <a:spcPts val="0"/>
+              </a:spcAft>
+              <a:defRPr sz="1400" b="0">
+                <a:solidFill>
+                  <a:srgbClr val="FFFFFF"/>
+                </a:solidFill>
+                <a:latin typeface="DejaVu Sans Mono"/>
+              </a:defRPr>
+            </a:pPr>
             <a:r>
               <a:t>        M17--M22 runnable before a learner downloads a YOLO model, while the same</a:t>
             </a:r>
-            <a:br/>
+          </a:p>
+          <a:p>
+            <a:pPr algn="l">
+              <a:spcAft>
+                <a:spcPts val="0"/>
+              </a:spcAft>
+              <a:defRPr sz="1400" b="0">
+                <a:solidFill>
+                  <a:srgbClr val="FFFFFF"/>
+                </a:solidFill>
+                <a:latin typeface="DejaVu Sans Mono"/>
+              </a:defRPr>
+            </a:pPr>
             <a:r>
               <a:t>        Detection message and mission interface are used by real YOLO inference.</a:t>
             </a:r>
@@ -38013,7 +39652,7 @@
           </a:fontRef>
         </p:style>
         <p:txBody>
-          <a:bodyPr rtlCol="0" anchor="ctr" wrap="square" lIns="164592" rIns="164592" tIns="109728" bIns="36576"/>
+          <a:bodyPr rtlCol="0" anchor="ctr" wrap="square" lIns="164592" rIns="164592" tIns="109728" bIns="73152"/>
           <a:lstStyle/>
           <a:p>
             <a:pPr algn="l">
@@ -38030,47 +39669,179 @@
             <a:r>
               <a:t>        """</a:t>
             </a:r>
-            <a:br/>
+          </a:p>
+          <a:p>
+            <a:pPr algn="l">
+              <a:spcAft>
+                <a:spcPts val="0"/>
+              </a:spcAft>
+              <a:defRPr sz="1400" b="0">
+                <a:solidFill>
+                  <a:srgbClr val="FFFFFF"/>
+                </a:solidFill>
+                <a:latin typeface="DejaVu Sans Mono"/>
+              </a:defRPr>
+            </a:pPr>
             <a:r>
               <a:t>        hsv = cv2.cvtColor(image, cv2.COLOR_BGR2HSV)</a:t>
             </a:r>
-            <a:br/>
+          </a:p>
+          <a:p>
+            <a:pPr algn="l">
+              <a:spcAft>
+                <a:spcPts val="0"/>
+              </a:spcAft>
+              <a:defRPr sz="1400" b="0">
+                <a:solidFill>
+                  <a:srgbClr val="FFFFFF"/>
+                </a:solidFill>
+                <a:latin typeface="DejaVu Sans Mono"/>
+              </a:defRPr>
+            </a:pPr>
             <a:r>
               <a:t>        lower_red = cv2.inRange(hsv, (0, 90, 70), (12, 255, 255))</a:t>
             </a:r>
-            <a:br/>
+          </a:p>
+          <a:p>
+            <a:pPr algn="l">
+              <a:spcAft>
+                <a:spcPts val="0"/>
+              </a:spcAft>
+              <a:defRPr sz="1400" b="0">
+                <a:solidFill>
+                  <a:srgbClr val="FFFFFF"/>
+                </a:solidFill>
+                <a:latin typeface="DejaVu Sans Mono"/>
+              </a:defRPr>
+            </a:pPr>
             <a:r>
               <a:t>        upper_red = cv2.inRange(hsv, (165, 90, 70), (179, 255, 255))</a:t>
             </a:r>
-            <a:br/>
+          </a:p>
+          <a:p>
+            <a:pPr algn="l">
+              <a:spcAft>
+                <a:spcPts val="0"/>
+              </a:spcAft>
+              <a:defRPr sz="1400" b="0">
+                <a:solidFill>
+                  <a:srgbClr val="FFFFFF"/>
+                </a:solidFill>
+                <a:latin typeface="DejaVu Sans Mono"/>
+              </a:defRPr>
+            </a:pPr>
             <a:r>
               <a:t>        mask = cv2.bitwise_or(lower_red, upper_red)</a:t>
             </a:r>
-            <a:br/>
+          </a:p>
+          <a:p>
+            <a:pPr algn="l">
+              <a:spcAft>
+                <a:spcPts val="0"/>
+              </a:spcAft>
+              <a:defRPr sz="1400" b="0">
+                <a:solidFill>
+                  <a:srgbClr val="FFFFFF"/>
+                </a:solidFill>
+                <a:latin typeface="DejaVu Sans Mono"/>
+              </a:defRPr>
+            </a:pPr>
             <a:r>
               <a:t>        contours, _ = cv2.findContours(mask, cv2.RETR_EXTERNAL, cv2.CHAIN_APPROX_SIMPLE)</a:t>
             </a:r>
-            <a:br/>
+          </a:p>
+          <a:p>
+            <a:pPr algn="l">
+              <a:spcAft>
+                <a:spcPts val="0"/>
+              </a:spcAft>
+              <a:defRPr sz="1400" b="0">
+                <a:solidFill>
+                  <a:srgbClr val="FFFFFF"/>
+                </a:solidFill>
+                <a:latin typeface="DejaVu Sans Mono"/>
+              </a:defRPr>
+            </a:pPr>
             <a:r>
               <a:t>        if not contours:</a:t>
             </a:r>
-            <a:br/>
+          </a:p>
+          <a:p>
+            <a:pPr algn="l">
+              <a:spcAft>
+                <a:spcPts val="0"/>
+              </a:spcAft>
+              <a:defRPr sz="1400" b="0">
+                <a:solidFill>
+                  <a:srgbClr val="FFFFFF"/>
+                </a:solidFill>
+                <a:latin typeface="DejaVu Sans Mono"/>
+              </a:defRPr>
+            </a:pPr>
             <a:r>
               <a:t>            return None</a:t>
             </a:r>
-            <a:br/>
+          </a:p>
+          <a:p>
+            <a:pPr algn="l">
+              <a:spcAft>
+                <a:spcPts val="0"/>
+              </a:spcAft>
+              <a:defRPr sz="1400" b="0">
+                <a:solidFill>
+                  <a:srgbClr val="FFFFFF"/>
+                </a:solidFill>
+                <a:latin typeface="DejaVu Sans Mono"/>
+              </a:defRPr>
+            </a:pPr>
             <a:r>
               <a:t>        contour = max(contours, key=cv2.contourArea)</a:t>
             </a:r>
-            <a:br/>
+          </a:p>
+          <a:p>
+            <a:pPr algn="l">
+              <a:spcAft>
+                <a:spcPts val="0"/>
+              </a:spcAft>
+              <a:defRPr sz="1400" b="0">
+                <a:solidFill>
+                  <a:srgbClr val="FFFFFF"/>
+                </a:solidFill>
+                <a:latin typeface="DejaVu Sans Mono"/>
+              </a:defRPr>
+            </a:pPr>
             <a:r>
               <a:t>        if cv2.contourArea(contour) &lt; 80:</a:t>
             </a:r>
-            <a:br/>
+          </a:p>
+          <a:p>
+            <a:pPr algn="l">
+              <a:spcAft>
+                <a:spcPts val="0"/>
+              </a:spcAft>
+              <a:defRPr sz="1400" b="0">
+                <a:solidFill>
+                  <a:srgbClr val="FFFFFF"/>
+                </a:solidFill>
+                <a:latin typeface="DejaVu Sans Mono"/>
+              </a:defRPr>
+            </a:pPr>
             <a:r>
               <a:t>            return None</a:t>
             </a:r>
-            <a:br/>
+          </a:p>
+          <a:p>
+            <a:pPr algn="l">
+              <a:spcAft>
+                <a:spcPts val="0"/>
+              </a:spcAft>
+              <a:defRPr sz="1400" b="0">
+                <a:solidFill>
+                  <a:srgbClr val="FFFFFF"/>
+                </a:solidFill>
+                <a:latin typeface="DejaVu Sans Mono"/>
+              </a:defRPr>
+            </a:pPr>
             <a:r>
               <a:t>        x, y, width, height = cv2.boundingRect(contour)</a:t>
             </a:r>
@@ -38487,7 +40258,7 @@
           </a:fontRef>
         </p:style>
         <p:txBody>
-          <a:bodyPr rtlCol="0" anchor="ctr" wrap="square" lIns="164592" rIns="164592" tIns="109728" bIns="36576"/>
+          <a:bodyPr rtlCol="0" anchor="ctr" wrap="square" lIns="164592" rIns="164592" tIns="109728" bIns="73152"/>
           <a:lstStyle/>
           <a:p>
             <a:pPr algn="l">
@@ -38504,44 +40275,176 @@
             <a:r>
               <a:t>        return self.make_detection(header, 'red_target_fallback', 0.9, x, y, x + width,</a:t>
             </a:r>
-            <a:br/>
+          </a:p>
+          <a:p>
+            <a:pPr algn="l">
+              <a:spcAft>
+                <a:spcPts val="0"/>
+              </a:spcAft>
+              <a:defRPr sz="1400" b="0">
+                <a:solidFill>
+                  <a:srgbClr val="FFFFFF"/>
+                </a:solidFill>
+                <a:latin typeface="DejaVu Sans Mono"/>
+              </a:defRPr>
+            </a:pPr>
             <a:r>
               <a:t>            y + height, image.shape[1])</a:t>
             </a:r>
-            <a:br/>
-            <a:br/>
+          </a:p>
+          <a:p>
+            <a:pPr algn="l">
+              <a:spcAft>
+                <a:spcPts val="0"/>
+              </a:spcAft>
+              <a:defRPr sz="1400" b="0">
+                <a:solidFill>
+                  <a:srgbClr val="FFFFFF"/>
+                </a:solidFill>
+                <a:latin typeface="DejaVu Sans Mono"/>
+              </a:defRPr>
+            </a:pPr>
+          </a:p>
+          <a:p>
+            <a:pPr algn="l">
+              <a:spcAft>
+                <a:spcPts val="0"/>
+              </a:spcAft>
+              <a:defRPr sz="1400" b="0">
+                <a:solidFill>
+                  <a:srgbClr val="FFFFFF"/>
+                </a:solidFill>
+                <a:latin typeface="DejaVu Sans Mono"/>
+              </a:defRPr>
+            </a:pPr>
             <a:r>
               <a:t>    def callback(self, image_message):</a:t>
             </a:r>
-            <a:br/>
+          </a:p>
+          <a:p>
+            <a:pPr algn="l">
+              <a:spcAft>
+                <a:spcPts val="0"/>
+              </a:spcAft>
+              <a:defRPr sz="1400" b="0">
+                <a:solidFill>
+                  <a:srgbClr val="FFFFFF"/>
+                </a:solidFill>
+                <a:latin typeface="DejaVu Sans Mono"/>
+              </a:defRPr>
+            </a:pPr>
             <a:r>
               <a:t>        image = self.bridge.imgmsg_to_cv2(image_message, desired_encoding='bgr8')</a:t>
             </a:r>
-            <a:br/>
+          </a:p>
+          <a:p>
+            <a:pPr algn="l">
+              <a:spcAft>
+                <a:spcPts val="0"/>
+              </a:spcAft>
+              <a:defRPr sz="1400" b="0">
+                <a:solidFill>
+                  <a:srgbClr val="FFFFFF"/>
+                </a:solidFill>
+                <a:latin typeface="DejaVu Sans Mono"/>
+              </a:defRPr>
+            </a:pPr>
             <a:r>
               <a:t>        debug = image.copy()</a:t>
             </a:r>
-            <a:br/>
+          </a:p>
+          <a:p>
+            <a:pPr algn="l">
+              <a:spcAft>
+                <a:spcPts val="0"/>
+              </a:spcAft>
+              <a:defRPr sz="1400" b="0">
+                <a:solidFill>
+                  <a:srgbClr val="FFFFFF"/>
+                </a:solidFill>
+                <a:latin typeface="DejaVu Sans Mono"/>
+              </a:defRPr>
+            </a:pPr>
             <a:r>
               <a:t>        output = DetectionArray(header=image_message.header)</a:t>
             </a:r>
-            <a:br/>
+          </a:p>
+          <a:p>
+            <a:pPr algn="l">
+              <a:spcAft>
+                <a:spcPts val="0"/>
+              </a:spcAft>
+              <a:defRPr sz="1400" b="0">
+                <a:solidFill>
+                  <a:srgbClr val="FFFFFF"/>
+                </a:solidFill>
+                <a:latin typeface="DejaVu Sans Mono"/>
+              </a:defRPr>
+            </a:pPr>
             <a:r>
               <a:t>        label = 'no detection'</a:t>
             </a:r>
-            <a:br/>
+          </a:p>
+          <a:p>
+            <a:pPr algn="l">
+              <a:spcAft>
+                <a:spcPts val="0"/>
+              </a:spcAft>
+              <a:defRPr sz="1400" b="0">
+                <a:solidFill>
+                  <a:srgbClr val="FFFFFF"/>
+                </a:solidFill>
+                <a:latin typeface="DejaVu Sans Mono"/>
+              </a:defRPr>
+            </a:pPr>
             <a:r>
               <a:t>        if self.model is not None:</a:t>
             </a:r>
-            <a:br/>
+          </a:p>
+          <a:p>
+            <a:pPr algn="l">
+              <a:spcAft>
+                <a:spcPts val="0"/>
+              </a:spcAft>
+              <a:defRPr sz="1400" b="0">
+                <a:solidFill>
+                  <a:srgbClr val="FFFFFF"/>
+                </a:solidFill>
+                <a:latin typeface="DejaVu Sans Mono"/>
+              </a:defRPr>
+            </a:pPr>
             <a:r>
               <a:t>            result = self.model(image, verbose=False)[0]</a:t>
             </a:r>
-            <a:br/>
+          </a:p>
+          <a:p>
+            <a:pPr algn="l">
+              <a:spcAft>
+                <a:spcPts val="0"/>
+              </a:spcAft>
+              <a:defRPr sz="1400" b="0">
+                <a:solidFill>
+                  <a:srgbClr val="FFFFFF"/>
+                </a:solidFill>
+                <a:latin typeface="DejaVu Sans Mono"/>
+              </a:defRPr>
+            </a:pPr>
             <a:r>
               <a:t>            threshold = self.get_parameter('confidence_threshold').value</a:t>
             </a:r>
-            <a:br/>
+          </a:p>
+          <a:p>
+            <a:pPr algn="l">
+              <a:spcAft>
+                <a:spcPts val="0"/>
+              </a:spcAft>
+              <a:defRPr sz="1400" b="0">
+                <a:solidFill>
+                  <a:srgbClr val="FFFFFF"/>
+                </a:solidFill>
+                <a:latin typeface="DejaVu Sans Mono"/>
+              </a:defRPr>
+            </a:pPr>
             <a:r>
               <a:t>            for box in result.boxes:</a:t>
             </a:r>
@@ -38958,7 +40861,7 @@
           </a:fontRef>
         </p:style>
         <p:txBody>
-          <a:bodyPr rtlCol="0" anchor="ctr" wrap="square" lIns="164592" rIns="164592" tIns="109728" bIns="36576"/>
+          <a:bodyPr rtlCol="0" anchor="ctr" wrap="square" lIns="164592" rIns="164592" tIns="109728" bIns="73152"/>
           <a:lstStyle/>
           <a:p>
             <a:pPr algn="l">
@@ -38975,47 +40878,179 @@
             <a:r>
               <a:t>                confidence = float(box.conf[0])</a:t>
             </a:r>
-            <a:br/>
+          </a:p>
+          <a:p>
+            <a:pPr algn="l">
+              <a:spcAft>
+                <a:spcPts val="0"/>
+              </a:spcAft>
+              <a:defRPr sz="1400" b="0">
+                <a:solidFill>
+                  <a:srgbClr val="FFFFFF"/>
+                </a:solidFill>
+                <a:latin typeface="DejaVu Sans Mono"/>
+              </a:defRPr>
+            </a:pPr>
             <a:r>
               <a:t>                if confidence &lt; threshold:</a:t>
             </a:r>
-            <a:br/>
+          </a:p>
+          <a:p>
+            <a:pPr algn="l">
+              <a:spcAft>
+                <a:spcPts val="0"/>
+              </a:spcAft>
+              <a:defRPr sz="1400" b="0">
+                <a:solidFill>
+                  <a:srgbClr val="FFFFFF"/>
+                </a:solidFill>
+                <a:latin typeface="DejaVu Sans Mono"/>
+              </a:defRPr>
+            </a:pPr>
             <a:r>
               <a:t>                    continue</a:t>
             </a:r>
-            <a:br/>
+          </a:p>
+          <a:p>
+            <a:pPr algn="l">
+              <a:spcAft>
+                <a:spcPts val="0"/>
+              </a:spcAft>
+              <a:defRPr sz="1400" b="0">
+                <a:solidFill>
+                  <a:srgbClr val="FFFFFF"/>
+                </a:solidFill>
+                <a:latin typeface="DejaVu Sans Mono"/>
+              </a:defRPr>
+            </a:pPr>
             <a:r>
               <a:t>                x1, y1, x2, y2 = [int(value) for value in box.xyxy[0].tolist()]</a:t>
             </a:r>
-            <a:br/>
+          </a:p>
+          <a:p>
+            <a:pPr algn="l">
+              <a:spcAft>
+                <a:spcPts val="0"/>
+              </a:spcAft>
+              <a:defRPr sz="1400" b="0">
+                <a:solidFill>
+                  <a:srgbClr val="FFFFFF"/>
+                </a:solidFill>
+                <a:latin typeface="DejaVu Sans Mono"/>
+              </a:defRPr>
+            </a:pPr>
             <a:r>
               <a:t>                detection = self.make_detection(image_message.header,</a:t>
             </a:r>
-            <a:br/>
+          </a:p>
+          <a:p>
+            <a:pPr algn="l">
+              <a:spcAft>
+                <a:spcPts val="0"/>
+              </a:spcAft>
+              <a:defRPr sz="1400" b="0">
+                <a:solidFill>
+                  <a:srgbClr val="FFFFFF"/>
+                </a:solidFill>
+                <a:latin typeface="DejaVu Sans Mono"/>
+              </a:defRPr>
+            </a:pPr>
             <a:r>
               <a:t>                    result.names[int(box.cls[0])], confidence, x1, y1, x2, y2,</a:t>
             </a:r>
-            <a:br/>
+          </a:p>
+          <a:p>
+            <a:pPr algn="l">
+              <a:spcAft>
+                <a:spcPts val="0"/>
+              </a:spcAft>
+              <a:defRPr sz="1400" b="0">
+                <a:solidFill>
+                  <a:srgbClr val="FFFFFF"/>
+                </a:solidFill>
+                <a:latin typeface="DejaVu Sans Mono"/>
+              </a:defRPr>
+            </a:pPr>
             <a:r>
               <a:t>                    image.shape[1])</a:t>
             </a:r>
-            <a:br/>
+          </a:p>
+          <a:p>
+            <a:pPr algn="l">
+              <a:spcAft>
+                <a:spcPts val="0"/>
+              </a:spcAft>
+              <a:defRPr sz="1400" b="0">
+                <a:solidFill>
+                  <a:srgbClr val="FFFFFF"/>
+                </a:solidFill>
+                <a:latin typeface="DejaVu Sans Mono"/>
+              </a:defRPr>
+            </a:pPr>
             <a:r>
               <a:t>                output.detections.append(detection)</a:t>
             </a:r>
-            <a:br/>
+          </a:p>
+          <a:p>
+            <a:pPr algn="l">
+              <a:spcAft>
+                <a:spcPts val="0"/>
+              </a:spcAft>
+              <a:defRPr sz="1400" b="0">
+                <a:solidFill>
+                  <a:srgbClr val="FFFFFF"/>
+                </a:solidFill>
+                <a:latin typeface="DejaVu Sans Mono"/>
+              </a:defRPr>
+            </a:pPr>
             <a:r>
               <a:t>                cv2.rectangle(debug, (x1, y1), (x2, y2), (30, 220, 30), 2)</a:t>
             </a:r>
-            <a:br/>
+          </a:p>
+          <a:p>
+            <a:pPr algn="l">
+              <a:spcAft>
+                <a:spcPts val="0"/>
+              </a:spcAft>
+              <a:defRPr sz="1400" b="0">
+                <a:solidFill>
+                  <a:srgbClr val="FFFFFF"/>
+                </a:solidFill>
+                <a:latin typeface="DejaVu Sans Mono"/>
+              </a:defRPr>
+            </a:pPr>
             <a:r>
               <a:t>                label = f'YOLO {detection.class_name} {confidence:.2f}'</a:t>
             </a:r>
-            <a:br/>
+          </a:p>
+          <a:p>
+            <a:pPr algn="l">
+              <a:spcAft>
+                <a:spcPts val="0"/>
+              </a:spcAft>
+              <a:defRPr sz="1400" b="0">
+                <a:solidFill>
+                  <a:srgbClr val="FFFFFF"/>
+                </a:solidFill>
+                <a:latin typeface="DejaVu Sans Mono"/>
+              </a:defRPr>
+            </a:pPr>
             <a:r>
               <a:t>        elif self.get_parameter('enable_red_target_fallback').value:</a:t>
             </a:r>
-            <a:br/>
+          </a:p>
+          <a:p>
+            <a:pPr algn="l">
+              <a:spcAft>
+                <a:spcPts val="0"/>
+              </a:spcAft>
+              <a:defRPr sz="1400" b="0">
+                <a:solidFill>
+                  <a:srgbClr val="FFFFFF"/>
+                </a:solidFill>
+                <a:latin typeface="DejaVu Sans Mono"/>
+              </a:defRPr>
+            </a:pPr>
             <a:r>
               <a:t>            detection = self.red_target_detection(image, image_message.header)</a:t>
             </a:r>
@@ -39432,7 +41467,7 @@
           </a:fontRef>
         </p:style>
         <p:txBody>
-          <a:bodyPr rtlCol="0" anchor="ctr" wrap="square" lIns="164592" rIns="164592" tIns="109728" bIns="36576"/>
+          <a:bodyPr rtlCol="0" anchor="ctr" wrap="square" lIns="164592" rIns="164592" tIns="109728" bIns="73152"/>
           <a:lstStyle/>
           <a:p>
             <a:pPr algn="l">
@@ -39449,47 +41484,179 @@
             <a:r>
               <a:t>            if detection is not None:</a:t>
             </a:r>
-            <a:br/>
+          </a:p>
+          <a:p>
+            <a:pPr algn="l">
+              <a:spcAft>
+                <a:spcPts val="0"/>
+              </a:spcAft>
+              <a:defRPr sz="1400" b="0">
+                <a:solidFill>
+                  <a:srgbClr val="FFFFFF"/>
+                </a:solidFill>
+                <a:latin typeface="DejaVu Sans Mono"/>
+              </a:defRPr>
+            </a:pPr>
             <a:r>
               <a:t>                output.detections.append(detection)</a:t>
             </a:r>
-            <a:br/>
+          </a:p>
+          <a:p>
+            <a:pPr algn="l">
+              <a:spcAft>
+                <a:spcPts val="0"/>
+              </a:spcAft>
+              <a:defRPr sz="1400" b="0">
+                <a:solidFill>
+                  <a:srgbClr val="FFFFFF"/>
+                </a:solidFill>
+                <a:latin typeface="DejaVu Sans Mono"/>
+              </a:defRPr>
+            </a:pPr>
             <a:r>
               <a:t>                x1 = detection.center_x - detection.width // 2</a:t>
             </a:r>
-            <a:br/>
+          </a:p>
+          <a:p>
+            <a:pPr algn="l">
+              <a:spcAft>
+                <a:spcPts val="0"/>
+              </a:spcAft>
+              <a:defRPr sz="1400" b="0">
+                <a:solidFill>
+                  <a:srgbClr val="FFFFFF"/>
+                </a:solidFill>
+                <a:latin typeface="DejaVu Sans Mono"/>
+              </a:defRPr>
+            </a:pPr>
             <a:r>
               <a:t>                y1 = detection.center_y - detection.height // 2</a:t>
             </a:r>
-            <a:br/>
+          </a:p>
+          <a:p>
+            <a:pPr algn="l">
+              <a:spcAft>
+                <a:spcPts val="0"/>
+              </a:spcAft>
+              <a:defRPr sz="1400" b="0">
+                <a:solidFill>
+                  <a:srgbClr val="FFFFFF"/>
+                </a:solidFill>
+                <a:latin typeface="DejaVu Sans Mono"/>
+              </a:defRPr>
+            </a:pPr>
             <a:r>
               <a:t>                x2, y2 = (x1 + detection.width, y1 + detection.height)</a:t>
             </a:r>
-            <a:br/>
+          </a:p>
+          <a:p>
+            <a:pPr algn="l">
+              <a:spcAft>
+                <a:spcPts val="0"/>
+              </a:spcAft>
+              <a:defRPr sz="1400" b="0">
+                <a:solidFill>
+                  <a:srgbClr val="FFFFFF"/>
+                </a:solidFill>
+                <a:latin typeface="DejaVu Sans Mono"/>
+              </a:defRPr>
+            </a:pPr>
             <a:r>
               <a:t>                cv2.rectangle(debug, (x1, y1), (x2, y2), (0, 215, 255), 2)</a:t>
             </a:r>
-            <a:br/>
+          </a:p>
+          <a:p>
+            <a:pPr algn="l">
+              <a:spcAft>
+                <a:spcPts val="0"/>
+              </a:spcAft>
+              <a:defRPr sz="1400" b="0">
+                <a:solidFill>
+                  <a:srgbClr val="FFFFFF"/>
+                </a:solidFill>
+                <a:latin typeface="DejaVu Sans Mono"/>
+              </a:defRPr>
+            </a:pPr>
             <a:r>
               <a:t>                label = f'course fallback target {detection.estimated_distance:.2f} m'</a:t>
             </a:r>
-            <a:br/>
+          </a:p>
+          <a:p>
+            <a:pPr algn="l">
+              <a:spcAft>
+                <a:spcPts val="0"/>
+              </a:spcAft>
+              <a:defRPr sz="1400" b="0">
+                <a:solidFill>
+                  <a:srgbClr val="FFFFFF"/>
+                </a:solidFill>
+                <a:latin typeface="DejaVu Sans Mono"/>
+              </a:defRPr>
+            </a:pPr>
             <a:r>
               <a:t>            else:</a:t>
             </a:r>
-            <a:br/>
+          </a:p>
+          <a:p>
+            <a:pPr algn="l">
+              <a:spcAft>
+                <a:spcPts val="0"/>
+              </a:spcAft>
+              <a:defRPr sz="1400" b="0">
+                <a:solidFill>
+                  <a:srgbClr val="FFFFFF"/>
+                </a:solidFill>
+                <a:latin typeface="DejaVu Sans Mono"/>
+              </a:defRPr>
+            </a:pPr>
             <a:r>
               <a:t>                label = 'course fallback: red target not visible'</a:t>
             </a:r>
-            <a:br/>
+          </a:p>
+          <a:p>
+            <a:pPr algn="l">
+              <a:spcAft>
+                <a:spcPts val="0"/>
+              </a:spcAft>
+              <a:defRPr sz="1400" b="0">
+                <a:solidFill>
+                  <a:srgbClr val="FFFFFF"/>
+                </a:solidFill>
+                <a:latin typeface="DejaVu Sans Mono"/>
+              </a:defRPr>
+            </a:pPr>
             <a:r>
               <a:t>        cv2.putText(debug, label, (12, 28), cv2.FONT_HERSHEY_SIMPLEX, 0.65, (255, 255,</a:t>
             </a:r>
-            <a:br/>
+          </a:p>
+          <a:p>
+            <a:pPr algn="l">
+              <a:spcAft>
+                <a:spcPts val="0"/>
+              </a:spcAft>
+              <a:defRPr sz="1400" b="0">
+                <a:solidFill>
+                  <a:srgbClr val="FFFFFF"/>
+                </a:solidFill>
+                <a:latin typeface="DejaVu Sans Mono"/>
+              </a:defRPr>
+            </a:pPr>
             <a:r>
               <a:t>            255), 2)</a:t>
             </a:r>
-            <a:br/>
+          </a:p>
+          <a:p>
+            <a:pPr algn="l">
+              <a:spcAft>
+                <a:spcPts val="0"/>
+              </a:spcAft>
+              <a:defRPr sz="1400" b="0">
+                <a:solidFill>
+                  <a:srgbClr val="FFFFFF"/>
+                </a:solidFill>
+                <a:latin typeface="DejaVu Sans Mono"/>
+              </a:defRPr>
+            </a:pPr>
             <a:r>
               <a:t>        self.publisher.publish(output)</a:t>
             </a:r>
@@ -39906,7 +42073,7 @@
           </a:fontRef>
         </p:style>
         <p:txBody>
-          <a:bodyPr rtlCol="0" anchor="ctr" wrap="square" lIns="164592" rIns="164592" tIns="109728" bIns="36576"/>
+          <a:bodyPr rtlCol="0" anchor="ctr" wrap="square" lIns="164592" rIns="164592" tIns="109728" bIns="73152"/>
           <a:lstStyle/>
           <a:p>
             <a:pPr algn="l">
@@ -39923,44 +42090,176 @@
             <a:r>
               <a:t>        self.debug_publisher.publish(self.bridge.cv2_to_imgmsg(debug, encoding='bgr8'))</a:t>
             </a:r>
-            <a:br/>
-            <a:br/>
+          </a:p>
+          <a:p>
+            <a:pPr algn="l">
+              <a:spcAft>
+                <a:spcPts val="0"/>
+              </a:spcAft>
+              <a:defRPr sz="1400" b="0">
+                <a:solidFill>
+                  <a:srgbClr val="FFFFFF"/>
+                </a:solidFill>
+                <a:latin typeface="DejaVu Sans Mono"/>
+              </a:defRPr>
+            </a:pPr>
+          </a:p>
+          <a:p>
+            <a:pPr algn="l">
+              <a:spcAft>
+                <a:spcPts val="0"/>
+              </a:spcAft>
+              <a:defRPr sz="1400" b="0">
+                <a:solidFill>
+                  <a:srgbClr val="FFFFFF"/>
+                </a:solidFill>
+                <a:latin typeface="DejaVu Sans Mono"/>
+              </a:defRPr>
+            </a:pPr>
             <a:r>
               <a:t>def main():</a:t>
             </a:r>
-            <a:br/>
+          </a:p>
+          <a:p>
+            <a:pPr algn="l">
+              <a:spcAft>
+                <a:spcPts val="0"/>
+              </a:spcAft>
+              <a:defRPr sz="1400" b="0">
+                <a:solidFill>
+                  <a:srgbClr val="FFFFFF"/>
+                </a:solidFill>
+                <a:latin typeface="DejaVu Sans Mono"/>
+              </a:defRPr>
+            </a:pPr>
             <a:r>
               <a:t>    rclpy.init()</a:t>
             </a:r>
-            <a:br/>
+          </a:p>
+          <a:p>
+            <a:pPr algn="l">
+              <a:spcAft>
+                <a:spcPts val="0"/>
+              </a:spcAft>
+              <a:defRPr sz="1400" b="0">
+                <a:solidFill>
+                  <a:srgbClr val="FFFFFF"/>
+                </a:solidFill>
+                <a:latin typeface="DejaVu Sans Mono"/>
+              </a:defRPr>
+            </a:pPr>
             <a:r>
               <a:t>    node = YoloNode()</a:t>
             </a:r>
-            <a:br/>
+          </a:p>
+          <a:p>
+            <a:pPr algn="l">
+              <a:spcAft>
+                <a:spcPts val="0"/>
+              </a:spcAft>
+              <a:defRPr sz="1400" b="0">
+                <a:solidFill>
+                  <a:srgbClr val="FFFFFF"/>
+                </a:solidFill>
+                <a:latin typeface="DejaVu Sans Mono"/>
+              </a:defRPr>
+            </a:pPr>
             <a:r>
               <a:t>    try:</a:t>
             </a:r>
-            <a:br/>
+          </a:p>
+          <a:p>
+            <a:pPr algn="l">
+              <a:spcAft>
+                <a:spcPts val="0"/>
+              </a:spcAft>
+              <a:defRPr sz="1400" b="0">
+                <a:solidFill>
+                  <a:srgbClr val="FFFFFF"/>
+                </a:solidFill>
+                <a:latin typeface="DejaVu Sans Mono"/>
+              </a:defRPr>
+            </a:pPr>
             <a:r>
               <a:t>        rclpy.spin(node)</a:t>
             </a:r>
-            <a:br/>
+          </a:p>
+          <a:p>
+            <a:pPr algn="l">
+              <a:spcAft>
+                <a:spcPts val="0"/>
+              </a:spcAft>
+              <a:defRPr sz="1400" b="0">
+                <a:solidFill>
+                  <a:srgbClr val="FFFFFF"/>
+                </a:solidFill>
+                <a:latin typeface="DejaVu Sans Mono"/>
+              </a:defRPr>
+            </a:pPr>
             <a:r>
               <a:t>    except KeyboardInterrupt:</a:t>
             </a:r>
-            <a:br/>
+          </a:p>
+          <a:p>
+            <a:pPr algn="l">
+              <a:spcAft>
+                <a:spcPts val="0"/>
+              </a:spcAft>
+              <a:defRPr sz="1400" b="0">
+                <a:solidFill>
+                  <a:srgbClr val="FFFFFF"/>
+                </a:solidFill>
+                <a:latin typeface="DejaVu Sans Mono"/>
+              </a:defRPr>
+            </a:pPr>
             <a:r>
               <a:t>        pass</a:t>
             </a:r>
-            <a:br/>
+          </a:p>
+          <a:p>
+            <a:pPr algn="l">
+              <a:spcAft>
+                <a:spcPts val="0"/>
+              </a:spcAft>
+              <a:defRPr sz="1400" b="0">
+                <a:solidFill>
+                  <a:srgbClr val="FFFFFF"/>
+                </a:solidFill>
+                <a:latin typeface="DejaVu Sans Mono"/>
+              </a:defRPr>
+            </a:pPr>
             <a:r>
               <a:t>    finally:</a:t>
             </a:r>
-            <a:br/>
+          </a:p>
+          <a:p>
+            <a:pPr algn="l">
+              <a:spcAft>
+                <a:spcPts val="0"/>
+              </a:spcAft>
+              <a:defRPr sz="1400" b="0">
+                <a:solidFill>
+                  <a:srgbClr val="FFFFFF"/>
+                </a:solidFill>
+                <a:latin typeface="DejaVu Sans Mono"/>
+              </a:defRPr>
+            </a:pPr>
             <a:r>
               <a:t>        node.destroy_node()</a:t>
             </a:r>
-            <a:br/>
+          </a:p>
+          <a:p>
+            <a:pPr algn="l">
+              <a:spcAft>
+                <a:spcPts val="0"/>
+              </a:spcAft>
+              <a:defRPr sz="1400" b="0">
+                <a:solidFill>
+                  <a:srgbClr val="FFFFFF"/>
+                </a:solidFill>
+                <a:latin typeface="DejaVu Sans Mono"/>
+              </a:defRPr>
+            </a:pPr>
             <a:r>
               <a:t>        if rclpy.ok():</a:t>
             </a:r>
@@ -40377,7 +42676,7 @@
           </a:fontRef>
         </p:style>
         <p:txBody>
-          <a:bodyPr rtlCol="0" anchor="ctr" wrap="square" lIns="164592" rIns="164592" tIns="109728" bIns="36576"/>
+          <a:bodyPr rtlCol="0" anchor="ctr" wrap="square" lIns="164592" rIns="164592" tIns="109728" bIns="73152"/>
           <a:lstStyle/>
           <a:p>
             <a:pPr algn="l">
@@ -40862,7 +43161,7 @@
           </a:fontRef>
         </p:style>
         <p:txBody>
-          <a:bodyPr rtlCol="0" anchor="ctr" wrap="square" lIns="73152" rIns="73152" tIns="36576" bIns="36576"/>
+          <a:bodyPr rtlCol="0" anchor="ctr" wrap="square" lIns="109728" rIns="109728" tIns="73152" bIns="73152"/>
           <a:lstStyle/>
           <a:p>
             <a:pPr algn="l">
@@ -40879,7 +43178,19 @@
             <a:r>
               <a:t>mkdir -p ~/ros2_curri/my_agv_ws/src/agv_bringup/config</a:t>
             </a:r>
-            <a:br/>
+          </a:p>
+          <a:p>
+            <a:pPr algn="l">
+              <a:spcAft>
+                <a:spcPts val="0"/>
+              </a:spcAft>
+              <a:defRPr sz="1600" b="0">
+                <a:solidFill>
+                  <a:srgbClr val="FFFFFF"/>
+                </a:solidFill>
+                <a:latin typeface="DejaVu Sans Mono"/>
+              </a:defRPr>
+            </a:pPr>
             <a:r>
               <a:t>nano ~/ros2_curri/my_agv_ws/src/agv_bringup/config/vision.yaml</a:t>
             </a:r>
@@ -42930,7 +45241,7 @@
           </a:fontRef>
         </p:style>
         <p:txBody>
-          <a:bodyPr rtlCol="0" anchor="ctr" wrap="square" lIns="164592" rIns="164592" tIns="109728" bIns="36576"/>
+          <a:bodyPr rtlCol="0" anchor="ctr" wrap="square" lIns="164592" rIns="164592" tIns="109728" bIns="73152"/>
           <a:lstStyle/>
           <a:p>
             <a:pPr algn="l">
@@ -42947,27 +45258,99 @@
             <a:r>
               <a:t>yolo_node:</a:t>
             </a:r>
-            <a:br/>
+          </a:p>
+          <a:p>
+            <a:pPr algn="l">
+              <a:spcAft>
+                <a:spcPts val="0"/>
+              </a:spcAft>
+              <a:defRPr sz="1400" b="0">
+                <a:solidFill>
+                  <a:srgbClr val="FFFFFF"/>
+                </a:solidFill>
+                <a:latin typeface="DejaVu Sans Mono"/>
+              </a:defRPr>
+            </a:pPr>
             <a:r>
               <a:t>  ros__parameters:</a:t>
             </a:r>
-            <a:br/>
+          </a:p>
+          <a:p>
+            <a:pPr algn="l">
+              <a:spcAft>
+                <a:spcPts val="0"/>
+              </a:spcAft>
+              <a:defRPr sz="1400" b="0">
+                <a:solidFill>
+                  <a:srgbClr val="FFFFFF"/>
+                </a:solidFill>
+                <a:latin typeface="DejaVu Sans Mono"/>
+              </a:defRPr>
+            </a:pPr>
             <a:r>
               <a:t>    use_sim_time: true</a:t>
             </a:r>
-            <a:br/>
+          </a:p>
+          <a:p>
+            <a:pPr algn="l">
+              <a:spcAft>
+                <a:spcPts val="0"/>
+              </a:spcAft>
+              <a:defRPr sz="1400" b="0">
+                <a:solidFill>
+                  <a:srgbClr val="FFFFFF"/>
+                </a:solidFill>
+                <a:latin typeface="DejaVu Sans Mono"/>
+              </a:defRPr>
+            </a:pPr>
             <a:r>
               <a:t>    enable_yolo: false</a:t>
             </a:r>
-            <a:br/>
+          </a:p>
+          <a:p>
+            <a:pPr algn="l">
+              <a:spcAft>
+                <a:spcPts val="0"/>
+              </a:spcAft>
+              <a:defRPr sz="1400" b="0">
+                <a:solidFill>
+                  <a:srgbClr val="FFFFFF"/>
+                </a:solidFill>
+                <a:latin typeface="DejaVu Sans Mono"/>
+              </a:defRPr>
+            </a:pPr>
             <a:r>
               <a:t>    enable_red_target_fallback: true</a:t>
             </a:r>
-            <a:br/>
+          </a:p>
+          <a:p>
+            <a:pPr algn="l">
+              <a:spcAft>
+                <a:spcPts val="0"/>
+              </a:spcAft>
+              <a:defRPr sz="1400" b="0">
+                <a:solidFill>
+                  <a:srgbClr val="FFFFFF"/>
+                </a:solidFill>
+                <a:latin typeface="DejaVu Sans Mono"/>
+              </a:defRPr>
+            </a:pPr>
             <a:r>
               <a:t>    model_path: yolo11n.pt</a:t>
             </a:r>
-            <a:br/>
+          </a:p>
+          <a:p>
+            <a:pPr algn="l">
+              <a:spcAft>
+                <a:spcPts val="0"/>
+              </a:spcAft>
+              <a:defRPr sz="1400" b="0">
+                <a:solidFill>
+                  <a:srgbClr val="FFFFFF"/>
+                </a:solidFill>
+                <a:latin typeface="DejaVu Sans Mono"/>
+              </a:defRPr>
+            </a:pPr>
             <a:r>
               <a:t>    confidence_threshold: 0.50</a:t>
             </a:r>
@@ -43439,7 +45822,7 @@
           </a:fontRef>
         </p:style>
         <p:txBody>
-          <a:bodyPr rtlCol="0" anchor="ctr" wrap="square" lIns="73152" rIns="73152" tIns="36576" bIns="36576"/>
+          <a:bodyPr rtlCol="0" anchor="ctr" wrap="square" lIns="109728" rIns="109728" tIns="73152" bIns="73152"/>
           <a:lstStyle/>
           <a:p>
             <a:pPr algn="l">
@@ -43456,7 +45839,19 @@
             <a:r>
               <a:t>mkdir -p ~/ros2_curri/my_agv_ws/src/agv_vision</a:t>
             </a:r>
-            <a:br/>
+          </a:p>
+          <a:p>
+            <a:pPr algn="l">
+              <a:spcAft>
+                <a:spcPts val="0"/>
+              </a:spcAft>
+              <a:defRPr sz="1600" b="0">
+                <a:solidFill>
+                  <a:srgbClr val="FFFFFF"/>
+                </a:solidFill>
+                <a:latin typeface="DejaVu Sans Mono"/>
+              </a:defRPr>
+            </a:pPr>
             <a:r>
               <a:t>nano ~/ros2_curri/my_agv_ws/src/agv_vision/setup.py</a:t>
             </a:r>
@@ -45498,7 +47893,7 @@
           </a:fontRef>
         </p:style>
         <p:txBody>
-          <a:bodyPr rtlCol="0" anchor="ctr" wrap="square" lIns="164592" rIns="164592" tIns="109728" bIns="36576"/>
+          <a:bodyPr rtlCol="0" anchor="ctr" wrap="square" lIns="164592" rIns="164592" tIns="109728" bIns="73152"/>
           <a:lstStyle/>
           <a:p>
             <a:pPr algn="l">
@@ -45515,31 +47910,115 @@
             <a:r>
               <a:t>from setuptools import find_packages, setup</a:t>
             </a:r>
-            <a:br/>
+          </a:p>
+          <a:p>
+            <a:pPr algn="l">
+              <a:spcAft>
+                <a:spcPts val="0"/>
+              </a:spcAft>
+              <a:defRPr sz="1400" b="0">
+                <a:solidFill>
+                  <a:srgbClr val="FFFFFF"/>
+                </a:solidFill>
+                <a:latin typeface="DejaVu Sans Mono"/>
+              </a:defRPr>
+            </a:pPr>
             <a:r>
               <a:t>package_name = 'agv_vision'</a:t>
             </a:r>
-            <a:br/>
+          </a:p>
+          <a:p>
+            <a:pPr algn="l">
+              <a:spcAft>
+                <a:spcPts val="0"/>
+              </a:spcAft>
+              <a:defRPr sz="1400" b="0">
+                <a:solidFill>
+                  <a:srgbClr val="FFFFFF"/>
+                </a:solidFill>
+                <a:latin typeface="DejaVu Sans Mono"/>
+              </a:defRPr>
+            </a:pPr>
             <a:r>
               <a:t>setup(name=package_name, version='0.1.0', packages=find_packages(exclude=['test']),</a:t>
             </a:r>
-            <a:br/>
+          </a:p>
+          <a:p>
+            <a:pPr algn="l">
+              <a:spcAft>
+                <a:spcPts val="0"/>
+              </a:spcAft>
+              <a:defRPr sz="1400" b="0">
+                <a:solidFill>
+                  <a:srgbClr val="FFFFFF"/>
+                </a:solidFill>
+                <a:latin typeface="DejaVu Sans Mono"/>
+              </a:defRPr>
+            </a:pPr>
             <a:r>
               <a:t>    data_files=[('share/ament_index/resource_index/packages',</a:t>
             </a:r>
-            <a:br/>
+          </a:p>
+          <a:p>
+            <a:pPr algn="l">
+              <a:spcAft>
+                <a:spcPts val="0"/>
+              </a:spcAft>
+              <a:defRPr sz="1400" b="0">
+                <a:solidFill>
+                  <a:srgbClr val="FFFFFF"/>
+                </a:solidFill>
+                <a:latin typeface="DejaVu Sans Mono"/>
+              </a:defRPr>
+            </a:pPr>
             <a:r>
               <a:t>    ['resource/' + package_name]), ('share/' + package_name, ['package.xml'])],</a:t>
             </a:r>
-            <a:br/>
+          </a:p>
+          <a:p>
+            <a:pPr algn="l">
+              <a:spcAft>
+                <a:spcPts val="0"/>
+              </a:spcAft>
+              <a:defRPr sz="1400" b="0">
+                <a:solidFill>
+                  <a:srgbClr val="FFFFFF"/>
+                </a:solidFill>
+                <a:latin typeface="DejaVu Sans Mono"/>
+              </a:defRPr>
+            </a:pPr>
             <a:r>
               <a:t>    install_requires=['setuptools'], zip_safe=True, maintainer='AGV student',</a:t>
             </a:r>
-            <a:br/>
+          </a:p>
+          <a:p>
+            <a:pPr algn="l">
+              <a:spcAft>
+                <a:spcPts val="0"/>
+              </a:spcAft>
+              <a:defRPr sz="1400" b="0">
+                <a:solidFill>
+                  <a:srgbClr val="FFFFFF"/>
+                </a:solidFill>
+                <a:latin typeface="DejaVu Sans Mono"/>
+              </a:defRPr>
+            </a:pPr>
             <a:r>
               <a:t>    maintainer_email='student@example.com', license='Apache-2.0',</a:t>
             </a:r>
-            <a:br/>
+          </a:p>
+          <a:p>
+            <a:pPr algn="l">
+              <a:spcAft>
+                <a:spcPts val="0"/>
+              </a:spcAft>
+              <a:defRPr sz="1400" b="0">
+                <a:solidFill>
+                  <a:srgbClr val="FFFFFF"/>
+                </a:solidFill>
+                <a:latin typeface="DejaVu Sans Mono"/>
+              </a:defRPr>
+            </a:pPr>
             <a:r>
               <a:t>    entry_points={'console_scripts': ['yolo_node = agv_vision.yolo_node:main']})</a:t>
             </a:r>
@@ -45812,7 +48291,7 @@
               </a:defRPr>
             </a:pPr>
             <a:r>
-              <a:t>현재 단계 실행 1/2    |    현재 폴더 ~/ros2_curri/my_agv_ws    |    현재 터미널</a:t>
+              <a:t>현재 단계 실행 1/2    |    현재 폴더 ~/ros2_curri/my_agv_ws    |    터미널 1</a:t>
             </a:r>
           </a:p>
         </p:txBody>
@@ -45825,25 +48304,25 @@
         </p:nvSpPr>
         <p:spPr>
           <a:xfrm>
-            <a:off x="676656" y="1764792"/>
-            <a:ext cx="1828800" cy="347472"/>
-          </a:xfrm>
-          <a:prstGeom prst="rect">
-            <a:avLst/>
-          </a:prstGeom>
-          <a:noFill/>
-        </p:spPr>
-        <p:txBody>
-          <a:bodyPr wrap="square" lIns="73152" rIns="73152" tIns="36576" bIns="36576">
-            <a:spAutoFit/>
-          </a:bodyPr>
-          <a:lstStyle/>
-          <a:p>
-            <a:pPr algn="l">
-              <a:spcAft>
-                <a:spcPts val="0"/>
-              </a:spcAft>
-              <a:defRPr sz="1800" b="1">
+            <a:off x="676656" y="1719072"/>
+            <a:ext cx="1691640" cy="274320"/>
+          </a:xfrm>
+          <a:prstGeom prst="rect">
+            <a:avLst/>
+          </a:prstGeom>
+          <a:noFill/>
+        </p:spPr>
+        <p:txBody>
+          <a:bodyPr wrap="square" lIns="73152" rIns="73152" tIns="36576" bIns="36576">
+            <a:spAutoFit/>
+          </a:bodyPr>
+          <a:lstStyle/>
+          <a:p>
+            <a:pPr algn="l">
+              <a:spcAft>
+                <a:spcPts val="0"/>
+              </a:spcAft>
+              <a:defRPr sz="1700" b="1">
                 <a:solidFill>
                   <a:srgbClr val="225B9B"/>
                 </a:solidFill>
@@ -45851,7 +48330,7 @@
               </a:defRPr>
             </a:pPr>
             <a:r>
-              <a:t>왜 하는가</a:t>
+              <a:t>명령의 목적</a:t>
             </a:r>
           </a:p>
         </p:txBody>
@@ -45864,7 +48343,7 @@
         </p:nvSpPr>
         <p:spPr>
           <a:xfrm>
-            <a:off x="676656" y="2103120"/>
+            <a:off x="676656" y="2002536"/>
             <a:ext cx="10789920" cy="512064"/>
           </a:xfrm>
           <a:prstGeom prst="rect">
@@ -45882,7 +48361,7 @@
               <a:spcAft>
                 <a:spcPts val="0"/>
               </a:spcAft>
-              <a:defRPr sz="2000" b="0">
+              <a:defRPr sz="1800" b="0">
                 <a:solidFill>
                   <a:srgbClr val="122C4E"/>
                 </a:solidFill>
@@ -45897,14 +48376,53 @@
       </p:sp>
       <p:sp>
         <p:nvSpPr>
-          <p:cNvPr id="9" name="Rounded Rectangle 8"/>
+          <p:cNvPr id="9" name="TextBox 8"/>
+          <p:cNvSpPr txBox="1"/>
+          <p:nvPr/>
+        </p:nvSpPr>
+        <p:spPr>
+          <a:xfrm>
+            <a:off x="676656" y="2816352"/>
+            <a:ext cx="10835640" cy="256032"/>
+          </a:xfrm>
+          <a:prstGeom prst="rect">
+            <a:avLst/>
+          </a:prstGeom>
+          <a:noFill/>
+        </p:spPr>
+        <p:txBody>
+          <a:bodyPr wrap="square" lIns="73152" rIns="73152" tIns="36576" bIns="36576">
+            <a:spAutoFit/>
+          </a:bodyPr>
+          <a:lstStyle/>
+          <a:p>
+            <a:pPr algn="ctr">
+              <a:spcAft>
+                <a:spcPts val="0"/>
+              </a:spcAft>
+              <a:defRPr sz="1600" b="1">
+                <a:solidFill>
+                  <a:srgbClr val="225B9B"/>
+                </a:solidFill>
+                <a:latin typeface="Noto Sans CJK KR"/>
+              </a:defRPr>
+            </a:pPr>
+            <a:r>
+              <a:t>터미널 1 — 아래 검은 블록은 명령만 복사합니다.</a:t>
+            </a:r>
+          </a:p>
+        </p:txBody>
+      </p:sp>
+      <p:sp>
+        <p:nvSpPr>
+          <p:cNvPr id="10" name="Rounded Rectangle 9"/>
           <p:cNvSpPr/>
           <p:nvPr/>
         </p:nvSpPr>
         <p:spPr>
           <a:xfrm>
-            <a:off x="676656" y="2871216"/>
-            <a:ext cx="10835640" cy="2331720"/>
+            <a:off x="676656" y="3154680"/>
+            <a:ext cx="10835640" cy="1938528"/>
           </a:xfrm>
           <a:prstGeom prst="roundRect">
             <a:avLst/>
@@ -45933,7 +48451,7 @@
           </a:fontRef>
         </p:style>
         <p:txBody>
-          <a:bodyPr rtlCol="0" anchor="ctr" wrap="square" lIns="73152" rIns="73152" tIns="36576" bIns="36576"/>
+          <a:bodyPr rtlCol="0" anchor="ctr" wrap="square" lIns="109728" rIns="109728" tIns="73152" bIns="73152"/>
           <a:lstStyle/>
           <a:p>
             <a:pPr algn="l">
@@ -45950,15 +48468,51 @@
             <a:r>
               <a:t>cd ~/ros2_curri/my_agv_ws</a:t>
             </a:r>
-            <a:br/>
+          </a:p>
+          <a:p>
+            <a:pPr algn="l">
+              <a:spcAft>
+                <a:spcPts val="0"/>
+              </a:spcAft>
+              <a:defRPr sz="1600" b="0">
+                <a:solidFill>
+                  <a:srgbClr val="FFFFFF"/>
+                </a:solidFill>
+                <a:latin typeface="DejaVu Sans Mono"/>
+              </a:defRPr>
+            </a:pPr>
             <a:r>
               <a:t>colcon build --symlink-install --packages-select agv_interfaces agv_vision</a:t>
             </a:r>
-            <a:br/>
+          </a:p>
+          <a:p>
+            <a:pPr algn="l">
+              <a:spcAft>
+                <a:spcPts val="0"/>
+              </a:spcAft>
+              <a:defRPr sz="1600" b="0">
+                <a:solidFill>
+                  <a:srgbClr val="FFFFFF"/>
+                </a:solidFill>
+                <a:latin typeface="DejaVu Sans Mono"/>
+              </a:defRPr>
+            </a:pPr>
             <a:r>
               <a:t>source install/setup.bash</a:t>
             </a:r>
-            <a:br/>
+          </a:p>
+          <a:p>
+            <a:pPr algn="l">
+              <a:spcAft>
+                <a:spcPts val="0"/>
+              </a:spcAft>
+              <a:defRPr sz="1600" b="0">
+                <a:solidFill>
+                  <a:srgbClr val="FFFFFF"/>
+                </a:solidFill>
+                <a:latin typeface="DejaVu Sans Mono"/>
+              </a:defRPr>
+            </a:pPr>
             <a:r>
               <a:t>ros2 interface show agv_interfaces/msg/Detection</a:t>
             </a:r>
@@ -45967,31 +48521,31 @@
       </p:sp>
       <p:sp>
         <p:nvSpPr>
-          <p:cNvPr id="10" name="TextBox 9"/>
-          <p:cNvSpPr txBox="1"/>
-          <p:nvPr/>
-        </p:nvSpPr>
-        <p:spPr>
-          <a:xfrm>
-            <a:off x="768096" y="5468112"/>
-            <a:ext cx="1143000" cy="256032"/>
-          </a:xfrm>
-          <a:prstGeom prst="rect">
-            <a:avLst/>
-          </a:prstGeom>
-          <a:noFill/>
-        </p:spPr>
-        <p:txBody>
-          <a:bodyPr wrap="square" lIns="73152" rIns="73152" tIns="36576" bIns="36576">
-            <a:spAutoFit/>
-          </a:bodyPr>
-          <a:lstStyle/>
-          <a:p>
-            <a:pPr algn="l">
-              <a:spcAft>
-                <a:spcPts val="0"/>
-              </a:spcAft>
-              <a:defRPr sz="1800" b="1">
+          <p:cNvPr id="11" name="TextBox 10"/>
+          <p:cNvSpPr txBox="1"/>
+          <p:nvPr/>
+        </p:nvSpPr>
+        <p:spPr>
+          <a:xfrm>
+            <a:off x="768096" y="5276088"/>
+            <a:ext cx="10561320" cy="384048"/>
+          </a:xfrm>
+          <a:prstGeom prst="rect">
+            <a:avLst/>
+          </a:prstGeom>
+          <a:noFill/>
+        </p:spPr>
+        <p:txBody>
+          <a:bodyPr wrap="square" lIns="73152" rIns="73152" tIns="36576" bIns="36576">
+            <a:spAutoFit/>
+          </a:bodyPr>
+          <a:lstStyle/>
+          <a:p>
+            <a:pPr algn="ctr">
+              <a:spcAft>
+                <a:spcPts val="0"/>
+              </a:spcAft>
+              <a:defRPr sz="1500" b="1">
                 <a:solidFill>
                   <a:srgbClr val="2A8B5A"/>
                 </a:solidFill>
@@ -45999,38 +48553,38 @@
               </a:defRPr>
             </a:pPr>
             <a:r>
-              <a:t>확인</a:t>
-            </a:r>
-          </a:p>
-        </p:txBody>
-      </p:sp>
-      <p:sp>
-        <p:nvSpPr>
-          <p:cNvPr id="11" name="TextBox 10"/>
-          <p:cNvSpPr txBox="1"/>
-          <p:nvPr/>
-        </p:nvSpPr>
-        <p:spPr>
-          <a:xfrm>
-            <a:off x="768096" y="5742432"/>
-            <a:ext cx="10561320" cy="347472"/>
-          </a:xfrm>
-          <a:prstGeom prst="rect">
-            <a:avLst/>
-          </a:prstGeom>
-          <a:noFill/>
-        </p:spPr>
-        <p:txBody>
-          <a:bodyPr wrap="square" lIns="73152" rIns="73152" tIns="36576" bIns="36576">
-            <a:spAutoFit/>
-          </a:bodyPr>
-          <a:lstStyle/>
-          <a:p>
-            <a:pPr algn="l">
-              <a:spcAft>
-                <a:spcPts val="0"/>
-              </a:spcAft>
-              <a:defRPr sz="1800" b="0">
+              <a:t>터미널 1 역할: 터미널 1에서 이 명령만 그대로 복사해 실행합니다.</a:t>
+            </a:r>
+          </a:p>
+        </p:txBody>
+      </p:sp>
+      <p:sp>
+        <p:nvSpPr>
+          <p:cNvPr id="12" name="TextBox 11"/>
+          <p:cNvSpPr txBox="1"/>
+          <p:nvPr/>
+        </p:nvSpPr>
+        <p:spPr>
+          <a:xfrm>
+            <a:off x="768096" y="5916168"/>
+            <a:ext cx="10561320" cy="292608"/>
+          </a:xfrm>
+          <a:prstGeom prst="rect">
+            <a:avLst/>
+          </a:prstGeom>
+          <a:noFill/>
+        </p:spPr>
+        <p:txBody>
+          <a:bodyPr wrap="square" lIns="73152" rIns="73152" tIns="36576" bIns="36576">
+            <a:spAutoFit/>
+          </a:bodyPr>
+          <a:lstStyle/>
+          <a:p>
+            <a:pPr algn="ctr">
+              <a:spcAft>
+                <a:spcPts val="0"/>
+              </a:spcAft>
+              <a:defRPr sz="1500" b="1">
                 <a:solidFill>
                   <a:srgbClr val="122C4E"/>
                 </a:solidFill>
@@ -46038,7 +48592,7 @@
               </a:defRPr>
             </a:pPr>
             <a:r>
-              <a:t>출력에서 topic·frame·파일 이름 또는 성공 메시지를 찾고, 맞지 않으면 다음 파일로 가지 않습니다.</a:t>
+              <a:t>확인: 출력에서 topic·frame·파일 이름 또는 성공 메시지를 찾고, 맞지 않으면 다음 파일로 가지 않습니다.</a:t>
             </a:r>
           </a:p>
         </p:txBody>
@@ -46270,7 +48824,7 @@
               </a:defRPr>
             </a:pPr>
             <a:r>
-              <a:t>현재 단계 실행 2/2    |    현재 폴더 ~/ros2_curri/my_agv_ws    |    현재 터미널</a:t>
+              <a:t>현재 단계 실행 2/2    |    현재 폴더 ~/ros2_curri/my_agv_ws    |    터미널 1</a:t>
             </a:r>
           </a:p>
         </p:txBody>
@@ -46283,25 +48837,25 @@
         </p:nvSpPr>
         <p:spPr>
           <a:xfrm>
-            <a:off x="676656" y="1764792"/>
-            <a:ext cx="1828800" cy="347472"/>
-          </a:xfrm>
-          <a:prstGeom prst="rect">
-            <a:avLst/>
-          </a:prstGeom>
-          <a:noFill/>
-        </p:spPr>
-        <p:txBody>
-          <a:bodyPr wrap="square" lIns="73152" rIns="73152" tIns="36576" bIns="36576">
-            <a:spAutoFit/>
-          </a:bodyPr>
-          <a:lstStyle/>
-          <a:p>
-            <a:pPr algn="l">
-              <a:spcAft>
-                <a:spcPts val="0"/>
-              </a:spcAft>
-              <a:defRPr sz="1800" b="1">
+            <a:off x="676656" y="1719072"/>
+            <a:ext cx="1691640" cy="274320"/>
+          </a:xfrm>
+          <a:prstGeom prst="rect">
+            <a:avLst/>
+          </a:prstGeom>
+          <a:noFill/>
+        </p:spPr>
+        <p:txBody>
+          <a:bodyPr wrap="square" lIns="73152" rIns="73152" tIns="36576" bIns="36576">
+            <a:spAutoFit/>
+          </a:bodyPr>
+          <a:lstStyle/>
+          <a:p>
+            <a:pPr algn="l">
+              <a:spcAft>
+                <a:spcPts val="0"/>
+              </a:spcAft>
+              <a:defRPr sz="1700" b="1">
                 <a:solidFill>
                   <a:srgbClr val="225B9B"/>
                 </a:solidFill>
@@ -46309,7 +48863,7 @@
               </a:defRPr>
             </a:pPr>
             <a:r>
-              <a:t>왜 하는가</a:t>
+              <a:t>명령의 목적</a:t>
             </a:r>
           </a:p>
         </p:txBody>
@@ -46322,7 +48876,7 @@
         </p:nvSpPr>
         <p:spPr>
           <a:xfrm>
-            <a:off x="676656" y="2103120"/>
+            <a:off x="676656" y="2002536"/>
             <a:ext cx="10789920" cy="512064"/>
           </a:xfrm>
           <a:prstGeom prst="rect">
@@ -46340,7 +48894,7 @@
               <a:spcAft>
                 <a:spcPts val="0"/>
               </a:spcAft>
-              <a:defRPr sz="2000" b="0">
+              <a:defRPr sz="1800" b="0">
                 <a:solidFill>
                   <a:srgbClr val="122C4E"/>
                 </a:solidFill>
@@ -46355,14 +48909,53 @@
       </p:sp>
       <p:sp>
         <p:nvSpPr>
-          <p:cNvPr id="9" name="Rounded Rectangle 8"/>
+          <p:cNvPr id="9" name="TextBox 8"/>
+          <p:cNvSpPr txBox="1"/>
+          <p:nvPr/>
+        </p:nvSpPr>
+        <p:spPr>
+          <a:xfrm>
+            <a:off x="676656" y="2816352"/>
+            <a:ext cx="10835640" cy="256032"/>
+          </a:xfrm>
+          <a:prstGeom prst="rect">
+            <a:avLst/>
+          </a:prstGeom>
+          <a:noFill/>
+        </p:spPr>
+        <p:txBody>
+          <a:bodyPr wrap="square" lIns="73152" rIns="73152" tIns="36576" bIns="36576">
+            <a:spAutoFit/>
+          </a:bodyPr>
+          <a:lstStyle/>
+          <a:p>
+            <a:pPr algn="ctr">
+              <a:spcAft>
+                <a:spcPts val="0"/>
+              </a:spcAft>
+              <a:defRPr sz="1600" b="1">
+                <a:solidFill>
+                  <a:srgbClr val="225B9B"/>
+                </a:solidFill>
+                <a:latin typeface="Noto Sans CJK KR"/>
+              </a:defRPr>
+            </a:pPr>
+            <a:r>
+              <a:t>터미널 1 — 아래 검은 블록은 명령만 복사합니다.</a:t>
+            </a:r>
+          </a:p>
+        </p:txBody>
+      </p:sp>
+      <p:sp>
+        <p:nvSpPr>
+          <p:cNvPr id="10" name="Rounded Rectangle 9"/>
           <p:cNvSpPr/>
           <p:nvPr/>
         </p:nvSpPr>
         <p:spPr>
           <a:xfrm>
-            <a:off x="676656" y="2871216"/>
-            <a:ext cx="10835640" cy="2331720"/>
+            <a:off x="676656" y="3154680"/>
+            <a:ext cx="10835640" cy="1938528"/>
           </a:xfrm>
           <a:prstGeom prst="roundRect">
             <a:avLst/>
@@ -46391,7 +48984,7 @@
           </a:fontRef>
         </p:style>
         <p:txBody>
-          <a:bodyPr rtlCol="0" anchor="ctr" wrap="square" lIns="73152" rIns="73152" tIns="36576" bIns="36576"/>
+          <a:bodyPr rtlCol="0" anchor="ctr" wrap="square" lIns="109728" rIns="109728" tIns="73152" bIns="73152"/>
           <a:lstStyle/>
           <a:p>
             <a:pPr algn="l">
@@ -46408,44 +49001,52 @@
             <a:r>
               <a:t>ros2 run agv_vision yolo_node --ros-args \</a:t>
             </a:r>
-            <a:br/>
+          </a:p>
+          <a:p>
+            <a:pPr algn="l">
+              <a:spcAft>
+                <a:spcPts val="0"/>
+              </a:spcAft>
+              <a:defRPr sz="1600" b="0">
+                <a:solidFill>
+                  <a:srgbClr val="FFFFFF"/>
+                </a:solidFill>
+                <a:latin typeface="DejaVu Sans Mono"/>
+              </a:defRPr>
+            </a:pPr>
             <a:r>
               <a:t>  -p enable_yolo:=false</a:t>
             </a:r>
-            <a:br/>
-            <a:r>
-              <a:t># ultralytics와 모델 파일 준비 뒤에만 true로 변경</a:t>
-            </a:r>
-          </a:p>
-        </p:txBody>
-      </p:sp>
-      <p:sp>
-        <p:nvSpPr>
-          <p:cNvPr id="10" name="TextBox 9"/>
-          <p:cNvSpPr txBox="1"/>
-          <p:nvPr/>
-        </p:nvSpPr>
-        <p:spPr>
-          <a:xfrm>
-            <a:off x="768096" y="5468112"/>
-            <a:ext cx="1143000" cy="256032"/>
-          </a:xfrm>
-          <a:prstGeom prst="rect">
-            <a:avLst/>
-          </a:prstGeom>
-          <a:noFill/>
-        </p:spPr>
-        <p:txBody>
-          <a:bodyPr wrap="square" lIns="73152" rIns="73152" tIns="36576" bIns="36576">
-            <a:spAutoFit/>
-          </a:bodyPr>
-          <a:lstStyle/>
-          <a:p>
-            <a:pPr algn="l">
-              <a:spcAft>
-                <a:spcPts val="0"/>
-              </a:spcAft>
-              <a:defRPr sz="1800" b="1">
+          </a:p>
+        </p:txBody>
+      </p:sp>
+      <p:sp>
+        <p:nvSpPr>
+          <p:cNvPr id="11" name="TextBox 10"/>
+          <p:cNvSpPr txBox="1"/>
+          <p:nvPr/>
+        </p:nvSpPr>
+        <p:spPr>
+          <a:xfrm>
+            <a:off x="768096" y="5276088"/>
+            <a:ext cx="10561320" cy="384048"/>
+          </a:xfrm>
+          <a:prstGeom prst="rect">
+            <a:avLst/>
+          </a:prstGeom>
+          <a:noFill/>
+        </p:spPr>
+        <p:txBody>
+          <a:bodyPr wrap="square" lIns="73152" rIns="73152" tIns="36576" bIns="36576">
+            <a:spAutoFit/>
+          </a:bodyPr>
+          <a:lstStyle/>
+          <a:p>
+            <a:pPr algn="ctr">
+              <a:spcAft>
+                <a:spcPts val="0"/>
+              </a:spcAft>
+              <a:defRPr sz="1500" b="1">
                 <a:solidFill>
                   <a:srgbClr val="2A8B5A"/>
                 </a:solidFill>
@@ -46453,38 +49054,38 @@
               </a:defRPr>
             </a:pPr>
             <a:r>
-              <a:t>확인</a:t>
-            </a:r>
-          </a:p>
-        </p:txBody>
-      </p:sp>
-      <p:sp>
-        <p:nvSpPr>
-          <p:cNvPr id="11" name="TextBox 10"/>
-          <p:cNvSpPr txBox="1"/>
-          <p:nvPr/>
-        </p:nvSpPr>
-        <p:spPr>
-          <a:xfrm>
-            <a:off x="768096" y="5742432"/>
-            <a:ext cx="10561320" cy="347472"/>
-          </a:xfrm>
-          <a:prstGeom prst="rect">
-            <a:avLst/>
-          </a:prstGeom>
-          <a:noFill/>
-        </p:spPr>
-        <p:txBody>
-          <a:bodyPr wrap="square" lIns="73152" rIns="73152" tIns="36576" bIns="36576">
-            <a:spAutoFit/>
-          </a:bodyPr>
-          <a:lstStyle/>
-          <a:p>
-            <a:pPr algn="l">
-              <a:spcAft>
-                <a:spcPts val="0"/>
-              </a:spcAft>
-              <a:defRPr sz="1800" b="0">
+              <a:t>터미널 1 역할: 이 node를 실행합니다. 출력이 계속 나오는 동안 Ctrl+C로 종료하지 않습니다.</a:t>
+            </a:r>
+          </a:p>
+        </p:txBody>
+      </p:sp>
+      <p:sp>
+        <p:nvSpPr>
+          <p:cNvPr id="12" name="TextBox 11"/>
+          <p:cNvSpPr txBox="1"/>
+          <p:nvPr/>
+        </p:nvSpPr>
+        <p:spPr>
+          <a:xfrm>
+            <a:off x="768096" y="5916168"/>
+            <a:ext cx="10561320" cy="292608"/>
+          </a:xfrm>
+          <a:prstGeom prst="rect">
+            <a:avLst/>
+          </a:prstGeom>
+          <a:noFill/>
+        </p:spPr>
+        <p:txBody>
+          <a:bodyPr wrap="square" lIns="73152" rIns="73152" tIns="36576" bIns="36576">
+            <a:spAutoFit/>
+          </a:bodyPr>
+          <a:lstStyle/>
+          <a:p>
+            <a:pPr algn="ctr">
+              <a:spcAft>
+                <a:spcPts val="0"/>
+              </a:spcAft>
+              <a:defRPr sz="1500" b="1">
                 <a:solidFill>
                   <a:srgbClr val="122C4E"/>
                 </a:solidFill>
@@ -46492,7 +49093,7 @@
               </a:defRPr>
             </a:pPr>
             <a:r>
-              <a:t>출력에서 topic·frame·파일 이름 또는 성공 메시지를 찾고, 맞지 않으면 다음 파일로 가지 않습니다.</a:t>
+              <a:t>확인: 출력에서 topic·frame·파일 이름 또는 성공 메시지를 찾고, 맞지 않으면 다음 파일로 가지 않습니다.</a:t>
             </a:r>
           </a:p>
         </p:txBody>
@@ -46724,21 +49325,138 @@
               </a:defRPr>
             </a:pPr>
             <a:r>
-              <a:t>현재 단계 실행    |    현재 폴더 ~/ros2_curri/my_agv_ws    |    현재 터미널</a:t>
-            </a:r>
-          </a:p>
-        </p:txBody>
-      </p:sp>
-      <p:sp>
-        <p:nvSpPr>
-          <p:cNvPr id="7" name="Rounded Rectangle 6"/>
+              <a:t>현재 단계 실행    |    현재 폴더 ~/ros2_curri/my_agv_ws    |    터미널 1</a:t>
+            </a:r>
+          </a:p>
+        </p:txBody>
+      </p:sp>
+      <p:sp>
+        <p:nvSpPr>
+          <p:cNvPr id="7" name="TextBox 6"/>
+          <p:cNvSpPr txBox="1"/>
+          <p:nvPr/>
+        </p:nvSpPr>
+        <p:spPr>
+          <a:xfrm>
+            <a:off x="676656" y="1719072"/>
+            <a:ext cx="1691640" cy="274320"/>
+          </a:xfrm>
+          <a:prstGeom prst="rect">
+            <a:avLst/>
+          </a:prstGeom>
+          <a:noFill/>
+        </p:spPr>
+        <p:txBody>
+          <a:bodyPr wrap="square" lIns="73152" rIns="73152" tIns="36576" bIns="36576">
+            <a:spAutoFit/>
+          </a:bodyPr>
+          <a:lstStyle/>
+          <a:p>
+            <a:pPr algn="l">
+              <a:spcAft>
+                <a:spcPts val="0"/>
+              </a:spcAft>
+              <a:defRPr sz="1700" b="1">
+                <a:solidFill>
+                  <a:srgbClr val="225B9B"/>
+                </a:solidFill>
+                <a:latin typeface="Noto Sans CJK KR"/>
+              </a:defRPr>
+            </a:pPr>
+            <a:r>
+              <a:t>명령의 목적</a:t>
+            </a:r>
+          </a:p>
+        </p:txBody>
+      </p:sp>
+      <p:sp>
+        <p:nvSpPr>
+          <p:cNvPr id="8" name="TextBox 7"/>
+          <p:cNvSpPr txBox="1"/>
+          <p:nvPr/>
+        </p:nvSpPr>
+        <p:spPr>
+          <a:xfrm>
+            <a:off x="676656" y="2002536"/>
+            <a:ext cx="10789920" cy="512064"/>
+          </a:xfrm>
+          <a:prstGeom prst="rect">
+            <a:avLst/>
+          </a:prstGeom>
+          <a:noFill/>
+        </p:spPr>
+        <p:txBody>
+          <a:bodyPr wrap="square" lIns="73152" rIns="73152" tIns="36576" bIns="36576">
+            <a:spAutoFit/>
+          </a:bodyPr>
+          <a:lstStyle/>
+          <a:p>
+            <a:pPr algn="l">
+              <a:spcAft>
+                <a:spcPts val="0"/>
+              </a:spcAft>
+              <a:defRPr sz="1800" b="0">
+                <a:solidFill>
+                  <a:srgbClr val="122C4E"/>
+                </a:solidFill>
+                <a:latin typeface="Noto Sans CJK KR"/>
+              </a:defRPr>
+            </a:pPr>
+            <a:r>
+              <a:t>명령 순서를 바꾸지 않습니다. build가 끝난 뒤 source하고, 마지막 명령으로 node·Gazebo·RViz를 실행합니다.</a:t>
+            </a:r>
+          </a:p>
+        </p:txBody>
+      </p:sp>
+      <p:sp>
+        <p:nvSpPr>
+          <p:cNvPr id="9" name="TextBox 8"/>
+          <p:cNvSpPr txBox="1"/>
+          <p:nvPr/>
+        </p:nvSpPr>
+        <p:spPr>
+          <a:xfrm>
+            <a:off x="676656" y="2816352"/>
+            <a:ext cx="10835640" cy="256032"/>
+          </a:xfrm>
+          <a:prstGeom prst="rect">
+            <a:avLst/>
+          </a:prstGeom>
+          <a:noFill/>
+        </p:spPr>
+        <p:txBody>
+          <a:bodyPr wrap="square" lIns="73152" rIns="73152" tIns="36576" bIns="36576">
+            <a:spAutoFit/>
+          </a:bodyPr>
+          <a:lstStyle/>
+          <a:p>
+            <a:pPr algn="ctr">
+              <a:spcAft>
+                <a:spcPts val="0"/>
+              </a:spcAft>
+              <a:defRPr sz="1600" b="1">
+                <a:solidFill>
+                  <a:srgbClr val="225B9B"/>
+                </a:solidFill>
+                <a:latin typeface="Noto Sans CJK KR"/>
+              </a:defRPr>
+            </a:pPr>
+            <a:r>
+              <a:t>터미널 1 — 아래 검은 블록은 명령만 복사합니다.</a:t>
+            </a:r>
+          </a:p>
+        </p:txBody>
+      </p:sp>
+      <p:sp>
+        <p:nvSpPr>
+          <p:cNvPr id="10" name="Rounded Rectangle 9"/>
           <p:cNvSpPr/>
           <p:nvPr/>
         </p:nvSpPr>
         <p:spPr>
           <a:xfrm>
-            <a:off x="658368" y="1700784"/>
-            <a:ext cx="10972800" cy="3182112"/>
+            <a:off x="676656" y="3154680"/>
+            <a:ext cx="10835640" cy="1938528"/>
           </a:xfrm>
           <a:prstGeom prst="roundRect">
             <a:avLst/>
@@ -46767,7 +49485,7 @@
           </a:fontRef>
         </p:style>
         <p:txBody>
-          <a:bodyPr rtlCol="0" anchor="ctr" wrap="square" lIns="73152" rIns="73152" tIns="36576" bIns="36576"/>
+          <a:bodyPr rtlCol="0" anchor="ctr" wrap="square" lIns="109728" rIns="109728" tIns="73152" bIns="73152"/>
           <a:lstStyle/>
           <a:p>
             <a:pPr algn="l">
@@ -46784,7 +49502,19 @@
             <a:r>
               <a:t>source ~/ros2_curri/my_agv_ws/install/setup.bash</a:t>
             </a:r>
-            <a:br/>
+          </a:p>
+          <a:p>
+            <a:pPr algn="l">
+              <a:spcAft>
+                <a:spcPts val="0"/>
+              </a:spcAft>
+              <a:defRPr sz="1600" b="0">
+                <a:solidFill>
+                  <a:srgbClr val="FFFFFF"/>
+                </a:solidFill>
+                <a:latin typeface="DejaVu Sans Mono"/>
+              </a:defRPr>
+            </a:pPr>
             <a:r>
               <a:t>ros2 run agv_vision yolo_node --ros-args -p enable_yolo:=false</a:t>
             </a:r>
@@ -46793,31 +49523,31 @@
       </p:sp>
       <p:sp>
         <p:nvSpPr>
-          <p:cNvPr id="8" name="TextBox 7"/>
-          <p:cNvSpPr txBox="1"/>
-          <p:nvPr/>
-        </p:nvSpPr>
-        <p:spPr>
-          <a:xfrm>
-            <a:off x="786384" y="5239512"/>
-            <a:ext cx="1261872" cy="237744"/>
-          </a:xfrm>
-          <a:prstGeom prst="rect">
-            <a:avLst/>
-          </a:prstGeom>
-          <a:noFill/>
-        </p:spPr>
-        <p:txBody>
-          <a:bodyPr wrap="square" lIns="73152" rIns="73152" tIns="36576" bIns="36576">
-            <a:spAutoFit/>
-          </a:bodyPr>
-          <a:lstStyle/>
-          <a:p>
-            <a:pPr algn="l">
-              <a:spcAft>
-                <a:spcPts val="0"/>
-              </a:spcAft>
-              <a:defRPr sz="1800" b="1">
+          <p:cNvPr id="11" name="TextBox 10"/>
+          <p:cNvSpPr txBox="1"/>
+          <p:nvPr/>
+        </p:nvSpPr>
+        <p:spPr>
+          <a:xfrm>
+            <a:off x="768096" y="5276088"/>
+            <a:ext cx="10561320" cy="384048"/>
+          </a:xfrm>
+          <a:prstGeom prst="rect">
+            <a:avLst/>
+          </a:prstGeom>
+          <a:noFill/>
+        </p:spPr>
+        <p:txBody>
+          <a:bodyPr wrap="square" lIns="73152" rIns="73152" tIns="36576" bIns="36576">
+            <a:spAutoFit/>
+          </a:bodyPr>
+          <a:lstStyle/>
+          <a:p>
+            <a:pPr algn="ctr">
+              <a:spcAft>
+                <a:spcPts val="0"/>
+              </a:spcAft>
+              <a:defRPr sz="1500" b="1">
                 <a:solidFill>
                   <a:srgbClr val="2A8B5A"/>
                 </a:solidFill>
@@ -46825,38 +49555,38 @@
               </a:defRPr>
             </a:pPr>
             <a:r>
-              <a:t>확인 기준</a:t>
-            </a:r>
-          </a:p>
-        </p:txBody>
-      </p:sp>
-      <p:sp>
-        <p:nvSpPr>
-          <p:cNvPr id="9" name="TextBox 8"/>
-          <p:cNvSpPr txBox="1"/>
-          <p:nvPr/>
-        </p:nvSpPr>
-        <p:spPr>
-          <a:xfrm>
-            <a:off x="786384" y="5532120"/>
-            <a:ext cx="10469880" cy="420624"/>
-          </a:xfrm>
-          <a:prstGeom prst="rect">
-            <a:avLst/>
-          </a:prstGeom>
-          <a:noFill/>
-        </p:spPr>
-        <p:txBody>
-          <a:bodyPr wrap="square" lIns="73152" rIns="73152" tIns="36576" bIns="36576">
-            <a:spAutoFit/>
-          </a:bodyPr>
-          <a:lstStyle/>
-          <a:p>
-            <a:pPr algn="l">
-              <a:spcAft>
-                <a:spcPts val="0"/>
-              </a:spcAft>
-              <a:defRPr sz="1800" b="0">
+              <a:t>터미널 1 역할: 이 node를 실행합니다. 출력이 계속 나오는 동안 Ctrl+C로 종료하지 않습니다.</a:t>
+            </a:r>
+          </a:p>
+        </p:txBody>
+      </p:sp>
+      <p:sp>
+        <p:nvSpPr>
+          <p:cNvPr id="12" name="TextBox 11"/>
+          <p:cNvSpPr txBox="1"/>
+          <p:nvPr/>
+        </p:nvSpPr>
+        <p:spPr>
+          <a:xfrm>
+            <a:off x="768096" y="5916168"/>
+            <a:ext cx="10561320" cy="292608"/>
+          </a:xfrm>
+          <a:prstGeom prst="rect">
+            <a:avLst/>
+          </a:prstGeom>
+          <a:noFill/>
+        </p:spPr>
+        <p:txBody>
+          <a:bodyPr wrap="square" lIns="73152" rIns="73152" tIns="36576" bIns="36576">
+            <a:spAutoFit/>
+          </a:bodyPr>
+          <a:lstStyle/>
+          <a:p>
+            <a:pPr algn="ctr">
+              <a:spcAft>
+                <a:spcPts val="0"/>
+              </a:spcAft>
+              <a:defRPr sz="1500" b="1">
                 <a:solidFill>
                   <a:srgbClr val="122C4E"/>
                 </a:solidFill>
@@ -46864,7 +49594,7 @@
               </a:defRPr>
             </a:pPr>
             <a:r>
-              <a:t>/detections message 형식과 YOLO enable_yolo/model_path/threshold parameter를 확인한다.</a:t>
+              <a:t>확인: /detections message 형식과 YOLO enable_yolo/model_path/threshold parameter를 확인한다.</a:t>
             </a:r>
           </a:p>
         </p:txBody>
@@ -46960,7 +49690,7 @@
               </a:defRPr>
             </a:pPr>
             <a:r>
-              <a:t>실제 ROS 2 환경의 파일·패키지·구성 검증 로그</a:t>
+              <a:t>실제 /vision/debug_image: fallback이 ‘target not visible’을 표시해 camera pose·FOV·world 배치를 점검하는 오류 사례</a:t>
             </a:r>
           </a:p>
         </p:txBody>
@@ -47045,7 +49775,7 @@
       </p:sp>
       <p:pic>
         <p:nvPicPr>
-          <p:cNvPr id="6" name="Picture 5" descr="validation_terminal.png"/>
+          <p:cNvPr id="6" name="Picture 5" descr="01_vision_debug_actual.png"/>
           <p:cNvPicPr>
             <a:picLocks noChangeAspect="1"/>
           </p:cNvPicPr>
@@ -47059,8 +49789,8 @@
         </p:blipFill>
         <p:spPr>
           <a:xfrm>
-            <a:off x="1616852" y="1353312"/>
-            <a:ext cx="8955247" cy="4800600"/>
+            <a:off x="2894076" y="1353312"/>
+            <a:ext cx="6400800" cy="4800600"/>
           </a:xfrm>
           <a:prstGeom prst="rect">
             <a:avLst/>
@@ -47101,7 +49831,7 @@
               </a:defRPr>
             </a:pPr>
             <a:r>
-              <a:t>화면에서 확인: ① 명령/설정  ② 정상 출력 또는 화면  ③ 다음 검증 명령으로 재확인</a:t>
+              <a:t>화면에서 확인: 명령·설정과 화면의 topic·frame·결과 이름을 대조합니다.</a:t>
             </a:r>
           </a:p>
         </p:txBody>
@@ -47708,7 +50438,7 @@
               </a:defRPr>
             </a:pPr>
             <a:r>
-              <a:t>객관적 검증 명령으로 완료를 확인한다</a:t>
+              <a:t>정상 결과: 실제 환경에서 확인한 출력</a:t>
             </a:r>
           </a:p>
         </p:txBody>
@@ -47747,7 +50477,7 @@
               </a:defRPr>
             </a:pPr>
             <a:r>
-              <a:t>화면만 보지 말고 topic·frame·파일·parameter를 다시 확인합니다.</a:t>
+              <a:t>실제 ROS 2 환경의 파일·패키지·구성 검증 로그</a:t>
             </a:r>
           </a:p>
         </p:txBody>
@@ -47830,176 +50560,57 @@
           </a:p>
         </p:txBody>
       </p:sp>
-      <p:sp>
-        <p:nvSpPr>
-          <p:cNvPr id="6" name="Rectangle 5"/>
-          <p:cNvSpPr/>
-          <p:nvPr/>
-        </p:nvSpPr>
-        <p:spPr>
-          <a:xfrm>
-            <a:off x="566928" y="1188720"/>
-            <a:ext cx="11064240" cy="347472"/>
-          </a:xfrm>
-          <a:prstGeom prst="rect">
-            <a:avLst/>
-          </a:prstGeom>
-          <a:solidFill>
-            <a:srgbClr val="F4F7FB"/>
-          </a:solidFill>
-          <a:ln>
-            <a:solidFill>
-              <a:srgbClr val="F4F7FB"/>
-            </a:solidFill>
-          </a:ln>
-        </p:spPr>
-        <p:style>
-          <a:lnRef idx="1">
-            <a:schemeClr val="accent1"/>
-          </a:lnRef>
-          <a:fillRef idx="3">
-            <a:schemeClr val="accent1"/>
-          </a:fillRef>
-          <a:effectRef idx="2">
-            <a:schemeClr val="accent1"/>
-          </a:effectRef>
-          <a:fontRef idx="minor">
-            <a:schemeClr val="lt1"/>
-          </a:fontRef>
-        </p:style>
-        <p:txBody>
-          <a:bodyPr rtlCol="0" anchor="ctr" wrap="square" lIns="73152" rIns="73152" tIns="36576" bIns="36576"/>
-          <a:lstStyle/>
-          <a:p>
-            <a:pPr algn="l">
-              <a:spcAft>
-                <a:spcPts val="0"/>
-              </a:spcAft>
-              <a:defRPr sz="1300" b="1">
-                <a:solidFill>
-                  <a:srgbClr val="122C4E"/>
-                </a:solidFill>
-                <a:latin typeface="Noto Sans CJK KR"/>
-              </a:defRPr>
-            </a:pPr>
-            <a:r>
-              <a:t>현재 단계 검증    |    현재 폴더 ~/ros2_curri/my_agv_ws    |    현재 터미널</a:t>
-            </a:r>
-          </a:p>
-        </p:txBody>
-      </p:sp>
-      <p:sp>
-        <p:nvSpPr>
-          <p:cNvPr id="7" name="Rounded Rectangle 6"/>
-          <p:cNvSpPr/>
-          <p:nvPr/>
-        </p:nvSpPr>
-        <p:spPr>
-          <a:xfrm>
-            <a:off x="658368" y="1755648"/>
-            <a:ext cx="10972800" cy="2148840"/>
-          </a:xfrm>
-          <a:prstGeom prst="roundRect">
-            <a:avLst/>
-          </a:prstGeom>
-          <a:solidFill>
-            <a:srgbClr val="1D232D"/>
-          </a:solidFill>
-          <a:ln>
-            <a:solidFill>
-              <a:srgbClr val="1D232D"/>
-            </a:solidFill>
-          </a:ln>
-        </p:spPr>
-        <p:style>
-          <a:lnRef idx="1">
-            <a:schemeClr val="accent1"/>
-          </a:lnRef>
-          <a:fillRef idx="3">
-            <a:schemeClr val="accent1"/>
-          </a:fillRef>
-          <a:effectRef idx="2">
-            <a:schemeClr val="accent1"/>
-          </a:effectRef>
-          <a:fontRef idx="minor">
-            <a:schemeClr val="lt1"/>
-          </a:fontRef>
-        </p:style>
-        <p:txBody>
-          <a:bodyPr rtlCol="0" anchor="ctr" wrap="square" lIns="73152" rIns="73152" tIns="36576" bIns="36576"/>
-          <a:lstStyle/>
-          <a:p>
-            <a:pPr algn="l">
-              <a:spcAft>
-                <a:spcPts val="0"/>
-              </a:spcAft>
-              <a:defRPr sz="1600" b="0">
-                <a:solidFill>
-                  <a:srgbClr val="FFFFFF"/>
-                </a:solidFill>
-                <a:latin typeface="DejaVu Sans Mono"/>
-              </a:defRPr>
-            </a:pPr>
-            <a:r>
-              <a:t>ros2 interface show agv_interfaces/msg/Detection</a:t>
-            </a:r>
-            <a:br/>
-            <a:r>
-              <a:t>ros2 topic info /detections</a:t>
-            </a:r>
-            <a:br/>
-            <a:r>
-              <a:t>ros2 param get /yolo_node confidence_threshold</a:t>
-            </a:r>
-          </a:p>
-        </p:txBody>
-      </p:sp>
-      <p:sp>
-        <p:nvSpPr>
-          <p:cNvPr id="8" name="Rounded Rectangle 7"/>
-          <p:cNvSpPr/>
-          <p:nvPr/>
-        </p:nvSpPr>
-        <p:spPr>
-          <a:xfrm>
-            <a:off x="658368" y="4206240"/>
-            <a:ext cx="10972800" cy="1554480"/>
-          </a:xfrm>
-          <a:prstGeom prst="roundRect">
-            <a:avLst/>
-          </a:prstGeom>
-          <a:solidFill>
-            <a:srgbClr val="F4F7FB"/>
-          </a:solidFill>
-          <a:ln>
-            <a:solidFill>
-              <a:srgbClr val="D1DFD5"/>
-            </a:solidFill>
-          </a:ln>
-        </p:spPr>
-        <p:style>
-          <a:lnRef idx="1">
-            <a:schemeClr val="accent1"/>
-          </a:lnRef>
-          <a:fillRef idx="3">
-            <a:schemeClr val="accent1"/>
-          </a:fillRef>
-          <a:effectRef idx="2">
-            <a:schemeClr val="accent1"/>
-          </a:effectRef>
-          <a:fontRef idx="minor">
-            <a:schemeClr val="lt1"/>
-          </a:fontRef>
-        </p:style>
-        <p:txBody>
-          <a:bodyPr rtlCol="0" anchor="ctr" wrap="square" lIns="73152" rIns="73152" tIns="36576" bIns="36576"/>
-          <a:lstStyle/>
-          <a:p>
-            <a:pPr algn="l">
-              <a:spcAft>
-                <a:spcPts val="0"/>
-              </a:spcAft>
-              <a:defRPr sz="1800" b="1">
+      <p:pic>
+        <p:nvPicPr>
+          <p:cNvPr id="6" name="Picture 5" descr="validation_terminal.png"/>
+          <p:cNvPicPr>
+            <a:picLocks noChangeAspect="1"/>
+          </p:cNvPicPr>
+          <p:nvPr/>
+        </p:nvPicPr>
+        <p:blipFill>
+          <a:blip r:embed="rId2"/>
+          <a:stretch>
+            <a:fillRect/>
+          </a:stretch>
+        </p:blipFill>
+        <p:spPr>
+          <a:xfrm>
+            <a:off x="1616852" y="1353312"/>
+            <a:ext cx="8955247" cy="4800600"/>
+          </a:xfrm>
+          <a:prstGeom prst="rect">
+            <a:avLst/>
+          </a:prstGeom>
+        </p:spPr>
+      </p:pic>
+      <p:sp>
+        <p:nvSpPr>
+          <p:cNvPr id="7" name="TextBox 6"/>
+          <p:cNvSpPr txBox="1"/>
+          <p:nvPr/>
+        </p:nvSpPr>
+        <p:spPr>
+          <a:xfrm>
+            <a:off x="777240" y="6144768"/>
+            <a:ext cx="10607040" cy="310896"/>
+          </a:xfrm>
+          <a:prstGeom prst="rect">
+            <a:avLst/>
+          </a:prstGeom>
+          <a:noFill/>
+        </p:spPr>
+        <p:txBody>
+          <a:bodyPr wrap="square" lIns="73152" rIns="73152" tIns="36576" bIns="36576">
+            <a:spAutoFit/>
+          </a:bodyPr>
+          <a:lstStyle/>
+          <a:p>
+            <a:pPr algn="ctr">
+              <a:spcAft>
+                <a:spcPts val="0"/>
+              </a:spcAft>
+              <a:defRPr sz="1100" b="1">
                 <a:solidFill>
                   <a:srgbClr val="2A8B5A"/>
                 </a:solidFill>
@@ -48007,58 +50618,7 @@
               </a:defRPr>
             </a:pPr>
             <a:r>
-              <a:t>완료 체크</a:t>
-            </a:r>
-            <a:br/>
-            <a:r>
-              <a:t>□ 명령이 오류 없이 실행된다.</a:t>
-            </a:r>
-            <a:br/>
-            <a:r>
-              <a:t>□ 기대한 파일·topic·frame·parameter 이름이 보인다.</a:t>
-            </a:r>
-            <a:br/>
-            <a:r>
-              <a:t>□ 값의 단위와 방향을 한 문장으로 설명할 수 있다.</a:t>
-            </a:r>
-          </a:p>
-        </p:txBody>
-      </p:sp>
-      <p:sp>
-        <p:nvSpPr>
-          <p:cNvPr id="9" name="TextBox 8"/>
-          <p:cNvSpPr txBox="1"/>
-          <p:nvPr/>
-        </p:nvSpPr>
-        <p:spPr>
-          <a:xfrm>
-            <a:off x="731520" y="5989320"/>
-            <a:ext cx="10789920" cy="237744"/>
-          </a:xfrm>
-          <a:prstGeom prst="rect">
-            <a:avLst/>
-          </a:prstGeom>
-          <a:noFill/>
-        </p:spPr>
-        <p:txBody>
-          <a:bodyPr wrap="square" lIns="73152" rIns="73152" tIns="36576" bIns="36576">
-            <a:spAutoFit/>
-          </a:bodyPr>
-          <a:lstStyle/>
-          <a:p>
-            <a:pPr algn="l">
-              <a:spcAft>
-                <a:spcPts val="0"/>
-              </a:spcAft>
-              <a:defRPr sz="1500" b="1">
-                <a:solidFill>
-                  <a:srgbClr val="122C4E"/>
-                </a:solidFill>
-                <a:latin typeface="Noto Sans CJK KR"/>
-              </a:defRPr>
-            </a:pPr>
-            <a:r>
-              <a:t>완료 조건: /detections message 형식과 YOLO enable_yolo/model_path/threshold parameter를 확인한다.</a:t>
+              <a:t>화면에서 확인: ① 명령/설정  ② 정상 출력 또는 화면  ③ 다음 검증 명령으로 재확인</a:t>
             </a:r>
           </a:p>
         </p:txBody>
@@ -48115,7 +50675,7 @@
               </a:defRPr>
             </a:pPr>
             <a:r>
-              <a:t>막히면: 증상 → 우선 확인 → 재검증</a:t>
+              <a:t>객관적 검증 명령으로 완료를 확인한다</a:t>
             </a:r>
           </a:p>
         </p:txBody>
@@ -48154,7 +50714,7 @@
               </a:defRPr>
             </a:pPr>
             <a:r>
-              <a:t>오류 메시지를 숨기지 않고 같은 순서로 점검합니다.</a:t>
+              <a:t>화면만 보지 말고 topic·frame·파일·parameter를 다시 확인합니다.</a:t>
             </a:r>
           </a:p>
         </p:txBody>
@@ -48290,7 +50850,7 @@
               </a:defRPr>
             </a:pPr>
             <a:r>
-              <a:t>현재 단계 오류 대응    |    현재 폴더 ~/ros2_curri/my_agv_ws    |    현재 터미널</a:t>
+              <a:t>현재 단계 검증    |    현재 폴더 ~/ros2_curri/my_agv_ws    |    현재 터미널</a:t>
             </a:r>
           </a:p>
         </p:txBody>
@@ -48303,18 +50863,18 @@
         </p:nvSpPr>
         <p:spPr>
           <a:xfrm>
-            <a:off x="694944" y="1755648"/>
-            <a:ext cx="10972800" cy="1115568"/>
+            <a:off x="658368" y="1755648"/>
+            <a:ext cx="10972800" cy="2148840"/>
           </a:xfrm>
           <a:prstGeom prst="roundRect">
             <a:avLst/>
           </a:prstGeom>
           <a:solidFill>
-            <a:srgbClr val="FFF7F4"/>
+            <a:srgbClr val="1D232D"/>
           </a:solidFill>
           <a:ln>
             <a:solidFill>
-              <a:srgbClr val="EDBEB4"/>
+              <a:srgbClr val="1D232D"/>
             </a:solidFill>
           </a:ln>
         </p:spPr>
@@ -48333,72 +50893,7 @@
           </a:fontRef>
         </p:style>
         <p:txBody>
-          <a:bodyPr rtlCol="0" anchor="ctr"/>
-          <a:lstStyle/>
-          <a:p>
-            <a:pPr algn="ctr"/>
-          </a:p>
-        </p:txBody>
-      </p:sp>
-      <p:sp>
-        <p:nvSpPr>
-          <p:cNvPr id="8" name="TextBox 7"/>
-          <p:cNvSpPr txBox="1"/>
-          <p:nvPr/>
-        </p:nvSpPr>
-        <p:spPr>
-          <a:xfrm>
-            <a:off x="896112" y="1901952"/>
-            <a:ext cx="2926080" cy="274320"/>
-          </a:xfrm>
-          <a:prstGeom prst="rect">
-            <a:avLst/>
-          </a:prstGeom>
-          <a:noFill/>
-        </p:spPr>
-        <p:txBody>
-          <a:bodyPr wrap="square" lIns="73152" rIns="73152" tIns="36576" bIns="36576">
-            <a:spAutoFit/>
-          </a:bodyPr>
-          <a:lstStyle/>
-          <a:p>
-            <a:pPr algn="l">
-              <a:spcAft>
-                <a:spcPts val="0"/>
-              </a:spcAft>
-              <a:defRPr sz="1800" b="1">
-                <a:solidFill>
-                  <a:srgbClr val="BE3B3B"/>
-                </a:solidFill>
-                <a:latin typeface="Noto Sans CJK KR"/>
-              </a:defRPr>
-            </a:pPr>
-            <a:r>
-              <a:t>증상 1: 모델 파일을 못 찾음</a:t>
-            </a:r>
-          </a:p>
-        </p:txBody>
-      </p:sp>
-      <p:sp>
-        <p:nvSpPr>
-          <p:cNvPr id="9" name="TextBox 8"/>
-          <p:cNvSpPr txBox="1"/>
-          <p:nvPr/>
-        </p:nvSpPr>
-        <p:spPr>
-          <a:xfrm>
-            <a:off x="3794760" y="1883664"/>
-            <a:ext cx="7543800" cy="621792"/>
-          </a:xfrm>
-          <a:prstGeom prst="rect">
-            <a:avLst/>
-          </a:prstGeom>
-          <a:noFill/>
-        </p:spPr>
-        <p:txBody>
-          <a:bodyPr wrap="square" lIns="73152" rIns="73152" tIns="36576" bIns="36576">
-            <a:spAutoFit/>
-          </a:bodyPr>
+          <a:bodyPr rtlCol="0" anchor="ctr" wrap="square" lIns="109728" rIns="109728" tIns="73152" bIns="73152"/>
           <a:lstStyle/>
           <a:p>
             <a:pPr algn="l">
@@ -48407,41 +50902,69 @@
               </a:spcAft>
               <a:defRPr sz="1600" b="0">
                 <a:solidFill>
-                  <a:srgbClr val="122C4E"/>
-                </a:solidFill>
-                <a:latin typeface="Noto Sans CJK KR"/>
-              </a:defRPr>
-            </a:pPr>
-            <a:r>
-              <a:t>우선 확인: model_path와 모델 파일 배포 정책을 확인한다.</a:t>
-            </a:r>
-            <a:br/>
-            <a:r>
-              <a:t>수정 후: ros2 interface show agv_interfaces/msg/Detection</a:t>
-            </a:r>
-          </a:p>
-        </p:txBody>
-      </p:sp>
-      <p:sp>
-        <p:nvSpPr>
-          <p:cNvPr id="10" name="Rounded Rectangle 9"/>
+                  <a:srgbClr val="FFFFFF"/>
+                </a:solidFill>
+                <a:latin typeface="DejaVu Sans Mono"/>
+              </a:defRPr>
+            </a:pPr>
+            <a:r>
+              <a:t>ros2 interface show agv_interfaces/msg/Detection</a:t>
+            </a:r>
+          </a:p>
+          <a:p>
+            <a:pPr algn="l">
+              <a:spcAft>
+                <a:spcPts val="0"/>
+              </a:spcAft>
+              <a:defRPr sz="1600" b="0">
+                <a:solidFill>
+                  <a:srgbClr val="FFFFFF"/>
+                </a:solidFill>
+                <a:latin typeface="DejaVu Sans Mono"/>
+              </a:defRPr>
+            </a:pPr>
+            <a:r>
+              <a:t>ros2 topic info /detections</a:t>
+            </a:r>
+          </a:p>
+          <a:p>
+            <a:pPr algn="l">
+              <a:spcAft>
+                <a:spcPts val="0"/>
+              </a:spcAft>
+              <a:defRPr sz="1600" b="0">
+                <a:solidFill>
+                  <a:srgbClr val="FFFFFF"/>
+                </a:solidFill>
+                <a:latin typeface="DejaVu Sans Mono"/>
+              </a:defRPr>
+            </a:pPr>
+            <a:r>
+              <a:t>ros2 param get /yolo_node confidence_threshold</a:t>
+            </a:r>
+          </a:p>
+        </p:txBody>
+      </p:sp>
+      <p:sp>
+        <p:nvSpPr>
+          <p:cNvPr id="8" name="Rounded Rectangle 7"/>
           <p:cNvSpPr/>
           <p:nvPr/>
         </p:nvSpPr>
         <p:spPr>
           <a:xfrm>
-            <a:off x="694944" y="3172968"/>
-            <a:ext cx="10972800" cy="1115568"/>
+            <a:off x="658368" y="4206240"/>
+            <a:ext cx="10972800" cy="1554480"/>
           </a:xfrm>
           <a:prstGeom prst="roundRect">
             <a:avLst/>
           </a:prstGeom>
           <a:solidFill>
-            <a:srgbClr val="FFF7F4"/>
+            <a:srgbClr val="F4F7FB"/>
           </a:solidFill>
           <a:ln>
             <a:solidFill>
-              <a:srgbClr val="EDBEB4"/>
+              <a:srgbClr val="D1DFD5"/>
             </a:solidFill>
           </a:ln>
         </p:spPr>
@@ -48460,33 +50983,7 @@
           </a:fontRef>
         </p:style>
         <p:txBody>
-          <a:bodyPr rtlCol="0" anchor="ctr"/>
-          <a:lstStyle/>
-          <a:p>
-            <a:pPr algn="ctr"/>
-          </a:p>
-        </p:txBody>
-      </p:sp>
-      <p:sp>
-        <p:nvSpPr>
-          <p:cNvPr id="11" name="TextBox 10"/>
-          <p:cNvSpPr txBox="1"/>
-          <p:nvPr/>
-        </p:nvSpPr>
-        <p:spPr>
-          <a:xfrm>
-            <a:off x="896112" y="3319272"/>
-            <a:ext cx="2926080" cy="274320"/>
-          </a:xfrm>
-          <a:prstGeom prst="rect">
-            <a:avLst/>
-          </a:prstGeom>
-          <a:noFill/>
-        </p:spPr>
-        <p:txBody>
-          <a:bodyPr wrap="square" lIns="73152" rIns="73152" tIns="36576" bIns="36576">
-            <a:spAutoFit/>
-          </a:bodyPr>
+          <a:bodyPr rtlCol="0" anchor="ctr" wrap="square" lIns="73152" rIns="73152" tIns="36576" bIns="36576"/>
           <a:lstStyle/>
           <a:p>
             <a:pPr algn="l">
@@ -48495,44 +50992,56 @@
               </a:spcAft>
               <a:defRPr sz="1800" b="1">
                 <a:solidFill>
-                  <a:srgbClr val="BE3B3B"/>
-                </a:solidFill>
-                <a:latin typeface="Noto Sans CJK KR"/>
-              </a:defRPr>
-            </a:pPr>
-            <a:r>
-              <a:t>증상 2: Custom msg import 실패</a:t>
-            </a:r>
-          </a:p>
-        </p:txBody>
-      </p:sp>
-      <p:sp>
-        <p:nvSpPr>
-          <p:cNvPr id="12" name="TextBox 11"/>
-          <p:cNvSpPr txBox="1"/>
-          <p:nvPr/>
-        </p:nvSpPr>
-        <p:spPr>
-          <a:xfrm>
-            <a:off x="3794760" y="3300984"/>
-            <a:ext cx="7543800" cy="621792"/>
-          </a:xfrm>
-          <a:prstGeom prst="rect">
-            <a:avLst/>
-          </a:prstGeom>
-          <a:noFill/>
-        </p:spPr>
-        <p:txBody>
-          <a:bodyPr wrap="square" lIns="73152" rIns="73152" tIns="36576" bIns="36576">
-            <a:spAutoFit/>
-          </a:bodyPr>
-          <a:lstStyle/>
-          <a:p>
-            <a:pPr algn="l">
-              <a:spcAft>
-                <a:spcPts val="0"/>
-              </a:spcAft>
-              <a:defRPr sz="1600" b="0">
+                  <a:srgbClr val="2A8B5A"/>
+                </a:solidFill>
+                <a:latin typeface="Noto Sans CJK KR"/>
+              </a:defRPr>
+            </a:pPr>
+            <a:r>
+              <a:t>완료 체크</a:t>
+            </a:r>
+            <a:br/>
+            <a:r>
+              <a:t>□ 명령이 오류 없이 실행된다.</a:t>
+            </a:r>
+            <a:br/>
+            <a:r>
+              <a:t>□ 기대한 파일·topic·frame·parameter 이름이 보인다.</a:t>
+            </a:r>
+            <a:br/>
+            <a:r>
+              <a:t>□ 값의 단위와 방향을 한 문장으로 설명할 수 있다.</a:t>
+            </a:r>
+          </a:p>
+        </p:txBody>
+      </p:sp>
+      <p:sp>
+        <p:nvSpPr>
+          <p:cNvPr id="9" name="TextBox 8"/>
+          <p:cNvSpPr txBox="1"/>
+          <p:nvPr/>
+        </p:nvSpPr>
+        <p:spPr>
+          <a:xfrm>
+            <a:off x="731520" y="5989320"/>
+            <a:ext cx="10789920" cy="237744"/>
+          </a:xfrm>
+          <a:prstGeom prst="rect">
+            <a:avLst/>
+          </a:prstGeom>
+          <a:noFill/>
+        </p:spPr>
+        <p:txBody>
+          <a:bodyPr wrap="square" lIns="73152" rIns="73152" tIns="36576" bIns="36576">
+            <a:spAutoFit/>
+          </a:bodyPr>
+          <a:lstStyle/>
+          <a:p>
+            <a:pPr algn="l">
+              <a:spcAft>
+                <a:spcPts val="0"/>
+              </a:spcAft>
+              <a:defRPr sz="1500" b="1">
                 <a:solidFill>
                   <a:srgbClr val="122C4E"/>
                 </a:solidFill>
@@ -48540,50 +51049,7 @@
               </a:defRPr>
             </a:pPr>
             <a:r>
-              <a:t>우선 확인: agv_interfaces 빌드·source·package dependency를 확인한다.</a:t>
-            </a:r>
-            <a:br/>
-            <a:r>
-              <a:t>수정 후: ros2 interface show agv_interfaces/msg/Detection</a:t>
-            </a:r>
-          </a:p>
-        </p:txBody>
-      </p:sp>
-      <p:sp>
-        <p:nvSpPr>
-          <p:cNvPr id="13" name="TextBox 12"/>
-          <p:cNvSpPr txBox="1"/>
-          <p:nvPr/>
-        </p:nvSpPr>
-        <p:spPr>
-          <a:xfrm>
-            <a:off x="822960" y="5102352"/>
-            <a:ext cx="10607040" cy="402336"/>
-          </a:xfrm>
-          <a:prstGeom prst="rect">
-            <a:avLst/>
-          </a:prstGeom>
-          <a:noFill/>
-        </p:spPr>
-        <p:txBody>
-          <a:bodyPr wrap="square" lIns="73152" rIns="73152" tIns="36576" bIns="36576">
-            <a:spAutoFit/>
-          </a:bodyPr>
-          <a:lstStyle/>
-          <a:p>
-            <a:pPr algn="ctr">
-              <a:spcAft>
-                <a:spcPts val="0"/>
-              </a:spcAft>
-              <a:defRPr sz="1800" b="1">
-                <a:solidFill>
-                  <a:srgbClr val="DB7E22"/>
-                </a:solidFill>
-                <a:latin typeface="Noto Sans CJK KR"/>
-              </a:defRPr>
-            </a:pPr>
-            <a:r>
-              <a:t>공통 순서: ① 현재 폴더 ② source ③ 파일 경로 ④ 이름/타입/단위 ⑤ build·source 후 재실행</a:t>
+              <a:t>완료 조건: /detections message 형식과 YOLO enable_yolo/model_path/threshold parameter를 확인한다.</a:t>
             </a:r>
           </a:p>
         </p:txBody>
@@ -48640,7 +51106,7 @@
               </a:defRPr>
             </a:pPr>
             <a:r>
-              <a:t>막혔을 때만: Complete를 복구용으로 사용한다</a:t>
+              <a:t>막히면: 증상 → 우선 확인 → 재검증</a:t>
             </a:r>
           </a:p>
         </p:txBody>
@@ -48679,7 +51145,7 @@
               </a:defRPr>
             </a:pPr>
             <a:r>
-              <a:t>이 슬라이드가 먼저가 아닙니다. 직접 입력·실행을 시도한 뒤에만 내 파일과 Complete를 비교합니다.</a:t>
+              <a:t>오류 메시지를 숨기지 않고 같은 순서로 점검합니다.</a:t>
             </a:r>
           </a:p>
         </p:txBody>
@@ -48815,70 +51281,31 @@
               </a:defRPr>
             </a:pPr>
             <a:r>
-              <a:t>현재 단계 복구용 Complete    |    현재 폴더 ~/ros2_curri    |    현재 터미널</a:t>
-            </a:r>
-          </a:p>
-        </p:txBody>
-      </p:sp>
-      <p:sp>
-        <p:nvSpPr>
-          <p:cNvPr id="7" name="TextBox 6"/>
-          <p:cNvSpPr txBox="1"/>
-          <p:nvPr/>
-        </p:nvSpPr>
-        <p:spPr>
-          <a:xfrm>
-            <a:off x="713232" y="1664208"/>
-            <a:ext cx="10698480" cy="402336"/>
-          </a:xfrm>
-          <a:prstGeom prst="rect">
-            <a:avLst/>
-          </a:prstGeom>
-          <a:noFill/>
-        </p:spPr>
-        <p:txBody>
-          <a:bodyPr wrap="square" lIns="73152" rIns="73152" tIns="36576" bIns="36576">
-            <a:spAutoFit/>
-          </a:bodyPr>
-          <a:lstStyle/>
-          <a:p>
-            <a:pPr algn="ctr">
-              <a:spcAft>
-                <a:spcPts val="0"/>
-              </a:spcAft>
-              <a:defRPr sz="1800" b="1">
-                <a:solidFill>
-                  <a:srgbClr val="DB7E22"/>
-                </a:solidFill>
-                <a:latin typeface="Noto Sans CJK KR"/>
-              </a:defRPr>
-            </a:pPr>
-            <a:r>
-              <a:t>권장 순서: ① 내 오류를 확인  ② Complete와 diff  ③ 꼭 필요할 때만 backup 후 복사</a:t>
-            </a:r>
-          </a:p>
-        </p:txBody>
-      </p:sp>
-      <p:sp>
-        <p:nvSpPr>
-          <p:cNvPr id="8" name="Rounded Rectangle 7"/>
+              <a:t>현재 단계 오류 대응    |    현재 폴더 ~/ros2_curri/my_agv_ws    |    현재 터미널</a:t>
+            </a:r>
+          </a:p>
+        </p:txBody>
+      </p:sp>
+      <p:sp>
+        <p:nvSpPr>
+          <p:cNvPr id="7" name="Rounded Rectangle 6"/>
           <p:cNvSpPr/>
           <p:nvPr/>
         </p:nvSpPr>
         <p:spPr>
           <a:xfrm>
-            <a:off x="676656" y="2423160"/>
-            <a:ext cx="10881360" cy="2606040"/>
+            <a:off x="694944" y="1755648"/>
+            <a:ext cx="10972800" cy="1115568"/>
           </a:xfrm>
           <a:prstGeom prst="roundRect">
             <a:avLst/>
           </a:prstGeom>
           <a:solidFill>
-            <a:srgbClr val="1D232D"/>
+            <a:srgbClr val="FFF7F4"/>
           </a:solidFill>
           <a:ln>
             <a:solidFill>
-              <a:srgbClr val="1D232D"/>
+              <a:srgbClr val="EDBEB4"/>
             </a:solidFill>
           </a:ln>
         </p:spPr>
@@ -48897,52 +51324,232 @@
           </a:fontRef>
         </p:style>
         <p:txBody>
-          <a:bodyPr rtlCol="0" anchor="ctr" wrap="square" lIns="73152" rIns="73152" tIns="36576" bIns="36576"/>
-          <a:lstStyle/>
-          <a:p>
-            <a:pPr algn="l">
-              <a:spcAft>
-                <a:spcPts val="0"/>
-              </a:spcAft>
-              <a:defRPr sz="1400" b="0">
-                <a:solidFill>
-                  <a:srgbClr val="FFFFFF"/>
-                </a:solidFill>
-                <a:latin typeface="DejaVu Sans Mono"/>
-              </a:defRPr>
-            </a:pPr>
-            <a:r>
-              <a:t>cd ~/ros2_curri</a:t>
+          <a:bodyPr rtlCol="0" anchor="ctr"/>
+          <a:lstStyle/>
+          <a:p>
+            <a:pPr algn="ctr"/>
+          </a:p>
+        </p:txBody>
+      </p:sp>
+      <p:sp>
+        <p:nvSpPr>
+          <p:cNvPr id="8" name="TextBox 7"/>
+          <p:cNvSpPr txBox="1"/>
+          <p:nvPr/>
+        </p:nvSpPr>
+        <p:spPr>
+          <a:xfrm>
+            <a:off x="896112" y="1901952"/>
+            <a:ext cx="2926080" cy="274320"/>
+          </a:xfrm>
+          <a:prstGeom prst="rect">
+            <a:avLst/>
+          </a:prstGeom>
+          <a:noFill/>
+        </p:spPr>
+        <p:txBody>
+          <a:bodyPr wrap="square" lIns="73152" rIns="73152" tIns="36576" bIns="36576">
+            <a:spAutoFit/>
+          </a:bodyPr>
+          <a:lstStyle/>
+          <a:p>
+            <a:pPr algn="l">
+              <a:spcAft>
+                <a:spcPts val="0"/>
+              </a:spcAft>
+              <a:defRPr sz="1800" b="1">
+                <a:solidFill>
+                  <a:srgbClr val="BE3B3B"/>
+                </a:solidFill>
+                <a:latin typeface="Noto Sans CJK KR"/>
+              </a:defRPr>
+            </a:pPr>
+            <a:r>
+              <a:t>증상 1: 모델 파일을 못 찾음</a:t>
+            </a:r>
+          </a:p>
+        </p:txBody>
+      </p:sp>
+      <p:sp>
+        <p:nvSpPr>
+          <p:cNvPr id="9" name="TextBox 8"/>
+          <p:cNvSpPr txBox="1"/>
+          <p:nvPr/>
+        </p:nvSpPr>
+        <p:spPr>
+          <a:xfrm>
+            <a:off x="3794760" y="1883664"/>
+            <a:ext cx="7543800" cy="621792"/>
+          </a:xfrm>
+          <a:prstGeom prst="rect">
+            <a:avLst/>
+          </a:prstGeom>
+          <a:noFill/>
+        </p:spPr>
+        <p:txBody>
+          <a:bodyPr wrap="square" lIns="73152" rIns="73152" tIns="36576" bIns="36576">
+            <a:spAutoFit/>
+          </a:bodyPr>
+          <a:lstStyle/>
+          <a:p>
+            <a:pPr algn="l">
+              <a:spcAft>
+                <a:spcPts val="0"/>
+              </a:spcAft>
+              <a:defRPr sz="1600" b="0">
+                <a:solidFill>
+                  <a:srgbClr val="122C4E"/>
+                </a:solidFill>
+                <a:latin typeface="Noto Sans CJK KR"/>
+              </a:defRPr>
+            </a:pPr>
+            <a:r>
+              <a:t>우선 확인: model_path와 모델 파일 배포 정책을 확인한다.</a:t>
             </a:r>
             <a:br/>
             <a:r>
-              <a:t>diff -ru my_agv_ws/src blocks/E_autonomy_logic/M17_yolo_vision/complete/agv_ws/src || true</a:t>
+              <a:t>수정 후: ros2 interface show agv_interfaces/msg/Detection</a:t>
+            </a:r>
+          </a:p>
+        </p:txBody>
+      </p:sp>
+      <p:sp>
+        <p:nvSpPr>
+          <p:cNvPr id="10" name="Rounded Rectangle 9"/>
+          <p:cNvSpPr/>
+          <p:nvPr/>
+        </p:nvSpPr>
+        <p:spPr>
+          <a:xfrm>
+            <a:off x="694944" y="3172968"/>
+            <a:ext cx="10972800" cy="1115568"/>
+          </a:xfrm>
+          <a:prstGeom prst="roundRect">
+            <a:avLst/>
+          </a:prstGeom>
+          <a:solidFill>
+            <a:srgbClr val="FFF7F4"/>
+          </a:solidFill>
+          <a:ln>
+            <a:solidFill>
+              <a:srgbClr val="EDBEB4"/>
+            </a:solidFill>
+          </a:ln>
+        </p:spPr>
+        <p:style>
+          <a:lnRef idx="1">
+            <a:schemeClr val="accent1"/>
+          </a:lnRef>
+          <a:fillRef idx="3">
+            <a:schemeClr val="accent1"/>
+          </a:fillRef>
+          <a:effectRef idx="2">
+            <a:schemeClr val="accent1"/>
+          </a:effectRef>
+          <a:fontRef idx="minor">
+            <a:schemeClr val="lt1"/>
+          </a:fontRef>
+        </p:style>
+        <p:txBody>
+          <a:bodyPr rtlCol="0" anchor="ctr"/>
+          <a:lstStyle/>
+          <a:p>
+            <a:pPr algn="ctr"/>
+          </a:p>
+        </p:txBody>
+      </p:sp>
+      <p:sp>
+        <p:nvSpPr>
+          <p:cNvPr id="11" name="TextBox 10"/>
+          <p:cNvSpPr txBox="1"/>
+          <p:nvPr/>
+        </p:nvSpPr>
+        <p:spPr>
+          <a:xfrm>
+            <a:off x="896112" y="3319272"/>
+            <a:ext cx="2926080" cy="274320"/>
+          </a:xfrm>
+          <a:prstGeom prst="rect">
+            <a:avLst/>
+          </a:prstGeom>
+          <a:noFill/>
+        </p:spPr>
+        <p:txBody>
+          <a:bodyPr wrap="square" lIns="73152" rIns="73152" tIns="36576" bIns="36576">
+            <a:spAutoFit/>
+          </a:bodyPr>
+          <a:lstStyle/>
+          <a:p>
+            <a:pPr algn="l">
+              <a:spcAft>
+                <a:spcPts val="0"/>
+              </a:spcAft>
+              <a:defRPr sz="1800" b="1">
+                <a:solidFill>
+                  <a:srgbClr val="BE3B3B"/>
+                </a:solidFill>
+                <a:latin typeface="Noto Sans CJK KR"/>
+              </a:defRPr>
+            </a:pPr>
+            <a:r>
+              <a:t>증상 2: Custom msg import 실패</a:t>
+            </a:r>
+          </a:p>
+        </p:txBody>
+      </p:sp>
+      <p:sp>
+        <p:nvSpPr>
+          <p:cNvPr id="12" name="TextBox 11"/>
+          <p:cNvSpPr txBox="1"/>
+          <p:nvPr/>
+        </p:nvSpPr>
+        <p:spPr>
+          <a:xfrm>
+            <a:off x="3794760" y="3300984"/>
+            <a:ext cx="7543800" cy="621792"/>
+          </a:xfrm>
+          <a:prstGeom prst="rect">
+            <a:avLst/>
+          </a:prstGeom>
+          <a:noFill/>
+        </p:spPr>
+        <p:txBody>
+          <a:bodyPr wrap="square" lIns="73152" rIns="73152" tIns="36576" bIns="36576">
+            <a:spAutoFit/>
+          </a:bodyPr>
+          <a:lstStyle/>
+          <a:p>
+            <a:pPr algn="l">
+              <a:spcAft>
+                <a:spcPts val="0"/>
+              </a:spcAft>
+              <a:defRPr sz="1600" b="0">
+                <a:solidFill>
+                  <a:srgbClr val="122C4E"/>
+                </a:solidFill>
+                <a:latin typeface="Noto Sans CJK KR"/>
+              </a:defRPr>
+            </a:pPr>
+            <a:r>
+              <a:t>우선 확인: agv_interfaces 빌드·source·package dependency를 확인한다.</a:t>
             </a:r>
             <a:br/>
             <a:r>
-              <a:t>cp -a my_agv_ws/src my_agv_ws/src_before_M17</a:t>
-            </a:r>
-            <a:br/>
-            <a:r>
-              <a:t>cp -a blocks/E_autonomy_logic/M17_yolo_vision/complete/agv_ws/src/. my_agv_ws/src/</a:t>
-            </a:r>
-            <a:br/>
-            <a:r>
-              <a:t>cd my_agv_ws &amp;&amp; colcon build --symlink-install &amp;&amp; source install/setup.bash</a:t>
-            </a:r>
-          </a:p>
-        </p:txBody>
-      </p:sp>
-      <p:sp>
-        <p:nvSpPr>
-          <p:cNvPr id="9" name="TextBox 8"/>
-          <p:cNvSpPr txBox="1"/>
-          <p:nvPr/>
-        </p:nvSpPr>
-        <p:spPr>
-          <a:xfrm>
-            <a:off x="786384" y="5413248"/>
-            <a:ext cx="10424160" cy="429768"/>
+              <a:t>수정 후: ros2 interface show agv_interfaces/msg/Detection</a:t>
+            </a:r>
+          </a:p>
+        </p:txBody>
+      </p:sp>
+      <p:sp>
+        <p:nvSpPr>
+          <p:cNvPr id="13" name="TextBox 12"/>
+          <p:cNvSpPr txBox="1"/>
+          <p:nvPr/>
+        </p:nvSpPr>
+        <p:spPr>
+          <a:xfrm>
+            <a:off x="822960" y="5102352"/>
+            <a:ext cx="10607040" cy="402336"/>
           </a:xfrm>
           <a:prstGeom prst="rect">
             <a:avLst/>
@@ -48959,15 +51566,15 @@
               <a:spcAft>
                 <a:spcPts val="0"/>
               </a:spcAft>
-              <a:defRPr sz="1700" b="1">
-                <a:solidFill>
-                  <a:srgbClr val="2A8B5A"/>
-                </a:solidFill>
-                <a:latin typeface="Noto Sans CJK KR"/>
-              </a:defRPr>
-            </a:pPr>
-            <a:r>
-              <a:t>복구 뒤에는 끝내지 말고, 내 파일과 Complete의 차이를 한 줄씩 설명한 뒤 다시 직접 입력해 봅니다.</a:t>
+              <a:defRPr sz="1800" b="1">
+                <a:solidFill>
+                  <a:srgbClr val="DB7E22"/>
+                </a:solidFill>
+                <a:latin typeface="Noto Sans CJK KR"/>
+              </a:defRPr>
+            </a:pPr>
+            <a:r>
+              <a:t>공통 순서: ① 현재 폴더 ② source ③ 파일 경로 ④ 이름/타입/단위 ⑤ build·source 후 재실행</a:t>
             </a:r>
           </a:p>
         </p:txBody>
@@ -49024,7 +51631,7 @@
               </a:defRPr>
             </a:pPr>
             <a:r>
-              <a:t>미니 실습: 값 하나를 바꾸고 결과를 비교한다</a:t>
+              <a:t>막혔을 때만: Complete를 복구용으로 사용한다</a:t>
             </a:r>
           </a:p>
         </p:txBody>
@@ -49063,7 +51670,7 @@
               </a:defRPr>
             </a:pPr>
             <a:r>
-              <a:t>정상 결과를 만든 뒤에는 한 번에 하나의 값만 바꿉니다.</a:t>
+              <a:t>이 슬라이드가 먼저가 아닙니다. 직접 입력·실행을 시도한 뒤에만 내 파일과 Complete를 비교합니다.</a:t>
             </a:r>
           </a:p>
         </p:txBody>
@@ -49199,31 +51806,70 @@
               </a:defRPr>
             </a:pPr>
             <a:r>
-              <a:t>현재 단계 미니 실습    |    현재 폴더 ~/ros2_curri/my_agv_ws    |    현재 터미널</a:t>
-            </a:r>
-          </a:p>
-        </p:txBody>
-      </p:sp>
-      <p:sp>
-        <p:nvSpPr>
-          <p:cNvPr id="7" name="Rounded Rectangle 6"/>
+              <a:t>현재 단계 복구용 Complete    |    현재 폴더 ~/ros2_curri    |    현재 터미널</a:t>
+            </a:r>
+          </a:p>
+        </p:txBody>
+      </p:sp>
+      <p:sp>
+        <p:nvSpPr>
+          <p:cNvPr id="7" name="TextBox 6"/>
+          <p:cNvSpPr txBox="1"/>
+          <p:nvPr/>
+        </p:nvSpPr>
+        <p:spPr>
+          <a:xfrm>
+            <a:off x="713232" y="1664208"/>
+            <a:ext cx="10698480" cy="402336"/>
+          </a:xfrm>
+          <a:prstGeom prst="rect">
+            <a:avLst/>
+          </a:prstGeom>
+          <a:noFill/>
+        </p:spPr>
+        <p:txBody>
+          <a:bodyPr wrap="square" lIns="73152" rIns="73152" tIns="36576" bIns="36576">
+            <a:spAutoFit/>
+          </a:bodyPr>
+          <a:lstStyle/>
+          <a:p>
+            <a:pPr algn="ctr">
+              <a:spcAft>
+                <a:spcPts val="0"/>
+              </a:spcAft>
+              <a:defRPr sz="1800" b="1">
+                <a:solidFill>
+                  <a:srgbClr val="DB7E22"/>
+                </a:solidFill>
+                <a:latin typeface="Noto Sans CJK KR"/>
+              </a:defRPr>
+            </a:pPr>
+            <a:r>
+              <a:t>권장 순서: ① 내 오류를 확인  ② Complete와 diff  ③ 꼭 필요할 때만 backup 후 복사</a:t>
+            </a:r>
+          </a:p>
+        </p:txBody>
+      </p:sp>
+      <p:sp>
+        <p:nvSpPr>
+          <p:cNvPr id="8" name="Rounded Rectangle 7"/>
           <p:cNvSpPr/>
           <p:nvPr/>
         </p:nvSpPr>
         <p:spPr>
           <a:xfrm>
-            <a:off x="749808" y="1874519"/>
-            <a:ext cx="10652760" cy="1993392"/>
+            <a:off x="676656" y="2423160"/>
+            <a:ext cx="10881360" cy="2606040"/>
           </a:xfrm>
           <a:prstGeom prst="roundRect">
             <a:avLst/>
           </a:prstGeom>
           <a:solidFill>
-            <a:srgbClr val="FFF8EB"/>
+            <a:srgbClr val="1D232D"/>
           </a:solidFill>
           <a:ln>
             <a:solidFill>
-              <a:srgbClr val="ECC680"/>
+              <a:srgbClr val="1D232D"/>
             </a:solidFill>
           </a:ln>
         </p:spPr>
@@ -49242,61 +51888,125 @@
           </a:fontRef>
         </p:style>
         <p:txBody>
-          <a:bodyPr rtlCol="0" anchor="ctr" wrap="square" lIns="73152" rIns="73152" tIns="36576" bIns="36576"/>
+          <a:bodyPr rtlCol="0" anchor="ctr" wrap="square" lIns="109728" rIns="109728" tIns="73152" bIns="73152"/>
+          <a:lstStyle/>
+          <a:p>
+            <a:pPr algn="l">
+              <a:spcAft>
+                <a:spcPts val="0"/>
+              </a:spcAft>
+              <a:defRPr sz="1400" b="0">
+                <a:solidFill>
+                  <a:srgbClr val="FFFFFF"/>
+                </a:solidFill>
+                <a:latin typeface="DejaVu Sans Mono"/>
+              </a:defRPr>
+            </a:pPr>
+            <a:r>
+              <a:t>cd ~/ros2_curri</a:t>
+            </a:r>
+          </a:p>
+          <a:p>
+            <a:pPr algn="l">
+              <a:spcAft>
+                <a:spcPts val="0"/>
+              </a:spcAft>
+              <a:defRPr sz="1400" b="0">
+                <a:solidFill>
+                  <a:srgbClr val="FFFFFF"/>
+                </a:solidFill>
+                <a:latin typeface="DejaVu Sans Mono"/>
+              </a:defRPr>
+            </a:pPr>
+            <a:r>
+              <a:t>diff -ru my_agv_ws/src blocks/E_autonomy_logic/M17_yolo_vision/complete/agv_ws/src || true</a:t>
+            </a:r>
+          </a:p>
+          <a:p>
+            <a:pPr algn="l">
+              <a:spcAft>
+                <a:spcPts val="0"/>
+              </a:spcAft>
+              <a:defRPr sz="1400" b="0">
+                <a:solidFill>
+                  <a:srgbClr val="FFFFFF"/>
+                </a:solidFill>
+                <a:latin typeface="DejaVu Sans Mono"/>
+              </a:defRPr>
+            </a:pPr>
+            <a:r>
+              <a:t>cp -a my_agv_ws/src my_agv_ws/src_before_M17</a:t>
+            </a:r>
+          </a:p>
+          <a:p>
+            <a:pPr algn="l">
+              <a:spcAft>
+                <a:spcPts val="0"/>
+              </a:spcAft>
+              <a:defRPr sz="1400" b="0">
+                <a:solidFill>
+                  <a:srgbClr val="FFFFFF"/>
+                </a:solidFill>
+                <a:latin typeface="DejaVu Sans Mono"/>
+              </a:defRPr>
+            </a:pPr>
+            <a:r>
+              <a:t>cp -a blocks/E_autonomy_logic/M17_yolo_vision/complete/agv_ws/src/. my_agv_ws/src/</a:t>
+            </a:r>
+          </a:p>
+          <a:p>
+            <a:pPr algn="l">
+              <a:spcAft>
+                <a:spcPts val="0"/>
+              </a:spcAft>
+              <a:defRPr sz="1400" b="0">
+                <a:solidFill>
+                  <a:srgbClr val="FFFFFF"/>
+                </a:solidFill>
+                <a:latin typeface="DejaVu Sans Mono"/>
+              </a:defRPr>
+            </a:pPr>
+            <a:r>
+              <a:t>cd my_agv_ws &amp;&amp; colcon build --symlink-install &amp;&amp; source install/setup.bash</a:t>
+            </a:r>
+          </a:p>
+        </p:txBody>
+      </p:sp>
+      <p:sp>
+        <p:nvSpPr>
+          <p:cNvPr id="9" name="TextBox 8"/>
+          <p:cNvSpPr txBox="1"/>
+          <p:nvPr/>
+        </p:nvSpPr>
+        <p:spPr>
+          <a:xfrm>
+            <a:off x="786384" y="5413248"/>
+            <a:ext cx="10424160" cy="429768"/>
+          </a:xfrm>
+          <a:prstGeom prst="rect">
+            <a:avLst/>
+          </a:prstGeom>
+          <a:noFill/>
+        </p:spPr>
+        <p:txBody>
+          <a:bodyPr wrap="square" lIns="73152" rIns="73152" tIns="36576" bIns="36576">
+            <a:spAutoFit/>
+          </a:bodyPr>
           <a:lstStyle/>
           <a:p>
             <a:pPr algn="ctr">
               <a:spcAft>
                 <a:spcPts val="0"/>
               </a:spcAft>
-              <a:defRPr sz="2300" b="1">
-                <a:solidFill>
-                  <a:srgbClr val="122C4E"/>
-                </a:solidFill>
-                <a:latin typeface="Noto Sans CJK KR"/>
-              </a:defRPr>
-            </a:pPr>
-            <a:r>
-              <a:t>confidence_threshold를 0.50에서 0.70으로 바꿨을 때 어떤 검출이 제거될지 설명하고 parameter 값을 확인한다.</a:t>
-            </a:r>
-          </a:p>
-        </p:txBody>
-      </p:sp>
-      <p:sp>
-        <p:nvSpPr>
-          <p:cNvPr id="8" name="TextBox 7"/>
-          <p:cNvSpPr txBox="1"/>
-          <p:nvPr/>
-        </p:nvSpPr>
-        <p:spPr>
-          <a:xfrm>
-            <a:off x="877824" y="4590288"/>
-            <a:ext cx="10241280" cy="594360"/>
-          </a:xfrm>
-          <a:prstGeom prst="rect">
-            <a:avLst/>
-          </a:prstGeom>
-          <a:noFill/>
-        </p:spPr>
-        <p:txBody>
-          <a:bodyPr wrap="square" lIns="73152" rIns="73152" tIns="36576" bIns="36576">
-            <a:spAutoFit/>
-          </a:bodyPr>
-          <a:lstStyle/>
-          <a:p>
-            <a:pPr algn="ctr">
-              <a:spcAft>
-                <a:spcPts val="0"/>
-              </a:spcAft>
-              <a:defRPr sz="1900" b="1">
-                <a:solidFill>
-                  <a:srgbClr val="DB7E22"/>
-                </a:solidFill>
-                <a:latin typeface="Noto Sans CJK KR"/>
-              </a:defRPr>
-            </a:pPr>
-            <a:r>
-              <a:t>기록할 것: 바꾼 값(단위) · 기대한 변화 · 실제 출력/화면 · 원래 값으로 되돌린 결과</a:t>
+              <a:defRPr sz="1700" b="1">
+                <a:solidFill>
+                  <a:srgbClr val="2A8B5A"/>
+                </a:solidFill>
+                <a:latin typeface="Noto Sans CJK KR"/>
+              </a:defRPr>
+            </a:pPr>
+            <a:r>
+              <a:t>복구 뒤에는 끝내지 말고, 내 파일과 Complete의 차이를 한 줄씩 설명한 뒤 다시 직접 입력해 봅니다.</a:t>
             </a:r>
           </a:p>
         </p:txBody>
@@ -49353,7 +52063,7 @@
               </a:defRPr>
             </a:pPr>
             <a:r>
-              <a:t>내 프로젝트 체크포인트를 저장하고 다음 모듈로 넘긴다</a:t>
+              <a:t>미니 실습: 값 하나를 바꾸고 결과를 비교한다</a:t>
             </a:r>
           </a:p>
         </p:txBody>
@@ -49392,7 +52102,7 @@
               </a:defRPr>
             </a:pPr>
             <a:r>
-              <a:t>Complete는 복구용 비교 기준이고, 다음 단계는 내가 직접 만든 workspace에서 계속합니다.</a:t>
+              <a:t>정상 결과를 만든 뒤에는 한 번에 하나의 값만 바꿉니다.</a:t>
             </a:r>
           </a:p>
         </p:txBody>
@@ -49528,7 +52238,7 @@
               </a:defRPr>
             </a:pPr>
             <a:r>
-              <a:t>현재 단계 체크포인트    |    현재 폴더 ~/ros2_curri/my_agv_ws    |    현재 터미널</a:t>
+              <a:t>현재 단계 미니 실습    |    현재 폴더 ~/ros2_curri/my_agv_ws    |    현재 터미널</a:t>
             </a:r>
           </a:p>
         </p:txBody>
@@ -49541,18 +52251,18 @@
         </p:nvSpPr>
         <p:spPr>
           <a:xfrm>
-            <a:off x="685800" y="1737360"/>
-            <a:ext cx="10972800" cy="3611880"/>
+            <a:off x="749808" y="1874519"/>
+            <a:ext cx="10652760" cy="1993392"/>
           </a:xfrm>
           <a:prstGeom prst="roundRect">
             <a:avLst/>
           </a:prstGeom>
           <a:solidFill>
-            <a:srgbClr val="F4F7FB"/>
+            <a:srgbClr val="FFF8EB"/>
           </a:solidFill>
           <a:ln>
             <a:solidFill>
-              <a:srgbClr val="D2DCE8"/>
+              <a:srgbClr val="ECC680"/>
             </a:solidFill>
           </a:ln>
         </p:spPr>
@@ -49571,10 +52281,23 @@
           </a:fontRef>
         </p:style>
         <p:txBody>
-          <a:bodyPr rtlCol="0" anchor="ctr"/>
-          <a:lstStyle/>
-          <a:p>
-            <a:pPr algn="ctr"/>
+          <a:bodyPr rtlCol="0" anchor="ctr" wrap="square" lIns="73152" rIns="73152" tIns="36576" bIns="36576"/>
+          <a:lstStyle/>
+          <a:p>
+            <a:pPr algn="ctr">
+              <a:spcAft>
+                <a:spcPts val="0"/>
+              </a:spcAft>
+              <a:defRPr sz="2300" b="1">
+                <a:solidFill>
+                  <a:srgbClr val="122C4E"/>
+                </a:solidFill>
+                <a:latin typeface="Noto Sans CJK KR"/>
+              </a:defRPr>
+            </a:pPr>
+            <a:r>
+              <a:t>confidence_threshold를 0.50에서 0.70으로 바꿨을 때 어떤 검출이 제거될지 설명하고 parameter 값을 확인한다.</a:t>
+            </a:r>
           </a:p>
         </p:txBody>
       </p:sp>
@@ -49586,111 +52309,8 @@
         </p:nvSpPr>
         <p:spPr>
           <a:xfrm>
-            <a:off x="896112" y="1993392"/>
-            <a:ext cx="10332720" cy="2971800"/>
-          </a:xfrm>
-          <a:prstGeom prst="rect">
-            <a:avLst/>
-          </a:prstGeom>
-          <a:noFill/>
-        </p:spPr>
-        <p:txBody>
-          <a:bodyPr wrap="square" lIns="109728" rIns="109728">
-            <a:spAutoFit/>
-          </a:bodyPr>
-          <a:lstStyle/>
-          <a:p>
-            <a:pPr>
-              <a:spcAft>
-                <a:spcPts val="800"/>
-              </a:spcAft>
-              <a:defRPr sz="1800">
-                <a:solidFill>
-                  <a:srgbClr val="122C4E"/>
-                </a:solidFill>
-                <a:latin typeface="Noto Sans CJK KR"/>
-              </a:defRPr>
-            </a:pPr>
-            <a:r>
-              <a:t>• □ 완료 화면: /detections message 형식과 YOLO enable_yolo/model_path/threshold parameter를 확인한다.</a:t>
-            </a:r>
-          </a:p>
-          <a:p>
-            <a:pPr>
-              <a:spcAft>
-                <a:spcPts val="800"/>
-              </a:spcAft>
-              <a:defRPr sz="1800">
-                <a:solidFill>
-                  <a:srgbClr val="122C4E"/>
-                </a:solidFill>
-                <a:latin typeface="Noto Sans CJK KR"/>
-              </a:defRPr>
-            </a:pPr>
-            <a:r>
-              <a:t>• □ 막혔을 때 비교할 Complete: blocks/E_autonomy_logic/M17_yolo_vision/complete/</a:t>
-            </a:r>
-          </a:p>
-          <a:p>
-            <a:pPr>
-              <a:spcAft>
-                <a:spcPts val="800"/>
-              </a:spcAft>
-              <a:defRPr sz="1800">
-                <a:solidFill>
-                  <a:srgbClr val="122C4E"/>
-                </a:solidFill>
-                <a:latin typeface="Noto Sans CJK KR"/>
-              </a:defRPr>
-            </a:pPr>
-            <a:r>
-              <a:t>• □ 정상 로그·캡처: logs/validation.log, screenshots/validation_terminal.png</a:t>
-            </a:r>
-          </a:p>
-          <a:p>
-            <a:pPr>
-              <a:spcAft>
-                <a:spcPts val="800"/>
-              </a:spcAft>
-              <a:defRPr sz="1800">
-                <a:solidFill>
-                  <a:srgbClr val="122C4E"/>
-                </a:solidFill>
-                <a:latin typeface="Noto Sans CJK KR"/>
-              </a:defRPr>
-            </a:pPr>
-            <a:r>
-              <a:t>• □ 버전 식별: CHECKSUM_or_TAG.txt의 SHA-256 manifest</a:t>
-            </a:r>
-          </a:p>
-          <a:p>
-            <a:pPr>
-              <a:spcAft>
-                <a:spcPts val="800"/>
-              </a:spcAft>
-              <a:defRPr sz="1800">
-                <a:solidFill>
-                  <a:srgbClr val="122C4E"/>
-                </a:solidFill>
-                <a:latin typeface="Noto Sans CJK KR"/>
-              </a:defRPr>
-            </a:pPr>
-            <a:r>
-              <a:t>• □ 다음 시작 조건: M18 safety fusion</a:t>
-            </a:r>
-          </a:p>
-        </p:txBody>
-      </p:sp>
-      <p:sp>
-        <p:nvSpPr>
-          <p:cNvPr id="9" name="TextBox 8"/>
-          <p:cNvSpPr txBox="1"/>
-          <p:nvPr/>
-        </p:nvSpPr>
-        <p:spPr>
-          <a:xfrm>
-            <a:off x="868680" y="5596128"/>
-            <a:ext cx="10515600" cy="338328"/>
+            <a:off x="877824" y="4590288"/>
+            <a:ext cx="10241280" cy="594360"/>
           </a:xfrm>
           <a:prstGeom prst="rect">
             <a:avLst/>
@@ -49707,15 +52327,15 @@
               <a:spcAft>
                 <a:spcPts val="0"/>
               </a:spcAft>
-              <a:defRPr sz="1700" b="1">
-                <a:solidFill>
-                  <a:srgbClr val="2A8B5A"/>
-                </a:solidFill>
-                <a:latin typeface="Noto Sans CJK KR"/>
-              </a:defRPr>
-            </a:pPr>
-            <a:r>
-              <a:t>다음 모듈을 시작하기 전, 내 src의 변경사항을 저장하고 현재 완료 조건을 다시 확인합니다.</a:t>
+              <a:defRPr sz="1900" b="1">
+                <a:solidFill>
+                  <a:srgbClr val="DB7E22"/>
+                </a:solidFill>
+                <a:latin typeface="Noto Sans CJK KR"/>
+              </a:defRPr>
+            </a:pPr>
+            <a:r>
+              <a:t>기록할 것: 바꾼 값(단위) · 기대한 변화 · 실제 출력/화면 · 원래 값으로 되돌린 결과</a:t>
             </a:r>
           </a:p>
         </p:txBody>
@@ -49729,6 +52349,425 @@
 </file>
 
 <file path=ppt/slides/slide75.xml><?xml version="1.0" encoding="utf-8"?>
+<p:sld xmlns:a="http://schemas.openxmlformats.org/drawingml/2006/main" xmlns:p="http://schemas.openxmlformats.org/presentationml/2006/main" xmlns:r="http://schemas.openxmlformats.org/officeDocument/2006/relationships">
+  <p:cSld>
+    <p:spTree>
+      <p:nvGrpSpPr>
+        <p:cNvPr id="1" name=""/>
+        <p:cNvGrpSpPr/>
+        <p:nvPr/>
+      </p:nvGrpSpPr>
+      <p:grpSpPr/>
+      <p:sp>
+        <p:nvSpPr>
+          <p:cNvPr id="2" name="TextBox 1"/>
+          <p:cNvSpPr txBox="1"/>
+          <p:nvPr/>
+        </p:nvSpPr>
+        <p:spPr>
+          <a:xfrm>
+            <a:off x="566928" y="347472"/>
+            <a:ext cx="10881360" cy="438912"/>
+          </a:xfrm>
+          <a:prstGeom prst="rect">
+            <a:avLst/>
+          </a:prstGeom>
+          <a:noFill/>
+        </p:spPr>
+        <p:txBody>
+          <a:bodyPr wrap="square" lIns="73152" rIns="73152" tIns="36576" bIns="36576">
+            <a:spAutoFit/>
+          </a:bodyPr>
+          <a:lstStyle/>
+          <a:p>
+            <a:pPr algn="l">
+              <a:spcAft>
+                <a:spcPts val="0"/>
+              </a:spcAft>
+              <a:defRPr sz="3200" b="1">
+                <a:solidFill>
+                  <a:srgbClr val="122C4E"/>
+                </a:solidFill>
+                <a:latin typeface="Noto Sans CJK KR"/>
+              </a:defRPr>
+            </a:pPr>
+            <a:r>
+              <a:t>내 프로젝트 체크포인트를 저장하고 다음 모듈로 넘긴다</a:t>
+            </a:r>
+          </a:p>
+        </p:txBody>
+      </p:sp>
+      <p:sp>
+        <p:nvSpPr>
+          <p:cNvPr id="3" name="TextBox 2"/>
+          <p:cNvSpPr txBox="1"/>
+          <p:nvPr/>
+        </p:nvSpPr>
+        <p:spPr>
+          <a:xfrm>
+            <a:off x="603504" y="859536"/>
+            <a:ext cx="10698480" cy="292608"/>
+          </a:xfrm>
+          <a:prstGeom prst="rect">
+            <a:avLst/>
+          </a:prstGeom>
+          <a:noFill/>
+        </p:spPr>
+        <p:txBody>
+          <a:bodyPr wrap="square" lIns="73152" rIns="73152" tIns="36576" bIns="36576">
+            <a:spAutoFit/>
+          </a:bodyPr>
+          <a:lstStyle/>
+          <a:p>
+            <a:pPr algn="l">
+              <a:spcAft>
+                <a:spcPts val="0"/>
+              </a:spcAft>
+              <a:defRPr sz="1700" b="0">
+                <a:solidFill>
+                  <a:srgbClr val="5C6672"/>
+                </a:solidFill>
+                <a:latin typeface="Noto Sans CJK KR"/>
+              </a:defRPr>
+            </a:pPr>
+            <a:r>
+              <a:t>Complete는 복구용 비교 기준이고, 다음 단계는 내가 직접 만든 workspace에서 계속합니다.</a:t>
+            </a:r>
+          </a:p>
+        </p:txBody>
+      </p:sp>
+      <p:sp>
+        <p:nvSpPr>
+          <p:cNvPr id="4" name="TextBox 3"/>
+          <p:cNvSpPr txBox="1"/>
+          <p:nvPr/>
+        </p:nvSpPr>
+        <p:spPr>
+          <a:xfrm>
+            <a:off x="530352" y="6510528"/>
+            <a:ext cx="7772400" cy="201168"/>
+          </a:xfrm>
+          <a:prstGeom prst="rect">
+            <a:avLst/>
+          </a:prstGeom>
+          <a:noFill/>
+        </p:spPr>
+        <p:txBody>
+          <a:bodyPr wrap="square" lIns="73152" rIns="73152" tIns="36576" bIns="36576">
+            <a:spAutoFit/>
+          </a:bodyPr>
+          <a:lstStyle/>
+          <a:p>
+            <a:pPr algn="l">
+              <a:spcAft>
+                <a:spcPts val="0"/>
+              </a:spcAft>
+              <a:defRPr sz="900" b="0">
+                <a:solidFill>
+                  <a:srgbClr val="5C6672"/>
+                </a:solidFill>
+                <a:latin typeface="Noto Sans CJK KR"/>
+              </a:defRPr>
+            </a:pPr>
+            <a:r>
+              <a:t>ROS 2 기반 AGV End-to-End 개발 커리큘럼 · M17 · Block E</a:t>
+            </a:r>
+          </a:p>
+        </p:txBody>
+      </p:sp>
+      <p:sp>
+        <p:nvSpPr>
+          <p:cNvPr id="5" name="TextBox 4"/>
+          <p:cNvSpPr txBox="1"/>
+          <p:nvPr/>
+        </p:nvSpPr>
+        <p:spPr>
+          <a:xfrm>
+            <a:off x="9144000" y="6510528"/>
+            <a:ext cx="2468880" cy="201168"/>
+          </a:xfrm>
+          <a:prstGeom prst="rect">
+            <a:avLst/>
+          </a:prstGeom>
+          <a:noFill/>
+        </p:spPr>
+        <p:txBody>
+          <a:bodyPr wrap="square" lIns="73152" rIns="73152" tIns="36576" bIns="36576">
+            <a:spAutoFit/>
+          </a:bodyPr>
+          <a:lstStyle/>
+          <a:p>
+            <a:pPr algn="r">
+              <a:spcAft>
+                <a:spcPts val="0"/>
+              </a:spcAft>
+              <a:defRPr sz="1000" b="0">
+                <a:solidFill>
+                  <a:srgbClr val="5C6672"/>
+                </a:solidFill>
+                <a:latin typeface="Noto Sans CJK KR"/>
+              </a:defRPr>
+            </a:pPr>
+            <a:r>
+              <a:t>명령·파일 경로는 슬라이드에서 복사 가능</a:t>
+            </a:r>
+          </a:p>
+        </p:txBody>
+      </p:sp>
+      <p:sp>
+        <p:nvSpPr>
+          <p:cNvPr id="6" name="Rectangle 5"/>
+          <p:cNvSpPr/>
+          <p:nvPr/>
+        </p:nvSpPr>
+        <p:spPr>
+          <a:xfrm>
+            <a:off x="566928" y="1188720"/>
+            <a:ext cx="11064240" cy="347472"/>
+          </a:xfrm>
+          <a:prstGeom prst="rect">
+            <a:avLst/>
+          </a:prstGeom>
+          <a:solidFill>
+            <a:srgbClr val="F4F7FB"/>
+          </a:solidFill>
+          <a:ln>
+            <a:solidFill>
+              <a:srgbClr val="F4F7FB"/>
+            </a:solidFill>
+          </a:ln>
+        </p:spPr>
+        <p:style>
+          <a:lnRef idx="1">
+            <a:schemeClr val="accent1"/>
+          </a:lnRef>
+          <a:fillRef idx="3">
+            <a:schemeClr val="accent1"/>
+          </a:fillRef>
+          <a:effectRef idx="2">
+            <a:schemeClr val="accent1"/>
+          </a:effectRef>
+          <a:fontRef idx="minor">
+            <a:schemeClr val="lt1"/>
+          </a:fontRef>
+        </p:style>
+        <p:txBody>
+          <a:bodyPr rtlCol="0" anchor="ctr" wrap="square" lIns="73152" rIns="73152" tIns="36576" bIns="36576"/>
+          <a:lstStyle/>
+          <a:p>
+            <a:pPr algn="l">
+              <a:spcAft>
+                <a:spcPts val="0"/>
+              </a:spcAft>
+              <a:defRPr sz="1300" b="1">
+                <a:solidFill>
+                  <a:srgbClr val="122C4E"/>
+                </a:solidFill>
+                <a:latin typeface="Noto Sans CJK KR"/>
+              </a:defRPr>
+            </a:pPr>
+            <a:r>
+              <a:t>현재 단계 체크포인트    |    현재 폴더 ~/ros2_curri/my_agv_ws    |    현재 터미널</a:t>
+            </a:r>
+          </a:p>
+        </p:txBody>
+      </p:sp>
+      <p:sp>
+        <p:nvSpPr>
+          <p:cNvPr id="7" name="Rounded Rectangle 6"/>
+          <p:cNvSpPr/>
+          <p:nvPr/>
+        </p:nvSpPr>
+        <p:spPr>
+          <a:xfrm>
+            <a:off x="685800" y="1737360"/>
+            <a:ext cx="10972800" cy="3611880"/>
+          </a:xfrm>
+          <a:prstGeom prst="roundRect">
+            <a:avLst/>
+          </a:prstGeom>
+          <a:solidFill>
+            <a:srgbClr val="F4F7FB"/>
+          </a:solidFill>
+          <a:ln>
+            <a:solidFill>
+              <a:srgbClr val="D2DCE8"/>
+            </a:solidFill>
+          </a:ln>
+        </p:spPr>
+        <p:style>
+          <a:lnRef idx="1">
+            <a:schemeClr val="accent1"/>
+          </a:lnRef>
+          <a:fillRef idx="3">
+            <a:schemeClr val="accent1"/>
+          </a:fillRef>
+          <a:effectRef idx="2">
+            <a:schemeClr val="accent1"/>
+          </a:effectRef>
+          <a:fontRef idx="minor">
+            <a:schemeClr val="lt1"/>
+          </a:fontRef>
+        </p:style>
+        <p:txBody>
+          <a:bodyPr rtlCol="0" anchor="ctr"/>
+          <a:lstStyle/>
+          <a:p>
+            <a:pPr algn="ctr"/>
+          </a:p>
+        </p:txBody>
+      </p:sp>
+      <p:sp>
+        <p:nvSpPr>
+          <p:cNvPr id="8" name="TextBox 7"/>
+          <p:cNvSpPr txBox="1"/>
+          <p:nvPr/>
+        </p:nvSpPr>
+        <p:spPr>
+          <a:xfrm>
+            <a:off x="896112" y="1993392"/>
+            <a:ext cx="10332720" cy="2971800"/>
+          </a:xfrm>
+          <a:prstGeom prst="rect">
+            <a:avLst/>
+          </a:prstGeom>
+          <a:noFill/>
+        </p:spPr>
+        <p:txBody>
+          <a:bodyPr wrap="square" lIns="109728" rIns="109728">
+            <a:spAutoFit/>
+          </a:bodyPr>
+          <a:lstStyle/>
+          <a:p>
+            <a:pPr>
+              <a:spcAft>
+                <a:spcPts val="800"/>
+              </a:spcAft>
+              <a:defRPr sz="1800">
+                <a:solidFill>
+                  <a:srgbClr val="122C4E"/>
+                </a:solidFill>
+                <a:latin typeface="Noto Sans CJK KR"/>
+              </a:defRPr>
+            </a:pPr>
+            <a:r>
+              <a:t>• □ 완료 화면: /detections message 형식과 YOLO enable_yolo/model_path/threshold parameter를 확인한다.</a:t>
+            </a:r>
+          </a:p>
+          <a:p>
+            <a:pPr>
+              <a:spcAft>
+                <a:spcPts val="800"/>
+              </a:spcAft>
+              <a:defRPr sz="1800">
+                <a:solidFill>
+                  <a:srgbClr val="122C4E"/>
+                </a:solidFill>
+                <a:latin typeface="Noto Sans CJK KR"/>
+              </a:defRPr>
+            </a:pPr>
+            <a:r>
+              <a:t>• □ 막혔을 때 비교할 Complete: blocks/E_autonomy_logic/M17_yolo_vision/complete/</a:t>
+            </a:r>
+          </a:p>
+          <a:p>
+            <a:pPr>
+              <a:spcAft>
+                <a:spcPts val="800"/>
+              </a:spcAft>
+              <a:defRPr sz="1800">
+                <a:solidFill>
+                  <a:srgbClr val="122C4E"/>
+                </a:solidFill>
+                <a:latin typeface="Noto Sans CJK KR"/>
+              </a:defRPr>
+            </a:pPr>
+            <a:r>
+              <a:t>• □ 정상 로그·캡처: logs/validation.log, screenshots/validation_terminal.png</a:t>
+            </a:r>
+          </a:p>
+          <a:p>
+            <a:pPr>
+              <a:spcAft>
+                <a:spcPts val="800"/>
+              </a:spcAft>
+              <a:defRPr sz="1800">
+                <a:solidFill>
+                  <a:srgbClr val="122C4E"/>
+                </a:solidFill>
+                <a:latin typeface="Noto Sans CJK KR"/>
+              </a:defRPr>
+            </a:pPr>
+            <a:r>
+              <a:t>• □ 버전 식별: CHECKSUM_or_TAG.txt의 SHA-256 manifest</a:t>
+            </a:r>
+          </a:p>
+          <a:p>
+            <a:pPr>
+              <a:spcAft>
+                <a:spcPts val="800"/>
+              </a:spcAft>
+              <a:defRPr sz="1800">
+                <a:solidFill>
+                  <a:srgbClr val="122C4E"/>
+                </a:solidFill>
+                <a:latin typeface="Noto Sans CJK KR"/>
+              </a:defRPr>
+            </a:pPr>
+            <a:r>
+              <a:t>• □ 다음 시작 조건: M18 safety fusion</a:t>
+            </a:r>
+          </a:p>
+        </p:txBody>
+      </p:sp>
+      <p:sp>
+        <p:nvSpPr>
+          <p:cNvPr id="9" name="TextBox 8"/>
+          <p:cNvSpPr txBox="1"/>
+          <p:nvPr/>
+        </p:nvSpPr>
+        <p:spPr>
+          <a:xfrm>
+            <a:off x="868680" y="5596128"/>
+            <a:ext cx="10515600" cy="338328"/>
+          </a:xfrm>
+          <a:prstGeom prst="rect">
+            <a:avLst/>
+          </a:prstGeom>
+          <a:noFill/>
+        </p:spPr>
+        <p:txBody>
+          <a:bodyPr wrap="square" lIns="73152" rIns="73152" tIns="36576" bIns="36576">
+            <a:spAutoFit/>
+          </a:bodyPr>
+          <a:lstStyle/>
+          <a:p>
+            <a:pPr algn="ctr">
+              <a:spcAft>
+                <a:spcPts val="0"/>
+              </a:spcAft>
+              <a:defRPr sz="1700" b="1">
+                <a:solidFill>
+                  <a:srgbClr val="2A8B5A"/>
+                </a:solidFill>
+                <a:latin typeface="Noto Sans CJK KR"/>
+              </a:defRPr>
+            </a:pPr>
+            <a:r>
+              <a:t>다음 모듈을 시작하기 전, 내 src의 변경사항을 저장하고 현재 완료 조건을 다시 확인합니다.</a:t>
+            </a:r>
+          </a:p>
+        </p:txBody>
+      </p:sp>
+    </p:spTree>
+  </p:cSld>
+  <p:clrMapOvr>
+    <a:masterClrMapping/>
+  </p:clrMapOvr>
+</p:sld>
+</file>
+
+<file path=ppt/slides/slide76.xml><?xml version="1.0" encoding="utf-8"?>
 <p:sld xmlns:a="http://schemas.openxmlformats.org/drawingml/2006/main" xmlns:p="http://schemas.openxmlformats.org/presentationml/2006/main" xmlns:r="http://schemas.openxmlformats.org/officeDocument/2006/relationships">
   <p:cSld>
     <p:spTree>
